--- a/downloads/presentations/modules/gov-400.pptx
+++ b/downloads/presentations/modules/gov-400.pptx
@@ -3425,13 +3425,11 @@
             </a:avLst>
           </a:prstGeom>
           <a:solidFill>
-            <a:srgbClr val="FFFFFF">
-              <a:alpha val="88000"/>
-            </a:srgbClr>
+            <a:srgbClr val="FFFFFF"/>
           </a:solidFill>
           <a:ln w="12700">
             <a:solidFill>
-              <a:srgbClr val="D6E8F2"/>
+              <a:srgbClr val="B9D7E6"/>
             </a:solidFill>
             <a:prstDash val="solid"/>
           </a:ln>
@@ -3439,190 +3437,112 @@
       </p:sp>
       <p:sp>
         <p:nvSpPr>
-          <p:cNvPr id="14" name="Shape 12"/>
-          <p:cNvSpPr/>
-          <p:nvPr/>
-        </p:nvSpPr>
-        <p:spPr>
-          <a:xfrm>
-            <a:off x="7891272" y="3108960"/>
-            <a:ext cx="566928" cy="566928"/>
-          </a:xfrm>
-          <a:prstGeom prst="ellipse">
-            <a:avLst/>
-          </a:prstGeom>
-          <a:solidFill>
-            <a:srgbClr val="0068B7"/>
-          </a:solidFill>
-          <a:ln w="12700">
-            <a:solidFill>
-              <a:srgbClr val="0068B7"/>
-            </a:solidFill>
-            <a:prstDash val="solid"/>
-          </a:ln>
-        </p:spPr>
-      </p:sp>
-      <p:sp>
-        <p:nvSpPr>
-          <p:cNvPr id="15" name="Shape 13"/>
-          <p:cNvSpPr/>
-          <p:nvPr/>
-        </p:nvSpPr>
-        <p:spPr>
-          <a:xfrm>
-            <a:off x="10287000" y="3108960"/>
-            <a:ext cx="566928" cy="566928"/>
-          </a:xfrm>
-          <a:prstGeom prst="ellipse">
-            <a:avLst/>
-          </a:prstGeom>
-          <a:solidFill>
-            <a:srgbClr val="2F8A28"/>
-          </a:solidFill>
-          <a:ln w="12700">
-            <a:solidFill>
-              <a:srgbClr val="2F8A28"/>
-            </a:solidFill>
-            <a:prstDash val="solid"/>
-          </a:ln>
-        </p:spPr>
+          <p:cNvPr id="14" name="Text 12"/>
+          <p:cNvSpPr/>
+          <p:nvPr/>
+        </p:nvSpPr>
+        <p:spPr>
+          <a:xfrm>
+            <a:off x="7799832" y="2935224"/>
+            <a:ext cx="3145536" cy="256032"/>
+          </a:xfrm>
+          <a:prstGeom prst="rect">
+            <a:avLst/>
+          </a:prstGeom>
+          <a:noFill/>
+          <a:ln/>
+        </p:spPr>
+        <p:txBody>
+          <a:bodyPr wrap="square" lIns="0" tIns="0" rIns="0" bIns="0" rtlCol="0" anchor="ctr"/>
+          <a:lstStyle/>
+          <a:p>
+            <a:pPr indent="0" marL="0">
+              <a:buNone/>
+            </a:pPr>
+            <a:r>
+              <a:rPr lang="en-US" sz="1300" b="1" dirty="0">
+                <a:solidFill>
+                  <a:srgbClr val="0068B7"/>
+                </a:solidFill>
+                <a:latin typeface="Aptos" pitchFamily="34" charset="0"/>
+                <a:ea typeface="Aptos" pitchFamily="34" charset="-122"/>
+                <a:cs typeface="Aptos" pitchFamily="34" charset="-120"/>
+              </a:rPr>
+              <a:t>Concept checkpoints</a:t>
+            </a:r>
+            <a:endParaRPr lang="en-US" sz="1300" dirty="0"/>
+          </a:p>
+        </p:txBody>
+      </p:sp>
+      <p:sp>
+        <p:nvSpPr>
+          <p:cNvPr id="15" name="Text 13"/>
+          <p:cNvSpPr/>
+          <p:nvPr/>
+        </p:nvSpPr>
+        <p:spPr>
+          <a:xfrm>
+            <a:off x="7818120" y="3300984"/>
+            <a:ext cx="3090672" cy="877824"/>
+          </a:xfrm>
+          <a:prstGeom prst="rect">
+            <a:avLst/>
+          </a:prstGeom>
+          <a:noFill/>
+          <a:ln/>
+        </p:spPr>
+        <p:txBody>
+          <a:bodyPr wrap="square" lIns="254" tIns="254" rIns="254" bIns="254" rtlCol="0" anchor="t">
+            <a:normAutofit/>
+          </a:bodyPr>
+          <a:lstStyle/>
+          <a:p>
+            <a:r>
+              <a:rPr lang="en-US" sz="1380" dirty="0">
+                <a:solidFill>
+                  <a:srgbClr val="17364A"/>
+                </a:solidFill>
+                <a:latin typeface="Aptos" pitchFamily="34" charset="0"/>
+                <a:ea typeface="Aptos" pitchFamily="34" charset="-122"/>
+                <a:cs typeface="Aptos" pitchFamily="34" charset="-120"/>
+              </a:rPr>
+              <a:t>Purpose explains why the governance body exists, such as protecting public trust,.</a:t>
+            </a:r>
+            <a:endParaRPr lang="en-US" sz="1380" dirty="0"/>
+          </a:p>
+          <a:p>
+            <a:r>
+              <a:rPr lang="en-US" sz="1380" dirty="0">
+                <a:solidFill>
+                  <a:srgbClr val="17364A"/>
+                </a:solidFill>
+                <a:latin typeface="Aptos" pitchFamily="34" charset="0"/>
+                <a:ea typeface="Aptos" pitchFamily="34" charset="-122"/>
+                <a:cs typeface="Aptos" pitchFamily="34" charset="-120"/>
+              </a:rPr>
+              <a:t>For public health, scope should include internally developed AI tools, vendor AI products,.</a:t>
+            </a:r>
+            <a:endParaRPr lang="en-US" sz="1380" dirty="0"/>
+          </a:p>
+          <a:p>
+            <a:r>
+              <a:rPr lang="en-US" sz="1380" dirty="0">
+                <a:solidFill>
+                  <a:srgbClr val="17364A"/>
+                </a:solidFill>
+                <a:latin typeface="Aptos" pitchFamily="34" charset="0"/>
+                <a:ea typeface="Aptos" pitchFamily="34" charset="-122"/>
+                <a:cs typeface="Aptos" pitchFamily="34" charset="-120"/>
+              </a:rPr>
+              <a:t>The operating model should define roles clearly.</a:t>
+            </a:r>
+            <a:endParaRPr lang="en-US" sz="1380" dirty="0"/>
+          </a:p>
+        </p:txBody>
       </p:sp>
       <p:sp>
         <p:nvSpPr>
           <p:cNvPr id="16" name="Shape 14"/>
-          <p:cNvSpPr/>
-          <p:nvPr/>
-        </p:nvSpPr>
-        <p:spPr>
-          <a:xfrm>
-            <a:off x="9089136" y="3456432"/>
-            <a:ext cx="566928" cy="566928"/>
-          </a:xfrm>
-          <a:prstGeom prst="ellipse">
-            <a:avLst/>
-          </a:prstGeom>
-          <a:solidFill>
-            <a:srgbClr val="6A4CA3"/>
-          </a:solidFill>
-          <a:ln w="12700">
-            <a:solidFill>
-              <a:srgbClr val="6A4CA3"/>
-            </a:solidFill>
-            <a:prstDash val="solid"/>
-          </a:ln>
-        </p:spPr>
-      </p:sp>
-      <p:sp>
-        <p:nvSpPr>
-          <p:cNvPr id="17" name="Shape 15"/>
-          <p:cNvSpPr/>
-          <p:nvPr/>
-        </p:nvSpPr>
-        <p:spPr>
-          <a:xfrm>
-            <a:off x="8385048" y="3419856"/>
-            <a:ext cx="1975104" cy="0"/>
-          </a:xfrm>
-          <a:prstGeom prst="line">
-            <a:avLst/>
-          </a:prstGeom>
-          <a:noFill/>
-          <a:ln w="25400">
-            <a:solidFill>
-              <a:srgbClr val="8ABBD8"/>
-            </a:solidFill>
-            <a:prstDash val="solid"/>
-          </a:ln>
-        </p:spPr>
-      </p:sp>
-      <p:sp>
-        <p:nvSpPr>
-          <p:cNvPr id="18" name="Shape 16"/>
-          <p:cNvSpPr/>
-          <p:nvPr/>
-        </p:nvSpPr>
-        <p:spPr>
-          <a:xfrm>
-            <a:off x="8202168" y="3630168"/>
-            <a:ext cx="1170432" cy="118872"/>
-          </a:xfrm>
-          <a:prstGeom prst="line">
-            <a:avLst/>
-          </a:prstGeom>
-          <a:noFill/>
-          <a:ln w="25400">
-            <a:solidFill>
-              <a:srgbClr val="8ABBD8"/>
-            </a:solidFill>
-            <a:prstDash val="solid"/>
-          </a:ln>
-        </p:spPr>
-      </p:sp>
-      <p:sp>
-        <p:nvSpPr>
-          <p:cNvPr id="19" name="Shape 17"/>
-          <p:cNvSpPr/>
-          <p:nvPr/>
-        </p:nvSpPr>
-        <p:spPr>
-          <a:xfrm>
-            <a:off x="10543032" y="3630168"/>
-            <a:ext cx="-1170432" cy="118872"/>
-          </a:xfrm>
-          <a:prstGeom prst="line">
-            <a:avLst/>
-          </a:prstGeom>
-          <a:noFill/>
-          <a:ln w="25400">
-            <a:solidFill>
-              <a:srgbClr val="8ABBD8"/>
-            </a:solidFill>
-            <a:prstDash val="solid"/>
-          </a:ln>
-        </p:spPr>
-      </p:sp>
-      <p:sp>
-        <p:nvSpPr>
-          <p:cNvPr id="20" name="Text 18"/>
-          <p:cNvSpPr/>
-          <p:nvPr/>
-        </p:nvSpPr>
-        <p:spPr>
-          <a:xfrm>
-            <a:off x="7863840" y="4069080"/>
-            <a:ext cx="3017520" cy="164592"/>
-          </a:xfrm>
-          <a:prstGeom prst="rect">
-            <a:avLst/>
-          </a:prstGeom>
-          <a:noFill/>
-          <a:ln/>
-        </p:spPr>
-        <p:txBody>
-          <a:bodyPr wrap="square" lIns="0" tIns="0" rIns="0" bIns="0" rtlCol="0" anchor="ctr"/>
-          <a:lstStyle/>
-          <a:p>
-            <a:pPr algn="ctr" indent="0" marL="0">
-              <a:buNone/>
-            </a:pPr>
-            <a:r>
-              <a:rPr lang="en-US" sz="900" b="1" dirty="0">
-                <a:solidFill>
-                  <a:srgbClr val="003A63"/>
-                </a:solidFill>
-                <a:latin typeface="Aptos" pitchFamily="34" charset="0"/>
-                <a:ea typeface="Aptos" pitchFamily="34" charset="-122"/>
-                <a:cs typeface="Aptos" pitchFamily="34" charset="-120"/>
-              </a:rPr>
-              <a:t>Decision rights</a:t>
-            </a:r>
-            <a:endParaRPr lang="en-US" sz="900" dirty="0"/>
-          </a:p>
-        </p:txBody>
-      </p:sp>
-      <p:sp>
-        <p:nvSpPr>
-          <p:cNvPr id="21" name="Shape 19"/>
           <p:cNvSpPr/>
           <p:nvPr/>
         </p:nvSpPr>
@@ -3649,7 +3569,7 @@
       </p:sp>
       <p:sp>
         <p:nvSpPr>
-          <p:cNvPr id="22" name="Text 20"/>
+          <p:cNvPr id="17" name="Text 15"/>
           <p:cNvSpPr/>
           <p:nvPr/>
         </p:nvSpPr>
@@ -3688,7 +3608,7 @@
       </p:sp>
       <p:sp>
         <p:nvSpPr>
-          <p:cNvPr id="23" name="Text 21"/>
+          <p:cNvPr id="18" name="Text 16"/>
           <p:cNvSpPr/>
           <p:nvPr/>
         </p:nvSpPr>
@@ -4196,13 +4116,11 @@
             </a:avLst>
           </a:prstGeom>
           <a:solidFill>
-            <a:srgbClr val="FFFFFF">
-              <a:alpha val="88000"/>
-            </a:srgbClr>
+            <a:srgbClr val="FFFFFF"/>
           </a:solidFill>
           <a:ln w="12700">
             <a:solidFill>
-              <a:srgbClr val="D6E8F2"/>
+              <a:srgbClr val="B9D7E6"/>
             </a:solidFill>
             <a:prstDash val="solid"/>
           </a:ln>
@@ -4210,190 +4128,112 @@
       </p:sp>
       <p:sp>
         <p:nvSpPr>
-          <p:cNvPr id="14" name="Shape 12"/>
-          <p:cNvSpPr/>
-          <p:nvPr/>
-        </p:nvSpPr>
-        <p:spPr>
-          <a:xfrm>
-            <a:off x="7891272" y="3108960"/>
-            <a:ext cx="566928" cy="566928"/>
-          </a:xfrm>
-          <a:prstGeom prst="ellipse">
-            <a:avLst/>
-          </a:prstGeom>
-          <a:solidFill>
-            <a:srgbClr val="0068B7"/>
-          </a:solidFill>
-          <a:ln w="12700">
-            <a:solidFill>
-              <a:srgbClr val="0068B7"/>
-            </a:solidFill>
-            <a:prstDash val="solid"/>
-          </a:ln>
-        </p:spPr>
-      </p:sp>
-      <p:sp>
-        <p:nvSpPr>
-          <p:cNvPr id="15" name="Shape 13"/>
-          <p:cNvSpPr/>
-          <p:nvPr/>
-        </p:nvSpPr>
-        <p:spPr>
-          <a:xfrm>
-            <a:off x="10287000" y="3108960"/>
-            <a:ext cx="566928" cy="566928"/>
-          </a:xfrm>
-          <a:prstGeom prst="ellipse">
-            <a:avLst/>
-          </a:prstGeom>
-          <a:solidFill>
-            <a:srgbClr val="2F8A28"/>
-          </a:solidFill>
-          <a:ln w="12700">
-            <a:solidFill>
-              <a:srgbClr val="2F8A28"/>
-            </a:solidFill>
-            <a:prstDash val="solid"/>
-          </a:ln>
-        </p:spPr>
+          <p:cNvPr id="14" name="Text 12"/>
+          <p:cNvSpPr/>
+          <p:nvPr/>
+        </p:nvSpPr>
+        <p:spPr>
+          <a:xfrm>
+            <a:off x="7799832" y="2935224"/>
+            <a:ext cx="3145536" cy="256032"/>
+          </a:xfrm>
+          <a:prstGeom prst="rect">
+            <a:avLst/>
+          </a:prstGeom>
+          <a:noFill/>
+          <a:ln/>
+        </p:spPr>
+        <p:txBody>
+          <a:bodyPr wrap="square" lIns="0" tIns="0" rIns="0" bIns="0" rtlCol="0" anchor="ctr"/>
+          <a:lstStyle/>
+          <a:p>
+            <a:pPr indent="0" marL="0">
+              <a:buNone/>
+            </a:pPr>
+            <a:r>
+              <a:rPr lang="en-US" sz="1300" b="1" dirty="0">
+                <a:solidFill>
+                  <a:srgbClr val="0068B7"/>
+                </a:solidFill>
+                <a:latin typeface="Aptos" pitchFamily="34" charset="0"/>
+                <a:ea typeface="Aptos" pitchFamily="34" charset="-122"/>
+                <a:cs typeface="Aptos" pitchFamily="34" charset="-120"/>
+              </a:rPr>
+              <a:t>Concept checkpoints</a:t>
+            </a:r>
+            <a:endParaRPr lang="en-US" sz="1300" dirty="0"/>
+          </a:p>
+        </p:txBody>
+      </p:sp>
+      <p:sp>
+        <p:nvSpPr>
+          <p:cNvPr id="15" name="Text 13"/>
+          <p:cNvSpPr/>
+          <p:nvPr/>
+        </p:nvSpPr>
+        <p:spPr>
+          <a:xfrm>
+            <a:off x="7818120" y="3300984"/>
+            <a:ext cx="3090672" cy="877824"/>
+          </a:xfrm>
+          <a:prstGeom prst="rect">
+            <a:avLst/>
+          </a:prstGeom>
+          <a:noFill/>
+          <a:ln/>
+        </p:spPr>
+        <p:txBody>
+          <a:bodyPr wrap="square" lIns="254" tIns="254" rIns="254" bIns="254" rtlCol="0" anchor="t">
+            <a:normAutofit/>
+          </a:bodyPr>
+          <a:lstStyle/>
+          <a:p>
+            <a:r>
+              <a:rPr lang="en-US" sz="1380" dirty="0">
+                <a:solidFill>
+                  <a:srgbClr val="17364A"/>
+                </a:solidFill>
+                <a:latin typeface="Aptos" pitchFamily="34" charset="0"/>
+                <a:ea typeface="Aptos" pitchFamily="34" charset="-122"/>
+                <a:cs typeface="Aptos" pitchFamily="34" charset="-120"/>
+              </a:rPr>
+              <a:t>A charter may sound strong, but if staff do not know when to submit use cases, who.</a:t>
+            </a:r>
+            <a:endParaRPr lang="en-US" sz="1380" dirty="0"/>
+          </a:p>
+          <a:p>
+            <a:r>
+              <a:rPr lang="en-US" sz="1380" dirty="0">
+                <a:solidFill>
+                  <a:srgbClr val="17364A"/>
+                </a:solidFill>
+                <a:latin typeface="Aptos" pitchFamily="34" charset="0"/>
+                <a:ea typeface="Aptos" pitchFamily="34" charset="-122"/>
+                <a:cs typeface="Aptos" pitchFamily="34" charset="-120"/>
+              </a:rPr>
+              <a:t>A practical guardrail is to create a simple intake form, review rubric, meeting cadence,.</a:t>
+            </a:r>
+            <a:endParaRPr lang="en-US" sz="1380" dirty="0"/>
+          </a:p>
+          <a:p>
+            <a:r>
+              <a:rPr lang="en-US" sz="1380" dirty="0">
+                <a:solidFill>
+                  <a:srgbClr val="17364A"/>
+                </a:solidFill>
+                <a:latin typeface="Aptos" pitchFamily="34" charset="0"/>
+                <a:ea typeface="Aptos" pitchFamily="34" charset="-122"/>
+                <a:cs typeface="Aptos" pitchFamily="34" charset="-120"/>
+              </a:rPr>
+              <a:t>Another failure mode is over-centralization.</a:t>
+            </a:r>
+            <a:endParaRPr lang="en-US" sz="1380" dirty="0"/>
+          </a:p>
+        </p:txBody>
       </p:sp>
       <p:sp>
         <p:nvSpPr>
           <p:cNvPr id="16" name="Shape 14"/>
-          <p:cNvSpPr/>
-          <p:nvPr/>
-        </p:nvSpPr>
-        <p:spPr>
-          <a:xfrm>
-            <a:off x="9089136" y="3456432"/>
-            <a:ext cx="566928" cy="566928"/>
-          </a:xfrm>
-          <a:prstGeom prst="ellipse">
-            <a:avLst/>
-          </a:prstGeom>
-          <a:solidFill>
-            <a:srgbClr val="6A4CA3"/>
-          </a:solidFill>
-          <a:ln w="12700">
-            <a:solidFill>
-              <a:srgbClr val="6A4CA3"/>
-            </a:solidFill>
-            <a:prstDash val="solid"/>
-          </a:ln>
-        </p:spPr>
-      </p:sp>
-      <p:sp>
-        <p:nvSpPr>
-          <p:cNvPr id="17" name="Shape 15"/>
-          <p:cNvSpPr/>
-          <p:nvPr/>
-        </p:nvSpPr>
-        <p:spPr>
-          <a:xfrm>
-            <a:off x="8385048" y="3419856"/>
-            <a:ext cx="1975104" cy="0"/>
-          </a:xfrm>
-          <a:prstGeom prst="line">
-            <a:avLst/>
-          </a:prstGeom>
-          <a:noFill/>
-          <a:ln w="25400">
-            <a:solidFill>
-              <a:srgbClr val="8ABBD8"/>
-            </a:solidFill>
-            <a:prstDash val="solid"/>
-          </a:ln>
-        </p:spPr>
-      </p:sp>
-      <p:sp>
-        <p:nvSpPr>
-          <p:cNvPr id="18" name="Shape 16"/>
-          <p:cNvSpPr/>
-          <p:nvPr/>
-        </p:nvSpPr>
-        <p:spPr>
-          <a:xfrm>
-            <a:off x="8202168" y="3630168"/>
-            <a:ext cx="1170432" cy="118872"/>
-          </a:xfrm>
-          <a:prstGeom prst="line">
-            <a:avLst/>
-          </a:prstGeom>
-          <a:noFill/>
-          <a:ln w="25400">
-            <a:solidFill>
-              <a:srgbClr val="8ABBD8"/>
-            </a:solidFill>
-            <a:prstDash val="solid"/>
-          </a:ln>
-        </p:spPr>
-      </p:sp>
-      <p:sp>
-        <p:nvSpPr>
-          <p:cNvPr id="19" name="Shape 17"/>
-          <p:cNvSpPr/>
-          <p:nvPr/>
-        </p:nvSpPr>
-        <p:spPr>
-          <a:xfrm>
-            <a:off x="10543032" y="3630168"/>
-            <a:ext cx="-1170432" cy="118872"/>
-          </a:xfrm>
-          <a:prstGeom prst="line">
-            <a:avLst/>
-          </a:prstGeom>
-          <a:noFill/>
-          <a:ln w="25400">
-            <a:solidFill>
-              <a:srgbClr val="8ABBD8"/>
-            </a:solidFill>
-            <a:prstDash val="solid"/>
-          </a:ln>
-        </p:spPr>
-      </p:sp>
-      <p:sp>
-        <p:nvSpPr>
-          <p:cNvPr id="20" name="Text 18"/>
-          <p:cNvSpPr/>
-          <p:nvPr/>
-        </p:nvSpPr>
-        <p:spPr>
-          <a:xfrm>
-            <a:off x="7863840" y="4069080"/>
-            <a:ext cx="3017520" cy="164592"/>
-          </a:xfrm>
-          <a:prstGeom prst="rect">
-            <a:avLst/>
-          </a:prstGeom>
-          <a:noFill/>
-          <a:ln/>
-        </p:spPr>
-        <p:txBody>
-          <a:bodyPr wrap="square" lIns="0" tIns="0" rIns="0" bIns="0" rtlCol="0" anchor="ctr"/>
-          <a:lstStyle/>
-          <a:p>
-            <a:pPr algn="ctr" indent="0" marL="0">
-              <a:buNone/>
-            </a:pPr>
-            <a:r>
-              <a:rPr lang="en-US" sz="900" b="1" dirty="0">
-                <a:solidFill>
-                  <a:srgbClr val="003A63"/>
-                </a:solidFill>
-                <a:latin typeface="Aptos" pitchFamily="34" charset="0"/>
-                <a:ea typeface="Aptos" pitchFamily="34" charset="-122"/>
-                <a:cs typeface="Aptos" pitchFamily="34" charset="-120"/>
-              </a:rPr>
-              <a:t>Decision rights</a:t>
-            </a:r>
-            <a:endParaRPr lang="en-US" sz="900" dirty="0"/>
-          </a:p>
-        </p:txBody>
-      </p:sp>
-      <p:sp>
-        <p:nvSpPr>
-          <p:cNvPr id="21" name="Shape 19"/>
           <p:cNvSpPr/>
           <p:nvPr/>
         </p:nvSpPr>
@@ -4420,7 +4260,7 @@
       </p:sp>
       <p:sp>
         <p:nvSpPr>
-          <p:cNvPr id="22" name="Text 20"/>
+          <p:cNvPr id="17" name="Text 15"/>
           <p:cNvSpPr/>
           <p:nvPr/>
         </p:nvSpPr>
@@ -4459,7 +4299,7 @@
       </p:sp>
       <p:sp>
         <p:nvSpPr>
-          <p:cNvPr id="23" name="Text 21"/>
+          <p:cNvPr id="18" name="Text 16"/>
           <p:cNvSpPr/>
           <p:nvPr/>
         </p:nvSpPr>
@@ -4967,13 +4807,11 @@
             </a:avLst>
           </a:prstGeom>
           <a:solidFill>
-            <a:srgbClr val="FFFFFF">
-              <a:alpha val="88000"/>
-            </a:srgbClr>
+            <a:srgbClr val="FFFFFF"/>
           </a:solidFill>
           <a:ln w="12700">
             <a:solidFill>
-              <a:srgbClr val="D6E8F2"/>
+              <a:srgbClr val="B9D7E6"/>
             </a:solidFill>
             <a:prstDash val="solid"/>
           </a:ln>
@@ -4981,190 +4819,112 @@
       </p:sp>
       <p:sp>
         <p:nvSpPr>
-          <p:cNvPr id="14" name="Shape 12"/>
-          <p:cNvSpPr/>
-          <p:nvPr/>
-        </p:nvSpPr>
-        <p:spPr>
-          <a:xfrm>
-            <a:off x="7891272" y="3108960"/>
-            <a:ext cx="566928" cy="566928"/>
-          </a:xfrm>
-          <a:prstGeom prst="ellipse">
-            <a:avLst/>
-          </a:prstGeom>
-          <a:solidFill>
-            <a:srgbClr val="0068B7"/>
-          </a:solidFill>
-          <a:ln w="12700">
-            <a:solidFill>
-              <a:srgbClr val="0068B7"/>
-            </a:solidFill>
-            <a:prstDash val="solid"/>
-          </a:ln>
-        </p:spPr>
-      </p:sp>
-      <p:sp>
-        <p:nvSpPr>
-          <p:cNvPr id="15" name="Shape 13"/>
-          <p:cNvSpPr/>
-          <p:nvPr/>
-        </p:nvSpPr>
-        <p:spPr>
-          <a:xfrm>
-            <a:off x="10287000" y="3108960"/>
-            <a:ext cx="566928" cy="566928"/>
-          </a:xfrm>
-          <a:prstGeom prst="ellipse">
-            <a:avLst/>
-          </a:prstGeom>
-          <a:solidFill>
-            <a:srgbClr val="2F8A28"/>
-          </a:solidFill>
-          <a:ln w="12700">
-            <a:solidFill>
-              <a:srgbClr val="2F8A28"/>
-            </a:solidFill>
-            <a:prstDash val="solid"/>
-          </a:ln>
-        </p:spPr>
+          <p:cNvPr id="14" name="Text 12"/>
+          <p:cNvSpPr/>
+          <p:nvPr/>
+        </p:nvSpPr>
+        <p:spPr>
+          <a:xfrm>
+            <a:off x="7799832" y="2935224"/>
+            <a:ext cx="3145536" cy="256032"/>
+          </a:xfrm>
+          <a:prstGeom prst="rect">
+            <a:avLst/>
+          </a:prstGeom>
+          <a:noFill/>
+          <a:ln/>
+        </p:spPr>
+        <p:txBody>
+          <a:bodyPr wrap="square" lIns="0" tIns="0" rIns="0" bIns="0" rtlCol="0" anchor="ctr"/>
+          <a:lstStyle/>
+          <a:p>
+            <a:pPr indent="0" marL="0">
+              <a:buNone/>
+            </a:pPr>
+            <a:r>
+              <a:rPr lang="en-US" sz="1300" b="1" dirty="0">
+                <a:solidFill>
+                  <a:srgbClr val="0068B7"/>
+                </a:solidFill>
+                <a:latin typeface="Aptos" pitchFamily="34" charset="0"/>
+                <a:ea typeface="Aptos" pitchFamily="34" charset="-122"/>
+                <a:cs typeface="Aptos" pitchFamily="34" charset="-120"/>
+              </a:rPr>
+              <a:t>Concept checkpoints</a:t>
+            </a:r>
+            <a:endParaRPr lang="en-US" sz="1300" dirty="0"/>
+          </a:p>
+        </p:txBody>
+      </p:sp>
+      <p:sp>
+        <p:nvSpPr>
+          <p:cNvPr id="15" name="Text 13"/>
+          <p:cNvSpPr/>
+          <p:nvPr/>
+        </p:nvSpPr>
+        <p:spPr>
+          <a:xfrm>
+            <a:off x="7818120" y="3300984"/>
+            <a:ext cx="3090672" cy="877824"/>
+          </a:xfrm>
+          <a:prstGeom prst="rect">
+            <a:avLst/>
+          </a:prstGeom>
+          <a:noFill/>
+          <a:ln/>
+        </p:spPr>
+        <p:txBody>
+          <a:bodyPr wrap="square" lIns="254" tIns="254" rIns="254" bIns="254" rtlCol="0" anchor="t">
+            <a:normAutofit/>
+          </a:bodyPr>
+          <a:lstStyle/>
+          <a:p>
+            <a:r>
+              <a:rPr lang="en-US" sz="1380" dirty="0">
+                <a:solidFill>
+                  <a:srgbClr val="17364A"/>
+                </a:solidFill>
+                <a:latin typeface="Aptos" pitchFamily="34" charset="0"/>
+                <a:ea typeface="Aptos" pitchFamily="34" charset="-122"/>
+                <a:cs typeface="Aptos" pitchFamily="34" charset="-120"/>
+              </a:rPr>
+              <a:t>Generative AI governance should define approved tools, prohibited data, review.</a:t>
+            </a:r>
+            <a:endParaRPr lang="en-US" sz="1380" dirty="0"/>
+          </a:p>
+          <a:p>
+            <a:r>
+              <a:rPr lang="en-US" sz="1380" dirty="0">
+                <a:solidFill>
+                  <a:srgbClr val="17364A"/>
+                </a:solidFill>
+                <a:latin typeface="Aptos" pitchFamily="34" charset="0"/>
+                <a:ea typeface="Aptos" pitchFamily="34" charset="-122"/>
+                <a:cs typeface="Aptos" pitchFamily="34" charset="-120"/>
+              </a:rPr>
+              <a:t>Predictive model governance should require validation, subgroup performance review,.</a:t>
+            </a:r>
+            <a:endParaRPr lang="en-US" sz="1380" dirty="0"/>
+          </a:p>
+          <a:p>
+            <a:r>
+              <a:rPr lang="en-US" sz="1380" dirty="0">
+                <a:solidFill>
+                  <a:srgbClr val="17364A"/>
+                </a:solidFill>
+                <a:latin typeface="Aptos" pitchFamily="34" charset="0"/>
+                <a:ea typeface="Aptos" pitchFamily="34" charset="-122"/>
+                <a:cs typeface="Aptos" pitchFamily="34" charset="-120"/>
+              </a:rPr>
+              <a:t>Agentic AI governance should define allowed actions, approval checkpoints, logging,.</a:t>
+            </a:r>
+            <a:endParaRPr lang="en-US" sz="1380" dirty="0"/>
+          </a:p>
+        </p:txBody>
       </p:sp>
       <p:sp>
         <p:nvSpPr>
           <p:cNvPr id="16" name="Shape 14"/>
-          <p:cNvSpPr/>
-          <p:nvPr/>
-        </p:nvSpPr>
-        <p:spPr>
-          <a:xfrm>
-            <a:off x="9089136" y="3456432"/>
-            <a:ext cx="566928" cy="566928"/>
-          </a:xfrm>
-          <a:prstGeom prst="ellipse">
-            <a:avLst/>
-          </a:prstGeom>
-          <a:solidFill>
-            <a:srgbClr val="6A4CA3"/>
-          </a:solidFill>
-          <a:ln w="12700">
-            <a:solidFill>
-              <a:srgbClr val="6A4CA3"/>
-            </a:solidFill>
-            <a:prstDash val="solid"/>
-          </a:ln>
-        </p:spPr>
-      </p:sp>
-      <p:sp>
-        <p:nvSpPr>
-          <p:cNvPr id="17" name="Shape 15"/>
-          <p:cNvSpPr/>
-          <p:nvPr/>
-        </p:nvSpPr>
-        <p:spPr>
-          <a:xfrm>
-            <a:off x="8385048" y="3419856"/>
-            <a:ext cx="1975104" cy="0"/>
-          </a:xfrm>
-          <a:prstGeom prst="line">
-            <a:avLst/>
-          </a:prstGeom>
-          <a:noFill/>
-          <a:ln w="25400">
-            <a:solidFill>
-              <a:srgbClr val="8ABBD8"/>
-            </a:solidFill>
-            <a:prstDash val="solid"/>
-          </a:ln>
-        </p:spPr>
-      </p:sp>
-      <p:sp>
-        <p:nvSpPr>
-          <p:cNvPr id="18" name="Shape 16"/>
-          <p:cNvSpPr/>
-          <p:nvPr/>
-        </p:nvSpPr>
-        <p:spPr>
-          <a:xfrm>
-            <a:off x="8202168" y="3630168"/>
-            <a:ext cx="1170432" cy="118872"/>
-          </a:xfrm>
-          <a:prstGeom prst="line">
-            <a:avLst/>
-          </a:prstGeom>
-          <a:noFill/>
-          <a:ln w="25400">
-            <a:solidFill>
-              <a:srgbClr val="8ABBD8"/>
-            </a:solidFill>
-            <a:prstDash val="solid"/>
-          </a:ln>
-        </p:spPr>
-      </p:sp>
-      <p:sp>
-        <p:nvSpPr>
-          <p:cNvPr id="19" name="Shape 17"/>
-          <p:cNvSpPr/>
-          <p:nvPr/>
-        </p:nvSpPr>
-        <p:spPr>
-          <a:xfrm>
-            <a:off x="10543032" y="3630168"/>
-            <a:ext cx="-1170432" cy="118872"/>
-          </a:xfrm>
-          <a:prstGeom prst="line">
-            <a:avLst/>
-          </a:prstGeom>
-          <a:noFill/>
-          <a:ln w="25400">
-            <a:solidFill>
-              <a:srgbClr val="8ABBD8"/>
-            </a:solidFill>
-            <a:prstDash val="solid"/>
-          </a:ln>
-        </p:spPr>
-      </p:sp>
-      <p:sp>
-        <p:nvSpPr>
-          <p:cNvPr id="20" name="Text 18"/>
-          <p:cNvSpPr/>
-          <p:nvPr/>
-        </p:nvSpPr>
-        <p:spPr>
-          <a:xfrm>
-            <a:off x="7863840" y="4069080"/>
-            <a:ext cx="3017520" cy="164592"/>
-          </a:xfrm>
-          <a:prstGeom prst="rect">
-            <a:avLst/>
-          </a:prstGeom>
-          <a:noFill/>
-          <a:ln/>
-        </p:spPr>
-        <p:txBody>
-          <a:bodyPr wrap="square" lIns="0" tIns="0" rIns="0" bIns="0" rtlCol="0" anchor="ctr"/>
-          <a:lstStyle/>
-          <a:p>
-            <a:pPr algn="ctr" indent="0" marL="0">
-              <a:buNone/>
-            </a:pPr>
-            <a:r>
-              <a:rPr lang="en-US" sz="900" b="1" dirty="0">
-                <a:solidFill>
-                  <a:srgbClr val="003A63"/>
-                </a:solidFill>
-                <a:latin typeface="Aptos" pitchFamily="34" charset="0"/>
-                <a:ea typeface="Aptos" pitchFamily="34" charset="-122"/>
-                <a:cs typeface="Aptos" pitchFamily="34" charset="-120"/>
-              </a:rPr>
-              <a:t>Decision rights</a:t>
-            </a:r>
-            <a:endParaRPr lang="en-US" sz="900" dirty="0"/>
-          </a:p>
-        </p:txBody>
-      </p:sp>
-      <p:sp>
-        <p:nvSpPr>
-          <p:cNvPr id="21" name="Shape 19"/>
           <p:cNvSpPr/>
           <p:nvPr/>
         </p:nvSpPr>
@@ -5191,7 +4951,7 @@
       </p:sp>
       <p:sp>
         <p:nvSpPr>
-          <p:cNvPr id="22" name="Text 20"/>
+          <p:cNvPr id="17" name="Text 15"/>
           <p:cNvSpPr/>
           <p:nvPr/>
         </p:nvSpPr>
@@ -5230,7 +4990,7 @@
       </p:sp>
       <p:sp>
         <p:nvSpPr>
-          <p:cNvPr id="23" name="Text 21"/>
+          <p:cNvPr id="18" name="Text 16"/>
           <p:cNvSpPr/>
           <p:nvPr/>
         </p:nvSpPr>
@@ -5738,13 +5498,11 @@
             </a:avLst>
           </a:prstGeom>
           <a:solidFill>
-            <a:srgbClr val="FFFFFF">
-              <a:alpha val="88000"/>
-            </a:srgbClr>
+            <a:srgbClr val="FFFFFF"/>
           </a:solidFill>
           <a:ln w="12700">
             <a:solidFill>
-              <a:srgbClr val="D6E8F2"/>
+              <a:srgbClr val="B9D7E6"/>
             </a:solidFill>
             <a:prstDash val="solid"/>
           </a:ln>
@@ -5752,190 +5510,112 @@
       </p:sp>
       <p:sp>
         <p:nvSpPr>
-          <p:cNvPr id="14" name="Shape 12"/>
-          <p:cNvSpPr/>
-          <p:nvPr/>
-        </p:nvSpPr>
-        <p:spPr>
-          <a:xfrm>
-            <a:off x="7891272" y="3108960"/>
-            <a:ext cx="566928" cy="566928"/>
-          </a:xfrm>
-          <a:prstGeom prst="ellipse">
-            <a:avLst/>
-          </a:prstGeom>
-          <a:solidFill>
-            <a:srgbClr val="0068B7"/>
-          </a:solidFill>
-          <a:ln w="12700">
-            <a:solidFill>
-              <a:srgbClr val="0068B7"/>
-            </a:solidFill>
-            <a:prstDash val="solid"/>
-          </a:ln>
-        </p:spPr>
-      </p:sp>
-      <p:sp>
-        <p:nvSpPr>
-          <p:cNvPr id="15" name="Shape 13"/>
-          <p:cNvSpPr/>
-          <p:nvPr/>
-        </p:nvSpPr>
-        <p:spPr>
-          <a:xfrm>
-            <a:off x="10287000" y="3108960"/>
-            <a:ext cx="566928" cy="566928"/>
-          </a:xfrm>
-          <a:prstGeom prst="ellipse">
-            <a:avLst/>
-          </a:prstGeom>
-          <a:solidFill>
-            <a:srgbClr val="2F8A28"/>
-          </a:solidFill>
-          <a:ln w="12700">
-            <a:solidFill>
-              <a:srgbClr val="2F8A28"/>
-            </a:solidFill>
-            <a:prstDash val="solid"/>
-          </a:ln>
-        </p:spPr>
+          <p:cNvPr id="14" name="Text 12"/>
+          <p:cNvSpPr/>
+          <p:nvPr/>
+        </p:nvSpPr>
+        <p:spPr>
+          <a:xfrm>
+            <a:off x="7799832" y="2935224"/>
+            <a:ext cx="3145536" cy="256032"/>
+          </a:xfrm>
+          <a:prstGeom prst="rect">
+            <a:avLst/>
+          </a:prstGeom>
+          <a:noFill/>
+          <a:ln/>
+        </p:spPr>
+        <p:txBody>
+          <a:bodyPr wrap="square" lIns="0" tIns="0" rIns="0" bIns="0" rtlCol="0" anchor="ctr"/>
+          <a:lstStyle/>
+          <a:p>
+            <a:pPr indent="0" marL="0">
+              <a:buNone/>
+            </a:pPr>
+            <a:r>
+              <a:rPr lang="en-US" sz="1300" b="1" dirty="0">
+                <a:solidFill>
+                  <a:srgbClr val="0068B7"/>
+                </a:solidFill>
+                <a:latin typeface="Aptos" pitchFamily="34" charset="0"/>
+                <a:ea typeface="Aptos" pitchFamily="34" charset="-122"/>
+                <a:cs typeface="Aptos" pitchFamily="34" charset="-120"/>
+              </a:rPr>
+              <a:t>Concept checkpoints</a:t>
+            </a:r>
+            <a:endParaRPr lang="en-US" sz="1300" dirty="0"/>
+          </a:p>
+        </p:txBody>
+      </p:sp>
+      <p:sp>
+        <p:nvSpPr>
+          <p:cNvPr id="15" name="Text 13"/>
+          <p:cNvSpPr/>
+          <p:nvPr/>
+        </p:nvSpPr>
+        <p:spPr>
+          <a:xfrm>
+            <a:off x="7818120" y="3300984"/>
+            <a:ext cx="3090672" cy="877824"/>
+          </a:xfrm>
+          <a:prstGeom prst="rect">
+            <a:avLst/>
+          </a:prstGeom>
+          <a:noFill/>
+          <a:ln/>
+        </p:spPr>
+        <p:txBody>
+          <a:bodyPr wrap="square" lIns="254" tIns="254" rIns="254" bIns="254" rtlCol="0" anchor="t">
+            <a:normAutofit/>
+          </a:bodyPr>
+          <a:lstStyle/>
+          <a:p>
+            <a:r>
+              <a:rPr lang="en-US" sz="1380" dirty="0">
+                <a:solidFill>
+                  <a:srgbClr val="17364A"/>
+                </a:solidFill>
+                <a:latin typeface="Aptos" pitchFamily="34" charset="0"/>
+                <a:ea typeface="Aptos" pitchFamily="34" charset="-122"/>
+                <a:cs typeface="Aptos" pitchFamily="34" charset="-120"/>
+              </a:rPr>
+              <a:t>Which current or proposed AI use case in your agency raises this leadership or governance.</a:t>
+            </a:r>
+            <a:endParaRPr lang="en-US" sz="1380" dirty="0"/>
+          </a:p>
+          <a:p>
+            <a:r>
+              <a:rPr lang="en-US" sz="1380" dirty="0">
+                <a:solidFill>
+                  <a:srgbClr val="17364A"/>
+                </a:solidFill>
+                <a:latin typeface="Aptos" pitchFamily="34" charset="0"/>
+                <a:ea typeface="Aptos" pitchFamily="34" charset="-122"/>
+                <a:cs typeface="Aptos" pitchFamily="34" charset="-120"/>
+              </a:rPr>
+              <a:t>Who currently has authority to make decisions about this issue, and is that authority.</a:t>
+            </a:r>
+            <a:endParaRPr lang="en-US" sz="1380" dirty="0"/>
+          </a:p>
+          <a:p>
+            <a:r>
+              <a:rPr lang="en-US" sz="1380" dirty="0">
+                <a:solidFill>
+                  <a:srgbClr val="17364A"/>
+                </a:solidFill>
+                <a:latin typeface="Aptos" pitchFamily="34" charset="0"/>
+                <a:ea typeface="Aptos" pitchFamily="34" charset="-122"/>
+                <a:cs typeface="Aptos" pitchFamily="34" charset="-120"/>
+              </a:rPr>
+              <a:t>What evidence would governance or leadership need before approving the use case?</a:t>
+            </a:r>
+            <a:endParaRPr lang="en-US" sz="1380" dirty="0"/>
+          </a:p>
+        </p:txBody>
       </p:sp>
       <p:sp>
         <p:nvSpPr>
           <p:cNvPr id="16" name="Shape 14"/>
-          <p:cNvSpPr/>
-          <p:nvPr/>
-        </p:nvSpPr>
-        <p:spPr>
-          <a:xfrm>
-            <a:off x="9089136" y="3456432"/>
-            <a:ext cx="566928" cy="566928"/>
-          </a:xfrm>
-          <a:prstGeom prst="ellipse">
-            <a:avLst/>
-          </a:prstGeom>
-          <a:solidFill>
-            <a:srgbClr val="6A4CA3"/>
-          </a:solidFill>
-          <a:ln w="12700">
-            <a:solidFill>
-              <a:srgbClr val="6A4CA3"/>
-            </a:solidFill>
-            <a:prstDash val="solid"/>
-          </a:ln>
-        </p:spPr>
-      </p:sp>
-      <p:sp>
-        <p:nvSpPr>
-          <p:cNvPr id="17" name="Shape 15"/>
-          <p:cNvSpPr/>
-          <p:nvPr/>
-        </p:nvSpPr>
-        <p:spPr>
-          <a:xfrm>
-            <a:off x="8385048" y="3419856"/>
-            <a:ext cx="1975104" cy="0"/>
-          </a:xfrm>
-          <a:prstGeom prst="line">
-            <a:avLst/>
-          </a:prstGeom>
-          <a:noFill/>
-          <a:ln w="25400">
-            <a:solidFill>
-              <a:srgbClr val="8ABBD8"/>
-            </a:solidFill>
-            <a:prstDash val="solid"/>
-          </a:ln>
-        </p:spPr>
-      </p:sp>
-      <p:sp>
-        <p:nvSpPr>
-          <p:cNvPr id="18" name="Shape 16"/>
-          <p:cNvSpPr/>
-          <p:nvPr/>
-        </p:nvSpPr>
-        <p:spPr>
-          <a:xfrm>
-            <a:off x="8202168" y="3630168"/>
-            <a:ext cx="1170432" cy="118872"/>
-          </a:xfrm>
-          <a:prstGeom prst="line">
-            <a:avLst/>
-          </a:prstGeom>
-          <a:noFill/>
-          <a:ln w="25400">
-            <a:solidFill>
-              <a:srgbClr val="8ABBD8"/>
-            </a:solidFill>
-            <a:prstDash val="solid"/>
-          </a:ln>
-        </p:spPr>
-      </p:sp>
-      <p:sp>
-        <p:nvSpPr>
-          <p:cNvPr id="19" name="Shape 17"/>
-          <p:cNvSpPr/>
-          <p:nvPr/>
-        </p:nvSpPr>
-        <p:spPr>
-          <a:xfrm>
-            <a:off x="10543032" y="3630168"/>
-            <a:ext cx="-1170432" cy="118872"/>
-          </a:xfrm>
-          <a:prstGeom prst="line">
-            <a:avLst/>
-          </a:prstGeom>
-          <a:noFill/>
-          <a:ln w="25400">
-            <a:solidFill>
-              <a:srgbClr val="8ABBD8"/>
-            </a:solidFill>
-            <a:prstDash val="solid"/>
-          </a:ln>
-        </p:spPr>
-      </p:sp>
-      <p:sp>
-        <p:nvSpPr>
-          <p:cNvPr id="20" name="Text 18"/>
-          <p:cNvSpPr/>
-          <p:nvPr/>
-        </p:nvSpPr>
-        <p:spPr>
-          <a:xfrm>
-            <a:off x="7863840" y="4069080"/>
-            <a:ext cx="3017520" cy="164592"/>
-          </a:xfrm>
-          <a:prstGeom prst="rect">
-            <a:avLst/>
-          </a:prstGeom>
-          <a:noFill/>
-          <a:ln/>
-        </p:spPr>
-        <p:txBody>
-          <a:bodyPr wrap="square" lIns="0" tIns="0" rIns="0" bIns="0" rtlCol="0" anchor="ctr"/>
-          <a:lstStyle/>
-          <a:p>
-            <a:pPr algn="ctr" indent="0" marL="0">
-              <a:buNone/>
-            </a:pPr>
-            <a:r>
-              <a:rPr lang="en-US" sz="900" b="1" dirty="0">
-                <a:solidFill>
-                  <a:srgbClr val="003A63"/>
-                </a:solidFill>
-                <a:latin typeface="Aptos" pitchFamily="34" charset="0"/>
-                <a:ea typeface="Aptos" pitchFamily="34" charset="-122"/>
-                <a:cs typeface="Aptos" pitchFamily="34" charset="-120"/>
-              </a:rPr>
-              <a:t>Decision rights</a:t>
-            </a:r>
-            <a:endParaRPr lang="en-US" sz="900" dirty="0"/>
-          </a:p>
-        </p:txBody>
-      </p:sp>
-      <p:sp>
-        <p:nvSpPr>
-          <p:cNvPr id="21" name="Shape 19"/>
           <p:cNvSpPr/>
           <p:nvPr/>
         </p:nvSpPr>
@@ -5962,7 +5642,7 @@
       </p:sp>
       <p:sp>
         <p:nvSpPr>
-          <p:cNvPr id="22" name="Text 20"/>
+          <p:cNvPr id="17" name="Text 15"/>
           <p:cNvSpPr/>
           <p:nvPr/>
         </p:nvSpPr>
@@ -6001,7 +5681,7 @@
       </p:sp>
       <p:sp>
         <p:nvSpPr>
-          <p:cNvPr id="23" name="Text 21"/>
+          <p:cNvPr id="18" name="Text 16"/>
           <p:cNvSpPr/>
           <p:nvPr/>
         </p:nvSpPr>
@@ -6495,13 +6175,11 @@
             </a:avLst>
           </a:prstGeom>
           <a:solidFill>
-            <a:srgbClr val="FFFFFF">
-              <a:alpha val="88000"/>
-            </a:srgbClr>
+            <a:srgbClr val="FFFFFF"/>
           </a:solidFill>
           <a:ln w="12700">
             <a:solidFill>
-              <a:srgbClr val="D6E8F2"/>
+              <a:srgbClr val="B9D7E6"/>
             </a:solidFill>
             <a:prstDash val="solid"/>
           </a:ln>
@@ -6509,190 +6187,98 @@
       </p:sp>
       <p:sp>
         <p:nvSpPr>
-          <p:cNvPr id="14" name="Shape 12"/>
-          <p:cNvSpPr/>
-          <p:nvPr/>
-        </p:nvSpPr>
-        <p:spPr>
-          <a:xfrm>
-            <a:off x="7891272" y="3108960"/>
-            <a:ext cx="566928" cy="566928"/>
-          </a:xfrm>
-          <a:prstGeom prst="ellipse">
-            <a:avLst/>
-          </a:prstGeom>
-          <a:solidFill>
-            <a:srgbClr val="0068B7"/>
-          </a:solidFill>
-          <a:ln w="12700">
-            <a:solidFill>
-              <a:srgbClr val="0068B7"/>
-            </a:solidFill>
-            <a:prstDash val="solid"/>
-          </a:ln>
-        </p:spPr>
-      </p:sp>
-      <p:sp>
-        <p:nvSpPr>
-          <p:cNvPr id="15" name="Shape 13"/>
-          <p:cNvSpPr/>
-          <p:nvPr/>
-        </p:nvSpPr>
-        <p:spPr>
-          <a:xfrm>
-            <a:off x="10287000" y="3108960"/>
-            <a:ext cx="566928" cy="566928"/>
-          </a:xfrm>
-          <a:prstGeom prst="ellipse">
-            <a:avLst/>
-          </a:prstGeom>
-          <a:solidFill>
-            <a:srgbClr val="2F8A28"/>
-          </a:solidFill>
-          <a:ln w="12700">
-            <a:solidFill>
-              <a:srgbClr val="2F8A28"/>
-            </a:solidFill>
-            <a:prstDash val="solid"/>
-          </a:ln>
-        </p:spPr>
+          <p:cNvPr id="14" name="Text 12"/>
+          <p:cNvSpPr/>
+          <p:nvPr/>
+        </p:nvSpPr>
+        <p:spPr>
+          <a:xfrm>
+            <a:off x="7799832" y="2935224"/>
+            <a:ext cx="3145536" cy="256032"/>
+          </a:xfrm>
+          <a:prstGeom prst="rect">
+            <a:avLst/>
+          </a:prstGeom>
+          <a:noFill/>
+          <a:ln/>
+        </p:spPr>
+        <p:txBody>
+          <a:bodyPr wrap="square" lIns="0" tIns="0" rIns="0" bIns="0" rtlCol="0" anchor="ctr"/>
+          <a:lstStyle/>
+          <a:p>
+            <a:pPr indent="0" marL="0">
+              <a:buNone/>
+            </a:pPr>
+            <a:r>
+              <a:rPr lang="en-US" sz="1300" b="1" dirty="0">
+                <a:solidFill>
+                  <a:srgbClr val="0068B7"/>
+                </a:solidFill>
+                <a:latin typeface="Aptos" pitchFamily="34" charset="0"/>
+                <a:ea typeface="Aptos" pitchFamily="34" charset="-122"/>
+                <a:cs typeface="Aptos" pitchFamily="34" charset="-120"/>
+              </a:rPr>
+              <a:t>Concept checkpoints</a:t>
+            </a:r>
+            <a:endParaRPr lang="en-US" sz="1300" dirty="0"/>
+          </a:p>
+        </p:txBody>
+      </p:sp>
+      <p:sp>
+        <p:nvSpPr>
+          <p:cNvPr id="15" name="Text 13"/>
+          <p:cNvSpPr/>
+          <p:nvPr/>
+        </p:nvSpPr>
+        <p:spPr>
+          <a:xfrm>
+            <a:off x="7818120" y="3300984"/>
+            <a:ext cx="3090672" cy="877824"/>
+          </a:xfrm>
+          <a:prstGeom prst="rect">
+            <a:avLst/>
+          </a:prstGeom>
+          <a:noFill/>
+          <a:ln/>
+        </p:spPr>
+        <p:txBody>
+          <a:bodyPr wrap="square" lIns="254" tIns="254" rIns="254" bIns="254" rtlCol="0" anchor="t">
+            <a:normAutofit/>
+          </a:bodyPr>
+          <a:lstStyle/>
+          <a:p>
+            <a:r>
+              <a:rPr lang="en-US" sz="1380" dirty="0">
+                <a:solidFill>
+                  <a:srgbClr val="17364A"/>
+                </a:solidFill>
+                <a:latin typeface="Aptos" pitchFamily="34" charset="0"/>
+                <a:ea typeface="Aptos" pitchFamily="34" charset="-122"/>
+                <a:cs typeface="Aptos" pitchFamily="34" charset="-120"/>
+              </a:rPr>
+              <a:t>Which staff, partners, or communities would be affected if this issue were handled poorly?</a:t>
+            </a:r>
+            <a:endParaRPr lang="en-US" sz="1380" dirty="0"/>
+          </a:p>
+          <a:p>
+            <a:r>
+              <a:rPr lang="en-US" sz="1380" dirty="0">
+                <a:solidFill>
+                  <a:srgbClr val="17364A"/>
+                </a:solidFill>
+                <a:latin typeface="Aptos" pitchFamily="34" charset="0"/>
+                <a:ea typeface="Aptos" pitchFamily="34" charset="-122"/>
+                <a:cs typeface="Aptos" pitchFamily="34" charset="-120"/>
+              </a:rPr>
+              <a:t>What policy, process, or artifact should be created or updated after this module?</a:t>
+            </a:r>
+            <a:endParaRPr lang="en-US" sz="1380" dirty="0"/>
+          </a:p>
+        </p:txBody>
       </p:sp>
       <p:sp>
         <p:nvSpPr>
           <p:cNvPr id="16" name="Shape 14"/>
-          <p:cNvSpPr/>
-          <p:nvPr/>
-        </p:nvSpPr>
-        <p:spPr>
-          <a:xfrm>
-            <a:off x="9089136" y="3456432"/>
-            <a:ext cx="566928" cy="566928"/>
-          </a:xfrm>
-          <a:prstGeom prst="ellipse">
-            <a:avLst/>
-          </a:prstGeom>
-          <a:solidFill>
-            <a:srgbClr val="6A4CA3"/>
-          </a:solidFill>
-          <a:ln w="12700">
-            <a:solidFill>
-              <a:srgbClr val="6A4CA3"/>
-            </a:solidFill>
-            <a:prstDash val="solid"/>
-          </a:ln>
-        </p:spPr>
-      </p:sp>
-      <p:sp>
-        <p:nvSpPr>
-          <p:cNvPr id="17" name="Shape 15"/>
-          <p:cNvSpPr/>
-          <p:nvPr/>
-        </p:nvSpPr>
-        <p:spPr>
-          <a:xfrm>
-            <a:off x="8385048" y="3419856"/>
-            <a:ext cx="1975104" cy="0"/>
-          </a:xfrm>
-          <a:prstGeom prst="line">
-            <a:avLst/>
-          </a:prstGeom>
-          <a:noFill/>
-          <a:ln w="25400">
-            <a:solidFill>
-              <a:srgbClr val="8ABBD8"/>
-            </a:solidFill>
-            <a:prstDash val="solid"/>
-          </a:ln>
-        </p:spPr>
-      </p:sp>
-      <p:sp>
-        <p:nvSpPr>
-          <p:cNvPr id="18" name="Shape 16"/>
-          <p:cNvSpPr/>
-          <p:nvPr/>
-        </p:nvSpPr>
-        <p:spPr>
-          <a:xfrm>
-            <a:off x="8202168" y="3630168"/>
-            <a:ext cx="1170432" cy="118872"/>
-          </a:xfrm>
-          <a:prstGeom prst="line">
-            <a:avLst/>
-          </a:prstGeom>
-          <a:noFill/>
-          <a:ln w="25400">
-            <a:solidFill>
-              <a:srgbClr val="8ABBD8"/>
-            </a:solidFill>
-            <a:prstDash val="solid"/>
-          </a:ln>
-        </p:spPr>
-      </p:sp>
-      <p:sp>
-        <p:nvSpPr>
-          <p:cNvPr id="19" name="Shape 17"/>
-          <p:cNvSpPr/>
-          <p:nvPr/>
-        </p:nvSpPr>
-        <p:spPr>
-          <a:xfrm>
-            <a:off x="10543032" y="3630168"/>
-            <a:ext cx="-1170432" cy="118872"/>
-          </a:xfrm>
-          <a:prstGeom prst="line">
-            <a:avLst/>
-          </a:prstGeom>
-          <a:noFill/>
-          <a:ln w="25400">
-            <a:solidFill>
-              <a:srgbClr val="8ABBD8"/>
-            </a:solidFill>
-            <a:prstDash val="solid"/>
-          </a:ln>
-        </p:spPr>
-      </p:sp>
-      <p:sp>
-        <p:nvSpPr>
-          <p:cNvPr id="20" name="Text 18"/>
-          <p:cNvSpPr/>
-          <p:nvPr/>
-        </p:nvSpPr>
-        <p:spPr>
-          <a:xfrm>
-            <a:off x="7863840" y="4069080"/>
-            <a:ext cx="3017520" cy="164592"/>
-          </a:xfrm>
-          <a:prstGeom prst="rect">
-            <a:avLst/>
-          </a:prstGeom>
-          <a:noFill/>
-          <a:ln/>
-        </p:spPr>
-        <p:txBody>
-          <a:bodyPr wrap="square" lIns="0" tIns="0" rIns="0" bIns="0" rtlCol="0" anchor="ctr"/>
-          <a:lstStyle/>
-          <a:p>
-            <a:pPr algn="ctr" indent="0" marL="0">
-              <a:buNone/>
-            </a:pPr>
-            <a:r>
-              <a:rPr lang="en-US" sz="900" b="1" dirty="0">
-                <a:solidFill>
-                  <a:srgbClr val="003A63"/>
-                </a:solidFill>
-                <a:latin typeface="Aptos" pitchFamily="34" charset="0"/>
-                <a:ea typeface="Aptos" pitchFamily="34" charset="-122"/>
-                <a:cs typeface="Aptos" pitchFamily="34" charset="-120"/>
-              </a:rPr>
-              <a:t>Decision rights</a:t>
-            </a:r>
-            <a:endParaRPr lang="en-US" sz="900" dirty="0"/>
-          </a:p>
-        </p:txBody>
-      </p:sp>
-      <p:sp>
-        <p:nvSpPr>
-          <p:cNvPr id="21" name="Shape 19"/>
           <p:cNvSpPr/>
           <p:nvPr/>
         </p:nvSpPr>
@@ -6719,7 +6305,7 @@
       </p:sp>
       <p:sp>
         <p:nvSpPr>
-          <p:cNvPr id="22" name="Text 20"/>
+          <p:cNvPr id="17" name="Text 15"/>
           <p:cNvSpPr/>
           <p:nvPr/>
         </p:nvSpPr>
@@ -6758,7 +6344,7 @@
       </p:sp>
       <p:sp>
         <p:nvSpPr>
-          <p:cNvPr id="23" name="Text 21"/>
+          <p:cNvPr id="18" name="Text 16"/>
           <p:cNvSpPr/>
           <p:nvPr/>
         </p:nvSpPr>
@@ -7252,13 +6838,11 @@
             </a:avLst>
           </a:prstGeom>
           <a:solidFill>
-            <a:srgbClr val="FFFFFF">
-              <a:alpha val="88000"/>
-            </a:srgbClr>
+            <a:srgbClr val="FFFFFF"/>
           </a:solidFill>
           <a:ln w="12700">
             <a:solidFill>
-              <a:srgbClr val="D6E8F2"/>
+              <a:srgbClr val="B9D7E6"/>
             </a:solidFill>
             <a:prstDash val="solid"/>
           </a:ln>
@@ -7266,190 +6850,98 @@
       </p:sp>
       <p:sp>
         <p:nvSpPr>
-          <p:cNvPr id="14" name="Shape 12"/>
-          <p:cNvSpPr/>
-          <p:nvPr/>
-        </p:nvSpPr>
-        <p:spPr>
-          <a:xfrm>
-            <a:off x="7891272" y="3108960"/>
-            <a:ext cx="566928" cy="566928"/>
-          </a:xfrm>
-          <a:prstGeom prst="ellipse">
-            <a:avLst/>
-          </a:prstGeom>
-          <a:solidFill>
-            <a:srgbClr val="0068B7"/>
-          </a:solidFill>
-          <a:ln w="12700">
-            <a:solidFill>
-              <a:srgbClr val="0068B7"/>
-            </a:solidFill>
-            <a:prstDash val="solid"/>
-          </a:ln>
-        </p:spPr>
-      </p:sp>
-      <p:sp>
-        <p:nvSpPr>
-          <p:cNvPr id="15" name="Shape 13"/>
-          <p:cNvSpPr/>
-          <p:nvPr/>
-        </p:nvSpPr>
-        <p:spPr>
-          <a:xfrm>
-            <a:off x="10287000" y="3108960"/>
-            <a:ext cx="566928" cy="566928"/>
-          </a:xfrm>
-          <a:prstGeom prst="ellipse">
-            <a:avLst/>
-          </a:prstGeom>
-          <a:solidFill>
-            <a:srgbClr val="2F8A28"/>
-          </a:solidFill>
-          <a:ln w="12700">
-            <a:solidFill>
-              <a:srgbClr val="2F8A28"/>
-            </a:solidFill>
-            <a:prstDash val="solid"/>
-          </a:ln>
-        </p:spPr>
+          <p:cNvPr id="14" name="Text 12"/>
+          <p:cNvSpPr/>
+          <p:nvPr/>
+        </p:nvSpPr>
+        <p:spPr>
+          <a:xfrm>
+            <a:off x="7799832" y="2935224"/>
+            <a:ext cx="3145536" cy="256032"/>
+          </a:xfrm>
+          <a:prstGeom prst="rect">
+            <a:avLst/>
+          </a:prstGeom>
+          <a:noFill/>
+          <a:ln/>
+        </p:spPr>
+        <p:txBody>
+          <a:bodyPr wrap="square" lIns="0" tIns="0" rIns="0" bIns="0" rtlCol="0" anchor="ctr"/>
+          <a:lstStyle/>
+          <a:p>
+            <a:pPr indent="0" marL="0">
+              <a:buNone/>
+            </a:pPr>
+            <a:r>
+              <a:rPr lang="en-US" sz="1300" b="1" dirty="0">
+                <a:solidFill>
+                  <a:srgbClr val="0068B7"/>
+                </a:solidFill>
+                <a:latin typeface="Aptos" pitchFamily="34" charset="0"/>
+                <a:ea typeface="Aptos" pitchFamily="34" charset="-122"/>
+                <a:cs typeface="Aptos" pitchFamily="34" charset="-120"/>
+              </a:rPr>
+              <a:t>Concept checkpoints</a:t>
+            </a:r>
+            <a:endParaRPr lang="en-US" sz="1300" dirty="0"/>
+          </a:p>
+        </p:txBody>
+      </p:sp>
+      <p:sp>
+        <p:nvSpPr>
+          <p:cNvPr id="15" name="Text 13"/>
+          <p:cNvSpPr/>
+          <p:nvPr/>
+        </p:nvSpPr>
+        <p:spPr>
+          <a:xfrm>
+            <a:off x="7818120" y="3300984"/>
+            <a:ext cx="3090672" cy="877824"/>
+          </a:xfrm>
+          <a:prstGeom prst="rect">
+            <a:avLst/>
+          </a:prstGeom>
+          <a:noFill/>
+          <a:ln/>
+        </p:spPr>
+        <p:txBody>
+          <a:bodyPr wrap="square" lIns="254" tIns="254" rIns="254" bIns="254" rtlCol="0" anchor="t">
+            <a:normAutofit/>
+          </a:bodyPr>
+          <a:lstStyle/>
+          <a:p>
+            <a:r>
+              <a:rPr lang="en-US" sz="1380" dirty="0">
+                <a:solidFill>
+                  <a:srgbClr val="17364A"/>
+                </a:solidFill>
+                <a:latin typeface="Aptos" pitchFamily="34" charset="0"/>
+                <a:ea typeface="Aptos" pitchFamily="34" charset="-122"/>
+                <a:cs typeface="Aptos" pitchFamily="34" charset="-120"/>
+              </a:rPr>
+              <a:t>Draft a one-page AI governance charter and a one-page operating model.</a:t>
+            </a:r>
+            <a:endParaRPr lang="en-US" sz="1380" dirty="0"/>
+          </a:p>
+          <a:p>
+            <a:r>
+              <a:rPr lang="en-US" sz="1380" dirty="0">
+                <a:solidFill>
+                  <a:srgbClr val="17364A"/>
+                </a:solidFill>
+                <a:latin typeface="Aptos" pitchFamily="34" charset="0"/>
+                <a:ea typeface="Aptos" pitchFamily="34" charset="-122"/>
+                <a:cs typeface="Aptos" pitchFamily="34" charset="-120"/>
+              </a:rPr>
+              <a:t>Include scope, membership, review levels, decision rights, documentation, escalation,.</a:t>
+            </a:r>
+            <a:endParaRPr lang="en-US" sz="1380" dirty="0"/>
+          </a:p>
+        </p:txBody>
       </p:sp>
       <p:sp>
         <p:nvSpPr>
           <p:cNvPr id="16" name="Shape 14"/>
-          <p:cNvSpPr/>
-          <p:nvPr/>
-        </p:nvSpPr>
-        <p:spPr>
-          <a:xfrm>
-            <a:off x="9089136" y="3456432"/>
-            <a:ext cx="566928" cy="566928"/>
-          </a:xfrm>
-          <a:prstGeom prst="ellipse">
-            <a:avLst/>
-          </a:prstGeom>
-          <a:solidFill>
-            <a:srgbClr val="6A4CA3"/>
-          </a:solidFill>
-          <a:ln w="12700">
-            <a:solidFill>
-              <a:srgbClr val="6A4CA3"/>
-            </a:solidFill>
-            <a:prstDash val="solid"/>
-          </a:ln>
-        </p:spPr>
-      </p:sp>
-      <p:sp>
-        <p:nvSpPr>
-          <p:cNvPr id="17" name="Shape 15"/>
-          <p:cNvSpPr/>
-          <p:nvPr/>
-        </p:nvSpPr>
-        <p:spPr>
-          <a:xfrm>
-            <a:off x="8385048" y="3419856"/>
-            <a:ext cx="1975104" cy="0"/>
-          </a:xfrm>
-          <a:prstGeom prst="line">
-            <a:avLst/>
-          </a:prstGeom>
-          <a:noFill/>
-          <a:ln w="25400">
-            <a:solidFill>
-              <a:srgbClr val="8ABBD8"/>
-            </a:solidFill>
-            <a:prstDash val="solid"/>
-          </a:ln>
-        </p:spPr>
-      </p:sp>
-      <p:sp>
-        <p:nvSpPr>
-          <p:cNvPr id="18" name="Shape 16"/>
-          <p:cNvSpPr/>
-          <p:nvPr/>
-        </p:nvSpPr>
-        <p:spPr>
-          <a:xfrm>
-            <a:off x="8202168" y="3630168"/>
-            <a:ext cx="1170432" cy="118872"/>
-          </a:xfrm>
-          <a:prstGeom prst="line">
-            <a:avLst/>
-          </a:prstGeom>
-          <a:noFill/>
-          <a:ln w="25400">
-            <a:solidFill>
-              <a:srgbClr val="8ABBD8"/>
-            </a:solidFill>
-            <a:prstDash val="solid"/>
-          </a:ln>
-        </p:spPr>
-      </p:sp>
-      <p:sp>
-        <p:nvSpPr>
-          <p:cNvPr id="19" name="Shape 17"/>
-          <p:cNvSpPr/>
-          <p:nvPr/>
-        </p:nvSpPr>
-        <p:spPr>
-          <a:xfrm>
-            <a:off x="10543032" y="3630168"/>
-            <a:ext cx="-1170432" cy="118872"/>
-          </a:xfrm>
-          <a:prstGeom prst="line">
-            <a:avLst/>
-          </a:prstGeom>
-          <a:noFill/>
-          <a:ln w="25400">
-            <a:solidFill>
-              <a:srgbClr val="8ABBD8"/>
-            </a:solidFill>
-            <a:prstDash val="solid"/>
-          </a:ln>
-        </p:spPr>
-      </p:sp>
-      <p:sp>
-        <p:nvSpPr>
-          <p:cNvPr id="20" name="Text 18"/>
-          <p:cNvSpPr/>
-          <p:nvPr/>
-        </p:nvSpPr>
-        <p:spPr>
-          <a:xfrm>
-            <a:off x="7863840" y="4069080"/>
-            <a:ext cx="3017520" cy="164592"/>
-          </a:xfrm>
-          <a:prstGeom prst="rect">
-            <a:avLst/>
-          </a:prstGeom>
-          <a:noFill/>
-          <a:ln/>
-        </p:spPr>
-        <p:txBody>
-          <a:bodyPr wrap="square" lIns="0" tIns="0" rIns="0" bIns="0" rtlCol="0" anchor="ctr"/>
-          <a:lstStyle/>
-          <a:p>
-            <a:pPr algn="ctr" indent="0" marL="0">
-              <a:buNone/>
-            </a:pPr>
-            <a:r>
-              <a:rPr lang="en-US" sz="900" b="1" dirty="0">
-                <a:solidFill>
-                  <a:srgbClr val="003A63"/>
-                </a:solidFill>
-                <a:latin typeface="Aptos" pitchFamily="34" charset="0"/>
-                <a:ea typeface="Aptos" pitchFamily="34" charset="-122"/>
-                <a:cs typeface="Aptos" pitchFamily="34" charset="-120"/>
-              </a:rPr>
-              <a:t>Decision rights</a:t>
-            </a:r>
-            <a:endParaRPr lang="en-US" sz="900" dirty="0"/>
-          </a:p>
-        </p:txBody>
-      </p:sp>
-      <p:sp>
-        <p:nvSpPr>
-          <p:cNvPr id="21" name="Shape 19"/>
           <p:cNvSpPr/>
           <p:nvPr/>
         </p:nvSpPr>
@@ -7476,7 +6968,7 @@
       </p:sp>
       <p:sp>
         <p:nvSpPr>
-          <p:cNvPr id="22" name="Text 20"/>
+          <p:cNvPr id="17" name="Text 15"/>
           <p:cNvSpPr/>
           <p:nvPr/>
         </p:nvSpPr>
@@ -7515,7 +7007,7 @@
       </p:sp>
       <p:sp>
         <p:nvSpPr>
-          <p:cNvPr id="23" name="Text 21"/>
+          <p:cNvPr id="18" name="Text 16"/>
           <p:cNvSpPr/>
           <p:nvPr/>
         </p:nvSpPr>
@@ -8023,13 +7515,11 @@
             </a:avLst>
           </a:prstGeom>
           <a:solidFill>
-            <a:srgbClr val="FFFFFF">
-              <a:alpha val="88000"/>
-            </a:srgbClr>
+            <a:srgbClr val="FFFFFF"/>
           </a:solidFill>
           <a:ln w="12700">
             <a:solidFill>
-              <a:srgbClr val="D6E8F2"/>
+              <a:srgbClr val="B9D7E6"/>
             </a:solidFill>
             <a:prstDash val="solid"/>
           </a:ln>
@@ -8037,190 +7527,98 @@
       </p:sp>
       <p:sp>
         <p:nvSpPr>
-          <p:cNvPr id="14" name="Shape 12"/>
-          <p:cNvSpPr/>
-          <p:nvPr/>
-        </p:nvSpPr>
-        <p:spPr>
-          <a:xfrm>
-            <a:off x="7891272" y="3108960"/>
-            <a:ext cx="566928" cy="566928"/>
-          </a:xfrm>
-          <a:prstGeom prst="ellipse">
-            <a:avLst/>
-          </a:prstGeom>
-          <a:solidFill>
-            <a:srgbClr val="0068B7"/>
-          </a:solidFill>
-          <a:ln w="12700">
-            <a:solidFill>
-              <a:srgbClr val="0068B7"/>
-            </a:solidFill>
-            <a:prstDash val="solid"/>
-          </a:ln>
-        </p:spPr>
-      </p:sp>
-      <p:sp>
-        <p:nvSpPr>
-          <p:cNvPr id="15" name="Shape 13"/>
-          <p:cNvSpPr/>
-          <p:nvPr/>
-        </p:nvSpPr>
-        <p:spPr>
-          <a:xfrm>
-            <a:off x="10287000" y="3108960"/>
-            <a:ext cx="566928" cy="566928"/>
-          </a:xfrm>
-          <a:prstGeom prst="ellipse">
-            <a:avLst/>
-          </a:prstGeom>
-          <a:solidFill>
-            <a:srgbClr val="2F8A28"/>
-          </a:solidFill>
-          <a:ln w="12700">
-            <a:solidFill>
-              <a:srgbClr val="2F8A28"/>
-            </a:solidFill>
-            <a:prstDash val="solid"/>
-          </a:ln>
-        </p:spPr>
+          <p:cNvPr id="14" name="Text 12"/>
+          <p:cNvSpPr/>
+          <p:nvPr/>
+        </p:nvSpPr>
+        <p:spPr>
+          <a:xfrm>
+            <a:off x="7799832" y="2935224"/>
+            <a:ext cx="3145536" cy="256032"/>
+          </a:xfrm>
+          <a:prstGeom prst="rect">
+            <a:avLst/>
+          </a:prstGeom>
+          <a:noFill/>
+          <a:ln/>
+        </p:spPr>
+        <p:txBody>
+          <a:bodyPr wrap="square" lIns="0" tIns="0" rIns="0" bIns="0" rtlCol="0" anchor="ctr"/>
+          <a:lstStyle/>
+          <a:p>
+            <a:pPr indent="0" marL="0">
+              <a:buNone/>
+            </a:pPr>
+            <a:r>
+              <a:rPr lang="en-US" sz="1300" b="1" dirty="0">
+                <a:solidFill>
+                  <a:srgbClr val="0068B7"/>
+                </a:solidFill>
+                <a:latin typeface="Aptos" pitchFamily="34" charset="0"/>
+                <a:ea typeface="Aptos" pitchFamily="34" charset="-122"/>
+                <a:cs typeface="Aptos" pitchFamily="34" charset="-120"/>
+              </a:rPr>
+              <a:t>Concept checkpoints</a:t>
+            </a:r>
+            <a:endParaRPr lang="en-US" sz="1300" dirty="0"/>
+          </a:p>
+        </p:txBody>
+      </p:sp>
+      <p:sp>
+        <p:nvSpPr>
+          <p:cNvPr id="15" name="Text 13"/>
+          <p:cNvSpPr/>
+          <p:nvPr/>
+        </p:nvSpPr>
+        <p:spPr>
+          <a:xfrm>
+            <a:off x="7818120" y="3300984"/>
+            <a:ext cx="3090672" cy="877824"/>
+          </a:xfrm>
+          <a:prstGeom prst="rect">
+            <a:avLst/>
+          </a:prstGeom>
+          <a:noFill/>
+          <a:ln/>
+        </p:spPr>
+        <p:txBody>
+          <a:bodyPr wrap="square" lIns="254" tIns="254" rIns="254" bIns="254" rtlCol="0" anchor="t">
+            <a:normAutofit/>
+          </a:bodyPr>
+          <a:lstStyle/>
+          <a:p>
+            <a:r>
+              <a:rPr lang="en-US" sz="1380" dirty="0">
+                <a:solidFill>
+                  <a:srgbClr val="17364A"/>
+                </a:solidFill>
+                <a:latin typeface="Aptos" pitchFamily="34" charset="0"/>
+                <a:ea typeface="Aptos" pitchFamily="34" charset="-122"/>
+                <a:cs typeface="Aptos" pitchFamily="34" charset="-120"/>
+              </a:rPr>
+              <a:t>Document assumptions, unresolved questions, and which agency roles would need to review.</a:t>
+            </a:r>
+            <a:endParaRPr lang="en-US" sz="1380" dirty="0"/>
+          </a:p>
+          <a:p>
+            <a:r>
+              <a:rPr lang="en-US" sz="1380" dirty="0">
+                <a:solidFill>
+                  <a:srgbClr val="17364A"/>
+                </a:solidFill>
+                <a:latin typeface="Aptos" pitchFamily="34" charset="0"/>
+                <a:ea typeface="Aptos" pitchFamily="34" charset="-122"/>
+                <a:cs typeface="Aptos" pitchFamily="34" charset="-120"/>
+              </a:rPr>
+              <a:t>The exercise should produce a work product that could support governance review,.</a:t>
+            </a:r>
+            <a:endParaRPr lang="en-US" sz="1380" dirty="0"/>
+          </a:p>
+        </p:txBody>
       </p:sp>
       <p:sp>
         <p:nvSpPr>
           <p:cNvPr id="16" name="Shape 14"/>
-          <p:cNvSpPr/>
-          <p:nvPr/>
-        </p:nvSpPr>
-        <p:spPr>
-          <a:xfrm>
-            <a:off x="9089136" y="3456432"/>
-            <a:ext cx="566928" cy="566928"/>
-          </a:xfrm>
-          <a:prstGeom prst="ellipse">
-            <a:avLst/>
-          </a:prstGeom>
-          <a:solidFill>
-            <a:srgbClr val="6A4CA3"/>
-          </a:solidFill>
-          <a:ln w="12700">
-            <a:solidFill>
-              <a:srgbClr val="6A4CA3"/>
-            </a:solidFill>
-            <a:prstDash val="solid"/>
-          </a:ln>
-        </p:spPr>
-      </p:sp>
-      <p:sp>
-        <p:nvSpPr>
-          <p:cNvPr id="17" name="Shape 15"/>
-          <p:cNvSpPr/>
-          <p:nvPr/>
-        </p:nvSpPr>
-        <p:spPr>
-          <a:xfrm>
-            <a:off x="8385048" y="3419856"/>
-            <a:ext cx="1975104" cy="0"/>
-          </a:xfrm>
-          <a:prstGeom prst="line">
-            <a:avLst/>
-          </a:prstGeom>
-          <a:noFill/>
-          <a:ln w="25400">
-            <a:solidFill>
-              <a:srgbClr val="8ABBD8"/>
-            </a:solidFill>
-            <a:prstDash val="solid"/>
-          </a:ln>
-        </p:spPr>
-      </p:sp>
-      <p:sp>
-        <p:nvSpPr>
-          <p:cNvPr id="18" name="Shape 16"/>
-          <p:cNvSpPr/>
-          <p:nvPr/>
-        </p:nvSpPr>
-        <p:spPr>
-          <a:xfrm>
-            <a:off x="8202168" y="3630168"/>
-            <a:ext cx="1170432" cy="118872"/>
-          </a:xfrm>
-          <a:prstGeom prst="line">
-            <a:avLst/>
-          </a:prstGeom>
-          <a:noFill/>
-          <a:ln w="25400">
-            <a:solidFill>
-              <a:srgbClr val="8ABBD8"/>
-            </a:solidFill>
-            <a:prstDash val="solid"/>
-          </a:ln>
-        </p:spPr>
-      </p:sp>
-      <p:sp>
-        <p:nvSpPr>
-          <p:cNvPr id="19" name="Shape 17"/>
-          <p:cNvSpPr/>
-          <p:nvPr/>
-        </p:nvSpPr>
-        <p:spPr>
-          <a:xfrm>
-            <a:off x="10543032" y="3630168"/>
-            <a:ext cx="-1170432" cy="118872"/>
-          </a:xfrm>
-          <a:prstGeom prst="line">
-            <a:avLst/>
-          </a:prstGeom>
-          <a:noFill/>
-          <a:ln w="25400">
-            <a:solidFill>
-              <a:srgbClr val="8ABBD8"/>
-            </a:solidFill>
-            <a:prstDash val="solid"/>
-          </a:ln>
-        </p:spPr>
-      </p:sp>
-      <p:sp>
-        <p:nvSpPr>
-          <p:cNvPr id="20" name="Text 18"/>
-          <p:cNvSpPr/>
-          <p:nvPr/>
-        </p:nvSpPr>
-        <p:spPr>
-          <a:xfrm>
-            <a:off x="7863840" y="4069080"/>
-            <a:ext cx="3017520" cy="164592"/>
-          </a:xfrm>
-          <a:prstGeom prst="rect">
-            <a:avLst/>
-          </a:prstGeom>
-          <a:noFill/>
-          <a:ln/>
-        </p:spPr>
-        <p:txBody>
-          <a:bodyPr wrap="square" lIns="0" tIns="0" rIns="0" bIns="0" rtlCol="0" anchor="ctr"/>
-          <a:lstStyle/>
-          <a:p>
-            <a:pPr algn="ctr" indent="0" marL="0">
-              <a:buNone/>
-            </a:pPr>
-            <a:r>
-              <a:rPr lang="en-US" sz="900" b="1" dirty="0">
-                <a:solidFill>
-                  <a:srgbClr val="003A63"/>
-                </a:solidFill>
-                <a:latin typeface="Aptos" pitchFamily="34" charset="0"/>
-                <a:ea typeface="Aptos" pitchFamily="34" charset="-122"/>
-                <a:cs typeface="Aptos" pitchFamily="34" charset="-120"/>
-              </a:rPr>
-              <a:t>Decision rights</a:t>
-            </a:r>
-            <a:endParaRPr lang="en-US" sz="900" dirty="0"/>
-          </a:p>
-        </p:txBody>
-      </p:sp>
-      <p:sp>
-        <p:nvSpPr>
-          <p:cNvPr id="21" name="Shape 19"/>
           <p:cNvSpPr/>
           <p:nvPr/>
         </p:nvSpPr>
@@ -8247,7 +7645,7 @@
       </p:sp>
       <p:sp>
         <p:nvSpPr>
-          <p:cNvPr id="22" name="Text 20"/>
+          <p:cNvPr id="17" name="Text 15"/>
           <p:cNvSpPr/>
           <p:nvPr/>
         </p:nvSpPr>
@@ -8286,7 +7684,7 @@
       </p:sp>
       <p:sp>
         <p:nvSpPr>
-          <p:cNvPr id="23" name="Text 21"/>
+          <p:cNvPr id="18" name="Text 16"/>
           <p:cNvSpPr/>
           <p:nvPr/>
         </p:nvSpPr>
@@ -8766,13 +8164,11 @@
             </a:avLst>
           </a:prstGeom>
           <a:solidFill>
-            <a:srgbClr val="FFFFFF">
-              <a:alpha val="88000"/>
-            </a:srgbClr>
+            <a:srgbClr val="FFFFFF"/>
           </a:solidFill>
           <a:ln w="12700">
             <a:solidFill>
-              <a:srgbClr val="D6E8F2"/>
+              <a:srgbClr val="B9D7E6"/>
             </a:solidFill>
             <a:prstDash val="solid"/>
           </a:ln>
@@ -8780,190 +8176,84 @@
       </p:sp>
       <p:sp>
         <p:nvSpPr>
-          <p:cNvPr id="14" name="Shape 12"/>
-          <p:cNvSpPr/>
-          <p:nvPr/>
-        </p:nvSpPr>
-        <p:spPr>
-          <a:xfrm>
-            <a:off x="7891272" y="3108960"/>
-            <a:ext cx="566928" cy="566928"/>
-          </a:xfrm>
-          <a:prstGeom prst="ellipse">
-            <a:avLst/>
-          </a:prstGeom>
-          <a:solidFill>
-            <a:srgbClr val="0068B7"/>
-          </a:solidFill>
-          <a:ln w="12700">
-            <a:solidFill>
-              <a:srgbClr val="0068B7"/>
-            </a:solidFill>
-            <a:prstDash val="solid"/>
-          </a:ln>
-        </p:spPr>
-      </p:sp>
-      <p:sp>
-        <p:nvSpPr>
-          <p:cNvPr id="15" name="Shape 13"/>
-          <p:cNvSpPr/>
-          <p:nvPr/>
-        </p:nvSpPr>
-        <p:spPr>
-          <a:xfrm>
-            <a:off x="10287000" y="3108960"/>
-            <a:ext cx="566928" cy="566928"/>
-          </a:xfrm>
-          <a:prstGeom prst="ellipse">
-            <a:avLst/>
-          </a:prstGeom>
-          <a:solidFill>
-            <a:srgbClr val="2F8A28"/>
-          </a:solidFill>
-          <a:ln w="12700">
-            <a:solidFill>
-              <a:srgbClr val="2F8A28"/>
-            </a:solidFill>
-            <a:prstDash val="solid"/>
-          </a:ln>
-        </p:spPr>
+          <p:cNvPr id="14" name="Text 12"/>
+          <p:cNvSpPr/>
+          <p:nvPr/>
+        </p:nvSpPr>
+        <p:spPr>
+          <a:xfrm>
+            <a:off x="7799832" y="2935224"/>
+            <a:ext cx="3145536" cy="256032"/>
+          </a:xfrm>
+          <a:prstGeom prst="rect">
+            <a:avLst/>
+          </a:prstGeom>
+          <a:noFill/>
+          <a:ln/>
+        </p:spPr>
+        <p:txBody>
+          <a:bodyPr wrap="square" lIns="0" tIns="0" rIns="0" bIns="0" rtlCol="0" anchor="ctr"/>
+          <a:lstStyle/>
+          <a:p>
+            <a:pPr indent="0" marL="0">
+              <a:buNone/>
+            </a:pPr>
+            <a:r>
+              <a:rPr lang="en-US" sz="1300" b="1" dirty="0">
+                <a:solidFill>
+                  <a:srgbClr val="0068B7"/>
+                </a:solidFill>
+                <a:latin typeface="Aptos" pitchFamily="34" charset="0"/>
+                <a:ea typeface="Aptos" pitchFamily="34" charset="-122"/>
+                <a:cs typeface="Aptos" pitchFamily="34" charset="-120"/>
+              </a:rPr>
+              <a:t>Concept checkpoints</a:t>
+            </a:r>
+            <a:endParaRPr lang="en-US" sz="1300" dirty="0"/>
+          </a:p>
+        </p:txBody>
+      </p:sp>
+      <p:sp>
+        <p:nvSpPr>
+          <p:cNvPr id="15" name="Text 13"/>
+          <p:cNvSpPr/>
+          <p:nvPr/>
+        </p:nvSpPr>
+        <p:spPr>
+          <a:xfrm>
+            <a:off x="7818120" y="3300984"/>
+            <a:ext cx="3090672" cy="877824"/>
+          </a:xfrm>
+          <a:prstGeom prst="rect">
+            <a:avLst/>
+          </a:prstGeom>
+          <a:noFill/>
+          <a:ln/>
+        </p:spPr>
+        <p:txBody>
+          <a:bodyPr wrap="square" lIns="254" tIns="254" rIns="254" bIns="254" rtlCol="0" anchor="t">
+            <a:normAutofit/>
+          </a:bodyPr>
+          <a:lstStyle/>
+          <a:p>
+            <a:r>
+              <a:rPr lang="en-US" sz="1380" dirty="0">
+                <a:solidFill>
+                  <a:srgbClr val="17364A"/>
+                </a:solidFill>
+                <a:latin typeface="Aptos" pitchFamily="34" charset="0"/>
+                <a:ea typeface="Aptos" pitchFamily="34" charset="-122"/>
+                <a:cs typeface="Aptos" pitchFamily="34" charset="-120"/>
+              </a:rPr>
+              <a:t>Draft AI governance charter; governance operating model; intake and decision-flow diagram;.</a:t>
+            </a:r>
+            <a:endParaRPr lang="en-US" sz="1380" dirty="0"/>
+          </a:p>
+        </p:txBody>
       </p:sp>
       <p:sp>
         <p:nvSpPr>
           <p:cNvPr id="16" name="Shape 14"/>
-          <p:cNvSpPr/>
-          <p:nvPr/>
-        </p:nvSpPr>
-        <p:spPr>
-          <a:xfrm>
-            <a:off x="9089136" y="3456432"/>
-            <a:ext cx="566928" cy="566928"/>
-          </a:xfrm>
-          <a:prstGeom prst="ellipse">
-            <a:avLst/>
-          </a:prstGeom>
-          <a:solidFill>
-            <a:srgbClr val="6A4CA3"/>
-          </a:solidFill>
-          <a:ln w="12700">
-            <a:solidFill>
-              <a:srgbClr val="6A4CA3"/>
-            </a:solidFill>
-            <a:prstDash val="solid"/>
-          </a:ln>
-        </p:spPr>
-      </p:sp>
-      <p:sp>
-        <p:nvSpPr>
-          <p:cNvPr id="17" name="Shape 15"/>
-          <p:cNvSpPr/>
-          <p:nvPr/>
-        </p:nvSpPr>
-        <p:spPr>
-          <a:xfrm>
-            <a:off x="8385048" y="3419856"/>
-            <a:ext cx="1975104" cy="0"/>
-          </a:xfrm>
-          <a:prstGeom prst="line">
-            <a:avLst/>
-          </a:prstGeom>
-          <a:noFill/>
-          <a:ln w="25400">
-            <a:solidFill>
-              <a:srgbClr val="8ABBD8"/>
-            </a:solidFill>
-            <a:prstDash val="solid"/>
-          </a:ln>
-        </p:spPr>
-      </p:sp>
-      <p:sp>
-        <p:nvSpPr>
-          <p:cNvPr id="18" name="Shape 16"/>
-          <p:cNvSpPr/>
-          <p:nvPr/>
-        </p:nvSpPr>
-        <p:spPr>
-          <a:xfrm>
-            <a:off x="8202168" y="3630168"/>
-            <a:ext cx="1170432" cy="118872"/>
-          </a:xfrm>
-          <a:prstGeom prst="line">
-            <a:avLst/>
-          </a:prstGeom>
-          <a:noFill/>
-          <a:ln w="25400">
-            <a:solidFill>
-              <a:srgbClr val="8ABBD8"/>
-            </a:solidFill>
-            <a:prstDash val="solid"/>
-          </a:ln>
-        </p:spPr>
-      </p:sp>
-      <p:sp>
-        <p:nvSpPr>
-          <p:cNvPr id="19" name="Shape 17"/>
-          <p:cNvSpPr/>
-          <p:nvPr/>
-        </p:nvSpPr>
-        <p:spPr>
-          <a:xfrm>
-            <a:off x="10543032" y="3630168"/>
-            <a:ext cx="-1170432" cy="118872"/>
-          </a:xfrm>
-          <a:prstGeom prst="line">
-            <a:avLst/>
-          </a:prstGeom>
-          <a:noFill/>
-          <a:ln w="25400">
-            <a:solidFill>
-              <a:srgbClr val="8ABBD8"/>
-            </a:solidFill>
-            <a:prstDash val="solid"/>
-          </a:ln>
-        </p:spPr>
-      </p:sp>
-      <p:sp>
-        <p:nvSpPr>
-          <p:cNvPr id="20" name="Text 18"/>
-          <p:cNvSpPr/>
-          <p:nvPr/>
-        </p:nvSpPr>
-        <p:spPr>
-          <a:xfrm>
-            <a:off x="7863840" y="4069080"/>
-            <a:ext cx="3017520" cy="164592"/>
-          </a:xfrm>
-          <a:prstGeom prst="rect">
-            <a:avLst/>
-          </a:prstGeom>
-          <a:noFill/>
-          <a:ln/>
-        </p:spPr>
-        <p:txBody>
-          <a:bodyPr wrap="square" lIns="0" tIns="0" rIns="0" bIns="0" rtlCol="0" anchor="ctr"/>
-          <a:lstStyle/>
-          <a:p>
-            <a:pPr algn="ctr" indent="0" marL="0">
-              <a:buNone/>
-            </a:pPr>
-            <a:r>
-              <a:rPr lang="en-US" sz="900" b="1" dirty="0">
-                <a:solidFill>
-                  <a:srgbClr val="003A63"/>
-                </a:solidFill>
-                <a:latin typeface="Aptos" pitchFamily="34" charset="0"/>
-                <a:ea typeface="Aptos" pitchFamily="34" charset="-122"/>
-                <a:cs typeface="Aptos" pitchFamily="34" charset="-120"/>
-              </a:rPr>
-              <a:t>Decision rights</a:t>
-            </a:r>
-            <a:endParaRPr lang="en-US" sz="900" dirty="0"/>
-          </a:p>
-        </p:txBody>
-      </p:sp>
-      <p:sp>
-        <p:nvSpPr>
-          <p:cNvPr id="21" name="Shape 19"/>
           <p:cNvSpPr/>
           <p:nvPr/>
         </p:nvSpPr>
@@ -8990,7 +8280,7 @@
       </p:sp>
       <p:sp>
         <p:nvSpPr>
-          <p:cNvPr id="22" name="Text 20"/>
+          <p:cNvPr id="17" name="Text 15"/>
           <p:cNvSpPr/>
           <p:nvPr/>
         </p:nvSpPr>
@@ -9029,7 +8319,7 @@
       </p:sp>
       <p:sp>
         <p:nvSpPr>
-          <p:cNvPr id="23" name="Text 21"/>
+          <p:cNvPr id="18" name="Text 16"/>
           <p:cNvSpPr/>
           <p:nvPr/>
         </p:nvSpPr>
@@ -9509,13 +8799,11 @@
             </a:avLst>
           </a:prstGeom>
           <a:solidFill>
-            <a:srgbClr val="FFFFFF">
-              <a:alpha val="88000"/>
-            </a:srgbClr>
+            <a:srgbClr val="FFFFFF"/>
           </a:solidFill>
           <a:ln w="12700">
             <a:solidFill>
-              <a:srgbClr val="D6E8F2"/>
+              <a:srgbClr val="B9D7E6"/>
             </a:solidFill>
             <a:prstDash val="solid"/>
           </a:ln>
@@ -9523,190 +8811,84 @@
       </p:sp>
       <p:sp>
         <p:nvSpPr>
-          <p:cNvPr id="14" name="Shape 12"/>
-          <p:cNvSpPr/>
-          <p:nvPr/>
-        </p:nvSpPr>
-        <p:spPr>
-          <a:xfrm>
-            <a:off x="7891272" y="3108960"/>
-            <a:ext cx="566928" cy="566928"/>
-          </a:xfrm>
-          <a:prstGeom prst="ellipse">
-            <a:avLst/>
-          </a:prstGeom>
-          <a:solidFill>
-            <a:srgbClr val="0068B7"/>
-          </a:solidFill>
-          <a:ln w="12700">
-            <a:solidFill>
-              <a:srgbClr val="0068B7"/>
-            </a:solidFill>
-            <a:prstDash val="solid"/>
-          </a:ln>
-        </p:spPr>
-      </p:sp>
-      <p:sp>
-        <p:nvSpPr>
-          <p:cNvPr id="15" name="Shape 13"/>
-          <p:cNvSpPr/>
-          <p:nvPr/>
-        </p:nvSpPr>
-        <p:spPr>
-          <a:xfrm>
-            <a:off x="10287000" y="3108960"/>
-            <a:ext cx="566928" cy="566928"/>
-          </a:xfrm>
-          <a:prstGeom prst="ellipse">
-            <a:avLst/>
-          </a:prstGeom>
-          <a:solidFill>
-            <a:srgbClr val="2F8A28"/>
-          </a:solidFill>
-          <a:ln w="12700">
-            <a:solidFill>
-              <a:srgbClr val="2F8A28"/>
-            </a:solidFill>
-            <a:prstDash val="solid"/>
-          </a:ln>
-        </p:spPr>
+          <p:cNvPr id="14" name="Text 12"/>
+          <p:cNvSpPr/>
+          <p:nvPr/>
+        </p:nvSpPr>
+        <p:spPr>
+          <a:xfrm>
+            <a:off x="7799832" y="2935224"/>
+            <a:ext cx="3145536" cy="256032"/>
+          </a:xfrm>
+          <a:prstGeom prst="rect">
+            <a:avLst/>
+          </a:prstGeom>
+          <a:noFill/>
+          <a:ln/>
+        </p:spPr>
+        <p:txBody>
+          <a:bodyPr wrap="square" lIns="0" tIns="0" rIns="0" bIns="0" rtlCol="0" anchor="ctr"/>
+          <a:lstStyle/>
+          <a:p>
+            <a:pPr indent="0" marL="0">
+              <a:buNone/>
+            </a:pPr>
+            <a:r>
+              <a:rPr lang="en-US" sz="1300" b="1" dirty="0">
+                <a:solidFill>
+                  <a:srgbClr val="0068B7"/>
+                </a:solidFill>
+                <a:latin typeface="Aptos" pitchFamily="34" charset="0"/>
+                <a:ea typeface="Aptos" pitchFamily="34" charset="-122"/>
+                <a:cs typeface="Aptos" pitchFamily="34" charset="-120"/>
+              </a:rPr>
+              <a:t>Concept checkpoints</a:t>
+            </a:r>
+            <a:endParaRPr lang="en-US" sz="1300" dirty="0"/>
+          </a:p>
+        </p:txBody>
+      </p:sp>
+      <p:sp>
+        <p:nvSpPr>
+          <p:cNvPr id="15" name="Text 13"/>
+          <p:cNvSpPr/>
+          <p:nvPr/>
+        </p:nvSpPr>
+        <p:spPr>
+          <a:xfrm>
+            <a:off x="7818120" y="3300984"/>
+            <a:ext cx="3090672" cy="877824"/>
+          </a:xfrm>
+          <a:prstGeom prst="rect">
+            <a:avLst/>
+          </a:prstGeom>
+          <a:noFill/>
+          <a:ln/>
+        </p:spPr>
+        <p:txBody>
+          <a:bodyPr wrap="square" lIns="254" tIns="254" rIns="254" bIns="254" rtlCol="0" anchor="t">
+            <a:normAutofit/>
+          </a:bodyPr>
+          <a:lstStyle/>
+          <a:p>
+            <a:r>
+              <a:rPr lang="en-US" sz="1380" dirty="0">
+                <a:solidFill>
+                  <a:srgbClr val="17364A"/>
+                </a:solidFill>
+                <a:latin typeface="Aptos" pitchFamily="34" charset="0"/>
+                <a:ea typeface="Aptos" pitchFamily="34" charset="-122"/>
+                <a:cs typeface="Aptos" pitchFamily="34" charset="-120"/>
+              </a:rPr>
+              <a:t>Draft AI governance charter; governance operating model; intake and decision-flow diagram;.</a:t>
+            </a:r>
+            <a:endParaRPr lang="en-US" sz="1380" dirty="0"/>
+          </a:p>
+        </p:txBody>
       </p:sp>
       <p:sp>
         <p:nvSpPr>
           <p:cNvPr id="16" name="Shape 14"/>
-          <p:cNvSpPr/>
-          <p:nvPr/>
-        </p:nvSpPr>
-        <p:spPr>
-          <a:xfrm>
-            <a:off x="9089136" y="3456432"/>
-            <a:ext cx="566928" cy="566928"/>
-          </a:xfrm>
-          <a:prstGeom prst="ellipse">
-            <a:avLst/>
-          </a:prstGeom>
-          <a:solidFill>
-            <a:srgbClr val="6A4CA3"/>
-          </a:solidFill>
-          <a:ln w="12700">
-            <a:solidFill>
-              <a:srgbClr val="6A4CA3"/>
-            </a:solidFill>
-            <a:prstDash val="solid"/>
-          </a:ln>
-        </p:spPr>
-      </p:sp>
-      <p:sp>
-        <p:nvSpPr>
-          <p:cNvPr id="17" name="Shape 15"/>
-          <p:cNvSpPr/>
-          <p:nvPr/>
-        </p:nvSpPr>
-        <p:spPr>
-          <a:xfrm>
-            <a:off x="8385048" y="3419856"/>
-            <a:ext cx="1975104" cy="0"/>
-          </a:xfrm>
-          <a:prstGeom prst="line">
-            <a:avLst/>
-          </a:prstGeom>
-          <a:noFill/>
-          <a:ln w="25400">
-            <a:solidFill>
-              <a:srgbClr val="8ABBD8"/>
-            </a:solidFill>
-            <a:prstDash val="solid"/>
-          </a:ln>
-        </p:spPr>
-      </p:sp>
-      <p:sp>
-        <p:nvSpPr>
-          <p:cNvPr id="18" name="Shape 16"/>
-          <p:cNvSpPr/>
-          <p:nvPr/>
-        </p:nvSpPr>
-        <p:spPr>
-          <a:xfrm>
-            <a:off x="8202168" y="3630168"/>
-            <a:ext cx="1170432" cy="118872"/>
-          </a:xfrm>
-          <a:prstGeom prst="line">
-            <a:avLst/>
-          </a:prstGeom>
-          <a:noFill/>
-          <a:ln w="25400">
-            <a:solidFill>
-              <a:srgbClr val="8ABBD8"/>
-            </a:solidFill>
-            <a:prstDash val="solid"/>
-          </a:ln>
-        </p:spPr>
-      </p:sp>
-      <p:sp>
-        <p:nvSpPr>
-          <p:cNvPr id="19" name="Shape 17"/>
-          <p:cNvSpPr/>
-          <p:nvPr/>
-        </p:nvSpPr>
-        <p:spPr>
-          <a:xfrm>
-            <a:off x="10543032" y="3630168"/>
-            <a:ext cx="-1170432" cy="118872"/>
-          </a:xfrm>
-          <a:prstGeom prst="line">
-            <a:avLst/>
-          </a:prstGeom>
-          <a:noFill/>
-          <a:ln w="25400">
-            <a:solidFill>
-              <a:srgbClr val="8ABBD8"/>
-            </a:solidFill>
-            <a:prstDash val="solid"/>
-          </a:ln>
-        </p:spPr>
-      </p:sp>
-      <p:sp>
-        <p:nvSpPr>
-          <p:cNvPr id="20" name="Text 18"/>
-          <p:cNvSpPr/>
-          <p:nvPr/>
-        </p:nvSpPr>
-        <p:spPr>
-          <a:xfrm>
-            <a:off x="7863840" y="4069080"/>
-            <a:ext cx="3017520" cy="164592"/>
-          </a:xfrm>
-          <a:prstGeom prst="rect">
-            <a:avLst/>
-          </a:prstGeom>
-          <a:noFill/>
-          <a:ln/>
-        </p:spPr>
-        <p:txBody>
-          <a:bodyPr wrap="square" lIns="0" tIns="0" rIns="0" bIns="0" rtlCol="0" anchor="ctr"/>
-          <a:lstStyle/>
-          <a:p>
-            <a:pPr algn="ctr" indent="0" marL="0">
-              <a:buNone/>
-            </a:pPr>
-            <a:r>
-              <a:rPr lang="en-US" sz="900" b="1" dirty="0">
-                <a:solidFill>
-                  <a:srgbClr val="003A63"/>
-                </a:solidFill>
-                <a:latin typeface="Aptos" pitchFamily="34" charset="0"/>
-                <a:ea typeface="Aptos" pitchFamily="34" charset="-122"/>
-                <a:cs typeface="Aptos" pitchFamily="34" charset="-120"/>
-              </a:rPr>
-              <a:t>Decision rights</a:t>
-            </a:r>
-            <a:endParaRPr lang="en-US" sz="900" dirty="0"/>
-          </a:p>
-        </p:txBody>
-      </p:sp>
-      <p:sp>
-        <p:nvSpPr>
-          <p:cNvPr id="21" name="Shape 19"/>
           <p:cNvSpPr/>
           <p:nvPr/>
         </p:nvSpPr>
@@ -9733,7 +8915,7 @@
       </p:sp>
       <p:sp>
         <p:nvSpPr>
-          <p:cNvPr id="22" name="Text 20"/>
+          <p:cNvPr id="17" name="Text 15"/>
           <p:cNvSpPr/>
           <p:nvPr/>
         </p:nvSpPr>
@@ -9772,7 +8954,7 @@
       </p:sp>
       <p:sp>
         <p:nvSpPr>
-          <p:cNvPr id="23" name="Text 21"/>
+          <p:cNvPr id="18" name="Text 16"/>
           <p:cNvSpPr/>
           <p:nvPr/>
         </p:nvSpPr>
@@ -10280,13 +9462,11 @@
             </a:avLst>
           </a:prstGeom>
           <a:solidFill>
-            <a:srgbClr val="FFFFFF">
-              <a:alpha val="88000"/>
-            </a:srgbClr>
+            <a:srgbClr val="FFFFFF"/>
           </a:solidFill>
           <a:ln w="12700">
             <a:solidFill>
-              <a:srgbClr val="D6E8F2"/>
+              <a:srgbClr val="B9D7E6"/>
             </a:solidFill>
             <a:prstDash val="solid"/>
           </a:ln>
@@ -10294,190 +9474,112 @@
       </p:sp>
       <p:sp>
         <p:nvSpPr>
-          <p:cNvPr id="14" name="Shape 12"/>
-          <p:cNvSpPr/>
-          <p:nvPr/>
-        </p:nvSpPr>
-        <p:spPr>
-          <a:xfrm>
-            <a:off x="7891272" y="3108960"/>
-            <a:ext cx="566928" cy="566928"/>
-          </a:xfrm>
-          <a:prstGeom prst="ellipse">
-            <a:avLst/>
-          </a:prstGeom>
-          <a:solidFill>
-            <a:srgbClr val="0068B7"/>
-          </a:solidFill>
-          <a:ln w="12700">
-            <a:solidFill>
-              <a:srgbClr val="0068B7"/>
-            </a:solidFill>
-            <a:prstDash val="solid"/>
-          </a:ln>
-        </p:spPr>
-      </p:sp>
-      <p:sp>
-        <p:nvSpPr>
-          <p:cNvPr id="15" name="Shape 13"/>
-          <p:cNvSpPr/>
-          <p:nvPr/>
-        </p:nvSpPr>
-        <p:spPr>
-          <a:xfrm>
-            <a:off x="10287000" y="3108960"/>
-            <a:ext cx="566928" cy="566928"/>
-          </a:xfrm>
-          <a:prstGeom prst="ellipse">
-            <a:avLst/>
-          </a:prstGeom>
-          <a:solidFill>
-            <a:srgbClr val="2F8A28"/>
-          </a:solidFill>
-          <a:ln w="12700">
-            <a:solidFill>
-              <a:srgbClr val="2F8A28"/>
-            </a:solidFill>
-            <a:prstDash val="solid"/>
-          </a:ln>
-        </p:spPr>
+          <p:cNvPr id="14" name="Text 12"/>
+          <p:cNvSpPr/>
+          <p:nvPr/>
+        </p:nvSpPr>
+        <p:spPr>
+          <a:xfrm>
+            <a:off x="7799832" y="2935224"/>
+            <a:ext cx="3145536" cy="256032"/>
+          </a:xfrm>
+          <a:prstGeom prst="rect">
+            <a:avLst/>
+          </a:prstGeom>
+          <a:noFill/>
+          <a:ln/>
+        </p:spPr>
+        <p:txBody>
+          <a:bodyPr wrap="square" lIns="0" tIns="0" rIns="0" bIns="0" rtlCol="0" anchor="ctr"/>
+          <a:lstStyle/>
+          <a:p>
+            <a:pPr indent="0" marL="0">
+              <a:buNone/>
+            </a:pPr>
+            <a:r>
+              <a:rPr lang="en-US" sz="1300" b="1" dirty="0">
+                <a:solidFill>
+                  <a:srgbClr val="0068B7"/>
+                </a:solidFill>
+                <a:latin typeface="Aptos" pitchFamily="34" charset="0"/>
+                <a:ea typeface="Aptos" pitchFamily="34" charset="-122"/>
+                <a:cs typeface="Aptos" pitchFamily="34" charset="-120"/>
+              </a:rPr>
+              <a:t>Concept checkpoints</a:t>
+            </a:r>
+            <a:endParaRPr lang="en-US" sz="1300" dirty="0"/>
+          </a:p>
+        </p:txBody>
+      </p:sp>
+      <p:sp>
+        <p:nvSpPr>
+          <p:cNvPr id="15" name="Text 13"/>
+          <p:cNvSpPr/>
+          <p:nvPr/>
+        </p:nvSpPr>
+        <p:spPr>
+          <a:xfrm>
+            <a:off x="7818120" y="3300984"/>
+            <a:ext cx="3090672" cy="877824"/>
+          </a:xfrm>
+          <a:prstGeom prst="rect">
+            <a:avLst/>
+          </a:prstGeom>
+          <a:noFill/>
+          <a:ln/>
+        </p:spPr>
+        <p:txBody>
+          <a:bodyPr wrap="square" lIns="254" tIns="254" rIns="254" bIns="254" rtlCol="0" anchor="t">
+            <a:normAutofit/>
+          </a:bodyPr>
+          <a:lstStyle/>
+          <a:p>
+            <a:r>
+              <a:rPr lang="en-US" sz="1380" dirty="0">
+                <a:solidFill>
+                  <a:srgbClr val="17364A"/>
+                </a:solidFill>
+                <a:latin typeface="Aptos" pitchFamily="34" charset="0"/>
+                <a:ea typeface="Aptos" pitchFamily="34" charset="-122"/>
+                <a:cs typeface="Aptos" pitchFamily="34" charset="-120"/>
+              </a:rPr>
+              <a:t>1.</a:t>
+            </a:r>
+            <a:endParaRPr lang="en-US" sz="1380" dirty="0"/>
+          </a:p>
+          <a:p>
+            <a:r>
+              <a:rPr lang="en-US" sz="1380" dirty="0">
+                <a:solidFill>
+                  <a:srgbClr val="17364A"/>
+                </a:solidFill>
+                <a:latin typeface="Aptos" pitchFamily="34" charset="0"/>
+                <a:ea typeface="Aptos" pitchFamily="34" charset="-122"/>
+                <a:cs typeface="Aptos" pitchFamily="34" charset="-120"/>
+              </a:rPr>
+              <a:t>What is the strongest reason this module topic belongs in AI leadership and governance.</a:t>
+            </a:r>
+            <a:endParaRPr lang="en-US" sz="1380" dirty="0"/>
+          </a:p>
+          <a:p>
+            <a:r>
+              <a:rPr lang="en-US" sz="1380" dirty="0">
+                <a:solidFill>
+                  <a:srgbClr val="17364A"/>
+                </a:solidFill>
+                <a:latin typeface="Aptos" pitchFamily="34" charset="0"/>
+                <a:ea typeface="Aptos" pitchFamily="34" charset="-122"/>
+                <a:cs typeface="Aptos" pitchFamily="34" charset="-120"/>
+              </a:rPr>
+              <a:t>2.</a:t>
+            </a:r>
+            <a:endParaRPr lang="en-US" sz="1380" dirty="0"/>
+          </a:p>
+        </p:txBody>
       </p:sp>
       <p:sp>
         <p:nvSpPr>
           <p:cNvPr id="16" name="Shape 14"/>
-          <p:cNvSpPr/>
-          <p:nvPr/>
-        </p:nvSpPr>
-        <p:spPr>
-          <a:xfrm>
-            <a:off x="9089136" y="3456432"/>
-            <a:ext cx="566928" cy="566928"/>
-          </a:xfrm>
-          <a:prstGeom prst="ellipse">
-            <a:avLst/>
-          </a:prstGeom>
-          <a:solidFill>
-            <a:srgbClr val="6A4CA3"/>
-          </a:solidFill>
-          <a:ln w="12700">
-            <a:solidFill>
-              <a:srgbClr val="6A4CA3"/>
-            </a:solidFill>
-            <a:prstDash val="solid"/>
-          </a:ln>
-        </p:spPr>
-      </p:sp>
-      <p:sp>
-        <p:nvSpPr>
-          <p:cNvPr id="17" name="Shape 15"/>
-          <p:cNvSpPr/>
-          <p:nvPr/>
-        </p:nvSpPr>
-        <p:spPr>
-          <a:xfrm>
-            <a:off x="8385048" y="3419856"/>
-            <a:ext cx="1975104" cy="0"/>
-          </a:xfrm>
-          <a:prstGeom prst="line">
-            <a:avLst/>
-          </a:prstGeom>
-          <a:noFill/>
-          <a:ln w="25400">
-            <a:solidFill>
-              <a:srgbClr val="8ABBD8"/>
-            </a:solidFill>
-            <a:prstDash val="solid"/>
-          </a:ln>
-        </p:spPr>
-      </p:sp>
-      <p:sp>
-        <p:nvSpPr>
-          <p:cNvPr id="18" name="Shape 16"/>
-          <p:cNvSpPr/>
-          <p:nvPr/>
-        </p:nvSpPr>
-        <p:spPr>
-          <a:xfrm>
-            <a:off x="8202168" y="3630168"/>
-            <a:ext cx="1170432" cy="118872"/>
-          </a:xfrm>
-          <a:prstGeom prst="line">
-            <a:avLst/>
-          </a:prstGeom>
-          <a:noFill/>
-          <a:ln w="25400">
-            <a:solidFill>
-              <a:srgbClr val="8ABBD8"/>
-            </a:solidFill>
-            <a:prstDash val="solid"/>
-          </a:ln>
-        </p:spPr>
-      </p:sp>
-      <p:sp>
-        <p:nvSpPr>
-          <p:cNvPr id="19" name="Shape 17"/>
-          <p:cNvSpPr/>
-          <p:nvPr/>
-        </p:nvSpPr>
-        <p:spPr>
-          <a:xfrm>
-            <a:off x="10543032" y="3630168"/>
-            <a:ext cx="-1170432" cy="118872"/>
-          </a:xfrm>
-          <a:prstGeom prst="line">
-            <a:avLst/>
-          </a:prstGeom>
-          <a:noFill/>
-          <a:ln w="25400">
-            <a:solidFill>
-              <a:srgbClr val="8ABBD8"/>
-            </a:solidFill>
-            <a:prstDash val="solid"/>
-          </a:ln>
-        </p:spPr>
-      </p:sp>
-      <p:sp>
-        <p:nvSpPr>
-          <p:cNvPr id="20" name="Text 18"/>
-          <p:cNvSpPr/>
-          <p:nvPr/>
-        </p:nvSpPr>
-        <p:spPr>
-          <a:xfrm>
-            <a:off x="7863840" y="4069080"/>
-            <a:ext cx="3017520" cy="164592"/>
-          </a:xfrm>
-          <a:prstGeom prst="rect">
-            <a:avLst/>
-          </a:prstGeom>
-          <a:noFill/>
-          <a:ln/>
-        </p:spPr>
-        <p:txBody>
-          <a:bodyPr wrap="square" lIns="0" tIns="0" rIns="0" bIns="0" rtlCol="0" anchor="ctr"/>
-          <a:lstStyle/>
-          <a:p>
-            <a:pPr algn="ctr" indent="0" marL="0">
-              <a:buNone/>
-            </a:pPr>
-            <a:r>
-              <a:rPr lang="en-US" sz="900" b="1" dirty="0">
-                <a:solidFill>
-                  <a:srgbClr val="003A63"/>
-                </a:solidFill>
-                <a:latin typeface="Aptos" pitchFamily="34" charset="0"/>
-                <a:ea typeface="Aptos" pitchFamily="34" charset="-122"/>
-                <a:cs typeface="Aptos" pitchFamily="34" charset="-120"/>
-              </a:rPr>
-              <a:t>Decision rights</a:t>
-            </a:r>
-            <a:endParaRPr lang="en-US" sz="900" dirty="0"/>
-          </a:p>
-        </p:txBody>
-      </p:sp>
-      <p:sp>
-        <p:nvSpPr>
-          <p:cNvPr id="21" name="Shape 19"/>
           <p:cNvSpPr/>
           <p:nvPr/>
         </p:nvSpPr>
@@ -10504,7 +9606,7 @@
       </p:sp>
       <p:sp>
         <p:nvSpPr>
-          <p:cNvPr id="22" name="Text 20"/>
+          <p:cNvPr id="17" name="Text 15"/>
           <p:cNvSpPr/>
           <p:nvPr/>
         </p:nvSpPr>
@@ -10543,7 +9645,7 @@
       </p:sp>
       <p:sp>
         <p:nvSpPr>
-          <p:cNvPr id="23" name="Text 21"/>
+          <p:cNvPr id="18" name="Text 16"/>
           <p:cNvSpPr/>
           <p:nvPr/>
         </p:nvSpPr>
@@ -11076,20 +10178,20 @@
         </p:nvSpPr>
         <p:spPr>
           <a:xfrm>
-            <a:off x="7635240" y="3730752"/>
-            <a:ext cx="1033272" cy="749808"/>
+            <a:off x="7909560" y="3675888"/>
+            <a:ext cx="3154680" cy="1691640"/>
           </a:xfrm>
           <a:prstGeom prst="roundRect">
             <a:avLst>
-              <a:gd name="adj" fmla="val 14634"/>
+              <a:gd name="adj" fmla="val 6486"/>
             </a:avLst>
           </a:prstGeom>
           <a:solidFill>
-            <a:srgbClr val="0068B7"/>
+            <a:srgbClr val="FFFFFF"/>
           </a:solidFill>
           <a:ln w="12700">
             <a:solidFill>
-              <a:srgbClr val="0068B7"/>
+              <a:srgbClr val="B9D7E6"/>
             </a:solidFill>
             <a:prstDash val="solid"/>
           </a:ln>
@@ -11103,172 +10205,100 @@
         </p:nvSpPr>
         <p:spPr>
           <a:xfrm>
-            <a:off x="7708392" y="3922776"/>
-            <a:ext cx="886968" cy="310896"/>
-          </a:xfrm>
-          <a:prstGeom prst="rect">
-            <a:avLst/>
-          </a:prstGeom>
-          <a:noFill/>
-          <a:ln/>
-        </p:spPr>
-        <p:txBody>
-          <a:bodyPr wrap="square" lIns="0" tIns="0" rIns="0" bIns="0" rtlCol="0" anchor="ctr">
+            <a:off x="8074152" y="3822192"/>
+            <a:ext cx="2825496" cy="256032"/>
+          </a:xfrm>
+          <a:prstGeom prst="rect">
+            <a:avLst/>
+          </a:prstGeom>
+          <a:noFill/>
+          <a:ln/>
+        </p:spPr>
+        <p:txBody>
+          <a:bodyPr wrap="square" lIns="0" tIns="0" rIns="0" bIns="0" rtlCol="0" anchor="ctr"/>
+          <a:lstStyle/>
+          <a:p>
+            <a:pPr indent="0" marL="0">
+              <a:buNone/>
+            </a:pPr>
+            <a:r>
+              <a:rPr lang="en-US" sz="1300" b="1" dirty="0">
+                <a:solidFill>
+                  <a:srgbClr val="0068B7"/>
+                </a:solidFill>
+                <a:latin typeface="Aptos" pitchFamily="34" charset="0"/>
+                <a:ea typeface="Aptos" pitchFamily="34" charset="-122"/>
+                <a:cs typeface="Aptos" pitchFamily="34" charset="-120"/>
+              </a:rPr>
+              <a:t>Learning sequence</a:t>
+            </a:r>
+            <a:endParaRPr lang="en-US" sz="1300" dirty="0"/>
+          </a:p>
+        </p:txBody>
+      </p:sp>
+      <p:sp>
+        <p:nvSpPr>
+          <p:cNvPr id="15" name="Text 13"/>
+          <p:cNvSpPr/>
+          <p:nvPr/>
+        </p:nvSpPr>
+        <p:spPr>
+          <a:xfrm>
+            <a:off x="8092440" y="4187952"/>
+            <a:ext cx="2770632" cy="1033272"/>
+          </a:xfrm>
+          <a:prstGeom prst="rect">
+            <a:avLst/>
+          </a:prstGeom>
+          <a:noFill/>
+          <a:ln/>
+        </p:spPr>
+        <p:txBody>
+          <a:bodyPr wrap="square" lIns="254" tIns="254" rIns="254" bIns="254" rtlCol="0" anchor="t">
             <a:normAutofit/>
           </a:bodyPr>
           <a:lstStyle/>
           <a:p>
-            <a:pPr algn="ctr" indent="0" marL="0">
-              <a:buNone/>
-            </a:pPr>
-            <a:r>
-              <a:rPr lang="en-US" sz="1500" b="1" dirty="0">
-                <a:solidFill>
-                  <a:srgbClr val="FFFFFF"/>
-                </a:solidFill>
-                <a:latin typeface="Aptos" pitchFamily="34" charset="0"/>
-                <a:ea typeface="Aptos" pitchFamily="34" charset="-122"/>
-                <a:cs typeface="Aptos" pitchFamily="34" charset="-120"/>
-              </a:rPr>
-              <a:t>Learn</a:t>
-            </a:r>
-            <a:endParaRPr lang="en-US" sz="1500" dirty="0"/>
-          </a:p>
-        </p:txBody>
-      </p:sp>
-      <p:sp>
-        <p:nvSpPr>
-          <p:cNvPr id="15" name="Shape 13"/>
-          <p:cNvSpPr/>
-          <p:nvPr/>
-        </p:nvSpPr>
-        <p:spPr>
-          <a:xfrm>
-            <a:off x="8924544" y="3730752"/>
-            <a:ext cx="1033272" cy="749808"/>
-          </a:xfrm>
-          <a:prstGeom prst="roundRect">
-            <a:avLst>
-              <a:gd name="adj" fmla="val 14634"/>
-            </a:avLst>
-          </a:prstGeom>
-          <a:solidFill>
-            <a:srgbClr val="2F8A28"/>
-          </a:solidFill>
-          <a:ln w="12700">
-            <a:solidFill>
-              <a:srgbClr val="2F8A28"/>
-            </a:solidFill>
-            <a:prstDash val="solid"/>
-          </a:ln>
-        </p:spPr>
-      </p:sp>
-      <p:sp>
-        <p:nvSpPr>
-          <p:cNvPr id="16" name="Text 14"/>
-          <p:cNvSpPr/>
-          <p:nvPr/>
-        </p:nvSpPr>
-        <p:spPr>
-          <a:xfrm>
-            <a:off x="8997696" y="3922776"/>
-            <a:ext cx="886968" cy="310896"/>
-          </a:xfrm>
-          <a:prstGeom prst="rect">
-            <a:avLst/>
-          </a:prstGeom>
-          <a:noFill/>
-          <a:ln/>
-        </p:spPr>
-        <p:txBody>
-          <a:bodyPr wrap="square" lIns="0" tIns="0" rIns="0" bIns="0" rtlCol="0" anchor="ctr">
-            <a:normAutofit/>
-          </a:bodyPr>
-          <a:lstStyle/>
-          <a:p>
-            <a:pPr algn="ctr" indent="0" marL="0">
-              <a:buNone/>
-            </a:pPr>
-            <a:r>
-              <a:rPr lang="en-US" sz="1500" b="1" dirty="0">
-                <a:solidFill>
-                  <a:srgbClr val="FFFFFF"/>
-                </a:solidFill>
-                <a:latin typeface="Aptos" pitchFamily="34" charset="0"/>
-                <a:ea typeface="Aptos" pitchFamily="34" charset="-122"/>
-                <a:cs typeface="Aptos" pitchFamily="34" charset="-120"/>
-              </a:rPr>
-              <a:t>Apply</a:t>
-            </a:r>
-            <a:endParaRPr lang="en-US" sz="1500" dirty="0"/>
-          </a:p>
-        </p:txBody>
-      </p:sp>
-      <p:sp>
-        <p:nvSpPr>
-          <p:cNvPr id="17" name="Shape 15"/>
-          <p:cNvSpPr/>
-          <p:nvPr/>
-        </p:nvSpPr>
-        <p:spPr>
-          <a:xfrm>
-            <a:off x="10213848" y="3730752"/>
-            <a:ext cx="1033272" cy="749808"/>
-          </a:xfrm>
-          <a:prstGeom prst="roundRect">
-            <a:avLst>
-              <a:gd name="adj" fmla="val 14634"/>
-            </a:avLst>
-          </a:prstGeom>
-          <a:solidFill>
-            <a:srgbClr val="6A4CA3"/>
-          </a:solidFill>
-          <a:ln w="12700">
-            <a:solidFill>
-              <a:srgbClr val="6A4CA3"/>
-            </a:solidFill>
-            <a:prstDash val="solid"/>
-          </a:ln>
-        </p:spPr>
-      </p:sp>
-      <p:sp>
-        <p:nvSpPr>
-          <p:cNvPr id="18" name="Text 16"/>
-          <p:cNvSpPr/>
-          <p:nvPr/>
-        </p:nvSpPr>
-        <p:spPr>
-          <a:xfrm>
-            <a:off x="10287000" y="3922776"/>
-            <a:ext cx="886968" cy="310896"/>
-          </a:xfrm>
-          <a:prstGeom prst="rect">
-            <a:avLst/>
-          </a:prstGeom>
-          <a:noFill/>
-          <a:ln/>
-        </p:spPr>
-        <p:txBody>
-          <a:bodyPr wrap="square" lIns="0" tIns="0" rIns="0" bIns="0" rtlCol="0" anchor="ctr">
-            <a:normAutofit/>
-          </a:bodyPr>
-          <a:lstStyle/>
-          <a:p>
-            <a:pPr algn="ctr" indent="0" marL="0">
-              <a:buNone/>
-            </a:pPr>
-            <a:r>
-              <a:rPr lang="en-US" sz="1500" b="1" dirty="0">
-                <a:solidFill>
-                  <a:srgbClr val="FFFFFF"/>
-                </a:solidFill>
-                <a:latin typeface="Aptos" pitchFamily="34" charset="0"/>
-                <a:ea typeface="Aptos" pitchFamily="34" charset="-122"/>
-                <a:cs typeface="Aptos" pitchFamily="34" charset="-120"/>
-              </a:rPr>
-              <a:t>Document</a:t>
-            </a:r>
-            <a:endParaRPr lang="en-US" sz="1500" dirty="0"/>
+            <a:r>
+              <a:rPr lang="en-US" sz="1380" dirty="0">
+                <a:solidFill>
+                  <a:srgbClr val="17364A"/>
+                </a:solidFill>
+                <a:latin typeface="Aptos" pitchFamily="34" charset="0"/>
+                <a:ea typeface="Aptos" pitchFamily="34" charset="-122"/>
+                <a:cs typeface="Aptos" pitchFamily="34" charset="-120"/>
+              </a:rPr>
+              <a:t>Read the module for shared vocabulary and context.</a:t>
+            </a:r>
+            <a:endParaRPr lang="en-US" sz="1380" dirty="0"/>
+          </a:p>
+          <a:p>
+            <a:r>
+              <a:rPr lang="en-US" sz="1380" dirty="0">
+                <a:solidFill>
+                  <a:srgbClr val="17364A"/>
+                </a:solidFill>
+                <a:latin typeface="Aptos" pitchFamily="34" charset="0"/>
+                <a:ea typeface="Aptos" pitchFamily="34" charset="-122"/>
+                <a:cs typeface="Aptos" pitchFamily="34" charset="-120"/>
+              </a:rPr>
+              <a:t>Complete the practical exercise to apply the concept.</a:t>
+            </a:r>
+            <a:endParaRPr lang="en-US" sz="1380" dirty="0"/>
+          </a:p>
+          <a:p>
+            <a:r>
+              <a:rPr lang="en-US" sz="1380" dirty="0">
+                <a:solidFill>
+                  <a:srgbClr val="17364A"/>
+                </a:solidFill>
+                <a:latin typeface="Aptos" pitchFamily="34" charset="0"/>
+                <a:ea typeface="Aptos" pitchFamily="34" charset="-122"/>
+                <a:cs typeface="Aptos" pitchFamily="34" charset="-120"/>
+              </a:rPr>
+              <a:t>Use the notes and references for deeper review.</a:t>
+            </a:r>
+            <a:endParaRPr lang="en-US" sz="1380" dirty="0"/>
           </a:p>
         </p:txBody>
       </p:sp>
@@ -11741,13 +10771,11 @@
             </a:avLst>
           </a:prstGeom>
           <a:solidFill>
-            <a:srgbClr val="FFFFFF">
-              <a:alpha val="88000"/>
-            </a:srgbClr>
+            <a:srgbClr val="FFFFFF"/>
           </a:solidFill>
           <a:ln w="12700">
             <a:solidFill>
-              <a:srgbClr val="D6E8F2"/>
+              <a:srgbClr val="B9D7E6"/>
             </a:solidFill>
             <a:prstDash val="solid"/>
           </a:ln>
@@ -11755,190 +10783,112 @@
       </p:sp>
       <p:sp>
         <p:nvSpPr>
-          <p:cNvPr id="14" name="Shape 12"/>
-          <p:cNvSpPr/>
-          <p:nvPr/>
-        </p:nvSpPr>
-        <p:spPr>
-          <a:xfrm>
-            <a:off x="7891272" y="3108960"/>
-            <a:ext cx="566928" cy="566928"/>
-          </a:xfrm>
-          <a:prstGeom prst="ellipse">
-            <a:avLst/>
-          </a:prstGeom>
-          <a:solidFill>
-            <a:srgbClr val="0068B7"/>
-          </a:solidFill>
-          <a:ln w="12700">
-            <a:solidFill>
-              <a:srgbClr val="0068B7"/>
-            </a:solidFill>
-            <a:prstDash val="solid"/>
-          </a:ln>
-        </p:spPr>
-      </p:sp>
-      <p:sp>
-        <p:nvSpPr>
-          <p:cNvPr id="15" name="Shape 13"/>
-          <p:cNvSpPr/>
-          <p:nvPr/>
-        </p:nvSpPr>
-        <p:spPr>
-          <a:xfrm>
-            <a:off x="10287000" y="3108960"/>
-            <a:ext cx="566928" cy="566928"/>
-          </a:xfrm>
-          <a:prstGeom prst="ellipse">
-            <a:avLst/>
-          </a:prstGeom>
-          <a:solidFill>
-            <a:srgbClr val="2F8A28"/>
-          </a:solidFill>
-          <a:ln w="12700">
-            <a:solidFill>
-              <a:srgbClr val="2F8A28"/>
-            </a:solidFill>
-            <a:prstDash val="solid"/>
-          </a:ln>
-        </p:spPr>
+          <p:cNvPr id="14" name="Text 12"/>
+          <p:cNvSpPr/>
+          <p:nvPr/>
+        </p:nvSpPr>
+        <p:spPr>
+          <a:xfrm>
+            <a:off x="7799832" y="2935224"/>
+            <a:ext cx="3145536" cy="256032"/>
+          </a:xfrm>
+          <a:prstGeom prst="rect">
+            <a:avLst/>
+          </a:prstGeom>
+          <a:noFill/>
+          <a:ln/>
+        </p:spPr>
+        <p:txBody>
+          <a:bodyPr wrap="square" lIns="0" tIns="0" rIns="0" bIns="0" rtlCol="0" anchor="ctr"/>
+          <a:lstStyle/>
+          <a:p>
+            <a:pPr indent="0" marL="0">
+              <a:buNone/>
+            </a:pPr>
+            <a:r>
+              <a:rPr lang="en-US" sz="1300" b="1" dirty="0">
+                <a:solidFill>
+                  <a:srgbClr val="0068B7"/>
+                </a:solidFill>
+                <a:latin typeface="Aptos" pitchFamily="34" charset="0"/>
+                <a:ea typeface="Aptos" pitchFamily="34" charset="-122"/>
+                <a:cs typeface="Aptos" pitchFamily="34" charset="-120"/>
+              </a:rPr>
+              <a:t>Concept checkpoints</a:t>
+            </a:r>
+            <a:endParaRPr lang="en-US" sz="1300" dirty="0"/>
+          </a:p>
+        </p:txBody>
+      </p:sp>
+      <p:sp>
+        <p:nvSpPr>
+          <p:cNvPr id="15" name="Text 13"/>
+          <p:cNvSpPr/>
+          <p:nvPr/>
+        </p:nvSpPr>
+        <p:spPr>
+          <a:xfrm>
+            <a:off x="7818120" y="3300984"/>
+            <a:ext cx="3090672" cy="877824"/>
+          </a:xfrm>
+          <a:prstGeom prst="rect">
+            <a:avLst/>
+          </a:prstGeom>
+          <a:noFill/>
+          <a:ln/>
+        </p:spPr>
+        <p:txBody>
+          <a:bodyPr wrap="square" lIns="254" tIns="254" rIns="254" bIns="254" rtlCol="0" anchor="t">
+            <a:normAutofit/>
+          </a:bodyPr>
+          <a:lstStyle/>
+          <a:p>
+            <a:r>
+              <a:rPr lang="en-US" sz="1380" dirty="0">
+                <a:solidFill>
+                  <a:srgbClr val="17364A"/>
+                </a:solidFill>
+                <a:latin typeface="Aptos" pitchFamily="34" charset="0"/>
+                <a:ea typeface="Aptos" pitchFamily="34" charset="-122"/>
+                <a:cs typeface="Aptos" pitchFamily="34" charset="-120"/>
+              </a:rPr>
+              <a:t>NIST Artificial Intelligence Risk Management Framework (AI RMF 1.0):.</a:t>
+            </a:r>
+            <a:endParaRPr lang="en-US" sz="1380" dirty="0"/>
+          </a:p>
+          <a:p>
+            <a:r>
+              <a:rPr lang="en-US" sz="1380" dirty="0">
+                <a:solidFill>
+                  <a:srgbClr val="17364A"/>
+                </a:solidFill>
+                <a:latin typeface="Aptos" pitchFamily="34" charset="0"/>
+                <a:ea typeface="Aptos" pitchFamily="34" charset="-122"/>
+                <a:cs typeface="Aptos" pitchFamily="34" charset="-120"/>
+              </a:rPr>
+              <a:t>CDC Public Health Data Strategy and Data Modernization resources:.</a:t>
+            </a:r>
+            <a:endParaRPr lang="en-US" sz="1380" dirty="0"/>
+          </a:p>
+          <a:p>
+            <a:r>
+              <a:rPr lang="en-US" sz="1380" dirty="0">
+                <a:solidFill>
+                  <a:srgbClr val="17364A"/>
+                </a:solidFill>
+                <a:latin typeface="Aptos" pitchFamily="34" charset="0"/>
+                <a:ea typeface="Aptos" pitchFamily="34" charset="-122"/>
+                <a:cs typeface="Aptos" pitchFamily="34" charset="-120"/>
+              </a:rPr>
+              <a:t>WHO Ethics and Governance of Artificial Intelligence for Health:.</a:t>
+            </a:r>
+            <a:endParaRPr lang="en-US" sz="1380" dirty="0"/>
+          </a:p>
+        </p:txBody>
       </p:sp>
       <p:sp>
         <p:nvSpPr>
           <p:cNvPr id="16" name="Shape 14"/>
-          <p:cNvSpPr/>
-          <p:nvPr/>
-        </p:nvSpPr>
-        <p:spPr>
-          <a:xfrm>
-            <a:off x="9089136" y="3456432"/>
-            <a:ext cx="566928" cy="566928"/>
-          </a:xfrm>
-          <a:prstGeom prst="ellipse">
-            <a:avLst/>
-          </a:prstGeom>
-          <a:solidFill>
-            <a:srgbClr val="6A4CA3"/>
-          </a:solidFill>
-          <a:ln w="12700">
-            <a:solidFill>
-              <a:srgbClr val="6A4CA3"/>
-            </a:solidFill>
-            <a:prstDash val="solid"/>
-          </a:ln>
-        </p:spPr>
-      </p:sp>
-      <p:sp>
-        <p:nvSpPr>
-          <p:cNvPr id="17" name="Shape 15"/>
-          <p:cNvSpPr/>
-          <p:nvPr/>
-        </p:nvSpPr>
-        <p:spPr>
-          <a:xfrm>
-            <a:off x="8385048" y="3419856"/>
-            <a:ext cx="1975104" cy="0"/>
-          </a:xfrm>
-          <a:prstGeom prst="line">
-            <a:avLst/>
-          </a:prstGeom>
-          <a:noFill/>
-          <a:ln w="25400">
-            <a:solidFill>
-              <a:srgbClr val="8ABBD8"/>
-            </a:solidFill>
-            <a:prstDash val="solid"/>
-          </a:ln>
-        </p:spPr>
-      </p:sp>
-      <p:sp>
-        <p:nvSpPr>
-          <p:cNvPr id="18" name="Shape 16"/>
-          <p:cNvSpPr/>
-          <p:nvPr/>
-        </p:nvSpPr>
-        <p:spPr>
-          <a:xfrm>
-            <a:off x="8202168" y="3630168"/>
-            <a:ext cx="1170432" cy="118872"/>
-          </a:xfrm>
-          <a:prstGeom prst="line">
-            <a:avLst/>
-          </a:prstGeom>
-          <a:noFill/>
-          <a:ln w="25400">
-            <a:solidFill>
-              <a:srgbClr val="8ABBD8"/>
-            </a:solidFill>
-            <a:prstDash val="solid"/>
-          </a:ln>
-        </p:spPr>
-      </p:sp>
-      <p:sp>
-        <p:nvSpPr>
-          <p:cNvPr id="19" name="Shape 17"/>
-          <p:cNvSpPr/>
-          <p:nvPr/>
-        </p:nvSpPr>
-        <p:spPr>
-          <a:xfrm>
-            <a:off x="10543032" y="3630168"/>
-            <a:ext cx="-1170432" cy="118872"/>
-          </a:xfrm>
-          <a:prstGeom prst="line">
-            <a:avLst/>
-          </a:prstGeom>
-          <a:noFill/>
-          <a:ln w="25400">
-            <a:solidFill>
-              <a:srgbClr val="8ABBD8"/>
-            </a:solidFill>
-            <a:prstDash val="solid"/>
-          </a:ln>
-        </p:spPr>
-      </p:sp>
-      <p:sp>
-        <p:nvSpPr>
-          <p:cNvPr id="20" name="Text 18"/>
-          <p:cNvSpPr/>
-          <p:nvPr/>
-        </p:nvSpPr>
-        <p:spPr>
-          <a:xfrm>
-            <a:off x="7863840" y="4069080"/>
-            <a:ext cx="3017520" cy="164592"/>
-          </a:xfrm>
-          <a:prstGeom prst="rect">
-            <a:avLst/>
-          </a:prstGeom>
-          <a:noFill/>
-          <a:ln/>
-        </p:spPr>
-        <p:txBody>
-          <a:bodyPr wrap="square" lIns="0" tIns="0" rIns="0" bIns="0" rtlCol="0" anchor="ctr"/>
-          <a:lstStyle/>
-          <a:p>
-            <a:pPr algn="ctr" indent="0" marL="0">
-              <a:buNone/>
-            </a:pPr>
-            <a:r>
-              <a:rPr lang="en-US" sz="900" b="1" dirty="0">
-                <a:solidFill>
-                  <a:srgbClr val="003A63"/>
-                </a:solidFill>
-                <a:latin typeface="Aptos" pitchFamily="34" charset="0"/>
-                <a:ea typeface="Aptos" pitchFamily="34" charset="-122"/>
-                <a:cs typeface="Aptos" pitchFamily="34" charset="-120"/>
-              </a:rPr>
-              <a:t>Decision rights</a:t>
-            </a:r>
-            <a:endParaRPr lang="en-US" sz="900" dirty="0"/>
-          </a:p>
-        </p:txBody>
-      </p:sp>
-      <p:sp>
-        <p:nvSpPr>
-          <p:cNvPr id="21" name="Shape 19"/>
           <p:cNvSpPr/>
           <p:nvPr/>
         </p:nvSpPr>
@@ -11965,7 +10915,7 @@
       </p:sp>
       <p:sp>
         <p:nvSpPr>
-          <p:cNvPr id="22" name="Text 20"/>
+          <p:cNvPr id="17" name="Text 15"/>
           <p:cNvSpPr/>
           <p:nvPr/>
         </p:nvSpPr>
@@ -12004,7 +10954,7 @@
       </p:sp>
       <p:sp>
         <p:nvSpPr>
-          <p:cNvPr id="23" name="Text 21"/>
+          <p:cNvPr id="18" name="Text 16"/>
           <p:cNvSpPr/>
           <p:nvPr/>
         </p:nvSpPr>
@@ -12498,13 +11448,11 @@
             </a:avLst>
           </a:prstGeom>
           <a:solidFill>
-            <a:srgbClr val="FFFFFF">
-              <a:alpha val="88000"/>
-            </a:srgbClr>
+            <a:srgbClr val="FFFFFF"/>
           </a:solidFill>
           <a:ln w="12700">
             <a:solidFill>
-              <a:srgbClr val="D6E8F2"/>
+              <a:srgbClr val="B9D7E6"/>
             </a:solidFill>
             <a:prstDash val="solid"/>
           </a:ln>
@@ -12512,190 +11460,98 @@
       </p:sp>
       <p:sp>
         <p:nvSpPr>
-          <p:cNvPr id="14" name="Shape 12"/>
-          <p:cNvSpPr/>
-          <p:nvPr/>
-        </p:nvSpPr>
-        <p:spPr>
-          <a:xfrm>
-            <a:off x="7891272" y="3108960"/>
-            <a:ext cx="566928" cy="566928"/>
-          </a:xfrm>
-          <a:prstGeom prst="ellipse">
-            <a:avLst/>
-          </a:prstGeom>
-          <a:solidFill>
-            <a:srgbClr val="0068B7"/>
-          </a:solidFill>
-          <a:ln w="12700">
-            <a:solidFill>
-              <a:srgbClr val="0068B7"/>
-            </a:solidFill>
-            <a:prstDash val="solid"/>
-          </a:ln>
-        </p:spPr>
-      </p:sp>
-      <p:sp>
-        <p:nvSpPr>
-          <p:cNvPr id="15" name="Shape 13"/>
-          <p:cNvSpPr/>
-          <p:nvPr/>
-        </p:nvSpPr>
-        <p:spPr>
-          <a:xfrm>
-            <a:off x="10287000" y="3108960"/>
-            <a:ext cx="566928" cy="566928"/>
-          </a:xfrm>
-          <a:prstGeom prst="ellipse">
-            <a:avLst/>
-          </a:prstGeom>
-          <a:solidFill>
-            <a:srgbClr val="2F8A28"/>
-          </a:solidFill>
-          <a:ln w="12700">
-            <a:solidFill>
-              <a:srgbClr val="2F8A28"/>
-            </a:solidFill>
-            <a:prstDash val="solid"/>
-          </a:ln>
-        </p:spPr>
+          <p:cNvPr id="14" name="Text 12"/>
+          <p:cNvSpPr/>
+          <p:nvPr/>
+        </p:nvSpPr>
+        <p:spPr>
+          <a:xfrm>
+            <a:off x="7799832" y="2935224"/>
+            <a:ext cx="3145536" cy="256032"/>
+          </a:xfrm>
+          <a:prstGeom prst="rect">
+            <a:avLst/>
+          </a:prstGeom>
+          <a:noFill/>
+          <a:ln/>
+        </p:spPr>
+        <p:txBody>
+          <a:bodyPr wrap="square" lIns="0" tIns="0" rIns="0" bIns="0" rtlCol="0" anchor="ctr"/>
+          <a:lstStyle/>
+          <a:p>
+            <a:pPr indent="0" marL="0">
+              <a:buNone/>
+            </a:pPr>
+            <a:r>
+              <a:rPr lang="en-US" sz="1300" b="1" dirty="0">
+                <a:solidFill>
+                  <a:srgbClr val="0068B7"/>
+                </a:solidFill>
+                <a:latin typeface="Aptos" pitchFamily="34" charset="0"/>
+                <a:ea typeface="Aptos" pitchFamily="34" charset="-122"/>
+                <a:cs typeface="Aptos" pitchFamily="34" charset="-120"/>
+              </a:rPr>
+              <a:t>Concept checkpoints</a:t>
+            </a:r>
+            <a:endParaRPr lang="en-US" sz="1300" dirty="0"/>
+          </a:p>
+        </p:txBody>
+      </p:sp>
+      <p:sp>
+        <p:nvSpPr>
+          <p:cNvPr id="15" name="Text 13"/>
+          <p:cNvSpPr/>
+          <p:nvPr/>
+        </p:nvSpPr>
+        <p:spPr>
+          <a:xfrm>
+            <a:off x="7818120" y="3300984"/>
+            <a:ext cx="3090672" cy="877824"/>
+          </a:xfrm>
+          <a:prstGeom prst="rect">
+            <a:avLst/>
+          </a:prstGeom>
+          <a:noFill/>
+          <a:ln/>
+        </p:spPr>
+        <p:txBody>
+          <a:bodyPr wrap="square" lIns="254" tIns="254" rIns="254" bIns="254" rtlCol="0" anchor="t">
+            <a:normAutofit/>
+          </a:bodyPr>
+          <a:lstStyle/>
+          <a:p>
+            <a:r>
+              <a:rPr lang="en-US" sz="1380" dirty="0">
+                <a:solidFill>
+                  <a:srgbClr val="17364A"/>
+                </a:solidFill>
+                <a:latin typeface="Aptos" pitchFamily="34" charset="0"/>
+                <a:ea typeface="Aptos" pitchFamily="34" charset="-122"/>
+                <a:cs typeface="Aptos" pitchFamily="34" charset="-120"/>
+              </a:rPr>
+              <a:t>OMB Memorandum M-24-10 on federal AI governance, risk management, and innovation, where.</a:t>
+            </a:r>
+            <a:endParaRPr lang="en-US" sz="1380" dirty="0"/>
+          </a:p>
+          <a:p>
+            <a:r>
+              <a:rPr lang="en-US" sz="1380" dirty="0">
+                <a:solidFill>
+                  <a:srgbClr val="17364A"/>
+                </a:solidFill>
+                <a:latin typeface="Aptos" pitchFamily="34" charset="0"/>
+                <a:ea typeface="Aptos" pitchFamily="34" charset="-122"/>
+                <a:cs typeface="Aptos" pitchFamily="34" charset="-120"/>
+              </a:rPr>
+              <a:t>Agency strategic plans, procurement policies, privacy policies, cybersecurity policies,.</a:t>
+            </a:r>
+            <a:endParaRPr lang="en-US" sz="1380" dirty="0"/>
+          </a:p>
+        </p:txBody>
       </p:sp>
       <p:sp>
         <p:nvSpPr>
           <p:cNvPr id="16" name="Shape 14"/>
-          <p:cNvSpPr/>
-          <p:nvPr/>
-        </p:nvSpPr>
-        <p:spPr>
-          <a:xfrm>
-            <a:off x="9089136" y="3456432"/>
-            <a:ext cx="566928" cy="566928"/>
-          </a:xfrm>
-          <a:prstGeom prst="ellipse">
-            <a:avLst/>
-          </a:prstGeom>
-          <a:solidFill>
-            <a:srgbClr val="6A4CA3"/>
-          </a:solidFill>
-          <a:ln w="12700">
-            <a:solidFill>
-              <a:srgbClr val="6A4CA3"/>
-            </a:solidFill>
-            <a:prstDash val="solid"/>
-          </a:ln>
-        </p:spPr>
-      </p:sp>
-      <p:sp>
-        <p:nvSpPr>
-          <p:cNvPr id="17" name="Shape 15"/>
-          <p:cNvSpPr/>
-          <p:nvPr/>
-        </p:nvSpPr>
-        <p:spPr>
-          <a:xfrm>
-            <a:off x="8385048" y="3419856"/>
-            <a:ext cx="1975104" cy="0"/>
-          </a:xfrm>
-          <a:prstGeom prst="line">
-            <a:avLst/>
-          </a:prstGeom>
-          <a:noFill/>
-          <a:ln w="25400">
-            <a:solidFill>
-              <a:srgbClr val="8ABBD8"/>
-            </a:solidFill>
-            <a:prstDash val="solid"/>
-          </a:ln>
-        </p:spPr>
-      </p:sp>
-      <p:sp>
-        <p:nvSpPr>
-          <p:cNvPr id="18" name="Shape 16"/>
-          <p:cNvSpPr/>
-          <p:nvPr/>
-        </p:nvSpPr>
-        <p:spPr>
-          <a:xfrm>
-            <a:off x="8202168" y="3630168"/>
-            <a:ext cx="1170432" cy="118872"/>
-          </a:xfrm>
-          <a:prstGeom prst="line">
-            <a:avLst/>
-          </a:prstGeom>
-          <a:noFill/>
-          <a:ln w="25400">
-            <a:solidFill>
-              <a:srgbClr val="8ABBD8"/>
-            </a:solidFill>
-            <a:prstDash val="solid"/>
-          </a:ln>
-        </p:spPr>
-      </p:sp>
-      <p:sp>
-        <p:nvSpPr>
-          <p:cNvPr id="19" name="Shape 17"/>
-          <p:cNvSpPr/>
-          <p:nvPr/>
-        </p:nvSpPr>
-        <p:spPr>
-          <a:xfrm>
-            <a:off x="10543032" y="3630168"/>
-            <a:ext cx="-1170432" cy="118872"/>
-          </a:xfrm>
-          <a:prstGeom prst="line">
-            <a:avLst/>
-          </a:prstGeom>
-          <a:noFill/>
-          <a:ln w="25400">
-            <a:solidFill>
-              <a:srgbClr val="8ABBD8"/>
-            </a:solidFill>
-            <a:prstDash val="solid"/>
-          </a:ln>
-        </p:spPr>
-      </p:sp>
-      <p:sp>
-        <p:nvSpPr>
-          <p:cNvPr id="20" name="Text 18"/>
-          <p:cNvSpPr/>
-          <p:nvPr/>
-        </p:nvSpPr>
-        <p:spPr>
-          <a:xfrm>
-            <a:off x="7863840" y="4069080"/>
-            <a:ext cx="3017520" cy="164592"/>
-          </a:xfrm>
-          <a:prstGeom prst="rect">
-            <a:avLst/>
-          </a:prstGeom>
-          <a:noFill/>
-          <a:ln/>
-        </p:spPr>
-        <p:txBody>
-          <a:bodyPr wrap="square" lIns="0" tIns="0" rIns="0" bIns="0" rtlCol="0" anchor="ctr"/>
-          <a:lstStyle/>
-          <a:p>
-            <a:pPr algn="ctr" indent="0" marL="0">
-              <a:buNone/>
-            </a:pPr>
-            <a:r>
-              <a:rPr lang="en-US" sz="900" b="1" dirty="0">
-                <a:solidFill>
-                  <a:srgbClr val="003A63"/>
-                </a:solidFill>
-                <a:latin typeface="Aptos" pitchFamily="34" charset="0"/>
-                <a:ea typeface="Aptos" pitchFamily="34" charset="-122"/>
-                <a:cs typeface="Aptos" pitchFamily="34" charset="-120"/>
-              </a:rPr>
-              <a:t>Decision rights</a:t>
-            </a:r>
-            <a:endParaRPr lang="en-US" sz="900" dirty="0"/>
-          </a:p>
-        </p:txBody>
-      </p:sp>
-      <p:sp>
-        <p:nvSpPr>
-          <p:cNvPr id="21" name="Shape 19"/>
           <p:cNvSpPr/>
           <p:nvPr/>
         </p:nvSpPr>
@@ -12722,7 +11578,7 @@
       </p:sp>
       <p:sp>
         <p:nvSpPr>
-          <p:cNvPr id="22" name="Text 20"/>
+          <p:cNvPr id="17" name="Text 15"/>
           <p:cNvSpPr/>
           <p:nvPr/>
         </p:nvSpPr>
@@ -12761,7 +11617,7 @@
       </p:sp>
       <p:sp>
         <p:nvSpPr>
-          <p:cNvPr id="23" name="Text 21"/>
+          <p:cNvPr id="18" name="Text 16"/>
           <p:cNvSpPr/>
           <p:nvPr/>
         </p:nvSpPr>
@@ -13274,20 +12130,20 @@
         </p:nvSpPr>
         <p:spPr>
           <a:xfrm>
-            <a:off x="7818120" y="3977640"/>
-            <a:ext cx="972312" cy="749808"/>
+            <a:off x="8046720" y="3794760"/>
+            <a:ext cx="3063240" cy="1600200"/>
           </a:xfrm>
           <a:prstGeom prst="roundRect">
             <a:avLst>
-              <a:gd name="adj" fmla="val 14634"/>
+              <a:gd name="adj" fmla="val 6857"/>
             </a:avLst>
           </a:prstGeom>
           <a:solidFill>
-            <a:srgbClr val="0068B7"/>
+            <a:srgbClr val="FFFFFF"/>
           </a:solidFill>
           <a:ln w="12700">
             <a:solidFill>
-              <a:srgbClr val="0068B7"/>
+              <a:srgbClr val="B9D7E6"/>
             </a:solidFill>
             <a:prstDash val="solid"/>
           </a:ln>
@@ -13301,172 +12157,100 @@
         </p:nvSpPr>
         <p:spPr>
           <a:xfrm>
-            <a:off x="7891272" y="4169664"/>
-            <a:ext cx="826008" cy="310896"/>
-          </a:xfrm>
-          <a:prstGeom prst="rect">
-            <a:avLst/>
-          </a:prstGeom>
-          <a:noFill/>
-          <a:ln/>
-        </p:spPr>
-        <p:txBody>
-          <a:bodyPr wrap="square" lIns="0" tIns="0" rIns="0" bIns="0" rtlCol="0" anchor="ctr">
+            <a:off x="8211312" y="3941064"/>
+            <a:ext cx="2734056" cy="256032"/>
+          </a:xfrm>
+          <a:prstGeom prst="rect">
+            <a:avLst/>
+          </a:prstGeom>
+          <a:noFill/>
+          <a:ln/>
+        </p:spPr>
+        <p:txBody>
+          <a:bodyPr wrap="square" lIns="0" tIns="0" rIns="0" bIns="0" rtlCol="0" anchor="ctr"/>
+          <a:lstStyle/>
+          <a:p>
+            <a:pPr indent="0" marL="0">
+              <a:buNone/>
+            </a:pPr>
+            <a:r>
+              <a:rPr lang="en-US" sz="1300" b="1" dirty="0">
+                <a:solidFill>
+                  <a:srgbClr val="0068B7"/>
+                </a:solidFill>
+                <a:latin typeface="Aptos" pitchFamily="34" charset="0"/>
+                <a:ea typeface="Aptos" pitchFamily="34" charset="-122"/>
+                <a:cs typeface="Aptos" pitchFamily="34" charset="-120"/>
+              </a:rPr>
+              <a:t>Use the play links to</a:t>
+            </a:r>
+            <a:endParaRPr lang="en-US" sz="1300" dirty="0"/>
+          </a:p>
+        </p:txBody>
+      </p:sp>
+      <p:sp>
+        <p:nvSpPr>
+          <p:cNvPr id="15" name="Text 13"/>
+          <p:cNvSpPr/>
+          <p:nvPr/>
+        </p:nvSpPr>
+        <p:spPr>
+          <a:xfrm>
+            <a:off x="8229600" y="4306824"/>
+            <a:ext cx="2679192" cy="941832"/>
+          </a:xfrm>
+          <a:prstGeom prst="rect">
+            <a:avLst/>
+          </a:prstGeom>
+          <a:noFill/>
+          <a:ln/>
+        </p:spPr>
+        <p:txBody>
+          <a:bodyPr wrap="square" lIns="254" tIns="254" rIns="254" bIns="254" rtlCol="0" anchor="t">
             <a:normAutofit/>
           </a:bodyPr>
           <a:lstStyle/>
           <a:p>
-            <a:pPr algn="ctr" indent="0" marL="0">
-              <a:buNone/>
-            </a:pPr>
-            <a:r>
-              <a:rPr lang="en-US" sz="1500" b="1" dirty="0">
-                <a:solidFill>
-                  <a:srgbClr val="FFFFFF"/>
-                </a:solidFill>
-                <a:latin typeface="Aptos" pitchFamily="34" charset="0"/>
-                <a:ea typeface="Aptos" pitchFamily="34" charset="-122"/>
-                <a:cs typeface="Aptos" pitchFamily="34" charset="-120"/>
-              </a:rPr>
-              <a:t>Lesson</a:t>
-            </a:r>
-            <a:endParaRPr lang="en-US" sz="1500" dirty="0"/>
-          </a:p>
-        </p:txBody>
-      </p:sp>
-      <p:sp>
-        <p:nvSpPr>
-          <p:cNvPr id="15" name="Shape 13"/>
-          <p:cNvSpPr/>
-          <p:nvPr/>
-        </p:nvSpPr>
-        <p:spPr>
-          <a:xfrm>
-            <a:off x="9046464" y="3977640"/>
-            <a:ext cx="972312" cy="749808"/>
-          </a:xfrm>
-          <a:prstGeom prst="roundRect">
-            <a:avLst>
-              <a:gd name="adj" fmla="val 14634"/>
-            </a:avLst>
-          </a:prstGeom>
-          <a:solidFill>
-            <a:srgbClr val="2F8A28"/>
-          </a:solidFill>
-          <a:ln w="12700">
-            <a:solidFill>
-              <a:srgbClr val="2F8A28"/>
-            </a:solidFill>
-            <a:prstDash val="solid"/>
-          </a:ln>
-        </p:spPr>
-      </p:sp>
-      <p:sp>
-        <p:nvSpPr>
-          <p:cNvPr id="16" name="Text 14"/>
-          <p:cNvSpPr/>
-          <p:nvPr/>
-        </p:nvSpPr>
-        <p:spPr>
-          <a:xfrm>
-            <a:off x="9119616" y="4169664"/>
-            <a:ext cx="826008" cy="310896"/>
-          </a:xfrm>
-          <a:prstGeom prst="rect">
-            <a:avLst/>
-          </a:prstGeom>
-          <a:noFill/>
-          <a:ln/>
-        </p:spPr>
-        <p:txBody>
-          <a:bodyPr wrap="square" lIns="0" tIns="0" rIns="0" bIns="0" rtlCol="0" anchor="ctr">
-            <a:normAutofit/>
-          </a:bodyPr>
-          <a:lstStyle/>
-          <a:p>
-            <a:pPr algn="ctr" indent="0" marL="0">
-              <a:buNone/>
-            </a:pPr>
-            <a:r>
-              <a:rPr lang="en-US" sz="1500" b="1" dirty="0">
-                <a:solidFill>
-                  <a:srgbClr val="FFFFFF"/>
-                </a:solidFill>
-                <a:latin typeface="Aptos" pitchFamily="34" charset="0"/>
-                <a:ea typeface="Aptos" pitchFamily="34" charset="-122"/>
-                <a:cs typeface="Aptos" pitchFamily="34" charset="-120"/>
-              </a:rPr>
-              <a:t>Plays</a:t>
-            </a:r>
-            <a:endParaRPr lang="en-US" sz="1500" dirty="0"/>
-          </a:p>
-        </p:txBody>
-      </p:sp>
-      <p:sp>
-        <p:nvSpPr>
-          <p:cNvPr id="17" name="Shape 15"/>
-          <p:cNvSpPr/>
-          <p:nvPr/>
-        </p:nvSpPr>
-        <p:spPr>
-          <a:xfrm>
-            <a:off x="10274808" y="3977640"/>
-            <a:ext cx="972312" cy="749808"/>
-          </a:xfrm>
-          <a:prstGeom prst="roundRect">
-            <a:avLst>
-              <a:gd name="adj" fmla="val 14634"/>
-            </a:avLst>
-          </a:prstGeom>
-          <a:solidFill>
-            <a:srgbClr val="6A4CA3"/>
-          </a:solidFill>
-          <a:ln w="12700">
-            <a:solidFill>
-              <a:srgbClr val="6A4CA3"/>
-            </a:solidFill>
-            <a:prstDash val="solid"/>
-          </a:ln>
-        </p:spPr>
-      </p:sp>
-      <p:sp>
-        <p:nvSpPr>
-          <p:cNvPr id="18" name="Text 16"/>
-          <p:cNvSpPr/>
-          <p:nvPr/>
-        </p:nvSpPr>
-        <p:spPr>
-          <a:xfrm>
-            <a:off x="10347960" y="4169664"/>
-            <a:ext cx="826008" cy="310896"/>
-          </a:xfrm>
-          <a:prstGeom prst="rect">
-            <a:avLst/>
-          </a:prstGeom>
-          <a:noFill/>
-          <a:ln/>
-        </p:spPr>
-        <p:txBody>
-          <a:bodyPr wrap="square" lIns="0" tIns="0" rIns="0" bIns="0" rtlCol="0" anchor="ctr">
-            <a:normAutofit/>
-          </a:bodyPr>
-          <a:lstStyle/>
-          <a:p>
-            <a:pPr algn="ctr" indent="0" marL="0">
-              <a:buNone/>
-            </a:pPr>
-            <a:r>
-              <a:rPr lang="en-US" sz="1500" b="1" dirty="0">
-                <a:solidFill>
-                  <a:srgbClr val="FFFFFF"/>
-                </a:solidFill>
-                <a:latin typeface="Aptos" pitchFamily="34" charset="0"/>
-                <a:ea typeface="Aptos" pitchFamily="34" charset="-122"/>
-                <a:cs typeface="Aptos" pitchFamily="34" charset="-120"/>
-              </a:rPr>
-              <a:t>Action</a:t>
-            </a:r>
-            <a:endParaRPr lang="en-US" sz="1500" dirty="0"/>
+            <a:r>
+              <a:rPr lang="en-US" sz="1380" dirty="0">
+                <a:solidFill>
+                  <a:srgbClr val="17364A"/>
+                </a:solidFill>
+                <a:latin typeface="Aptos" pitchFamily="34" charset="0"/>
+                <a:ea typeface="Aptos" pitchFamily="34" charset="-122"/>
+                <a:cs typeface="Aptos" pitchFamily="34" charset="-120"/>
+              </a:rPr>
+              <a:t>Locate the decision point in the playbook sequence.</a:t>
+            </a:r>
+            <a:endParaRPr lang="en-US" sz="1380" dirty="0"/>
+          </a:p>
+          <a:p>
+            <a:r>
+              <a:rPr lang="en-US" sz="1380" dirty="0">
+                <a:solidFill>
+                  <a:srgbClr val="17364A"/>
+                </a:solidFill>
+                <a:latin typeface="Aptos" pitchFamily="34" charset="0"/>
+                <a:ea typeface="Aptos" pitchFamily="34" charset="-122"/>
+                <a:cs typeface="Aptos" pitchFamily="34" charset="-120"/>
+              </a:rPr>
+              <a:t>Identify who should participate in the work.</a:t>
+            </a:r>
+            <a:endParaRPr lang="en-US" sz="1380" dirty="0"/>
+          </a:p>
+          <a:p>
+            <a:r>
+              <a:rPr lang="en-US" sz="1380" dirty="0">
+                <a:solidFill>
+                  <a:srgbClr val="17364A"/>
+                </a:solidFill>
+                <a:latin typeface="Aptos" pitchFamily="34" charset="0"/>
+                <a:ea typeface="Aptos" pitchFamily="34" charset="-122"/>
+                <a:cs typeface="Aptos" pitchFamily="34" charset="-120"/>
+              </a:rPr>
+              <a:t>Document the review, approval, or implementation step.</a:t>
+            </a:r>
+            <a:endParaRPr lang="en-US" sz="1380" dirty="0"/>
           </a:p>
         </p:txBody>
       </p:sp>
@@ -13944,20 +12728,20 @@
         </p:nvSpPr>
         <p:spPr>
           <a:xfrm>
-            <a:off x="7818120" y="3977640"/>
-            <a:ext cx="972312" cy="749808"/>
+            <a:off x="8046720" y="3794760"/>
+            <a:ext cx="3063240" cy="1600200"/>
           </a:xfrm>
           <a:prstGeom prst="roundRect">
             <a:avLst>
-              <a:gd name="adj" fmla="val 14634"/>
+              <a:gd name="adj" fmla="val 6857"/>
             </a:avLst>
           </a:prstGeom>
           <a:solidFill>
-            <a:srgbClr val="0068B7"/>
+            <a:srgbClr val="FFFFFF"/>
           </a:solidFill>
           <a:ln w="12700">
             <a:solidFill>
-              <a:srgbClr val="0068B7"/>
+              <a:srgbClr val="B9D7E6"/>
             </a:solidFill>
             <a:prstDash val="solid"/>
           </a:ln>
@@ -13971,172 +12755,100 @@
         </p:nvSpPr>
         <p:spPr>
           <a:xfrm>
-            <a:off x="7891272" y="4169664"/>
-            <a:ext cx="826008" cy="310896"/>
-          </a:xfrm>
-          <a:prstGeom prst="rect">
-            <a:avLst/>
-          </a:prstGeom>
-          <a:noFill/>
-          <a:ln/>
-        </p:spPr>
-        <p:txBody>
-          <a:bodyPr wrap="square" lIns="0" tIns="0" rIns="0" bIns="0" rtlCol="0" anchor="ctr">
+            <a:off x="8211312" y="3941064"/>
+            <a:ext cx="2734056" cy="256032"/>
+          </a:xfrm>
+          <a:prstGeom prst="rect">
+            <a:avLst/>
+          </a:prstGeom>
+          <a:noFill/>
+          <a:ln/>
+        </p:spPr>
+        <p:txBody>
+          <a:bodyPr wrap="square" lIns="0" tIns="0" rIns="0" bIns="0" rtlCol="0" anchor="ctr"/>
+          <a:lstStyle/>
+          <a:p>
+            <a:pPr indent="0" marL="0">
+              <a:buNone/>
+            </a:pPr>
+            <a:r>
+              <a:rPr lang="en-US" sz="1300" b="1" dirty="0">
+                <a:solidFill>
+                  <a:srgbClr val="0068B7"/>
+                </a:solidFill>
+                <a:latin typeface="Aptos" pitchFamily="34" charset="0"/>
+                <a:ea typeface="Aptos" pitchFamily="34" charset="-122"/>
+                <a:cs typeface="Aptos" pitchFamily="34" charset="-120"/>
+              </a:rPr>
+              <a:t>Tool selection cues</a:t>
+            </a:r>
+            <a:endParaRPr lang="en-US" sz="1300" dirty="0"/>
+          </a:p>
+        </p:txBody>
+      </p:sp>
+      <p:sp>
+        <p:nvSpPr>
+          <p:cNvPr id="15" name="Text 13"/>
+          <p:cNvSpPr/>
+          <p:nvPr/>
+        </p:nvSpPr>
+        <p:spPr>
+          <a:xfrm>
+            <a:off x="8229600" y="4306824"/>
+            <a:ext cx="2679192" cy="941832"/>
+          </a:xfrm>
+          <a:prstGeom prst="rect">
+            <a:avLst/>
+          </a:prstGeom>
+          <a:noFill/>
+          <a:ln/>
+        </p:spPr>
+        <p:txBody>
+          <a:bodyPr wrap="square" lIns="254" tIns="254" rIns="254" bIns="254" rtlCol="0" anchor="t">
             <a:normAutofit/>
           </a:bodyPr>
           <a:lstStyle/>
           <a:p>
-            <a:pPr algn="ctr" indent="0" marL="0">
-              <a:buNone/>
-            </a:pPr>
-            <a:r>
-              <a:rPr lang="en-US" sz="1500" b="1" dirty="0">
-                <a:solidFill>
-                  <a:srgbClr val="FFFFFF"/>
-                </a:solidFill>
-                <a:latin typeface="Aptos" pitchFamily="34" charset="0"/>
-                <a:ea typeface="Aptos" pitchFamily="34" charset="-122"/>
-                <a:cs typeface="Aptos" pitchFamily="34" charset="-120"/>
-              </a:rPr>
-              <a:t>Concept</a:t>
-            </a:r>
-            <a:endParaRPr lang="en-US" sz="1500" dirty="0"/>
-          </a:p>
-        </p:txBody>
-      </p:sp>
-      <p:sp>
-        <p:nvSpPr>
-          <p:cNvPr id="15" name="Shape 13"/>
-          <p:cNvSpPr/>
-          <p:nvPr/>
-        </p:nvSpPr>
-        <p:spPr>
-          <a:xfrm>
-            <a:off x="9046464" y="3977640"/>
-            <a:ext cx="972312" cy="749808"/>
-          </a:xfrm>
-          <a:prstGeom prst="roundRect">
-            <a:avLst>
-              <a:gd name="adj" fmla="val 14634"/>
-            </a:avLst>
-          </a:prstGeom>
-          <a:solidFill>
-            <a:srgbClr val="2F8A28"/>
-          </a:solidFill>
-          <a:ln w="12700">
-            <a:solidFill>
-              <a:srgbClr val="2F8A28"/>
-            </a:solidFill>
-            <a:prstDash val="solid"/>
-          </a:ln>
-        </p:spPr>
-      </p:sp>
-      <p:sp>
-        <p:nvSpPr>
-          <p:cNvPr id="16" name="Text 14"/>
-          <p:cNvSpPr/>
-          <p:nvPr/>
-        </p:nvSpPr>
-        <p:spPr>
-          <a:xfrm>
-            <a:off x="9119616" y="4169664"/>
-            <a:ext cx="826008" cy="310896"/>
-          </a:xfrm>
-          <a:prstGeom prst="rect">
-            <a:avLst/>
-          </a:prstGeom>
-          <a:noFill/>
-          <a:ln/>
-        </p:spPr>
-        <p:txBody>
-          <a:bodyPr wrap="square" lIns="0" tIns="0" rIns="0" bIns="0" rtlCol="0" anchor="ctr">
-            <a:normAutofit/>
-          </a:bodyPr>
-          <a:lstStyle/>
-          <a:p>
-            <a:pPr algn="ctr" indent="0" marL="0">
-              <a:buNone/>
-            </a:pPr>
-            <a:r>
-              <a:rPr lang="en-US" sz="1500" b="1" dirty="0">
-                <a:solidFill>
-                  <a:srgbClr val="FFFFFF"/>
-                </a:solidFill>
-                <a:latin typeface="Aptos" pitchFamily="34" charset="0"/>
-                <a:ea typeface="Aptos" pitchFamily="34" charset="-122"/>
-                <a:cs typeface="Aptos" pitchFamily="34" charset="-120"/>
-              </a:rPr>
-              <a:t>Tool</a:t>
-            </a:r>
-            <a:endParaRPr lang="en-US" sz="1500" dirty="0"/>
-          </a:p>
-        </p:txBody>
-      </p:sp>
-      <p:sp>
-        <p:nvSpPr>
-          <p:cNvPr id="17" name="Shape 15"/>
-          <p:cNvSpPr/>
-          <p:nvPr/>
-        </p:nvSpPr>
-        <p:spPr>
-          <a:xfrm>
-            <a:off x="10274808" y="3977640"/>
-            <a:ext cx="972312" cy="749808"/>
-          </a:xfrm>
-          <a:prstGeom prst="roundRect">
-            <a:avLst>
-              <a:gd name="adj" fmla="val 14634"/>
-            </a:avLst>
-          </a:prstGeom>
-          <a:solidFill>
-            <a:srgbClr val="D69A2D"/>
-          </a:solidFill>
-          <a:ln w="12700">
-            <a:solidFill>
-              <a:srgbClr val="D69A2D"/>
-            </a:solidFill>
-            <a:prstDash val="solid"/>
-          </a:ln>
-        </p:spPr>
-      </p:sp>
-      <p:sp>
-        <p:nvSpPr>
-          <p:cNvPr id="18" name="Text 16"/>
-          <p:cNvSpPr/>
-          <p:nvPr/>
-        </p:nvSpPr>
-        <p:spPr>
-          <a:xfrm>
-            <a:off x="10347960" y="4169664"/>
-            <a:ext cx="826008" cy="310896"/>
-          </a:xfrm>
-          <a:prstGeom prst="rect">
-            <a:avLst/>
-          </a:prstGeom>
-          <a:noFill/>
-          <a:ln/>
-        </p:spPr>
-        <p:txBody>
-          <a:bodyPr wrap="square" lIns="0" tIns="0" rIns="0" bIns="0" rtlCol="0" anchor="ctr">
-            <a:normAutofit/>
-          </a:bodyPr>
-          <a:lstStyle/>
-          <a:p>
-            <a:pPr algn="ctr" indent="0" marL="0">
-              <a:buNone/>
-            </a:pPr>
-            <a:r>
-              <a:rPr lang="en-US" sz="1500" b="1" dirty="0">
-                <a:solidFill>
-                  <a:srgbClr val="FFFFFF"/>
-                </a:solidFill>
-                <a:latin typeface="Aptos" pitchFamily="34" charset="0"/>
-                <a:ea typeface="Aptos" pitchFamily="34" charset="-122"/>
-                <a:cs typeface="Aptos" pitchFamily="34" charset="-120"/>
-              </a:rPr>
-              <a:t>Artifact</a:t>
-            </a:r>
-            <a:endParaRPr lang="en-US" sz="1500" dirty="0"/>
+            <a:r>
+              <a:rPr lang="en-US" sz="1380" dirty="0">
+                <a:solidFill>
+                  <a:srgbClr val="17364A"/>
+                </a:solidFill>
+                <a:latin typeface="Aptos" pitchFamily="34" charset="0"/>
+                <a:ea typeface="Aptos" pitchFamily="34" charset="-122"/>
+                <a:cs typeface="Aptos" pitchFamily="34" charset="-120"/>
+              </a:rPr>
+              <a:t>Use a tool when no comparable local process exists.</a:t>
+            </a:r>
+            <a:endParaRPr lang="en-US" sz="1380" dirty="0"/>
+          </a:p>
+          <a:p>
+            <a:r>
+              <a:rPr lang="en-US" sz="1380" dirty="0">
+                <a:solidFill>
+                  <a:srgbClr val="17364A"/>
+                </a:solidFill>
+                <a:latin typeface="Aptos" pitchFamily="34" charset="0"/>
+                <a:ea typeface="Aptos" pitchFamily="34" charset="-122"/>
+                <a:cs typeface="Aptos" pitchFamily="34" charset="-120"/>
+              </a:rPr>
+              <a:t>Adapt existing department templates when they already fit the purpose.</a:t>
+            </a:r>
+            <a:endParaRPr lang="en-US" sz="1380" dirty="0"/>
+          </a:p>
+          <a:p>
+            <a:r>
+              <a:rPr lang="en-US" sz="1380" dirty="0">
+                <a:solidFill>
+                  <a:srgbClr val="17364A"/>
+                </a:solidFill>
+                <a:latin typeface="Aptos" pitchFamily="34" charset="0"/>
+                <a:ea typeface="Aptos" pitchFamily="34" charset="-122"/>
+                <a:cs typeface="Aptos" pitchFamily="34" charset="-120"/>
+              </a:rPr>
+              <a:t>Save the completed artifact as evidence of the decision.</a:t>
+            </a:r>
+            <a:endParaRPr lang="en-US" sz="1380" dirty="0"/>
           </a:p>
         </p:txBody>
       </p:sp>
@@ -14609,13 +13321,11 @@
             </a:avLst>
           </a:prstGeom>
           <a:solidFill>
-            <a:srgbClr val="FFFFFF">
-              <a:alpha val="88000"/>
-            </a:srgbClr>
+            <a:srgbClr val="FFFFFF"/>
           </a:solidFill>
           <a:ln w="12700">
             <a:solidFill>
-              <a:srgbClr val="D6E8F2"/>
+              <a:srgbClr val="B9D7E6"/>
             </a:solidFill>
             <a:prstDash val="solid"/>
           </a:ln>
@@ -14623,190 +13333,112 @@
       </p:sp>
       <p:sp>
         <p:nvSpPr>
-          <p:cNvPr id="14" name="Shape 12"/>
-          <p:cNvSpPr/>
-          <p:nvPr/>
-        </p:nvSpPr>
-        <p:spPr>
-          <a:xfrm>
-            <a:off x="7891272" y="3108960"/>
-            <a:ext cx="566928" cy="566928"/>
-          </a:xfrm>
-          <a:prstGeom prst="ellipse">
-            <a:avLst/>
-          </a:prstGeom>
-          <a:solidFill>
-            <a:srgbClr val="0068B7"/>
-          </a:solidFill>
-          <a:ln w="12700">
-            <a:solidFill>
-              <a:srgbClr val="0068B7"/>
-            </a:solidFill>
-            <a:prstDash val="solid"/>
-          </a:ln>
-        </p:spPr>
-      </p:sp>
-      <p:sp>
-        <p:nvSpPr>
-          <p:cNvPr id="15" name="Shape 13"/>
-          <p:cNvSpPr/>
-          <p:nvPr/>
-        </p:nvSpPr>
-        <p:spPr>
-          <a:xfrm>
-            <a:off x="10287000" y="3108960"/>
-            <a:ext cx="566928" cy="566928"/>
-          </a:xfrm>
-          <a:prstGeom prst="ellipse">
-            <a:avLst/>
-          </a:prstGeom>
-          <a:solidFill>
-            <a:srgbClr val="2F8A28"/>
-          </a:solidFill>
-          <a:ln w="12700">
-            <a:solidFill>
-              <a:srgbClr val="2F8A28"/>
-            </a:solidFill>
-            <a:prstDash val="solid"/>
-          </a:ln>
-        </p:spPr>
+          <p:cNvPr id="14" name="Text 12"/>
+          <p:cNvSpPr/>
+          <p:nvPr/>
+        </p:nvSpPr>
+        <p:spPr>
+          <a:xfrm>
+            <a:off x="7799832" y="2935224"/>
+            <a:ext cx="3145536" cy="256032"/>
+          </a:xfrm>
+          <a:prstGeom prst="rect">
+            <a:avLst/>
+          </a:prstGeom>
+          <a:noFill/>
+          <a:ln/>
+        </p:spPr>
+        <p:txBody>
+          <a:bodyPr wrap="square" lIns="0" tIns="0" rIns="0" bIns="0" rtlCol="0" anchor="ctr"/>
+          <a:lstStyle/>
+          <a:p>
+            <a:pPr indent="0" marL="0">
+              <a:buNone/>
+            </a:pPr>
+            <a:r>
+              <a:rPr lang="en-US" sz="1300" b="1" dirty="0">
+                <a:solidFill>
+                  <a:srgbClr val="0068B7"/>
+                </a:solidFill>
+                <a:latin typeface="Aptos" pitchFamily="34" charset="0"/>
+                <a:ea typeface="Aptos" pitchFamily="34" charset="-122"/>
+                <a:cs typeface="Aptos" pitchFamily="34" charset="-120"/>
+              </a:rPr>
+              <a:t>Concept checkpoints</a:t>
+            </a:r>
+            <a:endParaRPr lang="en-US" sz="1300" dirty="0"/>
+          </a:p>
+        </p:txBody>
+      </p:sp>
+      <p:sp>
+        <p:nvSpPr>
+          <p:cNvPr id="15" name="Text 13"/>
+          <p:cNvSpPr/>
+          <p:nvPr/>
+        </p:nvSpPr>
+        <p:spPr>
+          <a:xfrm>
+            <a:off x="7818120" y="3300984"/>
+            <a:ext cx="3090672" cy="877824"/>
+          </a:xfrm>
+          <a:prstGeom prst="rect">
+            <a:avLst/>
+          </a:prstGeom>
+          <a:noFill/>
+          <a:ln/>
+        </p:spPr>
+        <p:txBody>
+          <a:bodyPr wrap="square" lIns="254" tIns="254" rIns="254" bIns="254" rtlCol="0" anchor="t">
+            <a:normAutofit/>
+          </a:bodyPr>
+          <a:lstStyle/>
+          <a:p>
+            <a:r>
+              <a:rPr lang="en-US" sz="1380" dirty="0">
+                <a:solidFill>
+                  <a:srgbClr val="17364A"/>
+                </a:solidFill>
+                <a:latin typeface="Aptos" pitchFamily="34" charset="0"/>
+                <a:ea typeface="Aptos" pitchFamily="34" charset="-122"/>
+                <a:cs typeface="Aptos" pitchFamily="34" charset="-120"/>
+              </a:rPr>
+              <a:t>Distinguish between a governance committee, technical review group, executive sponsor, and.</a:t>
+            </a:r>
+            <a:endParaRPr lang="en-US" sz="1380" dirty="0"/>
+          </a:p>
+          <a:p>
+            <a:r>
+              <a:rPr lang="en-US" sz="1380" dirty="0">
+                <a:solidFill>
+                  <a:srgbClr val="17364A"/>
+                </a:solidFill>
+                <a:latin typeface="Aptos" pitchFamily="34" charset="0"/>
+                <a:ea typeface="Aptos" pitchFamily="34" charset="-122"/>
+                <a:cs typeface="Aptos" pitchFamily="34" charset="-120"/>
+              </a:rPr>
+              <a:t>Develop operating procedures for intake, review, approval, monitoring, exceptions,.</a:t>
+            </a:r>
+            <a:endParaRPr lang="en-US" sz="1380" dirty="0"/>
+          </a:p>
+          <a:p>
+            <a:r>
+              <a:rPr lang="en-US" sz="1380" dirty="0">
+                <a:solidFill>
+                  <a:srgbClr val="17364A"/>
+                </a:solidFill>
+                <a:latin typeface="Aptos" pitchFamily="34" charset="0"/>
+                <a:ea typeface="Aptos" pitchFamily="34" charset="-122"/>
+                <a:cs typeface="Aptos" pitchFamily="34" charset="-120"/>
+              </a:rPr>
+              <a:t>Produce a draft AI governance charter or operating model that can be adapted by a public.</a:t>
+            </a:r>
+            <a:endParaRPr lang="en-US" sz="1380" dirty="0"/>
+          </a:p>
+        </p:txBody>
       </p:sp>
       <p:sp>
         <p:nvSpPr>
           <p:cNvPr id="16" name="Shape 14"/>
-          <p:cNvSpPr/>
-          <p:nvPr/>
-        </p:nvSpPr>
-        <p:spPr>
-          <a:xfrm>
-            <a:off x="9089136" y="3456432"/>
-            <a:ext cx="566928" cy="566928"/>
-          </a:xfrm>
-          <a:prstGeom prst="ellipse">
-            <a:avLst/>
-          </a:prstGeom>
-          <a:solidFill>
-            <a:srgbClr val="6A4CA3"/>
-          </a:solidFill>
-          <a:ln w="12700">
-            <a:solidFill>
-              <a:srgbClr val="6A4CA3"/>
-            </a:solidFill>
-            <a:prstDash val="solid"/>
-          </a:ln>
-        </p:spPr>
-      </p:sp>
-      <p:sp>
-        <p:nvSpPr>
-          <p:cNvPr id="17" name="Shape 15"/>
-          <p:cNvSpPr/>
-          <p:nvPr/>
-        </p:nvSpPr>
-        <p:spPr>
-          <a:xfrm>
-            <a:off x="8385048" y="3419856"/>
-            <a:ext cx="1975104" cy="0"/>
-          </a:xfrm>
-          <a:prstGeom prst="line">
-            <a:avLst/>
-          </a:prstGeom>
-          <a:noFill/>
-          <a:ln w="25400">
-            <a:solidFill>
-              <a:srgbClr val="8ABBD8"/>
-            </a:solidFill>
-            <a:prstDash val="solid"/>
-          </a:ln>
-        </p:spPr>
-      </p:sp>
-      <p:sp>
-        <p:nvSpPr>
-          <p:cNvPr id="18" name="Shape 16"/>
-          <p:cNvSpPr/>
-          <p:nvPr/>
-        </p:nvSpPr>
-        <p:spPr>
-          <a:xfrm>
-            <a:off x="8202168" y="3630168"/>
-            <a:ext cx="1170432" cy="118872"/>
-          </a:xfrm>
-          <a:prstGeom prst="line">
-            <a:avLst/>
-          </a:prstGeom>
-          <a:noFill/>
-          <a:ln w="25400">
-            <a:solidFill>
-              <a:srgbClr val="8ABBD8"/>
-            </a:solidFill>
-            <a:prstDash val="solid"/>
-          </a:ln>
-        </p:spPr>
-      </p:sp>
-      <p:sp>
-        <p:nvSpPr>
-          <p:cNvPr id="19" name="Shape 17"/>
-          <p:cNvSpPr/>
-          <p:nvPr/>
-        </p:nvSpPr>
-        <p:spPr>
-          <a:xfrm>
-            <a:off x="10543032" y="3630168"/>
-            <a:ext cx="-1170432" cy="118872"/>
-          </a:xfrm>
-          <a:prstGeom prst="line">
-            <a:avLst/>
-          </a:prstGeom>
-          <a:noFill/>
-          <a:ln w="25400">
-            <a:solidFill>
-              <a:srgbClr val="8ABBD8"/>
-            </a:solidFill>
-            <a:prstDash val="solid"/>
-          </a:ln>
-        </p:spPr>
-      </p:sp>
-      <p:sp>
-        <p:nvSpPr>
-          <p:cNvPr id="20" name="Text 18"/>
-          <p:cNvSpPr/>
-          <p:nvPr/>
-        </p:nvSpPr>
-        <p:spPr>
-          <a:xfrm>
-            <a:off x="7863840" y="4069080"/>
-            <a:ext cx="3017520" cy="164592"/>
-          </a:xfrm>
-          <a:prstGeom prst="rect">
-            <a:avLst/>
-          </a:prstGeom>
-          <a:noFill/>
-          <a:ln/>
-        </p:spPr>
-        <p:txBody>
-          <a:bodyPr wrap="square" lIns="0" tIns="0" rIns="0" bIns="0" rtlCol="0" anchor="ctr"/>
-          <a:lstStyle/>
-          <a:p>
-            <a:pPr algn="ctr" indent="0" marL="0">
-              <a:buNone/>
-            </a:pPr>
-            <a:r>
-              <a:rPr lang="en-US" sz="900" b="1" dirty="0">
-                <a:solidFill>
-                  <a:srgbClr val="003A63"/>
-                </a:solidFill>
-                <a:latin typeface="Aptos" pitchFamily="34" charset="0"/>
-                <a:ea typeface="Aptos" pitchFamily="34" charset="-122"/>
-                <a:cs typeface="Aptos" pitchFamily="34" charset="-120"/>
-              </a:rPr>
-              <a:t>Decision rights</a:t>
-            </a:r>
-            <a:endParaRPr lang="en-US" sz="900" dirty="0"/>
-          </a:p>
-        </p:txBody>
-      </p:sp>
-      <p:sp>
-        <p:nvSpPr>
-          <p:cNvPr id="21" name="Shape 19"/>
           <p:cNvSpPr/>
           <p:nvPr/>
         </p:nvSpPr>
@@ -14833,7 +13465,7 @@
       </p:sp>
       <p:sp>
         <p:nvSpPr>
-          <p:cNvPr id="22" name="Text 20"/>
+          <p:cNvPr id="17" name="Text 15"/>
           <p:cNvSpPr/>
           <p:nvPr/>
         </p:nvSpPr>
@@ -14872,7 +13504,7 @@
       </p:sp>
       <p:sp>
         <p:nvSpPr>
-          <p:cNvPr id="23" name="Text 21"/>
+          <p:cNvPr id="18" name="Text 16"/>
           <p:cNvSpPr/>
           <p:nvPr/>
         </p:nvSpPr>
@@ -15380,13 +14012,11 @@
             </a:avLst>
           </a:prstGeom>
           <a:solidFill>
-            <a:srgbClr val="FFFFFF">
-              <a:alpha val="88000"/>
-            </a:srgbClr>
+            <a:srgbClr val="FFFFFF"/>
           </a:solidFill>
           <a:ln w="12700">
             <a:solidFill>
-              <a:srgbClr val="D6E8F2"/>
+              <a:srgbClr val="B9D7E6"/>
             </a:solidFill>
             <a:prstDash val="solid"/>
           </a:ln>
@@ -15394,190 +14024,112 @@
       </p:sp>
       <p:sp>
         <p:nvSpPr>
-          <p:cNvPr id="14" name="Shape 12"/>
-          <p:cNvSpPr/>
-          <p:nvPr/>
-        </p:nvSpPr>
-        <p:spPr>
-          <a:xfrm>
-            <a:off x="7891272" y="3108960"/>
-            <a:ext cx="566928" cy="566928"/>
-          </a:xfrm>
-          <a:prstGeom prst="ellipse">
-            <a:avLst/>
-          </a:prstGeom>
-          <a:solidFill>
-            <a:srgbClr val="0068B7"/>
-          </a:solidFill>
-          <a:ln w="12700">
-            <a:solidFill>
-              <a:srgbClr val="0068B7"/>
-            </a:solidFill>
-            <a:prstDash val="solid"/>
-          </a:ln>
-        </p:spPr>
-      </p:sp>
-      <p:sp>
-        <p:nvSpPr>
-          <p:cNvPr id="15" name="Shape 13"/>
-          <p:cNvSpPr/>
-          <p:nvPr/>
-        </p:nvSpPr>
-        <p:spPr>
-          <a:xfrm>
-            <a:off x="10287000" y="3108960"/>
-            <a:ext cx="566928" cy="566928"/>
-          </a:xfrm>
-          <a:prstGeom prst="ellipse">
-            <a:avLst/>
-          </a:prstGeom>
-          <a:solidFill>
-            <a:srgbClr val="2F8A28"/>
-          </a:solidFill>
-          <a:ln w="12700">
-            <a:solidFill>
-              <a:srgbClr val="2F8A28"/>
-            </a:solidFill>
-            <a:prstDash val="solid"/>
-          </a:ln>
-        </p:spPr>
+          <p:cNvPr id="14" name="Text 12"/>
+          <p:cNvSpPr/>
+          <p:nvPr/>
+        </p:nvSpPr>
+        <p:spPr>
+          <a:xfrm>
+            <a:off x="7799832" y="2935224"/>
+            <a:ext cx="3145536" cy="256032"/>
+          </a:xfrm>
+          <a:prstGeom prst="rect">
+            <a:avLst/>
+          </a:prstGeom>
+          <a:noFill/>
+          <a:ln/>
+        </p:spPr>
+        <p:txBody>
+          <a:bodyPr wrap="square" lIns="0" tIns="0" rIns="0" bIns="0" rtlCol="0" anchor="ctr"/>
+          <a:lstStyle/>
+          <a:p>
+            <a:pPr indent="0" marL="0">
+              <a:buNone/>
+            </a:pPr>
+            <a:r>
+              <a:rPr lang="en-US" sz="1300" b="1" dirty="0">
+                <a:solidFill>
+                  <a:srgbClr val="0068B7"/>
+                </a:solidFill>
+                <a:latin typeface="Aptos" pitchFamily="34" charset="0"/>
+                <a:ea typeface="Aptos" pitchFamily="34" charset="-122"/>
+                <a:cs typeface="Aptos" pitchFamily="34" charset="-120"/>
+              </a:rPr>
+              <a:t>Concept checkpoints</a:t>
+            </a:r>
+            <a:endParaRPr lang="en-US" sz="1300" dirty="0"/>
+          </a:p>
+        </p:txBody>
+      </p:sp>
+      <p:sp>
+        <p:nvSpPr>
+          <p:cNvPr id="15" name="Text 13"/>
+          <p:cNvSpPr/>
+          <p:nvPr/>
+        </p:nvSpPr>
+        <p:spPr>
+          <a:xfrm>
+            <a:off x="7818120" y="3300984"/>
+            <a:ext cx="3090672" cy="877824"/>
+          </a:xfrm>
+          <a:prstGeom prst="rect">
+            <a:avLst/>
+          </a:prstGeom>
+          <a:noFill/>
+          <a:ln/>
+        </p:spPr>
+        <p:txBody>
+          <a:bodyPr wrap="square" lIns="254" tIns="254" rIns="254" bIns="254" rtlCol="0" anchor="t">
+            <a:normAutofit/>
+          </a:bodyPr>
+          <a:lstStyle/>
+          <a:p>
+            <a:r>
+              <a:rPr lang="en-US" sz="1380" dirty="0">
+                <a:solidFill>
+                  <a:srgbClr val="17364A"/>
+                </a:solidFill>
+                <a:latin typeface="Aptos" pitchFamily="34" charset="0"/>
+                <a:ea typeface="Aptos" pitchFamily="34" charset="-122"/>
+                <a:cs typeface="Aptos" pitchFamily="34" charset="-120"/>
+              </a:rPr>
+              <a:t>AI governance needs a formal home before an agency begins approving tools, pilots, vendor.</a:t>
+            </a:r>
+            <a:endParaRPr lang="en-US" sz="1380" dirty="0"/>
+          </a:p>
+          <a:p>
+            <a:r>
+              <a:rPr lang="en-US" sz="1380" dirty="0">
+                <a:solidFill>
+                  <a:srgbClr val="17364A"/>
+                </a:solidFill>
+                <a:latin typeface="Aptos" pitchFamily="34" charset="0"/>
+                <a:ea typeface="Aptos" pitchFamily="34" charset="-122"/>
+                <a:cs typeface="Aptos" pitchFamily="34" charset="-120"/>
+              </a:rPr>
+              <a:t>A governance charter defines the purpose, scope, authority, membership, cadence, decision.</a:t>
+            </a:r>
+            <a:endParaRPr lang="en-US" sz="1380" dirty="0"/>
+          </a:p>
+          <a:p>
+            <a:r>
+              <a:rPr lang="en-US" sz="1380" dirty="0">
+                <a:solidFill>
+                  <a:srgbClr val="17364A"/>
+                </a:solidFill>
+                <a:latin typeface="Aptos" pitchFamily="34" charset="0"/>
+                <a:ea typeface="Aptos" pitchFamily="34" charset="-122"/>
+                <a:cs typeface="Aptos" pitchFamily="34" charset="-120"/>
+              </a:rPr>
+              <a:t>Without a charter, AI decisions often become scattered across IT, program areas, legal,.</a:t>
+            </a:r>
+            <a:endParaRPr lang="en-US" sz="1380" dirty="0"/>
+          </a:p>
+        </p:txBody>
       </p:sp>
       <p:sp>
         <p:nvSpPr>
           <p:cNvPr id="16" name="Shape 14"/>
-          <p:cNvSpPr/>
-          <p:nvPr/>
-        </p:nvSpPr>
-        <p:spPr>
-          <a:xfrm>
-            <a:off x="9089136" y="3456432"/>
-            <a:ext cx="566928" cy="566928"/>
-          </a:xfrm>
-          <a:prstGeom prst="ellipse">
-            <a:avLst/>
-          </a:prstGeom>
-          <a:solidFill>
-            <a:srgbClr val="6A4CA3"/>
-          </a:solidFill>
-          <a:ln w="12700">
-            <a:solidFill>
-              <a:srgbClr val="6A4CA3"/>
-            </a:solidFill>
-            <a:prstDash val="solid"/>
-          </a:ln>
-        </p:spPr>
-      </p:sp>
-      <p:sp>
-        <p:nvSpPr>
-          <p:cNvPr id="17" name="Shape 15"/>
-          <p:cNvSpPr/>
-          <p:nvPr/>
-        </p:nvSpPr>
-        <p:spPr>
-          <a:xfrm>
-            <a:off x="8385048" y="3419856"/>
-            <a:ext cx="1975104" cy="0"/>
-          </a:xfrm>
-          <a:prstGeom prst="line">
-            <a:avLst/>
-          </a:prstGeom>
-          <a:noFill/>
-          <a:ln w="25400">
-            <a:solidFill>
-              <a:srgbClr val="8ABBD8"/>
-            </a:solidFill>
-            <a:prstDash val="solid"/>
-          </a:ln>
-        </p:spPr>
-      </p:sp>
-      <p:sp>
-        <p:nvSpPr>
-          <p:cNvPr id="18" name="Shape 16"/>
-          <p:cNvSpPr/>
-          <p:nvPr/>
-        </p:nvSpPr>
-        <p:spPr>
-          <a:xfrm>
-            <a:off x="8202168" y="3630168"/>
-            <a:ext cx="1170432" cy="118872"/>
-          </a:xfrm>
-          <a:prstGeom prst="line">
-            <a:avLst/>
-          </a:prstGeom>
-          <a:noFill/>
-          <a:ln w="25400">
-            <a:solidFill>
-              <a:srgbClr val="8ABBD8"/>
-            </a:solidFill>
-            <a:prstDash val="solid"/>
-          </a:ln>
-        </p:spPr>
-      </p:sp>
-      <p:sp>
-        <p:nvSpPr>
-          <p:cNvPr id="19" name="Shape 17"/>
-          <p:cNvSpPr/>
-          <p:nvPr/>
-        </p:nvSpPr>
-        <p:spPr>
-          <a:xfrm>
-            <a:off x="10543032" y="3630168"/>
-            <a:ext cx="-1170432" cy="118872"/>
-          </a:xfrm>
-          <a:prstGeom prst="line">
-            <a:avLst/>
-          </a:prstGeom>
-          <a:noFill/>
-          <a:ln w="25400">
-            <a:solidFill>
-              <a:srgbClr val="8ABBD8"/>
-            </a:solidFill>
-            <a:prstDash val="solid"/>
-          </a:ln>
-        </p:spPr>
-      </p:sp>
-      <p:sp>
-        <p:nvSpPr>
-          <p:cNvPr id="20" name="Text 18"/>
-          <p:cNvSpPr/>
-          <p:nvPr/>
-        </p:nvSpPr>
-        <p:spPr>
-          <a:xfrm>
-            <a:off x="7863840" y="4069080"/>
-            <a:ext cx="3017520" cy="164592"/>
-          </a:xfrm>
-          <a:prstGeom prst="rect">
-            <a:avLst/>
-          </a:prstGeom>
-          <a:noFill/>
-          <a:ln/>
-        </p:spPr>
-        <p:txBody>
-          <a:bodyPr wrap="square" lIns="0" tIns="0" rIns="0" bIns="0" rtlCol="0" anchor="ctr"/>
-          <a:lstStyle/>
-          <a:p>
-            <a:pPr algn="ctr" indent="0" marL="0">
-              <a:buNone/>
-            </a:pPr>
-            <a:r>
-              <a:rPr lang="en-US" sz="900" b="1" dirty="0">
-                <a:solidFill>
-                  <a:srgbClr val="003A63"/>
-                </a:solidFill>
-                <a:latin typeface="Aptos" pitchFamily="34" charset="0"/>
-                <a:ea typeface="Aptos" pitchFamily="34" charset="-122"/>
-                <a:cs typeface="Aptos" pitchFamily="34" charset="-120"/>
-              </a:rPr>
-              <a:t>Decision rights</a:t>
-            </a:r>
-            <a:endParaRPr lang="en-US" sz="900" dirty="0"/>
-          </a:p>
-        </p:txBody>
-      </p:sp>
-      <p:sp>
-        <p:nvSpPr>
-          <p:cNvPr id="21" name="Shape 19"/>
           <p:cNvSpPr/>
           <p:nvPr/>
         </p:nvSpPr>
@@ -15604,7 +14156,7 @@
       </p:sp>
       <p:sp>
         <p:nvSpPr>
-          <p:cNvPr id="22" name="Text 20"/>
+          <p:cNvPr id="17" name="Text 15"/>
           <p:cNvSpPr/>
           <p:nvPr/>
         </p:nvSpPr>
@@ -15643,7 +14195,7 @@
       </p:sp>
       <p:sp>
         <p:nvSpPr>
-          <p:cNvPr id="23" name="Text 21"/>
+          <p:cNvPr id="18" name="Text 16"/>
           <p:cNvSpPr/>
           <p:nvPr/>
         </p:nvSpPr>
@@ -16151,13 +14703,11 @@
             </a:avLst>
           </a:prstGeom>
           <a:solidFill>
-            <a:srgbClr val="FFFFFF">
-              <a:alpha val="88000"/>
-            </a:srgbClr>
+            <a:srgbClr val="FFFFFF"/>
           </a:solidFill>
           <a:ln w="12700">
             <a:solidFill>
-              <a:srgbClr val="D6E8F2"/>
+              <a:srgbClr val="B9D7E6"/>
             </a:solidFill>
             <a:prstDash val="solid"/>
           </a:ln>
@@ -16165,190 +14715,112 @@
       </p:sp>
       <p:sp>
         <p:nvSpPr>
-          <p:cNvPr id="14" name="Shape 12"/>
-          <p:cNvSpPr/>
-          <p:nvPr/>
-        </p:nvSpPr>
-        <p:spPr>
-          <a:xfrm>
-            <a:off x="7891272" y="3108960"/>
-            <a:ext cx="566928" cy="566928"/>
-          </a:xfrm>
-          <a:prstGeom prst="ellipse">
-            <a:avLst/>
-          </a:prstGeom>
-          <a:solidFill>
-            <a:srgbClr val="0068B7"/>
-          </a:solidFill>
-          <a:ln w="12700">
-            <a:solidFill>
-              <a:srgbClr val="0068B7"/>
-            </a:solidFill>
-            <a:prstDash val="solid"/>
-          </a:ln>
-        </p:spPr>
-      </p:sp>
-      <p:sp>
-        <p:nvSpPr>
-          <p:cNvPr id="15" name="Shape 13"/>
-          <p:cNvSpPr/>
-          <p:nvPr/>
-        </p:nvSpPr>
-        <p:spPr>
-          <a:xfrm>
-            <a:off x="10287000" y="3108960"/>
-            <a:ext cx="566928" cy="566928"/>
-          </a:xfrm>
-          <a:prstGeom prst="ellipse">
-            <a:avLst/>
-          </a:prstGeom>
-          <a:solidFill>
-            <a:srgbClr val="2F8A28"/>
-          </a:solidFill>
-          <a:ln w="12700">
-            <a:solidFill>
-              <a:srgbClr val="2F8A28"/>
-            </a:solidFill>
-            <a:prstDash val="solid"/>
-          </a:ln>
-        </p:spPr>
+          <p:cNvPr id="14" name="Text 12"/>
+          <p:cNvSpPr/>
+          <p:nvPr/>
+        </p:nvSpPr>
+        <p:spPr>
+          <a:xfrm>
+            <a:off x="7799832" y="2935224"/>
+            <a:ext cx="3145536" cy="256032"/>
+          </a:xfrm>
+          <a:prstGeom prst="rect">
+            <a:avLst/>
+          </a:prstGeom>
+          <a:noFill/>
+          <a:ln/>
+        </p:spPr>
+        <p:txBody>
+          <a:bodyPr wrap="square" lIns="0" tIns="0" rIns="0" bIns="0" rtlCol="0" anchor="ctr"/>
+          <a:lstStyle/>
+          <a:p>
+            <a:pPr indent="0" marL="0">
+              <a:buNone/>
+            </a:pPr>
+            <a:r>
+              <a:rPr lang="en-US" sz="1300" b="1" dirty="0">
+                <a:solidFill>
+                  <a:srgbClr val="0068B7"/>
+                </a:solidFill>
+                <a:latin typeface="Aptos" pitchFamily="34" charset="0"/>
+                <a:ea typeface="Aptos" pitchFamily="34" charset="-122"/>
+                <a:cs typeface="Aptos" pitchFamily="34" charset="-120"/>
+              </a:rPr>
+              <a:t>Concept checkpoints</a:t>
+            </a:r>
+            <a:endParaRPr lang="en-US" sz="1300" dirty="0"/>
+          </a:p>
+        </p:txBody>
+      </p:sp>
+      <p:sp>
+        <p:nvSpPr>
+          <p:cNvPr id="15" name="Text 13"/>
+          <p:cNvSpPr/>
+          <p:nvPr/>
+        </p:nvSpPr>
+        <p:spPr>
+          <a:xfrm>
+            <a:off x="7818120" y="3300984"/>
+            <a:ext cx="3090672" cy="877824"/>
+          </a:xfrm>
+          <a:prstGeom prst="rect">
+            <a:avLst/>
+          </a:prstGeom>
+          <a:noFill/>
+          <a:ln/>
+        </p:spPr>
+        <p:txBody>
+          <a:bodyPr wrap="square" lIns="254" tIns="254" rIns="254" bIns="254" rtlCol="0" anchor="t">
+            <a:normAutofit/>
+          </a:bodyPr>
+          <a:lstStyle/>
+          <a:p>
+            <a:r>
+              <a:rPr lang="en-US" sz="1380" dirty="0">
+                <a:solidFill>
+                  <a:srgbClr val="17364A"/>
+                </a:solidFill>
+                <a:latin typeface="Aptos" pitchFamily="34" charset="0"/>
+                <a:ea typeface="Aptos" pitchFamily="34" charset="-122"/>
+                <a:cs typeface="Aptos" pitchFamily="34" charset="-120"/>
+              </a:rPr>
+              <a:t>It is not legal advice and does not replace review by agency legal counsel, privacy.</a:t>
+            </a:r>
+            <a:endParaRPr lang="en-US" sz="1380" dirty="0"/>
+          </a:p>
+          <a:p>
+            <a:r>
+              <a:rPr lang="en-US" sz="1380" dirty="0">
+                <a:solidFill>
+                  <a:srgbClr val="17364A"/>
+                </a:solidFill>
+                <a:latin typeface="Aptos" pitchFamily="34" charset="0"/>
+                <a:ea typeface="Aptos" pitchFamily="34" charset="-122"/>
+                <a:cs typeface="Aptos" pitchFamily="34" charset="-120"/>
+              </a:rPr>
+              <a:t>Requirements may vary by state, locality, territory, Tribe, agency, funding source,.</a:t>
+            </a:r>
+            <a:endParaRPr lang="en-US" sz="1380" dirty="0"/>
+          </a:p>
+          <a:p>
+            <a:r>
+              <a:rPr lang="en-US" sz="1380" dirty="0">
+                <a:solidFill>
+                  <a:srgbClr val="17364A"/>
+                </a:solidFill>
+                <a:latin typeface="Aptos" pitchFamily="34" charset="0"/>
+                <a:ea typeface="Aptos" pitchFamily="34" charset="-122"/>
+                <a:cs typeface="Aptos" pitchFamily="34" charset="-120"/>
+              </a:rPr>
+              <a:t>Learners should use this module to identify the issues that require review and should.</a:t>
+            </a:r>
+            <a:endParaRPr lang="en-US" sz="1380" dirty="0"/>
+          </a:p>
+        </p:txBody>
       </p:sp>
       <p:sp>
         <p:nvSpPr>
           <p:cNvPr id="16" name="Shape 14"/>
-          <p:cNvSpPr/>
-          <p:nvPr/>
-        </p:nvSpPr>
-        <p:spPr>
-          <a:xfrm>
-            <a:off x="9089136" y="3456432"/>
-            <a:ext cx="566928" cy="566928"/>
-          </a:xfrm>
-          <a:prstGeom prst="ellipse">
-            <a:avLst/>
-          </a:prstGeom>
-          <a:solidFill>
-            <a:srgbClr val="6A4CA3"/>
-          </a:solidFill>
-          <a:ln w="12700">
-            <a:solidFill>
-              <a:srgbClr val="6A4CA3"/>
-            </a:solidFill>
-            <a:prstDash val="solid"/>
-          </a:ln>
-        </p:spPr>
-      </p:sp>
-      <p:sp>
-        <p:nvSpPr>
-          <p:cNvPr id="17" name="Shape 15"/>
-          <p:cNvSpPr/>
-          <p:nvPr/>
-        </p:nvSpPr>
-        <p:spPr>
-          <a:xfrm>
-            <a:off x="8385048" y="3419856"/>
-            <a:ext cx="1975104" cy="0"/>
-          </a:xfrm>
-          <a:prstGeom prst="line">
-            <a:avLst/>
-          </a:prstGeom>
-          <a:noFill/>
-          <a:ln w="25400">
-            <a:solidFill>
-              <a:srgbClr val="8ABBD8"/>
-            </a:solidFill>
-            <a:prstDash val="solid"/>
-          </a:ln>
-        </p:spPr>
-      </p:sp>
-      <p:sp>
-        <p:nvSpPr>
-          <p:cNvPr id="18" name="Shape 16"/>
-          <p:cNvSpPr/>
-          <p:nvPr/>
-        </p:nvSpPr>
-        <p:spPr>
-          <a:xfrm>
-            <a:off x="8202168" y="3630168"/>
-            <a:ext cx="1170432" cy="118872"/>
-          </a:xfrm>
-          <a:prstGeom prst="line">
-            <a:avLst/>
-          </a:prstGeom>
-          <a:noFill/>
-          <a:ln w="25400">
-            <a:solidFill>
-              <a:srgbClr val="8ABBD8"/>
-            </a:solidFill>
-            <a:prstDash val="solid"/>
-          </a:ln>
-        </p:spPr>
-      </p:sp>
-      <p:sp>
-        <p:nvSpPr>
-          <p:cNvPr id="19" name="Shape 17"/>
-          <p:cNvSpPr/>
-          <p:nvPr/>
-        </p:nvSpPr>
-        <p:spPr>
-          <a:xfrm>
-            <a:off x="10543032" y="3630168"/>
-            <a:ext cx="-1170432" cy="118872"/>
-          </a:xfrm>
-          <a:prstGeom prst="line">
-            <a:avLst/>
-          </a:prstGeom>
-          <a:noFill/>
-          <a:ln w="25400">
-            <a:solidFill>
-              <a:srgbClr val="8ABBD8"/>
-            </a:solidFill>
-            <a:prstDash val="solid"/>
-          </a:ln>
-        </p:spPr>
-      </p:sp>
-      <p:sp>
-        <p:nvSpPr>
-          <p:cNvPr id="20" name="Text 18"/>
-          <p:cNvSpPr/>
-          <p:nvPr/>
-        </p:nvSpPr>
-        <p:spPr>
-          <a:xfrm>
-            <a:off x="7863840" y="4069080"/>
-            <a:ext cx="3017520" cy="164592"/>
-          </a:xfrm>
-          <a:prstGeom prst="rect">
-            <a:avLst/>
-          </a:prstGeom>
-          <a:noFill/>
-          <a:ln/>
-        </p:spPr>
-        <p:txBody>
-          <a:bodyPr wrap="square" lIns="0" tIns="0" rIns="0" bIns="0" rtlCol="0" anchor="ctr"/>
-          <a:lstStyle/>
-          <a:p>
-            <a:pPr algn="ctr" indent="0" marL="0">
-              <a:buNone/>
-            </a:pPr>
-            <a:r>
-              <a:rPr lang="en-US" sz="900" b="1" dirty="0">
-                <a:solidFill>
-                  <a:srgbClr val="003A63"/>
-                </a:solidFill>
-                <a:latin typeface="Aptos" pitchFamily="34" charset="0"/>
-                <a:ea typeface="Aptos" pitchFamily="34" charset="-122"/>
-                <a:cs typeface="Aptos" pitchFamily="34" charset="-120"/>
-              </a:rPr>
-              <a:t>Decision rights</a:t>
-            </a:r>
-            <a:endParaRPr lang="en-US" sz="900" dirty="0"/>
-          </a:p>
-        </p:txBody>
-      </p:sp>
-      <p:sp>
-        <p:nvSpPr>
-          <p:cNvPr id="21" name="Shape 19"/>
           <p:cNvSpPr/>
           <p:nvPr/>
         </p:nvSpPr>
@@ -16375,7 +14847,7 @@
       </p:sp>
       <p:sp>
         <p:nvSpPr>
-          <p:cNvPr id="22" name="Text 20"/>
+          <p:cNvPr id="17" name="Text 15"/>
           <p:cNvSpPr/>
           <p:nvPr/>
         </p:nvSpPr>
@@ -16414,7 +14886,7 @@
       </p:sp>
       <p:sp>
         <p:nvSpPr>
-          <p:cNvPr id="23" name="Text 21"/>
+          <p:cNvPr id="18" name="Text 16"/>
           <p:cNvSpPr/>
           <p:nvPr/>
         </p:nvSpPr>
@@ -16922,13 +15394,11 @@
             </a:avLst>
           </a:prstGeom>
           <a:solidFill>
-            <a:srgbClr val="FFFFFF">
-              <a:alpha val="88000"/>
-            </a:srgbClr>
+            <a:srgbClr val="FFFFFF"/>
           </a:solidFill>
           <a:ln w="12700">
             <a:solidFill>
-              <a:srgbClr val="D6E8F2"/>
+              <a:srgbClr val="B9D7E6"/>
             </a:solidFill>
             <a:prstDash val="solid"/>
           </a:ln>
@@ -16936,190 +15406,112 @@
       </p:sp>
       <p:sp>
         <p:nvSpPr>
-          <p:cNvPr id="14" name="Shape 12"/>
-          <p:cNvSpPr/>
-          <p:nvPr/>
-        </p:nvSpPr>
-        <p:spPr>
-          <a:xfrm>
-            <a:off x="7891272" y="3108960"/>
-            <a:ext cx="566928" cy="566928"/>
-          </a:xfrm>
-          <a:prstGeom prst="ellipse">
-            <a:avLst/>
-          </a:prstGeom>
-          <a:solidFill>
-            <a:srgbClr val="0068B7"/>
-          </a:solidFill>
-          <a:ln w="12700">
-            <a:solidFill>
-              <a:srgbClr val="0068B7"/>
-            </a:solidFill>
-            <a:prstDash val="solid"/>
-          </a:ln>
-        </p:spPr>
-      </p:sp>
-      <p:sp>
-        <p:nvSpPr>
-          <p:cNvPr id="15" name="Shape 13"/>
-          <p:cNvSpPr/>
-          <p:nvPr/>
-        </p:nvSpPr>
-        <p:spPr>
-          <a:xfrm>
-            <a:off x="10287000" y="3108960"/>
-            <a:ext cx="566928" cy="566928"/>
-          </a:xfrm>
-          <a:prstGeom prst="ellipse">
-            <a:avLst/>
-          </a:prstGeom>
-          <a:solidFill>
-            <a:srgbClr val="2F8A28"/>
-          </a:solidFill>
-          <a:ln w="12700">
-            <a:solidFill>
-              <a:srgbClr val="2F8A28"/>
-            </a:solidFill>
-            <a:prstDash val="solid"/>
-          </a:ln>
-        </p:spPr>
+          <p:cNvPr id="14" name="Text 12"/>
+          <p:cNvSpPr/>
+          <p:nvPr/>
+        </p:nvSpPr>
+        <p:spPr>
+          <a:xfrm>
+            <a:off x="7799832" y="2935224"/>
+            <a:ext cx="3145536" cy="256032"/>
+          </a:xfrm>
+          <a:prstGeom prst="rect">
+            <a:avLst/>
+          </a:prstGeom>
+          <a:noFill/>
+          <a:ln/>
+        </p:spPr>
+        <p:txBody>
+          <a:bodyPr wrap="square" lIns="0" tIns="0" rIns="0" bIns="0" rtlCol="0" anchor="ctr"/>
+          <a:lstStyle/>
+          <a:p>
+            <a:pPr indent="0" marL="0">
+              <a:buNone/>
+            </a:pPr>
+            <a:r>
+              <a:rPr lang="en-US" sz="1300" b="1" dirty="0">
+                <a:solidFill>
+                  <a:srgbClr val="0068B7"/>
+                </a:solidFill>
+                <a:latin typeface="Aptos" pitchFamily="34" charset="0"/>
+                <a:ea typeface="Aptos" pitchFamily="34" charset="-122"/>
+                <a:cs typeface="Aptos" pitchFamily="34" charset="-120"/>
+              </a:rPr>
+              <a:t>Concept checkpoints</a:t>
+            </a:r>
+            <a:endParaRPr lang="en-US" sz="1300" dirty="0"/>
+          </a:p>
+        </p:txBody>
+      </p:sp>
+      <p:sp>
+        <p:nvSpPr>
+          <p:cNvPr id="15" name="Text 13"/>
+          <p:cNvSpPr/>
+          <p:nvPr/>
+        </p:nvSpPr>
+        <p:spPr>
+          <a:xfrm>
+            <a:off x="7818120" y="3300984"/>
+            <a:ext cx="3090672" cy="877824"/>
+          </a:xfrm>
+          <a:prstGeom prst="rect">
+            <a:avLst/>
+          </a:prstGeom>
+          <a:noFill/>
+          <a:ln/>
+        </p:spPr>
+        <p:txBody>
+          <a:bodyPr wrap="square" lIns="254" tIns="254" rIns="254" bIns="254" rtlCol="0" anchor="t">
+            <a:normAutofit/>
+          </a:bodyPr>
+          <a:lstStyle/>
+          <a:p>
+            <a:r>
+              <a:rPr lang="en-US" sz="1380" dirty="0">
+                <a:solidFill>
+                  <a:srgbClr val="17364A"/>
+                </a:solidFill>
+                <a:latin typeface="Aptos" pitchFamily="34" charset="0"/>
+                <a:ea typeface="Aptos" pitchFamily="34" charset="-122"/>
+                <a:cs typeface="Aptos" pitchFamily="34" charset="-120"/>
+              </a:rPr>
+              <a:t>Public health agencies operate under legal authorities, public accountability obligations,.</a:t>
+            </a:r>
+            <a:endParaRPr lang="en-US" sz="1380" dirty="0"/>
+          </a:p>
+          <a:p>
+            <a:r>
+              <a:rPr lang="en-US" sz="1380" dirty="0">
+                <a:solidFill>
+                  <a:srgbClr val="17364A"/>
+                </a:solidFill>
+                <a:latin typeface="Aptos" pitchFamily="34" charset="0"/>
+                <a:ea typeface="Aptos" pitchFamily="34" charset="-122"/>
+                <a:cs typeface="Aptos" pitchFamily="34" charset="-120"/>
+              </a:rPr>
+              <a:t>It must define how the agency decides which AI uses are acceptable, which safeguards are.</a:t>
+            </a:r>
+            <a:endParaRPr lang="en-US" sz="1380" dirty="0"/>
+          </a:p>
+          <a:p>
+            <a:r>
+              <a:rPr lang="en-US" sz="1380" dirty="0">
+                <a:solidFill>
+                  <a:srgbClr val="17364A"/>
+                </a:solidFill>
+                <a:latin typeface="Aptos" pitchFamily="34" charset="0"/>
+                <a:ea typeface="Aptos" pitchFamily="34" charset="-122"/>
+                <a:cs typeface="Aptos" pitchFamily="34" charset="-120"/>
+              </a:rPr>
+              <a:t>A governance operating model also helps avoid the problem of uneven adoption.</a:t>
+            </a:r>
+            <a:endParaRPr lang="en-US" sz="1380" dirty="0"/>
+          </a:p>
+        </p:txBody>
       </p:sp>
       <p:sp>
         <p:nvSpPr>
           <p:cNvPr id="16" name="Shape 14"/>
-          <p:cNvSpPr/>
-          <p:nvPr/>
-        </p:nvSpPr>
-        <p:spPr>
-          <a:xfrm>
-            <a:off x="9089136" y="3456432"/>
-            <a:ext cx="566928" cy="566928"/>
-          </a:xfrm>
-          <a:prstGeom prst="ellipse">
-            <a:avLst/>
-          </a:prstGeom>
-          <a:solidFill>
-            <a:srgbClr val="6A4CA3"/>
-          </a:solidFill>
-          <a:ln w="12700">
-            <a:solidFill>
-              <a:srgbClr val="6A4CA3"/>
-            </a:solidFill>
-            <a:prstDash val="solid"/>
-          </a:ln>
-        </p:spPr>
-      </p:sp>
-      <p:sp>
-        <p:nvSpPr>
-          <p:cNvPr id="17" name="Shape 15"/>
-          <p:cNvSpPr/>
-          <p:nvPr/>
-        </p:nvSpPr>
-        <p:spPr>
-          <a:xfrm>
-            <a:off x="8385048" y="3419856"/>
-            <a:ext cx="1975104" cy="0"/>
-          </a:xfrm>
-          <a:prstGeom prst="line">
-            <a:avLst/>
-          </a:prstGeom>
-          <a:noFill/>
-          <a:ln w="25400">
-            <a:solidFill>
-              <a:srgbClr val="8ABBD8"/>
-            </a:solidFill>
-            <a:prstDash val="solid"/>
-          </a:ln>
-        </p:spPr>
-      </p:sp>
-      <p:sp>
-        <p:nvSpPr>
-          <p:cNvPr id="18" name="Shape 16"/>
-          <p:cNvSpPr/>
-          <p:nvPr/>
-        </p:nvSpPr>
-        <p:spPr>
-          <a:xfrm>
-            <a:off x="8202168" y="3630168"/>
-            <a:ext cx="1170432" cy="118872"/>
-          </a:xfrm>
-          <a:prstGeom prst="line">
-            <a:avLst/>
-          </a:prstGeom>
-          <a:noFill/>
-          <a:ln w="25400">
-            <a:solidFill>
-              <a:srgbClr val="8ABBD8"/>
-            </a:solidFill>
-            <a:prstDash val="solid"/>
-          </a:ln>
-        </p:spPr>
-      </p:sp>
-      <p:sp>
-        <p:nvSpPr>
-          <p:cNvPr id="19" name="Shape 17"/>
-          <p:cNvSpPr/>
-          <p:nvPr/>
-        </p:nvSpPr>
-        <p:spPr>
-          <a:xfrm>
-            <a:off x="10543032" y="3630168"/>
-            <a:ext cx="-1170432" cy="118872"/>
-          </a:xfrm>
-          <a:prstGeom prst="line">
-            <a:avLst/>
-          </a:prstGeom>
-          <a:noFill/>
-          <a:ln w="25400">
-            <a:solidFill>
-              <a:srgbClr val="8ABBD8"/>
-            </a:solidFill>
-            <a:prstDash val="solid"/>
-          </a:ln>
-        </p:spPr>
-      </p:sp>
-      <p:sp>
-        <p:nvSpPr>
-          <p:cNvPr id="20" name="Text 18"/>
-          <p:cNvSpPr/>
-          <p:nvPr/>
-        </p:nvSpPr>
-        <p:spPr>
-          <a:xfrm>
-            <a:off x="7863840" y="4069080"/>
-            <a:ext cx="3017520" cy="164592"/>
-          </a:xfrm>
-          <a:prstGeom prst="rect">
-            <a:avLst/>
-          </a:prstGeom>
-          <a:noFill/>
-          <a:ln/>
-        </p:spPr>
-        <p:txBody>
-          <a:bodyPr wrap="square" lIns="0" tIns="0" rIns="0" bIns="0" rtlCol="0" anchor="ctr"/>
-          <a:lstStyle/>
-          <a:p>
-            <a:pPr algn="ctr" indent="0" marL="0">
-              <a:buNone/>
-            </a:pPr>
-            <a:r>
-              <a:rPr lang="en-US" sz="900" b="1" dirty="0">
-                <a:solidFill>
-                  <a:srgbClr val="003A63"/>
-                </a:solidFill>
-                <a:latin typeface="Aptos" pitchFamily="34" charset="0"/>
-                <a:ea typeface="Aptos" pitchFamily="34" charset="-122"/>
-                <a:cs typeface="Aptos" pitchFamily="34" charset="-120"/>
-              </a:rPr>
-              <a:t>Decision rights</a:t>
-            </a:r>
-            <a:endParaRPr lang="en-US" sz="900" dirty="0"/>
-          </a:p>
-        </p:txBody>
-      </p:sp>
-      <p:sp>
-        <p:nvSpPr>
-          <p:cNvPr id="21" name="Shape 19"/>
           <p:cNvSpPr/>
           <p:nvPr/>
         </p:nvSpPr>
@@ -17146,7 +15538,7 @@
       </p:sp>
       <p:sp>
         <p:nvSpPr>
-          <p:cNvPr id="22" name="Text 20"/>
+          <p:cNvPr id="17" name="Text 15"/>
           <p:cNvSpPr/>
           <p:nvPr/>
         </p:nvSpPr>
@@ -17185,7 +15577,7 @@
       </p:sp>
       <p:sp>
         <p:nvSpPr>
-          <p:cNvPr id="23" name="Text 21"/>
+          <p:cNvPr id="18" name="Text 16"/>
           <p:cNvSpPr/>
           <p:nvPr/>
         </p:nvSpPr>
@@ -17693,13 +16085,11 @@
             </a:avLst>
           </a:prstGeom>
           <a:solidFill>
-            <a:srgbClr val="FFFFFF">
-              <a:alpha val="88000"/>
-            </a:srgbClr>
+            <a:srgbClr val="FFFFFF"/>
           </a:solidFill>
           <a:ln w="12700">
             <a:solidFill>
-              <a:srgbClr val="D6E8F2"/>
+              <a:srgbClr val="B9D7E6"/>
             </a:solidFill>
             <a:prstDash val="solid"/>
           </a:ln>
@@ -17707,190 +16097,112 @@
       </p:sp>
       <p:sp>
         <p:nvSpPr>
-          <p:cNvPr id="14" name="Shape 12"/>
-          <p:cNvSpPr/>
-          <p:nvPr/>
-        </p:nvSpPr>
-        <p:spPr>
-          <a:xfrm>
-            <a:off x="7891272" y="3108960"/>
-            <a:ext cx="566928" cy="566928"/>
-          </a:xfrm>
-          <a:prstGeom prst="ellipse">
-            <a:avLst/>
-          </a:prstGeom>
-          <a:solidFill>
-            <a:srgbClr val="0068B7"/>
-          </a:solidFill>
-          <a:ln w="12700">
-            <a:solidFill>
-              <a:srgbClr val="0068B7"/>
-            </a:solidFill>
-            <a:prstDash val="solid"/>
-          </a:ln>
-        </p:spPr>
-      </p:sp>
-      <p:sp>
-        <p:nvSpPr>
-          <p:cNvPr id="15" name="Shape 13"/>
-          <p:cNvSpPr/>
-          <p:nvPr/>
-        </p:nvSpPr>
-        <p:spPr>
-          <a:xfrm>
-            <a:off x="10287000" y="3108960"/>
-            <a:ext cx="566928" cy="566928"/>
-          </a:xfrm>
-          <a:prstGeom prst="ellipse">
-            <a:avLst/>
-          </a:prstGeom>
-          <a:solidFill>
-            <a:srgbClr val="2F8A28"/>
-          </a:solidFill>
-          <a:ln w="12700">
-            <a:solidFill>
-              <a:srgbClr val="2F8A28"/>
-            </a:solidFill>
-            <a:prstDash val="solid"/>
-          </a:ln>
-        </p:spPr>
+          <p:cNvPr id="14" name="Text 12"/>
+          <p:cNvSpPr/>
+          <p:nvPr/>
+        </p:nvSpPr>
+        <p:spPr>
+          <a:xfrm>
+            <a:off x="7799832" y="2935224"/>
+            <a:ext cx="3145536" cy="256032"/>
+          </a:xfrm>
+          <a:prstGeom prst="rect">
+            <a:avLst/>
+          </a:prstGeom>
+          <a:noFill/>
+          <a:ln/>
+        </p:spPr>
+        <p:txBody>
+          <a:bodyPr wrap="square" lIns="0" tIns="0" rIns="0" bIns="0" rtlCol="0" anchor="ctr"/>
+          <a:lstStyle/>
+          <a:p>
+            <a:pPr indent="0" marL="0">
+              <a:buNone/>
+            </a:pPr>
+            <a:r>
+              <a:rPr lang="en-US" sz="1300" b="1" dirty="0">
+                <a:solidFill>
+                  <a:srgbClr val="0068B7"/>
+                </a:solidFill>
+                <a:latin typeface="Aptos" pitchFamily="34" charset="0"/>
+                <a:ea typeface="Aptos" pitchFamily="34" charset="-122"/>
+                <a:cs typeface="Aptos" pitchFamily="34" charset="-120"/>
+              </a:rPr>
+              <a:t>Concept checkpoints</a:t>
+            </a:r>
+            <a:endParaRPr lang="en-US" sz="1300" dirty="0"/>
+          </a:p>
+        </p:txBody>
+      </p:sp>
+      <p:sp>
+        <p:nvSpPr>
+          <p:cNvPr id="15" name="Text 13"/>
+          <p:cNvSpPr/>
+          <p:nvPr/>
+        </p:nvSpPr>
+        <p:spPr>
+          <a:xfrm>
+            <a:off x="7818120" y="3300984"/>
+            <a:ext cx="3090672" cy="877824"/>
+          </a:xfrm>
+          <a:prstGeom prst="rect">
+            <a:avLst/>
+          </a:prstGeom>
+          <a:noFill/>
+          <a:ln/>
+        </p:spPr>
+        <p:txBody>
+          <a:bodyPr wrap="square" lIns="254" tIns="254" rIns="254" bIns="254" rtlCol="0" anchor="t">
+            <a:normAutofit/>
+          </a:bodyPr>
+          <a:lstStyle/>
+          <a:p>
+            <a:r>
+              <a:rPr lang="en-US" sz="1380" dirty="0">
+                <a:solidFill>
+                  <a:srgbClr val="17364A"/>
+                </a:solidFill>
+                <a:latin typeface="Aptos" pitchFamily="34" charset="0"/>
+                <a:ea typeface="Aptos" pitchFamily="34" charset="-122"/>
+                <a:cs typeface="Aptos" pitchFamily="34" charset="-120"/>
+              </a:rPr>
+              <a:t>A state health department wants to allow staff to use AI tools for program support,.</a:t>
+            </a:r>
+            <a:endParaRPr lang="en-US" sz="1380" dirty="0"/>
+          </a:p>
+          <a:p>
+            <a:r>
+              <a:rPr lang="en-US" sz="1380" dirty="0">
+                <a:solidFill>
+                  <a:srgbClr val="17364A"/>
+                </a:solidFill>
+                <a:latin typeface="Aptos" pitchFamily="34" charset="0"/>
+                <a:ea typeface="Aptos" pitchFamily="34" charset="-122"/>
+                <a:cs typeface="Aptos" pitchFamily="34" charset="-120"/>
+              </a:rPr>
+              <a:t>The communications office may require human review, the surveillance program may prohibit.</a:t>
+            </a:r>
+            <a:endParaRPr lang="en-US" sz="1380" dirty="0"/>
+          </a:p>
+          <a:p>
+            <a:r>
+              <a:rPr lang="en-US" sz="1380" dirty="0">
+                <a:solidFill>
+                  <a:srgbClr val="17364A"/>
+                </a:solidFill>
+                <a:latin typeface="Aptos" pitchFamily="34" charset="0"/>
+                <a:ea typeface="Aptos" pitchFamily="34" charset="-122"/>
+                <a:cs typeface="Aptos" pitchFamily="34" charset="-120"/>
+              </a:rPr>
+              <a:t>A governance operating model brings these decisions into one structured process.</a:t>
+            </a:r>
+            <a:endParaRPr lang="en-US" sz="1380" dirty="0"/>
+          </a:p>
+        </p:txBody>
       </p:sp>
       <p:sp>
         <p:nvSpPr>
           <p:cNvPr id="16" name="Shape 14"/>
-          <p:cNvSpPr/>
-          <p:nvPr/>
-        </p:nvSpPr>
-        <p:spPr>
-          <a:xfrm>
-            <a:off x="9089136" y="3456432"/>
-            <a:ext cx="566928" cy="566928"/>
-          </a:xfrm>
-          <a:prstGeom prst="ellipse">
-            <a:avLst/>
-          </a:prstGeom>
-          <a:solidFill>
-            <a:srgbClr val="6A4CA3"/>
-          </a:solidFill>
-          <a:ln w="12700">
-            <a:solidFill>
-              <a:srgbClr val="6A4CA3"/>
-            </a:solidFill>
-            <a:prstDash val="solid"/>
-          </a:ln>
-        </p:spPr>
-      </p:sp>
-      <p:sp>
-        <p:nvSpPr>
-          <p:cNvPr id="17" name="Shape 15"/>
-          <p:cNvSpPr/>
-          <p:nvPr/>
-        </p:nvSpPr>
-        <p:spPr>
-          <a:xfrm>
-            <a:off x="8385048" y="3419856"/>
-            <a:ext cx="1975104" cy="0"/>
-          </a:xfrm>
-          <a:prstGeom prst="line">
-            <a:avLst/>
-          </a:prstGeom>
-          <a:noFill/>
-          <a:ln w="25400">
-            <a:solidFill>
-              <a:srgbClr val="8ABBD8"/>
-            </a:solidFill>
-            <a:prstDash val="solid"/>
-          </a:ln>
-        </p:spPr>
-      </p:sp>
-      <p:sp>
-        <p:nvSpPr>
-          <p:cNvPr id="18" name="Shape 16"/>
-          <p:cNvSpPr/>
-          <p:nvPr/>
-        </p:nvSpPr>
-        <p:spPr>
-          <a:xfrm>
-            <a:off x="8202168" y="3630168"/>
-            <a:ext cx="1170432" cy="118872"/>
-          </a:xfrm>
-          <a:prstGeom prst="line">
-            <a:avLst/>
-          </a:prstGeom>
-          <a:noFill/>
-          <a:ln w="25400">
-            <a:solidFill>
-              <a:srgbClr val="8ABBD8"/>
-            </a:solidFill>
-            <a:prstDash val="solid"/>
-          </a:ln>
-        </p:spPr>
-      </p:sp>
-      <p:sp>
-        <p:nvSpPr>
-          <p:cNvPr id="19" name="Shape 17"/>
-          <p:cNvSpPr/>
-          <p:nvPr/>
-        </p:nvSpPr>
-        <p:spPr>
-          <a:xfrm>
-            <a:off x="10543032" y="3630168"/>
-            <a:ext cx="-1170432" cy="118872"/>
-          </a:xfrm>
-          <a:prstGeom prst="line">
-            <a:avLst/>
-          </a:prstGeom>
-          <a:noFill/>
-          <a:ln w="25400">
-            <a:solidFill>
-              <a:srgbClr val="8ABBD8"/>
-            </a:solidFill>
-            <a:prstDash val="solid"/>
-          </a:ln>
-        </p:spPr>
-      </p:sp>
-      <p:sp>
-        <p:nvSpPr>
-          <p:cNvPr id="20" name="Text 18"/>
-          <p:cNvSpPr/>
-          <p:nvPr/>
-        </p:nvSpPr>
-        <p:spPr>
-          <a:xfrm>
-            <a:off x="7863840" y="4069080"/>
-            <a:ext cx="3017520" cy="164592"/>
-          </a:xfrm>
-          <a:prstGeom prst="rect">
-            <a:avLst/>
-          </a:prstGeom>
-          <a:noFill/>
-          <a:ln/>
-        </p:spPr>
-        <p:txBody>
-          <a:bodyPr wrap="square" lIns="0" tIns="0" rIns="0" bIns="0" rtlCol="0" anchor="ctr"/>
-          <a:lstStyle/>
-          <a:p>
-            <a:pPr algn="ctr" indent="0" marL="0">
-              <a:buNone/>
-            </a:pPr>
-            <a:r>
-              <a:rPr lang="en-US" sz="900" b="1" dirty="0">
-                <a:solidFill>
-                  <a:srgbClr val="003A63"/>
-                </a:solidFill>
-                <a:latin typeface="Aptos" pitchFamily="34" charset="0"/>
-                <a:ea typeface="Aptos" pitchFamily="34" charset="-122"/>
-                <a:cs typeface="Aptos" pitchFamily="34" charset="-120"/>
-              </a:rPr>
-              <a:t>Decision rights</a:t>
-            </a:r>
-            <a:endParaRPr lang="en-US" sz="900" dirty="0"/>
-          </a:p>
-        </p:txBody>
-      </p:sp>
-      <p:sp>
-        <p:nvSpPr>
-          <p:cNvPr id="21" name="Shape 19"/>
           <p:cNvSpPr/>
           <p:nvPr/>
         </p:nvSpPr>
@@ -17917,7 +16229,7 @@
       </p:sp>
       <p:sp>
         <p:nvSpPr>
-          <p:cNvPr id="22" name="Text 20"/>
+          <p:cNvPr id="17" name="Text 15"/>
           <p:cNvSpPr/>
           <p:nvPr/>
         </p:nvSpPr>
@@ -17956,7 +16268,7 @@
       </p:sp>
       <p:sp>
         <p:nvSpPr>
-          <p:cNvPr id="23" name="Text 21"/>
+          <p:cNvPr id="18" name="Text 16"/>
           <p:cNvSpPr/>
           <p:nvPr/>
         </p:nvSpPr>

--- a/downloads/presentations/modules/gov-400.pptx
+++ b/downloads/presentations/modules/gov-400.pptx
@@ -3253,49 +3253,58 @@
           <a:ln/>
         </p:spPr>
         <p:txBody>
-          <a:bodyPr wrap="square" lIns="635" tIns="635" rIns="635" bIns="635" rtlCol="0" anchor="t">
+          <a:bodyPr wrap="square" lIns="1016" tIns="1016" rIns="1016" bIns="1016" rtlCol="0" anchor="t">
             <a:normAutofit/>
           </a:bodyPr>
           <a:lstStyle/>
           <a:p>
+            <a:pPr indent="0" marL="0">
+              <a:buNone/>
+            </a:pPr>
             <a:r>
               <a:rPr lang="en-US" sz="2100" dirty="0">
                 <a:solidFill>
-                  <a:srgbClr val="17364A"/>
-                </a:solidFill>
-                <a:latin typeface="Aptos" pitchFamily="34" charset="0"/>
-                <a:ea typeface="Aptos" pitchFamily="34" charset="-122"/>
-                <a:cs typeface="Aptos" pitchFamily="34" charset="-120"/>
-              </a:rPr>
-              <a:t>A strong governance charter begins with purpose and scope.</a:t>
+                  <a:srgbClr val="003A63"/>
+                </a:solidFill>
+                <a:latin typeface="Aptos" pitchFamily="34" charset="0"/>
+                <a:ea typeface="Aptos" pitchFamily="34" charset="-122"/>
+                <a:cs typeface="Aptos" pitchFamily="34" charset="-120"/>
+              </a:rPr>
+              <a:t>• A strong governance charter begins with purpose and scope.</a:t>
             </a:r>
             <a:endParaRPr lang="en-US" sz="2100" dirty="0"/>
           </a:p>
           <a:p>
+            <a:pPr indent="0" marL="0">
+              <a:buNone/>
+            </a:pPr>
             <a:r>
               <a:rPr lang="en-US" sz="2100" dirty="0">
                 <a:solidFill>
-                  <a:srgbClr val="17364A"/>
-                </a:solidFill>
-                <a:latin typeface="Aptos" pitchFamily="34" charset="0"/>
-                <a:ea typeface="Aptos" pitchFamily="34" charset="-122"/>
-                <a:cs typeface="Aptos" pitchFamily="34" charset="-120"/>
-              </a:rPr>
-              <a:t>Purpose explains why the governance body exists, such as protecting public trust, supporting.</a:t>
+                  <a:srgbClr val="003A63"/>
+                </a:solidFill>
+                <a:latin typeface="Aptos" pitchFamily="34" charset="0"/>
+                <a:ea typeface="Aptos" pitchFamily="34" charset="-122"/>
+                <a:cs typeface="Aptos" pitchFamily="34" charset="-120"/>
+              </a:rPr>
+              <a:t>• Purpose explains why the governance body exists, such as protecting public trust, supporting.</a:t>
             </a:r>
             <a:endParaRPr lang="en-US" sz="2100" dirty="0"/>
           </a:p>
           <a:p>
+            <a:pPr indent="0" marL="0">
+              <a:buNone/>
+            </a:pPr>
             <a:r>
               <a:rPr lang="en-US" sz="2100" dirty="0">
                 <a:solidFill>
-                  <a:srgbClr val="17364A"/>
-                </a:solidFill>
-                <a:latin typeface="Aptos" pitchFamily="34" charset="0"/>
-                <a:ea typeface="Aptos" pitchFamily="34" charset="-122"/>
-                <a:cs typeface="Aptos" pitchFamily="34" charset="-120"/>
-              </a:rPr>
-              <a:t>Scope explains what falls under the governance process.</a:t>
+                  <a:srgbClr val="003A63"/>
+                </a:solidFill>
+                <a:latin typeface="Aptos" pitchFamily="34" charset="0"/>
+                <a:ea typeface="Aptos" pitchFamily="34" charset="-122"/>
+                <a:cs typeface="Aptos" pitchFamily="34" charset="-120"/>
+              </a:rPr>
+              <a:t>• Scope explains what falls under the governance process.</a:t>
             </a:r>
             <a:endParaRPr lang="en-US" sz="2100" dirty="0"/>
           </a:p>
@@ -3375,17 +3384,17 @@
         </p:nvSpPr>
         <p:spPr>
           <a:xfrm>
-            <a:off x="7799832" y="1828800"/>
-            <a:ext cx="3145536" cy="685800"/>
-          </a:xfrm>
-          <a:prstGeom prst="rect">
-            <a:avLst/>
-          </a:prstGeom>
-          <a:noFill/>
-          <a:ln/>
-        </p:spPr>
-        <p:txBody>
-          <a:bodyPr wrap="square" lIns="0" tIns="0" rIns="0" bIns="0" rtlCol="0" anchor="t">
+            <a:off x="7799832" y="1801368"/>
+            <a:ext cx="3145536" cy="758952"/>
+          </a:xfrm>
+          <a:prstGeom prst="rect">
+            <a:avLst/>
+          </a:prstGeom>
+          <a:noFill/>
+          <a:ln/>
+        </p:spPr>
+        <p:txBody>
+          <a:bodyPr wrap="square" lIns="254" tIns="254" rIns="254" bIns="254" rtlCol="0" anchor="t">
             <a:normAutofit/>
           </a:bodyPr>
           <a:lstStyle/>
@@ -3394,7 +3403,7 @@
               <a:buNone/>
             </a:pPr>
             <a:r>
-              <a:rPr lang="en-US" sz="1550" dirty="0">
+              <a:rPr lang="en-US" sz="1320" dirty="0">
                 <a:solidFill>
                   <a:srgbClr val="17364A"/>
                 </a:solidFill>
@@ -3404,7 +3413,7 @@
               </a:rPr>
               <a:t>A strong governance charter begins with purpose and scope.</a:t>
             </a:r>
-            <a:endParaRPr lang="en-US" sz="1550" dirty="0"/>
+            <a:endParaRPr lang="en-US" sz="1320" dirty="0"/>
           </a:p>
         </p:txBody>
       </p:sp>
@@ -3492,13 +3501,16 @@
           <a:ln/>
         </p:spPr>
         <p:txBody>
-          <a:bodyPr wrap="square" lIns="254" tIns="254" rIns="254" bIns="254" rtlCol="0" anchor="t">
+          <a:bodyPr wrap="square" lIns="508" tIns="508" rIns="508" bIns="508" rtlCol="0" anchor="t">
             <a:normAutofit/>
           </a:bodyPr>
           <a:lstStyle/>
           <a:p>
-            <a:r>
-              <a:rPr lang="en-US" sz="1380" dirty="0">
+            <a:pPr indent="0" marL="0">
+              <a:buNone/>
+            </a:pPr>
+            <a:r>
+              <a:rPr lang="en-US" sz="1220" dirty="0">
                 <a:solidFill>
                   <a:srgbClr val="17364A"/>
                 </a:solidFill>
@@ -3506,13 +3518,16 @@
                 <a:ea typeface="Aptos" pitchFamily="34" charset="-122"/>
                 <a:cs typeface="Aptos" pitchFamily="34" charset="-120"/>
               </a:rPr>
-              <a:t>Purpose explains why the governance body exists, such as protecting public trust,.</a:t>
-            </a:r>
-            <a:endParaRPr lang="en-US" sz="1380" dirty="0"/>
-          </a:p>
-          <a:p>
-            <a:r>
-              <a:rPr lang="en-US" sz="1380" dirty="0">
+              <a:t>Purpose explains why the governance body exists, such as.</a:t>
+            </a:r>
+            <a:endParaRPr lang="en-US" sz="1220" dirty="0"/>
+          </a:p>
+          <a:p>
+            <a:pPr indent="0" marL="0">
+              <a:buNone/>
+            </a:pPr>
+            <a:r>
+              <a:rPr lang="en-US" sz="1220" dirty="0">
                 <a:solidFill>
                   <a:srgbClr val="17364A"/>
                 </a:solidFill>
@@ -3520,13 +3535,16 @@
                 <a:ea typeface="Aptos" pitchFamily="34" charset="-122"/>
                 <a:cs typeface="Aptos" pitchFamily="34" charset="-120"/>
               </a:rPr>
-              <a:t>For public health, scope should include internally developed AI tools, vendor AI products,.</a:t>
-            </a:r>
-            <a:endParaRPr lang="en-US" sz="1380" dirty="0"/>
-          </a:p>
-          <a:p>
-            <a:r>
-              <a:rPr lang="en-US" sz="1380" dirty="0">
+              <a:t>For public health, scope should include internally developed AI.</a:t>
+            </a:r>
+            <a:endParaRPr lang="en-US" sz="1220" dirty="0"/>
+          </a:p>
+          <a:p>
+            <a:pPr indent="0" marL="0">
+              <a:buNone/>
+            </a:pPr>
+            <a:r>
+              <a:rPr lang="en-US" sz="1220" dirty="0">
                 <a:solidFill>
                   <a:srgbClr val="17364A"/>
                 </a:solidFill>
@@ -3536,7 +3554,7 @@
               </a:rPr>
               <a:t>The operating model should define roles clearly.</a:t>
             </a:r>
-            <a:endParaRPr lang="en-US" sz="1380" dirty="0"/>
+            <a:endParaRPr lang="en-US" sz="1220" dirty="0"/>
           </a:p>
         </p:txBody>
       </p:sp>
@@ -3614,17 +3632,17 @@
         </p:nvSpPr>
         <p:spPr>
           <a:xfrm>
-            <a:off x="7799832" y="5001768"/>
-            <a:ext cx="3145536" cy="502920"/>
-          </a:xfrm>
-          <a:prstGeom prst="rect">
-            <a:avLst/>
-          </a:prstGeom>
-          <a:noFill/>
-          <a:ln/>
-        </p:spPr>
-        <p:txBody>
-          <a:bodyPr wrap="square" lIns="0" tIns="0" rIns="0" bIns="0" rtlCol="0" anchor="t">
+            <a:off x="7799832" y="4974336"/>
+            <a:ext cx="3145536" cy="576072"/>
+          </a:xfrm>
+          <a:prstGeom prst="rect">
+            <a:avLst/>
+          </a:prstGeom>
+          <a:noFill/>
+          <a:ln/>
+        </p:spPr>
+        <p:txBody>
+          <a:bodyPr wrap="square" lIns="254" tIns="254" rIns="254" bIns="254" rtlCol="0" anchor="t">
             <a:normAutofit/>
           </a:bodyPr>
           <a:lstStyle/>
@@ -3633,7 +3651,7 @@
               <a:buNone/>
             </a:pPr>
             <a:r>
-              <a:rPr lang="en-US" sz="1550" dirty="0">
+              <a:rPr lang="en-US" sz="1320" dirty="0">
                 <a:solidFill>
                   <a:srgbClr val="17364A"/>
                 </a:solidFill>
@@ -3641,9 +3659,9 @@
                 <a:ea typeface="Aptos" pitchFamily="34" charset="-122"/>
                 <a:cs typeface="Aptos" pitchFamily="34" charset="-120"/>
               </a:rPr>
-              <a:t>Translate this concept into clear decision rights, review steps, documentation expectations, and escalation paths before an AI-supported workflow is approved.</a:t>
-            </a:r>
-            <a:endParaRPr lang="en-US" sz="1550" dirty="0"/>
+              <a:t>Translate this concept into clear decision rights, review steps, documentation expectations, and escalation paths before.</a:t>
+            </a:r>
+            <a:endParaRPr lang="en-US" sz="1320" dirty="0"/>
           </a:p>
         </p:txBody>
       </p:sp>
@@ -3944,49 +3962,58 @@
           <a:ln/>
         </p:spPr>
         <p:txBody>
-          <a:bodyPr wrap="square" lIns="635" tIns="635" rIns="635" bIns="635" rtlCol="0" anchor="t">
+          <a:bodyPr wrap="square" lIns="1016" tIns="1016" rIns="1016" bIns="1016" rtlCol="0" anchor="t">
             <a:normAutofit/>
           </a:bodyPr>
           <a:lstStyle/>
           <a:p>
+            <a:pPr indent="0" marL="0">
+              <a:buNone/>
+            </a:pPr>
             <a:r>
               <a:rPr lang="en-US" sz="2100" dirty="0">
                 <a:solidFill>
-                  <a:srgbClr val="17364A"/>
-                </a:solidFill>
-                <a:latin typeface="Aptos" pitchFamily="34" charset="0"/>
-                <a:ea typeface="Aptos" pitchFamily="34" charset="-122"/>
-                <a:cs typeface="Aptos" pitchFamily="34" charset="-120"/>
-              </a:rPr>
-              <a:t>A common failure mode is governance that exists only on paper.</a:t>
+                  <a:srgbClr val="003A63"/>
+                </a:solidFill>
+                <a:latin typeface="Aptos" pitchFamily="34" charset="0"/>
+                <a:ea typeface="Aptos" pitchFamily="34" charset="-122"/>
+                <a:cs typeface="Aptos" pitchFamily="34" charset="-120"/>
+              </a:rPr>
+              <a:t>• A common failure mode is governance that exists only on paper.</a:t>
             </a:r>
             <a:endParaRPr lang="en-US" sz="2100" dirty="0"/>
           </a:p>
           <a:p>
+            <a:pPr indent="0" marL="0">
+              <a:buNone/>
+            </a:pPr>
             <a:r>
               <a:rPr lang="en-US" sz="2100" dirty="0">
                 <a:solidFill>
-                  <a:srgbClr val="17364A"/>
-                </a:solidFill>
-                <a:latin typeface="Aptos" pitchFamily="34" charset="0"/>
-                <a:ea typeface="Aptos" pitchFamily="34" charset="-122"/>
-                <a:cs typeface="Aptos" pitchFamily="34" charset="-120"/>
-              </a:rPr>
-              <a:t>A charter may sound strong, but if staff do not know when to submit use cases, who decides, or what.</a:t>
+                  <a:srgbClr val="003A63"/>
+                </a:solidFill>
+                <a:latin typeface="Aptos" pitchFamily="34" charset="0"/>
+                <a:ea typeface="Aptos" pitchFamily="34" charset="-122"/>
+                <a:cs typeface="Aptos" pitchFamily="34" charset="-120"/>
+              </a:rPr>
+              <a:t>• A charter may sound strong, but if staff do not know when to submit use cases, who decides, or.</a:t>
             </a:r>
             <a:endParaRPr lang="en-US" sz="2100" dirty="0"/>
           </a:p>
           <a:p>
+            <a:pPr indent="0" marL="0">
+              <a:buNone/>
+            </a:pPr>
             <a:r>
               <a:rPr lang="en-US" sz="2100" dirty="0">
                 <a:solidFill>
-                  <a:srgbClr val="17364A"/>
-                </a:solidFill>
-                <a:latin typeface="Aptos" pitchFamily="34" charset="0"/>
-                <a:ea typeface="Aptos" pitchFamily="34" charset="-122"/>
-                <a:cs typeface="Aptos" pitchFamily="34" charset="-120"/>
-              </a:rPr>
-              <a:t>A practical guardrail is to create a simple intake form, review rubric, meeting cadence, decision log,.</a:t>
+                  <a:srgbClr val="003A63"/>
+                </a:solidFill>
+                <a:latin typeface="Aptos" pitchFamily="34" charset="0"/>
+                <a:ea typeface="Aptos" pitchFamily="34" charset="-122"/>
+                <a:cs typeface="Aptos" pitchFamily="34" charset="-120"/>
+              </a:rPr>
+              <a:t>• A practical guardrail is to create a simple intake form, review rubric, meeting cadence,.</a:t>
             </a:r>
             <a:endParaRPr lang="en-US" sz="2100" dirty="0"/>
           </a:p>
@@ -4066,17 +4093,17 @@
         </p:nvSpPr>
         <p:spPr>
           <a:xfrm>
-            <a:off x="7799832" y="1828800"/>
-            <a:ext cx="3145536" cy="685800"/>
-          </a:xfrm>
-          <a:prstGeom prst="rect">
-            <a:avLst/>
-          </a:prstGeom>
-          <a:noFill/>
-          <a:ln/>
-        </p:spPr>
-        <p:txBody>
-          <a:bodyPr wrap="square" lIns="0" tIns="0" rIns="0" bIns="0" rtlCol="0" anchor="t">
+            <a:off x="7799832" y="1801368"/>
+            <a:ext cx="3145536" cy="758952"/>
+          </a:xfrm>
+          <a:prstGeom prst="rect">
+            <a:avLst/>
+          </a:prstGeom>
+          <a:noFill/>
+          <a:ln/>
+        </p:spPr>
+        <p:txBody>
+          <a:bodyPr wrap="square" lIns="254" tIns="254" rIns="254" bIns="254" rtlCol="0" anchor="t">
             <a:normAutofit/>
           </a:bodyPr>
           <a:lstStyle/>
@@ -4085,7 +4112,7 @@
               <a:buNone/>
             </a:pPr>
             <a:r>
-              <a:rPr lang="en-US" sz="1550" dirty="0">
+              <a:rPr lang="en-US" sz="1320" dirty="0">
                 <a:solidFill>
                   <a:srgbClr val="17364A"/>
                 </a:solidFill>
@@ -4095,7 +4122,7 @@
               </a:rPr>
               <a:t>A common failure mode is governance that exists only on paper.</a:t>
             </a:r>
-            <a:endParaRPr lang="en-US" sz="1550" dirty="0"/>
+            <a:endParaRPr lang="en-US" sz="1320" dirty="0"/>
           </a:p>
         </p:txBody>
       </p:sp>
@@ -4183,13 +4210,16 @@
           <a:ln/>
         </p:spPr>
         <p:txBody>
-          <a:bodyPr wrap="square" lIns="254" tIns="254" rIns="254" bIns="254" rtlCol="0" anchor="t">
+          <a:bodyPr wrap="square" lIns="508" tIns="508" rIns="508" bIns="508" rtlCol="0" anchor="t">
             <a:normAutofit/>
           </a:bodyPr>
           <a:lstStyle/>
           <a:p>
-            <a:r>
-              <a:rPr lang="en-US" sz="1380" dirty="0">
+            <a:pPr indent="0" marL="0">
+              <a:buNone/>
+            </a:pPr>
+            <a:r>
+              <a:rPr lang="en-US" sz="1220" dirty="0">
                 <a:solidFill>
                   <a:srgbClr val="17364A"/>
                 </a:solidFill>
@@ -4197,13 +4227,16 @@
                 <a:ea typeface="Aptos" pitchFamily="34" charset="-122"/>
                 <a:cs typeface="Aptos" pitchFamily="34" charset="-120"/>
               </a:rPr>
-              <a:t>A charter may sound strong, but if staff do not know when to submit use cases, who.</a:t>
-            </a:r>
-            <a:endParaRPr lang="en-US" sz="1380" dirty="0"/>
-          </a:p>
-          <a:p>
-            <a:r>
-              <a:rPr lang="en-US" sz="1380" dirty="0">
+              <a:t>A charter may sound strong, but if staff do not know when to.</a:t>
+            </a:r>
+            <a:endParaRPr lang="en-US" sz="1220" dirty="0"/>
+          </a:p>
+          <a:p>
+            <a:pPr indent="0" marL="0">
+              <a:buNone/>
+            </a:pPr>
+            <a:r>
+              <a:rPr lang="en-US" sz="1220" dirty="0">
                 <a:solidFill>
                   <a:srgbClr val="17364A"/>
                 </a:solidFill>
@@ -4211,13 +4244,16 @@
                 <a:ea typeface="Aptos" pitchFamily="34" charset="-122"/>
                 <a:cs typeface="Aptos" pitchFamily="34" charset="-120"/>
               </a:rPr>
-              <a:t>A practical guardrail is to create a simple intake form, review rubric, meeting cadence,.</a:t>
-            </a:r>
-            <a:endParaRPr lang="en-US" sz="1380" dirty="0"/>
-          </a:p>
-          <a:p>
-            <a:r>
-              <a:rPr lang="en-US" sz="1380" dirty="0">
+              <a:t>A practical guardrail is to create a simple intake form, review.</a:t>
+            </a:r>
+            <a:endParaRPr lang="en-US" sz="1220" dirty="0"/>
+          </a:p>
+          <a:p>
+            <a:pPr indent="0" marL="0">
+              <a:buNone/>
+            </a:pPr>
+            <a:r>
+              <a:rPr lang="en-US" sz="1220" dirty="0">
                 <a:solidFill>
                   <a:srgbClr val="17364A"/>
                 </a:solidFill>
@@ -4227,7 +4263,7 @@
               </a:rPr>
               <a:t>Another failure mode is over-centralization.</a:t>
             </a:r>
-            <a:endParaRPr lang="en-US" sz="1380" dirty="0"/>
+            <a:endParaRPr lang="en-US" sz="1220" dirty="0"/>
           </a:p>
         </p:txBody>
       </p:sp>
@@ -4305,17 +4341,17 @@
         </p:nvSpPr>
         <p:spPr>
           <a:xfrm>
-            <a:off x="7799832" y="5001768"/>
-            <a:ext cx="3145536" cy="502920"/>
-          </a:xfrm>
-          <a:prstGeom prst="rect">
-            <a:avLst/>
-          </a:prstGeom>
-          <a:noFill/>
-          <a:ln/>
-        </p:spPr>
-        <p:txBody>
-          <a:bodyPr wrap="square" lIns="0" tIns="0" rIns="0" bIns="0" rtlCol="0" anchor="t">
+            <a:off x="7799832" y="4974336"/>
+            <a:ext cx="3145536" cy="576072"/>
+          </a:xfrm>
+          <a:prstGeom prst="rect">
+            <a:avLst/>
+          </a:prstGeom>
+          <a:noFill/>
+          <a:ln/>
+        </p:spPr>
+        <p:txBody>
+          <a:bodyPr wrap="square" lIns="254" tIns="254" rIns="254" bIns="254" rtlCol="0" anchor="t">
             <a:normAutofit/>
           </a:bodyPr>
           <a:lstStyle/>
@@ -4324,7 +4360,7 @@
               <a:buNone/>
             </a:pPr>
             <a:r>
-              <a:rPr lang="en-US" sz="1550" dirty="0">
+              <a:rPr lang="en-US" sz="1320" dirty="0">
                 <a:solidFill>
                   <a:srgbClr val="17364A"/>
                 </a:solidFill>
@@ -4332,9 +4368,9 @@
                 <a:ea typeface="Aptos" pitchFamily="34" charset="-122"/>
                 <a:cs typeface="Aptos" pitchFamily="34" charset="-120"/>
               </a:rPr>
-              <a:t>Translate this concept into clear decision rights, review steps, documentation expectations, and escalation paths before an AI-supported workflow is approved.</a:t>
-            </a:r>
-            <a:endParaRPr lang="en-US" sz="1550" dirty="0"/>
+              <a:t>Translate this concept into clear decision rights, review steps, documentation expectations, and escalation paths before.</a:t>
+            </a:r>
+            <a:endParaRPr lang="en-US" sz="1320" dirty="0"/>
           </a:p>
         </p:txBody>
       </p:sp>
@@ -4635,49 +4671,58 @@
           <a:ln/>
         </p:spPr>
         <p:txBody>
-          <a:bodyPr wrap="square" lIns="635" tIns="635" rIns="635" bIns="635" rtlCol="0" anchor="t">
+          <a:bodyPr wrap="square" lIns="1016" tIns="1016" rIns="1016" bIns="1016" rtlCol="0" anchor="t">
             <a:normAutofit/>
           </a:bodyPr>
           <a:lstStyle/>
           <a:p>
+            <a:pPr indent="0" marL="0">
+              <a:buNone/>
+            </a:pPr>
             <a:r>
               <a:rPr lang="en-US" sz="2100" dirty="0">
                 <a:solidFill>
-                  <a:srgbClr val="17364A"/>
-                </a:solidFill>
-                <a:latin typeface="Aptos" pitchFamily="34" charset="0"/>
-                <a:ea typeface="Aptos" pitchFamily="34" charset="-122"/>
-                <a:cs typeface="Aptos" pitchFamily="34" charset="-120"/>
-              </a:rPr>
-              <a:t>Generative AI governance should define approved tools, prohibited data, review expectations, and when.</a:t>
+                  <a:srgbClr val="003A63"/>
+                </a:solidFill>
+                <a:latin typeface="Aptos" pitchFamily="34" charset="0"/>
+                <a:ea typeface="Aptos" pitchFamily="34" charset="-122"/>
+                <a:cs typeface="Aptos" pitchFamily="34" charset="-120"/>
+              </a:rPr>
+              <a:t>• Generative AI governance should define approved tools, prohibited data, review expectations,.</a:t>
             </a:r>
             <a:endParaRPr lang="en-US" sz="2100" dirty="0"/>
           </a:p>
           <a:p>
+            <a:pPr indent="0" marL="0">
+              <a:buNone/>
+            </a:pPr>
             <a:r>
               <a:rPr lang="en-US" sz="2100" dirty="0">
                 <a:solidFill>
-                  <a:srgbClr val="17364A"/>
-                </a:solidFill>
-                <a:latin typeface="Aptos" pitchFamily="34" charset="0"/>
-                <a:ea typeface="Aptos" pitchFamily="34" charset="-122"/>
-                <a:cs typeface="Aptos" pitchFamily="34" charset="-120"/>
-              </a:rPr>
-              <a:t>Predictive model governance should require validation, subgroup performance review, monitoring, and.</a:t>
+                  <a:srgbClr val="003A63"/>
+                </a:solidFill>
+                <a:latin typeface="Aptos" pitchFamily="34" charset="0"/>
+                <a:ea typeface="Aptos" pitchFamily="34" charset="-122"/>
+                <a:cs typeface="Aptos" pitchFamily="34" charset="-120"/>
+              </a:rPr>
+              <a:t>• Predictive model governance should require validation, subgroup performance review,.</a:t>
             </a:r>
             <a:endParaRPr lang="en-US" sz="2100" dirty="0"/>
           </a:p>
           <a:p>
+            <a:pPr indent="0" marL="0">
+              <a:buNone/>
+            </a:pPr>
             <a:r>
               <a:rPr lang="en-US" sz="2100" dirty="0">
                 <a:solidFill>
-                  <a:srgbClr val="17364A"/>
-                </a:solidFill>
-                <a:latin typeface="Aptos" pitchFamily="34" charset="0"/>
-                <a:ea typeface="Aptos" pitchFamily="34" charset="-122"/>
-                <a:cs typeface="Aptos" pitchFamily="34" charset="-120"/>
-              </a:rPr>
-              <a:t>Agentic AI governance should define allowed actions, approval checkpoints, logging, rollback.</a:t>
+                  <a:srgbClr val="003A63"/>
+                </a:solidFill>
+                <a:latin typeface="Aptos" pitchFamily="34" charset="0"/>
+                <a:ea typeface="Aptos" pitchFamily="34" charset="-122"/>
+                <a:cs typeface="Aptos" pitchFamily="34" charset="-120"/>
+              </a:rPr>
+              <a:t>• Agentic AI governance should define allowed actions, approval checkpoints, logging, rollback.</a:t>
             </a:r>
             <a:endParaRPr lang="en-US" sz="2100" dirty="0"/>
           </a:p>
@@ -4757,17 +4802,17 @@
         </p:nvSpPr>
         <p:spPr>
           <a:xfrm>
-            <a:off x="7799832" y="1828800"/>
-            <a:ext cx="3145536" cy="685800"/>
-          </a:xfrm>
-          <a:prstGeom prst="rect">
-            <a:avLst/>
-          </a:prstGeom>
-          <a:noFill/>
-          <a:ln/>
-        </p:spPr>
-        <p:txBody>
-          <a:bodyPr wrap="square" lIns="0" tIns="0" rIns="0" bIns="0" rtlCol="0" anchor="t">
+            <a:off x="7799832" y="1801368"/>
+            <a:ext cx="3145536" cy="758952"/>
+          </a:xfrm>
+          <a:prstGeom prst="rect">
+            <a:avLst/>
+          </a:prstGeom>
+          <a:noFill/>
+          <a:ln/>
+        </p:spPr>
+        <p:txBody>
+          <a:bodyPr wrap="square" lIns="254" tIns="254" rIns="254" bIns="254" rtlCol="0" anchor="t">
             <a:normAutofit/>
           </a:bodyPr>
           <a:lstStyle/>
@@ -4776,7 +4821,7 @@
               <a:buNone/>
             </a:pPr>
             <a:r>
-              <a:rPr lang="en-US" sz="1550" dirty="0">
+              <a:rPr lang="en-US" sz="1320" dirty="0">
                 <a:solidFill>
                   <a:srgbClr val="17364A"/>
                 </a:solidFill>
@@ -4786,7 +4831,7 @@
               </a:rPr>
               <a:t>Generative AI governance should define approved tools, prohibited data, review expectations, and when.</a:t>
             </a:r>
-            <a:endParaRPr lang="en-US" sz="1550" dirty="0"/>
+            <a:endParaRPr lang="en-US" sz="1320" dirty="0"/>
           </a:p>
         </p:txBody>
       </p:sp>
@@ -4874,13 +4919,16 @@
           <a:ln/>
         </p:spPr>
         <p:txBody>
-          <a:bodyPr wrap="square" lIns="254" tIns="254" rIns="254" bIns="254" rtlCol="0" anchor="t">
+          <a:bodyPr wrap="square" lIns="508" tIns="508" rIns="508" bIns="508" rtlCol="0" anchor="t">
             <a:normAutofit/>
           </a:bodyPr>
           <a:lstStyle/>
           <a:p>
-            <a:r>
-              <a:rPr lang="en-US" sz="1380" dirty="0">
+            <a:pPr indent="0" marL="0">
+              <a:buNone/>
+            </a:pPr>
+            <a:r>
+              <a:rPr lang="en-US" sz="1220" dirty="0">
                 <a:solidFill>
                   <a:srgbClr val="17364A"/>
                 </a:solidFill>
@@ -4888,13 +4936,16 @@
                 <a:ea typeface="Aptos" pitchFamily="34" charset="-122"/>
                 <a:cs typeface="Aptos" pitchFamily="34" charset="-120"/>
               </a:rPr>
-              <a:t>Generative AI governance should define approved tools, prohibited data, review.</a:t>
-            </a:r>
-            <a:endParaRPr lang="en-US" sz="1380" dirty="0"/>
-          </a:p>
-          <a:p>
-            <a:r>
-              <a:rPr lang="en-US" sz="1380" dirty="0">
+              <a:t>Generative AI governance should define approved tools, prohibited.</a:t>
+            </a:r>
+            <a:endParaRPr lang="en-US" sz="1220" dirty="0"/>
+          </a:p>
+          <a:p>
+            <a:pPr indent="0" marL="0">
+              <a:buNone/>
+            </a:pPr>
+            <a:r>
+              <a:rPr lang="en-US" sz="1220" dirty="0">
                 <a:solidFill>
                   <a:srgbClr val="17364A"/>
                 </a:solidFill>
@@ -4902,13 +4953,16 @@
                 <a:ea typeface="Aptos" pitchFamily="34" charset="-122"/>
                 <a:cs typeface="Aptos" pitchFamily="34" charset="-120"/>
               </a:rPr>
-              <a:t>Predictive model governance should require validation, subgroup performance review,.</a:t>
-            </a:r>
-            <a:endParaRPr lang="en-US" sz="1380" dirty="0"/>
-          </a:p>
-          <a:p>
-            <a:r>
-              <a:rPr lang="en-US" sz="1380" dirty="0">
+              <a:t>Predictive model governance should require validation, subgroup.</a:t>
+            </a:r>
+            <a:endParaRPr lang="en-US" sz="1220" dirty="0"/>
+          </a:p>
+          <a:p>
+            <a:pPr indent="0" marL="0">
+              <a:buNone/>
+            </a:pPr>
+            <a:r>
+              <a:rPr lang="en-US" sz="1220" dirty="0">
                 <a:solidFill>
                   <a:srgbClr val="17364A"/>
                 </a:solidFill>
@@ -4916,9 +4970,9 @@
                 <a:ea typeface="Aptos" pitchFamily="34" charset="-122"/>
                 <a:cs typeface="Aptos" pitchFamily="34" charset="-120"/>
               </a:rPr>
-              <a:t>Agentic AI governance should define allowed actions, approval checkpoints, logging,.</a:t>
-            </a:r>
-            <a:endParaRPr lang="en-US" sz="1380" dirty="0"/>
+              <a:t>Agentic AI governance should define allowed actions, approval.</a:t>
+            </a:r>
+            <a:endParaRPr lang="en-US" sz="1220" dirty="0"/>
           </a:p>
         </p:txBody>
       </p:sp>
@@ -4996,17 +5050,17 @@
         </p:nvSpPr>
         <p:spPr>
           <a:xfrm>
-            <a:off x="7799832" y="5001768"/>
-            <a:ext cx="3145536" cy="502920"/>
-          </a:xfrm>
-          <a:prstGeom prst="rect">
-            <a:avLst/>
-          </a:prstGeom>
-          <a:noFill/>
-          <a:ln/>
-        </p:spPr>
-        <p:txBody>
-          <a:bodyPr wrap="square" lIns="0" tIns="0" rIns="0" bIns="0" rtlCol="0" anchor="t">
+            <a:off x="7799832" y="4974336"/>
+            <a:ext cx="3145536" cy="576072"/>
+          </a:xfrm>
+          <a:prstGeom prst="rect">
+            <a:avLst/>
+          </a:prstGeom>
+          <a:noFill/>
+          <a:ln/>
+        </p:spPr>
+        <p:txBody>
+          <a:bodyPr wrap="square" lIns="254" tIns="254" rIns="254" bIns="254" rtlCol="0" anchor="t">
             <a:normAutofit/>
           </a:bodyPr>
           <a:lstStyle/>
@@ -5015,7 +5069,7 @@
               <a:buNone/>
             </a:pPr>
             <a:r>
-              <a:rPr lang="en-US" sz="1550" dirty="0">
+              <a:rPr lang="en-US" sz="1320" dirty="0">
                 <a:solidFill>
                   <a:srgbClr val="17364A"/>
                 </a:solidFill>
@@ -5023,9 +5077,9 @@
                 <a:ea typeface="Aptos" pitchFamily="34" charset="-122"/>
                 <a:cs typeface="Aptos" pitchFamily="34" charset="-120"/>
               </a:rPr>
-              <a:t>Translate this concept into clear decision rights, review steps, documentation expectations, and escalation paths before an AI-supported workflow is approved.</a:t>
-            </a:r>
-            <a:endParaRPr lang="en-US" sz="1550" dirty="0"/>
+              <a:t>Translate this concept into clear decision rights, review steps, documentation expectations, and escalation paths before.</a:t>
+            </a:r>
+            <a:endParaRPr lang="en-US" sz="1320" dirty="0"/>
           </a:p>
         </p:txBody>
       </p:sp>
@@ -5326,49 +5380,58 @@
           <a:ln/>
         </p:spPr>
         <p:txBody>
-          <a:bodyPr wrap="square" lIns="635" tIns="635" rIns="635" bIns="635" rtlCol="0" anchor="t">
+          <a:bodyPr wrap="square" lIns="1016" tIns="1016" rIns="1016" bIns="1016" rtlCol="0" anchor="t">
             <a:normAutofit/>
           </a:bodyPr>
           <a:lstStyle/>
           <a:p>
+            <a:pPr indent="0" marL="0">
+              <a:buNone/>
+            </a:pPr>
             <a:r>
               <a:rPr lang="en-US" sz="2100" dirty="0">
                 <a:solidFill>
-                  <a:srgbClr val="17364A"/>
-                </a:solidFill>
-                <a:latin typeface="Aptos" pitchFamily="34" charset="0"/>
-                <a:ea typeface="Aptos" pitchFamily="34" charset="-122"/>
-                <a:cs typeface="Aptos" pitchFamily="34" charset="-120"/>
-              </a:rPr>
-              <a:t>Which current or proposed AI use case in your agency raises this leadership or governance issue most.</a:t>
+                  <a:srgbClr val="003A63"/>
+                </a:solidFill>
+                <a:latin typeface="Aptos" pitchFamily="34" charset="0"/>
+                <a:ea typeface="Aptos" pitchFamily="34" charset="-122"/>
+                <a:cs typeface="Aptos" pitchFamily="34" charset="-120"/>
+              </a:rPr>
+              <a:t>• Which current or proposed AI use case in your agency raises this leadership or governance.</a:t>
             </a:r>
             <a:endParaRPr lang="en-US" sz="2100" dirty="0"/>
           </a:p>
           <a:p>
+            <a:pPr indent="0" marL="0">
+              <a:buNone/>
+            </a:pPr>
             <a:r>
               <a:rPr lang="en-US" sz="2100" dirty="0">
                 <a:solidFill>
-                  <a:srgbClr val="17364A"/>
-                </a:solidFill>
-                <a:latin typeface="Aptos" pitchFamily="34" charset="0"/>
-                <a:ea typeface="Aptos" pitchFamily="34" charset="-122"/>
-                <a:cs typeface="Aptos" pitchFamily="34" charset="-120"/>
-              </a:rPr>
-              <a:t>Who currently has authority to make decisions about this issue, and is that authority documented?</a:t>
+                  <a:srgbClr val="003A63"/>
+                </a:solidFill>
+                <a:latin typeface="Aptos" pitchFamily="34" charset="0"/>
+                <a:ea typeface="Aptos" pitchFamily="34" charset="-122"/>
+                <a:cs typeface="Aptos" pitchFamily="34" charset="-120"/>
+              </a:rPr>
+              <a:t>• Who currently has authority to make decisions about this issue, and is that authority.</a:t>
             </a:r>
             <a:endParaRPr lang="en-US" sz="2100" dirty="0"/>
           </a:p>
           <a:p>
+            <a:pPr indent="0" marL="0">
+              <a:buNone/>
+            </a:pPr>
             <a:r>
               <a:rPr lang="en-US" sz="2100" dirty="0">
                 <a:solidFill>
-                  <a:srgbClr val="17364A"/>
-                </a:solidFill>
-                <a:latin typeface="Aptos" pitchFamily="34" charset="0"/>
-                <a:ea typeface="Aptos" pitchFamily="34" charset="-122"/>
-                <a:cs typeface="Aptos" pitchFamily="34" charset="-120"/>
-              </a:rPr>
-              <a:t>What evidence would governance or leadership need before approving the use case?</a:t>
+                  <a:srgbClr val="003A63"/>
+                </a:solidFill>
+                <a:latin typeface="Aptos" pitchFamily="34" charset="0"/>
+                <a:ea typeface="Aptos" pitchFamily="34" charset="-122"/>
+                <a:cs typeface="Aptos" pitchFamily="34" charset="-120"/>
+              </a:rPr>
+              <a:t>• What evidence would governance or leadership need before approving the use case?</a:t>
             </a:r>
             <a:endParaRPr lang="en-US" sz="2100" dirty="0"/>
           </a:p>
@@ -5448,17 +5511,17 @@
         </p:nvSpPr>
         <p:spPr>
           <a:xfrm>
-            <a:off x="7799832" y="1828800"/>
-            <a:ext cx="3145536" cy="685800"/>
-          </a:xfrm>
-          <a:prstGeom prst="rect">
-            <a:avLst/>
-          </a:prstGeom>
-          <a:noFill/>
-          <a:ln/>
-        </p:spPr>
-        <p:txBody>
-          <a:bodyPr wrap="square" lIns="0" tIns="0" rIns="0" bIns="0" rtlCol="0" anchor="t">
+            <a:off x="7799832" y="1801368"/>
+            <a:ext cx="3145536" cy="758952"/>
+          </a:xfrm>
+          <a:prstGeom prst="rect">
+            <a:avLst/>
+          </a:prstGeom>
+          <a:noFill/>
+          <a:ln/>
+        </p:spPr>
+        <p:txBody>
+          <a:bodyPr wrap="square" lIns="254" tIns="254" rIns="254" bIns="254" rtlCol="0" anchor="t">
             <a:normAutofit/>
           </a:bodyPr>
           <a:lstStyle/>
@@ -5467,7 +5530,7 @@
               <a:buNone/>
             </a:pPr>
             <a:r>
-              <a:rPr lang="en-US" sz="1550" dirty="0">
+              <a:rPr lang="en-US" sz="1320" dirty="0">
                 <a:solidFill>
                   <a:srgbClr val="17364A"/>
                 </a:solidFill>
@@ -5477,7 +5540,7 @@
               </a:rPr>
               <a:t>Which current or proposed AI use case in your agency raises this leadership or governance issue most.</a:t>
             </a:r>
-            <a:endParaRPr lang="en-US" sz="1550" dirty="0"/>
+            <a:endParaRPr lang="en-US" sz="1320" dirty="0"/>
           </a:p>
         </p:txBody>
       </p:sp>
@@ -5565,13 +5628,16 @@
           <a:ln/>
         </p:spPr>
         <p:txBody>
-          <a:bodyPr wrap="square" lIns="254" tIns="254" rIns="254" bIns="254" rtlCol="0" anchor="t">
+          <a:bodyPr wrap="square" lIns="508" tIns="508" rIns="508" bIns="508" rtlCol="0" anchor="t">
             <a:normAutofit/>
           </a:bodyPr>
           <a:lstStyle/>
           <a:p>
-            <a:r>
-              <a:rPr lang="en-US" sz="1380" dirty="0">
+            <a:pPr indent="0" marL="0">
+              <a:buNone/>
+            </a:pPr>
+            <a:r>
+              <a:rPr lang="en-US" sz="1220" dirty="0">
                 <a:solidFill>
                   <a:srgbClr val="17364A"/>
                 </a:solidFill>
@@ -5579,13 +5645,16 @@
                 <a:ea typeface="Aptos" pitchFamily="34" charset="-122"/>
                 <a:cs typeface="Aptos" pitchFamily="34" charset="-120"/>
               </a:rPr>
-              <a:t>Which current or proposed AI use case in your agency raises this leadership or governance.</a:t>
-            </a:r>
-            <a:endParaRPr lang="en-US" sz="1380" dirty="0"/>
-          </a:p>
-          <a:p>
-            <a:r>
-              <a:rPr lang="en-US" sz="1380" dirty="0">
+              <a:t>Which current or proposed AI use case in your agency raises this.</a:t>
+            </a:r>
+            <a:endParaRPr lang="en-US" sz="1220" dirty="0"/>
+          </a:p>
+          <a:p>
+            <a:pPr indent="0" marL="0">
+              <a:buNone/>
+            </a:pPr>
+            <a:r>
+              <a:rPr lang="en-US" sz="1220" dirty="0">
                 <a:solidFill>
                   <a:srgbClr val="17364A"/>
                 </a:solidFill>
@@ -5593,13 +5662,16 @@
                 <a:ea typeface="Aptos" pitchFamily="34" charset="-122"/>
                 <a:cs typeface="Aptos" pitchFamily="34" charset="-120"/>
               </a:rPr>
-              <a:t>Who currently has authority to make decisions about this issue, and is that authority.</a:t>
-            </a:r>
-            <a:endParaRPr lang="en-US" sz="1380" dirty="0"/>
-          </a:p>
-          <a:p>
-            <a:r>
-              <a:rPr lang="en-US" sz="1380" dirty="0">
+              <a:t>Who currently has authority to make decisions about this issue,.</a:t>
+            </a:r>
+            <a:endParaRPr lang="en-US" sz="1220" dirty="0"/>
+          </a:p>
+          <a:p>
+            <a:pPr indent="0" marL="0">
+              <a:buNone/>
+            </a:pPr>
+            <a:r>
+              <a:rPr lang="en-US" sz="1220" dirty="0">
                 <a:solidFill>
                   <a:srgbClr val="17364A"/>
                 </a:solidFill>
@@ -5607,9 +5679,9 @@
                 <a:ea typeface="Aptos" pitchFamily="34" charset="-122"/>
                 <a:cs typeface="Aptos" pitchFamily="34" charset="-120"/>
               </a:rPr>
-              <a:t>What evidence would governance or leadership need before approving the use case?</a:t>
-            </a:r>
-            <a:endParaRPr lang="en-US" sz="1380" dirty="0"/>
+              <a:t>What evidence would governance or leadership need before approving.</a:t>
+            </a:r>
+            <a:endParaRPr lang="en-US" sz="1220" dirty="0"/>
           </a:p>
         </p:txBody>
       </p:sp>
@@ -5687,17 +5759,17 @@
         </p:nvSpPr>
         <p:spPr>
           <a:xfrm>
-            <a:off x="7799832" y="5001768"/>
-            <a:ext cx="3145536" cy="502920"/>
-          </a:xfrm>
-          <a:prstGeom prst="rect">
-            <a:avLst/>
-          </a:prstGeom>
-          <a:noFill/>
-          <a:ln/>
-        </p:spPr>
-        <p:txBody>
-          <a:bodyPr wrap="square" lIns="0" tIns="0" rIns="0" bIns="0" rtlCol="0" anchor="t">
+            <a:off x="7799832" y="4974336"/>
+            <a:ext cx="3145536" cy="576072"/>
+          </a:xfrm>
+          <a:prstGeom prst="rect">
+            <a:avLst/>
+          </a:prstGeom>
+          <a:noFill/>
+          <a:ln/>
+        </p:spPr>
+        <p:txBody>
+          <a:bodyPr wrap="square" lIns="254" tIns="254" rIns="254" bIns="254" rtlCol="0" anchor="t">
             <a:normAutofit/>
           </a:bodyPr>
           <a:lstStyle/>
@@ -5706,7 +5778,7 @@
               <a:buNone/>
             </a:pPr>
             <a:r>
-              <a:rPr lang="en-US" sz="1550" dirty="0">
+              <a:rPr lang="en-US" sz="1320" dirty="0">
                 <a:solidFill>
                   <a:srgbClr val="17364A"/>
                 </a:solidFill>
@@ -5714,9 +5786,9 @@
                 <a:ea typeface="Aptos" pitchFamily="34" charset="-122"/>
                 <a:cs typeface="Aptos" pitchFamily="34" charset="-120"/>
               </a:rPr>
-              <a:t>Translate this concept into clear decision rights, review steps, documentation expectations, and escalation paths before an AI-supported workflow is approved.</a:t>
-            </a:r>
-            <a:endParaRPr lang="en-US" sz="1550" dirty="0"/>
+              <a:t>Translate this concept into clear decision rights, review steps, documentation expectations, and escalation paths before.</a:t>
+            </a:r>
+            <a:endParaRPr lang="en-US" sz="1320" dirty="0"/>
           </a:p>
         </p:txBody>
       </p:sp>
@@ -6017,35 +6089,41 @@
           <a:ln/>
         </p:spPr>
         <p:txBody>
-          <a:bodyPr wrap="square" lIns="635" tIns="635" rIns="635" bIns="635" rtlCol="0" anchor="t">
+          <a:bodyPr wrap="square" lIns="1016" tIns="1016" rIns="1016" bIns="1016" rtlCol="0" anchor="t">
             <a:normAutofit/>
           </a:bodyPr>
           <a:lstStyle/>
           <a:p>
+            <a:pPr indent="0" marL="0">
+              <a:buNone/>
+            </a:pPr>
             <a:r>
               <a:rPr lang="en-US" sz="2100" dirty="0">
                 <a:solidFill>
-                  <a:srgbClr val="17364A"/>
-                </a:solidFill>
-                <a:latin typeface="Aptos" pitchFamily="34" charset="0"/>
-                <a:ea typeface="Aptos" pitchFamily="34" charset="-122"/>
-                <a:cs typeface="Aptos" pitchFamily="34" charset="-120"/>
-              </a:rPr>
-              <a:t>Which staff, partners, or communities would be affected if this issue were handled poorly?</a:t>
+                  <a:srgbClr val="003A63"/>
+                </a:solidFill>
+                <a:latin typeface="Aptos" pitchFamily="34" charset="0"/>
+                <a:ea typeface="Aptos" pitchFamily="34" charset="-122"/>
+                <a:cs typeface="Aptos" pitchFamily="34" charset="-120"/>
+              </a:rPr>
+              <a:t>• Which staff, partners, or communities would be affected if this issue were handled poorly?</a:t>
             </a:r>
             <a:endParaRPr lang="en-US" sz="2100" dirty="0"/>
           </a:p>
           <a:p>
+            <a:pPr indent="0" marL="0">
+              <a:buNone/>
+            </a:pPr>
             <a:r>
               <a:rPr lang="en-US" sz="2100" dirty="0">
                 <a:solidFill>
-                  <a:srgbClr val="17364A"/>
-                </a:solidFill>
-                <a:latin typeface="Aptos" pitchFamily="34" charset="0"/>
-                <a:ea typeface="Aptos" pitchFamily="34" charset="-122"/>
-                <a:cs typeface="Aptos" pitchFamily="34" charset="-120"/>
-              </a:rPr>
-              <a:t>What policy, process, or artifact should be created or updated after this module?</a:t>
+                  <a:srgbClr val="003A63"/>
+                </a:solidFill>
+                <a:latin typeface="Aptos" pitchFamily="34" charset="0"/>
+                <a:ea typeface="Aptos" pitchFamily="34" charset="-122"/>
+                <a:cs typeface="Aptos" pitchFamily="34" charset="-120"/>
+              </a:rPr>
+              <a:t>• What policy, process, or artifact should be created or updated after this module?</a:t>
             </a:r>
             <a:endParaRPr lang="en-US" sz="2100" dirty="0"/>
           </a:p>
@@ -6125,17 +6203,17 @@
         </p:nvSpPr>
         <p:spPr>
           <a:xfrm>
-            <a:off x="7799832" y="1828800"/>
-            <a:ext cx="3145536" cy="685800"/>
-          </a:xfrm>
-          <a:prstGeom prst="rect">
-            <a:avLst/>
-          </a:prstGeom>
-          <a:noFill/>
-          <a:ln/>
-        </p:spPr>
-        <p:txBody>
-          <a:bodyPr wrap="square" lIns="0" tIns="0" rIns="0" bIns="0" rtlCol="0" anchor="t">
+            <a:off x="7799832" y="1801368"/>
+            <a:ext cx="3145536" cy="758952"/>
+          </a:xfrm>
+          <a:prstGeom prst="rect">
+            <a:avLst/>
+          </a:prstGeom>
+          <a:noFill/>
+          <a:ln/>
+        </p:spPr>
+        <p:txBody>
+          <a:bodyPr wrap="square" lIns="254" tIns="254" rIns="254" bIns="254" rtlCol="0" anchor="t">
             <a:normAutofit/>
           </a:bodyPr>
           <a:lstStyle/>
@@ -6144,7 +6222,7 @@
               <a:buNone/>
             </a:pPr>
             <a:r>
-              <a:rPr lang="en-US" sz="1550" dirty="0">
+              <a:rPr lang="en-US" sz="1320" dirty="0">
                 <a:solidFill>
                   <a:srgbClr val="17364A"/>
                 </a:solidFill>
@@ -6154,7 +6232,7 @@
               </a:rPr>
               <a:t>Which staff, partners, or communities would be affected if this issue were handled poorly?</a:t>
             </a:r>
-            <a:endParaRPr lang="en-US" sz="1550" dirty="0"/>
+            <a:endParaRPr lang="en-US" sz="1320" dirty="0"/>
           </a:p>
         </p:txBody>
       </p:sp>
@@ -6242,13 +6320,16 @@
           <a:ln/>
         </p:spPr>
         <p:txBody>
-          <a:bodyPr wrap="square" lIns="254" tIns="254" rIns="254" bIns="254" rtlCol="0" anchor="t">
+          <a:bodyPr wrap="square" lIns="508" tIns="508" rIns="508" bIns="508" rtlCol="0" anchor="t">
             <a:normAutofit/>
           </a:bodyPr>
           <a:lstStyle/>
           <a:p>
-            <a:r>
-              <a:rPr lang="en-US" sz="1380" dirty="0">
+            <a:pPr indent="0" marL="0">
+              <a:buNone/>
+            </a:pPr>
+            <a:r>
+              <a:rPr lang="en-US" sz="1220" dirty="0">
                 <a:solidFill>
                   <a:srgbClr val="17364A"/>
                 </a:solidFill>
@@ -6256,13 +6337,16 @@
                 <a:ea typeface="Aptos" pitchFamily="34" charset="-122"/>
                 <a:cs typeface="Aptos" pitchFamily="34" charset="-120"/>
               </a:rPr>
-              <a:t>Which staff, partners, or communities would be affected if this issue were handled poorly?</a:t>
-            </a:r>
-            <a:endParaRPr lang="en-US" sz="1380" dirty="0"/>
-          </a:p>
-          <a:p>
-            <a:r>
-              <a:rPr lang="en-US" sz="1380" dirty="0">
+              <a:t>Which staff, partners, or communities would be affected if this.</a:t>
+            </a:r>
+            <a:endParaRPr lang="en-US" sz="1220" dirty="0"/>
+          </a:p>
+          <a:p>
+            <a:pPr indent="0" marL="0">
+              <a:buNone/>
+            </a:pPr>
+            <a:r>
+              <a:rPr lang="en-US" sz="1220" dirty="0">
                 <a:solidFill>
                   <a:srgbClr val="17364A"/>
                 </a:solidFill>
@@ -6270,9 +6354,9 @@
                 <a:ea typeface="Aptos" pitchFamily="34" charset="-122"/>
                 <a:cs typeface="Aptos" pitchFamily="34" charset="-120"/>
               </a:rPr>
-              <a:t>What policy, process, or artifact should be created or updated after this module?</a:t>
-            </a:r>
-            <a:endParaRPr lang="en-US" sz="1380" dirty="0"/>
+              <a:t>What policy, process, or artifact should be created or updated.</a:t>
+            </a:r>
+            <a:endParaRPr lang="en-US" sz="1220" dirty="0"/>
           </a:p>
         </p:txBody>
       </p:sp>
@@ -6350,17 +6434,17 @@
         </p:nvSpPr>
         <p:spPr>
           <a:xfrm>
-            <a:off x="7799832" y="5001768"/>
-            <a:ext cx="3145536" cy="502920"/>
-          </a:xfrm>
-          <a:prstGeom prst="rect">
-            <a:avLst/>
-          </a:prstGeom>
-          <a:noFill/>
-          <a:ln/>
-        </p:spPr>
-        <p:txBody>
-          <a:bodyPr wrap="square" lIns="0" tIns="0" rIns="0" bIns="0" rtlCol="0" anchor="t">
+            <a:off x="7799832" y="4974336"/>
+            <a:ext cx="3145536" cy="576072"/>
+          </a:xfrm>
+          <a:prstGeom prst="rect">
+            <a:avLst/>
+          </a:prstGeom>
+          <a:noFill/>
+          <a:ln/>
+        </p:spPr>
+        <p:txBody>
+          <a:bodyPr wrap="square" lIns="254" tIns="254" rIns="254" bIns="254" rtlCol="0" anchor="t">
             <a:normAutofit/>
           </a:bodyPr>
           <a:lstStyle/>
@@ -6369,7 +6453,7 @@
               <a:buNone/>
             </a:pPr>
             <a:r>
-              <a:rPr lang="en-US" sz="1550" dirty="0">
+              <a:rPr lang="en-US" sz="1320" dirty="0">
                 <a:solidFill>
                   <a:srgbClr val="17364A"/>
                 </a:solidFill>
@@ -6377,9 +6461,9 @@
                 <a:ea typeface="Aptos" pitchFamily="34" charset="-122"/>
                 <a:cs typeface="Aptos" pitchFamily="34" charset="-120"/>
               </a:rPr>
-              <a:t>Translate this concept into clear decision rights, review steps, documentation expectations, and escalation paths before an AI-supported workflow is approved.</a:t>
-            </a:r>
-            <a:endParaRPr lang="en-US" sz="1550" dirty="0"/>
+              <a:t>Translate this concept into clear decision rights, review steps, documentation expectations, and escalation paths before.</a:t>
+            </a:r>
+            <a:endParaRPr lang="en-US" sz="1320" dirty="0"/>
           </a:p>
         </p:txBody>
       </p:sp>
@@ -6680,35 +6764,41 @@
           <a:ln/>
         </p:spPr>
         <p:txBody>
-          <a:bodyPr wrap="square" lIns="635" tIns="635" rIns="635" bIns="635" rtlCol="0" anchor="t">
+          <a:bodyPr wrap="square" lIns="1016" tIns="1016" rIns="1016" bIns="1016" rtlCol="0" anchor="t">
             <a:normAutofit/>
           </a:bodyPr>
           <a:lstStyle/>
           <a:p>
+            <a:pPr indent="0" marL="0">
+              <a:buNone/>
+            </a:pPr>
             <a:r>
               <a:rPr lang="en-US" sz="2100" dirty="0">
                 <a:solidFill>
-                  <a:srgbClr val="17364A"/>
-                </a:solidFill>
-                <a:latin typeface="Aptos" pitchFamily="34" charset="0"/>
-                <a:ea typeface="Aptos" pitchFamily="34" charset="-122"/>
-                <a:cs typeface="Aptos" pitchFamily="34" charset="-120"/>
-              </a:rPr>
-              <a:t>Draft a one-page AI governance charter and a one-page operating model.</a:t>
+                  <a:srgbClr val="003A63"/>
+                </a:solidFill>
+                <a:latin typeface="Aptos" pitchFamily="34" charset="0"/>
+                <a:ea typeface="Aptos" pitchFamily="34" charset="-122"/>
+                <a:cs typeface="Aptos" pitchFamily="34" charset="-120"/>
+              </a:rPr>
+              <a:t>• Draft a one-page AI governance charter and a one-page operating model.</a:t>
             </a:r>
             <a:endParaRPr lang="en-US" sz="2100" dirty="0"/>
           </a:p>
           <a:p>
+            <a:pPr indent="0" marL="0">
+              <a:buNone/>
+            </a:pPr>
             <a:r>
               <a:rPr lang="en-US" sz="2100" dirty="0">
                 <a:solidFill>
-                  <a:srgbClr val="17364A"/>
-                </a:solidFill>
-                <a:latin typeface="Aptos" pitchFamily="34" charset="0"/>
-                <a:ea typeface="Aptos" pitchFamily="34" charset="-122"/>
-                <a:cs typeface="Aptos" pitchFamily="34" charset="-120"/>
-              </a:rPr>
-              <a:t>Include scope, membership, review levels, decision rights, documentation, escalation, monitoring, and.</a:t>
+                  <a:srgbClr val="003A63"/>
+                </a:solidFill>
+                <a:latin typeface="Aptos" pitchFamily="34" charset="0"/>
+                <a:ea typeface="Aptos" pitchFamily="34" charset="-122"/>
+                <a:cs typeface="Aptos" pitchFamily="34" charset="-120"/>
+              </a:rPr>
+              <a:t>• Include scope, membership, review levels, decision rights, documentation, escalation,.</a:t>
             </a:r>
             <a:endParaRPr lang="en-US" sz="2100" dirty="0"/>
           </a:p>
@@ -6788,17 +6878,17 @@
         </p:nvSpPr>
         <p:spPr>
           <a:xfrm>
-            <a:off x="7799832" y="1828800"/>
-            <a:ext cx="3145536" cy="685800"/>
-          </a:xfrm>
-          <a:prstGeom prst="rect">
-            <a:avLst/>
-          </a:prstGeom>
-          <a:noFill/>
-          <a:ln/>
-        </p:spPr>
-        <p:txBody>
-          <a:bodyPr wrap="square" lIns="0" tIns="0" rIns="0" bIns="0" rtlCol="0" anchor="t">
+            <a:off x="7799832" y="1801368"/>
+            <a:ext cx="3145536" cy="758952"/>
+          </a:xfrm>
+          <a:prstGeom prst="rect">
+            <a:avLst/>
+          </a:prstGeom>
+          <a:noFill/>
+          <a:ln/>
+        </p:spPr>
+        <p:txBody>
+          <a:bodyPr wrap="square" lIns="254" tIns="254" rIns="254" bIns="254" rtlCol="0" anchor="t">
             <a:normAutofit/>
           </a:bodyPr>
           <a:lstStyle/>
@@ -6807,7 +6897,7 @@
               <a:buNone/>
             </a:pPr>
             <a:r>
-              <a:rPr lang="en-US" sz="1550" dirty="0">
+              <a:rPr lang="en-US" sz="1320" dirty="0">
                 <a:solidFill>
                   <a:srgbClr val="17364A"/>
                 </a:solidFill>
@@ -6817,7 +6907,7 @@
               </a:rPr>
               <a:t>Draft a one-page AI governance charter and a one-page operating model.</a:t>
             </a:r>
-            <a:endParaRPr lang="en-US" sz="1550" dirty="0"/>
+            <a:endParaRPr lang="en-US" sz="1320" dirty="0"/>
           </a:p>
         </p:txBody>
       </p:sp>
@@ -6905,13 +6995,16 @@
           <a:ln/>
         </p:spPr>
         <p:txBody>
-          <a:bodyPr wrap="square" lIns="254" tIns="254" rIns="254" bIns="254" rtlCol="0" anchor="t">
+          <a:bodyPr wrap="square" lIns="508" tIns="508" rIns="508" bIns="508" rtlCol="0" anchor="t">
             <a:normAutofit/>
           </a:bodyPr>
           <a:lstStyle/>
           <a:p>
-            <a:r>
-              <a:rPr lang="en-US" sz="1380" dirty="0">
+            <a:pPr indent="0" marL="0">
+              <a:buNone/>
+            </a:pPr>
+            <a:r>
+              <a:rPr lang="en-US" sz="1220" dirty="0">
                 <a:solidFill>
                   <a:srgbClr val="17364A"/>
                 </a:solidFill>
@@ -6919,13 +7012,16 @@
                 <a:ea typeface="Aptos" pitchFamily="34" charset="-122"/>
                 <a:cs typeface="Aptos" pitchFamily="34" charset="-120"/>
               </a:rPr>
-              <a:t>Draft a one-page AI governance charter and a one-page operating model.</a:t>
-            </a:r>
-            <a:endParaRPr lang="en-US" sz="1380" dirty="0"/>
-          </a:p>
-          <a:p>
-            <a:r>
-              <a:rPr lang="en-US" sz="1380" dirty="0">
+              <a:t>Draft a one-page AI governance charter and a one-page operating.</a:t>
+            </a:r>
+            <a:endParaRPr lang="en-US" sz="1220" dirty="0"/>
+          </a:p>
+          <a:p>
+            <a:pPr indent="0" marL="0">
+              <a:buNone/>
+            </a:pPr>
+            <a:r>
+              <a:rPr lang="en-US" sz="1220" dirty="0">
                 <a:solidFill>
                   <a:srgbClr val="17364A"/>
                 </a:solidFill>
@@ -6933,9 +7029,9 @@
                 <a:ea typeface="Aptos" pitchFamily="34" charset="-122"/>
                 <a:cs typeface="Aptos" pitchFamily="34" charset="-120"/>
               </a:rPr>
-              <a:t>Include scope, membership, review levels, decision rights, documentation, escalation,.</a:t>
-            </a:r>
-            <a:endParaRPr lang="en-US" sz="1380" dirty="0"/>
+              <a:t>Include scope, membership, review levels, decision rights,.</a:t>
+            </a:r>
+            <a:endParaRPr lang="en-US" sz="1220" dirty="0"/>
           </a:p>
         </p:txBody>
       </p:sp>
@@ -7013,17 +7109,17 @@
         </p:nvSpPr>
         <p:spPr>
           <a:xfrm>
-            <a:off x="7799832" y="5001768"/>
-            <a:ext cx="3145536" cy="502920"/>
-          </a:xfrm>
-          <a:prstGeom prst="rect">
-            <a:avLst/>
-          </a:prstGeom>
-          <a:noFill/>
-          <a:ln/>
-        </p:spPr>
-        <p:txBody>
-          <a:bodyPr wrap="square" lIns="0" tIns="0" rIns="0" bIns="0" rtlCol="0" anchor="t">
+            <a:off x="7799832" y="4974336"/>
+            <a:ext cx="3145536" cy="576072"/>
+          </a:xfrm>
+          <a:prstGeom prst="rect">
+            <a:avLst/>
+          </a:prstGeom>
+          <a:noFill/>
+          <a:ln/>
+        </p:spPr>
+        <p:txBody>
+          <a:bodyPr wrap="square" lIns="254" tIns="254" rIns="254" bIns="254" rtlCol="0" anchor="t">
             <a:normAutofit/>
           </a:bodyPr>
           <a:lstStyle/>
@@ -7032,7 +7128,7 @@
               <a:buNone/>
             </a:pPr>
             <a:r>
-              <a:rPr lang="en-US" sz="1550" dirty="0">
+              <a:rPr lang="en-US" sz="1320" dirty="0">
                 <a:solidFill>
                   <a:srgbClr val="17364A"/>
                 </a:solidFill>
@@ -7040,9 +7136,9 @@
                 <a:ea typeface="Aptos" pitchFamily="34" charset="-122"/>
                 <a:cs typeface="Aptos" pitchFamily="34" charset="-120"/>
               </a:rPr>
-              <a:t>Use the assignment to test whether you can explain the concept, apply it to a realistic public health situation, and identify what would need review before the work moves forward.</a:t>
-            </a:r>
-            <a:endParaRPr lang="en-US" sz="1550" dirty="0"/>
+              <a:t>Use the assignment to test whether you can explain the concept, apply it to a realistic public health situation, and.</a:t>
+            </a:r>
+            <a:endParaRPr lang="en-US" sz="1320" dirty="0"/>
           </a:p>
         </p:txBody>
       </p:sp>
@@ -7343,49 +7439,58 @@
           <a:ln/>
         </p:spPr>
         <p:txBody>
-          <a:bodyPr wrap="square" lIns="635" tIns="635" rIns="635" bIns="635" rtlCol="0" anchor="t">
+          <a:bodyPr wrap="square" lIns="1016" tIns="1016" rIns="1016" bIns="1016" rtlCol="0" anchor="t">
             <a:normAutofit/>
           </a:bodyPr>
           <a:lstStyle/>
           <a:p>
+            <a:pPr indent="0" marL="0">
+              <a:buNone/>
+            </a:pPr>
             <a:r>
               <a:rPr lang="en-US" sz="2100" dirty="0">
                 <a:solidFill>
-                  <a:srgbClr val="17364A"/>
-                </a:solidFill>
-                <a:latin typeface="Aptos" pitchFamily="34" charset="0"/>
-                <a:ea typeface="Aptos" pitchFamily="34" charset="-122"/>
-                <a:cs typeface="Aptos" pitchFamily="34" charset="-120"/>
-              </a:rPr>
-              <a:t>Choose a real or realistic public health AI use case.</a:t>
+                  <a:srgbClr val="003A63"/>
+                </a:solidFill>
+                <a:latin typeface="Aptos" pitchFamily="34" charset="0"/>
+                <a:ea typeface="Aptos" pitchFamily="34" charset="-122"/>
+                <a:cs typeface="Aptos" pitchFamily="34" charset="-120"/>
+              </a:rPr>
+              <a:t>• Choose a real or realistic public health AI use case.</a:t>
             </a:r>
             <a:endParaRPr lang="en-US" sz="2100" dirty="0"/>
           </a:p>
           <a:p>
+            <a:pPr indent="0" marL="0">
+              <a:buNone/>
+            </a:pPr>
             <a:r>
               <a:rPr lang="en-US" sz="2100" dirty="0">
                 <a:solidFill>
-                  <a:srgbClr val="17364A"/>
-                </a:solidFill>
-                <a:latin typeface="Aptos" pitchFamily="34" charset="0"/>
-                <a:ea typeface="Aptos" pitchFamily="34" charset="-122"/>
-                <a:cs typeface="Aptos" pitchFamily="34" charset="-120"/>
-              </a:rPr>
-              <a:t>Document assumptions, unresolved questions, and which agency roles would need to review the artifact.</a:t>
+                  <a:srgbClr val="003A63"/>
+                </a:solidFill>
+                <a:latin typeface="Aptos" pitchFamily="34" charset="0"/>
+                <a:ea typeface="Aptos" pitchFamily="34" charset="-122"/>
+                <a:cs typeface="Aptos" pitchFamily="34" charset="-120"/>
+              </a:rPr>
+              <a:t>• Document assumptions, unresolved questions, and which agency roles would need to review the.</a:t>
             </a:r>
             <a:endParaRPr lang="en-US" sz="2100" dirty="0"/>
           </a:p>
           <a:p>
+            <a:pPr indent="0" marL="0">
+              <a:buNone/>
+            </a:pPr>
             <a:r>
               <a:rPr lang="en-US" sz="2100" dirty="0">
                 <a:solidFill>
-                  <a:srgbClr val="17364A"/>
-                </a:solidFill>
-                <a:latin typeface="Aptos" pitchFamily="34" charset="0"/>
-                <a:ea typeface="Aptos" pitchFamily="34" charset="-122"/>
-                <a:cs typeface="Aptos" pitchFamily="34" charset="-120"/>
-              </a:rPr>
-              <a:t>The exercise should produce a work product that could support governance review, leadership discussion,.</a:t>
+                  <a:srgbClr val="003A63"/>
+                </a:solidFill>
+                <a:latin typeface="Aptos" pitchFamily="34" charset="0"/>
+                <a:ea typeface="Aptos" pitchFamily="34" charset="-122"/>
+                <a:cs typeface="Aptos" pitchFamily="34" charset="-120"/>
+              </a:rPr>
+              <a:t>• The exercise should produce a work product that could support governance review, leadership.</a:t>
             </a:r>
             <a:endParaRPr lang="en-US" sz="2100" dirty="0"/>
           </a:p>
@@ -7465,17 +7570,17 @@
         </p:nvSpPr>
         <p:spPr>
           <a:xfrm>
-            <a:off x="7799832" y="1828800"/>
-            <a:ext cx="3145536" cy="685800"/>
-          </a:xfrm>
-          <a:prstGeom prst="rect">
-            <a:avLst/>
-          </a:prstGeom>
-          <a:noFill/>
-          <a:ln/>
-        </p:spPr>
-        <p:txBody>
-          <a:bodyPr wrap="square" lIns="0" tIns="0" rIns="0" bIns="0" rtlCol="0" anchor="t">
+            <a:off x="7799832" y="1801368"/>
+            <a:ext cx="3145536" cy="758952"/>
+          </a:xfrm>
+          <a:prstGeom prst="rect">
+            <a:avLst/>
+          </a:prstGeom>
+          <a:noFill/>
+          <a:ln/>
+        </p:spPr>
+        <p:txBody>
+          <a:bodyPr wrap="square" lIns="254" tIns="254" rIns="254" bIns="254" rtlCol="0" anchor="t">
             <a:normAutofit/>
           </a:bodyPr>
           <a:lstStyle/>
@@ -7484,7 +7589,7 @@
               <a:buNone/>
             </a:pPr>
             <a:r>
-              <a:rPr lang="en-US" sz="1550" dirty="0">
+              <a:rPr lang="en-US" sz="1320" dirty="0">
                 <a:solidFill>
                   <a:srgbClr val="17364A"/>
                 </a:solidFill>
@@ -7494,7 +7599,7 @@
               </a:rPr>
               <a:t>Choose a real or realistic public health AI use case.</a:t>
             </a:r>
-            <a:endParaRPr lang="en-US" sz="1550" dirty="0"/>
+            <a:endParaRPr lang="en-US" sz="1320" dirty="0"/>
           </a:p>
         </p:txBody>
       </p:sp>
@@ -7582,13 +7687,16 @@
           <a:ln/>
         </p:spPr>
         <p:txBody>
-          <a:bodyPr wrap="square" lIns="254" tIns="254" rIns="254" bIns="254" rtlCol="0" anchor="t">
+          <a:bodyPr wrap="square" lIns="508" tIns="508" rIns="508" bIns="508" rtlCol="0" anchor="t">
             <a:normAutofit/>
           </a:bodyPr>
           <a:lstStyle/>
           <a:p>
-            <a:r>
-              <a:rPr lang="en-US" sz="1380" dirty="0">
+            <a:pPr indent="0" marL="0">
+              <a:buNone/>
+            </a:pPr>
+            <a:r>
+              <a:rPr lang="en-US" sz="1220" dirty="0">
                 <a:solidFill>
                   <a:srgbClr val="17364A"/>
                 </a:solidFill>
@@ -7596,13 +7704,16 @@
                 <a:ea typeface="Aptos" pitchFamily="34" charset="-122"/>
                 <a:cs typeface="Aptos" pitchFamily="34" charset="-120"/>
               </a:rPr>
-              <a:t>Document assumptions, unresolved questions, and which agency roles would need to review.</a:t>
-            </a:r>
-            <a:endParaRPr lang="en-US" sz="1380" dirty="0"/>
-          </a:p>
-          <a:p>
-            <a:r>
-              <a:rPr lang="en-US" sz="1380" dirty="0">
+              <a:t>Document assumptions, unresolved questions, and which agency roles.</a:t>
+            </a:r>
+            <a:endParaRPr lang="en-US" sz="1220" dirty="0"/>
+          </a:p>
+          <a:p>
+            <a:pPr indent="0" marL="0">
+              <a:buNone/>
+            </a:pPr>
+            <a:r>
+              <a:rPr lang="en-US" sz="1220" dirty="0">
                 <a:solidFill>
                   <a:srgbClr val="17364A"/>
                 </a:solidFill>
@@ -7610,9 +7721,9 @@
                 <a:ea typeface="Aptos" pitchFamily="34" charset="-122"/>
                 <a:cs typeface="Aptos" pitchFamily="34" charset="-120"/>
               </a:rPr>
-              <a:t>The exercise should produce a work product that could support governance review,.</a:t>
-            </a:r>
-            <a:endParaRPr lang="en-US" sz="1380" dirty="0"/>
+              <a:t>The exercise should produce a work product that could support.</a:t>
+            </a:r>
+            <a:endParaRPr lang="en-US" sz="1220" dirty="0"/>
           </a:p>
         </p:txBody>
       </p:sp>
@@ -7690,17 +7801,17 @@
         </p:nvSpPr>
         <p:spPr>
           <a:xfrm>
-            <a:off x="7799832" y="5001768"/>
-            <a:ext cx="3145536" cy="502920"/>
-          </a:xfrm>
-          <a:prstGeom prst="rect">
-            <a:avLst/>
-          </a:prstGeom>
-          <a:noFill/>
-          <a:ln/>
-        </p:spPr>
-        <p:txBody>
-          <a:bodyPr wrap="square" lIns="0" tIns="0" rIns="0" bIns="0" rtlCol="0" anchor="t">
+            <a:off x="7799832" y="4974336"/>
+            <a:ext cx="3145536" cy="576072"/>
+          </a:xfrm>
+          <a:prstGeom prst="rect">
+            <a:avLst/>
+          </a:prstGeom>
+          <a:noFill/>
+          <a:ln/>
+        </p:spPr>
+        <p:txBody>
+          <a:bodyPr wrap="square" lIns="254" tIns="254" rIns="254" bIns="254" rtlCol="0" anchor="t">
             <a:normAutofit/>
           </a:bodyPr>
           <a:lstStyle/>
@@ -7709,7 +7820,7 @@
               <a:buNone/>
             </a:pPr>
             <a:r>
-              <a:rPr lang="en-US" sz="1550" dirty="0">
+              <a:rPr lang="en-US" sz="1320" dirty="0">
                 <a:solidFill>
                   <a:srgbClr val="17364A"/>
                 </a:solidFill>
@@ -7717,9 +7828,9 @@
                 <a:ea typeface="Aptos" pitchFamily="34" charset="-122"/>
                 <a:cs typeface="Aptos" pitchFamily="34" charset="-120"/>
               </a:rPr>
-              <a:t>Translate this concept into clear decision rights, review steps, documentation expectations, and escalation paths before an AI-supported workflow is approved.</a:t>
-            </a:r>
-            <a:endParaRPr lang="en-US" sz="1550" dirty="0"/>
+              <a:t>Translate this concept into clear decision rights, review steps, documentation expectations, and escalation paths before.</a:t>
+            </a:r>
+            <a:endParaRPr lang="en-US" sz="1320" dirty="0"/>
           </a:p>
         </p:txBody>
       </p:sp>
@@ -8020,21 +8131,24 @@
           <a:ln/>
         </p:spPr>
         <p:txBody>
-          <a:bodyPr wrap="square" lIns="635" tIns="635" rIns="635" bIns="635" rtlCol="0" anchor="t">
+          <a:bodyPr wrap="square" lIns="1016" tIns="1016" rIns="1016" bIns="1016" rtlCol="0" anchor="t">
             <a:normAutofit/>
           </a:bodyPr>
           <a:lstStyle/>
           <a:p>
+            <a:pPr indent="0" marL="0">
+              <a:buNone/>
+            </a:pPr>
             <a:r>
               <a:rPr lang="en-US" sz="2100" dirty="0">
                 <a:solidFill>
-                  <a:srgbClr val="17364A"/>
-                </a:solidFill>
-                <a:latin typeface="Aptos" pitchFamily="34" charset="0"/>
-                <a:ea typeface="Aptos" pitchFamily="34" charset="-122"/>
-                <a:cs typeface="Aptos" pitchFamily="34" charset="-120"/>
-              </a:rPr>
-              <a:t>Draft AI governance charter; governance operating model; intake and decision-flow diagram; list of.</a:t>
+                  <a:srgbClr val="003A63"/>
+                </a:solidFill>
+                <a:latin typeface="Aptos" pitchFamily="34" charset="0"/>
+                <a:ea typeface="Aptos" pitchFamily="34" charset="-122"/>
+                <a:cs typeface="Aptos" pitchFamily="34" charset="-120"/>
+              </a:rPr>
+              <a:t>• Draft AI governance charter; governance operating model; intake and decision-flow diagram;.</a:t>
             </a:r>
             <a:endParaRPr lang="en-US" sz="2100" dirty="0"/>
           </a:p>
@@ -8114,17 +8228,17 @@
         </p:nvSpPr>
         <p:spPr>
           <a:xfrm>
-            <a:off x="7799832" y="1828800"/>
-            <a:ext cx="3145536" cy="685800"/>
-          </a:xfrm>
-          <a:prstGeom prst="rect">
-            <a:avLst/>
-          </a:prstGeom>
-          <a:noFill/>
-          <a:ln/>
-        </p:spPr>
-        <p:txBody>
-          <a:bodyPr wrap="square" lIns="0" tIns="0" rIns="0" bIns="0" rtlCol="0" anchor="t">
+            <a:off x="7799832" y="1801368"/>
+            <a:ext cx="3145536" cy="758952"/>
+          </a:xfrm>
+          <a:prstGeom prst="rect">
+            <a:avLst/>
+          </a:prstGeom>
+          <a:noFill/>
+          <a:ln/>
+        </p:spPr>
+        <p:txBody>
+          <a:bodyPr wrap="square" lIns="254" tIns="254" rIns="254" bIns="254" rtlCol="0" anchor="t">
             <a:normAutofit/>
           </a:bodyPr>
           <a:lstStyle/>
@@ -8133,7 +8247,7 @@
               <a:buNone/>
             </a:pPr>
             <a:r>
-              <a:rPr lang="en-US" sz="1550" dirty="0">
+              <a:rPr lang="en-US" sz="1320" dirty="0">
                 <a:solidFill>
                   <a:srgbClr val="17364A"/>
                 </a:solidFill>
@@ -8143,7 +8257,7 @@
               </a:rPr>
               <a:t>Draft AI governance charter; governance operating model; intake and decision-flow diagram; list of.</a:t>
             </a:r>
-            <a:endParaRPr lang="en-US" sz="1550" dirty="0"/>
+            <a:endParaRPr lang="en-US" sz="1320" dirty="0"/>
           </a:p>
         </p:txBody>
       </p:sp>
@@ -8231,13 +8345,16 @@
           <a:ln/>
         </p:spPr>
         <p:txBody>
-          <a:bodyPr wrap="square" lIns="254" tIns="254" rIns="254" bIns="254" rtlCol="0" anchor="t">
+          <a:bodyPr wrap="square" lIns="508" tIns="508" rIns="508" bIns="508" rtlCol="0" anchor="t">
             <a:normAutofit/>
           </a:bodyPr>
           <a:lstStyle/>
           <a:p>
-            <a:r>
-              <a:rPr lang="en-US" sz="1380" dirty="0">
+            <a:pPr indent="0" marL="0">
+              <a:buNone/>
+            </a:pPr>
+            <a:r>
+              <a:rPr lang="en-US" sz="1220" dirty="0">
                 <a:solidFill>
                   <a:srgbClr val="17364A"/>
                 </a:solidFill>
@@ -8245,9 +8362,9 @@
                 <a:ea typeface="Aptos" pitchFamily="34" charset="-122"/>
                 <a:cs typeface="Aptos" pitchFamily="34" charset="-120"/>
               </a:rPr>
-              <a:t>Draft AI governance charter; governance operating model; intake and decision-flow diagram;.</a:t>
-            </a:r>
-            <a:endParaRPr lang="en-US" sz="1380" dirty="0"/>
+              <a:t>Draft AI governance charter; governance operating model; intake.</a:t>
+            </a:r>
+            <a:endParaRPr lang="en-US" sz="1220" dirty="0"/>
           </a:p>
         </p:txBody>
       </p:sp>
@@ -8325,17 +8442,17 @@
         </p:nvSpPr>
         <p:spPr>
           <a:xfrm>
-            <a:off x="7799832" y="5001768"/>
-            <a:ext cx="3145536" cy="502920"/>
-          </a:xfrm>
-          <a:prstGeom prst="rect">
-            <a:avLst/>
-          </a:prstGeom>
-          <a:noFill/>
-          <a:ln/>
-        </p:spPr>
-        <p:txBody>
-          <a:bodyPr wrap="square" lIns="0" tIns="0" rIns="0" bIns="0" rtlCol="0" anchor="t">
+            <a:off x="7799832" y="4974336"/>
+            <a:ext cx="3145536" cy="576072"/>
+          </a:xfrm>
+          <a:prstGeom prst="rect">
+            <a:avLst/>
+          </a:prstGeom>
+          <a:noFill/>
+          <a:ln/>
+        </p:spPr>
+        <p:txBody>
+          <a:bodyPr wrap="square" lIns="254" tIns="254" rIns="254" bIns="254" rtlCol="0" anchor="t">
             <a:normAutofit/>
           </a:bodyPr>
           <a:lstStyle/>
@@ -8344,7 +8461,7 @@
               <a:buNone/>
             </a:pPr>
             <a:r>
-              <a:rPr lang="en-US" sz="1550" dirty="0">
+              <a:rPr lang="en-US" sz="1320" dirty="0">
                 <a:solidFill>
                   <a:srgbClr val="17364A"/>
                 </a:solidFill>
@@ -8352,9 +8469,9 @@
                 <a:ea typeface="Aptos" pitchFamily="34" charset="-122"/>
                 <a:cs typeface="Aptos" pitchFamily="34" charset="-120"/>
               </a:rPr>
-              <a:t>Translate this concept into clear decision rights, review steps, documentation expectations, and escalation paths before an AI-supported workflow is approved.</a:t>
-            </a:r>
-            <a:endParaRPr lang="en-US" sz="1550" dirty="0"/>
+              <a:t>Translate this concept into clear decision rights, review steps, documentation expectations, and escalation paths before.</a:t>
+            </a:r>
+            <a:endParaRPr lang="en-US" sz="1320" dirty="0"/>
           </a:p>
         </p:txBody>
       </p:sp>
@@ -8655,21 +8772,24 @@
           <a:ln/>
         </p:spPr>
         <p:txBody>
-          <a:bodyPr wrap="square" lIns="635" tIns="635" rIns="635" bIns="635" rtlCol="0" anchor="t">
+          <a:bodyPr wrap="square" lIns="1016" tIns="1016" rIns="1016" bIns="1016" rtlCol="0" anchor="t">
             <a:normAutofit/>
           </a:bodyPr>
           <a:lstStyle/>
           <a:p>
+            <a:pPr indent="0" marL="0">
+              <a:buNone/>
+            </a:pPr>
             <a:r>
               <a:rPr lang="en-US" sz="2100" dirty="0">
                 <a:solidFill>
-                  <a:srgbClr val="17364A"/>
-                </a:solidFill>
-                <a:latin typeface="Aptos" pitchFamily="34" charset="0"/>
-                <a:ea typeface="Aptos" pitchFamily="34" charset="-122"/>
-                <a:cs typeface="Aptos" pitchFamily="34" charset="-120"/>
-              </a:rPr>
-              <a:t>Draft AI governance charter; governance operating model; intake and decision-flow diagram; list of.</a:t>
+                  <a:srgbClr val="003A63"/>
+                </a:solidFill>
+                <a:latin typeface="Aptos" pitchFamily="34" charset="0"/>
+                <a:ea typeface="Aptos" pitchFamily="34" charset="-122"/>
+                <a:cs typeface="Aptos" pitchFamily="34" charset="-120"/>
+              </a:rPr>
+              <a:t>• Draft AI governance charter; governance operating model; intake and decision-flow diagram;.</a:t>
             </a:r>
             <a:endParaRPr lang="en-US" sz="2100" dirty="0"/>
           </a:p>
@@ -8749,17 +8869,17 @@
         </p:nvSpPr>
         <p:spPr>
           <a:xfrm>
-            <a:off x="7799832" y="1828800"/>
-            <a:ext cx="3145536" cy="685800"/>
-          </a:xfrm>
-          <a:prstGeom prst="rect">
-            <a:avLst/>
-          </a:prstGeom>
-          <a:noFill/>
-          <a:ln/>
-        </p:spPr>
-        <p:txBody>
-          <a:bodyPr wrap="square" lIns="0" tIns="0" rIns="0" bIns="0" rtlCol="0" anchor="t">
+            <a:off x="7799832" y="1801368"/>
+            <a:ext cx="3145536" cy="758952"/>
+          </a:xfrm>
+          <a:prstGeom prst="rect">
+            <a:avLst/>
+          </a:prstGeom>
+          <a:noFill/>
+          <a:ln/>
+        </p:spPr>
+        <p:txBody>
+          <a:bodyPr wrap="square" lIns="254" tIns="254" rIns="254" bIns="254" rtlCol="0" anchor="t">
             <a:normAutofit/>
           </a:bodyPr>
           <a:lstStyle/>
@@ -8768,7 +8888,7 @@
               <a:buNone/>
             </a:pPr>
             <a:r>
-              <a:rPr lang="en-US" sz="1550" dirty="0">
+              <a:rPr lang="en-US" sz="1320" dirty="0">
                 <a:solidFill>
                   <a:srgbClr val="17364A"/>
                 </a:solidFill>
@@ -8778,7 +8898,7 @@
               </a:rPr>
               <a:t>Draft AI governance charter; governance operating model; intake and decision-flow diagram; list of.</a:t>
             </a:r>
-            <a:endParaRPr lang="en-US" sz="1550" dirty="0"/>
+            <a:endParaRPr lang="en-US" sz="1320" dirty="0"/>
           </a:p>
         </p:txBody>
       </p:sp>
@@ -8866,13 +8986,16 @@
           <a:ln/>
         </p:spPr>
         <p:txBody>
-          <a:bodyPr wrap="square" lIns="254" tIns="254" rIns="254" bIns="254" rtlCol="0" anchor="t">
+          <a:bodyPr wrap="square" lIns="508" tIns="508" rIns="508" bIns="508" rtlCol="0" anchor="t">
             <a:normAutofit/>
           </a:bodyPr>
           <a:lstStyle/>
           <a:p>
-            <a:r>
-              <a:rPr lang="en-US" sz="1380" dirty="0">
+            <a:pPr indent="0" marL="0">
+              <a:buNone/>
+            </a:pPr>
+            <a:r>
+              <a:rPr lang="en-US" sz="1220" dirty="0">
                 <a:solidFill>
                   <a:srgbClr val="17364A"/>
                 </a:solidFill>
@@ -8880,9 +9003,9 @@
                 <a:ea typeface="Aptos" pitchFamily="34" charset="-122"/>
                 <a:cs typeface="Aptos" pitchFamily="34" charset="-120"/>
               </a:rPr>
-              <a:t>Draft AI governance charter; governance operating model; intake and decision-flow diagram;.</a:t>
-            </a:r>
-            <a:endParaRPr lang="en-US" sz="1380" dirty="0"/>
+              <a:t>Draft AI governance charter; governance operating model; intake.</a:t>
+            </a:r>
+            <a:endParaRPr lang="en-US" sz="1220" dirty="0"/>
           </a:p>
         </p:txBody>
       </p:sp>
@@ -8960,17 +9083,17 @@
         </p:nvSpPr>
         <p:spPr>
           <a:xfrm>
-            <a:off x="7799832" y="5001768"/>
-            <a:ext cx="3145536" cy="502920"/>
-          </a:xfrm>
-          <a:prstGeom prst="rect">
-            <a:avLst/>
-          </a:prstGeom>
-          <a:noFill/>
-          <a:ln/>
-        </p:spPr>
-        <p:txBody>
-          <a:bodyPr wrap="square" lIns="0" tIns="0" rIns="0" bIns="0" rtlCol="0" anchor="t">
+            <a:off x="7799832" y="4974336"/>
+            <a:ext cx="3145536" cy="576072"/>
+          </a:xfrm>
+          <a:prstGeom prst="rect">
+            <a:avLst/>
+          </a:prstGeom>
+          <a:noFill/>
+          <a:ln/>
+        </p:spPr>
+        <p:txBody>
+          <a:bodyPr wrap="square" lIns="254" tIns="254" rIns="254" bIns="254" rtlCol="0" anchor="t">
             <a:normAutofit/>
           </a:bodyPr>
           <a:lstStyle/>
@@ -8979,7 +9102,7 @@
               <a:buNone/>
             </a:pPr>
             <a:r>
-              <a:rPr lang="en-US" sz="1550" dirty="0">
+              <a:rPr lang="en-US" sz="1320" dirty="0">
                 <a:solidFill>
                   <a:srgbClr val="17364A"/>
                 </a:solidFill>
@@ -8987,9 +9110,9 @@
                 <a:ea typeface="Aptos" pitchFamily="34" charset="-122"/>
                 <a:cs typeface="Aptos" pitchFamily="34" charset="-120"/>
               </a:rPr>
-              <a:t>Use the assignment to test whether you can explain the concept, apply it to a realistic public health situation, and identify what would need review before the work moves forward.</a:t>
-            </a:r>
-            <a:endParaRPr lang="en-US" sz="1550" dirty="0"/>
+              <a:t>Use the assignment to test whether you can explain the concept, apply it to a realistic public health situation, and.</a:t>
+            </a:r>
+            <a:endParaRPr lang="en-US" sz="1320" dirty="0"/>
           </a:p>
         </p:txBody>
       </p:sp>
@@ -9290,49 +9413,58 @@
           <a:ln/>
         </p:spPr>
         <p:txBody>
-          <a:bodyPr wrap="square" lIns="635" tIns="635" rIns="635" bIns="635" rtlCol="0" anchor="t">
+          <a:bodyPr wrap="square" lIns="1016" tIns="1016" rIns="1016" bIns="1016" rtlCol="0" anchor="t">
             <a:normAutofit/>
           </a:bodyPr>
           <a:lstStyle/>
           <a:p>
+            <a:pPr indent="0" marL="0">
+              <a:buNone/>
+            </a:pPr>
             <a:r>
               <a:rPr lang="en-US" sz="2100" dirty="0">
                 <a:solidFill>
-                  <a:srgbClr val="17364A"/>
-                </a:solidFill>
-                <a:latin typeface="Aptos" pitchFamily="34" charset="0"/>
-                <a:ea typeface="Aptos" pitchFamily="34" charset="-122"/>
-                <a:cs typeface="Aptos" pitchFamily="34" charset="-120"/>
-              </a:rPr>
-              <a:t>1. What is the strongest reason this module topic belongs in AI leadership and governance training?</a:t>
+                  <a:srgbClr val="003A63"/>
+                </a:solidFill>
+                <a:latin typeface="Aptos" pitchFamily="34" charset="0"/>
+                <a:ea typeface="Aptos" pitchFamily="34" charset="-122"/>
+                <a:cs typeface="Aptos" pitchFamily="34" charset="-120"/>
+              </a:rPr>
+              <a:t>• 1. What is the strongest reason this module topic belongs in AI leadership and governance.</a:t>
             </a:r>
             <a:endParaRPr lang="en-US" sz="2100" dirty="0"/>
           </a:p>
           <a:p>
+            <a:pPr indent="0" marL="0">
+              <a:buNone/>
+            </a:pPr>
             <a:r>
               <a:rPr lang="en-US" sz="2100" dirty="0">
                 <a:solidFill>
-                  <a:srgbClr val="17364A"/>
-                </a:solidFill>
-                <a:latin typeface="Aptos" pitchFamily="34" charset="0"/>
-                <a:ea typeface="Aptos" pitchFamily="34" charset="-122"/>
-                <a:cs typeface="Aptos" pitchFamily="34" charset="-120"/>
-              </a:rPr>
-              <a:t>2. Which practice best supports accountable public health AI governance?</a:t>
+                  <a:srgbClr val="003A63"/>
+                </a:solidFill>
+                <a:latin typeface="Aptos" pitchFamily="34" charset="0"/>
+                <a:ea typeface="Aptos" pitchFamily="34" charset="-122"/>
+                <a:cs typeface="Aptos" pitchFamily="34" charset="-120"/>
+              </a:rPr>
+              <a:t>• 2. Which practice best supports accountable public health AI governance?</a:t>
             </a:r>
             <a:endParaRPr lang="en-US" sz="2100" dirty="0"/>
           </a:p>
           <a:p>
+            <a:pPr indent="0" marL="0">
+              <a:buNone/>
+            </a:pPr>
             <a:r>
               <a:rPr lang="en-US" sz="2100" dirty="0">
                 <a:solidFill>
-                  <a:srgbClr val="17364A"/>
-                </a:solidFill>
-                <a:latin typeface="Aptos" pitchFamily="34" charset="0"/>
-                <a:ea typeface="Aptos" pitchFamily="34" charset="-122"/>
-                <a:cs typeface="Aptos" pitchFamily="34" charset="-120"/>
-              </a:rPr>
-              <a:t>3. When should an AI use case be escalated for leadership or governance review?</a:t>
+                  <a:srgbClr val="003A63"/>
+                </a:solidFill>
+                <a:latin typeface="Aptos" pitchFamily="34" charset="0"/>
+                <a:ea typeface="Aptos" pitchFamily="34" charset="-122"/>
+                <a:cs typeface="Aptos" pitchFamily="34" charset="-120"/>
+              </a:rPr>
+              <a:t>• 3. When should an AI use case be escalated for leadership or governance review?</a:t>
             </a:r>
             <a:endParaRPr lang="en-US" sz="2100" dirty="0"/>
           </a:p>
@@ -9412,17 +9544,17 @@
         </p:nvSpPr>
         <p:spPr>
           <a:xfrm>
-            <a:off x="7799832" y="1828800"/>
-            <a:ext cx="3145536" cy="685800"/>
-          </a:xfrm>
-          <a:prstGeom prst="rect">
-            <a:avLst/>
-          </a:prstGeom>
-          <a:noFill/>
-          <a:ln/>
-        </p:spPr>
-        <p:txBody>
-          <a:bodyPr wrap="square" lIns="0" tIns="0" rIns="0" bIns="0" rtlCol="0" anchor="t">
+            <a:off x="7799832" y="1801368"/>
+            <a:ext cx="3145536" cy="758952"/>
+          </a:xfrm>
+          <a:prstGeom prst="rect">
+            <a:avLst/>
+          </a:prstGeom>
+          <a:noFill/>
+          <a:ln/>
+        </p:spPr>
+        <p:txBody>
+          <a:bodyPr wrap="square" lIns="254" tIns="254" rIns="254" bIns="254" rtlCol="0" anchor="t">
             <a:normAutofit/>
           </a:bodyPr>
           <a:lstStyle/>
@@ -9431,7 +9563,7 @@
               <a:buNone/>
             </a:pPr>
             <a:r>
-              <a:rPr lang="en-US" sz="1550" dirty="0">
+              <a:rPr lang="en-US" sz="1320" dirty="0">
                 <a:solidFill>
                   <a:srgbClr val="17364A"/>
                 </a:solidFill>
@@ -9441,7 +9573,7 @@
               </a:rPr>
               <a:t>1. What is the strongest reason this module topic belongs in AI leadership and governance training?</a:t>
             </a:r>
-            <a:endParaRPr lang="en-US" sz="1550" dirty="0"/>
+            <a:endParaRPr lang="en-US" sz="1320" dirty="0"/>
           </a:p>
         </p:txBody>
       </p:sp>
@@ -9529,13 +9661,16 @@
           <a:ln/>
         </p:spPr>
         <p:txBody>
-          <a:bodyPr wrap="square" lIns="254" tIns="254" rIns="254" bIns="254" rtlCol="0" anchor="t">
+          <a:bodyPr wrap="square" lIns="508" tIns="508" rIns="508" bIns="508" rtlCol="0" anchor="t">
             <a:normAutofit/>
           </a:bodyPr>
           <a:lstStyle/>
           <a:p>
-            <a:r>
-              <a:rPr lang="en-US" sz="1380" dirty="0">
+            <a:pPr indent="0" marL="0">
+              <a:buNone/>
+            </a:pPr>
+            <a:r>
+              <a:rPr lang="en-US" sz="1220" dirty="0">
                 <a:solidFill>
                   <a:srgbClr val="17364A"/>
                 </a:solidFill>
@@ -9545,11 +9680,14 @@
               </a:rPr>
               <a:t>1.</a:t>
             </a:r>
-            <a:endParaRPr lang="en-US" sz="1380" dirty="0"/>
-          </a:p>
-          <a:p>
-            <a:r>
-              <a:rPr lang="en-US" sz="1380" dirty="0">
+            <a:endParaRPr lang="en-US" sz="1220" dirty="0"/>
+          </a:p>
+          <a:p>
+            <a:pPr indent="0" marL="0">
+              <a:buNone/>
+            </a:pPr>
+            <a:r>
+              <a:rPr lang="en-US" sz="1220" dirty="0">
                 <a:solidFill>
                   <a:srgbClr val="17364A"/>
                 </a:solidFill>
@@ -9557,13 +9695,16 @@
                 <a:ea typeface="Aptos" pitchFamily="34" charset="-122"/>
                 <a:cs typeface="Aptos" pitchFamily="34" charset="-120"/>
               </a:rPr>
-              <a:t>What is the strongest reason this module topic belongs in AI leadership and governance.</a:t>
-            </a:r>
-            <a:endParaRPr lang="en-US" sz="1380" dirty="0"/>
-          </a:p>
-          <a:p>
-            <a:r>
-              <a:rPr lang="en-US" sz="1380" dirty="0">
+              <a:t>What is the strongest reason this module topic belongs in AI.</a:t>
+            </a:r>
+            <a:endParaRPr lang="en-US" sz="1220" dirty="0"/>
+          </a:p>
+          <a:p>
+            <a:pPr indent="0" marL="0">
+              <a:buNone/>
+            </a:pPr>
+            <a:r>
+              <a:rPr lang="en-US" sz="1220" dirty="0">
                 <a:solidFill>
                   <a:srgbClr val="17364A"/>
                 </a:solidFill>
@@ -9573,7 +9714,7 @@
               </a:rPr>
               <a:t>2.</a:t>
             </a:r>
-            <a:endParaRPr lang="en-US" sz="1380" dirty="0"/>
+            <a:endParaRPr lang="en-US" sz="1220" dirty="0"/>
           </a:p>
         </p:txBody>
       </p:sp>
@@ -9651,17 +9792,17 @@
         </p:nvSpPr>
         <p:spPr>
           <a:xfrm>
-            <a:off x="7799832" y="5001768"/>
-            <a:ext cx="3145536" cy="502920"/>
-          </a:xfrm>
-          <a:prstGeom prst="rect">
-            <a:avLst/>
-          </a:prstGeom>
-          <a:noFill/>
-          <a:ln/>
-        </p:spPr>
-        <p:txBody>
-          <a:bodyPr wrap="square" lIns="0" tIns="0" rIns="0" bIns="0" rtlCol="0" anchor="t">
+            <a:off x="7799832" y="4974336"/>
+            <a:ext cx="3145536" cy="576072"/>
+          </a:xfrm>
+          <a:prstGeom prst="rect">
+            <a:avLst/>
+          </a:prstGeom>
+          <a:noFill/>
+          <a:ln/>
+        </p:spPr>
+        <p:txBody>
+          <a:bodyPr wrap="square" lIns="254" tIns="254" rIns="254" bIns="254" rtlCol="0" anchor="t">
             <a:normAutofit/>
           </a:bodyPr>
           <a:lstStyle/>
@@ -9670,7 +9811,7 @@
               <a:buNone/>
             </a:pPr>
             <a:r>
-              <a:rPr lang="en-US" sz="1550" dirty="0">
+              <a:rPr lang="en-US" sz="1320" dirty="0">
                 <a:solidFill>
                   <a:srgbClr val="17364A"/>
                 </a:solidFill>
@@ -9678,9 +9819,9 @@
                 <a:ea typeface="Aptos" pitchFamily="34" charset="-122"/>
                 <a:cs typeface="Aptos" pitchFamily="34" charset="-120"/>
               </a:rPr>
-              <a:t>Use the assignment to test whether you can explain the concept, apply it to a realistic public health situation, and identify what would need review before the work moves forward.</a:t>
-            </a:r>
-            <a:endParaRPr lang="en-US" sz="1550" dirty="0"/>
+              <a:t>Use the assignment to test whether you can explain the concept, apply it to a realistic public health situation, and.</a:t>
+            </a:r>
+            <a:endParaRPr lang="en-US" sz="1320" dirty="0"/>
           </a:p>
         </p:txBody>
       </p:sp>
@@ -9981,49 +10122,58 @@
           <a:ln/>
         </p:spPr>
         <p:txBody>
-          <a:bodyPr wrap="square" lIns="635" tIns="635" rIns="635" bIns="635" rtlCol="0" anchor="t">
+          <a:bodyPr wrap="square" lIns="1016" tIns="1016" rIns="1016" bIns="1016" rtlCol="0" anchor="t">
             <a:normAutofit/>
           </a:bodyPr>
           <a:lstStyle/>
           <a:p>
+            <a:pPr indent="0" marL="0">
+              <a:buNone/>
+            </a:pPr>
             <a:r>
               <a:rPr lang="en-US" sz="2100" dirty="0">
                 <a:solidFill>
-                  <a:srgbClr val="17364A"/>
-                </a:solidFill>
-                <a:latin typeface="Aptos" pitchFamily="34" charset="0"/>
-                <a:ea typeface="Aptos" pitchFamily="34" charset="-122"/>
-                <a:cs typeface="Aptos" pitchFamily="34" charset="-120"/>
-              </a:rPr>
-              <a:t>AI governance needs a formal home before an agency begins approving tools, pilots, vendor products, or workflow.</a:t>
+                  <a:srgbClr val="003A63"/>
+                </a:solidFill>
+                <a:latin typeface="Aptos" pitchFamily="34" charset="0"/>
+                <a:ea typeface="Aptos" pitchFamily="34" charset="-122"/>
+                <a:cs typeface="Aptos" pitchFamily="34" charset="-120"/>
+              </a:rPr>
+              <a:t>• AI governance needs a formal home before an agency begins approving tools, pilots, vendor.</a:t>
             </a:r>
             <a:endParaRPr lang="en-US" sz="2100" dirty="0"/>
           </a:p>
           <a:p>
+            <a:pPr indent="0" marL="0">
+              <a:buNone/>
+            </a:pPr>
             <a:r>
               <a:rPr lang="en-US" sz="2100" dirty="0">
                 <a:solidFill>
-                  <a:srgbClr val="17364A"/>
-                </a:solidFill>
-                <a:latin typeface="Aptos" pitchFamily="34" charset="0"/>
-                <a:ea typeface="Aptos" pitchFamily="34" charset="-122"/>
-                <a:cs typeface="Aptos" pitchFamily="34" charset="-120"/>
-              </a:rPr>
-              <a:t>A governance charter defines the purpose, scope, authority, membership, cadence, decision rules, and.</a:t>
+                  <a:srgbClr val="003A63"/>
+                </a:solidFill>
+                <a:latin typeface="Aptos" pitchFamily="34" charset="0"/>
+                <a:ea typeface="Aptos" pitchFamily="34" charset="-122"/>
+                <a:cs typeface="Aptos" pitchFamily="34" charset="-120"/>
+              </a:rPr>
+              <a:t>• A governance charter defines the purpose, scope, authority, membership, cadence, decision.</a:t>
             </a:r>
             <a:endParaRPr lang="en-US" sz="2100" dirty="0"/>
           </a:p>
           <a:p>
+            <a:pPr indent="0" marL="0">
+              <a:buNone/>
+            </a:pPr>
             <a:r>
               <a:rPr lang="en-US" sz="2100" dirty="0">
                 <a:solidFill>
-                  <a:srgbClr val="17364A"/>
-                </a:solidFill>
-                <a:latin typeface="Aptos" pitchFamily="34" charset="0"/>
-                <a:ea typeface="Aptos" pitchFamily="34" charset="-122"/>
-                <a:cs typeface="Aptos" pitchFamily="34" charset="-120"/>
-              </a:rPr>
-              <a:t>Without a charter, AI decisions often become scattered across IT, program areas, legal, privacy, procurement, and.</a:t>
+                  <a:srgbClr val="003A63"/>
+                </a:solidFill>
+                <a:latin typeface="Aptos" pitchFamily="34" charset="0"/>
+                <a:ea typeface="Aptos" pitchFamily="34" charset="-122"/>
+                <a:cs typeface="Aptos" pitchFamily="34" charset="-120"/>
+              </a:rPr>
+              <a:t>• Without a charter, AI decisions often become scattered across IT, program areas, legal,.</a:t>
             </a:r>
             <a:endParaRPr lang="en-US" sz="2100" dirty="0"/>
           </a:p>
@@ -10103,17 +10253,17 @@
         </p:nvSpPr>
         <p:spPr>
           <a:xfrm>
-            <a:off x="8074152" y="1920240"/>
-            <a:ext cx="2825496" cy="1280160"/>
-          </a:xfrm>
-          <a:prstGeom prst="rect">
-            <a:avLst/>
-          </a:prstGeom>
-          <a:noFill/>
-          <a:ln/>
-        </p:spPr>
-        <p:txBody>
-          <a:bodyPr wrap="square" lIns="0" tIns="0" rIns="0" bIns="0" rtlCol="0" anchor="t">
+            <a:off x="8074152" y="1892808"/>
+            <a:ext cx="2825496" cy="1353312"/>
+          </a:xfrm>
+          <a:prstGeom prst="rect">
+            <a:avLst/>
+          </a:prstGeom>
+          <a:noFill/>
+          <a:ln/>
+        </p:spPr>
+        <p:txBody>
+          <a:bodyPr wrap="square" lIns="254" tIns="254" rIns="254" bIns="254" rtlCol="0" anchor="t">
             <a:normAutofit/>
           </a:bodyPr>
           <a:lstStyle/>
@@ -10122,7 +10272,7 @@
               <a:buNone/>
             </a:pPr>
             <a:r>
-              <a:rPr lang="en-US" sz="1550" dirty="0">
+              <a:rPr lang="en-US" sz="1320" dirty="0">
                 <a:solidFill>
                   <a:srgbClr val="17364A"/>
                 </a:solidFill>
@@ -10130,43 +10280,9 @@
                 <a:ea typeface="Aptos" pitchFamily="34" charset="-122"/>
                 <a:cs typeface="Aptos" pitchFamily="34" charset="-120"/>
               </a:rPr>
-              <a:t>Level: advanced/leadership</a:t>
-            </a:r>
-            <a:endParaRPr lang="en-US" sz="1550" dirty="0"/>
-          </a:p>
-          <a:p>
-            <a:pPr indent="0" marL="0">
-              <a:buNone/>
-            </a:pPr>
-            <a:r>
-              <a:rPr lang="en-US" sz="1550" dirty="0">
-                <a:solidFill>
-                  <a:srgbClr val="17364A"/>
-                </a:solidFill>
-                <a:latin typeface="Aptos" pitchFamily="34" charset="0"/>
-                <a:ea typeface="Aptos" pitchFamily="34" charset="-122"/>
-                <a:cs typeface="Aptos" pitchFamily="34" charset="-120"/>
-              </a:rPr>
-              <a:t>Primary track: Governance and Security Track</a:t>
-            </a:r>
-            <a:endParaRPr lang="en-US" sz="1550" dirty="0"/>
-          </a:p>
-          <a:p>
-            <a:pPr indent="0" marL="0">
-              <a:buNone/>
-            </a:pPr>
-            <a:r>
-              <a:rPr lang="en-US" sz="1550" dirty="0">
-                <a:solidFill>
-                  <a:srgbClr val="17364A"/>
-                </a:solidFill>
-                <a:latin typeface="Aptos" pitchFamily="34" charset="0"/>
-                <a:ea typeface="Aptos" pitchFamily="34" charset="-122"/>
-                <a:cs typeface="Aptos" pitchFamily="34" charset="-120"/>
-              </a:rPr>
-              <a:t>Appears in tracks: governance-security</a:t>
-            </a:r>
-            <a:endParaRPr lang="en-US" sz="1550" dirty="0"/>
+              <a:t>Level: advanced/leadership Primary track: Governance and Security Track Appears in tracks: governance-security</a:t>
+            </a:r>
+            <a:endParaRPr lang="en-US" sz="1320" dirty="0"/>
           </a:p>
         </p:txBody>
       </p:sp>
@@ -10254,13 +10370,16 @@
           <a:ln/>
         </p:spPr>
         <p:txBody>
-          <a:bodyPr wrap="square" lIns="254" tIns="254" rIns="254" bIns="254" rtlCol="0" anchor="t">
+          <a:bodyPr wrap="square" lIns="508" tIns="508" rIns="508" bIns="508" rtlCol="0" anchor="t">
             <a:normAutofit/>
           </a:bodyPr>
           <a:lstStyle/>
           <a:p>
-            <a:r>
-              <a:rPr lang="en-US" sz="1380" dirty="0">
+            <a:pPr indent="0" marL="0">
+              <a:buNone/>
+            </a:pPr>
+            <a:r>
+              <a:rPr lang="en-US" sz="1220" dirty="0">
                 <a:solidFill>
                   <a:srgbClr val="17364A"/>
                 </a:solidFill>
@@ -10270,11 +10389,14 @@
               </a:rPr>
               <a:t>Read the module for shared vocabulary and context.</a:t>
             </a:r>
-            <a:endParaRPr lang="en-US" sz="1380" dirty="0"/>
-          </a:p>
-          <a:p>
-            <a:r>
-              <a:rPr lang="en-US" sz="1380" dirty="0">
+            <a:endParaRPr lang="en-US" sz="1220" dirty="0"/>
+          </a:p>
+          <a:p>
+            <a:pPr indent="0" marL="0">
+              <a:buNone/>
+            </a:pPr>
+            <a:r>
+              <a:rPr lang="en-US" sz="1220" dirty="0">
                 <a:solidFill>
                   <a:srgbClr val="17364A"/>
                 </a:solidFill>
@@ -10284,11 +10406,14 @@
               </a:rPr>
               <a:t>Complete the practical exercise to apply the concept.</a:t>
             </a:r>
-            <a:endParaRPr lang="en-US" sz="1380" dirty="0"/>
-          </a:p>
-          <a:p>
-            <a:r>
-              <a:rPr lang="en-US" sz="1380" dirty="0">
+            <a:endParaRPr lang="en-US" sz="1220" dirty="0"/>
+          </a:p>
+          <a:p>
+            <a:pPr indent="0" marL="0">
+              <a:buNone/>
+            </a:pPr>
+            <a:r>
+              <a:rPr lang="en-US" sz="1220" dirty="0">
                 <a:solidFill>
                   <a:srgbClr val="17364A"/>
                 </a:solidFill>
@@ -10298,7 +10423,7 @@
               </a:rPr>
               <a:t>Use the notes and references for deeper review.</a:t>
             </a:r>
-            <a:endParaRPr lang="en-US" sz="1380" dirty="0"/>
+            <a:endParaRPr lang="en-US" sz="1220" dirty="0"/>
           </a:p>
         </p:txBody>
       </p:sp>
@@ -10599,49 +10724,58 @@
           <a:ln/>
         </p:spPr>
         <p:txBody>
-          <a:bodyPr wrap="square" lIns="635" tIns="635" rIns="635" bIns="635" rtlCol="0" anchor="t">
+          <a:bodyPr wrap="square" lIns="1016" tIns="1016" rIns="1016" bIns="1016" rtlCol="0" anchor="t">
             <a:normAutofit/>
           </a:bodyPr>
           <a:lstStyle/>
           <a:p>
+            <a:pPr indent="0" marL="0">
+              <a:buNone/>
+            </a:pPr>
             <a:r>
               <a:rPr lang="en-US" sz="2100" dirty="0">
                 <a:solidFill>
-                  <a:srgbClr val="17364A"/>
-                </a:solidFill>
-                <a:latin typeface="Aptos" pitchFamily="34" charset="0"/>
-                <a:ea typeface="Aptos" pitchFamily="34" charset="-122"/>
-                <a:cs typeface="Aptos" pitchFamily="34" charset="-120"/>
-              </a:rPr>
-              <a:t>NIST Artificial Intelligence Risk Management Framework (AI RMF 1.0):.</a:t>
+                  <a:srgbClr val="003A63"/>
+                </a:solidFill>
+                <a:latin typeface="Aptos" pitchFamily="34" charset="0"/>
+                <a:ea typeface="Aptos" pitchFamily="34" charset="-122"/>
+                <a:cs typeface="Aptos" pitchFamily="34" charset="-120"/>
+              </a:rPr>
+              <a:t>• NIST Artificial Intelligence Risk Management Framework (AI RMF 1.0):.</a:t>
             </a:r>
             <a:endParaRPr lang="en-US" sz="2100" dirty="0"/>
           </a:p>
           <a:p>
+            <a:pPr indent="0" marL="0">
+              <a:buNone/>
+            </a:pPr>
             <a:r>
               <a:rPr lang="en-US" sz="2100" dirty="0">
                 <a:solidFill>
-                  <a:srgbClr val="17364A"/>
-                </a:solidFill>
-                <a:latin typeface="Aptos" pitchFamily="34" charset="0"/>
-                <a:ea typeface="Aptos" pitchFamily="34" charset="-122"/>
-                <a:cs typeface="Aptos" pitchFamily="34" charset="-120"/>
-              </a:rPr>
-              <a:t>NIST Generative AI Profile:.</a:t>
+                  <a:srgbClr val="003A63"/>
+                </a:solidFill>
+                <a:latin typeface="Aptos" pitchFamily="34" charset="0"/>
+                <a:ea typeface="Aptos" pitchFamily="34" charset="-122"/>
+                <a:cs typeface="Aptos" pitchFamily="34" charset="-120"/>
+              </a:rPr>
+              <a:t>• NIST Generative AI Profile:.</a:t>
             </a:r>
             <a:endParaRPr lang="en-US" sz="2100" dirty="0"/>
           </a:p>
           <a:p>
+            <a:pPr indent="0" marL="0">
+              <a:buNone/>
+            </a:pPr>
             <a:r>
               <a:rPr lang="en-US" sz="2100" dirty="0">
                 <a:solidFill>
-                  <a:srgbClr val="17364A"/>
-                </a:solidFill>
-                <a:latin typeface="Aptos" pitchFamily="34" charset="0"/>
-                <a:ea typeface="Aptos" pitchFamily="34" charset="-122"/>
-                <a:cs typeface="Aptos" pitchFamily="34" charset="-120"/>
-              </a:rPr>
-              <a:t>NIST Privacy Framework</a:t>
+                  <a:srgbClr val="003A63"/>
+                </a:solidFill>
+                <a:latin typeface="Aptos" pitchFamily="34" charset="0"/>
+                <a:ea typeface="Aptos" pitchFamily="34" charset="-122"/>
+                <a:cs typeface="Aptos" pitchFamily="34" charset="-120"/>
+              </a:rPr>
+              <a:t>• NIST Privacy Framework</a:t>
             </a:r>
             <a:endParaRPr lang="en-US" sz="2100" dirty="0"/>
           </a:p>
@@ -10721,17 +10855,17 @@
         </p:nvSpPr>
         <p:spPr>
           <a:xfrm>
-            <a:off x="7799832" y="1828800"/>
-            <a:ext cx="3145536" cy="685800"/>
-          </a:xfrm>
-          <a:prstGeom prst="rect">
-            <a:avLst/>
-          </a:prstGeom>
-          <a:noFill/>
-          <a:ln/>
-        </p:spPr>
-        <p:txBody>
-          <a:bodyPr wrap="square" lIns="0" tIns="0" rIns="0" bIns="0" rtlCol="0" anchor="t">
+            <a:off x="7799832" y="1801368"/>
+            <a:ext cx="3145536" cy="758952"/>
+          </a:xfrm>
+          <a:prstGeom prst="rect">
+            <a:avLst/>
+          </a:prstGeom>
+          <a:noFill/>
+          <a:ln/>
+        </p:spPr>
+        <p:txBody>
+          <a:bodyPr wrap="square" lIns="254" tIns="254" rIns="254" bIns="254" rtlCol="0" anchor="t">
             <a:normAutofit/>
           </a:bodyPr>
           <a:lstStyle/>
@@ -10740,7 +10874,7 @@
               <a:buNone/>
             </a:pPr>
             <a:r>
-              <a:rPr lang="en-US" sz="1550" dirty="0">
+              <a:rPr lang="en-US" sz="1320" dirty="0">
                 <a:solidFill>
                   <a:srgbClr val="17364A"/>
                 </a:solidFill>
@@ -10750,7 +10884,7 @@
               </a:rPr>
               <a:t>NIST Artificial Intelligence Risk Management Framework (AI RMF 1.0):.</a:t>
             </a:r>
-            <a:endParaRPr lang="en-US" sz="1550" dirty="0"/>
+            <a:endParaRPr lang="en-US" sz="1320" dirty="0"/>
           </a:p>
         </p:txBody>
       </p:sp>
@@ -10838,13 +10972,16 @@
           <a:ln/>
         </p:spPr>
         <p:txBody>
-          <a:bodyPr wrap="square" lIns="254" tIns="254" rIns="254" bIns="254" rtlCol="0" anchor="t">
+          <a:bodyPr wrap="square" lIns="508" tIns="508" rIns="508" bIns="508" rtlCol="0" anchor="t">
             <a:normAutofit/>
           </a:bodyPr>
           <a:lstStyle/>
           <a:p>
-            <a:r>
-              <a:rPr lang="en-US" sz="1380" dirty="0">
+            <a:pPr indent="0" marL="0">
+              <a:buNone/>
+            </a:pPr>
+            <a:r>
+              <a:rPr lang="en-US" sz="1220" dirty="0">
                 <a:solidFill>
                   <a:srgbClr val="17364A"/>
                 </a:solidFill>
@@ -10852,13 +10989,16 @@
                 <a:ea typeface="Aptos" pitchFamily="34" charset="-122"/>
                 <a:cs typeface="Aptos" pitchFamily="34" charset="-120"/>
               </a:rPr>
-              <a:t>NIST Artificial Intelligence Risk Management Framework (AI RMF 1.0):.</a:t>
-            </a:r>
-            <a:endParaRPr lang="en-US" sz="1380" dirty="0"/>
-          </a:p>
-          <a:p>
-            <a:r>
-              <a:rPr lang="en-US" sz="1380" dirty="0">
+              <a:t>NIST Artificial Intelligence Risk Management Framework (AI RMF.</a:t>
+            </a:r>
+            <a:endParaRPr lang="en-US" sz="1220" dirty="0"/>
+          </a:p>
+          <a:p>
+            <a:pPr indent="0" marL="0">
+              <a:buNone/>
+            </a:pPr>
+            <a:r>
+              <a:rPr lang="en-US" sz="1220" dirty="0">
                 <a:solidFill>
                   <a:srgbClr val="17364A"/>
                 </a:solidFill>
@@ -10868,11 +11008,14 @@
               </a:rPr>
               <a:t>CDC Public Health Data Strategy and Data Modernization resources:.</a:t>
             </a:r>
-            <a:endParaRPr lang="en-US" sz="1380" dirty="0"/>
-          </a:p>
-          <a:p>
-            <a:r>
-              <a:rPr lang="en-US" sz="1380" dirty="0">
+            <a:endParaRPr lang="en-US" sz="1220" dirty="0"/>
+          </a:p>
+          <a:p>
+            <a:pPr indent="0" marL="0">
+              <a:buNone/>
+            </a:pPr>
+            <a:r>
+              <a:rPr lang="en-US" sz="1220" dirty="0">
                 <a:solidFill>
                   <a:srgbClr val="17364A"/>
                 </a:solidFill>
@@ -10882,7 +11025,7 @@
               </a:rPr>
               <a:t>WHO Ethics and Governance of Artificial Intelligence for Health:.</a:t>
             </a:r>
-            <a:endParaRPr lang="en-US" sz="1380" dirty="0"/>
+            <a:endParaRPr lang="en-US" sz="1220" dirty="0"/>
           </a:p>
         </p:txBody>
       </p:sp>
@@ -10960,17 +11103,17 @@
         </p:nvSpPr>
         <p:spPr>
           <a:xfrm>
-            <a:off x="7799832" y="5001768"/>
-            <a:ext cx="3145536" cy="502920"/>
-          </a:xfrm>
-          <a:prstGeom prst="rect">
-            <a:avLst/>
-          </a:prstGeom>
-          <a:noFill/>
-          <a:ln/>
-        </p:spPr>
-        <p:txBody>
-          <a:bodyPr wrap="square" lIns="0" tIns="0" rIns="0" bIns="0" rtlCol="0" anchor="t">
+            <a:off x="7799832" y="4974336"/>
+            <a:ext cx="3145536" cy="576072"/>
+          </a:xfrm>
+          <a:prstGeom prst="rect">
+            <a:avLst/>
+          </a:prstGeom>
+          <a:noFill/>
+          <a:ln/>
+        </p:spPr>
+        <p:txBody>
+          <a:bodyPr wrap="square" lIns="254" tIns="254" rIns="254" bIns="254" rtlCol="0" anchor="t">
             <a:normAutofit/>
           </a:bodyPr>
           <a:lstStyle/>
@@ -10979,7 +11122,7 @@
               <a:buNone/>
             </a:pPr>
             <a:r>
-              <a:rPr lang="en-US" sz="1550" dirty="0">
+              <a:rPr lang="en-US" sz="1320" dirty="0">
                 <a:solidFill>
                   <a:srgbClr val="17364A"/>
                 </a:solidFill>
@@ -10987,9 +11130,9 @@
                 <a:ea typeface="Aptos" pitchFamily="34" charset="-122"/>
                 <a:cs typeface="Aptos" pitchFamily="34" charset="-120"/>
               </a:rPr>
-              <a:t>Translate this concept into clear decision rights, review steps, documentation expectations, and escalation paths before an AI-supported workflow is approved.</a:t>
-            </a:r>
-            <a:endParaRPr lang="en-US" sz="1550" dirty="0"/>
+              <a:t>Translate this concept into clear decision rights, review steps, documentation expectations, and escalation paths before.</a:t>
+            </a:r>
+            <a:endParaRPr lang="en-US" sz="1320" dirty="0"/>
           </a:p>
         </p:txBody>
       </p:sp>
@@ -11290,35 +11433,41 @@
           <a:ln/>
         </p:spPr>
         <p:txBody>
-          <a:bodyPr wrap="square" lIns="635" tIns="635" rIns="635" bIns="635" rtlCol="0" anchor="t">
+          <a:bodyPr wrap="square" lIns="1016" tIns="1016" rIns="1016" bIns="1016" rtlCol="0" anchor="t">
             <a:normAutofit/>
           </a:bodyPr>
           <a:lstStyle/>
           <a:p>
+            <a:pPr indent="0" marL="0">
+              <a:buNone/>
+            </a:pPr>
             <a:r>
               <a:rPr lang="en-US" sz="2100" dirty="0">
                 <a:solidFill>
-                  <a:srgbClr val="17364A"/>
-                </a:solidFill>
-                <a:latin typeface="Aptos" pitchFamily="34" charset="0"/>
-                <a:ea typeface="Aptos" pitchFamily="34" charset="-122"/>
-                <a:cs typeface="Aptos" pitchFamily="34" charset="-120"/>
-              </a:rPr>
-              <a:t>OMB Memorandum M-24-10 on federal AI governance, risk management, and innovation, where relevant to.</a:t>
+                  <a:srgbClr val="003A63"/>
+                </a:solidFill>
+                <a:latin typeface="Aptos" pitchFamily="34" charset="0"/>
+                <a:ea typeface="Aptos" pitchFamily="34" charset="-122"/>
+                <a:cs typeface="Aptos" pitchFamily="34" charset="-120"/>
+              </a:rPr>
+              <a:t>• OMB Memorandum M-24-10 on federal AI governance, risk management, and innovation, where.</a:t>
             </a:r>
             <a:endParaRPr lang="en-US" sz="2100" dirty="0"/>
           </a:p>
           <a:p>
+            <a:pPr indent="0" marL="0">
+              <a:buNone/>
+            </a:pPr>
             <a:r>
               <a:rPr lang="en-US" sz="2100" dirty="0">
                 <a:solidFill>
-                  <a:srgbClr val="17364A"/>
-                </a:solidFill>
-                <a:latin typeface="Aptos" pitchFamily="34" charset="0"/>
-                <a:ea typeface="Aptos" pitchFamily="34" charset="-122"/>
-                <a:cs typeface="Aptos" pitchFamily="34" charset="-120"/>
-              </a:rPr>
-              <a:t>Agency strategic plans, procurement policies, privacy policies, cybersecurity policies, records.</a:t>
+                  <a:srgbClr val="003A63"/>
+                </a:solidFill>
+                <a:latin typeface="Aptos" pitchFamily="34" charset="0"/>
+                <a:ea typeface="Aptos" pitchFamily="34" charset="-122"/>
+                <a:cs typeface="Aptos" pitchFamily="34" charset="-120"/>
+              </a:rPr>
+              <a:t>• Agency strategic plans, procurement policies, privacy policies, cybersecurity policies, records.</a:t>
             </a:r>
             <a:endParaRPr lang="en-US" sz="2100" dirty="0"/>
           </a:p>
@@ -11398,17 +11547,17 @@
         </p:nvSpPr>
         <p:spPr>
           <a:xfrm>
-            <a:off x="7799832" y="1828800"/>
-            <a:ext cx="3145536" cy="685800"/>
-          </a:xfrm>
-          <a:prstGeom prst="rect">
-            <a:avLst/>
-          </a:prstGeom>
-          <a:noFill/>
-          <a:ln/>
-        </p:spPr>
-        <p:txBody>
-          <a:bodyPr wrap="square" lIns="0" tIns="0" rIns="0" bIns="0" rtlCol="0" anchor="t">
+            <a:off x="7799832" y="1801368"/>
+            <a:ext cx="3145536" cy="758952"/>
+          </a:xfrm>
+          <a:prstGeom prst="rect">
+            <a:avLst/>
+          </a:prstGeom>
+          <a:noFill/>
+          <a:ln/>
+        </p:spPr>
+        <p:txBody>
+          <a:bodyPr wrap="square" lIns="254" tIns="254" rIns="254" bIns="254" rtlCol="0" anchor="t">
             <a:normAutofit/>
           </a:bodyPr>
           <a:lstStyle/>
@@ -11417,7 +11566,7 @@
               <a:buNone/>
             </a:pPr>
             <a:r>
-              <a:rPr lang="en-US" sz="1550" dirty="0">
+              <a:rPr lang="en-US" sz="1320" dirty="0">
                 <a:solidFill>
                   <a:srgbClr val="17364A"/>
                 </a:solidFill>
@@ -11427,7 +11576,7 @@
               </a:rPr>
               <a:t>OMB Memorandum M-24-10 on federal AI governance, risk management, and innovation, where relevant to.</a:t>
             </a:r>
-            <a:endParaRPr lang="en-US" sz="1550" dirty="0"/>
+            <a:endParaRPr lang="en-US" sz="1320" dirty="0"/>
           </a:p>
         </p:txBody>
       </p:sp>
@@ -11515,13 +11664,16 @@
           <a:ln/>
         </p:spPr>
         <p:txBody>
-          <a:bodyPr wrap="square" lIns="254" tIns="254" rIns="254" bIns="254" rtlCol="0" anchor="t">
+          <a:bodyPr wrap="square" lIns="508" tIns="508" rIns="508" bIns="508" rtlCol="0" anchor="t">
             <a:normAutofit/>
           </a:bodyPr>
           <a:lstStyle/>
           <a:p>
-            <a:r>
-              <a:rPr lang="en-US" sz="1380" dirty="0">
+            <a:pPr indent="0" marL="0">
+              <a:buNone/>
+            </a:pPr>
+            <a:r>
+              <a:rPr lang="en-US" sz="1220" dirty="0">
                 <a:solidFill>
                   <a:srgbClr val="17364A"/>
                 </a:solidFill>
@@ -11529,13 +11681,16 @@
                 <a:ea typeface="Aptos" pitchFamily="34" charset="-122"/>
                 <a:cs typeface="Aptos" pitchFamily="34" charset="-120"/>
               </a:rPr>
-              <a:t>OMB Memorandum M-24-10 on federal AI governance, risk management, and innovation, where.</a:t>
-            </a:r>
-            <a:endParaRPr lang="en-US" sz="1380" dirty="0"/>
-          </a:p>
-          <a:p>
-            <a:r>
-              <a:rPr lang="en-US" sz="1380" dirty="0">
+              <a:t>OMB Memorandum M-24-10 on federal AI governance, risk management,.</a:t>
+            </a:r>
+            <a:endParaRPr lang="en-US" sz="1220" dirty="0"/>
+          </a:p>
+          <a:p>
+            <a:pPr indent="0" marL="0">
+              <a:buNone/>
+            </a:pPr>
+            <a:r>
+              <a:rPr lang="en-US" sz="1220" dirty="0">
                 <a:solidFill>
                   <a:srgbClr val="17364A"/>
                 </a:solidFill>
@@ -11543,9 +11698,9 @@
                 <a:ea typeface="Aptos" pitchFamily="34" charset="-122"/>
                 <a:cs typeface="Aptos" pitchFamily="34" charset="-120"/>
               </a:rPr>
-              <a:t>Agency strategic plans, procurement policies, privacy policies, cybersecurity policies,.</a:t>
-            </a:r>
-            <a:endParaRPr lang="en-US" sz="1380" dirty="0"/>
+              <a:t>Agency strategic plans, procurement policies, privacy policies,.</a:t>
+            </a:r>
+            <a:endParaRPr lang="en-US" sz="1220" dirty="0"/>
           </a:p>
         </p:txBody>
       </p:sp>
@@ -11623,17 +11778,17 @@
         </p:nvSpPr>
         <p:spPr>
           <a:xfrm>
-            <a:off x="7799832" y="5001768"/>
-            <a:ext cx="3145536" cy="502920"/>
-          </a:xfrm>
-          <a:prstGeom prst="rect">
-            <a:avLst/>
-          </a:prstGeom>
-          <a:noFill/>
-          <a:ln/>
-        </p:spPr>
-        <p:txBody>
-          <a:bodyPr wrap="square" lIns="0" tIns="0" rIns="0" bIns="0" rtlCol="0" anchor="t">
+            <a:off x="7799832" y="4974336"/>
+            <a:ext cx="3145536" cy="576072"/>
+          </a:xfrm>
+          <a:prstGeom prst="rect">
+            <a:avLst/>
+          </a:prstGeom>
+          <a:noFill/>
+          <a:ln/>
+        </p:spPr>
+        <p:txBody>
+          <a:bodyPr wrap="square" lIns="254" tIns="254" rIns="254" bIns="254" rtlCol="0" anchor="t">
             <a:normAutofit/>
           </a:bodyPr>
           <a:lstStyle/>
@@ -11642,7 +11797,7 @@
               <a:buNone/>
             </a:pPr>
             <a:r>
-              <a:rPr lang="en-US" sz="1550" dirty="0">
+              <a:rPr lang="en-US" sz="1320" dirty="0">
                 <a:solidFill>
                   <a:srgbClr val="17364A"/>
                 </a:solidFill>
@@ -11650,9 +11805,9 @@
                 <a:ea typeface="Aptos" pitchFamily="34" charset="-122"/>
                 <a:cs typeface="Aptos" pitchFamily="34" charset="-120"/>
               </a:rPr>
-              <a:t>Translate this concept into clear decision rights, review steps, documentation expectations, and escalation paths before an AI-supported workflow is approved.</a:t>
-            </a:r>
-            <a:endParaRPr lang="en-US" sz="1550" dirty="0"/>
+              <a:t>Translate this concept into clear decision rights, review steps, documentation expectations, and escalation paths before.</a:t>
+            </a:r>
+            <a:endParaRPr lang="en-US" sz="1320" dirty="0"/>
           </a:p>
         </p:txBody>
       </p:sp>
@@ -11953,63 +12108,75 @@
           <a:ln/>
         </p:spPr>
         <p:txBody>
-          <a:bodyPr wrap="square" lIns="635" tIns="635" rIns="635" bIns="635" rtlCol="0" anchor="t">
+          <a:bodyPr wrap="square" lIns="1016" tIns="1016" rIns="1016" bIns="1016" rtlCol="0" anchor="t">
             <a:normAutofit/>
           </a:bodyPr>
           <a:lstStyle/>
           <a:p>
+            <a:pPr indent="0" marL="0">
+              <a:buNone/>
+            </a:pPr>
             <a:r>
               <a:rPr lang="en-US" sz="1900" dirty="0">
                 <a:solidFill>
-                  <a:srgbClr val="17364A"/>
-                </a:solidFill>
-                <a:latin typeface="Aptos" pitchFamily="34" charset="0"/>
-                <a:ea typeface="Aptos" pitchFamily="34" charset="-122"/>
-                <a:cs typeface="Aptos" pitchFamily="34" charset="-120"/>
-              </a:rPr>
-              <a:t>Play 11: Build and Deploy AI Solutions - This lesson informs Play 11 by helping learners connect the lesson.</a:t>
+                  <a:srgbClr val="003A63"/>
+                </a:solidFill>
+                <a:latin typeface="Aptos" pitchFamily="34" charset="0"/>
+                <a:ea typeface="Aptos" pitchFamily="34" charset="-122"/>
+                <a:cs typeface="Aptos" pitchFamily="34" charset="-120"/>
+              </a:rPr>
+              <a:t>• Play 11: Build and Deploy AI Solutions - This lesson informs Play 11 by helping learners.</a:t>
             </a:r>
             <a:endParaRPr lang="en-US" sz="1900" dirty="0"/>
           </a:p>
           <a:p>
+            <a:pPr indent="0" marL="0">
+              <a:buNone/>
+            </a:pPr>
             <a:r>
               <a:rPr lang="en-US" sz="1900" dirty="0">
                 <a:solidFill>
-                  <a:srgbClr val="17364A"/>
-                </a:solidFill>
-                <a:latin typeface="Aptos" pitchFamily="34" charset="0"/>
-                <a:ea typeface="Aptos" pitchFamily="34" charset="-122"/>
-                <a:cs typeface="Aptos" pitchFamily="34" charset="-120"/>
-              </a:rPr>
-              <a:t>Play 2: Readiness Assessment - This lesson informs Play 2 by helping learners connect the lesson topic to.</a:t>
+                  <a:srgbClr val="003A63"/>
+                </a:solidFill>
+                <a:latin typeface="Aptos" pitchFamily="34" charset="0"/>
+                <a:ea typeface="Aptos" pitchFamily="34" charset="-122"/>
+                <a:cs typeface="Aptos" pitchFamily="34" charset="-120"/>
+              </a:rPr>
+              <a:t>• Play 2: Readiness Assessment - This lesson informs Play 2 by helping learners connect the.</a:t>
             </a:r>
             <a:endParaRPr lang="en-US" sz="1900" dirty="0"/>
           </a:p>
           <a:p>
+            <a:pPr indent="0" marL="0">
+              <a:buNone/>
+            </a:pPr>
             <a:r>
               <a:rPr lang="en-US" sz="1900" dirty="0">
                 <a:solidFill>
-                  <a:srgbClr val="17364A"/>
-                </a:solidFill>
-                <a:latin typeface="Aptos" pitchFamily="34" charset="0"/>
-                <a:ea typeface="Aptos" pitchFamily="34" charset="-122"/>
-                <a:cs typeface="Aptos" pitchFamily="34" charset="-120"/>
-              </a:rPr>
-              <a:t>Play 3: Establish AI Governance - This lesson informs Play 3 by helping learners connect the lesson topic to.</a:t>
+                  <a:srgbClr val="003A63"/>
+                </a:solidFill>
+                <a:latin typeface="Aptos" pitchFamily="34" charset="0"/>
+                <a:ea typeface="Aptos" pitchFamily="34" charset="-122"/>
+                <a:cs typeface="Aptos" pitchFamily="34" charset="-120"/>
+              </a:rPr>
+              <a:t>• Play 3: Establish AI Governance - This lesson informs Play 3 by helping learners connect the.</a:t>
             </a:r>
             <a:endParaRPr lang="en-US" sz="1900" dirty="0"/>
           </a:p>
           <a:p>
+            <a:pPr indent="0" marL="0">
+              <a:buNone/>
+            </a:pPr>
             <a:r>
               <a:rPr lang="en-US" sz="1900" dirty="0">
                 <a:solidFill>
-                  <a:srgbClr val="17364A"/>
-                </a:solidFill>
-                <a:latin typeface="Aptos" pitchFamily="34" charset="0"/>
-                <a:ea typeface="Aptos" pitchFamily="34" charset="-122"/>
-                <a:cs typeface="Aptos" pitchFamily="34" charset="-120"/>
-              </a:rPr>
-              <a:t>Play 7: Prioritize Use Cases - This lesson informs Play 7 by helping learners connect the lesson topic to.</a:t>
+                  <a:srgbClr val="003A63"/>
+                </a:solidFill>
+                <a:latin typeface="Aptos" pitchFamily="34" charset="0"/>
+                <a:ea typeface="Aptos" pitchFamily="34" charset="-122"/>
+                <a:cs typeface="Aptos" pitchFamily="34" charset="-120"/>
+              </a:rPr>
+              <a:t>• Play 7: Prioritize Use Cases - This lesson informs Play 7 by helping learners connect the.</a:t>
             </a:r>
             <a:endParaRPr lang="en-US" sz="1900" dirty="0"/>
           </a:p>
@@ -12089,17 +12256,17 @@
         </p:nvSpPr>
         <p:spPr>
           <a:xfrm>
-            <a:off x="8211312" y="1920240"/>
-            <a:ext cx="2734056" cy="1463040"/>
-          </a:xfrm>
-          <a:prstGeom prst="rect">
-            <a:avLst/>
-          </a:prstGeom>
-          <a:noFill/>
-          <a:ln/>
-        </p:spPr>
-        <p:txBody>
-          <a:bodyPr wrap="square" lIns="0" tIns="0" rIns="0" bIns="0" rtlCol="0" anchor="t">
+            <a:off x="8211312" y="1892808"/>
+            <a:ext cx="2734056" cy="1536192"/>
+          </a:xfrm>
+          <a:prstGeom prst="rect">
+            <a:avLst/>
+          </a:prstGeom>
+          <a:noFill/>
+          <a:ln/>
+        </p:spPr>
+        <p:txBody>
+          <a:bodyPr wrap="square" lIns="254" tIns="254" rIns="254" bIns="254" rtlCol="0" anchor="t">
             <a:normAutofit/>
           </a:bodyPr>
           <a:lstStyle/>
@@ -12108,7 +12275,7 @@
               <a:buNone/>
             </a:pPr>
             <a:r>
-              <a:rPr lang="en-US" sz="1550" dirty="0">
+              <a:rPr lang="en-US" sz="1320" dirty="0">
                 <a:solidFill>
                   <a:srgbClr val="17364A"/>
                 </a:solidFill>
@@ -12116,9 +12283,9 @@
                 <a:ea typeface="Aptos" pitchFamily="34" charset="-122"/>
                 <a:cs typeface="Aptos" pitchFamily="34" charset="-120"/>
               </a:rPr>
-              <a:t>Use the related plays to identify decisions, participants, timing, approvals, and documentation needed for responsible implementation.</a:t>
-            </a:r>
-            <a:endParaRPr lang="en-US" sz="1550" dirty="0"/>
+              <a:t>Use the related plays to identify decisions, participants, timing, approvals, and documentation needed for responsible.</a:t>
+            </a:r>
+            <a:endParaRPr lang="en-US" sz="1320" dirty="0"/>
           </a:p>
         </p:txBody>
       </p:sp>
@@ -12206,13 +12373,16 @@
           <a:ln/>
         </p:spPr>
         <p:txBody>
-          <a:bodyPr wrap="square" lIns="254" tIns="254" rIns="254" bIns="254" rtlCol="0" anchor="t">
+          <a:bodyPr wrap="square" lIns="508" tIns="508" rIns="508" bIns="508" rtlCol="0" anchor="t">
             <a:normAutofit/>
           </a:bodyPr>
           <a:lstStyle/>
           <a:p>
-            <a:r>
-              <a:rPr lang="en-US" sz="1380" dirty="0">
+            <a:pPr indent="0" marL="0">
+              <a:buNone/>
+            </a:pPr>
+            <a:r>
+              <a:rPr lang="en-US" sz="1220" dirty="0">
                 <a:solidFill>
                   <a:srgbClr val="17364A"/>
                 </a:solidFill>
@@ -12222,11 +12392,14 @@
               </a:rPr>
               <a:t>Locate the decision point in the playbook sequence.</a:t>
             </a:r>
-            <a:endParaRPr lang="en-US" sz="1380" dirty="0"/>
-          </a:p>
-          <a:p>
-            <a:r>
-              <a:rPr lang="en-US" sz="1380" dirty="0">
+            <a:endParaRPr lang="en-US" sz="1220" dirty="0"/>
+          </a:p>
+          <a:p>
+            <a:pPr indent="0" marL="0">
+              <a:buNone/>
+            </a:pPr>
+            <a:r>
+              <a:rPr lang="en-US" sz="1220" dirty="0">
                 <a:solidFill>
                   <a:srgbClr val="17364A"/>
                 </a:solidFill>
@@ -12236,11 +12409,14 @@
               </a:rPr>
               <a:t>Identify who should participate in the work.</a:t>
             </a:r>
-            <a:endParaRPr lang="en-US" sz="1380" dirty="0"/>
-          </a:p>
-          <a:p>
-            <a:r>
-              <a:rPr lang="en-US" sz="1380" dirty="0">
+            <a:endParaRPr lang="en-US" sz="1220" dirty="0"/>
+          </a:p>
+          <a:p>
+            <a:pPr indent="0" marL="0">
+              <a:buNone/>
+            </a:pPr>
+            <a:r>
+              <a:rPr lang="en-US" sz="1220" dirty="0">
                 <a:solidFill>
                   <a:srgbClr val="17364A"/>
                 </a:solidFill>
@@ -12250,7 +12426,7 @@
               </a:rPr>
               <a:t>Document the review, approval, or implementation step.</a:t>
             </a:r>
-            <a:endParaRPr lang="en-US" sz="1380" dirty="0"/>
+            <a:endParaRPr lang="en-US" sz="1220" dirty="0"/>
           </a:p>
         </p:txBody>
       </p:sp>
@@ -12551,63 +12727,75 @@
           <a:ln/>
         </p:spPr>
         <p:txBody>
-          <a:bodyPr wrap="square" lIns="635" tIns="635" rIns="635" bIns="635" rtlCol="0" anchor="t">
+          <a:bodyPr wrap="square" lIns="1016" tIns="1016" rIns="1016" bIns="1016" rtlCol="0" anchor="t">
             <a:normAutofit/>
           </a:bodyPr>
           <a:lstStyle/>
           <a:p>
+            <a:pPr indent="0" marL="0">
+              <a:buNone/>
+            </a:pPr>
             <a:r>
               <a:rPr lang="en-US" sz="1850" dirty="0">
                 <a:solidFill>
-                  <a:srgbClr val="17364A"/>
-                </a:solidFill>
-                <a:latin typeface="Aptos" pitchFamily="34" charset="0"/>
-                <a:ea typeface="Aptos" pitchFamily="34" charset="-122"/>
-                <a:cs typeface="Aptos" pitchFamily="34" charset="-120"/>
-              </a:rPr>
-              <a:t>Tool 4: AI Policy Landscape Scan (Worksheet) - Use AI Policy Landscape Scan to translate this lesson into a.</a:t>
+                  <a:srgbClr val="003A63"/>
+                </a:solidFill>
+                <a:latin typeface="Aptos" pitchFamily="34" charset="0"/>
+                <a:ea typeface="Aptos" pitchFamily="34" charset="-122"/>
+                <a:cs typeface="Aptos" pitchFamily="34" charset="-120"/>
+              </a:rPr>
+              <a:t>• Tool 4: AI Policy Landscape Scan (Worksheet) - Use AI Policy Landscape Scan to translate this.</a:t>
             </a:r>
             <a:endParaRPr lang="en-US" sz="1850" dirty="0"/>
           </a:p>
           <a:p>
+            <a:pPr indent="0" marL="0">
+              <a:buNone/>
+            </a:pPr>
             <a:r>
               <a:rPr lang="en-US" sz="1850" dirty="0">
                 <a:solidFill>
-                  <a:srgbClr val="17364A"/>
-                </a:solidFill>
-                <a:latin typeface="Aptos" pitchFamily="34" charset="0"/>
-                <a:ea typeface="Aptos" pitchFamily="34" charset="-122"/>
-                <a:cs typeface="Aptos" pitchFamily="34" charset="-120"/>
-              </a:rPr>
-              <a:t>Tool 5: AI Environmental and Resource Impact Review (Checklist) - Use AI Environmental and Resource Impact.</a:t>
+                  <a:srgbClr val="003A63"/>
+                </a:solidFill>
+                <a:latin typeface="Aptos" pitchFamily="34" charset="0"/>
+                <a:ea typeface="Aptos" pitchFamily="34" charset="-122"/>
+                <a:cs typeface="Aptos" pitchFamily="34" charset="-120"/>
+              </a:rPr>
+              <a:t>• Tool 5: AI Environmental and Resource Impact Review (Checklist) - Use AI Environmental and.</a:t>
             </a:r>
             <a:endParaRPr lang="en-US" sz="1850" dirty="0"/>
           </a:p>
           <a:p>
+            <a:pPr indent="0" marL="0">
+              <a:buNone/>
+            </a:pPr>
             <a:r>
               <a:rPr lang="en-US" sz="1850" dirty="0">
                 <a:solidFill>
-                  <a:srgbClr val="17364A"/>
-                </a:solidFill>
-                <a:latin typeface="Aptos" pitchFamily="34" charset="0"/>
-                <a:ea typeface="Aptos" pitchFamily="34" charset="-122"/>
-                <a:cs typeface="Aptos" pitchFamily="34" charset="-120"/>
-              </a:rPr>
-              <a:t>Tool 6: Human-Centered AI Decision Rule Checklist (Checklist) - Use Human-Centered AI Decision Rule.</a:t>
+                  <a:srgbClr val="003A63"/>
+                </a:solidFill>
+                <a:latin typeface="Aptos" pitchFamily="34" charset="0"/>
+                <a:ea typeface="Aptos" pitchFamily="34" charset="-122"/>
+                <a:cs typeface="Aptos" pitchFamily="34" charset="-120"/>
+              </a:rPr>
+              <a:t>• Tool 6: Human-Centered AI Decision Rule Checklist (Checklist) - Use Human-Centered AI Decision.</a:t>
             </a:r>
             <a:endParaRPr lang="en-US" sz="1850" dirty="0"/>
           </a:p>
           <a:p>
+            <a:pPr indent="0" marL="0">
+              <a:buNone/>
+            </a:pPr>
             <a:r>
               <a:rPr lang="en-US" sz="1850" dirty="0">
                 <a:solidFill>
-                  <a:srgbClr val="17364A"/>
-                </a:solidFill>
-                <a:latin typeface="Aptos" pitchFamily="34" charset="0"/>
-                <a:ea typeface="Aptos" pitchFamily="34" charset="-122"/>
-                <a:cs typeface="Aptos" pitchFamily="34" charset="-120"/>
-              </a:rPr>
-              <a:t>Tool 8: AI Project Charter (Planning) - Use AI Project Charter to translate this lesson into a documented.</a:t>
+                  <a:srgbClr val="003A63"/>
+                </a:solidFill>
+                <a:latin typeface="Aptos" pitchFamily="34" charset="0"/>
+                <a:ea typeface="Aptos" pitchFamily="34" charset="-122"/>
+                <a:cs typeface="Aptos" pitchFamily="34" charset="-120"/>
+              </a:rPr>
+              <a:t>• Tool 8: AI Project Charter (Planning) - Use AI Project Charter to translate this lesson into a.</a:t>
             </a:r>
             <a:endParaRPr lang="en-US" sz="1850" dirty="0"/>
           </a:p>
@@ -12687,17 +12875,17 @@
         </p:nvSpPr>
         <p:spPr>
           <a:xfrm>
-            <a:off x="8211312" y="1920240"/>
-            <a:ext cx="2734056" cy="1463040"/>
-          </a:xfrm>
-          <a:prstGeom prst="rect">
-            <a:avLst/>
-          </a:prstGeom>
-          <a:noFill/>
-          <a:ln/>
-        </p:spPr>
-        <p:txBody>
-          <a:bodyPr wrap="square" lIns="0" tIns="0" rIns="0" bIns="0" rtlCol="0" anchor="t">
+            <a:off x="8211312" y="1892808"/>
+            <a:ext cx="2734056" cy="1536192"/>
+          </a:xfrm>
+          <a:prstGeom prst="rect">
+            <a:avLst/>
+          </a:prstGeom>
+          <a:noFill/>
+          <a:ln/>
+        </p:spPr>
+        <p:txBody>
+          <a:bodyPr wrap="square" lIns="254" tIns="254" rIns="254" bIns="254" rtlCol="0" anchor="t">
             <a:normAutofit/>
           </a:bodyPr>
           <a:lstStyle/>
@@ -12706,7 +12894,7 @@
               <a:buNone/>
             </a:pPr>
             <a:r>
-              <a:rPr lang="en-US" sz="1550" dirty="0">
+              <a:rPr lang="en-US" sz="1320" dirty="0">
                 <a:solidFill>
                   <a:srgbClr val="17364A"/>
                 </a:solidFill>
@@ -12714,9 +12902,9 @@
                 <a:ea typeface="Aptos" pitchFamily="34" charset="-122"/>
                 <a:cs typeface="Aptos" pitchFamily="34" charset="-120"/>
               </a:rPr>
-              <a:t>Use linked tools when your department needs a structured worksheet, template, checklist, review process, or documentation artifact.</a:t>
-            </a:r>
-            <a:endParaRPr lang="en-US" sz="1550" dirty="0"/>
+              <a:t>Use linked tools when your department needs a structured worksheet, template, checklist, review process, or.</a:t>
+            </a:r>
+            <a:endParaRPr lang="en-US" sz="1320" dirty="0"/>
           </a:p>
         </p:txBody>
       </p:sp>
@@ -12804,13 +12992,16 @@
           <a:ln/>
         </p:spPr>
         <p:txBody>
-          <a:bodyPr wrap="square" lIns="254" tIns="254" rIns="254" bIns="254" rtlCol="0" anchor="t">
+          <a:bodyPr wrap="square" lIns="508" tIns="508" rIns="508" bIns="508" rtlCol="0" anchor="t">
             <a:normAutofit/>
           </a:bodyPr>
           <a:lstStyle/>
           <a:p>
-            <a:r>
-              <a:rPr lang="en-US" sz="1380" dirty="0">
+            <a:pPr indent="0" marL="0">
+              <a:buNone/>
+            </a:pPr>
+            <a:r>
+              <a:rPr lang="en-US" sz="1220" dirty="0">
                 <a:solidFill>
                   <a:srgbClr val="17364A"/>
                 </a:solidFill>
@@ -12820,11 +13011,14 @@
               </a:rPr>
               <a:t>Use a tool when no comparable local process exists.</a:t>
             </a:r>
-            <a:endParaRPr lang="en-US" sz="1380" dirty="0"/>
-          </a:p>
-          <a:p>
-            <a:r>
-              <a:rPr lang="en-US" sz="1380" dirty="0">
+            <a:endParaRPr lang="en-US" sz="1220" dirty="0"/>
+          </a:p>
+          <a:p>
+            <a:pPr indent="0" marL="0">
+              <a:buNone/>
+            </a:pPr>
+            <a:r>
+              <a:rPr lang="en-US" sz="1220" dirty="0">
                 <a:solidFill>
                   <a:srgbClr val="17364A"/>
                 </a:solidFill>
@@ -12832,13 +13026,16 @@
                 <a:ea typeface="Aptos" pitchFamily="34" charset="-122"/>
                 <a:cs typeface="Aptos" pitchFamily="34" charset="-120"/>
               </a:rPr>
-              <a:t>Adapt existing department templates when they already fit the purpose.</a:t>
-            </a:r>
-            <a:endParaRPr lang="en-US" sz="1380" dirty="0"/>
-          </a:p>
-          <a:p>
-            <a:r>
-              <a:rPr lang="en-US" sz="1380" dirty="0">
+              <a:t>Adapt existing department templates when they already fit the.</a:t>
+            </a:r>
+            <a:endParaRPr lang="en-US" sz="1220" dirty="0"/>
+          </a:p>
+          <a:p>
+            <a:pPr indent="0" marL="0">
+              <a:buNone/>
+            </a:pPr>
+            <a:r>
+              <a:rPr lang="en-US" sz="1220" dirty="0">
                 <a:solidFill>
                   <a:srgbClr val="17364A"/>
                 </a:solidFill>
@@ -12848,7 +13045,7 @@
               </a:rPr>
               <a:t>Save the completed artifact as evidence of the decision.</a:t>
             </a:r>
-            <a:endParaRPr lang="en-US" sz="1380" dirty="0"/>
+            <a:endParaRPr lang="en-US" sz="1220" dirty="0"/>
           </a:p>
         </p:txBody>
       </p:sp>
@@ -13149,49 +13346,58 @@
           <a:ln/>
         </p:spPr>
         <p:txBody>
-          <a:bodyPr wrap="square" lIns="635" tIns="635" rIns="635" bIns="635" rtlCol="0" anchor="t">
+          <a:bodyPr wrap="square" lIns="1016" tIns="1016" rIns="1016" bIns="1016" rtlCol="0" anchor="t">
             <a:normAutofit/>
           </a:bodyPr>
           <a:lstStyle/>
           <a:p>
+            <a:pPr indent="0" marL="0">
+              <a:buNone/>
+            </a:pPr>
             <a:r>
               <a:rPr lang="en-US" sz="2100" dirty="0">
                 <a:solidFill>
-                  <a:srgbClr val="17364A"/>
-                </a:solidFill>
-                <a:latin typeface="Aptos" pitchFamily="34" charset="0"/>
-                <a:ea typeface="Aptos" pitchFamily="34" charset="-122"/>
-                <a:cs typeface="Aptos" pitchFamily="34" charset="-120"/>
-              </a:rPr>
-              <a:t>Define the purpose and minimum contents of an AI governance charter.</a:t>
+                  <a:srgbClr val="003A63"/>
+                </a:solidFill>
+                <a:latin typeface="Aptos" pitchFamily="34" charset="0"/>
+                <a:ea typeface="Aptos" pitchFamily="34" charset="-122"/>
+                <a:cs typeface="Aptos" pitchFamily="34" charset="-120"/>
+              </a:rPr>
+              <a:t>• Define the purpose and minimum contents of an AI governance charter.</a:t>
             </a:r>
             <a:endParaRPr lang="en-US" sz="2100" dirty="0"/>
           </a:p>
           <a:p>
+            <a:pPr indent="0" marL="0">
+              <a:buNone/>
+            </a:pPr>
             <a:r>
               <a:rPr lang="en-US" sz="2100" dirty="0">
                 <a:solidFill>
-                  <a:srgbClr val="17364A"/>
-                </a:solidFill>
-                <a:latin typeface="Aptos" pitchFamily="34" charset="0"/>
-                <a:ea typeface="Aptos" pitchFamily="34" charset="-122"/>
-                <a:cs typeface="Aptos" pitchFamily="34" charset="-120"/>
-              </a:rPr>
-              <a:t>Distinguish between a governance committee, technical review group, executive sponsor, and.</a:t>
+                  <a:srgbClr val="003A63"/>
+                </a:solidFill>
+                <a:latin typeface="Aptos" pitchFamily="34" charset="0"/>
+                <a:ea typeface="Aptos" pitchFamily="34" charset="-122"/>
+                <a:cs typeface="Aptos" pitchFamily="34" charset="-120"/>
+              </a:rPr>
+              <a:t>• Distinguish between a governance committee, technical review group, executive sponsor, and.</a:t>
             </a:r>
             <a:endParaRPr lang="en-US" sz="2100" dirty="0"/>
           </a:p>
           <a:p>
+            <a:pPr indent="0" marL="0">
+              <a:buNone/>
+            </a:pPr>
             <a:r>
               <a:rPr lang="en-US" sz="2100" dirty="0">
                 <a:solidFill>
-                  <a:srgbClr val="17364A"/>
-                </a:solidFill>
-                <a:latin typeface="Aptos" pitchFamily="34" charset="0"/>
-                <a:ea typeface="Aptos" pitchFamily="34" charset="-122"/>
-                <a:cs typeface="Aptos" pitchFamily="34" charset="-120"/>
-              </a:rPr>
-              <a:t>Identify which agency functions should participate in AI governance and when their review is required.</a:t>
+                  <a:srgbClr val="003A63"/>
+                </a:solidFill>
+                <a:latin typeface="Aptos" pitchFamily="34" charset="0"/>
+                <a:ea typeface="Aptos" pitchFamily="34" charset="-122"/>
+                <a:cs typeface="Aptos" pitchFamily="34" charset="-120"/>
+              </a:rPr>
+              <a:t>• Identify which agency functions should participate in AI governance and when their review is.</a:t>
             </a:r>
             <a:endParaRPr lang="en-US" sz="2100" dirty="0"/>
           </a:p>
@@ -13271,17 +13477,17 @@
         </p:nvSpPr>
         <p:spPr>
           <a:xfrm>
-            <a:off x="7799832" y="1828800"/>
-            <a:ext cx="3145536" cy="685800"/>
-          </a:xfrm>
-          <a:prstGeom prst="rect">
-            <a:avLst/>
-          </a:prstGeom>
-          <a:noFill/>
-          <a:ln/>
-        </p:spPr>
-        <p:txBody>
-          <a:bodyPr wrap="square" lIns="0" tIns="0" rIns="0" bIns="0" rtlCol="0" anchor="t">
+            <a:off x="7799832" y="1801368"/>
+            <a:ext cx="3145536" cy="758952"/>
+          </a:xfrm>
+          <a:prstGeom prst="rect">
+            <a:avLst/>
+          </a:prstGeom>
+          <a:noFill/>
+          <a:ln/>
+        </p:spPr>
+        <p:txBody>
+          <a:bodyPr wrap="square" lIns="254" tIns="254" rIns="254" bIns="254" rtlCol="0" anchor="t">
             <a:normAutofit/>
           </a:bodyPr>
           <a:lstStyle/>
@@ -13290,7 +13496,7 @@
               <a:buNone/>
             </a:pPr>
             <a:r>
-              <a:rPr lang="en-US" sz="1550" dirty="0">
+              <a:rPr lang="en-US" sz="1320" dirty="0">
                 <a:solidFill>
                   <a:srgbClr val="17364A"/>
                 </a:solidFill>
@@ -13300,7 +13506,7 @@
               </a:rPr>
               <a:t>Define the purpose and minimum contents of an AI governance charter.</a:t>
             </a:r>
-            <a:endParaRPr lang="en-US" sz="1550" dirty="0"/>
+            <a:endParaRPr lang="en-US" sz="1320" dirty="0"/>
           </a:p>
         </p:txBody>
       </p:sp>
@@ -13388,13 +13594,16 @@
           <a:ln/>
         </p:spPr>
         <p:txBody>
-          <a:bodyPr wrap="square" lIns="254" tIns="254" rIns="254" bIns="254" rtlCol="0" anchor="t">
+          <a:bodyPr wrap="square" lIns="508" tIns="508" rIns="508" bIns="508" rtlCol="0" anchor="t">
             <a:normAutofit/>
           </a:bodyPr>
           <a:lstStyle/>
           <a:p>
-            <a:r>
-              <a:rPr lang="en-US" sz="1380" dirty="0">
+            <a:pPr indent="0" marL="0">
+              <a:buNone/>
+            </a:pPr>
+            <a:r>
+              <a:rPr lang="en-US" sz="1220" dirty="0">
                 <a:solidFill>
                   <a:srgbClr val="17364A"/>
                 </a:solidFill>
@@ -13402,13 +13611,16 @@
                 <a:ea typeface="Aptos" pitchFamily="34" charset="-122"/>
                 <a:cs typeface="Aptos" pitchFamily="34" charset="-120"/>
               </a:rPr>
-              <a:t>Distinguish between a governance committee, technical review group, executive sponsor, and.</a:t>
-            </a:r>
-            <a:endParaRPr lang="en-US" sz="1380" dirty="0"/>
-          </a:p>
-          <a:p>
-            <a:r>
-              <a:rPr lang="en-US" sz="1380" dirty="0">
+              <a:t>Distinguish between a governance committee, technical review.</a:t>
+            </a:r>
+            <a:endParaRPr lang="en-US" sz="1220" dirty="0"/>
+          </a:p>
+          <a:p>
+            <a:pPr indent="0" marL="0">
+              <a:buNone/>
+            </a:pPr>
+            <a:r>
+              <a:rPr lang="en-US" sz="1220" dirty="0">
                 <a:solidFill>
                   <a:srgbClr val="17364A"/>
                 </a:solidFill>
@@ -13416,13 +13628,16 @@
                 <a:ea typeface="Aptos" pitchFamily="34" charset="-122"/>
                 <a:cs typeface="Aptos" pitchFamily="34" charset="-120"/>
               </a:rPr>
-              <a:t>Develop operating procedures for intake, review, approval, monitoring, exceptions,.</a:t>
-            </a:r>
-            <a:endParaRPr lang="en-US" sz="1380" dirty="0"/>
-          </a:p>
-          <a:p>
-            <a:r>
-              <a:rPr lang="en-US" sz="1380" dirty="0">
+              <a:t>Develop operating procedures for intake, review, approval,.</a:t>
+            </a:r>
+            <a:endParaRPr lang="en-US" sz="1220" dirty="0"/>
+          </a:p>
+          <a:p>
+            <a:pPr indent="0" marL="0">
+              <a:buNone/>
+            </a:pPr>
+            <a:r>
+              <a:rPr lang="en-US" sz="1220" dirty="0">
                 <a:solidFill>
                   <a:srgbClr val="17364A"/>
                 </a:solidFill>
@@ -13430,9 +13645,9 @@
                 <a:ea typeface="Aptos" pitchFamily="34" charset="-122"/>
                 <a:cs typeface="Aptos" pitchFamily="34" charset="-120"/>
               </a:rPr>
-              <a:t>Produce a draft AI governance charter or operating model that can be adapted by a public.</a:t>
-            </a:r>
-            <a:endParaRPr lang="en-US" sz="1380" dirty="0"/>
+              <a:t>Produce a draft AI governance charter or operating model that can.</a:t>
+            </a:r>
+            <a:endParaRPr lang="en-US" sz="1220" dirty="0"/>
           </a:p>
         </p:txBody>
       </p:sp>
@@ -13510,17 +13725,17 @@
         </p:nvSpPr>
         <p:spPr>
           <a:xfrm>
-            <a:off x="7799832" y="5001768"/>
-            <a:ext cx="3145536" cy="502920"/>
-          </a:xfrm>
-          <a:prstGeom prst="rect">
-            <a:avLst/>
-          </a:prstGeom>
-          <a:noFill/>
-          <a:ln/>
-        </p:spPr>
-        <p:txBody>
-          <a:bodyPr wrap="square" lIns="0" tIns="0" rIns="0" bIns="0" rtlCol="0" anchor="t">
+            <a:off x="7799832" y="4974336"/>
+            <a:ext cx="3145536" cy="576072"/>
+          </a:xfrm>
+          <a:prstGeom prst="rect">
+            <a:avLst/>
+          </a:prstGeom>
+          <a:noFill/>
+          <a:ln/>
+        </p:spPr>
+        <p:txBody>
+          <a:bodyPr wrap="square" lIns="254" tIns="254" rIns="254" bIns="254" rtlCol="0" anchor="t">
             <a:normAutofit/>
           </a:bodyPr>
           <a:lstStyle/>
@@ -13529,7 +13744,7 @@
               <a:buNone/>
             </a:pPr>
             <a:r>
-              <a:rPr lang="en-US" sz="1550" dirty="0">
+              <a:rPr lang="en-US" sz="1320" dirty="0">
                 <a:solidFill>
                   <a:srgbClr val="17364A"/>
                 </a:solidFill>
@@ -13537,9 +13752,9 @@
                 <a:ea typeface="Aptos" pitchFamily="34" charset="-122"/>
                 <a:cs typeface="Aptos" pitchFamily="34" charset="-120"/>
               </a:rPr>
-              <a:t>Use the assignment to test whether you can explain the concept, apply it to a realistic public health situation, and identify what would need review before the work moves forward.</a:t>
-            </a:r>
-            <a:endParaRPr lang="en-US" sz="1550" dirty="0"/>
+              <a:t>Use the assignment to test whether you can explain the concept, apply it to a realistic public health situation, and.</a:t>
+            </a:r>
+            <a:endParaRPr lang="en-US" sz="1320" dirty="0"/>
           </a:p>
         </p:txBody>
       </p:sp>
@@ -13840,49 +14055,58 @@
           <a:ln/>
         </p:spPr>
         <p:txBody>
-          <a:bodyPr wrap="square" lIns="635" tIns="635" rIns="635" bIns="635" rtlCol="0" anchor="t">
+          <a:bodyPr wrap="square" lIns="1016" tIns="1016" rIns="1016" bIns="1016" rtlCol="0" anchor="t">
             <a:normAutofit/>
           </a:bodyPr>
           <a:lstStyle/>
           <a:p>
+            <a:pPr indent="0" marL="0">
+              <a:buNone/>
+            </a:pPr>
             <a:r>
               <a:rPr lang="en-US" sz="2100" dirty="0">
                 <a:solidFill>
-                  <a:srgbClr val="17364A"/>
-                </a:solidFill>
-                <a:latin typeface="Aptos" pitchFamily="34" charset="0"/>
-                <a:ea typeface="Aptos" pitchFamily="34" charset="-122"/>
-                <a:cs typeface="Aptos" pitchFamily="34" charset="-120"/>
-              </a:rPr>
-              <a:t>AI governance needs a formal home before an agency begins approving tools, pilots, vendor products, or.</a:t>
+                  <a:srgbClr val="003A63"/>
+                </a:solidFill>
+                <a:latin typeface="Aptos" pitchFamily="34" charset="0"/>
+                <a:ea typeface="Aptos" pitchFamily="34" charset="-122"/>
+                <a:cs typeface="Aptos" pitchFamily="34" charset="-120"/>
+              </a:rPr>
+              <a:t>• AI governance needs a formal home before an agency begins approving tools, pilots, vendor.</a:t>
             </a:r>
             <a:endParaRPr lang="en-US" sz="2100" dirty="0"/>
           </a:p>
           <a:p>
+            <a:pPr indent="0" marL="0">
+              <a:buNone/>
+            </a:pPr>
             <a:r>
               <a:rPr lang="en-US" sz="2100" dirty="0">
                 <a:solidFill>
-                  <a:srgbClr val="17364A"/>
-                </a:solidFill>
-                <a:latin typeface="Aptos" pitchFamily="34" charset="0"/>
-                <a:ea typeface="Aptos" pitchFamily="34" charset="-122"/>
-                <a:cs typeface="Aptos" pitchFamily="34" charset="-120"/>
-              </a:rPr>
-              <a:t>A governance charter defines the purpose, scope, authority, membership, cadence, decision rules, and.</a:t>
+                  <a:srgbClr val="003A63"/>
+                </a:solidFill>
+                <a:latin typeface="Aptos" pitchFamily="34" charset="0"/>
+                <a:ea typeface="Aptos" pitchFamily="34" charset="-122"/>
+                <a:cs typeface="Aptos" pitchFamily="34" charset="-120"/>
+              </a:rPr>
+              <a:t>• A governance charter defines the purpose, scope, authority, membership, cadence, decision.</a:t>
             </a:r>
             <a:endParaRPr lang="en-US" sz="2100" dirty="0"/>
           </a:p>
           <a:p>
+            <a:pPr indent="0" marL="0">
+              <a:buNone/>
+            </a:pPr>
             <a:r>
               <a:rPr lang="en-US" sz="2100" dirty="0">
                 <a:solidFill>
-                  <a:srgbClr val="17364A"/>
-                </a:solidFill>
-                <a:latin typeface="Aptos" pitchFamily="34" charset="0"/>
-                <a:ea typeface="Aptos" pitchFamily="34" charset="-122"/>
-                <a:cs typeface="Aptos" pitchFamily="34" charset="-120"/>
-              </a:rPr>
-              <a:t>Without a charter, AI decisions often become scattered across IT, program areas, legal, privacy,.</a:t>
+                  <a:srgbClr val="003A63"/>
+                </a:solidFill>
+                <a:latin typeface="Aptos" pitchFamily="34" charset="0"/>
+                <a:ea typeface="Aptos" pitchFamily="34" charset="-122"/>
+                <a:cs typeface="Aptos" pitchFamily="34" charset="-120"/>
+              </a:rPr>
+              <a:t>• Without a charter, AI decisions often become scattered across IT, program areas, legal,.</a:t>
             </a:r>
             <a:endParaRPr lang="en-US" sz="2100" dirty="0"/>
           </a:p>
@@ -13962,17 +14186,17 @@
         </p:nvSpPr>
         <p:spPr>
           <a:xfrm>
-            <a:off x="7799832" y="1828800"/>
-            <a:ext cx="3145536" cy="685800"/>
-          </a:xfrm>
-          <a:prstGeom prst="rect">
-            <a:avLst/>
-          </a:prstGeom>
-          <a:noFill/>
-          <a:ln/>
-        </p:spPr>
-        <p:txBody>
-          <a:bodyPr wrap="square" lIns="0" tIns="0" rIns="0" bIns="0" rtlCol="0" anchor="t">
+            <a:off x="7799832" y="1801368"/>
+            <a:ext cx="3145536" cy="758952"/>
+          </a:xfrm>
+          <a:prstGeom prst="rect">
+            <a:avLst/>
+          </a:prstGeom>
+          <a:noFill/>
+          <a:ln/>
+        </p:spPr>
+        <p:txBody>
+          <a:bodyPr wrap="square" lIns="254" tIns="254" rIns="254" bIns="254" rtlCol="0" anchor="t">
             <a:normAutofit/>
           </a:bodyPr>
           <a:lstStyle/>
@@ -13981,7 +14205,7 @@
               <a:buNone/>
             </a:pPr>
             <a:r>
-              <a:rPr lang="en-US" sz="1550" dirty="0">
+              <a:rPr lang="en-US" sz="1320" dirty="0">
                 <a:solidFill>
                   <a:srgbClr val="17364A"/>
                 </a:solidFill>
@@ -13991,7 +14215,7 @@
               </a:rPr>
               <a:t>AI governance needs a formal home before an agency begins approving tools, pilots, vendor products, or.</a:t>
             </a:r>
-            <a:endParaRPr lang="en-US" sz="1550" dirty="0"/>
+            <a:endParaRPr lang="en-US" sz="1320" dirty="0"/>
           </a:p>
         </p:txBody>
       </p:sp>
@@ -14079,13 +14303,16 @@
           <a:ln/>
         </p:spPr>
         <p:txBody>
-          <a:bodyPr wrap="square" lIns="254" tIns="254" rIns="254" bIns="254" rtlCol="0" anchor="t">
+          <a:bodyPr wrap="square" lIns="508" tIns="508" rIns="508" bIns="508" rtlCol="0" anchor="t">
             <a:normAutofit/>
           </a:bodyPr>
           <a:lstStyle/>
           <a:p>
-            <a:r>
-              <a:rPr lang="en-US" sz="1380" dirty="0">
+            <a:pPr indent="0" marL="0">
+              <a:buNone/>
+            </a:pPr>
+            <a:r>
+              <a:rPr lang="en-US" sz="1220" dirty="0">
                 <a:solidFill>
                   <a:srgbClr val="17364A"/>
                 </a:solidFill>
@@ -14093,13 +14320,16 @@
                 <a:ea typeface="Aptos" pitchFamily="34" charset="-122"/>
                 <a:cs typeface="Aptos" pitchFamily="34" charset="-120"/>
               </a:rPr>
-              <a:t>AI governance needs a formal home before an agency begins approving tools, pilots, vendor.</a:t>
-            </a:r>
-            <a:endParaRPr lang="en-US" sz="1380" dirty="0"/>
-          </a:p>
-          <a:p>
-            <a:r>
-              <a:rPr lang="en-US" sz="1380" dirty="0">
+              <a:t>AI governance needs a formal home before an agency begins.</a:t>
+            </a:r>
+            <a:endParaRPr lang="en-US" sz="1220" dirty="0"/>
+          </a:p>
+          <a:p>
+            <a:pPr indent="0" marL="0">
+              <a:buNone/>
+            </a:pPr>
+            <a:r>
+              <a:rPr lang="en-US" sz="1220" dirty="0">
                 <a:solidFill>
                   <a:srgbClr val="17364A"/>
                 </a:solidFill>
@@ -14107,13 +14337,16 @@
                 <a:ea typeface="Aptos" pitchFamily="34" charset="-122"/>
                 <a:cs typeface="Aptos" pitchFamily="34" charset="-120"/>
               </a:rPr>
-              <a:t>A governance charter defines the purpose, scope, authority, membership, cadence, decision.</a:t>
-            </a:r>
-            <a:endParaRPr lang="en-US" sz="1380" dirty="0"/>
-          </a:p>
-          <a:p>
-            <a:r>
-              <a:rPr lang="en-US" sz="1380" dirty="0">
+              <a:t>A governance charter defines the purpose, scope, authority,.</a:t>
+            </a:r>
+            <a:endParaRPr lang="en-US" sz="1220" dirty="0"/>
+          </a:p>
+          <a:p>
+            <a:pPr indent="0" marL="0">
+              <a:buNone/>
+            </a:pPr>
+            <a:r>
+              <a:rPr lang="en-US" sz="1220" dirty="0">
                 <a:solidFill>
                   <a:srgbClr val="17364A"/>
                 </a:solidFill>
@@ -14121,9 +14354,9 @@
                 <a:ea typeface="Aptos" pitchFamily="34" charset="-122"/>
                 <a:cs typeface="Aptos" pitchFamily="34" charset="-120"/>
               </a:rPr>
-              <a:t>Without a charter, AI decisions often become scattered across IT, program areas, legal,.</a:t>
-            </a:r>
-            <a:endParaRPr lang="en-US" sz="1380" dirty="0"/>
+              <a:t>Without a charter, AI decisions often become scattered across IT,.</a:t>
+            </a:r>
+            <a:endParaRPr lang="en-US" sz="1220" dirty="0"/>
           </a:p>
         </p:txBody>
       </p:sp>
@@ -14201,17 +14434,17 @@
         </p:nvSpPr>
         <p:spPr>
           <a:xfrm>
-            <a:off x="7799832" y="5001768"/>
-            <a:ext cx="3145536" cy="502920"/>
-          </a:xfrm>
-          <a:prstGeom prst="rect">
-            <a:avLst/>
-          </a:prstGeom>
-          <a:noFill/>
-          <a:ln/>
-        </p:spPr>
-        <p:txBody>
-          <a:bodyPr wrap="square" lIns="0" tIns="0" rIns="0" bIns="0" rtlCol="0" anchor="t">
+            <a:off x="7799832" y="4974336"/>
+            <a:ext cx="3145536" cy="576072"/>
+          </a:xfrm>
+          <a:prstGeom prst="rect">
+            <a:avLst/>
+          </a:prstGeom>
+          <a:noFill/>
+          <a:ln/>
+        </p:spPr>
+        <p:txBody>
+          <a:bodyPr wrap="square" lIns="254" tIns="254" rIns="254" bIns="254" rtlCol="0" anchor="t">
             <a:normAutofit/>
           </a:bodyPr>
           <a:lstStyle/>
@@ -14220,7 +14453,7 @@
               <a:buNone/>
             </a:pPr>
             <a:r>
-              <a:rPr lang="en-US" sz="1550" dirty="0">
+              <a:rPr lang="en-US" sz="1320" dirty="0">
                 <a:solidFill>
                   <a:srgbClr val="17364A"/>
                 </a:solidFill>
@@ -14228,9 +14461,9 @@
                 <a:ea typeface="Aptos" pitchFamily="34" charset="-122"/>
                 <a:cs typeface="Aptos" pitchFamily="34" charset="-120"/>
               </a:rPr>
-              <a:t>Translate this concept into clear decision rights, review steps, documentation expectations, and escalation paths before an AI-supported workflow is approved.</a:t>
-            </a:r>
-            <a:endParaRPr lang="en-US" sz="1550" dirty="0"/>
+              <a:t>Translate this concept into clear decision rights, review steps, documentation expectations, and escalation paths before.</a:t>
+            </a:r>
+            <a:endParaRPr lang="en-US" sz="1320" dirty="0"/>
           </a:p>
         </p:txBody>
       </p:sp>
@@ -14531,49 +14764,58 @@
           <a:ln/>
         </p:spPr>
         <p:txBody>
-          <a:bodyPr wrap="square" lIns="635" tIns="635" rIns="635" bIns="635" rtlCol="0" anchor="t">
+          <a:bodyPr wrap="square" lIns="1016" tIns="1016" rIns="1016" bIns="1016" rtlCol="0" anchor="t">
             <a:normAutofit/>
           </a:bodyPr>
           <a:lstStyle/>
           <a:p>
+            <a:pPr indent="0" marL="0">
+              <a:buNone/>
+            </a:pPr>
             <a:r>
               <a:rPr lang="en-US" sz="2100" dirty="0">
                 <a:solidFill>
-                  <a:srgbClr val="17364A"/>
-                </a:solidFill>
-                <a:latin typeface="Aptos" pitchFamily="34" charset="0"/>
-                <a:ea typeface="Aptos" pitchFamily="34" charset="-122"/>
-                <a:cs typeface="Aptos" pitchFamily="34" charset="-120"/>
-              </a:rPr>
-              <a:t>This module provides national-level training guidance for public health agencies and partners.</a:t>
+                  <a:srgbClr val="003A63"/>
+                </a:solidFill>
+                <a:latin typeface="Aptos" pitchFamily="34" charset="0"/>
+                <a:ea typeface="Aptos" pitchFamily="34" charset="-122"/>
+                <a:cs typeface="Aptos" pitchFamily="34" charset="-120"/>
+              </a:rPr>
+              <a:t>• This module provides national-level training guidance for public health agencies and partners.</a:t>
             </a:r>
             <a:endParaRPr lang="en-US" sz="2100" dirty="0"/>
           </a:p>
           <a:p>
+            <a:pPr indent="0" marL="0">
+              <a:buNone/>
+            </a:pPr>
             <a:r>
               <a:rPr lang="en-US" sz="2100" dirty="0">
                 <a:solidFill>
-                  <a:srgbClr val="17364A"/>
-                </a:solidFill>
-                <a:latin typeface="Aptos" pitchFamily="34" charset="0"/>
-                <a:ea typeface="Aptos" pitchFamily="34" charset="-122"/>
-                <a:cs typeface="Aptos" pitchFamily="34" charset="-120"/>
-              </a:rPr>
-              <a:t>It is not legal advice and does not replace review by agency legal counsel, privacy officers,.</a:t>
+                  <a:srgbClr val="003A63"/>
+                </a:solidFill>
+                <a:latin typeface="Aptos" pitchFamily="34" charset="0"/>
+                <a:ea typeface="Aptos" pitchFamily="34" charset="-122"/>
+                <a:cs typeface="Aptos" pitchFamily="34" charset="-120"/>
+              </a:rPr>
+              <a:t>• It is not legal advice and does not replace review by agency legal counsel, privacy officers,.</a:t>
             </a:r>
             <a:endParaRPr lang="en-US" sz="2100" dirty="0"/>
           </a:p>
           <a:p>
+            <a:pPr indent="0" marL="0">
+              <a:buNone/>
+            </a:pPr>
             <a:r>
               <a:rPr lang="en-US" sz="2100" dirty="0">
                 <a:solidFill>
-                  <a:srgbClr val="17364A"/>
-                </a:solidFill>
-                <a:latin typeface="Aptos" pitchFamily="34" charset="0"/>
-                <a:ea typeface="Aptos" pitchFamily="34" charset="-122"/>
-                <a:cs typeface="Aptos" pitchFamily="34" charset="-120"/>
-              </a:rPr>
-              <a:t>Requirements may vary by state, locality, territory, Tribe, agency, funding source, data-sharing.</a:t>
+                  <a:srgbClr val="003A63"/>
+                </a:solidFill>
+                <a:latin typeface="Aptos" pitchFamily="34" charset="0"/>
+                <a:ea typeface="Aptos" pitchFamily="34" charset="-122"/>
+                <a:cs typeface="Aptos" pitchFamily="34" charset="-120"/>
+              </a:rPr>
+              <a:t>• Requirements may vary by state, locality, territory, Tribe, agency, funding source,.</a:t>
             </a:r>
             <a:endParaRPr lang="en-US" sz="2100" dirty="0"/>
           </a:p>
@@ -14653,17 +14895,17 @@
         </p:nvSpPr>
         <p:spPr>
           <a:xfrm>
-            <a:off x="7799832" y="1828800"/>
-            <a:ext cx="3145536" cy="685800"/>
-          </a:xfrm>
-          <a:prstGeom prst="rect">
-            <a:avLst/>
-          </a:prstGeom>
-          <a:noFill/>
-          <a:ln/>
-        </p:spPr>
-        <p:txBody>
-          <a:bodyPr wrap="square" lIns="0" tIns="0" rIns="0" bIns="0" rtlCol="0" anchor="t">
+            <a:off x="7799832" y="1801368"/>
+            <a:ext cx="3145536" cy="758952"/>
+          </a:xfrm>
+          <a:prstGeom prst="rect">
+            <a:avLst/>
+          </a:prstGeom>
+          <a:noFill/>
+          <a:ln/>
+        </p:spPr>
+        <p:txBody>
+          <a:bodyPr wrap="square" lIns="254" tIns="254" rIns="254" bIns="254" rtlCol="0" anchor="t">
             <a:normAutofit/>
           </a:bodyPr>
           <a:lstStyle/>
@@ -14672,7 +14914,7 @@
               <a:buNone/>
             </a:pPr>
             <a:r>
-              <a:rPr lang="en-US" sz="1550" dirty="0">
+              <a:rPr lang="en-US" sz="1320" dirty="0">
                 <a:solidFill>
                   <a:srgbClr val="17364A"/>
                 </a:solidFill>
@@ -14682,7 +14924,7 @@
               </a:rPr>
               <a:t>This module provides national-level training guidance for public health agencies and partners.</a:t>
             </a:r>
-            <a:endParaRPr lang="en-US" sz="1550" dirty="0"/>
+            <a:endParaRPr lang="en-US" sz="1320" dirty="0"/>
           </a:p>
         </p:txBody>
       </p:sp>
@@ -14770,13 +15012,16 @@
           <a:ln/>
         </p:spPr>
         <p:txBody>
-          <a:bodyPr wrap="square" lIns="254" tIns="254" rIns="254" bIns="254" rtlCol="0" anchor="t">
+          <a:bodyPr wrap="square" lIns="508" tIns="508" rIns="508" bIns="508" rtlCol="0" anchor="t">
             <a:normAutofit/>
           </a:bodyPr>
           <a:lstStyle/>
           <a:p>
-            <a:r>
-              <a:rPr lang="en-US" sz="1380" dirty="0">
+            <a:pPr indent="0" marL="0">
+              <a:buNone/>
+            </a:pPr>
+            <a:r>
+              <a:rPr lang="en-US" sz="1220" dirty="0">
                 <a:solidFill>
                   <a:srgbClr val="17364A"/>
                 </a:solidFill>
@@ -14784,13 +15029,16 @@
                 <a:ea typeface="Aptos" pitchFamily="34" charset="-122"/>
                 <a:cs typeface="Aptos" pitchFamily="34" charset="-120"/>
               </a:rPr>
-              <a:t>It is not legal advice and does not replace review by agency legal counsel, privacy.</a:t>
-            </a:r>
-            <a:endParaRPr lang="en-US" sz="1380" dirty="0"/>
-          </a:p>
-          <a:p>
-            <a:r>
-              <a:rPr lang="en-US" sz="1380" dirty="0">
+              <a:t>It is not legal advice and does not replace review by agency legal.</a:t>
+            </a:r>
+            <a:endParaRPr lang="en-US" sz="1220" dirty="0"/>
+          </a:p>
+          <a:p>
+            <a:pPr indent="0" marL="0">
+              <a:buNone/>
+            </a:pPr>
+            <a:r>
+              <a:rPr lang="en-US" sz="1220" dirty="0">
                 <a:solidFill>
                   <a:srgbClr val="17364A"/>
                 </a:solidFill>
@@ -14798,13 +15046,16 @@
                 <a:ea typeface="Aptos" pitchFamily="34" charset="-122"/>
                 <a:cs typeface="Aptos" pitchFamily="34" charset="-120"/>
               </a:rPr>
-              <a:t>Requirements may vary by state, locality, territory, Tribe, agency, funding source,.</a:t>
-            </a:r>
-            <a:endParaRPr lang="en-US" sz="1380" dirty="0"/>
-          </a:p>
-          <a:p>
-            <a:r>
-              <a:rPr lang="en-US" sz="1380" dirty="0">
+              <a:t>Requirements may vary by state, locality, territory, Tribe,.</a:t>
+            </a:r>
+            <a:endParaRPr lang="en-US" sz="1220" dirty="0"/>
+          </a:p>
+          <a:p>
+            <a:pPr indent="0" marL="0">
+              <a:buNone/>
+            </a:pPr>
+            <a:r>
+              <a:rPr lang="en-US" sz="1220" dirty="0">
                 <a:solidFill>
                   <a:srgbClr val="17364A"/>
                 </a:solidFill>
@@ -14812,9 +15063,9 @@
                 <a:ea typeface="Aptos" pitchFamily="34" charset="-122"/>
                 <a:cs typeface="Aptos" pitchFamily="34" charset="-120"/>
               </a:rPr>
-              <a:t>Learners should use this module to identify the issues that require review and should.</a:t>
-            </a:r>
-            <a:endParaRPr lang="en-US" sz="1380" dirty="0"/>
+              <a:t>Learners should use this module to identify the issues that.</a:t>
+            </a:r>
+            <a:endParaRPr lang="en-US" sz="1220" dirty="0"/>
           </a:p>
         </p:txBody>
       </p:sp>
@@ -14892,17 +15143,17 @@
         </p:nvSpPr>
         <p:spPr>
           <a:xfrm>
-            <a:off x="7799832" y="5001768"/>
-            <a:ext cx="3145536" cy="502920"/>
-          </a:xfrm>
-          <a:prstGeom prst="rect">
-            <a:avLst/>
-          </a:prstGeom>
-          <a:noFill/>
-          <a:ln/>
-        </p:spPr>
-        <p:txBody>
-          <a:bodyPr wrap="square" lIns="0" tIns="0" rIns="0" bIns="0" rtlCol="0" anchor="t">
+            <a:off x="7799832" y="4974336"/>
+            <a:ext cx="3145536" cy="576072"/>
+          </a:xfrm>
+          <a:prstGeom prst="rect">
+            <a:avLst/>
+          </a:prstGeom>
+          <a:noFill/>
+          <a:ln/>
+        </p:spPr>
+        <p:txBody>
+          <a:bodyPr wrap="square" lIns="254" tIns="254" rIns="254" bIns="254" rtlCol="0" anchor="t">
             <a:normAutofit/>
           </a:bodyPr>
           <a:lstStyle/>
@@ -14911,7 +15162,7 @@
               <a:buNone/>
             </a:pPr>
             <a:r>
-              <a:rPr lang="en-US" sz="1550" dirty="0">
+              <a:rPr lang="en-US" sz="1320" dirty="0">
                 <a:solidFill>
                   <a:srgbClr val="17364A"/>
                 </a:solidFill>
@@ -14919,9 +15170,9 @@
                 <a:ea typeface="Aptos" pitchFamily="34" charset="-122"/>
                 <a:cs typeface="Aptos" pitchFamily="34" charset="-120"/>
               </a:rPr>
-              <a:t>Translate this concept into clear decision rights, review steps, documentation expectations, and escalation paths before an AI-supported workflow is approved.</a:t>
-            </a:r>
-            <a:endParaRPr lang="en-US" sz="1550" dirty="0"/>
+              <a:t>Translate this concept into clear decision rights, review steps, documentation expectations, and escalation paths before.</a:t>
+            </a:r>
+            <a:endParaRPr lang="en-US" sz="1320" dirty="0"/>
           </a:p>
         </p:txBody>
       </p:sp>
@@ -15222,49 +15473,58 @@
           <a:ln/>
         </p:spPr>
         <p:txBody>
-          <a:bodyPr wrap="square" lIns="635" tIns="635" rIns="635" bIns="635" rtlCol="0" anchor="t">
+          <a:bodyPr wrap="square" lIns="1016" tIns="1016" rIns="1016" bIns="1016" rtlCol="0" anchor="t">
             <a:normAutofit/>
           </a:bodyPr>
           <a:lstStyle/>
           <a:p>
+            <a:pPr indent="0" marL="0">
+              <a:buNone/>
+            </a:pPr>
             <a:r>
               <a:rPr lang="en-US" sz="2100" dirty="0">
                 <a:solidFill>
-                  <a:srgbClr val="17364A"/>
-                </a:solidFill>
-                <a:latin typeface="Aptos" pitchFamily="34" charset="0"/>
-                <a:ea typeface="Aptos" pitchFamily="34" charset="-122"/>
-                <a:cs typeface="Aptos" pitchFamily="34" charset="-120"/>
-              </a:rPr>
-              <a:t>Public health agencies operate under legal authorities, public accountability obligations, data-sharing.</a:t>
+                  <a:srgbClr val="003A63"/>
+                </a:solidFill>
+                <a:latin typeface="Aptos" pitchFamily="34" charset="0"/>
+                <a:ea typeface="Aptos" pitchFamily="34" charset="-122"/>
+                <a:cs typeface="Aptos" pitchFamily="34" charset="-120"/>
+              </a:rPr>
+              <a:t>• Public health agencies operate under legal authorities, public accountability obligations,.</a:t>
             </a:r>
             <a:endParaRPr lang="en-US" sz="2100" dirty="0"/>
           </a:p>
           <a:p>
+            <a:pPr indent="0" marL="0">
+              <a:buNone/>
+            </a:pPr>
             <a:r>
               <a:rPr lang="en-US" sz="2100" dirty="0">
                 <a:solidFill>
-                  <a:srgbClr val="17364A"/>
-                </a:solidFill>
-                <a:latin typeface="Aptos" pitchFamily="34" charset="0"/>
-                <a:ea typeface="Aptos" pitchFamily="34" charset="-122"/>
-                <a:cs typeface="Aptos" pitchFamily="34" charset="-120"/>
-              </a:rPr>
-              <a:t>AI governance must therefore be more than a technology review process.</a:t>
+                  <a:srgbClr val="003A63"/>
+                </a:solidFill>
+                <a:latin typeface="Aptos" pitchFamily="34" charset="0"/>
+                <a:ea typeface="Aptos" pitchFamily="34" charset="-122"/>
+                <a:cs typeface="Aptos" pitchFamily="34" charset="-120"/>
+              </a:rPr>
+              <a:t>• AI governance must therefore be more than a technology review process.</a:t>
             </a:r>
             <a:endParaRPr lang="en-US" sz="2100" dirty="0"/>
           </a:p>
           <a:p>
+            <a:pPr indent="0" marL="0">
+              <a:buNone/>
+            </a:pPr>
             <a:r>
               <a:rPr lang="en-US" sz="2100" dirty="0">
                 <a:solidFill>
-                  <a:srgbClr val="17364A"/>
-                </a:solidFill>
-                <a:latin typeface="Aptos" pitchFamily="34" charset="0"/>
-                <a:ea typeface="Aptos" pitchFamily="34" charset="-122"/>
-                <a:cs typeface="Aptos" pitchFamily="34" charset="-120"/>
-              </a:rPr>
-              <a:t>It must define how the agency decides which AI uses are acceptable, which safeguards are required, who.</a:t>
+                  <a:srgbClr val="003A63"/>
+                </a:solidFill>
+                <a:latin typeface="Aptos" pitchFamily="34" charset="0"/>
+                <a:ea typeface="Aptos" pitchFamily="34" charset="-122"/>
+                <a:cs typeface="Aptos" pitchFamily="34" charset="-120"/>
+              </a:rPr>
+              <a:t>• It must define how the agency decides which AI uses are acceptable, which safeguards are.</a:t>
             </a:r>
             <a:endParaRPr lang="en-US" sz="2100" dirty="0"/>
           </a:p>
@@ -15344,17 +15604,17 @@
         </p:nvSpPr>
         <p:spPr>
           <a:xfrm>
-            <a:off x="7799832" y="1828800"/>
-            <a:ext cx="3145536" cy="685800"/>
-          </a:xfrm>
-          <a:prstGeom prst="rect">
-            <a:avLst/>
-          </a:prstGeom>
-          <a:noFill/>
-          <a:ln/>
-        </p:spPr>
-        <p:txBody>
-          <a:bodyPr wrap="square" lIns="0" tIns="0" rIns="0" bIns="0" rtlCol="0" anchor="t">
+            <a:off x="7799832" y="1801368"/>
+            <a:ext cx="3145536" cy="758952"/>
+          </a:xfrm>
+          <a:prstGeom prst="rect">
+            <a:avLst/>
+          </a:prstGeom>
+          <a:noFill/>
+          <a:ln/>
+        </p:spPr>
+        <p:txBody>
+          <a:bodyPr wrap="square" lIns="254" tIns="254" rIns="254" bIns="254" rtlCol="0" anchor="t">
             <a:normAutofit/>
           </a:bodyPr>
           <a:lstStyle/>
@@ -15363,7 +15623,7 @@
               <a:buNone/>
             </a:pPr>
             <a:r>
-              <a:rPr lang="en-US" sz="1550" dirty="0">
+              <a:rPr lang="en-US" sz="1320" dirty="0">
                 <a:solidFill>
                   <a:srgbClr val="17364A"/>
                 </a:solidFill>
@@ -15373,7 +15633,7 @@
               </a:rPr>
               <a:t>Public health agencies operate under legal authorities, public accountability obligations, data-sharing.</a:t>
             </a:r>
-            <a:endParaRPr lang="en-US" sz="1550" dirty="0"/>
+            <a:endParaRPr lang="en-US" sz="1320" dirty="0"/>
           </a:p>
         </p:txBody>
       </p:sp>
@@ -15461,13 +15721,16 @@
           <a:ln/>
         </p:spPr>
         <p:txBody>
-          <a:bodyPr wrap="square" lIns="254" tIns="254" rIns="254" bIns="254" rtlCol="0" anchor="t">
+          <a:bodyPr wrap="square" lIns="508" tIns="508" rIns="508" bIns="508" rtlCol="0" anchor="t">
             <a:normAutofit/>
           </a:bodyPr>
           <a:lstStyle/>
           <a:p>
-            <a:r>
-              <a:rPr lang="en-US" sz="1380" dirty="0">
+            <a:pPr indent="0" marL="0">
+              <a:buNone/>
+            </a:pPr>
+            <a:r>
+              <a:rPr lang="en-US" sz="1220" dirty="0">
                 <a:solidFill>
                   <a:srgbClr val="17364A"/>
                 </a:solidFill>
@@ -15475,13 +15738,16 @@
                 <a:ea typeface="Aptos" pitchFamily="34" charset="-122"/>
                 <a:cs typeface="Aptos" pitchFamily="34" charset="-120"/>
               </a:rPr>
-              <a:t>Public health agencies operate under legal authorities, public accountability obligations,.</a:t>
-            </a:r>
-            <a:endParaRPr lang="en-US" sz="1380" dirty="0"/>
-          </a:p>
-          <a:p>
-            <a:r>
-              <a:rPr lang="en-US" sz="1380" dirty="0">
+              <a:t>Public health agencies operate under legal authorities, public.</a:t>
+            </a:r>
+            <a:endParaRPr lang="en-US" sz="1220" dirty="0"/>
+          </a:p>
+          <a:p>
+            <a:pPr indent="0" marL="0">
+              <a:buNone/>
+            </a:pPr>
+            <a:r>
+              <a:rPr lang="en-US" sz="1220" dirty="0">
                 <a:solidFill>
                   <a:srgbClr val="17364A"/>
                 </a:solidFill>
@@ -15489,13 +15755,16 @@
                 <a:ea typeface="Aptos" pitchFamily="34" charset="-122"/>
                 <a:cs typeface="Aptos" pitchFamily="34" charset="-120"/>
               </a:rPr>
-              <a:t>It must define how the agency decides which AI uses are acceptable, which safeguards are.</a:t>
-            </a:r>
-            <a:endParaRPr lang="en-US" sz="1380" dirty="0"/>
-          </a:p>
-          <a:p>
-            <a:r>
-              <a:rPr lang="en-US" sz="1380" dirty="0">
+              <a:t>It must define how the agency decides which AI uses are.</a:t>
+            </a:r>
+            <a:endParaRPr lang="en-US" sz="1220" dirty="0"/>
+          </a:p>
+          <a:p>
+            <a:pPr indent="0" marL="0">
+              <a:buNone/>
+            </a:pPr>
+            <a:r>
+              <a:rPr lang="en-US" sz="1220" dirty="0">
                 <a:solidFill>
                   <a:srgbClr val="17364A"/>
                 </a:solidFill>
@@ -15503,9 +15772,9 @@
                 <a:ea typeface="Aptos" pitchFamily="34" charset="-122"/>
                 <a:cs typeface="Aptos" pitchFamily="34" charset="-120"/>
               </a:rPr>
-              <a:t>A governance operating model also helps avoid the problem of uneven adoption.</a:t>
-            </a:r>
-            <a:endParaRPr lang="en-US" sz="1380" dirty="0"/>
+              <a:t>A governance operating model also helps avoid the problem of.</a:t>
+            </a:r>
+            <a:endParaRPr lang="en-US" sz="1220" dirty="0"/>
           </a:p>
         </p:txBody>
       </p:sp>
@@ -15583,17 +15852,17 @@
         </p:nvSpPr>
         <p:spPr>
           <a:xfrm>
-            <a:off x="7799832" y="5001768"/>
-            <a:ext cx="3145536" cy="502920"/>
-          </a:xfrm>
-          <a:prstGeom prst="rect">
-            <a:avLst/>
-          </a:prstGeom>
-          <a:noFill/>
-          <a:ln/>
-        </p:spPr>
-        <p:txBody>
-          <a:bodyPr wrap="square" lIns="0" tIns="0" rIns="0" bIns="0" rtlCol="0" anchor="t">
+            <a:off x="7799832" y="4974336"/>
+            <a:ext cx="3145536" cy="576072"/>
+          </a:xfrm>
+          <a:prstGeom prst="rect">
+            <a:avLst/>
+          </a:prstGeom>
+          <a:noFill/>
+          <a:ln/>
+        </p:spPr>
+        <p:txBody>
+          <a:bodyPr wrap="square" lIns="254" tIns="254" rIns="254" bIns="254" rtlCol="0" anchor="t">
             <a:normAutofit/>
           </a:bodyPr>
           <a:lstStyle/>
@@ -15602,7 +15871,7 @@
               <a:buNone/>
             </a:pPr>
             <a:r>
-              <a:rPr lang="en-US" sz="1550" dirty="0">
+              <a:rPr lang="en-US" sz="1320" dirty="0">
                 <a:solidFill>
                   <a:srgbClr val="17364A"/>
                 </a:solidFill>
@@ -15610,9 +15879,9 @@
                 <a:ea typeface="Aptos" pitchFamily="34" charset="-122"/>
                 <a:cs typeface="Aptos" pitchFamily="34" charset="-120"/>
               </a:rPr>
-              <a:t>Translate this concept into clear decision rights, review steps, documentation expectations, and escalation paths before an AI-supported workflow is approved.</a:t>
-            </a:r>
-            <a:endParaRPr lang="en-US" sz="1550" dirty="0"/>
+              <a:t>Translate this concept into clear decision rights, review steps, documentation expectations, and escalation paths before.</a:t>
+            </a:r>
+            <a:endParaRPr lang="en-US" sz="1320" dirty="0"/>
           </a:p>
         </p:txBody>
       </p:sp>
@@ -15913,49 +16182,58 @@
           <a:ln/>
         </p:spPr>
         <p:txBody>
-          <a:bodyPr wrap="square" lIns="635" tIns="635" rIns="635" bIns="635" rtlCol="0" anchor="t">
+          <a:bodyPr wrap="square" lIns="1016" tIns="1016" rIns="1016" bIns="1016" rtlCol="0" anchor="t">
             <a:normAutofit/>
           </a:bodyPr>
           <a:lstStyle/>
           <a:p>
+            <a:pPr indent="0" marL="0">
+              <a:buNone/>
+            </a:pPr>
             <a:r>
               <a:rPr lang="en-US" sz="2100" dirty="0">
                 <a:solidFill>
-                  <a:srgbClr val="17364A"/>
-                </a:solidFill>
-                <a:latin typeface="Aptos" pitchFamily="34" charset="0"/>
-                <a:ea typeface="Aptos" pitchFamily="34" charset="-122"/>
-                <a:cs typeface="Aptos" pitchFamily="34" charset="-120"/>
-              </a:rPr>
-              <a:t>A state health department wants to allow staff to use AI tools for program support, document review,.</a:t>
+                  <a:srgbClr val="003A63"/>
+                </a:solidFill>
+                <a:latin typeface="Aptos" pitchFamily="34" charset="0"/>
+                <a:ea typeface="Aptos" pitchFamily="34" charset="-122"/>
+                <a:cs typeface="Aptos" pitchFamily="34" charset="-120"/>
+              </a:rPr>
+              <a:t>• A state health department wants to allow staff to use AI tools for program support, document.</a:t>
             </a:r>
             <a:endParaRPr lang="en-US" sz="2100" dirty="0"/>
           </a:p>
           <a:p>
+            <a:pPr indent="0" marL="0">
+              <a:buNone/>
+            </a:pPr>
             <a:r>
               <a:rPr lang="en-US" sz="2100" dirty="0">
                 <a:solidFill>
-                  <a:srgbClr val="17364A"/>
-                </a:solidFill>
-                <a:latin typeface="Aptos" pitchFamily="34" charset="0"/>
-                <a:ea typeface="Aptos" pitchFamily="34" charset="-122"/>
-                <a:cs typeface="Aptos" pitchFamily="34" charset="-120"/>
-              </a:rPr>
-              <a:t>Without a governance charter, each program may develop its own rules.</a:t>
+                  <a:srgbClr val="003A63"/>
+                </a:solidFill>
+                <a:latin typeface="Aptos" pitchFamily="34" charset="0"/>
+                <a:ea typeface="Aptos" pitchFamily="34" charset="-122"/>
+                <a:cs typeface="Aptos" pitchFamily="34" charset="-120"/>
+              </a:rPr>
+              <a:t>• Without a governance charter, each program may develop its own rules.</a:t>
             </a:r>
             <a:endParaRPr lang="en-US" sz="2100" dirty="0"/>
           </a:p>
           <a:p>
+            <a:pPr indent="0" marL="0">
+              <a:buNone/>
+            </a:pPr>
             <a:r>
               <a:rPr lang="en-US" sz="2100" dirty="0">
                 <a:solidFill>
-                  <a:srgbClr val="17364A"/>
-                </a:solidFill>
-                <a:latin typeface="Aptos" pitchFamily="34" charset="0"/>
-                <a:ea typeface="Aptos" pitchFamily="34" charset="-122"/>
-                <a:cs typeface="Aptos" pitchFamily="34" charset="-120"/>
-              </a:rPr>
-              <a:t>The communications office may require human review, the surveillance program may prohibit sensitive.</a:t>
+                  <a:srgbClr val="003A63"/>
+                </a:solidFill>
+                <a:latin typeface="Aptos" pitchFamily="34" charset="0"/>
+                <a:ea typeface="Aptos" pitchFamily="34" charset="-122"/>
+                <a:cs typeface="Aptos" pitchFamily="34" charset="-120"/>
+              </a:rPr>
+              <a:t>• The communications office may require human review, the surveillance program may prohibit.</a:t>
             </a:r>
             <a:endParaRPr lang="en-US" sz="2100" dirty="0"/>
           </a:p>
@@ -16035,17 +16313,17 @@
         </p:nvSpPr>
         <p:spPr>
           <a:xfrm>
-            <a:off x="7799832" y="1828800"/>
-            <a:ext cx="3145536" cy="685800"/>
-          </a:xfrm>
-          <a:prstGeom prst="rect">
-            <a:avLst/>
-          </a:prstGeom>
-          <a:noFill/>
-          <a:ln/>
-        </p:spPr>
-        <p:txBody>
-          <a:bodyPr wrap="square" lIns="0" tIns="0" rIns="0" bIns="0" rtlCol="0" anchor="t">
+            <a:off x="7799832" y="1801368"/>
+            <a:ext cx="3145536" cy="758952"/>
+          </a:xfrm>
+          <a:prstGeom prst="rect">
+            <a:avLst/>
+          </a:prstGeom>
+          <a:noFill/>
+          <a:ln/>
+        </p:spPr>
+        <p:txBody>
+          <a:bodyPr wrap="square" lIns="254" tIns="254" rIns="254" bIns="254" rtlCol="0" anchor="t">
             <a:normAutofit/>
           </a:bodyPr>
           <a:lstStyle/>
@@ -16054,7 +16332,7 @@
               <a:buNone/>
             </a:pPr>
             <a:r>
-              <a:rPr lang="en-US" sz="1550" dirty="0">
+              <a:rPr lang="en-US" sz="1320" dirty="0">
                 <a:solidFill>
                   <a:srgbClr val="17364A"/>
                 </a:solidFill>
@@ -16064,7 +16342,7 @@
               </a:rPr>
               <a:t>A state health department wants to allow staff to use AI tools for program support, document review,.</a:t>
             </a:r>
-            <a:endParaRPr lang="en-US" sz="1550" dirty="0"/>
+            <a:endParaRPr lang="en-US" sz="1320" dirty="0"/>
           </a:p>
         </p:txBody>
       </p:sp>
@@ -16152,13 +16430,16 @@
           <a:ln/>
         </p:spPr>
         <p:txBody>
-          <a:bodyPr wrap="square" lIns="254" tIns="254" rIns="254" bIns="254" rtlCol="0" anchor="t">
+          <a:bodyPr wrap="square" lIns="508" tIns="508" rIns="508" bIns="508" rtlCol="0" anchor="t">
             <a:normAutofit/>
           </a:bodyPr>
           <a:lstStyle/>
           <a:p>
-            <a:r>
-              <a:rPr lang="en-US" sz="1380" dirty="0">
+            <a:pPr indent="0" marL="0">
+              <a:buNone/>
+            </a:pPr>
+            <a:r>
+              <a:rPr lang="en-US" sz="1220" dirty="0">
                 <a:solidFill>
                   <a:srgbClr val="17364A"/>
                 </a:solidFill>
@@ -16166,13 +16447,16 @@
                 <a:ea typeface="Aptos" pitchFamily="34" charset="-122"/>
                 <a:cs typeface="Aptos" pitchFamily="34" charset="-120"/>
               </a:rPr>
-              <a:t>A state health department wants to allow staff to use AI tools for program support,.</a:t>
-            </a:r>
-            <a:endParaRPr lang="en-US" sz="1380" dirty="0"/>
-          </a:p>
-          <a:p>
-            <a:r>
-              <a:rPr lang="en-US" sz="1380" dirty="0">
+              <a:t>A state health department wants to allow staff to use AI tools for.</a:t>
+            </a:r>
+            <a:endParaRPr lang="en-US" sz="1220" dirty="0"/>
+          </a:p>
+          <a:p>
+            <a:pPr indent="0" marL="0">
+              <a:buNone/>
+            </a:pPr>
+            <a:r>
+              <a:rPr lang="en-US" sz="1220" dirty="0">
                 <a:solidFill>
                   <a:srgbClr val="17364A"/>
                 </a:solidFill>
@@ -16180,13 +16464,16 @@
                 <a:ea typeface="Aptos" pitchFamily="34" charset="-122"/>
                 <a:cs typeface="Aptos" pitchFamily="34" charset="-120"/>
               </a:rPr>
-              <a:t>The communications office may require human review, the surveillance program may prohibit.</a:t>
-            </a:r>
-            <a:endParaRPr lang="en-US" sz="1380" dirty="0"/>
-          </a:p>
-          <a:p>
-            <a:r>
-              <a:rPr lang="en-US" sz="1380" dirty="0">
+              <a:t>The communications office may require human review, the.</a:t>
+            </a:r>
+            <a:endParaRPr lang="en-US" sz="1220" dirty="0"/>
+          </a:p>
+          <a:p>
+            <a:pPr indent="0" marL="0">
+              <a:buNone/>
+            </a:pPr>
+            <a:r>
+              <a:rPr lang="en-US" sz="1220" dirty="0">
                 <a:solidFill>
                   <a:srgbClr val="17364A"/>
                 </a:solidFill>
@@ -16194,9 +16481,9 @@
                 <a:ea typeface="Aptos" pitchFamily="34" charset="-122"/>
                 <a:cs typeface="Aptos" pitchFamily="34" charset="-120"/>
               </a:rPr>
-              <a:t>A governance operating model brings these decisions into one structured process.</a:t>
-            </a:r>
-            <a:endParaRPr lang="en-US" sz="1380" dirty="0"/>
+              <a:t>A governance operating model brings these decisions into one.</a:t>
+            </a:r>
+            <a:endParaRPr lang="en-US" sz="1220" dirty="0"/>
           </a:p>
         </p:txBody>
       </p:sp>
@@ -16274,17 +16561,17 @@
         </p:nvSpPr>
         <p:spPr>
           <a:xfrm>
-            <a:off x="7799832" y="5001768"/>
-            <a:ext cx="3145536" cy="502920"/>
-          </a:xfrm>
-          <a:prstGeom prst="rect">
-            <a:avLst/>
-          </a:prstGeom>
-          <a:noFill/>
-          <a:ln/>
-        </p:spPr>
-        <p:txBody>
-          <a:bodyPr wrap="square" lIns="0" tIns="0" rIns="0" bIns="0" rtlCol="0" anchor="t">
+            <a:off x="7799832" y="4974336"/>
+            <a:ext cx="3145536" cy="576072"/>
+          </a:xfrm>
+          <a:prstGeom prst="rect">
+            <a:avLst/>
+          </a:prstGeom>
+          <a:noFill/>
+          <a:ln/>
+        </p:spPr>
+        <p:txBody>
+          <a:bodyPr wrap="square" lIns="254" tIns="254" rIns="254" bIns="254" rtlCol="0" anchor="t">
             <a:normAutofit/>
           </a:bodyPr>
           <a:lstStyle/>
@@ -16293,7 +16580,7 @@
               <a:buNone/>
             </a:pPr>
             <a:r>
-              <a:rPr lang="en-US" sz="1550" dirty="0">
+              <a:rPr lang="en-US" sz="1320" dirty="0">
                 <a:solidFill>
                   <a:srgbClr val="17364A"/>
                 </a:solidFill>
@@ -16301,9 +16588,9 @@
                 <a:ea typeface="Aptos" pitchFamily="34" charset="-122"/>
                 <a:cs typeface="Aptos" pitchFamily="34" charset="-120"/>
               </a:rPr>
-              <a:t>Translate this concept into clear decision rights, review steps, documentation expectations, and escalation paths before an AI-supported workflow is approved.</a:t>
-            </a:r>
-            <a:endParaRPr lang="en-US" sz="1550" dirty="0"/>
+              <a:t>Translate this concept into clear decision rights, review steps, documentation expectations, and escalation paths before.</a:t>
+            </a:r>
+            <a:endParaRPr lang="en-US" sz="1320" dirty="0"/>
           </a:p>
         </p:txBody>
       </p:sp>

--- a/downloads/presentations/modules/gov-400.pptx
+++ b/downloads/presentations/modules/gov-400.pptx
@@ -3319,11 +3319,11 @@
         <p:spPr>
           <a:xfrm>
             <a:off x="7635240" y="1325880"/>
-            <a:ext cx="3474720" cy="1325880"/>
+            <a:ext cx="3474720" cy="1207008"/>
           </a:xfrm>
           <a:prstGeom prst="roundRect">
             <a:avLst>
-              <a:gd name="adj" fmla="val 8276"/>
+              <a:gd name="adj" fmla="val 9091"/>
             </a:avLst>
           </a:prstGeom>
           <a:solidFill>
@@ -3385,7 +3385,7 @@
         <p:spPr>
           <a:xfrm>
             <a:off x="7799832" y="1801368"/>
-            <a:ext cx="3145536" cy="758952"/>
+            <a:ext cx="3145536" cy="640080"/>
           </a:xfrm>
           <a:prstGeom prst="rect">
             <a:avLst/>
@@ -3425,12 +3425,12 @@
         </p:nvSpPr>
         <p:spPr>
           <a:xfrm>
-            <a:off x="7635240" y="2788920"/>
-            <a:ext cx="3474720" cy="1536192"/>
+            <a:off x="7635240" y="2670048"/>
+            <a:ext cx="3474720" cy="1377086"/>
           </a:xfrm>
           <a:prstGeom prst="roundRect">
             <a:avLst>
-              <a:gd name="adj" fmla="val 7143"/>
+              <a:gd name="adj" fmla="val 7968"/>
             </a:avLst>
           </a:prstGeom>
           <a:solidFill>
@@ -3452,7 +3452,7 @@
         </p:nvSpPr>
         <p:spPr>
           <a:xfrm>
-            <a:off x="7799832" y="2935224"/>
+            <a:off x="7799832" y="2816352"/>
             <a:ext cx="3145536" cy="256032"/>
           </a:xfrm>
           <a:prstGeom prst="rect">
@@ -3491,8 +3491,8 @@
         </p:nvSpPr>
         <p:spPr>
           <a:xfrm>
-            <a:off x="7818120" y="3300984"/>
-            <a:ext cx="3090672" cy="877824"/>
+            <a:off x="7818120" y="3182112"/>
+            <a:ext cx="3090672" cy="718718"/>
           </a:xfrm>
           <a:prstGeom prst="rect">
             <a:avLst/>
@@ -3566,12 +3566,12 @@
         </p:nvSpPr>
         <p:spPr>
           <a:xfrm>
-            <a:off x="7635240" y="4498848"/>
-            <a:ext cx="3474720" cy="1143000"/>
+            <a:off x="7635240" y="4184294"/>
+            <a:ext cx="3474720" cy="1466698"/>
           </a:xfrm>
           <a:prstGeom prst="roundRect">
             <a:avLst>
-              <a:gd name="adj" fmla="val 9600"/>
+              <a:gd name="adj" fmla="val 7481"/>
             </a:avLst>
           </a:prstGeom>
           <a:solidFill>
@@ -3593,7 +3593,7 @@
         </p:nvSpPr>
         <p:spPr>
           <a:xfrm>
-            <a:off x="7799832" y="4645152"/>
+            <a:off x="7799832" y="4330598"/>
             <a:ext cx="3145536" cy="256032"/>
           </a:xfrm>
           <a:prstGeom prst="rect">
@@ -3632,8 +3632,8 @@
         </p:nvSpPr>
         <p:spPr>
           <a:xfrm>
-            <a:off x="7799832" y="4974336"/>
-            <a:ext cx="3145536" cy="576072"/>
+            <a:off x="7799832" y="4659782"/>
+            <a:ext cx="3145536" cy="899770"/>
           </a:xfrm>
           <a:prstGeom prst="rect">
             <a:avLst/>
@@ -3659,7 +3659,7 @@
                 <a:ea typeface="Aptos" pitchFamily="34" charset="-122"/>
                 <a:cs typeface="Aptos" pitchFamily="34" charset="-120"/>
               </a:rPr>
-              <a:t>Translate this concept into clear decision rights, review steps, documentation expectations, and escalation paths before.</a:t>
+              <a:t>Translate this concept into clear decision rights, review steps, documentation expectations, and escalation paths before an AI-supported workflow is approved.</a:t>
             </a:r>
             <a:endParaRPr lang="en-US" sz="1320" dirty="0"/>
           </a:p>
@@ -4028,11 +4028,11 @@
         <p:spPr>
           <a:xfrm>
             <a:off x="7635240" y="1325880"/>
-            <a:ext cx="3474720" cy="1325880"/>
+            <a:ext cx="3474720" cy="1207008"/>
           </a:xfrm>
           <a:prstGeom prst="roundRect">
             <a:avLst>
-              <a:gd name="adj" fmla="val 8276"/>
+              <a:gd name="adj" fmla="val 9091"/>
             </a:avLst>
           </a:prstGeom>
           <a:solidFill>
@@ -4094,7 +4094,7 @@
         <p:spPr>
           <a:xfrm>
             <a:off x="7799832" y="1801368"/>
-            <a:ext cx="3145536" cy="758952"/>
+            <a:ext cx="3145536" cy="640080"/>
           </a:xfrm>
           <a:prstGeom prst="rect">
             <a:avLst/>
@@ -4134,12 +4134,12 @@
         </p:nvSpPr>
         <p:spPr>
           <a:xfrm>
-            <a:off x="7635240" y="2788920"/>
-            <a:ext cx="3474720" cy="1536192"/>
+            <a:off x="7635240" y="2670048"/>
+            <a:ext cx="3474720" cy="1377086"/>
           </a:xfrm>
           <a:prstGeom prst="roundRect">
             <a:avLst>
-              <a:gd name="adj" fmla="val 7143"/>
+              <a:gd name="adj" fmla="val 7968"/>
             </a:avLst>
           </a:prstGeom>
           <a:solidFill>
@@ -4161,7 +4161,7 @@
         </p:nvSpPr>
         <p:spPr>
           <a:xfrm>
-            <a:off x="7799832" y="2935224"/>
+            <a:off x="7799832" y="2816352"/>
             <a:ext cx="3145536" cy="256032"/>
           </a:xfrm>
           <a:prstGeom prst="rect">
@@ -4200,8 +4200,8 @@
         </p:nvSpPr>
         <p:spPr>
           <a:xfrm>
-            <a:off x="7818120" y="3300984"/>
-            <a:ext cx="3090672" cy="877824"/>
+            <a:off x="7818120" y="3182112"/>
+            <a:ext cx="3090672" cy="718718"/>
           </a:xfrm>
           <a:prstGeom prst="rect">
             <a:avLst/>
@@ -4275,12 +4275,12 @@
         </p:nvSpPr>
         <p:spPr>
           <a:xfrm>
-            <a:off x="7635240" y="4498848"/>
-            <a:ext cx="3474720" cy="1143000"/>
+            <a:off x="7635240" y="4184294"/>
+            <a:ext cx="3474720" cy="1466698"/>
           </a:xfrm>
           <a:prstGeom prst="roundRect">
             <a:avLst>
-              <a:gd name="adj" fmla="val 9600"/>
+              <a:gd name="adj" fmla="val 7481"/>
             </a:avLst>
           </a:prstGeom>
           <a:solidFill>
@@ -4302,7 +4302,7 @@
         </p:nvSpPr>
         <p:spPr>
           <a:xfrm>
-            <a:off x="7799832" y="4645152"/>
+            <a:off x="7799832" y="4330598"/>
             <a:ext cx="3145536" cy="256032"/>
           </a:xfrm>
           <a:prstGeom prst="rect">
@@ -4341,8 +4341,8 @@
         </p:nvSpPr>
         <p:spPr>
           <a:xfrm>
-            <a:off x="7799832" y="4974336"/>
-            <a:ext cx="3145536" cy="576072"/>
+            <a:off x="7799832" y="4659782"/>
+            <a:ext cx="3145536" cy="899770"/>
           </a:xfrm>
           <a:prstGeom prst="rect">
             <a:avLst/>
@@ -4368,7 +4368,7 @@
                 <a:ea typeface="Aptos" pitchFamily="34" charset="-122"/>
                 <a:cs typeface="Aptos" pitchFamily="34" charset="-120"/>
               </a:rPr>
-              <a:t>Translate this concept into clear decision rights, review steps, documentation expectations, and escalation paths before.</a:t>
+              <a:t>Translate this concept into clear decision rights, review steps, documentation expectations, and escalation paths before an AI-supported workflow is approved.</a:t>
             </a:r>
             <a:endParaRPr lang="en-US" sz="1320" dirty="0"/>
           </a:p>
@@ -4737,11 +4737,11 @@
         <p:spPr>
           <a:xfrm>
             <a:off x="7635240" y="1325880"/>
-            <a:ext cx="3474720" cy="1325880"/>
+            <a:ext cx="3474720" cy="1255471"/>
           </a:xfrm>
           <a:prstGeom prst="roundRect">
             <a:avLst>
-              <a:gd name="adj" fmla="val 8276"/>
+              <a:gd name="adj" fmla="val 8740"/>
             </a:avLst>
           </a:prstGeom>
           <a:solidFill>
@@ -4803,7 +4803,7 @@
         <p:spPr>
           <a:xfrm>
             <a:off x="7799832" y="1801368"/>
-            <a:ext cx="3145536" cy="758952"/>
+            <a:ext cx="3145536" cy="688543"/>
           </a:xfrm>
           <a:prstGeom prst="rect">
             <a:avLst/>
@@ -4843,12 +4843,12 @@
         </p:nvSpPr>
         <p:spPr>
           <a:xfrm>
-            <a:off x="7635240" y="2788920"/>
-            <a:ext cx="3474720" cy="1536192"/>
+            <a:off x="7635240" y="2718511"/>
+            <a:ext cx="3474720" cy="1328623"/>
           </a:xfrm>
           <a:prstGeom prst="roundRect">
             <a:avLst>
-              <a:gd name="adj" fmla="val 7143"/>
+              <a:gd name="adj" fmla="val 8259"/>
             </a:avLst>
           </a:prstGeom>
           <a:solidFill>
@@ -4870,7 +4870,7 @@
         </p:nvSpPr>
         <p:spPr>
           <a:xfrm>
-            <a:off x="7799832" y="2935224"/>
+            <a:off x="7799832" y="2864815"/>
             <a:ext cx="3145536" cy="256032"/>
           </a:xfrm>
           <a:prstGeom prst="rect">
@@ -4909,8 +4909,8 @@
         </p:nvSpPr>
         <p:spPr>
           <a:xfrm>
-            <a:off x="7818120" y="3300984"/>
-            <a:ext cx="3090672" cy="877824"/>
+            <a:off x="7818120" y="3230575"/>
+            <a:ext cx="3090672" cy="670255"/>
           </a:xfrm>
           <a:prstGeom prst="rect">
             <a:avLst/>
@@ -4984,12 +4984,12 @@
         </p:nvSpPr>
         <p:spPr>
           <a:xfrm>
-            <a:off x="7635240" y="4498848"/>
-            <a:ext cx="3474720" cy="1143000"/>
+            <a:off x="7635240" y="4184294"/>
+            <a:ext cx="3474720" cy="1466698"/>
           </a:xfrm>
           <a:prstGeom prst="roundRect">
             <a:avLst>
-              <a:gd name="adj" fmla="val 9600"/>
+              <a:gd name="adj" fmla="val 7481"/>
             </a:avLst>
           </a:prstGeom>
           <a:solidFill>
@@ -5011,7 +5011,7 @@
         </p:nvSpPr>
         <p:spPr>
           <a:xfrm>
-            <a:off x="7799832" y="4645152"/>
+            <a:off x="7799832" y="4330598"/>
             <a:ext cx="3145536" cy="256032"/>
           </a:xfrm>
           <a:prstGeom prst="rect">
@@ -5050,8 +5050,8 @@
         </p:nvSpPr>
         <p:spPr>
           <a:xfrm>
-            <a:off x="7799832" y="4974336"/>
-            <a:ext cx="3145536" cy="576072"/>
+            <a:off x="7799832" y="4659782"/>
+            <a:ext cx="3145536" cy="899770"/>
           </a:xfrm>
           <a:prstGeom prst="rect">
             <a:avLst/>
@@ -5077,7 +5077,7 @@
                 <a:ea typeface="Aptos" pitchFamily="34" charset="-122"/>
                 <a:cs typeface="Aptos" pitchFamily="34" charset="-120"/>
               </a:rPr>
-              <a:t>Translate this concept into clear decision rights, review steps, documentation expectations, and escalation paths before.</a:t>
+              <a:t>Translate this concept into clear decision rights, review steps, documentation expectations, and escalation paths before an AI-supported workflow is approved.</a:t>
             </a:r>
             <a:endParaRPr lang="en-US" sz="1320" dirty="0"/>
           </a:p>
@@ -5446,11 +5446,11 @@
         <p:spPr>
           <a:xfrm>
             <a:off x="7635240" y="1325880"/>
-            <a:ext cx="3474720" cy="1325880"/>
+            <a:ext cx="3474720" cy="1255471"/>
           </a:xfrm>
           <a:prstGeom prst="roundRect">
             <a:avLst>
-              <a:gd name="adj" fmla="val 8276"/>
+              <a:gd name="adj" fmla="val 8740"/>
             </a:avLst>
           </a:prstGeom>
           <a:solidFill>
@@ -5512,7 +5512,7 @@
         <p:spPr>
           <a:xfrm>
             <a:off x="7799832" y="1801368"/>
-            <a:ext cx="3145536" cy="758952"/>
+            <a:ext cx="3145536" cy="688543"/>
           </a:xfrm>
           <a:prstGeom prst="rect">
             <a:avLst/>
@@ -5552,12 +5552,12 @@
         </p:nvSpPr>
         <p:spPr>
           <a:xfrm>
-            <a:off x="7635240" y="2788920"/>
-            <a:ext cx="3474720" cy="1536192"/>
+            <a:off x="7635240" y="2718511"/>
+            <a:ext cx="3474720" cy="1328623"/>
           </a:xfrm>
           <a:prstGeom prst="roundRect">
             <a:avLst>
-              <a:gd name="adj" fmla="val 7143"/>
+              <a:gd name="adj" fmla="val 8259"/>
             </a:avLst>
           </a:prstGeom>
           <a:solidFill>
@@ -5579,7 +5579,7 @@
         </p:nvSpPr>
         <p:spPr>
           <a:xfrm>
-            <a:off x="7799832" y="2935224"/>
+            <a:off x="7799832" y="2864815"/>
             <a:ext cx="3145536" cy="256032"/>
           </a:xfrm>
           <a:prstGeom prst="rect">
@@ -5618,8 +5618,8 @@
         </p:nvSpPr>
         <p:spPr>
           <a:xfrm>
-            <a:off x="7818120" y="3300984"/>
-            <a:ext cx="3090672" cy="877824"/>
+            <a:off x="7818120" y="3230575"/>
+            <a:ext cx="3090672" cy="670255"/>
           </a:xfrm>
           <a:prstGeom prst="rect">
             <a:avLst/>
@@ -5693,12 +5693,12 @@
         </p:nvSpPr>
         <p:spPr>
           <a:xfrm>
-            <a:off x="7635240" y="4498848"/>
-            <a:ext cx="3474720" cy="1143000"/>
+            <a:off x="7635240" y="4184294"/>
+            <a:ext cx="3474720" cy="1466698"/>
           </a:xfrm>
           <a:prstGeom prst="roundRect">
             <a:avLst>
-              <a:gd name="adj" fmla="val 9600"/>
+              <a:gd name="adj" fmla="val 7481"/>
             </a:avLst>
           </a:prstGeom>
           <a:solidFill>
@@ -5720,7 +5720,7 @@
         </p:nvSpPr>
         <p:spPr>
           <a:xfrm>
-            <a:off x="7799832" y="4645152"/>
+            <a:off x="7799832" y="4330598"/>
             <a:ext cx="3145536" cy="256032"/>
           </a:xfrm>
           <a:prstGeom prst="rect">
@@ -5759,8 +5759,8 @@
         </p:nvSpPr>
         <p:spPr>
           <a:xfrm>
-            <a:off x="7799832" y="4974336"/>
-            <a:ext cx="3145536" cy="576072"/>
+            <a:off x="7799832" y="4659782"/>
+            <a:ext cx="3145536" cy="899770"/>
           </a:xfrm>
           <a:prstGeom prst="rect">
             <a:avLst/>
@@ -5786,7 +5786,7 @@
                 <a:ea typeface="Aptos" pitchFamily="34" charset="-122"/>
                 <a:cs typeface="Aptos" pitchFamily="34" charset="-120"/>
               </a:rPr>
-              <a:t>Translate this concept into clear decision rights, review steps, documentation expectations, and escalation paths before.</a:t>
+              <a:t>Translate this concept into clear decision rights, review steps, documentation expectations, and escalation paths before an AI-supported workflow is approved.</a:t>
             </a:r>
             <a:endParaRPr lang="en-US" sz="1320" dirty="0"/>
           </a:p>
@@ -6138,11 +6138,11 @@
         <p:spPr>
           <a:xfrm>
             <a:off x="7635240" y="1325880"/>
-            <a:ext cx="3474720" cy="1325880"/>
+            <a:ext cx="3474720" cy="1207008"/>
           </a:xfrm>
           <a:prstGeom prst="roundRect">
             <a:avLst>
-              <a:gd name="adj" fmla="val 8276"/>
+              <a:gd name="adj" fmla="val 9091"/>
             </a:avLst>
           </a:prstGeom>
           <a:solidFill>
@@ -6204,7 +6204,7 @@
         <p:spPr>
           <a:xfrm>
             <a:off x="7799832" y="1801368"/>
-            <a:ext cx="3145536" cy="758952"/>
+            <a:ext cx="3145536" cy="640080"/>
           </a:xfrm>
           <a:prstGeom prst="rect">
             <a:avLst/>
@@ -6230,7 +6230,7 @@
                 <a:ea typeface="Aptos" pitchFamily="34" charset="-122"/>
                 <a:cs typeface="Aptos" pitchFamily="34" charset="-120"/>
               </a:rPr>
-              <a:t>Which staff, partners, or communities would be affected if this issue were handled poorly?</a:t>
+              <a:t>Which staff, partners, or communities would be affected if this issue were handled.</a:t>
             </a:r>
             <a:endParaRPr lang="en-US" sz="1320" dirty="0"/>
           </a:p>
@@ -6244,12 +6244,12 @@
         </p:nvSpPr>
         <p:spPr>
           <a:xfrm>
-            <a:off x="7635240" y="2788920"/>
-            <a:ext cx="3474720" cy="1536192"/>
+            <a:off x="7635240" y="2670048"/>
+            <a:ext cx="3474720" cy="1377086"/>
           </a:xfrm>
           <a:prstGeom prst="roundRect">
             <a:avLst>
-              <a:gd name="adj" fmla="val 7143"/>
+              <a:gd name="adj" fmla="val 7968"/>
             </a:avLst>
           </a:prstGeom>
           <a:solidFill>
@@ -6271,7 +6271,7 @@
         </p:nvSpPr>
         <p:spPr>
           <a:xfrm>
-            <a:off x="7799832" y="2935224"/>
+            <a:off x="7799832" y="2816352"/>
             <a:ext cx="3145536" cy="256032"/>
           </a:xfrm>
           <a:prstGeom prst="rect">
@@ -6310,8 +6310,8 @@
         </p:nvSpPr>
         <p:spPr>
           <a:xfrm>
-            <a:off x="7818120" y="3300984"/>
-            <a:ext cx="3090672" cy="877824"/>
+            <a:off x="7818120" y="3182112"/>
+            <a:ext cx="3090672" cy="718718"/>
           </a:xfrm>
           <a:prstGeom prst="rect">
             <a:avLst/>
@@ -6368,12 +6368,12 @@
         </p:nvSpPr>
         <p:spPr>
           <a:xfrm>
-            <a:off x="7635240" y="4498848"/>
-            <a:ext cx="3474720" cy="1143000"/>
+            <a:off x="7635240" y="4184294"/>
+            <a:ext cx="3474720" cy="1466698"/>
           </a:xfrm>
           <a:prstGeom prst="roundRect">
             <a:avLst>
-              <a:gd name="adj" fmla="val 9600"/>
+              <a:gd name="adj" fmla="val 7481"/>
             </a:avLst>
           </a:prstGeom>
           <a:solidFill>
@@ -6395,7 +6395,7 @@
         </p:nvSpPr>
         <p:spPr>
           <a:xfrm>
-            <a:off x="7799832" y="4645152"/>
+            <a:off x="7799832" y="4330598"/>
             <a:ext cx="3145536" cy="256032"/>
           </a:xfrm>
           <a:prstGeom prst="rect">
@@ -6434,8 +6434,8 @@
         </p:nvSpPr>
         <p:spPr>
           <a:xfrm>
-            <a:off x="7799832" y="4974336"/>
-            <a:ext cx="3145536" cy="576072"/>
+            <a:off x="7799832" y="4659782"/>
+            <a:ext cx="3145536" cy="899770"/>
           </a:xfrm>
           <a:prstGeom prst="rect">
             <a:avLst/>
@@ -6461,7 +6461,7 @@
                 <a:ea typeface="Aptos" pitchFamily="34" charset="-122"/>
                 <a:cs typeface="Aptos" pitchFamily="34" charset="-120"/>
               </a:rPr>
-              <a:t>Translate this concept into clear decision rights, review steps, documentation expectations, and escalation paths before.</a:t>
+              <a:t>Translate this concept into clear decision rights, review steps, documentation expectations, and escalation paths before an AI-supported workflow is approved.</a:t>
             </a:r>
             <a:endParaRPr lang="en-US" sz="1320" dirty="0"/>
           </a:p>
@@ -6813,11 +6813,11 @@
         <p:spPr>
           <a:xfrm>
             <a:off x="7635240" y="1325880"/>
-            <a:ext cx="3474720" cy="1325880"/>
+            <a:ext cx="3474720" cy="1207008"/>
           </a:xfrm>
           <a:prstGeom prst="roundRect">
             <a:avLst>
-              <a:gd name="adj" fmla="val 8276"/>
+              <a:gd name="adj" fmla="val 9091"/>
             </a:avLst>
           </a:prstGeom>
           <a:solidFill>
@@ -6879,7 +6879,7 @@
         <p:spPr>
           <a:xfrm>
             <a:off x="7799832" y="1801368"/>
-            <a:ext cx="3145536" cy="758952"/>
+            <a:ext cx="3145536" cy="640080"/>
           </a:xfrm>
           <a:prstGeom prst="rect">
             <a:avLst/>
@@ -6919,12 +6919,12 @@
         </p:nvSpPr>
         <p:spPr>
           <a:xfrm>
-            <a:off x="7635240" y="2788920"/>
-            <a:ext cx="3474720" cy="1536192"/>
+            <a:off x="7635240" y="2670048"/>
+            <a:ext cx="3474720" cy="1377086"/>
           </a:xfrm>
           <a:prstGeom prst="roundRect">
             <a:avLst>
-              <a:gd name="adj" fmla="val 7143"/>
+              <a:gd name="adj" fmla="val 7968"/>
             </a:avLst>
           </a:prstGeom>
           <a:solidFill>
@@ -6946,7 +6946,7 @@
         </p:nvSpPr>
         <p:spPr>
           <a:xfrm>
-            <a:off x="7799832" y="2935224"/>
+            <a:off x="7799832" y="2816352"/>
             <a:ext cx="3145536" cy="256032"/>
           </a:xfrm>
           <a:prstGeom prst="rect">
@@ -6985,8 +6985,8 @@
         </p:nvSpPr>
         <p:spPr>
           <a:xfrm>
-            <a:off x="7818120" y="3300984"/>
-            <a:ext cx="3090672" cy="877824"/>
+            <a:off x="7818120" y="3182112"/>
+            <a:ext cx="3090672" cy="718718"/>
           </a:xfrm>
           <a:prstGeom prst="rect">
             <a:avLst/>
@@ -7043,12 +7043,12 @@
         </p:nvSpPr>
         <p:spPr>
           <a:xfrm>
-            <a:off x="7635240" y="4498848"/>
-            <a:ext cx="3474720" cy="1143000"/>
+            <a:off x="7635240" y="4184294"/>
+            <a:ext cx="3474720" cy="1466698"/>
           </a:xfrm>
           <a:prstGeom prst="roundRect">
             <a:avLst>
-              <a:gd name="adj" fmla="val 9600"/>
+              <a:gd name="adj" fmla="val 7481"/>
             </a:avLst>
           </a:prstGeom>
           <a:solidFill>
@@ -7070,7 +7070,7 @@
         </p:nvSpPr>
         <p:spPr>
           <a:xfrm>
-            <a:off x="7799832" y="4645152"/>
+            <a:off x="7799832" y="4330598"/>
             <a:ext cx="3145536" cy="256032"/>
           </a:xfrm>
           <a:prstGeom prst="rect">
@@ -7109,8 +7109,8 @@
         </p:nvSpPr>
         <p:spPr>
           <a:xfrm>
-            <a:off x="7799832" y="4974336"/>
-            <a:ext cx="3145536" cy="576072"/>
+            <a:off x="7799832" y="4659782"/>
+            <a:ext cx="3145536" cy="899770"/>
           </a:xfrm>
           <a:prstGeom prst="rect">
             <a:avLst/>
@@ -7136,7 +7136,7 @@
                 <a:ea typeface="Aptos" pitchFamily="34" charset="-122"/>
                 <a:cs typeface="Aptos" pitchFamily="34" charset="-120"/>
               </a:rPr>
-              <a:t>Use the assignment to test whether you can explain the concept, apply it to a realistic public health situation, and.</a:t>
+              <a:t>Use the assignment to test whether you can explain the concept, apply it to a realistic public health situation, and identify what would need review before the work moves forward.</a:t>
             </a:r>
             <a:endParaRPr lang="en-US" sz="1320" dirty="0"/>
           </a:p>
@@ -7505,11 +7505,11 @@
         <p:spPr>
           <a:xfrm>
             <a:off x="7635240" y="1325880"/>
-            <a:ext cx="3474720" cy="1325880"/>
+            <a:ext cx="3474720" cy="1207008"/>
           </a:xfrm>
           <a:prstGeom prst="roundRect">
             <a:avLst>
-              <a:gd name="adj" fmla="val 8276"/>
+              <a:gd name="adj" fmla="val 9091"/>
             </a:avLst>
           </a:prstGeom>
           <a:solidFill>
@@ -7571,7 +7571,7 @@
         <p:spPr>
           <a:xfrm>
             <a:off x="7799832" y="1801368"/>
-            <a:ext cx="3145536" cy="758952"/>
+            <a:ext cx="3145536" cy="640080"/>
           </a:xfrm>
           <a:prstGeom prst="rect">
             <a:avLst/>
@@ -7611,12 +7611,12 @@
         </p:nvSpPr>
         <p:spPr>
           <a:xfrm>
-            <a:off x="7635240" y="2788920"/>
-            <a:ext cx="3474720" cy="1536192"/>
+            <a:off x="7635240" y="2670048"/>
+            <a:ext cx="3474720" cy="1377086"/>
           </a:xfrm>
           <a:prstGeom prst="roundRect">
             <a:avLst>
-              <a:gd name="adj" fmla="val 7143"/>
+              <a:gd name="adj" fmla="val 7968"/>
             </a:avLst>
           </a:prstGeom>
           <a:solidFill>
@@ -7638,7 +7638,7 @@
         </p:nvSpPr>
         <p:spPr>
           <a:xfrm>
-            <a:off x="7799832" y="2935224"/>
+            <a:off x="7799832" y="2816352"/>
             <a:ext cx="3145536" cy="256032"/>
           </a:xfrm>
           <a:prstGeom prst="rect">
@@ -7677,8 +7677,8 @@
         </p:nvSpPr>
         <p:spPr>
           <a:xfrm>
-            <a:off x="7818120" y="3300984"/>
-            <a:ext cx="3090672" cy="877824"/>
+            <a:off x="7818120" y="3182112"/>
+            <a:ext cx="3090672" cy="718718"/>
           </a:xfrm>
           <a:prstGeom prst="rect">
             <a:avLst/>
@@ -7735,12 +7735,12 @@
         </p:nvSpPr>
         <p:spPr>
           <a:xfrm>
-            <a:off x="7635240" y="4498848"/>
-            <a:ext cx="3474720" cy="1143000"/>
+            <a:off x="7635240" y="4184294"/>
+            <a:ext cx="3474720" cy="1466698"/>
           </a:xfrm>
           <a:prstGeom prst="roundRect">
             <a:avLst>
-              <a:gd name="adj" fmla="val 9600"/>
+              <a:gd name="adj" fmla="val 7481"/>
             </a:avLst>
           </a:prstGeom>
           <a:solidFill>
@@ -7762,7 +7762,7 @@
         </p:nvSpPr>
         <p:spPr>
           <a:xfrm>
-            <a:off x="7799832" y="4645152"/>
+            <a:off x="7799832" y="4330598"/>
             <a:ext cx="3145536" cy="256032"/>
           </a:xfrm>
           <a:prstGeom prst="rect">
@@ -7801,8 +7801,8 @@
         </p:nvSpPr>
         <p:spPr>
           <a:xfrm>
-            <a:off x="7799832" y="4974336"/>
-            <a:ext cx="3145536" cy="576072"/>
+            <a:off x="7799832" y="4659782"/>
+            <a:ext cx="3145536" cy="899770"/>
           </a:xfrm>
           <a:prstGeom prst="rect">
             <a:avLst/>
@@ -7828,7 +7828,7 @@
                 <a:ea typeface="Aptos" pitchFamily="34" charset="-122"/>
                 <a:cs typeface="Aptos" pitchFamily="34" charset="-120"/>
               </a:rPr>
-              <a:t>Translate this concept into clear decision rights, review steps, documentation expectations, and escalation paths before.</a:t>
+              <a:t>Translate this concept into clear decision rights, review steps, documentation expectations, and escalation paths before an AI-supported workflow is approved.</a:t>
             </a:r>
             <a:endParaRPr lang="en-US" sz="1320" dirty="0"/>
           </a:p>
@@ -8163,11 +8163,11 @@
         <p:spPr>
           <a:xfrm>
             <a:off x="7635240" y="1325880"/>
-            <a:ext cx="3474720" cy="1325880"/>
+            <a:ext cx="3474720" cy="1255471"/>
           </a:xfrm>
           <a:prstGeom prst="roundRect">
             <a:avLst>
-              <a:gd name="adj" fmla="val 8276"/>
+              <a:gd name="adj" fmla="val 8740"/>
             </a:avLst>
           </a:prstGeom>
           <a:solidFill>
@@ -8229,7 +8229,7 @@
         <p:spPr>
           <a:xfrm>
             <a:off x="7799832" y="1801368"/>
-            <a:ext cx="3145536" cy="758952"/>
+            <a:ext cx="3145536" cy="688543"/>
           </a:xfrm>
           <a:prstGeom prst="rect">
             <a:avLst/>
@@ -8269,12 +8269,12 @@
         </p:nvSpPr>
         <p:spPr>
           <a:xfrm>
-            <a:off x="7635240" y="2788920"/>
-            <a:ext cx="3474720" cy="1536192"/>
+            <a:off x="7635240" y="2718511"/>
+            <a:ext cx="3474720" cy="1328623"/>
           </a:xfrm>
           <a:prstGeom prst="roundRect">
             <a:avLst>
-              <a:gd name="adj" fmla="val 7143"/>
+              <a:gd name="adj" fmla="val 8259"/>
             </a:avLst>
           </a:prstGeom>
           <a:solidFill>
@@ -8296,7 +8296,7 @@
         </p:nvSpPr>
         <p:spPr>
           <a:xfrm>
-            <a:off x="7799832" y="2935224"/>
+            <a:off x="7799832" y="2864815"/>
             <a:ext cx="3145536" cy="256032"/>
           </a:xfrm>
           <a:prstGeom prst="rect">
@@ -8335,8 +8335,8 @@
         </p:nvSpPr>
         <p:spPr>
           <a:xfrm>
-            <a:off x="7818120" y="3300984"/>
-            <a:ext cx="3090672" cy="877824"/>
+            <a:off x="7818120" y="3230575"/>
+            <a:ext cx="3090672" cy="670255"/>
           </a:xfrm>
           <a:prstGeom prst="rect">
             <a:avLst/>
@@ -8376,12 +8376,12 @@
         </p:nvSpPr>
         <p:spPr>
           <a:xfrm>
-            <a:off x="7635240" y="4498848"/>
-            <a:ext cx="3474720" cy="1143000"/>
+            <a:off x="7635240" y="4184294"/>
+            <a:ext cx="3474720" cy="1466698"/>
           </a:xfrm>
           <a:prstGeom prst="roundRect">
             <a:avLst>
-              <a:gd name="adj" fmla="val 9600"/>
+              <a:gd name="adj" fmla="val 7481"/>
             </a:avLst>
           </a:prstGeom>
           <a:solidFill>
@@ -8403,7 +8403,7 @@
         </p:nvSpPr>
         <p:spPr>
           <a:xfrm>
-            <a:off x="7799832" y="4645152"/>
+            <a:off x="7799832" y="4330598"/>
             <a:ext cx="3145536" cy="256032"/>
           </a:xfrm>
           <a:prstGeom prst="rect">
@@ -8442,8 +8442,8 @@
         </p:nvSpPr>
         <p:spPr>
           <a:xfrm>
-            <a:off x="7799832" y="4974336"/>
-            <a:ext cx="3145536" cy="576072"/>
+            <a:off x="7799832" y="4659782"/>
+            <a:ext cx="3145536" cy="899770"/>
           </a:xfrm>
           <a:prstGeom prst="rect">
             <a:avLst/>
@@ -8469,7 +8469,7 @@
                 <a:ea typeface="Aptos" pitchFamily="34" charset="-122"/>
                 <a:cs typeface="Aptos" pitchFamily="34" charset="-120"/>
               </a:rPr>
-              <a:t>Translate this concept into clear decision rights, review steps, documentation expectations, and escalation paths before.</a:t>
+              <a:t>Translate this concept into clear decision rights, review steps, documentation expectations, and escalation paths before an AI-supported workflow is approved.</a:t>
             </a:r>
             <a:endParaRPr lang="en-US" sz="1320" dirty="0"/>
           </a:p>
@@ -8804,11 +8804,11 @@
         <p:spPr>
           <a:xfrm>
             <a:off x="7635240" y="1325880"/>
-            <a:ext cx="3474720" cy="1325880"/>
+            <a:ext cx="3474720" cy="1255471"/>
           </a:xfrm>
           <a:prstGeom prst="roundRect">
             <a:avLst>
-              <a:gd name="adj" fmla="val 8276"/>
+              <a:gd name="adj" fmla="val 8740"/>
             </a:avLst>
           </a:prstGeom>
           <a:solidFill>
@@ -8870,7 +8870,7 @@
         <p:spPr>
           <a:xfrm>
             <a:off x="7799832" y="1801368"/>
-            <a:ext cx="3145536" cy="758952"/>
+            <a:ext cx="3145536" cy="688543"/>
           </a:xfrm>
           <a:prstGeom prst="rect">
             <a:avLst/>
@@ -8910,12 +8910,12 @@
         </p:nvSpPr>
         <p:spPr>
           <a:xfrm>
-            <a:off x="7635240" y="2788920"/>
-            <a:ext cx="3474720" cy="1536192"/>
+            <a:off x="7635240" y="2718511"/>
+            <a:ext cx="3474720" cy="1328623"/>
           </a:xfrm>
           <a:prstGeom prst="roundRect">
             <a:avLst>
-              <a:gd name="adj" fmla="val 7143"/>
+              <a:gd name="adj" fmla="val 8259"/>
             </a:avLst>
           </a:prstGeom>
           <a:solidFill>
@@ -8937,7 +8937,7 @@
         </p:nvSpPr>
         <p:spPr>
           <a:xfrm>
-            <a:off x="7799832" y="2935224"/>
+            <a:off x="7799832" y="2864815"/>
             <a:ext cx="3145536" cy="256032"/>
           </a:xfrm>
           <a:prstGeom prst="rect">
@@ -8976,8 +8976,8 @@
         </p:nvSpPr>
         <p:spPr>
           <a:xfrm>
-            <a:off x="7818120" y="3300984"/>
-            <a:ext cx="3090672" cy="877824"/>
+            <a:off x="7818120" y="3230575"/>
+            <a:ext cx="3090672" cy="670255"/>
           </a:xfrm>
           <a:prstGeom prst="rect">
             <a:avLst/>
@@ -9017,12 +9017,12 @@
         </p:nvSpPr>
         <p:spPr>
           <a:xfrm>
-            <a:off x="7635240" y="4498848"/>
-            <a:ext cx="3474720" cy="1143000"/>
+            <a:off x="7635240" y="4184294"/>
+            <a:ext cx="3474720" cy="1466698"/>
           </a:xfrm>
           <a:prstGeom prst="roundRect">
             <a:avLst>
-              <a:gd name="adj" fmla="val 9600"/>
+              <a:gd name="adj" fmla="val 7481"/>
             </a:avLst>
           </a:prstGeom>
           <a:solidFill>
@@ -9044,7 +9044,7 @@
         </p:nvSpPr>
         <p:spPr>
           <a:xfrm>
-            <a:off x="7799832" y="4645152"/>
+            <a:off x="7799832" y="4330598"/>
             <a:ext cx="3145536" cy="256032"/>
           </a:xfrm>
           <a:prstGeom prst="rect">
@@ -9083,8 +9083,8 @@
         </p:nvSpPr>
         <p:spPr>
           <a:xfrm>
-            <a:off x="7799832" y="4974336"/>
-            <a:ext cx="3145536" cy="576072"/>
+            <a:off x="7799832" y="4659782"/>
+            <a:ext cx="3145536" cy="899770"/>
           </a:xfrm>
           <a:prstGeom prst="rect">
             <a:avLst/>
@@ -9110,7 +9110,7 @@
                 <a:ea typeface="Aptos" pitchFamily="34" charset="-122"/>
                 <a:cs typeface="Aptos" pitchFamily="34" charset="-120"/>
               </a:rPr>
-              <a:t>Use the assignment to test whether you can explain the concept, apply it to a realistic public health situation, and.</a:t>
+              <a:t>Use the assignment to test whether you can explain the concept, apply it to a realistic public health situation, and identify what would need review before the work moves forward.</a:t>
             </a:r>
             <a:endParaRPr lang="en-US" sz="1320" dirty="0"/>
           </a:p>
@@ -9479,11 +9479,11 @@
         <p:spPr>
           <a:xfrm>
             <a:off x="7635240" y="1325880"/>
-            <a:ext cx="3474720" cy="1325880"/>
+            <a:ext cx="3474720" cy="1255471"/>
           </a:xfrm>
           <a:prstGeom prst="roundRect">
             <a:avLst>
-              <a:gd name="adj" fmla="val 8276"/>
+              <a:gd name="adj" fmla="val 8740"/>
             </a:avLst>
           </a:prstGeom>
           <a:solidFill>
@@ -9545,7 +9545,7 @@
         <p:spPr>
           <a:xfrm>
             <a:off x="7799832" y="1801368"/>
-            <a:ext cx="3145536" cy="758952"/>
+            <a:ext cx="3145536" cy="688543"/>
           </a:xfrm>
           <a:prstGeom prst="rect">
             <a:avLst/>
@@ -9585,12 +9585,12 @@
         </p:nvSpPr>
         <p:spPr>
           <a:xfrm>
-            <a:off x="7635240" y="2788920"/>
-            <a:ext cx="3474720" cy="1536192"/>
+            <a:off x="7635240" y="2718511"/>
+            <a:ext cx="3474720" cy="1328623"/>
           </a:xfrm>
           <a:prstGeom prst="roundRect">
             <a:avLst>
-              <a:gd name="adj" fmla="val 7143"/>
+              <a:gd name="adj" fmla="val 8259"/>
             </a:avLst>
           </a:prstGeom>
           <a:solidFill>
@@ -9612,7 +9612,7 @@
         </p:nvSpPr>
         <p:spPr>
           <a:xfrm>
-            <a:off x="7799832" y="2935224"/>
+            <a:off x="7799832" y="2864815"/>
             <a:ext cx="3145536" cy="256032"/>
           </a:xfrm>
           <a:prstGeom prst="rect">
@@ -9651,8 +9651,8 @@
         </p:nvSpPr>
         <p:spPr>
           <a:xfrm>
-            <a:off x="7818120" y="3300984"/>
-            <a:ext cx="3090672" cy="877824"/>
+            <a:off x="7818120" y="3230575"/>
+            <a:ext cx="3090672" cy="670255"/>
           </a:xfrm>
           <a:prstGeom prst="rect">
             <a:avLst/>
@@ -9726,12 +9726,12 @@
         </p:nvSpPr>
         <p:spPr>
           <a:xfrm>
-            <a:off x="7635240" y="4498848"/>
-            <a:ext cx="3474720" cy="1143000"/>
+            <a:off x="7635240" y="4184294"/>
+            <a:ext cx="3474720" cy="1466698"/>
           </a:xfrm>
           <a:prstGeom prst="roundRect">
             <a:avLst>
-              <a:gd name="adj" fmla="val 9600"/>
+              <a:gd name="adj" fmla="val 7481"/>
             </a:avLst>
           </a:prstGeom>
           <a:solidFill>
@@ -9753,7 +9753,7 @@
         </p:nvSpPr>
         <p:spPr>
           <a:xfrm>
-            <a:off x="7799832" y="4645152"/>
+            <a:off x="7799832" y="4330598"/>
             <a:ext cx="3145536" cy="256032"/>
           </a:xfrm>
           <a:prstGeom prst="rect">
@@ -9792,8 +9792,8 @@
         </p:nvSpPr>
         <p:spPr>
           <a:xfrm>
-            <a:off x="7799832" y="4974336"/>
-            <a:ext cx="3145536" cy="576072"/>
+            <a:off x="7799832" y="4659782"/>
+            <a:ext cx="3145536" cy="899770"/>
           </a:xfrm>
           <a:prstGeom prst="rect">
             <a:avLst/>
@@ -9819,7 +9819,7 @@
                 <a:ea typeface="Aptos" pitchFamily="34" charset="-122"/>
                 <a:cs typeface="Aptos" pitchFamily="34" charset="-120"/>
               </a:rPr>
-              <a:t>Use the assignment to test whether you can explain the concept, apply it to a realistic public health situation, and.</a:t>
+              <a:t>Use the assignment to test whether you can explain the concept, apply it to a realistic public health situation, and identify what would need review before the work moves forward.</a:t>
             </a:r>
             <a:endParaRPr lang="en-US" sz="1320" dirty="0"/>
           </a:p>
@@ -10790,11 +10790,11 @@
         <p:spPr>
           <a:xfrm>
             <a:off x="7635240" y="1325880"/>
-            <a:ext cx="3474720" cy="1325880"/>
+            <a:ext cx="3474720" cy="1207008"/>
           </a:xfrm>
           <a:prstGeom prst="roundRect">
             <a:avLst>
-              <a:gd name="adj" fmla="val 8276"/>
+              <a:gd name="adj" fmla="val 9091"/>
             </a:avLst>
           </a:prstGeom>
           <a:solidFill>
@@ -10856,7 +10856,7 @@
         <p:spPr>
           <a:xfrm>
             <a:off x="7799832" y="1801368"/>
-            <a:ext cx="3145536" cy="758952"/>
+            <a:ext cx="3145536" cy="640080"/>
           </a:xfrm>
           <a:prstGeom prst="rect">
             <a:avLst/>
@@ -10896,12 +10896,12 @@
         </p:nvSpPr>
         <p:spPr>
           <a:xfrm>
-            <a:off x="7635240" y="2788920"/>
-            <a:ext cx="3474720" cy="1536192"/>
+            <a:off x="7635240" y="2670048"/>
+            <a:ext cx="3474720" cy="1377086"/>
           </a:xfrm>
           <a:prstGeom prst="roundRect">
             <a:avLst>
-              <a:gd name="adj" fmla="val 7143"/>
+              <a:gd name="adj" fmla="val 7968"/>
             </a:avLst>
           </a:prstGeom>
           <a:solidFill>
@@ -10923,7 +10923,7 @@
         </p:nvSpPr>
         <p:spPr>
           <a:xfrm>
-            <a:off x="7799832" y="2935224"/>
+            <a:off x="7799832" y="2816352"/>
             <a:ext cx="3145536" cy="256032"/>
           </a:xfrm>
           <a:prstGeom prst="rect">
@@ -10962,8 +10962,8 @@
         </p:nvSpPr>
         <p:spPr>
           <a:xfrm>
-            <a:off x="7818120" y="3300984"/>
-            <a:ext cx="3090672" cy="877824"/>
+            <a:off x="7818120" y="3182112"/>
+            <a:ext cx="3090672" cy="718718"/>
           </a:xfrm>
           <a:prstGeom prst="rect">
             <a:avLst/>
@@ -11037,12 +11037,12 @@
         </p:nvSpPr>
         <p:spPr>
           <a:xfrm>
-            <a:off x="7635240" y="4498848"/>
-            <a:ext cx="3474720" cy="1143000"/>
+            <a:off x="7635240" y="4184294"/>
+            <a:ext cx="3474720" cy="1466698"/>
           </a:xfrm>
           <a:prstGeom prst="roundRect">
             <a:avLst>
-              <a:gd name="adj" fmla="val 9600"/>
+              <a:gd name="adj" fmla="val 7481"/>
             </a:avLst>
           </a:prstGeom>
           <a:solidFill>
@@ -11064,7 +11064,7 @@
         </p:nvSpPr>
         <p:spPr>
           <a:xfrm>
-            <a:off x="7799832" y="4645152"/>
+            <a:off x="7799832" y="4330598"/>
             <a:ext cx="3145536" cy="256032"/>
           </a:xfrm>
           <a:prstGeom prst="rect">
@@ -11103,8 +11103,8 @@
         </p:nvSpPr>
         <p:spPr>
           <a:xfrm>
-            <a:off x="7799832" y="4974336"/>
-            <a:ext cx="3145536" cy="576072"/>
+            <a:off x="7799832" y="4659782"/>
+            <a:ext cx="3145536" cy="899770"/>
           </a:xfrm>
           <a:prstGeom prst="rect">
             <a:avLst/>
@@ -11130,7 +11130,7 @@
                 <a:ea typeface="Aptos" pitchFamily="34" charset="-122"/>
                 <a:cs typeface="Aptos" pitchFamily="34" charset="-120"/>
               </a:rPr>
-              <a:t>Translate this concept into clear decision rights, review steps, documentation expectations, and escalation paths before.</a:t>
+              <a:t>Translate this concept into clear decision rights, review steps, documentation expectations, and escalation paths before an AI-supported workflow is approved.</a:t>
             </a:r>
             <a:endParaRPr lang="en-US" sz="1320" dirty="0"/>
           </a:p>
@@ -11482,11 +11482,11 @@
         <p:spPr>
           <a:xfrm>
             <a:off x="7635240" y="1325880"/>
-            <a:ext cx="3474720" cy="1325880"/>
+            <a:ext cx="3474720" cy="1255471"/>
           </a:xfrm>
           <a:prstGeom prst="roundRect">
             <a:avLst>
-              <a:gd name="adj" fmla="val 8276"/>
+              <a:gd name="adj" fmla="val 8740"/>
             </a:avLst>
           </a:prstGeom>
           <a:solidFill>
@@ -11548,7 +11548,7 @@
         <p:spPr>
           <a:xfrm>
             <a:off x="7799832" y="1801368"/>
-            <a:ext cx="3145536" cy="758952"/>
+            <a:ext cx="3145536" cy="688543"/>
           </a:xfrm>
           <a:prstGeom prst="rect">
             <a:avLst/>
@@ -11588,12 +11588,12 @@
         </p:nvSpPr>
         <p:spPr>
           <a:xfrm>
-            <a:off x="7635240" y="2788920"/>
-            <a:ext cx="3474720" cy="1536192"/>
+            <a:off x="7635240" y="2718511"/>
+            <a:ext cx="3474720" cy="1328623"/>
           </a:xfrm>
           <a:prstGeom prst="roundRect">
             <a:avLst>
-              <a:gd name="adj" fmla="val 7143"/>
+              <a:gd name="adj" fmla="val 8259"/>
             </a:avLst>
           </a:prstGeom>
           <a:solidFill>
@@ -11615,7 +11615,7 @@
         </p:nvSpPr>
         <p:spPr>
           <a:xfrm>
-            <a:off x="7799832" y="2935224"/>
+            <a:off x="7799832" y="2864815"/>
             <a:ext cx="3145536" cy="256032"/>
           </a:xfrm>
           <a:prstGeom prst="rect">
@@ -11654,8 +11654,8 @@
         </p:nvSpPr>
         <p:spPr>
           <a:xfrm>
-            <a:off x="7818120" y="3300984"/>
-            <a:ext cx="3090672" cy="877824"/>
+            <a:off x="7818120" y="3230575"/>
+            <a:ext cx="3090672" cy="670255"/>
           </a:xfrm>
           <a:prstGeom prst="rect">
             <a:avLst/>
@@ -11712,12 +11712,12 @@
         </p:nvSpPr>
         <p:spPr>
           <a:xfrm>
-            <a:off x="7635240" y="4498848"/>
-            <a:ext cx="3474720" cy="1143000"/>
+            <a:off x="7635240" y="4184294"/>
+            <a:ext cx="3474720" cy="1466698"/>
           </a:xfrm>
           <a:prstGeom prst="roundRect">
             <a:avLst>
-              <a:gd name="adj" fmla="val 9600"/>
+              <a:gd name="adj" fmla="val 7481"/>
             </a:avLst>
           </a:prstGeom>
           <a:solidFill>
@@ -11739,7 +11739,7 @@
         </p:nvSpPr>
         <p:spPr>
           <a:xfrm>
-            <a:off x="7799832" y="4645152"/>
+            <a:off x="7799832" y="4330598"/>
             <a:ext cx="3145536" cy="256032"/>
           </a:xfrm>
           <a:prstGeom prst="rect">
@@ -11778,8 +11778,8 @@
         </p:nvSpPr>
         <p:spPr>
           <a:xfrm>
-            <a:off x="7799832" y="4974336"/>
-            <a:ext cx="3145536" cy="576072"/>
+            <a:off x="7799832" y="4659782"/>
+            <a:ext cx="3145536" cy="899770"/>
           </a:xfrm>
           <a:prstGeom prst="rect">
             <a:avLst/>
@@ -11805,7 +11805,7 @@
                 <a:ea typeface="Aptos" pitchFamily="34" charset="-122"/>
                 <a:cs typeface="Aptos" pitchFamily="34" charset="-120"/>
               </a:rPr>
-              <a:t>Translate this concept into clear decision rights, review steps, documentation expectations, and escalation paths before.</a:t>
+              <a:t>Translate this concept into clear decision rights, review steps, documentation expectations, and escalation paths before an AI-supported workflow is approved.</a:t>
             </a:r>
             <a:endParaRPr lang="en-US" sz="1320" dirty="0"/>
           </a:p>
@@ -12283,7 +12283,7 @@
                 <a:ea typeface="Aptos" pitchFamily="34" charset="-122"/>
                 <a:cs typeface="Aptos" pitchFamily="34" charset="-120"/>
               </a:rPr>
-              <a:t>Use the related plays to identify decisions, participants, timing, approvals, and documentation needed for responsible.</a:t>
+              <a:t>Use the related plays to identify decisions, participants, timing, approvals, and documentation needed for responsible implementation.</a:t>
             </a:r>
             <a:endParaRPr lang="en-US" sz="1320" dirty="0"/>
           </a:p>
@@ -12902,7 +12902,7 @@
                 <a:ea typeface="Aptos" pitchFamily="34" charset="-122"/>
                 <a:cs typeface="Aptos" pitchFamily="34" charset="-120"/>
               </a:rPr>
-              <a:t>Use linked tools when your department needs a structured worksheet, template, checklist, review process, or.</a:t>
+              <a:t>Use linked tools when your department needs a structured worksheet, template, checklist, review process, or documentation artifact.</a:t>
             </a:r>
             <a:endParaRPr lang="en-US" sz="1320" dirty="0"/>
           </a:p>
@@ -13412,11 +13412,11 @@
         <p:spPr>
           <a:xfrm>
             <a:off x="7635240" y="1325880"/>
-            <a:ext cx="3474720" cy="1325880"/>
+            <a:ext cx="3474720" cy="1207008"/>
           </a:xfrm>
           <a:prstGeom prst="roundRect">
             <a:avLst>
-              <a:gd name="adj" fmla="val 8276"/>
+              <a:gd name="adj" fmla="val 9091"/>
             </a:avLst>
           </a:prstGeom>
           <a:solidFill>
@@ -13478,7 +13478,7 @@
         <p:spPr>
           <a:xfrm>
             <a:off x="7799832" y="1801368"/>
-            <a:ext cx="3145536" cy="758952"/>
+            <a:ext cx="3145536" cy="640080"/>
           </a:xfrm>
           <a:prstGeom prst="rect">
             <a:avLst/>
@@ -13518,12 +13518,12 @@
         </p:nvSpPr>
         <p:spPr>
           <a:xfrm>
-            <a:off x="7635240" y="2788920"/>
-            <a:ext cx="3474720" cy="1536192"/>
+            <a:off x="7635240" y="2670048"/>
+            <a:ext cx="3474720" cy="1377086"/>
           </a:xfrm>
           <a:prstGeom prst="roundRect">
             <a:avLst>
-              <a:gd name="adj" fmla="val 7143"/>
+              <a:gd name="adj" fmla="val 7968"/>
             </a:avLst>
           </a:prstGeom>
           <a:solidFill>
@@ -13545,7 +13545,7 @@
         </p:nvSpPr>
         <p:spPr>
           <a:xfrm>
-            <a:off x="7799832" y="2935224"/>
+            <a:off x="7799832" y="2816352"/>
             <a:ext cx="3145536" cy="256032"/>
           </a:xfrm>
           <a:prstGeom prst="rect">
@@ -13584,8 +13584,8 @@
         </p:nvSpPr>
         <p:spPr>
           <a:xfrm>
-            <a:off x="7818120" y="3300984"/>
-            <a:ext cx="3090672" cy="877824"/>
+            <a:off x="7818120" y="3182112"/>
+            <a:ext cx="3090672" cy="718718"/>
           </a:xfrm>
           <a:prstGeom prst="rect">
             <a:avLst/>
@@ -13659,12 +13659,12 @@
         </p:nvSpPr>
         <p:spPr>
           <a:xfrm>
-            <a:off x="7635240" y="4498848"/>
-            <a:ext cx="3474720" cy="1143000"/>
+            <a:off x="7635240" y="4184294"/>
+            <a:ext cx="3474720" cy="1466698"/>
           </a:xfrm>
           <a:prstGeom prst="roundRect">
             <a:avLst>
-              <a:gd name="adj" fmla="val 9600"/>
+              <a:gd name="adj" fmla="val 7481"/>
             </a:avLst>
           </a:prstGeom>
           <a:solidFill>
@@ -13686,7 +13686,7 @@
         </p:nvSpPr>
         <p:spPr>
           <a:xfrm>
-            <a:off x="7799832" y="4645152"/>
+            <a:off x="7799832" y="4330598"/>
             <a:ext cx="3145536" cy="256032"/>
           </a:xfrm>
           <a:prstGeom prst="rect">
@@ -13725,8 +13725,8 @@
         </p:nvSpPr>
         <p:spPr>
           <a:xfrm>
-            <a:off x="7799832" y="4974336"/>
-            <a:ext cx="3145536" cy="576072"/>
+            <a:off x="7799832" y="4659782"/>
+            <a:ext cx="3145536" cy="899770"/>
           </a:xfrm>
           <a:prstGeom prst="rect">
             <a:avLst/>
@@ -13752,7 +13752,7 @@
                 <a:ea typeface="Aptos" pitchFamily="34" charset="-122"/>
                 <a:cs typeface="Aptos" pitchFamily="34" charset="-120"/>
               </a:rPr>
-              <a:t>Use the assignment to test whether you can explain the concept, apply it to a realistic public health situation, and.</a:t>
+              <a:t>Use the assignment to test whether you can explain the concept, apply it to a realistic public health situation, and identify what would need review before the work moves forward.</a:t>
             </a:r>
             <a:endParaRPr lang="en-US" sz="1320" dirty="0"/>
           </a:p>
@@ -14121,11 +14121,11 @@
         <p:spPr>
           <a:xfrm>
             <a:off x="7635240" y="1325880"/>
-            <a:ext cx="3474720" cy="1325880"/>
+            <a:ext cx="3474720" cy="1255471"/>
           </a:xfrm>
           <a:prstGeom prst="roundRect">
             <a:avLst>
-              <a:gd name="adj" fmla="val 8276"/>
+              <a:gd name="adj" fmla="val 8740"/>
             </a:avLst>
           </a:prstGeom>
           <a:solidFill>
@@ -14187,7 +14187,7 @@
         <p:spPr>
           <a:xfrm>
             <a:off x="7799832" y="1801368"/>
-            <a:ext cx="3145536" cy="758952"/>
+            <a:ext cx="3145536" cy="688543"/>
           </a:xfrm>
           <a:prstGeom prst="rect">
             <a:avLst/>
@@ -14227,12 +14227,12 @@
         </p:nvSpPr>
         <p:spPr>
           <a:xfrm>
-            <a:off x="7635240" y="2788920"/>
-            <a:ext cx="3474720" cy="1536192"/>
+            <a:off x="7635240" y="2718511"/>
+            <a:ext cx="3474720" cy="1328623"/>
           </a:xfrm>
           <a:prstGeom prst="roundRect">
             <a:avLst>
-              <a:gd name="adj" fmla="val 7143"/>
+              <a:gd name="adj" fmla="val 8259"/>
             </a:avLst>
           </a:prstGeom>
           <a:solidFill>
@@ -14254,8 +14254,8 @@
         </p:nvSpPr>
         <p:spPr>
           <a:xfrm>
-            <a:off x="7799832" y="2935224"/>
-            <a:ext cx="3145536" cy="256032"/>
+            <a:off x="7799832" y="2846527"/>
+            <a:ext cx="3145536" cy="237744"/>
           </a:xfrm>
           <a:prstGeom prst="rect">
             <a:avLst/>
@@ -14271,7 +14271,7 @@
               <a:buNone/>
             </a:pPr>
             <a:r>
-              <a:rPr lang="en-US" sz="1300" b="1" dirty="0">
+              <a:rPr lang="en-US" sz="1250" b="1" dirty="0">
                 <a:solidFill>
                   <a:srgbClr val="0068B7"/>
                 </a:solidFill>
@@ -14279,101 +14279,317 @@
                 <a:ea typeface="Aptos" pitchFamily="34" charset="-122"/>
                 <a:cs typeface="Aptos" pitchFamily="34" charset="-120"/>
               </a:rPr>
-              <a:t>Concept checkpoints</a:t>
-            </a:r>
-            <a:endParaRPr lang="en-US" sz="1300" dirty="0"/>
-          </a:p>
-        </p:txBody>
-      </p:sp>
-      <p:sp>
-        <p:nvSpPr>
-          <p:cNvPr id="15" name="Text 13"/>
-          <p:cNvSpPr/>
-          <p:nvPr/>
-        </p:nvSpPr>
-        <p:spPr>
-          <a:xfrm>
-            <a:off x="7818120" y="3300984"/>
-            <a:ext cx="3090672" cy="877824"/>
-          </a:xfrm>
-          <a:prstGeom prst="rect">
-            <a:avLst/>
-          </a:prstGeom>
-          <a:noFill/>
-          <a:ln/>
-        </p:spPr>
-        <p:txBody>
-          <a:bodyPr wrap="square" lIns="508" tIns="508" rIns="508" bIns="508" rtlCol="0" anchor="t">
+              <a:t>Governance pathway</a:t>
+            </a:r>
+            <a:endParaRPr lang="en-US" sz="1250" dirty="0"/>
+          </a:p>
+        </p:txBody>
+      </p:sp>
+      <p:sp>
+        <p:nvSpPr>
+          <p:cNvPr id="15" name="Shape 13"/>
+          <p:cNvSpPr/>
+          <p:nvPr/>
+        </p:nvSpPr>
+        <p:spPr>
+          <a:xfrm>
+            <a:off x="8763000" y="3399739"/>
+            <a:ext cx="164592" cy="0"/>
+          </a:xfrm>
+          <a:prstGeom prst="line">
+            <a:avLst/>
+          </a:prstGeom>
+          <a:noFill/>
+          <a:ln w="15240">
+            <a:solidFill>
+              <a:srgbClr val="8ABBD8"/>
+            </a:solidFill>
+            <a:prstDash val="solid"/>
+          </a:ln>
+        </p:spPr>
+      </p:sp>
+      <p:sp>
+        <p:nvSpPr>
+          <p:cNvPr id="16" name="Shape 14"/>
+          <p:cNvSpPr/>
+          <p:nvPr/>
+        </p:nvSpPr>
+        <p:spPr>
+          <a:xfrm>
+            <a:off x="7872984" y="3248863"/>
+            <a:ext cx="890016" cy="301752"/>
+          </a:xfrm>
+          <a:prstGeom prst="roundRect">
+            <a:avLst>
+              <a:gd name="adj" fmla="val 24242"/>
+            </a:avLst>
+          </a:prstGeom>
+          <a:solidFill>
+            <a:srgbClr val="0068B7"/>
+          </a:solidFill>
+          <a:ln w="12700">
+            <a:solidFill>
+              <a:srgbClr val="0068B7"/>
+            </a:solidFill>
+            <a:prstDash val="solid"/>
+          </a:ln>
+        </p:spPr>
+      </p:sp>
+      <p:sp>
+        <p:nvSpPr>
+          <p:cNvPr id="17" name="Text 15"/>
+          <p:cNvSpPr/>
+          <p:nvPr/>
+        </p:nvSpPr>
+        <p:spPr>
+          <a:xfrm>
+            <a:off x="7909560" y="3322015"/>
+            <a:ext cx="816864" cy="146304"/>
+          </a:xfrm>
+          <a:prstGeom prst="rect">
+            <a:avLst/>
+          </a:prstGeom>
+          <a:noFill/>
+          <a:ln/>
+        </p:spPr>
+        <p:txBody>
+          <a:bodyPr wrap="square" lIns="0" tIns="0" rIns="0" bIns="0" rtlCol="0" anchor="ctr">
             <a:normAutofit/>
           </a:bodyPr>
           <a:lstStyle/>
           <a:p>
-            <a:pPr indent="0" marL="0">
-              <a:buNone/>
-            </a:pPr>
-            <a:r>
-              <a:rPr lang="en-US" sz="1220" dirty="0">
-                <a:solidFill>
-                  <a:srgbClr val="17364A"/>
-                </a:solidFill>
-                <a:latin typeface="Aptos" pitchFamily="34" charset="0"/>
-                <a:ea typeface="Aptos" pitchFamily="34" charset="-122"/>
-                <a:cs typeface="Aptos" pitchFamily="34" charset="-120"/>
-              </a:rPr>
-              <a:t>AI governance needs a formal home before an agency begins.</a:t>
-            </a:r>
-            <a:endParaRPr lang="en-US" sz="1220" dirty="0"/>
-          </a:p>
-          <a:p>
-            <a:pPr indent="0" marL="0">
-              <a:buNone/>
-            </a:pPr>
-            <a:r>
-              <a:rPr lang="en-US" sz="1220" dirty="0">
-                <a:solidFill>
-                  <a:srgbClr val="17364A"/>
-                </a:solidFill>
-                <a:latin typeface="Aptos" pitchFamily="34" charset="0"/>
-                <a:ea typeface="Aptos" pitchFamily="34" charset="-122"/>
-                <a:cs typeface="Aptos" pitchFamily="34" charset="-120"/>
-              </a:rPr>
-              <a:t>A governance charter defines the purpose, scope, authority,.</a:t>
-            </a:r>
-            <a:endParaRPr lang="en-US" sz="1220" dirty="0"/>
-          </a:p>
-          <a:p>
-            <a:pPr indent="0" marL="0">
-              <a:buNone/>
-            </a:pPr>
-            <a:r>
-              <a:rPr lang="en-US" sz="1220" dirty="0">
-                <a:solidFill>
-                  <a:srgbClr val="17364A"/>
-                </a:solidFill>
-                <a:latin typeface="Aptos" pitchFamily="34" charset="0"/>
-                <a:ea typeface="Aptos" pitchFamily="34" charset="-122"/>
-                <a:cs typeface="Aptos" pitchFamily="34" charset="-120"/>
-              </a:rPr>
-              <a:t>Without a charter, AI decisions often become scattered across IT,.</a:t>
-            </a:r>
-            <a:endParaRPr lang="en-US" sz="1220" dirty="0"/>
-          </a:p>
-        </p:txBody>
-      </p:sp>
-      <p:sp>
-        <p:nvSpPr>
-          <p:cNvPr id="16" name="Shape 14"/>
-          <p:cNvSpPr/>
-          <p:nvPr/>
-        </p:nvSpPr>
-        <p:spPr>
-          <a:xfrm>
-            <a:off x="7635240" y="4498848"/>
-            <a:ext cx="3474720" cy="1143000"/>
+            <a:pPr algn="ctr" indent="0" marL="0">
+              <a:buNone/>
+            </a:pPr>
+            <a:r>
+              <a:rPr lang="en-US" sz="880" b="1" dirty="0">
+                <a:solidFill>
+                  <a:srgbClr val="FFFFFF"/>
+                </a:solidFill>
+                <a:latin typeface="Aptos" pitchFamily="34" charset="0"/>
+                <a:ea typeface="Aptos" pitchFamily="34" charset="-122"/>
+                <a:cs typeface="Aptos" pitchFamily="34" charset="-120"/>
+              </a:rPr>
+              <a:t>Submit</a:t>
+            </a:r>
+            <a:endParaRPr lang="en-US" sz="880" dirty="0"/>
+          </a:p>
+        </p:txBody>
+      </p:sp>
+      <p:sp>
+        <p:nvSpPr>
+          <p:cNvPr id="18" name="Shape 16"/>
+          <p:cNvSpPr/>
+          <p:nvPr/>
+        </p:nvSpPr>
+        <p:spPr>
+          <a:xfrm>
+            <a:off x="9817608" y="3399739"/>
+            <a:ext cx="164592" cy="0"/>
+          </a:xfrm>
+          <a:prstGeom prst="line">
+            <a:avLst/>
+          </a:prstGeom>
+          <a:noFill/>
+          <a:ln w="15240">
+            <a:solidFill>
+              <a:srgbClr val="8ABBD8"/>
+            </a:solidFill>
+            <a:prstDash val="solid"/>
+          </a:ln>
+        </p:spPr>
+      </p:sp>
+      <p:sp>
+        <p:nvSpPr>
+          <p:cNvPr id="19" name="Shape 17"/>
+          <p:cNvSpPr/>
+          <p:nvPr/>
+        </p:nvSpPr>
+        <p:spPr>
+          <a:xfrm>
+            <a:off x="8927592" y="3248863"/>
+            <a:ext cx="890016" cy="301752"/>
           </a:xfrm>
           <a:prstGeom prst="roundRect">
             <a:avLst>
-              <a:gd name="adj" fmla="val 9600"/>
+              <a:gd name="adj" fmla="val 24242"/>
+            </a:avLst>
+          </a:prstGeom>
+          <a:solidFill>
+            <a:srgbClr val="2F8A28"/>
+          </a:solidFill>
+          <a:ln w="12700">
+            <a:solidFill>
+              <a:srgbClr val="2F8A28"/>
+            </a:solidFill>
+            <a:prstDash val="solid"/>
+          </a:ln>
+        </p:spPr>
+      </p:sp>
+      <p:sp>
+        <p:nvSpPr>
+          <p:cNvPr id="20" name="Text 18"/>
+          <p:cNvSpPr/>
+          <p:nvPr/>
+        </p:nvSpPr>
+        <p:spPr>
+          <a:xfrm>
+            <a:off x="8964168" y="3322015"/>
+            <a:ext cx="816864" cy="146304"/>
+          </a:xfrm>
+          <a:prstGeom prst="rect">
+            <a:avLst/>
+          </a:prstGeom>
+          <a:noFill/>
+          <a:ln/>
+        </p:spPr>
+        <p:txBody>
+          <a:bodyPr wrap="square" lIns="0" tIns="0" rIns="0" bIns="0" rtlCol="0" anchor="ctr">
+            <a:normAutofit/>
+          </a:bodyPr>
+          <a:lstStyle/>
+          <a:p>
+            <a:pPr algn="ctr" indent="0" marL="0">
+              <a:buNone/>
+            </a:pPr>
+            <a:r>
+              <a:rPr lang="en-US" sz="880" b="1" dirty="0">
+                <a:solidFill>
+                  <a:srgbClr val="FFFFFF"/>
+                </a:solidFill>
+                <a:latin typeface="Aptos" pitchFamily="34" charset="0"/>
+                <a:ea typeface="Aptos" pitchFamily="34" charset="-122"/>
+                <a:cs typeface="Aptos" pitchFamily="34" charset="-120"/>
+              </a:rPr>
+              <a:t>Review</a:t>
+            </a:r>
+            <a:endParaRPr lang="en-US" sz="880" dirty="0"/>
+          </a:p>
+        </p:txBody>
+      </p:sp>
+      <p:sp>
+        <p:nvSpPr>
+          <p:cNvPr id="21" name="Shape 19"/>
+          <p:cNvSpPr/>
+          <p:nvPr/>
+        </p:nvSpPr>
+        <p:spPr>
+          <a:xfrm>
+            <a:off x="9982200" y="3248863"/>
+            <a:ext cx="890016" cy="301752"/>
+          </a:xfrm>
+          <a:prstGeom prst="roundRect">
+            <a:avLst>
+              <a:gd name="adj" fmla="val 24242"/>
+            </a:avLst>
+          </a:prstGeom>
+          <a:solidFill>
+            <a:srgbClr val="6A4CA3"/>
+          </a:solidFill>
+          <a:ln w="12700">
+            <a:solidFill>
+              <a:srgbClr val="6A4CA3"/>
+            </a:solidFill>
+            <a:prstDash val="solid"/>
+          </a:ln>
+        </p:spPr>
+      </p:sp>
+      <p:sp>
+        <p:nvSpPr>
+          <p:cNvPr id="22" name="Text 20"/>
+          <p:cNvSpPr/>
+          <p:nvPr/>
+        </p:nvSpPr>
+        <p:spPr>
+          <a:xfrm>
+            <a:off x="10018776" y="3322015"/>
+            <a:ext cx="816864" cy="146304"/>
+          </a:xfrm>
+          <a:prstGeom prst="rect">
+            <a:avLst/>
+          </a:prstGeom>
+          <a:noFill/>
+          <a:ln/>
+        </p:spPr>
+        <p:txBody>
+          <a:bodyPr wrap="square" lIns="0" tIns="0" rIns="0" bIns="0" rtlCol="0" anchor="ctr">
+            <a:normAutofit/>
+          </a:bodyPr>
+          <a:lstStyle/>
+          <a:p>
+            <a:pPr algn="ctr" indent="0" marL="0">
+              <a:buNone/>
+            </a:pPr>
+            <a:r>
+              <a:rPr lang="en-US" sz="880" b="1" dirty="0">
+                <a:solidFill>
+                  <a:srgbClr val="FFFFFF"/>
+                </a:solidFill>
+                <a:latin typeface="Aptos" pitchFamily="34" charset="0"/>
+                <a:ea typeface="Aptos" pitchFamily="34" charset="-122"/>
+                <a:cs typeface="Aptos" pitchFamily="34" charset="-120"/>
+              </a:rPr>
+              <a:t>Oversee</a:t>
+            </a:r>
+            <a:endParaRPr lang="en-US" sz="880" dirty="0"/>
+          </a:p>
+        </p:txBody>
+      </p:sp>
+      <p:sp>
+        <p:nvSpPr>
+          <p:cNvPr id="23" name="Text 21"/>
+          <p:cNvSpPr/>
+          <p:nvPr/>
+        </p:nvSpPr>
+        <p:spPr>
+          <a:xfrm>
+            <a:off x="7854696" y="3742639"/>
+            <a:ext cx="3035808" cy="158191"/>
+          </a:xfrm>
+          <a:prstGeom prst="rect">
+            <a:avLst/>
+          </a:prstGeom>
+          <a:noFill/>
+          <a:ln/>
+        </p:spPr>
+        <p:txBody>
+          <a:bodyPr wrap="square" lIns="254" tIns="254" rIns="254" bIns="254" rtlCol="0" anchor="t">
+            <a:normAutofit/>
+          </a:bodyPr>
+          <a:lstStyle/>
+          <a:p>
+            <a:pPr indent="0" marL="0">
+              <a:buNone/>
+            </a:pPr>
+            <a:r>
+              <a:rPr lang="en-US" sz="1120" dirty="0">
+                <a:solidFill>
+                  <a:srgbClr val="17364A"/>
+                </a:solidFill>
+                <a:latin typeface="Aptos" pitchFamily="34" charset="0"/>
+                <a:ea typeface="Aptos" pitchFamily="34" charset="-122"/>
+                <a:cs typeface="Aptos" pitchFamily="34" charset="-120"/>
+              </a:rPr>
+              <a:t>A proposed AI use should move through documented review before it becomes an operational workflow.</a:t>
+            </a:r>
+            <a:endParaRPr lang="en-US" sz="1120" dirty="0"/>
+          </a:p>
+        </p:txBody>
+      </p:sp>
+      <p:sp>
+        <p:nvSpPr>
+          <p:cNvPr id="24" name="Shape 22"/>
+          <p:cNvSpPr/>
+          <p:nvPr/>
+        </p:nvSpPr>
+        <p:spPr>
+          <a:xfrm>
+            <a:off x="7635240" y="4184294"/>
+            <a:ext cx="3474720" cy="1466698"/>
+          </a:xfrm>
+          <a:prstGeom prst="roundRect">
+            <a:avLst>
+              <a:gd name="adj" fmla="val 7481"/>
             </a:avLst>
           </a:prstGeom>
           <a:solidFill>
@@ -14389,13 +14605,13 @@
       </p:sp>
       <p:sp>
         <p:nvSpPr>
-          <p:cNvPr id="17" name="Text 15"/>
-          <p:cNvSpPr/>
-          <p:nvPr/>
-        </p:nvSpPr>
-        <p:spPr>
-          <a:xfrm>
-            <a:off x="7799832" y="4645152"/>
+          <p:cNvPr id="25" name="Text 23"/>
+          <p:cNvSpPr/>
+          <p:nvPr/>
+        </p:nvSpPr>
+        <p:spPr>
+          <a:xfrm>
+            <a:off x="7799832" y="4330598"/>
             <a:ext cx="3145536" cy="256032"/>
           </a:xfrm>
           <a:prstGeom prst="rect">
@@ -14428,14 +14644,14 @@
       </p:sp>
       <p:sp>
         <p:nvSpPr>
-          <p:cNvPr id="18" name="Text 16"/>
-          <p:cNvSpPr/>
-          <p:nvPr/>
-        </p:nvSpPr>
-        <p:spPr>
-          <a:xfrm>
-            <a:off x="7799832" y="4974336"/>
-            <a:ext cx="3145536" cy="576072"/>
+          <p:cNvPr id="26" name="Text 24"/>
+          <p:cNvSpPr/>
+          <p:nvPr/>
+        </p:nvSpPr>
+        <p:spPr>
+          <a:xfrm>
+            <a:off x="7799832" y="4659782"/>
+            <a:ext cx="3145536" cy="899770"/>
           </a:xfrm>
           <a:prstGeom prst="rect">
             <a:avLst/>
@@ -14461,7 +14677,7 @@
                 <a:ea typeface="Aptos" pitchFamily="34" charset="-122"/>
                 <a:cs typeface="Aptos" pitchFamily="34" charset="-120"/>
               </a:rPr>
-              <a:t>Translate this concept into clear decision rights, review steps, documentation expectations, and escalation paths before.</a:t>
+              <a:t>Translate this concept into clear decision rights, review steps, documentation expectations, and escalation paths before an AI-supported workflow is approved.</a:t>
             </a:r>
             <a:endParaRPr lang="en-US" sz="1320" dirty="0"/>
           </a:p>
@@ -14830,11 +15046,11 @@
         <p:spPr>
           <a:xfrm>
             <a:off x="7635240" y="1325880"/>
-            <a:ext cx="3474720" cy="1325880"/>
+            <a:ext cx="3474720" cy="1207008"/>
           </a:xfrm>
           <a:prstGeom prst="roundRect">
             <a:avLst>
-              <a:gd name="adj" fmla="val 8276"/>
+              <a:gd name="adj" fmla="val 9091"/>
             </a:avLst>
           </a:prstGeom>
           <a:solidFill>
@@ -14896,7 +15112,7 @@
         <p:spPr>
           <a:xfrm>
             <a:off x="7799832" y="1801368"/>
-            <a:ext cx="3145536" cy="758952"/>
+            <a:ext cx="3145536" cy="640080"/>
           </a:xfrm>
           <a:prstGeom prst="rect">
             <a:avLst/>
@@ -14922,7 +15138,7 @@
                 <a:ea typeface="Aptos" pitchFamily="34" charset="-122"/>
                 <a:cs typeface="Aptos" pitchFamily="34" charset="-120"/>
               </a:rPr>
-              <a:t>This module provides national-level training guidance for public health agencies and partners.</a:t>
+              <a:t>This module provides national-level training guidance for public health agencies and.</a:t>
             </a:r>
             <a:endParaRPr lang="en-US" sz="1320" dirty="0"/>
           </a:p>
@@ -14936,12 +15152,12 @@
         </p:nvSpPr>
         <p:spPr>
           <a:xfrm>
-            <a:off x="7635240" y="2788920"/>
-            <a:ext cx="3474720" cy="1536192"/>
+            <a:off x="7635240" y="2670048"/>
+            <a:ext cx="3474720" cy="1377086"/>
           </a:xfrm>
           <a:prstGeom prst="roundRect">
             <a:avLst>
-              <a:gd name="adj" fmla="val 7143"/>
+              <a:gd name="adj" fmla="val 7968"/>
             </a:avLst>
           </a:prstGeom>
           <a:solidFill>
@@ -14963,8 +15179,8 @@
         </p:nvSpPr>
         <p:spPr>
           <a:xfrm>
-            <a:off x="7799832" y="2935224"/>
-            <a:ext cx="3145536" cy="256032"/>
+            <a:off x="7799832" y="2798064"/>
+            <a:ext cx="3145536" cy="237744"/>
           </a:xfrm>
           <a:prstGeom prst="rect">
             <a:avLst/>
@@ -14980,7 +15196,7 @@
               <a:buNone/>
             </a:pPr>
             <a:r>
-              <a:rPr lang="en-US" sz="1300" b="1" dirty="0">
+              <a:rPr lang="en-US" sz="1250" b="1" dirty="0">
                 <a:solidFill>
                   <a:srgbClr val="0068B7"/>
                 </a:solidFill>
@@ -14988,101 +15204,317 @@
                 <a:ea typeface="Aptos" pitchFamily="34" charset="-122"/>
                 <a:cs typeface="Aptos" pitchFamily="34" charset="-120"/>
               </a:rPr>
-              <a:t>Concept checkpoints</a:t>
-            </a:r>
-            <a:endParaRPr lang="en-US" sz="1300" dirty="0"/>
-          </a:p>
-        </p:txBody>
-      </p:sp>
-      <p:sp>
-        <p:nvSpPr>
-          <p:cNvPr id="15" name="Text 13"/>
-          <p:cNvSpPr/>
-          <p:nvPr/>
-        </p:nvSpPr>
-        <p:spPr>
-          <a:xfrm>
-            <a:off x="7818120" y="3300984"/>
-            <a:ext cx="3090672" cy="877824"/>
-          </a:xfrm>
-          <a:prstGeom prst="rect">
-            <a:avLst/>
-          </a:prstGeom>
-          <a:noFill/>
-          <a:ln/>
-        </p:spPr>
-        <p:txBody>
-          <a:bodyPr wrap="square" lIns="508" tIns="508" rIns="508" bIns="508" rtlCol="0" anchor="t">
+              <a:t>Governance pathway</a:t>
+            </a:r>
+            <a:endParaRPr lang="en-US" sz="1250" dirty="0"/>
+          </a:p>
+        </p:txBody>
+      </p:sp>
+      <p:sp>
+        <p:nvSpPr>
+          <p:cNvPr id="15" name="Shape 13"/>
+          <p:cNvSpPr/>
+          <p:nvPr/>
+        </p:nvSpPr>
+        <p:spPr>
+          <a:xfrm>
+            <a:off x="8763000" y="3351276"/>
+            <a:ext cx="164592" cy="0"/>
+          </a:xfrm>
+          <a:prstGeom prst="line">
+            <a:avLst/>
+          </a:prstGeom>
+          <a:noFill/>
+          <a:ln w="15240">
+            <a:solidFill>
+              <a:srgbClr val="8ABBD8"/>
+            </a:solidFill>
+            <a:prstDash val="solid"/>
+          </a:ln>
+        </p:spPr>
+      </p:sp>
+      <p:sp>
+        <p:nvSpPr>
+          <p:cNvPr id="16" name="Shape 14"/>
+          <p:cNvSpPr/>
+          <p:nvPr/>
+        </p:nvSpPr>
+        <p:spPr>
+          <a:xfrm>
+            <a:off x="7872984" y="3200400"/>
+            <a:ext cx="890016" cy="301752"/>
+          </a:xfrm>
+          <a:prstGeom prst="roundRect">
+            <a:avLst>
+              <a:gd name="adj" fmla="val 24242"/>
+            </a:avLst>
+          </a:prstGeom>
+          <a:solidFill>
+            <a:srgbClr val="0068B7"/>
+          </a:solidFill>
+          <a:ln w="12700">
+            <a:solidFill>
+              <a:srgbClr val="0068B7"/>
+            </a:solidFill>
+            <a:prstDash val="solid"/>
+          </a:ln>
+        </p:spPr>
+      </p:sp>
+      <p:sp>
+        <p:nvSpPr>
+          <p:cNvPr id="17" name="Text 15"/>
+          <p:cNvSpPr/>
+          <p:nvPr/>
+        </p:nvSpPr>
+        <p:spPr>
+          <a:xfrm>
+            <a:off x="7909560" y="3273552"/>
+            <a:ext cx="816864" cy="146304"/>
+          </a:xfrm>
+          <a:prstGeom prst="rect">
+            <a:avLst/>
+          </a:prstGeom>
+          <a:noFill/>
+          <a:ln/>
+        </p:spPr>
+        <p:txBody>
+          <a:bodyPr wrap="square" lIns="0" tIns="0" rIns="0" bIns="0" rtlCol="0" anchor="ctr">
             <a:normAutofit/>
           </a:bodyPr>
           <a:lstStyle/>
           <a:p>
-            <a:pPr indent="0" marL="0">
-              <a:buNone/>
-            </a:pPr>
-            <a:r>
-              <a:rPr lang="en-US" sz="1220" dirty="0">
-                <a:solidFill>
-                  <a:srgbClr val="17364A"/>
-                </a:solidFill>
-                <a:latin typeface="Aptos" pitchFamily="34" charset="0"/>
-                <a:ea typeface="Aptos" pitchFamily="34" charset="-122"/>
-                <a:cs typeface="Aptos" pitchFamily="34" charset="-120"/>
-              </a:rPr>
-              <a:t>It is not legal advice and does not replace review by agency legal.</a:t>
-            </a:r>
-            <a:endParaRPr lang="en-US" sz="1220" dirty="0"/>
-          </a:p>
-          <a:p>
-            <a:pPr indent="0" marL="0">
-              <a:buNone/>
-            </a:pPr>
-            <a:r>
-              <a:rPr lang="en-US" sz="1220" dirty="0">
-                <a:solidFill>
-                  <a:srgbClr val="17364A"/>
-                </a:solidFill>
-                <a:latin typeface="Aptos" pitchFamily="34" charset="0"/>
-                <a:ea typeface="Aptos" pitchFamily="34" charset="-122"/>
-                <a:cs typeface="Aptos" pitchFamily="34" charset="-120"/>
-              </a:rPr>
-              <a:t>Requirements may vary by state, locality, territory, Tribe,.</a:t>
-            </a:r>
-            <a:endParaRPr lang="en-US" sz="1220" dirty="0"/>
-          </a:p>
-          <a:p>
-            <a:pPr indent="0" marL="0">
-              <a:buNone/>
-            </a:pPr>
-            <a:r>
-              <a:rPr lang="en-US" sz="1220" dirty="0">
-                <a:solidFill>
-                  <a:srgbClr val="17364A"/>
-                </a:solidFill>
-                <a:latin typeface="Aptos" pitchFamily="34" charset="0"/>
-                <a:ea typeface="Aptos" pitchFamily="34" charset="-122"/>
-                <a:cs typeface="Aptos" pitchFamily="34" charset="-120"/>
-              </a:rPr>
-              <a:t>Learners should use this module to identify the issues that.</a:t>
-            </a:r>
-            <a:endParaRPr lang="en-US" sz="1220" dirty="0"/>
-          </a:p>
-        </p:txBody>
-      </p:sp>
-      <p:sp>
-        <p:nvSpPr>
-          <p:cNvPr id="16" name="Shape 14"/>
-          <p:cNvSpPr/>
-          <p:nvPr/>
-        </p:nvSpPr>
-        <p:spPr>
-          <a:xfrm>
-            <a:off x="7635240" y="4498848"/>
-            <a:ext cx="3474720" cy="1143000"/>
+            <a:pPr algn="ctr" indent="0" marL="0">
+              <a:buNone/>
+            </a:pPr>
+            <a:r>
+              <a:rPr lang="en-US" sz="880" b="1" dirty="0">
+                <a:solidFill>
+                  <a:srgbClr val="FFFFFF"/>
+                </a:solidFill>
+                <a:latin typeface="Aptos" pitchFamily="34" charset="0"/>
+                <a:ea typeface="Aptos" pitchFamily="34" charset="-122"/>
+                <a:cs typeface="Aptos" pitchFamily="34" charset="-120"/>
+              </a:rPr>
+              <a:t>Submit</a:t>
+            </a:r>
+            <a:endParaRPr lang="en-US" sz="880" dirty="0"/>
+          </a:p>
+        </p:txBody>
+      </p:sp>
+      <p:sp>
+        <p:nvSpPr>
+          <p:cNvPr id="18" name="Shape 16"/>
+          <p:cNvSpPr/>
+          <p:nvPr/>
+        </p:nvSpPr>
+        <p:spPr>
+          <a:xfrm>
+            <a:off x="9817608" y="3351276"/>
+            <a:ext cx="164592" cy="0"/>
+          </a:xfrm>
+          <a:prstGeom prst="line">
+            <a:avLst/>
+          </a:prstGeom>
+          <a:noFill/>
+          <a:ln w="15240">
+            <a:solidFill>
+              <a:srgbClr val="8ABBD8"/>
+            </a:solidFill>
+            <a:prstDash val="solid"/>
+          </a:ln>
+        </p:spPr>
+      </p:sp>
+      <p:sp>
+        <p:nvSpPr>
+          <p:cNvPr id="19" name="Shape 17"/>
+          <p:cNvSpPr/>
+          <p:nvPr/>
+        </p:nvSpPr>
+        <p:spPr>
+          <a:xfrm>
+            <a:off x="8927592" y="3200400"/>
+            <a:ext cx="890016" cy="301752"/>
           </a:xfrm>
           <a:prstGeom prst="roundRect">
             <a:avLst>
-              <a:gd name="adj" fmla="val 9600"/>
+              <a:gd name="adj" fmla="val 24242"/>
+            </a:avLst>
+          </a:prstGeom>
+          <a:solidFill>
+            <a:srgbClr val="2F8A28"/>
+          </a:solidFill>
+          <a:ln w="12700">
+            <a:solidFill>
+              <a:srgbClr val="2F8A28"/>
+            </a:solidFill>
+            <a:prstDash val="solid"/>
+          </a:ln>
+        </p:spPr>
+      </p:sp>
+      <p:sp>
+        <p:nvSpPr>
+          <p:cNvPr id="20" name="Text 18"/>
+          <p:cNvSpPr/>
+          <p:nvPr/>
+        </p:nvSpPr>
+        <p:spPr>
+          <a:xfrm>
+            <a:off x="8964168" y="3273552"/>
+            <a:ext cx="816864" cy="146304"/>
+          </a:xfrm>
+          <a:prstGeom prst="rect">
+            <a:avLst/>
+          </a:prstGeom>
+          <a:noFill/>
+          <a:ln/>
+        </p:spPr>
+        <p:txBody>
+          <a:bodyPr wrap="square" lIns="0" tIns="0" rIns="0" bIns="0" rtlCol="0" anchor="ctr">
+            <a:normAutofit/>
+          </a:bodyPr>
+          <a:lstStyle/>
+          <a:p>
+            <a:pPr algn="ctr" indent="0" marL="0">
+              <a:buNone/>
+            </a:pPr>
+            <a:r>
+              <a:rPr lang="en-US" sz="880" b="1" dirty="0">
+                <a:solidFill>
+                  <a:srgbClr val="FFFFFF"/>
+                </a:solidFill>
+                <a:latin typeface="Aptos" pitchFamily="34" charset="0"/>
+                <a:ea typeface="Aptos" pitchFamily="34" charset="-122"/>
+                <a:cs typeface="Aptos" pitchFamily="34" charset="-120"/>
+              </a:rPr>
+              <a:t>Review</a:t>
+            </a:r>
+            <a:endParaRPr lang="en-US" sz="880" dirty="0"/>
+          </a:p>
+        </p:txBody>
+      </p:sp>
+      <p:sp>
+        <p:nvSpPr>
+          <p:cNvPr id="21" name="Shape 19"/>
+          <p:cNvSpPr/>
+          <p:nvPr/>
+        </p:nvSpPr>
+        <p:spPr>
+          <a:xfrm>
+            <a:off x="9982200" y="3200400"/>
+            <a:ext cx="890016" cy="301752"/>
+          </a:xfrm>
+          <a:prstGeom prst="roundRect">
+            <a:avLst>
+              <a:gd name="adj" fmla="val 24242"/>
+            </a:avLst>
+          </a:prstGeom>
+          <a:solidFill>
+            <a:srgbClr val="6A4CA3"/>
+          </a:solidFill>
+          <a:ln w="12700">
+            <a:solidFill>
+              <a:srgbClr val="6A4CA3"/>
+            </a:solidFill>
+            <a:prstDash val="solid"/>
+          </a:ln>
+        </p:spPr>
+      </p:sp>
+      <p:sp>
+        <p:nvSpPr>
+          <p:cNvPr id="22" name="Text 20"/>
+          <p:cNvSpPr/>
+          <p:nvPr/>
+        </p:nvSpPr>
+        <p:spPr>
+          <a:xfrm>
+            <a:off x="10018776" y="3273552"/>
+            <a:ext cx="816864" cy="146304"/>
+          </a:xfrm>
+          <a:prstGeom prst="rect">
+            <a:avLst/>
+          </a:prstGeom>
+          <a:noFill/>
+          <a:ln/>
+        </p:spPr>
+        <p:txBody>
+          <a:bodyPr wrap="square" lIns="0" tIns="0" rIns="0" bIns="0" rtlCol="0" anchor="ctr">
+            <a:normAutofit/>
+          </a:bodyPr>
+          <a:lstStyle/>
+          <a:p>
+            <a:pPr algn="ctr" indent="0" marL="0">
+              <a:buNone/>
+            </a:pPr>
+            <a:r>
+              <a:rPr lang="en-US" sz="880" b="1" dirty="0">
+                <a:solidFill>
+                  <a:srgbClr val="FFFFFF"/>
+                </a:solidFill>
+                <a:latin typeface="Aptos" pitchFamily="34" charset="0"/>
+                <a:ea typeface="Aptos" pitchFamily="34" charset="-122"/>
+                <a:cs typeface="Aptos" pitchFamily="34" charset="-120"/>
+              </a:rPr>
+              <a:t>Oversee</a:t>
+            </a:r>
+            <a:endParaRPr lang="en-US" sz="880" dirty="0"/>
+          </a:p>
+        </p:txBody>
+      </p:sp>
+      <p:sp>
+        <p:nvSpPr>
+          <p:cNvPr id="23" name="Text 21"/>
+          <p:cNvSpPr/>
+          <p:nvPr/>
+        </p:nvSpPr>
+        <p:spPr>
+          <a:xfrm>
+            <a:off x="7854696" y="3694176"/>
+            <a:ext cx="3035808" cy="206654"/>
+          </a:xfrm>
+          <a:prstGeom prst="rect">
+            <a:avLst/>
+          </a:prstGeom>
+          <a:noFill/>
+          <a:ln/>
+        </p:spPr>
+        <p:txBody>
+          <a:bodyPr wrap="square" lIns="254" tIns="254" rIns="254" bIns="254" rtlCol="0" anchor="t">
+            <a:normAutofit/>
+          </a:bodyPr>
+          <a:lstStyle/>
+          <a:p>
+            <a:pPr indent="0" marL="0">
+              <a:buNone/>
+            </a:pPr>
+            <a:r>
+              <a:rPr lang="en-US" sz="1120" dirty="0">
+                <a:solidFill>
+                  <a:srgbClr val="17364A"/>
+                </a:solidFill>
+                <a:latin typeface="Aptos" pitchFamily="34" charset="0"/>
+                <a:ea typeface="Aptos" pitchFamily="34" charset="-122"/>
+                <a:cs typeface="Aptos" pitchFamily="34" charset="-120"/>
+              </a:rPr>
+              <a:t>A proposed AI use should move through documented review before it becomes an operational workflow.</a:t>
+            </a:r>
+            <a:endParaRPr lang="en-US" sz="1120" dirty="0"/>
+          </a:p>
+        </p:txBody>
+      </p:sp>
+      <p:sp>
+        <p:nvSpPr>
+          <p:cNvPr id="24" name="Shape 22"/>
+          <p:cNvSpPr/>
+          <p:nvPr/>
+        </p:nvSpPr>
+        <p:spPr>
+          <a:xfrm>
+            <a:off x="7635240" y="4184294"/>
+            <a:ext cx="3474720" cy="1466698"/>
+          </a:xfrm>
+          <a:prstGeom prst="roundRect">
+            <a:avLst>
+              <a:gd name="adj" fmla="val 7481"/>
             </a:avLst>
           </a:prstGeom>
           <a:solidFill>
@@ -15098,13 +15530,13 @@
       </p:sp>
       <p:sp>
         <p:nvSpPr>
-          <p:cNvPr id="17" name="Text 15"/>
-          <p:cNvSpPr/>
-          <p:nvPr/>
-        </p:nvSpPr>
-        <p:spPr>
-          <a:xfrm>
-            <a:off x="7799832" y="4645152"/>
+          <p:cNvPr id="25" name="Text 23"/>
+          <p:cNvSpPr/>
+          <p:nvPr/>
+        </p:nvSpPr>
+        <p:spPr>
+          <a:xfrm>
+            <a:off x="7799832" y="4330598"/>
             <a:ext cx="3145536" cy="256032"/>
           </a:xfrm>
           <a:prstGeom prst="rect">
@@ -15137,14 +15569,14 @@
       </p:sp>
       <p:sp>
         <p:nvSpPr>
-          <p:cNvPr id="18" name="Text 16"/>
-          <p:cNvSpPr/>
-          <p:nvPr/>
-        </p:nvSpPr>
-        <p:spPr>
-          <a:xfrm>
-            <a:off x="7799832" y="4974336"/>
-            <a:ext cx="3145536" cy="576072"/>
+          <p:cNvPr id="26" name="Text 24"/>
+          <p:cNvSpPr/>
+          <p:nvPr/>
+        </p:nvSpPr>
+        <p:spPr>
+          <a:xfrm>
+            <a:off x="7799832" y="4659782"/>
+            <a:ext cx="3145536" cy="899770"/>
           </a:xfrm>
           <a:prstGeom prst="rect">
             <a:avLst/>
@@ -15170,7 +15602,7 @@
                 <a:ea typeface="Aptos" pitchFamily="34" charset="-122"/>
                 <a:cs typeface="Aptos" pitchFamily="34" charset="-120"/>
               </a:rPr>
-              <a:t>Translate this concept into clear decision rights, review steps, documentation expectations, and escalation paths before.</a:t>
+              <a:t>Translate this concept into clear decision rights, review steps, documentation expectations, and escalation paths before an AI-supported workflow is approved.</a:t>
             </a:r>
             <a:endParaRPr lang="en-US" sz="1320" dirty="0"/>
           </a:p>
@@ -15539,11 +15971,11 @@
         <p:spPr>
           <a:xfrm>
             <a:off x="7635240" y="1325880"/>
-            <a:ext cx="3474720" cy="1325880"/>
+            <a:ext cx="3474720" cy="1255471"/>
           </a:xfrm>
           <a:prstGeom prst="roundRect">
             <a:avLst>
-              <a:gd name="adj" fmla="val 8276"/>
+              <a:gd name="adj" fmla="val 8740"/>
             </a:avLst>
           </a:prstGeom>
           <a:solidFill>
@@ -15605,7 +16037,7 @@
         <p:spPr>
           <a:xfrm>
             <a:off x="7799832" y="1801368"/>
-            <a:ext cx="3145536" cy="758952"/>
+            <a:ext cx="3145536" cy="688543"/>
           </a:xfrm>
           <a:prstGeom prst="rect">
             <a:avLst/>
@@ -15645,12 +16077,12 @@
         </p:nvSpPr>
         <p:spPr>
           <a:xfrm>
-            <a:off x="7635240" y="2788920"/>
-            <a:ext cx="3474720" cy="1536192"/>
+            <a:off x="7635240" y="2718511"/>
+            <a:ext cx="3474720" cy="1328623"/>
           </a:xfrm>
           <a:prstGeom prst="roundRect">
             <a:avLst>
-              <a:gd name="adj" fmla="val 7143"/>
+              <a:gd name="adj" fmla="val 8259"/>
             </a:avLst>
           </a:prstGeom>
           <a:solidFill>
@@ -15672,8 +16104,8 @@
         </p:nvSpPr>
         <p:spPr>
           <a:xfrm>
-            <a:off x="7799832" y="2935224"/>
-            <a:ext cx="3145536" cy="256032"/>
+            <a:off x="7799832" y="2846527"/>
+            <a:ext cx="3145536" cy="237744"/>
           </a:xfrm>
           <a:prstGeom prst="rect">
             <a:avLst/>
@@ -15689,7 +16121,7 @@
               <a:buNone/>
             </a:pPr>
             <a:r>
-              <a:rPr lang="en-US" sz="1300" b="1" dirty="0">
+              <a:rPr lang="en-US" sz="1250" b="1" dirty="0">
                 <a:solidFill>
                   <a:srgbClr val="0068B7"/>
                 </a:solidFill>
@@ -15697,101 +16129,317 @@
                 <a:ea typeface="Aptos" pitchFamily="34" charset="-122"/>
                 <a:cs typeface="Aptos" pitchFamily="34" charset="-120"/>
               </a:rPr>
-              <a:t>Concept checkpoints</a:t>
-            </a:r>
-            <a:endParaRPr lang="en-US" sz="1300" dirty="0"/>
-          </a:p>
-        </p:txBody>
-      </p:sp>
-      <p:sp>
-        <p:nvSpPr>
-          <p:cNvPr id="15" name="Text 13"/>
-          <p:cNvSpPr/>
-          <p:nvPr/>
-        </p:nvSpPr>
-        <p:spPr>
-          <a:xfrm>
-            <a:off x="7818120" y="3300984"/>
-            <a:ext cx="3090672" cy="877824"/>
-          </a:xfrm>
-          <a:prstGeom prst="rect">
-            <a:avLst/>
-          </a:prstGeom>
-          <a:noFill/>
-          <a:ln/>
-        </p:spPr>
-        <p:txBody>
-          <a:bodyPr wrap="square" lIns="508" tIns="508" rIns="508" bIns="508" rtlCol="0" anchor="t">
+              <a:t>Governance pathway</a:t>
+            </a:r>
+            <a:endParaRPr lang="en-US" sz="1250" dirty="0"/>
+          </a:p>
+        </p:txBody>
+      </p:sp>
+      <p:sp>
+        <p:nvSpPr>
+          <p:cNvPr id="15" name="Shape 13"/>
+          <p:cNvSpPr/>
+          <p:nvPr/>
+        </p:nvSpPr>
+        <p:spPr>
+          <a:xfrm>
+            <a:off x="8763000" y="3399739"/>
+            <a:ext cx="164592" cy="0"/>
+          </a:xfrm>
+          <a:prstGeom prst="line">
+            <a:avLst/>
+          </a:prstGeom>
+          <a:noFill/>
+          <a:ln w="15240">
+            <a:solidFill>
+              <a:srgbClr val="8ABBD8"/>
+            </a:solidFill>
+            <a:prstDash val="solid"/>
+          </a:ln>
+        </p:spPr>
+      </p:sp>
+      <p:sp>
+        <p:nvSpPr>
+          <p:cNvPr id="16" name="Shape 14"/>
+          <p:cNvSpPr/>
+          <p:nvPr/>
+        </p:nvSpPr>
+        <p:spPr>
+          <a:xfrm>
+            <a:off x="7872984" y="3248863"/>
+            <a:ext cx="890016" cy="301752"/>
+          </a:xfrm>
+          <a:prstGeom prst="roundRect">
+            <a:avLst>
+              <a:gd name="adj" fmla="val 24242"/>
+            </a:avLst>
+          </a:prstGeom>
+          <a:solidFill>
+            <a:srgbClr val="0068B7"/>
+          </a:solidFill>
+          <a:ln w="12700">
+            <a:solidFill>
+              <a:srgbClr val="0068B7"/>
+            </a:solidFill>
+            <a:prstDash val="solid"/>
+          </a:ln>
+        </p:spPr>
+      </p:sp>
+      <p:sp>
+        <p:nvSpPr>
+          <p:cNvPr id="17" name="Text 15"/>
+          <p:cNvSpPr/>
+          <p:nvPr/>
+        </p:nvSpPr>
+        <p:spPr>
+          <a:xfrm>
+            <a:off x="7909560" y="3322015"/>
+            <a:ext cx="816864" cy="146304"/>
+          </a:xfrm>
+          <a:prstGeom prst="rect">
+            <a:avLst/>
+          </a:prstGeom>
+          <a:noFill/>
+          <a:ln/>
+        </p:spPr>
+        <p:txBody>
+          <a:bodyPr wrap="square" lIns="0" tIns="0" rIns="0" bIns="0" rtlCol="0" anchor="ctr">
             <a:normAutofit/>
           </a:bodyPr>
           <a:lstStyle/>
           <a:p>
-            <a:pPr indent="0" marL="0">
-              <a:buNone/>
-            </a:pPr>
-            <a:r>
-              <a:rPr lang="en-US" sz="1220" dirty="0">
-                <a:solidFill>
-                  <a:srgbClr val="17364A"/>
-                </a:solidFill>
-                <a:latin typeface="Aptos" pitchFamily="34" charset="0"/>
-                <a:ea typeface="Aptos" pitchFamily="34" charset="-122"/>
-                <a:cs typeface="Aptos" pitchFamily="34" charset="-120"/>
-              </a:rPr>
-              <a:t>Public health agencies operate under legal authorities, public.</a:t>
-            </a:r>
-            <a:endParaRPr lang="en-US" sz="1220" dirty="0"/>
-          </a:p>
-          <a:p>
-            <a:pPr indent="0" marL="0">
-              <a:buNone/>
-            </a:pPr>
-            <a:r>
-              <a:rPr lang="en-US" sz="1220" dirty="0">
-                <a:solidFill>
-                  <a:srgbClr val="17364A"/>
-                </a:solidFill>
-                <a:latin typeface="Aptos" pitchFamily="34" charset="0"/>
-                <a:ea typeface="Aptos" pitchFamily="34" charset="-122"/>
-                <a:cs typeface="Aptos" pitchFamily="34" charset="-120"/>
-              </a:rPr>
-              <a:t>It must define how the agency decides which AI uses are.</a:t>
-            </a:r>
-            <a:endParaRPr lang="en-US" sz="1220" dirty="0"/>
-          </a:p>
-          <a:p>
-            <a:pPr indent="0" marL="0">
-              <a:buNone/>
-            </a:pPr>
-            <a:r>
-              <a:rPr lang="en-US" sz="1220" dirty="0">
-                <a:solidFill>
-                  <a:srgbClr val="17364A"/>
-                </a:solidFill>
-                <a:latin typeface="Aptos" pitchFamily="34" charset="0"/>
-                <a:ea typeface="Aptos" pitchFamily="34" charset="-122"/>
-                <a:cs typeface="Aptos" pitchFamily="34" charset="-120"/>
-              </a:rPr>
-              <a:t>A governance operating model also helps avoid the problem of.</a:t>
-            </a:r>
-            <a:endParaRPr lang="en-US" sz="1220" dirty="0"/>
-          </a:p>
-        </p:txBody>
-      </p:sp>
-      <p:sp>
-        <p:nvSpPr>
-          <p:cNvPr id="16" name="Shape 14"/>
-          <p:cNvSpPr/>
-          <p:nvPr/>
-        </p:nvSpPr>
-        <p:spPr>
-          <a:xfrm>
-            <a:off x="7635240" y="4498848"/>
-            <a:ext cx="3474720" cy="1143000"/>
+            <a:pPr algn="ctr" indent="0" marL="0">
+              <a:buNone/>
+            </a:pPr>
+            <a:r>
+              <a:rPr lang="en-US" sz="880" b="1" dirty="0">
+                <a:solidFill>
+                  <a:srgbClr val="FFFFFF"/>
+                </a:solidFill>
+                <a:latin typeface="Aptos" pitchFamily="34" charset="0"/>
+                <a:ea typeface="Aptos" pitchFamily="34" charset="-122"/>
+                <a:cs typeface="Aptos" pitchFamily="34" charset="-120"/>
+              </a:rPr>
+              <a:t>Submit</a:t>
+            </a:r>
+            <a:endParaRPr lang="en-US" sz="880" dirty="0"/>
+          </a:p>
+        </p:txBody>
+      </p:sp>
+      <p:sp>
+        <p:nvSpPr>
+          <p:cNvPr id="18" name="Shape 16"/>
+          <p:cNvSpPr/>
+          <p:nvPr/>
+        </p:nvSpPr>
+        <p:spPr>
+          <a:xfrm>
+            <a:off x="9817608" y="3399739"/>
+            <a:ext cx="164592" cy="0"/>
+          </a:xfrm>
+          <a:prstGeom prst="line">
+            <a:avLst/>
+          </a:prstGeom>
+          <a:noFill/>
+          <a:ln w="15240">
+            <a:solidFill>
+              <a:srgbClr val="8ABBD8"/>
+            </a:solidFill>
+            <a:prstDash val="solid"/>
+          </a:ln>
+        </p:spPr>
+      </p:sp>
+      <p:sp>
+        <p:nvSpPr>
+          <p:cNvPr id="19" name="Shape 17"/>
+          <p:cNvSpPr/>
+          <p:nvPr/>
+        </p:nvSpPr>
+        <p:spPr>
+          <a:xfrm>
+            <a:off x="8927592" y="3248863"/>
+            <a:ext cx="890016" cy="301752"/>
           </a:xfrm>
           <a:prstGeom prst="roundRect">
             <a:avLst>
-              <a:gd name="adj" fmla="val 9600"/>
+              <a:gd name="adj" fmla="val 24242"/>
+            </a:avLst>
+          </a:prstGeom>
+          <a:solidFill>
+            <a:srgbClr val="2F8A28"/>
+          </a:solidFill>
+          <a:ln w="12700">
+            <a:solidFill>
+              <a:srgbClr val="2F8A28"/>
+            </a:solidFill>
+            <a:prstDash val="solid"/>
+          </a:ln>
+        </p:spPr>
+      </p:sp>
+      <p:sp>
+        <p:nvSpPr>
+          <p:cNvPr id="20" name="Text 18"/>
+          <p:cNvSpPr/>
+          <p:nvPr/>
+        </p:nvSpPr>
+        <p:spPr>
+          <a:xfrm>
+            <a:off x="8964168" y="3322015"/>
+            <a:ext cx="816864" cy="146304"/>
+          </a:xfrm>
+          <a:prstGeom prst="rect">
+            <a:avLst/>
+          </a:prstGeom>
+          <a:noFill/>
+          <a:ln/>
+        </p:spPr>
+        <p:txBody>
+          <a:bodyPr wrap="square" lIns="0" tIns="0" rIns="0" bIns="0" rtlCol="0" anchor="ctr">
+            <a:normAutofit/>
+          </a:bodyPr>
+          <a:lstStyle/>
+          <a:p>
+            <a:pPr algn="ctr" indent="0" marL="0">
+              <a:buNone/>
+            </a:pPr>
+            <a:r>
+              <a:rPr lang="en-US" sz="880" b="1" dirty="0">
+                <a:solidFill>
+                  <a:srgbClr val="FFFFFF"/>
+                </a:solidFill>
+                <a:latin typeface="Aptos" pitchFamily="34" charset="0"/>
+                <a:ea typeface="Aptos" pitchFamily="34" charset="-122"/>
+                <a:cs typeface="Aptos" pitchFamily="34" charset="-120"/>
+              </a:rPr>
+              <a:t>Review</a:t>
+            </a:r>
+            <a:endParaRPr lang="en-US" sz="880" dirty="0"/>
+          </a:p>
+        </p:txBody>
+      </p:sp>
+      <p:sp>
+        <p:nvSpPr>
+          <p:cNvPr id="21" name="Shape 19"/>
+          <p:cNvSpPr/>
+          <p:nvPr/>
+        </p:nvSpPr>
+        <p:spPr>
+          <a:xfrm>
+            <a:off x="9982200" y="3248863"/>
+            <a:ext cx="890016" cy="301752"/>
+          </a:xfrm>
+          <a:prstGeom prst="roundRect">
+            <a:avLst>
+              <a:gd name="adj" fmla="val 24242"/>
+            </a:avLst>
+          </a:prstGeom>
+          <a:solidFill>
+            <a:srgbClr val="6A4CA3"/>
+          </a:solidFill>
+          <a:ln w="12700">
+            <a:solidFill>
+              <a:srgbClr val="6A4CA3"/>
+            </a:solidFill>
+            <a:prstDash val="solid"/>
+          </a:ln>
+        </p:spPr>
+      </p:sp>
+      <p:sp>
+        <p:nvSpPr>
+          <p:cNvPr id="22" name="Text 20"/>
+          <p:cNvSpPr/>
+          <p:nvPr/>
+        </p:nvSpPr>
+        <p:spPr>
+          <a:xfrm>
+            <a:off x="10018776" y="3322015"/>
+            <a:ext cx="816864" cy="146304"/>
+          </a:xfrm>
+          <a:prstGeom prst="rect">
+            <a:avLst/>
+          </a:prstGeom>
+          <a:noFill/>
+          <a:ln/>
+        </p:spPr>
+        <p:txBody>
+          <a:bodyPr wrap="square" lIns="0" tIns="0" rIns="0" bIns="0" rtlCol="0" anchor="ctr">
+            <a:normAutofit/>
+          </a:bodyPr>
+          <a:lstStyle/>
+          <a:p>
+            <a:pPr algn="ctr" indent="0" marL="0">
+              <a:buNone/>
+            </a:pPr>
+            <a:r>
+              <a:rPr lang="en-US" sz="880" b="1" dirty="0">
+                <a:solidFill>
+                  <a:srgbClr val="FFFFFF"/>
+                </a:solidFill>
+                <a:latin typeface="Aptos" pitchFamily="34" charset="0"/>
+                <a:ea typeface="Aptos" pitchFamily="34" charset="-122"/>
+                <a:cs typeface="Aptos" pitchFamily="34" charset="-120"/>
+              </a:rPr>
+              <a:t>Oversee</a:t>
+            </a:r>
+            <a:endParaRPr lang="en-US" sz="880" dirty="0"/>
+          </a:p>
+        </p:txBody>
+      </p:sp>
+      <p:sp>
+        <p:nvSpPr>
+          <p:cNvPr id="23" name="Text 21"/>
+          <p:cNvSpPr/>
+          <p:nvPr/>
+        </p:nvSpPr>
+        <p:spPr>
+          <a:xfrm>
+            <a:off x="7854696" y="3742639"/>
+            <a:ext cx="3035808" cy="158191"/>
+          </a:xfrm>
+          <a:prstGeom prst="rect">
+            <a:avLst/>
+          </a:prstGeom>
+          <a:noFill/>
+          <a:ln/>
+        </p:spPr>
+        <p:txBody>
+          <a:bodyPr wrap="square" lIns="254" tIns="254" rIns="254" bIns="254" rtlCol="0" anchor="t">
+            <a:normAutofit/>
+          </a:bodyPr>
+          <a:lstStyle/>
+          <a:p>
+            <a:pPr indent="0" marL="0">
+              <a:buNone/>
+            </a:pPr>
+            <a:r>
+              <a:rPr lang="en-US" sz="1120" dirty="0">
+                <a:solidFill>
+                  <a:srgbClr val="17364A"/>
+                </a:solidFill>
+                <a:latin typeface="Aptos" pitchFamily="34" charset="0"/>
+                <a:ea typeface="Aptos" pitchFamily="34" charset="-122"/>
+                <a:cs typeface="Aptos" pitchFamily="34" charset="-120"/>
+              </a:rPr>
+              <a:t>A proposed AI use should move through documented review before it becomes an operational workflow.</a:t>
+            </a:r>
+            <a:endParaRPr lang="en-US" sz="1120" dirty="0"/>
+          </a:p>
+        </p:txBody>
+      </p:sp>
+      <p:sp>
+        <p:nvSpPr>
+          <p:cNvPr id="24" name="Shape 22"/>
+          <p:cNvSpPr/>
+          <p:nvPr/>
+        </p:nvSpPr>
+        <p:spPr>
+          <a:xfrm>
+            <a:off x="7635240" y="4184294"/>
+            <a:ext cx="3474720" cy="1466698"/>
+          </a:xfrm>
+          <a:prstGeom prst="roundRect">
+            <a:avLst>
+              <a:gd name="adj" fmla="val 7481"/>
             </a:avLst>
           </a:prstGeom>
           <a:solidFill>
@@ -15807,13 +16455,13 @@
       </p:sp>
       <p:sp>
         <p:nvSpPr>
-          <p:cNvPr id="17" name="Text 15"/>
-          <p:cNvSpPr/>
-          <p:nvPr/>
-        </p:nvSpPr>
-        <p:spPr>
-          <a:xfrm>
-            <a:off x="7799832" y="4645152"/>
+          <p:cNvPr id="25" name="Text 23"/>
+          <p:cNvSpPr/>
+          <p:nvPr/>
+        </p:nvSpPr>
+        <p:spPr>
+          <a:xfrm>
+            <a:off x="7799832" y="4330598"/>
             <a:ext cx="3145536" cy="256032"/>
           </a:xfrm>
           <a:prstGeom prst="rect">
@@ -15846,14 +16494,14 @@
       </p:sp>
       <p:sp>
         <p:nvSpPr>
-          <p:cNvPr id="18" name="Text 16"/>
-          <p:cNvSpPr/>
-          <p:nvPr/>
-        </p:nvSpPr>
-        <p:spPr>
-          <a:xfrm>
-            <a:off x="7799832" y="4974336"/>
-            <a:ext cx="3145536" cy="576072"/>
+          <p:cNvPr id="26" name="Text 24"/>
+          <p:cNvSpPr/>
+          <p:nvPr/>
+        </p:nvSpPr>
+        <p:spPr>
+          <a:xfrm>
+            <a:off x="7799832" y="4659782"/>
+            <a:ext cx="3145536" cy="899770"/>
           </a:xfrm>
           <a:prstGeom prst="rect">
             <a:avLst/>
@@ -15879,7 +16527,7 @@
                 <a:ea typeface="Aptos" pitchFamily="34" charset="-122"/>
                 <a:cs typeface="Aptos" pitchFamily="34" charset="-120"/>
               </a:rPr>
-              <a:t>Translate this concept into clear decision rights, review steps, documentation expectations, and escalation paths before.</a:t>
+              <a:t>Translate this concept into clear decision rights, review steps, documentation expectations, and escalation paths before an AI-supported workflow is approved.</a:t>
             </a:r>
             <a:endParaRPr lang="en-US" sz="1320" dirty="0"/>
           </a:p>
@@ -16248,11 +16896,11 @@
         <p:spPr>
           <a:xfrm>
             <a:off x="7635240" y="1325880"/>
-            <a:ext cx="3474720" cy="1325880"/>
+            <a:ext cx="3474720" cy="1255471"/>
           </a:xfrm>
           <a:prstGeom prst="roundRect">
             <a:avLst>
-              <a:gd name="adj" fmla="val 8276"/>
+              <a:gd name="adj" fmla="val 8740"/>
             </a:avLst>
           </a:prstGeom>
           <a:solidFill>
@@ -16314,7 +16962,7 @@
         <p:spPr>
           <a:xfrm>
             <a:off x="7799832" y="1801368"/>
-            <a:ext cx="3145536" cy="758952"/>
+            <a:ext cx="3145536" cy="688543"/>
           </a:xfrm>
           <a:prstGeom prst="rect">
             <a:avLst/>
@@ -16354,12 +17002,12 @@
         </p:nvSpPr>
         <p:spPr>
           <a:xfrm>
-            <a:off x="7635240" y="2788920"/>
-            <a:ext cx="3474720" cy="1536192"/>
+            <a:off x="7635240" y="2718511"/>
+            <a:ext cx="3474720" cy="1328623"/>
           </a:xfrm>
           <a:prstGeom prst="roundRect">
             <a:avLst>
-              <a:gd name="adj" fmla="val 7143"/>
+              <a:gd name="adj" fmla="val 8259"/>
             </a:avLst>
           </a:prstGeom>
           <a:solidFill>
@@ -16381,7 +17029,7 @@
         </p:nvSpPr>
         <p:spPr>
           <a:xfrm>
-            <a:off x="7799832" y="2935224"/>
+            <a:off x="7799832" y="2864815"/>
             <a:ext cx="3145536" cy="256032"/>
           </a:xfrm>
           <a:prstGeom prst="rect">
@@ -16420,8 +17068,8 @@
         </p:nvSpPr>
         <p:spPr>
           <a:xfrm>
-            <a:off x="7818120" y="3300984"/>
-            <a:ext cx="3090672" cy="877824"/>
+            <a:off x="7818120" y="3230575"/>
+            <a:ext cx="3090672" cy="670255"/>
           </a:xfrm>
           <a:prstGeom prst="rect">
             <a:avLst/>
@@ -16495,12 +17143,12 @@
         </p:nvSpPr>
         <p:spPr>
           <a:xfrm>
-            <a:off x="7635240" y="4498848"/>
-            <a:ext cx="3474720" cy="1143000"/>
+            <a:off x="7635240" y="4184294"/>
+            <a:ext cx="3474720" cy="1466698"/>
           </a:xfrm>
           <a:prstGeom prst="roundRect">
             <a:avLst>
-              <a:gd name="adj" fmla="val 9600"/>
+              <a:gd name="adj" fmla="val 7481"/>
             </a:avLst>
           </a:prstGeom>
           <a:solidFill>
@@ -16522,7 +17170,7 @@
         </p:nvSpPr>
         <p:spPr>
           <a:xfrm>
-            <a:off x="7799832" y="4645152"/>
+            <a:off x="7799832" y="4330598"/>
             <a:ext cx="3145536" cy="256032"/>
           </a:xfrm>
           <a:prstGeom prst="rect">
@@ -16561,8 +17209,8 @@
         </p:nvSpPr>
         <p:spPr>
           <a:xfrm>
-            <a:off x="7799832" y="4974336"/>
-            <a:ext cx="3145536" cy="576072"/>
+            <a:off x="7799832" y="4659782"/>
+            <a:ext cx="3145536" cy="899770"/>
           </a:xfrm>
           <a:prstGeom prst="rect">
             <a:avLst/>
@@ -16588,7 +17236,7 @@
                 <a:ea typeface="Aptos" pitchFamily="34" charset="-122"/>
                 <a:cs typeface="Aptos" pitchFamily="34" charset="-120"/>
               </a:rPr>
-              <a:t>Translate this concept into clear decision rights, review steps, documentation expectations, and escalation paths before.</a:t>
+              <a:t>Translate this concept into clear decision rights, review steps, documentation expectations, and escalation paths before an AI-supported workflow is approved.</a:t>
             </a:r>
             <a:endParaRPr lang="en-US" sz="1320" dirty="0"/>
           </a:p>

--- a/downloads/presentations/modules/gov-400.pptx
+++ b/downloads/presentations/modules/gov-400.pptx
@@ -3243,8 +3243,8 @@
         </p:nvSpPr>
         <p:spPr>
           <a:xfrm>
-            <a:off x="868680" y="1508760"/>
-            <a:ext cx="6309360" cy="4160520"/>
+            <a:off x="822960" y="1463040"/>
+            <a:ext cx="6565392" cy="4343400"/>
           </a:xfrm>
           <a:prstGeom prst="rect">
             <a:avLst/>
@@ -3262,7 +3262,7 @@
               <a:buNone/>
             </a:pPr>
             <a:r>
-              <a:rPr lang="en-US" sz="2100" dirty="0">
+              <a:rPr lang="en-US" sz="1920" dirty="0">
                 <a:solidFill>
                   <a:srgbClr val="003A63"/>
                 </a:solidFill>
@@ -3272,14 +3272,14 @@
               </a:rPr>
               <a:t>• A strong governance charter begins with purpose and scope.</a:t>
             </a:r>
-            <a:endParaRPr lang="en-US" sz="2100" dirty="0"/>
-          </a:p>
-          <a:p>
-            <a:pPr indent="0" marL="0">
-              <a:buNone/>
-            </a:pPr>
-            <a:r>
-              <a:rPr lang="en-US" sz="2100" dirty="0">
+            <a:endParaRPr lang="en-US" sz="1920" dirty="0"/>
+          </a:p>
+          <a:p>
+            <a:pPr indent="0" marL="0">
+              <a:buNone/>
+            </a:pPr>
+            <a:r>
+              <a:rPr lang="en-US" sz="1920" dirty="0">
                 <a:solidFill>
                   <a:srgbClr val="003A63"/>
                 </a:solidFill>
@@ -3287,16 +3287,16 @@
                 <a:ea typeface="Aptos" pitchFamily="34" charset="-122"/>
                 <a:cs typeface="Aptos" pitchFamily="34" charset="-120"/>
               </a:rPr>
-              <a:t>• Purpose explains why the governance body exists, such as protecting public trust, supporting.</a:t>
-            </a:r>
-            <a:endParaRPr lang="en-US" sz="2100" dirty="0"/>
-          </a:p>
-          <a:p>
-            <a:pPr indent="0" marL="0">
-              <a:buNone/>
-            </a:pPr>
-            <a:r>
-              <a:rPr lang="en-US" sz="2100" dirty="0">
+              <a:t>• Purpose explains why the governance body exists, such as protecting public.</a:t>
+            </a:r>
+            <a:endParaRPr lang="en-US" sz="1920" dirty="0"/>
+          </a:p>
+          <a:p>
+            <a:pPr indent="0" marL="0">
+              <a:buNone/>
+            </a:pPr>
+            <a:r>
+              <a:rPr lang="en-US" sz="1920" dirty="0">
                 <a:solidFill>
                   <a:srgbClr val="003A63"/>
                 </a:solidFill>
@@ -3306,7 +3306,7 @@
               </a:rPr>
               <a:t>• Scope explains what falls under the governance process.</a:t>
             </a:r>
-            <a:endParaRPr lang="en-US" sz="2100" dirty="0"/>
+            <a:endParaRPr lang="en-US" sz="1920" dirty="0"/>
           </a:p>
         </p:txBody>
       </p:sp>
@@ -3318,12 +3318,12 @@
         </p:nvSpPr>
         <p:spPr>
           <a:xfrm>
-            <a:off x="7635240" y="1325880"/>
-            <a:ext cx="3474720" cy="1207008"/>
+            <a:off x="7543800" y="1325880"/>
+            <a:ext cx="3611880" cy="1261872"/>
           </a:xfrm>
           <a:prstGeom prst="roundRect">
             <a:avLst>
-              <a:gd name="adj" fmla="val 9091"/>
+              <a:gd name="adj" fmla="val 8696"/>
             </a:avLst>
           </a:prstGeom>
           <a:solidFill>
@@ -3345,8 +3345,8 @@
         </p:nvSpPr>
         <p:spPr>
           <a:xfrm>
-            <a:off x="7799832" y="1472184"/>
-            <a:ext cx="3145536" cy="256032"/>
+            <a:off x="7708392" y="1453896"/>
+            <a:ext cx="3282696" cy="228600"/>
           </a:xfrm>
           <a:prstGeom prst="rect">
             <a:avLst/>
@@ -3362,7 +3362,7 @@
               <a:buNone/>
             </a:pPr>
             <a:r>
-              <a:rPr lang="en-US" sz="1300" b="1" dirty="0">
+              <a:rPr lang="en-US" sz="1220" b="1" dirty="0">
                 <a:solidFill>
                   <a:srgbClr val="0068B7"/>
                 </a:solidFill>
@@ -3372,7 +3372,7 @@
               </a:rPr>
               <a:t>Governance lens</a:t>
             </a:r>
-            <a:endParaRPr lang="en-US" sz="1300" dirty="0"/>
+            <a:endParaRPr lang="en-US" sz="1220" dirty="0"/>
           </a:p>
         </p:txBody>
       </p:sp>
@@ -3384,8 +3384,8 @@
         </p:nvSpPr>
         <p:spPr>
           <a:xfrm>
-            <a:off x="7799832" y="1801368"/>
-            <a:ext cx="3145536" cy="640080"/>
+            <a:off x="7708392" y="1764792"/>
+            <a:ext cx="3282696" cy="749808"/>
           </a:xfrm>
           <a:prstGeom prst="rect">
             <a:avLst/>
@@ -3403,7 +3403,7 @@
               <a:buNone/>
             </a:pPr>
             <a:r>
-              <a:rPr lang="en-US" sz="1320" dirty="0">
+              <a:rPr lang="en-US" sz="1220" dirty="0">
                 <a:solidFill>
                   <a:srgbClr val="17364A"/>
                 </a:solidFill>
@@ -3413,7 +3413,7 @@
               </a:rPr>
               <a:t>A strong governance charter begins with purpose and scope.</a:t>
             </a:r>
-            <a:endParaRPr lang="en-US" sz="1320" dirty="0"/>
+            <a:endParaRPr lang="en-US" sz="1220" dirty="0"/>
           </a:p>
         </p:txBody>
       </p:sp>
@@ -3425,12 +3425,12 @@
         </p:nvSpPr>
         <p:spPr>
           <a:xfrm>
-            <a:off x="7635240" y="2670048"/>
-            <a:ext cx="3474720" cy="1377086"/>
+            <a:off x="7543800" y="2724912"/>
+            <a:ext cx="3611880" cy="1527048"/>
           </a:xfrm>
           <a:prstGeom prst="roundRect">
             <a:avLst>
-              <a:gd name="adj" fmla="val 7968"/>
+              <a:gd name="adj" fmla="val 7186"/>
             </a:avLst>
           </a:prstGeom>
           <a:solidFill>
@@ -3452,8 +3452,8 @@
         </p:nvSpPr>
         <p:spPr>
           <a:xfrm>
-            <a:off x="7799832" y="2816352"/>
-            <a:ext cx="3145536" cy="256032"/>
+            <a:off x="7708392" y="2852928"/>
+            <a:ext cx="3282696" cy="228600"/>
           </a:xfrm>
           <a:prstGeom prst="rect">
             <a:avLst/>
@@ -3469,7 +3469,7 @@
               <a:buNone/>
             </a:pPr>
             <a:r>
-              <a:rPr lang="en-US" sz="1300" b="1" dirty="0">
+              <a:rPr lang="en-US" sz="1220" b="1" dirty="0">
                 <a:solidFill>
                   <a:srgbClr val="0068B7"/>
                 </a:solidFill>
@@ -3479,7 +3479,7 @@
               </a:rPr>
               <a:t>Concept checkpoints</a:t>
             </a:r>
-            <a:endParaRPr lang="en-US" sz="1300" dirty="0"/>
+            <a:endParaRPr lang="en-US" sz="1220" dirty="0"/>
           </a:p>
         </p:txBody>
       </p:sp>
@@ -3491,8 +3491,8 @@
         </p:nvSpPr>
         <p:spPr>
           <a:xfrm>
-            <a:off x="7818120" y="3182112"/>
-            <a:ext cx="3090672" cy="718718"/>
+            <a:off x="7726680" y="3182112"/>
+            <a:ext cx="3227832" cy="960120"/>
           </a:xfrm>
           <a:prstGeom prst="rect">
             <a:avLst/>
@@ -3510,7 +3510,7 @@
               <a:buNone/>
             </a:pPr>
             <a:r>
-              <a:rPr lang="en-US" sz="1220" dirty="0">
+              <a:rPr lang="en-US" sz="1140" dirty="0">
                 <a:solidFill>
                   <a:srgbClr val="17364A"/>
                 </a:solidFill>
@@ -3518,16 +3518,16 @@
                 <a:ea typeface="Aptos" pitchFamily="34" charset="-122"/>
                 <a:cs typeface="Aptos" pitchFamily="34" charset="-120"/>
               </a:rPr>
-              <a:t>Purpose explains why the governance body exists, such as.</a:t>
-            </a:r>
-            <a:endParaRPr lang="en-US" sz="1220" dirty="0"/>
-          </a:p>
-          <a:p>
-            <a:pPr indent="0" marL="0">
-              <a:buNone/>
-            </a:pPr>
-            <a:r>
-              <a:rPr lang="en-US" sz="1220" dirty="0">
+              <a:t>Purpose explains why the governance body exists,.</a:t>
+            </a:r>
+            <a:endParaRPr lang="en-US" sz="1140" dirty="0"/>
+          </a:p>
+          <a:p>
+            <a:pPr indent="0" marL="0">
+              <a:buNone/>
+            </a:pPr>
+            <a:r>
+              <a:rPr lang="en-US" sz="1140" dirty="0">
                 <a:solidFill>
                   <a:srgbClr val="17364A"/>
                 </a:solidFill>
@@ -3535,16 +3535,16 @@
                 <a:ea typeface="Aptos" pitchFamily="34" charset="-122"/>
                 <a:cs typeface="Aptos" pitchFamily="34" charset="-120"/>
               </a:rPr>
-              <a:t>For public health, scope should include internally developed AI.</a:t>
-            </a:r>
-            <a:endParaRPr lang="en-US" sz="1220" dirty="0"/>
-          </a:p>
-          <a:p>
-            <a:pPr indent="0" marL="0">
-              <a:buNone/>
-            </a:pPr>
-            <a:r>
-              <a:rPr lang="en-US" sz="1220" dirty="0">
+              <a:t>For public health, scope should include internally.</a:t>
+            </a:r>
+            <a:endParaRPr lang="en-US" sz="1140" dirty="0"/>
+          </a:p>
+          <a:p>
+            <a:pPr indent="0" marL="0">
+              <a:buNone/>
+            </a:pPr>
+            <a:r>
+              <a:rPr lang="en-US" sz="1140" dirty="0">
                 <a:solidFill>
                   <a:srgbClr val="17364A"/>
                 </a:solidFill>
@@ -3554,7 +3554,7 @@
               </a:rPr>
               <a:t>The operating model should define roles clearly.</a:t>
             </a:r>
-            <a:endParaRPr lang="en-US" sz="1220" dirty="0"/>
+            <a:endParaRPr lang="en-US" sz="1140" dirty="0"/>
           </a:p>
         </p:txBody>
       </p:sp>
@@ -3566,12 +3566,12 @@
         </p:nvSpPr>
         <p:spPr>
           <a:xfrm>
-            <a:off x="7635240" y="4184294"/>
-            <a:ext cx="3474720" cy="1466698"/>
+            <a:off x="7543800" y="4389120"/>
+            <a:ext cx="3611880" cy="1261872"/>
           </a:xfrm>
           <a:prstGeom prst="roundRect">
             <a:avLst>
-              <a:gd name="adj" fmla="val 7481"/>
+              <a:gd name="adj" fmla="val 8696"/>
             </a:avLst>
           </a:prstGeom>
           <a:solidFill>
@@ -3593,8 +3593,8 @@
         </p:nvSpPr>
         <p:spPr>
           <a:xfrm>
-            <a:off x="7799832" y="4330598"/>
-            <a:ext cx="3145536" cy="256032"/>
+            <a:off x="7708392" y="4517136"/>
+            <a:ext cx="3282696" cy="228600"/>
           </a:xfrm>
           <a:prstGeom prst="rect">
             <a:avLst/>
@@ -3610,7 +3610,7 @@
               <a:buNone/>
             </a:pPr>
             <a:r>
-              <a:rPr lang="en-US" sz="1300" b="1" dirty="0">
+              <a:rPr lang="en-US" sz="1220" b="1" dirty="0">
                 <a:solidFill>
                   <a:srgbClr val="0068B7"/>
                 </a:solidFill>
@@ -3620,7 +3620,7 @@
               </a:rPr>
               <a:t>What to document</a:t>
             </a:r>
-            <a:endParaRPr lang="en-US" sz="1300" dirty="0"/>
+            <a:endParaRPr lang="en-US" sz="1220" dirty="0"/>
           </a:p>
         </p:txBody>
       </p:sp>
@@ -3632,8 +3632,8 @@
         </p:nvSpPr>
         <p:spPr>
           <a:xfrm>
-            <a:off x="7799832" y="4659782"/>
-            <a:ext cx="3145536" cy="899770"/>
+            <a:off x="7708392" y="4828032"/>
+            <a:ext cx="3282696" cy="749808"/>
           </a:xfrm>
           <a:prstGeom prst="rect">
             <a:avLst/>
@@ -3651,7 +3651,7 @@
               <a:buNone/>
             </a:pPr>
             <a:r>
-              <a:rPr lang="en-US" sz="1320" dirty="0">
+              <a:rPr lang="en-US" sz="1220" dirty="0">
                 <a:solidFill>
                   <a:srgbClr val="17364A"/>
                 </a:solidFill>
@@ -3659,9 +3659,9 @@
                 <a:ea typeface="Aptos" pitchFamily="34" charset="-122"/>
                 <a:cs typeface="Aptos" pitchFamily="34" charset="-120"/>
               </a:rPr>
-              <a:t>Translate this concept into clear decision rights, review steps, documentation expectations, and escalation paths before an AI-supported workflow is approved.</a:t>
-            </a:r>
-            <a:endParaRPr lang="en-US" sz="1320" dirty="0"/>
+              <a:t>Translate this concept into clear decision rights, review steps, documentation.</a:t>
+            </a:r>
+            <a:endParaRPr lang="en-US" sz="1220" dirty="0"/>
           </a:p>
         </p:txBody>
       </p:sp>
@@ -3952,8 +3952,8 @@
         </p:nvSpPr>
         <p:spPr>
           <a:xfrm>
-            <a:off x="868680" y="1508760"/>
-            <a:ext cx="6309360" cy="4160520"/>
+            <a:off x="822960" y="1463040"/>
+            <a:ext cx="6565392" cy="4343400"/>
           </a:xfrm>
           <a:prstGeom prst="rect">
             <a:avLst/>
@@ -3971,7 +3971,7 @@
               <a:buNone/>
             </a:pPr>
             <a:r>
-              <a:rPr lang="en-US" sz="2100" dirty="0">
+              <a:rPr lang="en-US" sz="1920" dirty="0">
                 <a:solidFill>
                   <a:srgbClr val="003A63"/>
                 </a:solidFill>
@@ -3981,14 +3981,14 @@
               </a:rPr>
               <a:t>• A common failure mode is governance that exists only on paper.</a:t>
             </a:r>
-            <a:endParaRPr lang="en-US" sz="2100" dirty="0"/>
-          </a:p>
-          <a:p>
-            <a:pPr indent="0" marL="0">
-              <a:buNone/>
-            </a:pPr>
-            <a:r>
-              <a:rPr lang="en-US" sz="2100" dirty="0">
+            <a:endParaRPr lang="en-US" sz="1920" dirty="0"/>
+          </a:p>
+          <a:p>
+            <a:pPr indent="0" marL="0">
+              <a:buNone/>
+            </a:pPr>
+            <a:r>
+              <a:rPr lang="en-US" sz="1920" dirty="0">
                 <a:solidFill>
                   <a:srgbClr val="003A63"/>
                 </a:solidFill>
@@ -3996,16 +3996,16 @@
                 <a:ea typeface="Aptos" pitchFamily="34" charset="-122"/>
                 <a:cs typeface="Aptos" pitchFamily="34" charset="-120"/>
               </a:rPr>
-              <a:t>• A charter may sound strong, but if staff do not know when to submit use cases, who decides, or.</a:t>
-            </a:r>
-            <a:endParaRPr lang="en-US" sz="2100" dirty="0"/>
-          </a:p>
-          <a:p>
-            <a:pPr indent="0" marL="0">
-              <a:buNone/>
-            </a:pPr>
-            <a:r>
-              <a:rPr lang="en-US" sz="2100" dirty="0">
+              <a:t>• A charter may sound strong, but if staff do not know when to submit use.</a:t>
+            </a:r>
+            <a:endParaRPr lang="en-US" sz="1920" dirty="0"/>
+          </a:p>
+          <a:p>
+            <a:pPr indent="0" marL="0">
+              <a:buNone/>
+            </a:pPr>
+            <a:r>
+              <a:rPr lang="en-US" sz="1920" dirty="0">
                 <a:solidFill>
                   <a:srgbClr val="003A63"/>
                 </a:solidFill>
@@ -4013,9 +4013,9 @@
                 <a:ea typeface="Aptos" pitchFamily="34" charset="-122"/>
                 <a:cs typeface="Aptos" pitchFamily="34" charset="-120"/>
               </a:rPr>
-              <a:t>• A practical guardrail is to create a simple intake form, review rubric, meeting cadence,.</a:t>
-            </a:r>
-            <a:endParaRPr lang="en-US" sz="2100" dirty="0"/>
+              <a:t>• A practical guardrail is to create a simple intake form, review rubric,.</a:t>
+            </a:r>
+            <a:endParaRPr lang="en-US" sz="1920" dirty="0"/>
           </a:p>
         </p:txBody>
       </p:sp>
@@ -4027,12 +4027,12 @@
         </p:nvSpPr>
         <p:spPr>
           <a:xfrm>
-            <a:off x="7635240" y="1325880"/>
-            <a:ext cx="3474720" cy="1207008"/>
+            <a:off x="7543800" y="1325880"/>
+            <a:ext cx="3611880" cy="1261872"/>
           </a:xfrm>
           <a:prstGeom prst="roundRect">
             <a:avLst>
-              <a:gd name="adj" fmla="val 9091"/>
+              <a:gd name="adj" fmla="val 8696"/>
             </a:avLst>
           </a:prstGeom>
           <a:solidFill>
@@ -4054,8 +4054,8 @@
         </p:nvSpPr>
         <p:spPr>
           <a:xfrm>
-            <a:off x="7799832" y="1472184"/>
-            <a:ext cx="3145536" cy="256032"/>
+            <a:off x="7708392" y="1453896"/>
+            <a:ext cx="3282696" cy="228600"/>
           </a:xfrm>
           <a:prstGeom prst="rect">
             <a:avLst/>
@@ -4071,7 +4071,7 @@
               <a:buNone/>
             </a:pPr>
             <a:r>
-              <a:rPr lang="en-US" sz="1300" b="1" dirty="0">
+              <a:rPr lang="en-US" sz="1220" b="1" dirty="0">
                 <a:solidFill>
                   <a:srgbClr val="0068B7"/>
                 </a:solidFill>
@@ -4081,7 +4081,7 @@
               </a:rPr>
               <a:t>Governance lens</a:t>
             </a:r>
-            <a:endParaRPr lang="en-US" sz="1300" dirty="0"/>
+            <a:endParaRPr lang="en-US" sz="1220" dirty="0"/>
           </a:p>
         </p:txBody>
       </p:sp>
@@ -4093,8 +4093,8 @@
         </p:nvSpPr>
         <p:spPr>
           <a:xfrm>
-            <a:off x="7799832" y="1801368"/>
-            <a:ext cx="3145536" cy="640080"/>
+            <a:off x="7708392" y="1764792"/>
+            <a:ext cx="3282696" cy="749808"/>
           </a:xfrm>
           <a:prstGeom prst="rect">
             <a:avLst/>
@@ -4112,7 +4112,7 @@
               <a:buNone/>
             </a:pPr>
             <a:r>
-              <a:rPr lang="en-US" sz="1320" dirty="0">
+              <a:rPr lang="en-US" sz="1220" dirty="0">
                 <a:solidFill>
                   <a:srgbClr val="17364A"/>
                 </a:solidFill>
@@ -4122,7 +4122,7 @@
               </a:rPr>
               <a:t>A common failure mode is governance that exists only on paper.</a:t>
             </a:r>
-            <a:endParaRPr lang="en-US" sz="1320" dirty="0"/>
+            <a:endParaRPr lang="en-US" sz="1220" dirty="0"/>
           </a:p>
         </p:txBody>
       </p:sp>
@@ -4134,12 +4134,12 @@
         </p:nvSpPr>
         <p:spPr>
           <a:xfrm>
-            <a:off x="7635240" y="2670048"/>
-            <a:ext cx="3474720" cy="1377086"/>
+            <a:off x="7543800" y="2724912"/>
+            <a:ext cx="3611880" cy="1527048"/>
           </a:xfrm>
           <a:prstGeom prst="roundRect">
             <a:avLst>
-              <a:gd name="adj" fmla="val 7968"/>
+              <a:gd name="adj" fmla="val 7186"/>
             </a:avLst>
           </a:prstGeom>
           <a:solidFill>
@@ -4161,8 +4161,8 @@
         </p:nvSpPr>
         <p:spPr>
           <a:xfrm>
-            <a:off x="7799832" y="2816352"/>
-            <a:ext cx="3145536" cy="256032"/>
+            <a:off x="7708392" y="2852928"/>
+            <a:ext cx="3282696" cy="228600"/>
           </a:xfrm>
           <a:prstGeom prst="rect">
             <a:avLst/>
@@ -4178,7 +4178,7 @@
               <a:buNone/>
             </a:pPr>
             <a:r>
-              <a:rPr lang="en-US" sz="1300" b="1" dirty="0">
+              <a:rPr lang="en-US" sz="1220" b="1" dirty="0">
                 <a:solidFill>
                   <a:srgbClr val="0068B7"/>
                 </a:solidFill>
@@ -4188,7 +4188,7 @@
               </a:rPr>
               <a:t>Concept checkpoints</a:t>
             </a:r>
-            <a:endParaRPr lang="en-US" sz="1300" dirty="0"/>
+            <a:endParaRPr lang="en-US" sz="1220" dirty="0"/>
           </a:p>
         </p:txBody>
       </p:sp>
@@ -4200,8 +4200,8 @@
         </p:nvSpPr>
         <p:spPr>
           <a:xfrm>
-            <a:off x="7818120" y="3182112"/>
-            <a:ext cx="3090672" cy="718718"/>
+            <a:off x="7726680" y="3182112"/>
+            <a:ext cx="3227832" cy="960120"/>
           </a:xfrm>
           <a:prstGeom prst="rect">
             <a:avLst/>
@@ -4219,7 +4219,7 @@
               <a:buNone/>
             </a:pPr>
             <a:r>
-              <a:rPr lang="en-US" sz="1220" dirty="0">
+              <a:rPr lang="en-US" sz="1140" dirty="0">
                 <a:solidFill>
                   <a:srgbClr val="17364A"/>
                 </a:solidFill>
@@ -4227,16 +4227,16 @@
                 <a:ea typeface="Aptos" pitchFamily="34" charset="-122"/>
                 <a:cs typeface="Aptos" pitchFamily="34" charset="-120"/>
               </a:rPr>
-              <a:t>A charter may sound strong, but if staff do not know when to.</a:t>
-            </a:r>
-            <a:endParaRPr lang="en-US" sz="1220" dirty="0"/>
-          </a:p>
-          <a:p>
-            <a:pPr indent="0" marL="0">
-              <a:buNone/>
-            </a:pPr>
-            <a:r>
-              <a:rPr lang="en-US" sz="1220" dirty="0">
+              <a:t>A charter may sound strong, but if staff do not.</a:t>
+            </a:r>
+            <a:endParaRPr lang="en-US" sz="1140" dirty="0"/>
+          </a:p>
+          <a:p>
+            <a:pPr indent="0" marL="0">
+              <a:buNone/>
+            </a:pPr>
+            <a:r>
+              <a:rPr lang="en-US" sz="1140" dirty="0">
                 <a:solidFill>
                   <a:srgbClr val="17364A"/>
                 </a:solidFill>
@@ -4244,16 +4244,16 @@
                 <a:ea typeface="Aptos" pitchFamily="34" charset="-122"/>
                 <a:cs typeface="Aptos" pitchFamily="34" charset="-120"/>
               </a:rPr>
-              <a:t>A practical guardrail is to create a simple intake form, review.</a:t>
-            </a:r>
-            <a:endParaRPr lang="en-US" sz="1220" dirty="0"/>
-          </a:p>
-          <a:p>
-            <a:pPr indent="0" marL="0">
-              <a:buNone/>
-            </a:pPr>
-            <a:r>
-              <a:rPr lang="en-US" sz="1220" dirty="0">
+              <a:t>A practical guardrail is to create a simple intake.</a:t>
+            </a:r>
+            <a:endParaRPr lang="en-US" sz="1140" dirty="0"/>
+          </a:p>
+          <a:p>
+            <a:pPr indent="0" marL="0">
+              <a:buNone/>
+            </a:pPr>
+            <a:r>
+              <a:rPr lang="en-US" sz="1140" dirty="0">
                 <a:solidFill>
                   <a:srgbClr val="17364A"/>
                 </a:solidFill>
@@ -4263,7 +4263,7 @@
               </a:rPr>
               <a:t>Another failure mode is over-centralization.</a:t>
             </a:r>
-            <a:endParaRPr lang="en-US" sz="1220" dirty="0"/>
+            <a:endParaRPr lang="en-US" sz="1140" dirty="0"/>
           </a:p>
         </p:txBody>
       </p:sp>
@@ -4275,12 +4275,12 @@
         </p:nvSpPr>
         <p:spPr>
           <a:xfrm>
-            <a:off x="7635240" y="4184294"/>
-            <a:ext cx="3474720" cy="1466698"/>
+            <a:off x="7543800" y="4389120"/>
+            <a:ext cx="3611880" cy="1261872"/>
           </a:xfrm>
           <a:prstGeom prst="roundRect">
             <a:avLst>
-              <a:gd name="adj" fmla="val 7481"/>
+              <a:gd name="adj" fmla="val 8696"/>
             </a:avLst>
           </a:prstGeom>
           <a:solidFill>
@@ -4302,8 +4302,8 @@
         </p:nvSpPr>
         <p:spPr>
           <a:xfrm>
-            <a:off x="7799832" y="4330598"/>
-            <a:ext cx="3145536" cy="256032"/>
+            <a:off x="7708392" y="4517136"/>
+            <a:ext cx="3282696" cy="228600"/>
           </a:xfrm>
           <a:prstGeom prst="rect">
             <a:avLst/>
@@ -4319,7 +4319,7 @@
               <a:buNone/>
             </a:pPr>
             <a:r>
-              <a:rPr lang="en-US" sz="1300" b="1" dirty="0">
+              <a:rPr lang="en-US" sz="1220" b="1" dirty="0">
                 <a:solidFill>
                   <a:srgbClr val="0068B7"/>
                 </a:solidFill>
@@ -4329,7 +4329,7 @@
               </a:rPr>
               <a:t>What to document</a:t>
             </a:r>
-            <a:endParaRPr lang="en-US" sz="1300" dirty="0"/>
+            <a:endParaRPr lang="en-US" sz="1220" dirty="0"/>
           </a:p>
         </p:txBody>
       </p:sp>
@@ -4341,8 +4341,8 @@
         </p:nvSpPr>
         <p:spPr>
           <a:xfrm>
-            <a:off x="7799832" y="4659782"/>
-            <a:ext cx="3145536" cy="899770"/>
+            <a:off x="7708392" y="4828032"/>
+            <a:ext cx="3282696" cy="749808"/>
           </a:xfrm>
           <a:prstGeom prst="rect">
             <a:avLst/>
@@ -4360,7 +4360,7 @@
               <a:buNone/>
             </a:pPr>
             <a:r>
-              <a:rPr lang="en-US" sz="1320" dirty="0">
+              <a:rPr lang="en-US" sz="1220" dirty="0">
                 <a:solidFill>
                   <a:srgbClr val="17364A"/>
                 </a:solidFill>
@@ -4368,9 +4368,9 @@
                 <a:ea typeface="Aptos" pitchFamily="34" charset="-122"/>
                 <a:cs typeface="Aptos" pitchFamily="34" charset="-120"/>
               </a:rPr>
-              <a:t>Translate this concept into clear decision rights, review steps, documentation expectations, and escalation paths before an AI-supported workflow is approved.</a:t>
-            </a:r>
-            <a:endParaRPr lang="en-US" sz="1320" dirty="0"/>
+              <a:t>Translate this concept into clear decision rights, review steps, documentation.</a:t>
+            </a:r>
+            <a:endParaRPr lang="en-US" sz="1220" dirty="0"/>
           </a:p>
         </p:txBody>
       </p:sp>
@@ -4661,8 +4661,8 @@
         </p:nvSpPr>
         <p:spPr>
           <a:xfrm>
-            <a:off x="868680" y="1508760"/>
-            <a:ext cx="6309360" cy="4160520"/>
+            <a:off x="822960" y="1463040"/>
+            <a:ext cx="6565392" cy="4343400"/>
           </a:xfrm>
           <a:prstGeom prst="rect">
             <a:avLst/>
@@ -4680,7 +4680,7 @@
               <a:buNone/>
             </a:pPr>
             <a:r>
-              <a:rPr lang="en-US" sz="2100" dirty="0">
+              <a:rPr lang="en-US" sz="1920" dirty="0">
                 <a:solidFill>
                   <a:srgbClr val="003A63"/>
                 </a:solidFill>
@@ -4688,16 +4688,16 @@
                 <a:ea typeface="Aptos" pitchFamily="34" charset="-122"/>
                 <a:cs typeface="Aptos" pitchFamily="34" charset="-120"/>
               </a:rPr>
-              <a:t>• Generative AI governance should define approved tools, prohibited data, review expectations,.</a:t>
-            </a:r>
-            <a:endParaRPr lang="en-US" sz="2100" dirty="0"/>
-          </a:p>
-          <a:p>
-            <a:pPr indent="0" marL="0">
-              <a:buNone/>
-            </a:pPr>
-            <a:r>
-              <a:rPr lang="en-US" sz="2100" dirty="0">
+              <a:t>• Generative AI governance should define approved tools, prohibited data,.</a:t>
+            </a:r>
+            <a:endParaRPr lang="en-US" sz="1920" dirty="0"/>
+          </a:p>
+          <a:p>
+            <a:pPr indent="0" marL="0">
+              <a:buNone/>
+            </a:pPr>
+            <a:r>
+              <a:rPr lang="en-US" sz="1920" dirty="0">
                 <a:solidFill>
                   <a:srgbClr val="003A63"/>
                 </a:solidFill>
@@ -4705,16 +4705,16 @@
                 <a:ea typeface="Aptos" pitchFamily="34" charset="-122"/>
                 <a:cs typeface="Aptos" pitchFamily="34" charset="-120"/>
               </a:rPr>
-              <a:t>• Predictive model governance should require validation, subgroup performance review,.</a:t>
-            </a:r>
-            <a:endParaRPr lang="en-US" sz="2100" dirty="0"/>
-          </a:p>
-          <a:p>
-            <a:pPr indent="0" marL="0">
-              <a:buNone/>
-            </a:pPr>
-            <a:r>
-              <a:rPr lang="en-US" sz="2100" dirty="0">
+              <a:t>• Predictive model governance should require validation, subgroup performance.</a:t>
+            </a:r>
+            <a:endParaRPr lang="en-US" sz="1920" dirty="0"/>
+          </a:p>
+          <a:p>
+            <a:pPr indent="0" marL="0">
+              <a:buNone/>
+            </a:pPr>
+            <a:r>
+              <a:rPr lang="en-US" sz="1920" dirty="0">
                 <a:solidFill>
                   <a:srgbClr val="003A63"/>
                 </a:solidFill>
@@ -4722,9 +4722,9 @@
                 <a:ea typeface="Aptos" pitchFamily="34" charset="-122"/>
                 <a:cs typeface="Aptos" pitchFamily="34" charset="-120"/>
               </a:rPr>
-              <a:t>• Agentic AI governance should define allowed actions, approval checkpoints, logging, rollback.</a:t>
-            </a:r>
-            <a:endParaRPr lang="en-US" sz="2100" dirty="0"/>
+              <a:t>• Agentic AI governance should define allowed actions, approval checkpoints,.</a:t>
+            </a:r>
+            <a:endParaRPr lang="en-US" sz="1920" dirty="0"/>
           </a:p>
         </p:txBody>
       </p:sp>
@@ -4736,12 +4736,12 @@
         </p:nvSpPr>
         <p:spPr>
           <a:xfrm>
-            <a:off x="7635240" y="1325880"/>
-            <a:ext cx="3474720" cy="1255471"/>
+            <a:off x="7543800" y="1325880"/>
+            <a:ext cx="3611880" cy="1261872"/>
           </a:xfrm>
           <a:prstGeom prst="roundRect">
             <a:avLst>
-              <a:gd name="adj" fmla="val 8740"/>
+              <a:gd name="adj" fmla="val 8696"/>
             </a:avLst>
           </a:prstGeom>
           <a:solidFill>
@@ -4763,8 +4763,8 @@
         </p:nvSpPr>
         <p:spPr>
           <a:xfrm>
-            <a:off x="7799832" y="1472184"/>
-            <a:ext cx="3145536" cy="256032"/>
+            <a:off x="7708392" y="1453896"/>
+            <a:ext cx="3282696" cy="228600"/>
           </a:xfrm>
           <a:prstGeom prst="rect">
             <a:avLst/>
@@ -4780,7 +4780,7 @@
               <a:buNone/>
             </a:pPr>
             <a:r>
-              <a:rPr lang="en-US" sz="1300" b="1" dirty="0">
+              <a:rPr lang="en-US" sz="1220" b="1" dirty="0">
                 <a:solidFill>
                   <a:srgbClr val="0068B7"/>
                 </a:solidFill>
@@ -4790,7 +4790,7 @@
               </a:rPr>
               <a:t>Governance lens</a:t>
             </a:r>
-            <a:endParaRPr lang="en-US" sz="1300" dirty="0"/>
+            <a:endParaRPr lang="en-US" sz="1220" dirty="0"/>
           </a:p>
         </p:txBody>
       </p:sp>
@@ -4802,8 +4802,8 @@
         </p:nvSpPr>
         <p:spPr>
           <a:xfrm>
-            <a:off x="7799832" y="1801368"/>
-            <a:ext cx="3145536" cy="688543"/>
+            <a:off x="7708392" y="1764792"/>
+            <a:ext cx="3282696" cy="749808"/>
           </a:xfrm>
           <a:prstGeom prst="rect">
             <a:avLst/>
@@ -4821,7 +4821,7 @@
               <a:buNone/>
             </a:pPr>
             <a:r>
-              <a:rPr lang="en-US" sz="1320" dirty="0">
+              <a:rPr lang="en-US" sz="1220" dirty="0">
                 <a:solidFill>
                   <a:srgbClr val="17364A"/>
                 </a:solidFill>
@@ -4829,9 +4829,9 @@
                 <a:ea typeface="Aptos" pitchFamily="34" charset="-122"/>
                 <a:cs typeface="Aptos" pitchFamily="34" charset="-120"/>
               </a:rPr>
-              <a:t>Generative AI governance should define approved tools, prohibited data, review expectations, and when.</a:t>
-            </a:r>
-            <a:endParaRPr lang="en-US" sz="1320" dirty="0"/>
+              <a:t>Generative AI governance should define approved tools, prohibited data, review.</a:t>
+            </a:r>
+            <a:endParaRPr lang="en-US" sz="1220" dirty="0"/>
           </a:p>
         </p:txBody>
       </p:sp>
@@ -4843,12 +4843,12 @@
         </p:nvSpPr>
         <p:spPr>
           <a:xfrm>
-            <a:off x="7635240" y="2718511"/>
-            <a:ext cx="3474720" cy="1328623"/>
+            <a:off x="7543800" y="2724912"/>
+            <a:ext cx="3611880" cy="1527048"/>
           </a:xfrm>
           <a:prstGeom prst="roundRect">
             <a:avLst>
-              <a:gd name="adj" fmla="val 8259"/>
+              <a:gd name="adj" fmla="val 7186"/>
             </a:avLst>
           </a:prstGeom>
           <a:solidFill>
@@ -4870,8 +4870,8 @@
         </p:nvSpPr>
         <p:spPr>
           <a:xfrm>
-            <a:off x="7799832" y="2864815"/>
-            <a:ext cx="3145536" cy="256032"/>
+            <a:off x="7708392" y="2852928"/>
+            <a:ext cx="3282696" cy="228600"/>
           </a:xfrm>
           <a:prstGeom prst="rect">
             <a:avLst/>
@@ -4887,7 +4887,7 @@
               <a:buNone/>
             </a:pPr>
             <a:r>
-              <a:rPr lang="en-US" sz="1300" b="1" dirty="0">
+              <a:rPr lang="en-US" sz="1220" b="1" dirty="0">
                 <a:solidFill>
                   <a:srgbClr val="0068B7"/>
                 </a:solidFill>
@@ -4897,7 +4897,7 @@
               </a:rPr>
               <a:t>Concept checkpoints</a:t>
             </a:r>
-            <a:endParaRPr lang="en-US" sz="1300" dirty="0"/>
+            <a:endParaRPr lang="en-US" sz="1220" dirty="0"/>
           </a:p>
         </p:txBody>
       </p:sp>
@@ -4909,8 +4909,8 @@
         </p:nvSpPr>
         <p:spPr>
           <a:xfrm>
-            <a:off x="7818120" y="3230575"/>
-            <a:ext cx="3090672" cy="670255"/>
+            <a:off x="7726680" y="3182112"/>
+            <a:ext cx="3227832" cy="960120"/>
           </a:xfrm>
           <a:prstGeom prst="rect">
             <a:avLst/>
@@ -4928,7 +4928,7 @@
               <a:buNone/>
             </a:pPr>
             <a:r>
-              <a:rPr lang="en-US" sz="1220" dirty="0">
+              <a:rPr lang="en-US" sz="1140" dirty="0">
                 <a:solidFill>
                   <a:srgbClr val="17364A"/>
                 </a:solidFill>
@@ -4936,16 +4936,16 @@
                 <a:ea typeface="Aptos" pitchFamily="34" charset="-122"/>
                 <a:cs typeface="Aptos" pitchFamily="34" charset="-120"/>
               </a:rPr>
-              <a:t>Generative AI governance should define approved tools, prohibited.</a:t>
-            </a:r>
-            <a:endParaRPr lang="en-US" sz="1220" dirty="0"/>
-          </a:p>
-          <a:p>
-            <a:pPr indent="0" marL="0">
-              <a:buNone/>
-            </a:pPr>
-            <a:r>
-              <a:rPr lang="en-US" sz="1220" dirty="0">
+              <a:t>Generative AI governance should define approved.</a:t>
+            </a:r>
+            <a:endParaRPr lang="en-US" sz="1140" dirty="0"/>
+          </a:p>
+          <a:p>
+            <a:pPr indent="0" marL="0">
+              <a:buNone/>
+            </a:pPr>
+            <a:r>
+              <a:rPr lang="en-US" sz="1140" dirty="0">
                 <a:solidFill>
                   <a:srgbClr val="17364A"/>
                 </a:solidFill>
@@ -4953,16 +4953,16 @@
                 <a:ea typeface="Aptos" pitchFamily="34" charset="-122"/>
                 <a:cs typeface="Aptos" pitchFamily="34" charset="-120"/>
               </a:rPr>
-              <a:t>Predictive model governance should require validation, subgroup.</a:t>
-            </a:r>
-            <a:endParaRPr lang="en-US" sz="1220" dirty="0"/>
-          </a:p>
-          <a:p>
-            <a:pPr indent="0" marL="0">
-              <a:buNone/>
-            </a:pPr>
-            <a:r>
-              <a:rPr lang="en-US" sz="1220" dirty="0">
+              <a:t>Predictive model governance should require.</a:t>
+            </a:r>
+            <a:endParaRPr lang="en-US" sz="1140" dirty="0"/>
+          </a:p>
+          <a:p>
+            <a:pPr indent="0" marL="0">
+              <a:buNone/>
+            </a:pPr>
+            <a:r>
+              <a:rPr lang="en-US" sz="1140" dirty="0">
                 <a:solidFill>
                   <a:srgbClr val="17364A"/>
                 </a:solidFill>
@@ -4970,9 +4970,9 @@
                 <a:ea typeface="Aptos" pitchFamily="34" charset="-122"/>
                 <a:cs typeface="Aptos" pitchFamily="34" charset="-120"/>
               </a:rPr>
-              <a:t>Agentic AI governance should define allowed actions, approval.</a:t>
-            </a:r>
-            <a:endParaRPr lang="en-US" sz="1220" dirty="0"/>
+              <a:t>Agentic AI governance should define allowed.</a:t>
+            </a:r>
+            <a:endParaRPr lang="en-US" sz="1140" dirty="0"/>
           </a:p>
         </p:txBody>
       </p:sp>
@@ -4984,12 +4984,12 @@
         </p:nvSpPr>
         <p:spPr>
           <a:xfrm>
-            <a:off x="7635240" y="4184294"/>
-            <a:ext cx="3474720" cy="1466698"/>
+            <a:off x="7543800" y="4389120"/>
+            <a:ext cx="3611880" cy="1261872"/>
           </a:xfrm>
           <a:prstGeom prst="roundRect">
             <a:avLst>
-              <a:gd name="adj" fmla="val 7481"/>
+              <a:gd name="adj" fmla="val 8696"/>
             </a:avLst>
           </a:prstGeom>
           <a:solidFill>
@@ -5011,8 +5011,8 @@
         </p:nvSpPr>
         <p:spPr>
           <a:xfrm>
-            <a:off x="7799832" y="4330598"/>
-            <a:ext cx="3145536" cy="256032"/>
+            <a:off x="7708392" y="4517136"/>
+            <a:ext cx="3282696" cy="228600"/>
           </a:xfrm>
           <a:prstGeom prst="rect">
             <a:avLst/>
@@ -5028,7 +5028,7 @@
               <a:buNone/>
             </a:pPr>
             <a:r>
-              <a:rPr lang="en-US" sz="1300" b="1" dirty="0">
+              <a:rPr lang="en-US" sz="1220" b="1" dirty="0">
                 <a:solidFill>
                   <a:srgbClr val="0068B7"/>
                 </a:solidFill>
@@ -5038,7 +5038,7 @@
               </a:rPr>
               <a:t>What to document</a:t>
             </a:r>
-            <a:endParaRPr lang="en-US" sz="1300" dirty="0"/>
+            <a:endParaRPr lang="en-US" sz="1220" dirty="0"/>
           </a:p>
         </p:txBody>
       </p:sp>
@@ -5050,8 +5050,8 @@
         </p:nvSpPr>
         <p:spPr>
           <a:xfrm>
-            <a:off x="7799832" y="4659782"/>
-            <a:ext cx="3145536" cy="899770"/>
+            <a:off x="7708392" y="4828032"/>
+            <a:ext cx="3282696" cy="749808"/>
           </a:xfrm>
           <a:prstGeom prst="rect">
             <a:avLst/>
@@ -5069,7 +5069,7 @@
               <a:buNone/>
             </a:pPr>
             <a:r>
-              <a:rPr lang="en-US" sz="1320" dirty="0">
+              <a:rPr lang="en-US" sz="1220" dirty="0">
                 <a:solidFill>
                   <a:srgbClr val="17364A"/>
                 </a:solidFill>
@@ -5077,9 +5077,9 @@
                 <a:ea typeface="Aptos" pitchFamily="34" charset="-122"/>
                 <a:cs typeface="Aptos" pitchFamily="34" charset="-120"/>
               </a:rPr>
-              <a:t>Translate this concept into clear decision rights, review steps, documentation expectations, and escalation paths before an AI-supported workflow is approved.</a:t>
-            </a:r>
-            <a:endParaRPr lang="en-US" sz="1320" dirty="0"/>
+              <a:t>Translate this concept into clear decision rights, review steps, documentation.</a:t>
+            </a:r>
+            <a:endParaRPr lang="en-US" sz="1220" dirty="0"/>
           </a:p>
         </p:txBody>
       </p:sp>
@@ -5370,8 +5370,8 @@
         </p:nvSpPr>
         <p:spPr>
           <a:xfrm>
-            <a:off x="868680" y="1508760"/>
-            <a:ext cx="6309360" cy="4160520"/>
+            <a:off x="822960" y="1463040"/>
+            <a:ext cx="6565392" cy="4343400"/>
           </a:xfrm>
           <a:prstGeom prst="rect">
             <a:avLst/>
@@ -5389,7 +5389,7 @@
               <a:buNone/>
             </a:pPr>
             <a:r>
-              <a:rPr lang="en-US" sz="2100" dirty="0">
+              <a:rPr lang="en-US" sz="1920" dirty="0">
                 <a:solidFill>
                   <a:srgbClr val="003A63"/>
                 </a:solidFill>
@@ -5397,16 +5397,16 @@
                 <a:ea typeface="Aptos" pitchFamily="34" charset="-122"/>
                 <a:cs typeface="Aptos" pitchFamily="34" charset="-120"/>
               </a:rPr>
-              <a:t>• Which current or proposed AI use case in your agency raises this leadership or governance.</a:t>
-            </a:r>
-            <a:endParaRPr lang="en-US" sz="2100" dirty="0"/>
-          </a:p>
-          <a:p>
-            <a:pPr indent="0" marL="0">
-              <a:buNone/>
-            </a:pPr>
-            <a:r>
-              <a:rPr lang="en-US" sz="2100" dirty="0">
+              <a:t>• Which current or proposed AI use case in your agency raises this leadership.</a:t>
+            </a:r>
+            <a:endParaRPr lang="en-US" sz="1920" dirty="0"/>
+          </a:p>
+          <a:p>
+            <a:pPr indent="0" marL="0">
+              <a:buNone/>
+            </a:pPr>
+            <a:r>
+              <a:rPr lang="en-US" sz="1920" dirty="0">
                 <a:solidFill>
                   <a:srgbClr val="003A63"/>
                 </a:solidFill>
@@ -5414,16 +5414,16 @@
                 <a:ea typeface="Aptos" pitchFamily="34" charset="-122"/>
                 <a:cs typeface="Aptos" pitchFamily="34" charset="-120"/>
               </a:rPr>
-              <a:t>• Who currently has authority to make decisions about this issue, and is that authority.</a:t>
-            </a:r>
-            <a:endParaRPr lang="en-US" sz="2100" dirty="0"/>
-          </a:p>
-          <a:p>
-            <a:pPr indent="0" marL="0">
-              <a:buNone/>
-            </a:pPr>
-            <a:r>
-              <a:rPr lang="en-US" sz="2100" dirty="0">
+              <a:t>• Who currently has authority to make decisions about this issue, and is that.</a:t>
+            </a:r>
+            <a:endParaRPr lang="en-US" sz="1920" dirty="0"/>
+          </a:p>
+          <a:p>
+            <a:pPr indent="0" marL="0">
+              <a:buNone/>
+            </a:pPr>
+            <a:r>
+              <a:rPr lang="en-US" sz="1920" dirty="0">
                 <a:solidFill>
                   <a:srgbClr val="003A63"/>
                 </a:solidFill>
@@ -5431,9 +5431,9 @@
                 <a:ea typeface="Aptos" pitchFamily="34" charset="-122"/>
                 <a:cs typeface="Aptos" pitchFamily="34" charset="-120"/>
               </a:rPr>
-              <a:t>• What evidence would governance or leadership need before approving the use case?</a:t>
-            </a:r>
-            <a:endParaRPr lang="en-US" sz="2100" dirty="0"/>
+              <a:t>• What evidence would governance or leadership need before approving the use.</a:t>
+            </a:r>
+            <a:endParaRPr lang="en-US" sz="1920" dirty="0"/>
           </a:p>
         </p:txBody>
       </p:sp>
@@ -5445,12 +5445,12 @@
         </p:nvSpPr>
         <p:spPr>
           <a:xfrm>
-            <a:off x="7635240" y="1325880"/>
-            <a:ext cx="3474720" cy="1255471"/>
+            <a:off x="7543800" y="1325880"/>
+            <a:ext cx="3611880" cy="1261872"/>
           </a:xfrm>
           <a:prstGeom prst="roundRect">
             <a:avLst>
-              <a:gd name="adj" fmla="val 8740"/>
+              <a:gd name="adj" fmla="val 8696"/>
             </a:avLst>
           </a:prstGeom>
           <a:solidFill>
@@ -5472,8 +5472,8 @@
         </p:nvSpPr>
         <p:spPr>
           <a:xfrm>
-            <a:off x="7799832" y="1472184"/>
-            <a:ext cx="3145536" cy="256032"/>
+            <a:off x="7708392" y="1453896"/>
+            <a:ext cx="3282696" cy="228600"/>
           </a:xfrm>
           <a:prstGeom prst="rect">
             <a:avLst/>
@@ -5489,7 +5489,7 @@
               <a:buNone/>
             </a:pPr>
             <a:r>
-              <a:rPr lang="en-US" sz="1300" b="1" dirty="0">
+              <a:rPr lang="en-US" sz="1220" b="1" dirty="0">
                 <a:solidFill>
                   <a:srgbClr val="0068B7"/>
                 </a:solidFill>
@@ -5499,7 +5499,7 @@
               </a:rPr>
               <a:t>Governance lens</a:t>
             </a:r>
-            <a:endParaRPr lang="en-US" sz="1300" dirty="0"/>
+            <a:endParaRPr lang="en-US" sz="1220" dirty="0"/>
           </a:p>
         </p:txBody>
       </p:sp>
@@ -5511,8 +5511,8 @@
         </p:nvSpPr>
         <p:spPr>
           <a:xfrm>
-            <a:off x="7799832" y="1801368"/>
-            <a:ext cx="3145536" cy="688543"/>
+            <a:off x="7708392" y="1764792"/>
+            <a:ext cx="3282696" cy="749808"/>
           </a:xfrm>
           <a:prstGeom prst="rect">
             <a:avLst/>
@@ -5530,7 +5530,7 @@
               <a:buNone/>
             </a:pPr>
             <a:r>
-              <a:rPr lang="en-US" sz="1320" dirty="0">
+              <a:rPr lang="en-US" sz="1220" dirty="0">
                 <a:solidFill>
                   <a:srgbClr val="17364A"/>
                 </a:solidFill>
@@ -5538,9 +5538,9 @@
                 <a:ea typeface="Aptos" pitchFamily="34" charset="-122"/>
                 <a:cs typeface="Aptos" pitchFamily="34" charset="-120"/>
               </a:rPr>
-              <a:t>Which current or proposed AI use case in your agency raises this leadership or governance issue most.</a:t>
-            </a:r>
-            <a:endParaRPr lang="en-US" sz="1320" dirty="0"/>
+              <a:t>Which current or proposed AI use case in your agency raises this leadership or.</a:t>
+            </a:r>
+            <a:endParaRPr lang="en-US" sz="1220" dirty="0"/>
           </a:p>
         </p:txBody>
       </p:sp>
@@ -5552,12 +5552,12 @@
         </p:nvSpPr>
         <p:spPr>
           <a:xfrm>
-            <a:off x="7635240" y="2718511"/>
-            <a:ext cx="3474720" cy="1328623"/>
+            <a:off x="7543800" y="2724912"/>
+            <a:ext cx="3611880" cy="1527048"/>
           </a:xfrm>
           <a:prstGeom prst="roundRect">
             <a:avLst>
-              <a:gd name="adj" fmla="val 8259"/>
+              <a:gd name="adj" fmla="val 7186"/>
             </a:avLst>
           </a:prstGeom>
           <a:solidFill>
@@ -5579,8 +5579,8 @@
         </p:nvSpPr>
         <p:spPr>
           <a:xfrm>
-            <a:off x="7799832" y="2864815"/>
-            <a:ext cx="3145536" cy="256032"/>
+            <a:off x="7708392" y="2852928"/>
+            <a:ext cx="3282696" cy="228600"/>
           </a:xfrm>
           <a:prstGeom prst="rect">
             <a:avLst/>
@@ -5596,7 +5596,7 @@
               <a:buNone/>
             </a:pPr>
             <a:r>
-              <a:rPr lang="en-US" sz="1300" b="1" dirty="0">
+              <a:rPr lang="en-US" sz="1220" b="1" dirty="0">
                 <a:solidFill>
                   <a:srgbClr val="0068B7"/>
                 </a:solidFill>
@@ -5606,7 +5606,7 @@
               </a:rPr>
               <a:t>Concept checkpoints</a:t>
             </a:r>
-            <a:endParaRPr lang="en-US" sz="1300" dirty="0"/>
+            <a:endParaRPr lang="en-US" sz="1220" dirty="0"/>
           </a:p>
         </p:txBody>
       </p:sp>
@@ -5618,8 +5618,8 @@
         </p:nvSpPr>
         <p:spPr>
           <a:xfrm>
-            <a:off x="7818120" y="3230575"/>
-            <a:ext cx="3090672" cy="670255"/>
+            <a:off x="7726680" y="3182112"/>
+            <a:ext cx="3227832" cy="960120"/>
           </a:xfrm>
           <a:prstGeom prst="rect">
             <a:avLst/>
@@ -5637,7 +5637,7 @@
               <a:buNone/>
             </a:pPr>
             <a:r>
-              <a:rPr lang="en-US" sz="1220" dirty="0">
+              <a:rPr lang="en-US" sz="1140" dirty="0">
                 <a:solidFill>
                   <a:srgbClr val="17364A"/>
                 </a:solidFill>
@@ -5645,16 +5645,16 @@
                 <a:ea typeface="Aptos" pitchFamily="34" charset="-122"/>
                 <a:cs typeface="Aptos" pitchFamily="34" charset="-120"/>
               </a:rPr>
-              <a:t>Which current or proposed AI use case in your agency raises this.</a:t>
-            </a:r>
-            <a:endParaRPr lang="en-US" sz="1220" dirty="0"/>
-          </a:p>
-          <a:p>
-            <a:pPr indent="0" marL="0">
-              <a:buNone/>
-            </a:pPr>
-            <a:r>
-              <a:rPr lang="en-US" sz="1220" dirty="0">
+              <a:t>Which current or proposed AI use case in your.</a:t>
+            </a:r>
+            <a:endParaRPr lang="en-US" sz="1140" dirty="0"/>
+          </a:p>
+          <a:p>
+            <a:pPr indent="0" marL="0">
+              <a:buNone/>
+            </a:pPr>
+            <a:r>
+              <a:rPr lang="en-US" sz="1140" dirty="0">
                 <a:solidFill>
                   <a:srgbClr val="17364A"/>
                 </a:solidFill>
@@ -5662,16 +5662,16 @@
                 <a:ea typeface="Aptos" pitchFamily="34" charset="-122"/>
                 <a:cs typeface="Aptos" pitchFamily="34" charset="-120"/>
               </a:rPr>
-              <a:t>Who currently has authority to make decisions about this issue,.</a:t>
-            </a:r>
-            <a:endParaRPr lang="en-US" sz="1220" dirty="0"/>
-          </a:p>
-          <a:p>
-            <a:pPr indent="0" marL="0">
-              <a:buNone/>
-            </a:pPr>
-            <a:r>
-              <a:rPr lang="en-US" sz="1220" dirty="0">
+              <a:t>Who currently has authority to make decisions.</a:t>
+            </a:r>
+            <a:endParaRPr lang="en-US" sz="1140" dirty="0"/>
+          </a:p>
+          <a:p>
+            <a:pPr indent="0" marL="0">
+              <a:buNone/>
+            </a:pPr>
+            <a:r>
+              <a:rPr lang="en-US" sz="1140" dirty="0">
                 <a:solidFill>
                   <a:srgbClr val="17364A"/>
                 </a:solidFill>
@@ -5679,9 +5679,9 @@
                 <a:ea typeface="Aptos" pitchFamily="34" charset="-122"/>
                 <a:cs typeface="Aptos" pitchFamily="34" charset="-120"/>
               </a:rPr>
-              <a:t>What evidence would governance or leadership need before approving.</a:t>
-            </a:r>
-            <a:endParaRPr lang="en-US" sz="1220" dirty="0"/>
+              <a:t>What evidence would governance or leadership need.</a:t>
+            </a:r>
+            <a:endParaRPr lang="en-US" sz="1140" dirty="0"/>
           </a:p>
         </p:txBody>
       </p:sp>
@@ -5693,12 +5693,12 @@
         </p:nvSpPr>
         <p:spPr>
           <a:xfrm>
-            <a:off x="7635240" y="4184294"/>
-            <a:ext cx="3474720" cy="1466698"/>
+            <a:off x="7543800" y="4389120"/>
+            <a:ext cx="3611880" cy="1261872"/>
           </a:xfrm>
           <a:prstGeom prst="roundRect">
             <a:avLst>
-              <a:gd name="adj" fmla="val 7481"/>
+              <a:gd name="adj" fmla="val 8696"/>
             </a:avLst>
           </a:prstGeom>
           <a:solidFill>
@@ -5720,8 +5720,8 @@
         </p:nvSpPr>
         <p:spPr>
           <a:xfrm>
-            <a:off x="7799832" y="4330598"/>
-            <a:ext cx="3145536" cy="256032"/>
+            <a:off x="7708392" y="4517136"/>
+            <a:ext cx="3282696" cy="228600"/>
           </a:xfrm>
           <a:prstGeom prst="rect">
             <a:avLst/>
@@ -5737,7 +5737,7 @@
               <a:buNone/>
             </a:pPr>
             <a:r>
-              <a:rPr lang="en-US" sz="1300" b="1" dirty="0">
+              <a:rPr lang="en-US" sz="1220" b="1" dirty="0">
                 <a:solidFill>
                   <a:srgbClr val="0068B7"/>
                 </a:solidFill>
@@ -5747,7 +5747,7 @@
               </a:rPr>
               <a:t>What to document</a:t>
             </a:r>
-            <a:endParaRPr lang="en-US" sz="1300" dirty="0"/>
+            <a:endParaRPr lang="en-US" sz="1220" dirty="0"/>
           </a:p>
         </p:txBody>
       </p:sp>
@@ -5759,8 +5759,8 @@
         </p:nvSpPr>
         <p:spPr>
           <a:xfrm>
-            <a:off x="7799832" y="4659782"/>
-            <a:ext cx="3145536" cy="899770"/>
+            <a:off x="7708392" y="4828032"/>
+            <a:ext cx="3282696" cy="749808"/>
           </a:xfrm>
           <a:prstGeom prst="rect">
             <a:avLst/>
@@ -5778,7 +5778,7 @@
               <a:buNone/>
             </a:pPr>
             <a:r>
-              <a:rPr lang="en-US" sz="1320" dirty="0">
+              <a:rPr lang="en-US" sz="1220" dirty="0">
                 <a:solidFill>
                   <a:srgbClr val="17364A"/>
                 </a:solidFill>
@@ -5786,9 +5786,9 @@
                 <a:ea typeface="Aptos" pitchFamily="34" charset="-122"/>
                 <a:cs typeface="Aptos" pitchFamily="34" charset="-120"/>
               </a:rPr>
-              <a:t>Translate this concept into clear decision rights, review steps, documentation expectations, and escalation paths before an AI-supported workflow is approved.</a:t>
-            </a:r>
-            <a:endParaRPr lang="en-US" sz="1320" dirty="0"/>
+              <a:t>Translate this concept into clear decision rights, review steps, documentation.</a:t>
+            </a:r>
+            <a:endParaRPr lang="en-US" sz="1220" dirty="0"/>
           </a:p>
         </p:txBody>
       </p:sp>
@@ -6079,8 +6079,8 @@
         </p:nvSpPr>
         <p:spPr>
           <a:xfrm>
-            <a:off x="868680" y="1508760"/>
-            <a:ext cx="6309360" cy="4160520"/>
+            <a:off x="822960" y="1463040"/>
+            <a:ext cx="6565392" cy="4343400"/>
           </a:xfrm>
           <a:prstGeom prst="rect">
             <a:avLst/>
@@ -6098,7 +6098,7 @@
               <a:buNone/>
             </a:pPr>
             <a:r>
-              <a:rPr lang="en-US" sz="2100" dirty="0">
+              <a:rPr lang="en-US" sz="1920" dirty="0">
                 <a:solidFill>
                   <a:srgbClr val="003A63"/>
                 </a:solidFill>
@@ -6106,16 +6106,16 @@
                 <a:ea typeface="Aptos" pitchFamily="34" charset="-122"/>
                 <a:cs typeface="Aptos" pitchFamily="34" charset="-120"/>
               </a:rPr>
-              <a:t>• Which staff, partners, or communities would be affected if this issue were handled poorly?</a:t>
-            </a:r>
-            <a:endParaRPr lang="en-US" sz="2100" dirty="0"/>
-          </a:p>
-          <a:p>
-            <a:pPr indent="0" marL="0">
-              <a:buNone/>
-            </a:pPr>
-            <a:r>
-              <a:rPr lang="en-US" sz="2100" dirty="0">
+              <a:t>• Which staff, partners, or communities would be affected if this issue were.</a:t>
+            </a:r>
+            <a:endParaRPr lang="en-US" sz="1920" dirty="0"/>
+          </a:p>
+          <a:p>
+            <a:pPr indent="0" marL="0">
+              <a:buNone/>
+            </a:pPr>
+            <a:r>
+              <a:rPr lang="en-US" sz="1920" dirty="0">
                 <a:solidFill>
                   <a:srgbClr val="003A63"/>
                 </a:solidFill>
@@ -6123,9 +6123,9 @@
                 <a:ea typeface="Aptos" pitchFamily="34" charset="-122"/>
                 <a:cs typeface="Aptos" pitchFamily="34" charset="-120"/>
               </a:rPr>
-              <a:t>• What policy, process, or artifact should be created or updated after this module?</a:t>
-            </a:r>
-            <a:endParaRPr lang="en-US" sz="2100" dirty="0"/>
+              <a:t>• What policy, process, or artifact should be created or updated after this.</a:t>
+            </a:r>
+            <a:endParaRPr lang="en-US" sz="1920" dirty="0"/>
           </a:p>
         </p:txBody>
       </p:sp>
@@ -6137,12 +6137,12 @@
         </p:nvSpPr>
         <p:spPr>
           <a:xfrm>
-            <a:off x="7635240" y="1325880"/>
-            <a:ext cx="3474720" cy="1207008"/>
+            <a:off x="7543800" y="1325880"/>
+            <a:ext cx="3611880" cy="1261872"/>
           </a:xfrm>
           <a:prstGeom prst="roundRect">
             <a:avLst>
-              <a:gd name="adj" fmla="val 9091"/>
+              <a:gd name="adj" fmla="val 8696"/>
             </a:avLst>
           </a:prstGeom>
           <a:solidFill>
@@ -6164,8 +6164,8 @@
         </p:nvSpPr>
         <p:spPr>
           <a:xfrm>
-            <a:off x="7799832" y="1472184"/>
-            <a:ext cx="3145536" cy="256032"/>
+            <a:off x="7708392" y="1453896"/>
+            <a:ext cx="3282696" cy="228600"/>
           </a:xfrm>
           <a:prstGeom prst="rect">
             <a:avLst/>
@@ -6181,7 +6181,7 @@
               <a:buNone/>
             </a:pPr>
             <a:r>
-              <a:rPr lang="en-US" sz="1300" b="1" dirty="0">
+              <a:rPr lang="en-US" sz="1220" b="1" dirty="0">
                 <a:solidFill>
                   <a:srgbClr val="0068B7"/>
                 </a:solidFill>
@@ -6191,7 +6191,7 @@
               </a:rPr>
               <a:t>Governance lens</a:t>
             </a:r>
-            <a:endParaRPr lang="en-US" sz="1300" dirty="0"/>
+            <a:endParaRPr lang="en-US" sz="1220" dirty="0"/>
           </a:p>
         </p:txBody>
       </p:sp>
@@ -6203,8 +6203,8 @@
         </p:nvSpPr>
         <p:spPr>
           <a:xfrm>
-            <a:off x="7799832" y="1801368"/>
-            <a:ext cx="3145536" cy="640080"/>
+            <a:off x="7708392" y="1764792"/>
+            <a:ext cx="3282696" cy="749808"/>
           </a:xfrm>
           <a:prstGeom prst="rect">
             <a:avLst/>
@@ -6222,7 +6222,7 @@
               <a:buNone/>
             </a:pPr>
             <a:r>
-              <a:rPr lang="en-US" sz="1320" dirty="0">
+              <a:rPr lang="en-US" sz="1220" dirty="0">
                 <a:solidFill>
                   <a:srgbClr val="17364A"/>
                 </a:solidFill>
@@ -6230,9 +6230,9 @@
                 <a:ea typeface="Aptos" pitchFamily="34" charset="-122"/>
                 <a:cs typeface="Aptos" pitchFamily="34" charset="-120"/>
               </a:rPr>
-              <a:t>Which staff, partners, or communities would be affected if this issue were handled.</a:t>
-            </a:r>
-            <a:endParaRPr lang="en-US" sz="1320" dirty="0"/>
+              <a:t>Which staff, partners, or communities would be affected if this issue were.</a:t>
+            </a:r>
+            <a:endParaRPr lang="en-US" sz="1220" dirty="0"/>
           </a:p>
         </p:txBody>
       </p:sp>
@@ -6244,12 +6244,12 @@
         </p:nvSpPr>
         <p:spPr>
           <a:xfrm>
-            <a:off x="7635240" y="2670048"/>
-            <a:ext cx="3474720" cy="1377086"/>
+            <a:off x="7543800" y="2724912"/>
+            <a:ext cx="3611880" cy="1527048"/>
           </a:xfrm>
           <a:prstGeom prst="roundRect">
             <a:avLst>
-              <a:gd name="adj" fmla="val 7968"/>
+              <a:gd name="adj" fmla="val 7186"/>
             </a:avLst>
           </a:prstGeom>
           <a:solidFill>
@@ -6271,8 +6271,8 @@
         </p:nvSpPr>
         <p:spPr>
           <a:xfrm>
-            <a:off x="7799832" y="2816352"/>
-            <a:ext cx="3145536" cy="256032"/>
+            <a:off x="7708392" y="2852928"/>
+            <a:ext cx="3282696" cy="228600"/>
           </a:xfrm>
           <a:prstGeom prst="rect">
             <a:avLst/>
@@ -6288,7 +6288,7 @@
               <a:buNone/>
             </a:pPr>
             <a:r>
-              <a:rPr lang="en-US" sz="1300" b="1" dirty="0">
+              <a:rPr lang="en-US" sz="1220" b="1" dirty="0">
                 <a:solidFill>
                   <a:srgbClr val="0068B7"/>
                 </a:solidFill>
@@ -6298,7 +6298,7 @@
               </a:rPr>
               <a:t>Concept checkpoints</a:t>
             </a:r>
-            <a:endParaRPr lang="en-US" sz="1300" dirty="0"/>
+            <a:endParaRPr lang="en-US" sz="1220" dirty="0"/>
           </a:p>
         </p:txBody>
       </p:sp>
@@ -6310,8 +6310,8 @@
         </p:nvSpPr>
         <p:spPr>
           <a:xfrm>
-            <a:off x="7818120" y="3182112"/>
-            <a:ext cx="3090672" cy="718718"/>
+            <a:off x="7726680" y="3182112"/>
+            <a:ext cx="3227832" cy="960120"/>
           </a:xfrm>
           <a:prstGeom prst="rect">
             <a:avLst/>
@@ -6329,7 +6329,7 @@
               <a:buNone/>
             </a:pPr>
             <a:r>
-              <a:rPr lang="en-US" sz="1220" dirty="0">
+              <a:rPr lang="en-US" sz="1140" dirty="0">
                 <a:solidFill>
                   <a:srgbClr val="17364A"/>
                 </a:solidFill>
@@ -6337,16 +6337,16 @@
                 <a:ea typeface="Aptos" pitchFamily="34" charset="-122"/>
                 <a:cs typeface="Aptos" pitchFamily="34" charset="-120"/>
               </a:rPr>
-              <a:t>Which staff, partners, or communities would be affected if this.</a:t>
-            </a:r>
-            <a:endParaRPr lang="en-US" sz="1220" dirty="0"/>
-          </a:p>
-          <a:p>
-            <a:pPr indent="0" marL="0">
-              <a:buNone/>
-            </a:pPr>
-            <a:r>
-              <a:rPr lang="en-US" sz="1220" dirty="0">
+              <a:t>Which staff, partners, or communities would be.</a:t>
+            </a:r>
+            <a:endParaRPr lang="en-US" sz="1140" dirty="0"/>
+          </a:p>
+          <a:p>
+            <a:pPr indent="0" marL="0">
+              <a:buNone/>
+            </a:pPr>
+            <a:r>
+              <a:rPr lang="en-US" sz="1140" dirty="0">
                 <a:solidFill>
                   <a:srgbClr val="17364A"/>
                 </a:solidFill>
@@ -6354,9 +6354,9 @@
                 <a:ea typeface="Aptos" pitchFamily="34" charset="-122"/>
                 <a:cs typeface="Aptos" pitchFamily="34" charset="-120"/>
               </a:rPr>
-              <a:t>What policy, process, or artifact should be created or updated.</a:t>
-            </a:r>
-            <a:endParaRPr lang="en-US" sz="1220" dirty="0"/>
+              <a:t>What policy, process, or artifact should be.</a:t>
+            </a:r>
+            <a:endParaRPr lang="en-US" sz="1140" dirty="0"/>
           </a:p>
         </p:txBody>
       </p:sp>
@@ -6368,12 +6368,12 @@
         </p:nvSpPr>
         <p:spPr>
           <a:xfrm>
-            <a:off x="7635240" y="4184294"/>
-            <a:ext cx="3474720" cy="1466698"/>
+            <a:off x="7543800" y="4389120"/>
+            <a:ext cx="3611880" cy="1261872"/>
           </a:xfrm>
           <a:prstGeom prst="roundRect">
             <a:avLst>
-              <a:gd name="adj" fmla="val 7481"/>
+              <a:gd name="adj" fmla="val 8696"/>
             </a:avLst>
           </a:prstGeom>
           <a:solidFill>
@@ -6395,8 +6395,8 @@
         </p:nvSpPr>
         <p:spPr>
           <a:xfrm>
-            <a:off x="7799832" y="4330598"/>
-            <a:ext cx="3145536" cy="256032"/>
+            <a:off x="7708392" y="4517136"/>
+            <a:ext cx="3282696" cy="228600"/>
           </a:xfrm>
           <a:prstGeom prst="rect">
             <a:avLst/>
@@ -6412,7 +6412,7 @@
               <a:buNone/>
             </a:pPr>
             <a:r>
-              <a:rPr lang="en-US" sz="1300" b="1" dirty="0">
+              <a:rPr lang="en-US" sz="1220" b="1" dirty="0">
                 <a:solidFill>
                   <a:srgbClr val="0068B7"/>
                 </a:solidFill>
@@ -6422,7 +6422,7 @@
               </a:rPr>
               <a:t>What to document</a:t>
             </a:r>
-            <a:endParaRPr lang="en-US" sz="1300" dirty="0"/>
+            <a:endParaRPr lang="en-US" sz="1220" dirty="0"/>
           </a:p>
         </p:txBody>
       </p:sp>
@@ -6434,8 +6434,8 @@
         </p:nvSpPr>
         <p:spPr>
           <a:xfrm>
-            <a:off x="7799832" y="4659782"/>
-            <a:ext cx="3145536" cy="899770"/>
+            <a:off x="7708392" y="4828032"/>
+            <a:ext cx="3282696" cy="749808"/>
           </a:xfrm>
           <a:prstGeom prst="rect">
             <a:avLst/>
@@ -6453,7 +6453,7 @@
               <a:buNone/>
             </a:pPr>
             <a:r>
-              <a:rPr lang="en-US" sz="1320" dirty="0">
+              <a:rPr lang="en-US" sz="1220" dirty="0">
                 <a:solidFill>
                   <a:srgbClr val="17364A"/>
                 </a:solidFill>
@@ -6461,9 +6461,9 @@
                 <a:ea typeface="Aptos" pitchFamily="34" charset="-122"/>
                 <a:cs typeface="Aptos" pitchFamily="34" charset="-120"/>
               </a:rPr>
-              <a:t>Translate this concept into clear decision rights, review steps, documentation expectations, and escalation paths before an AI-supported workflow is approved.</a:t>
-            </a:r>
-            <a:endParaRPr lang="en-US" sz="1320" dirty="0"/>
+              <a:t>Translate this concept into clear decision rights, review steps, documentation.</a:t>
+            </a:r>
+            <a:endParaRPr lang="en-US" sz="1220" dirty="0"/>
           </a:p>
         </p:txBody>
       </p:sp>
@@ -6754,8 +6754,8 @@
         </p:nvSpPr>
         <p:spPr>
           <a:xfrm>
-            <a:off x="868680" y="1508760"/>
-            <a:ext cx="6309360" cy="4160520"/>
+            <a:off x="822960" y="1463040"/>
+            <a:ext cx="6565392" cy="4343400"/>
           </a:xfrm>
           <a:prstGeom prst="rect">
             <a:avLst/>
@@ -6773,7 +6773,7 @@
               <a:buNone/>
             </a:pPr>
             <a:r>
-              <a:rPr lang="en-US" sz="2100" dirty="0">
+              <a:rPr lang="en-US" sz="1920" dirty="0">
                 <a:solidFill>
                   <a:srgbClr val="003A63"/>
                 </a:solidFill>
@@ -6783,14 +6783,14 @@
               </a:rPr>
               <a:t>• Draft a one-page AI governance charter and a one-page operating model.</a:t>
             </a:r>
-            <a:endParaRPr lang="en-US" sz="2100" dirty="0"/>
-          </a:p>
-          <a:p>
-            <a:pPr indent="0" marL="0">
-              <a:buNone/>
-            </a:pPr>
-            <a:r>
-              <a:rPr lang="en-US" sz="2100" dirty="0">
+            <a:endParaRPr lang="en-US" sz="1920" dirty="0"/>
+          </a:p>
+          <a:p>
+            <a:pPr indent="0" marL="0">
+              <a:buNone/>
+            </a:pPr>
+            <a:r>
+              <a:rPr lang="en-US" sz="1920" dirty="0">
                 <a:solidFill>
                   <a:srgbClr val="003A63"/>
                 </a:solidFill>
@@ -6798,9 +6798,9 @@
                 <a:ea typeface="Aptos" pitchFamily="34" charset="-122"/>
                 <a:cs typeface="Aptos" pitchFamily="34" charset="-120"/>
               </a:rPr>
-              <a:t>• Include scope, membership, review levels, decision rights, documentation, escalation,.</a:t>
-            </a:r>
-            <a:endParaRPr lang="en-US" sz="2100" dirty="0"/>
+              <a:t>• Include scope, membership, review levels, decision rights, documentation,.</a:t>
+            </a:r>
+            <a:endParaRPr lang="en-US" sz="1920" dirty="0"/>
           </a:p>
         </p:txBody>
       </p:sp>
@@ -6812,12 +6812,12 @@
         </p:nvSpPr>
         <p:spPr>
           <a:xfrm>
-            <a:off x="7635240" y="1325880"/>
-            <a:ext cx="3474720" cy="1207008"/>
+            <a:off x="7543800" y="1325880"/>
+            <a:ext cx="3611880" cy="1261872"/>
           </a:xfrm>
           <a:prstGeom prst="roundRect">
             <a:avLst>
-              <a:gd name="adj" fmla="val 9091"/>
+              <a:gd name="adj" fmla="val 8696"/>
             </a:avLst>
           </a:prstGeom>
           <a:solidFill>
@@ -6839,8 +6839,8 @@
         </p:nvSpPr>
         <p:spPr>
           <a:xfrm>
-            <a:off x="7799832" y="1472184"/>
-            <a:ext cx="3145536" cy="256032"/>
+            <a:off x="7708392" y="1453896"/>
+            <a:ext cx="3282696" cy="228600"/>
           </a:xfrm>
           <a:prstGeom prst="rect">
             <a:avLst/>
@@ -6856,7 +6856,7 @@
               <a:buNone/>
             </a:pPr>
             <a:r>
-              <a:rPr lang="en-US" sz="1300" b="1" dirty="0">
+              <a:rPr lang="en-US" sz="1220" b="1" dirty="0">
                 <a:solidFill>
                   <a:srgbClr val="0068B7"/>
                 </a:solidFill>
@@ -6866,7 +6866,7 @@
               </a:rPr>
               <a:t>Governance lens</a:t>
             </a:r>
-            <a:endParaRPr lang="en-US" sz="1300" dirty="0"/>
+            <a:endParaRPr lang="en-US" sz="1220" dirty="0"/>
           </a:p>
         </p:txBody>
       </p:sp>
@@ -6878,8 +6878,8 @@
         </p:nvSpPr>
         <p:spPr>
           <a:xfrm>
-            <a:off x="7799832" y="1801368"/>
-            <a:ext cx="3145536" cy="640080"/>
+            <a:off x="7708392" y="1764792"/>
+            <a:ext cx="3282696" cy="749808"/>
           </a:xfrm>
           <a:prstGeom prst="rect">
             <a:avLst/>
@@ -6897,7 +6897,7 @@
               <a:buNone/>
             </a:pPr>
             <a:r>
-              <a:rPr lang="en-US" sz="1320" dirty="0">
+              <a:rPr lang="en-US" sz="1220" dirty="0">
                 <a:solidFill>
                   <a:srgbClr val="17364A"/>
                 </a:solidFill>
@@ -6907,7 +6907,7 @@
               </a:rPr>
               <a:t>Draft a one-page AI governance charter and a one-page operating model.</a:t>
             </a:r>
-            <a:endParaRPr lang="en-US" sz="1320" dirty="0"/>
+            <a:endParaRPr lang="en-US" sz="1220" dirty="0"/>
           </a:p>
         </p:txBody>
       </p:sp>
@@ -6919,12 +6919,12 @@
         </p:nvSpPr>
         <p:spPr>
           <a:xfrm>
-            <a:off x="7635240" y="2670048"/>
-            <a:ext cx="3474720" cy="1377086"/>
+            <a:off x="7543800" y="2724912"/>
+            <a:ext cx="3611880" cy="1527048"/>
           </a:xfrm>
           <a:prstGeom prst="roundRect">
             <a:avLst>
-              <a:gd name="adj" fmla="val 7968"/>
+              <a:gd name="adj" fmla="val 7186"/>
             </a:avLst>
           </a:prstGeom>
           <a:solidFill>
@@ -6946,8 +6946,8 @@
         </p:nvSpPr>
         <p:spPr>
           <a:xfrm>
-            <a:off x="7799832" y="2816352"/>
-            <a:ext cx="3145536" cy="256032"/>
+            <a:off x="7708392" y="2852928"/>
+            <a:ext cx="3282696" cy="228600"/>
           </a:xfrm>
           <a:prstGeom prst="rect">
             <a:avLst/>
@@ -6963,7 +6963,7 @@
               <a:buNone/>
             </a:pPr>
             <a:r>
-              <a:rPr lang="en-US" sz="1300" b="1" dirty="0">
+              <a:rPr lang="en-US" sz="1220" b="1" dirty="0">
                 <a:solidFill>
                   <a:srgbClr val="0068B7"/>
                 </a:solidFill>
@@ -6973,7 +6973,7 @@
               </a:rPr>
               <a:t>Concept checkpoints</a:t>
             </a:r>
-            <a:endParaRPr lang="en-US" sz="1300" dirty="0"/>
+            <a:endParaRPr lang="en-US" sz="1220" dirty="0"/>
           </a:p>
         </p:txBody>
       </p:sp>
@@ -6985,8 +6985,8 @@
         </p:nvSpPr>
         <p:spPr>
           <a:xfrm>
-            <a:off x="7818120" y="3182112"/>
-            <a:ext cx="3090672" cy="718718"/>
+            <a:off x="7726680" y="3182112"/>
+            <a:ext cx="3227832" cy="960120"/>
           </a:xfrm>
           <a:prstGeom prst="rect">
             <a:avLst/>
@@ -7004,7 +7004,7 @@
               <a:buNone/>
             </a:pPr>
             <a:r>
-              <a:rPr lang="en-US" sz="1220" dirty="0">
+              <a:rPr lang="en-US" sz="1140" dirty="0">
                 <a:solidFill>
                   <a:srgbClr val="17364A"/>
                 </a:solidFill>
@@ -7012,16 +7012,16 @@
                 <a:ea typeface="Aptos" pitchFamily="34" charset="-122"/>
                 <a:cs typeface="Aptos" pitchFamily="34" charset="-120"/>
               </a:rPr>
-              <a:t>Draft a one-page AI governance charter and a one-page operating.</a:t>
-            </a:r>
-            <a:endParaRPr lang="en-US" sz="1220" dirty="0"/>
-          </a:p>
-          <a:p>
-            <a:pPr indent="0" marL="0">
-              <a:buNone/>
-            </a:pPr>
-            <a:r>
-              <a:rPr lang="en-US" sz="1220" dirty="0">
+              <a:t>Draft a one-page AI governance charter and a.</a:t>
+            </a:r>
+            <a:endParaRPr lang="en-US" sz="1140" dirty="0"/>
+          </a:p>
+          <a:p>
+            <a:pPr indent="0" marL="0">
+              <a:buNone/>
+            </a:pPr>
+            <a:r>
+              <a:rPr lang="en-US" sz="1140" dirty="0">
                 <a:solidFill>
                   <a:srgbClr val="17364A"/>
                 </a:solidFill>
@@ -7029,9 +7029,9 @@
                 <a:ea typeface="Aptos" pitchFamily="34" charset="-122"/>
                 <a:cs typeface="Aptos" pitchFamily="34" charset="-120"/>
               </a:rPr>
-              <a:t>Include scope, membership, review levels, decision rights,.</a:t>
-            </a:r>
-            <a:endParaRPr lang="en-US" sz="1220" dirty="0"/>
+              <a:t>Include scope, membership, review levels, decision.</a:t>
+            </a:r>
+            <a:endParaRPr lang="en-US" sz="1140" dirty="0"/>
           </a:p>
         </p:txBody>
       </p:sp>
@@ -7043,12 +7043,12 @@
         </p:nvSpPr>
         <p:spPr>
           <a:xfrm>
-            <a:off x="7635240" y="4184294"/>
-            <a:ext cx="3474720" cy="1466698"/>
+            <a:off x="7543800" y="4389120"/>
+            <a:ext cx="3611880" cy="1261872"/>
           </a:xfrm>
           <a:prstGeom prst="roundRect">
             <a:avLst>
-              <a:gd name="adj" fmla="val 7481"/>
+              <a:gd name="adj" fmla="val 8696"/>
             </a:avLst>
           </a:prstGeom>
           <a:solidFill>
@@ -7070,8 +7070,8 @@
         </p:nvSpPr>
         <p:spPr>
           <a:xfrm>
-            <a:off x="7799832" y="4330598"/>
-            <a:ext cx="3145536" cy="256032"/>
+            <a:off x="7708392" y="4517136"/>
+            <a:ext cx="3282696" cy="228600"/>
           </a:xfrm>
           <a:prstGeom prst="rect">
             <a:avLst/>
@@ -7087,7 +7087,7 @@
               <a:buNone/>
             </a:pPr>
             <a:r>
-              <a:rPr lang="en-US" sz="1300" b="1" dirty="0">
+              <a:rPr lang="en-US" sz="1220" b="1" dirty="0">
                 <a:solidFill>
                   <a:srgbClr val="0068B7"/>
                 </a:solidFill>
@@ -7097,7 +7097,7 @@
               </a:rPr>
               <a:t>What to document</a:t>
             </a:r>
-            <a:endParaRPr lang="en-US" sz="1300" dirty="0"/>
+            <a:endParaRPr lang="en-US" sz="1220" dirty="0"/>
           </a:p>
         </p:txBody>
       </p:sp>
@@ -7109,8 +7109,8 @@
         </p:nvSpPr>
         <p:spPr>
           <a:xfrm>
-            <a:off x="7799832" y="4659782"/>
-            <a:ext cx="3145536" cy="899770"/>
+            <a:off x="7708392" y="4828032"/>
+            <a:ext cx="3282696" cy="749808"/>
           </a:xfrm>
           <a:prstGeom prst="rect">
             <a:avLst/>
@@ -7128,7 +7128,7 @@
               <a:buNone/>
             </a:pPr>
             <a:r>
-              <a:rPr lang="en-US" sz="1320" dirty="0">
+              <a:rPr lang="en-US" sz="1220" dirty="0">
                 <a:solidFill>
                   <a:srgbClr val="17364A"/>
                 </a:solidFill>
@@ -7136,9 +7136,9 @@
                 <a:ea typeface="Aptos" pitchFamily="34" charset="-122"/>
                 <a:cs typeface="Aptos" pitchFamily="34" charset="-120"/>
               </a:rPr>
-              <a:t>Use the assignment to test whether you can explain the concept, apply it to a realistic public health situation, and identify what would need review before the work moves forward.</a:t>
-            </a:r>
-            <a:endParaRPr lang="en-US" sz="1320" dirty="0"/>
+              <a:t>Use the assignment to test whether you can explain the concept, apply it to a.</a:t>
+            </a:r>
+            <a:endParaRPr lang="en-US" sz="1220" dirty="0"/>
           </a:p>
         </p:txBody>
       </p:sp>
@@ -7429,8 +7429,8 @@
         </p:nvSpPr>
         <p:spPr>
           <a:xfrm>
-            <a:off x="868680" y="1508760"/>
-            <a:ext cx="6309360" cy="4160520"/>
+            <a:off x="822960" y="1463040"/>
+            <a:ext cx="6565392" cy="4343400"/>
           </a:xfrm>
           <a:prstGeom prst="rect">
             <a:avLst/>
@@ -7448,7 +7448,7 @@
               <a:buNone/>
             </a:pPr>
             <a:r>
-              <a:rPr lang="en-US" sz="2100" dirty="0">
+              <a:rPr lang="en-US" sz="1920" dirty="0">
                 <a:solidFill>
                   <a:srgbClr val="003A63"/>
                 </a:solidFill>
@@ -7458,14 +7458,14 @@
               </a:rPr>
               <a:t>• Choose a real or realistic public health AI use case.</a:t>
             </a:r>
-            <a:endParaRPr lang="en-US" sz="2100" dirty="0"/>
-          </a:p>
-          <a:p>
-            <a:pPr indent="0" marL="0">
-              <a:buNone/>
-            </a:pPr>
-            <a:r>
-              <a:rPr lang="en-US" sz="2100" dirty="0">
+            <a:endParaRPr lang="en-US" sz="1920" dirty="0"/>
+          </a:p>
+          <a:p>
+            <a:pPr indent="0" marL="0">
+              <a:buNone/>
+            </a:pPr>
+            <a:r>
+              <a:rPr lang="en-US" sz="1920" dirty="0">
                 <a:solidFill>
                   <a:srgbClr val="003A63"/>
                 </a:solidFill>
@@ -7473,16 +7473,16 @@
                 <a:ea typeface="Aptos" pitchFamily="34" charset="-122"/>
                 <a:cs typeface="Aptos" pitchFamily="34" charset="-120"/>
               </a:rPr>
-              <a:t>• Document assumptions, unresolved questions, and which agency roles would need to review the.</a:t>
-            </a:r>
-            <a:endParaRPr lang="en-US" sz="2100" dirty="0"/>
-          </a:p>
-          <a:p>
-            <a:pPr indent="0" marL="0">
-              <a:buNone/>
-            </a:pPr>
-            <a:r>
-              <a:rPr lang="en-US" sz="2100" dirty="0">
+              <a:t>• Document assumptions, unresolved questions, and which agency roles would.</a:t>
+            </a:r>
+            <a:endParaRPr lang="en-US" sz="1920" dirty="0"/>
+          </a:p>
+          <a:p>
+            <a:pPr indent="0" marL="0">
+              <a:buNone/>
+            </a:pPr>
+            <a:r>
+              <a:rPr lang="en-US" sz="1920" dirty="0">
                 <a:solidFill>
                   <a:srgbClr val="003A63"/>
                 </a:solidFill>
@@ -7490,9 +7490,9 @@
                 <a:ea typeface="Aptos" pitchFamily="34" charset="-122"/>
                 <a:cs typeface="Aptos" pitchFamily="34" charset="-120"/>
               </a:rPr>
-              <a:t>• The exercise should produce a work product that could support governance review, leadership.</a:t>
-            </a:r>
-            <a:endParaRPr lang="en-US" sz="2100" dirty="0"/>
+              <a:t>• The exercise should produce a work product that could support governance.</a:t>
+            </a:r>
+            <a:endParaRPr lang="en-US" sz="1920" dirty="0"/>
           </a:p>
         </p:txBody>
       </p:sp>
@@ -7504,12 +7504,12 @@
         </p:nvSpPr>
         <p:spPr>
           <a:xfrm>
-            <a:off x="7635240" y="1325880"/>
-            <a:ext cx="3474720" cy="1207008"/>
+            <a:off x="7543800" y="1325880"/>
+            <a:ext cx="3611880" cy="1261872"/>
           </a:xfrm>
           <a:prstGeom prst="roundRect">
             <a:avLst>
-              <a:gd name="adj" fmla="val 9091"/>
+              <a:gd name="adj" fmla="val 8696"/>
             </a:avLst>
           </a:prstGeom>
           <a:solidFill>
@@ -7531,8 +7531,8 @@
         </p:nvSpPr>
         <p:spPr>
           <a:xfrm>
-            <a:off x="7799832" y="1472184"/>
-            <a:ext cx="3145536" cy="256032"/>
+            <a:off x="7708392" y="1453896"/>
+            <a:ext cx="3282696" cy="228600"/>
           </a:xfrm>
           <a:prstGeom prst="rect">
             <a:avLst/>
@@ -7548,7 +7548,7 @@
               <a:buNone/>
             </a:pPr>
             <a:r>
-              <a:rPr lang="en-US" sz="1300" b="1" dirty="0">
+              <a:rPr lang="en-US" sz="1220" b="1" dirty="0">
                 <a:solidFill>
                   <a:srgbClr val="0068B7"/>
                 </a:solidFill>
@@ -7558,7 +7558,7 @@
               </a:rPr>
               <a:t>Governance lens</a:t>
             </a:r>
-            <a:endParaRPr lang="en-US" sz="1300" dirty="0"/>
+            <a:endParaRPr lang="en-US" sz="1220" dirty="0"/>
           </a:p>
         </p:txBody>
       </p:sp>
@@ -7570,8 +7570,8 @@
         </p:nvSpPr>
         <p:spPr>
           <a:xfrm>
-            <a:off x="7799832" y="1801368"/>
-            <a:ext cx="3145536" cy="640080"/>
+            <a:off x="7708392" y="1764792"/>
+            <a:ext cx="3282696" cy="749808"/>
           </a:xfrm>
           <a:prstGeom prst="rect">
             <a:avLst/>
@@ -7589,7 +7589,7 @@
               <a:buNone/>
             </a:pPr>
             <a:r>
-              <a:rPr lang="en-US" sz="1320" dirty="0">
+              <a:rPr lang="en-US" sz="1220" dirty="0">
                 <a:solidFill>
                   <a:srgbClr val="17364A"/>
                 </a:solidFill>
@@ -7599,7 +7599,7 @@
               </a:rPr>
               <a:t>Choose a real or realistic public health AI use case.</a:t>
             </a:r>
-            <a:endParaRPr lang="en-US" sz="1320" dirty="0"/>
+            <a:endParaRPr lang="en-US" sz="1220" dirty="0"/>
           </a:p>
         </p:txBody>
       </p:sp>
@@ -7611,12 +7611,12 @@
         </p:nvSpPr>
         <p:spPr>
           <a:xfrm>
-            <a:off x="7635240" y="2670048"/>
-            <a:ext cx="3474720" cy="1377086"/>
+            <a:off x="7543800" y="2724912"/>
+            <a:ext cx="3611880" cy="1527048"/>
           </a:xfrm>
           <a:prstGeom prst="roundRect">
             <a:avLst>
-              <a:gd name="adj" fmla="val 7968"/>
+              <a:gd name="adj" fmla="val 7186"/>
             </a:avLst>
           </a:prstGeom>
           <a:solidFill>
@@ -7638,8 +7638,8 @@
         </p:nvSpPr>
         <p:spPr>
           <a:xfrm>
-            <a:off x="7799832" y="2816352"/>
-            <a:ext cx="3145536" cy="256032"/>
+            <a:off x="7708392" y="2852928"/>
+            <a:ext cx="3282696" cy="228600"/>
           </a:xfrm>
           <a:prstGeom prst="rect">
             <a:avLst/>
@@ -7655,7 +7655,7 @@
               <a:buNone/>
             </a:pPr>
             <a:r>
-              <a:rPr lang="en-US" sz="1300" b="1" dirty="0">
+              <a:rPr lang="en-US" sz="1220" b="1" dirty="0">
                 <a:solidFill>
                   <a:srgbClr val="0068B7"/>
                 </a:solidFill>
@@ -7665,7 +7665,7 @@
               </a:rPr>
               <a:t>Concept checkpoints</a:t>
             </a:r>
-            <a:endParaRPr lang="en-US" sz="1300" dirty="0"/>
+            <a:endParaRPr lang="en-US" sz="1220" dirty="0"/>
           </a:p>
         </p:txBody>
       </p:sp>
@@ -7677,8 +7677,8 @@
         </p:nvSpPr>
         <p:spPr>
           <a:xfrm>
-            <a:off x="7818120" y="3182112"/>
-            <a:ext cx="3090672" cy="718718"/>
+            <a:off x="7726680" y="3182112"/>
+            <a:ext cx="3227832" cy="960120"/>
           </a:xfrm>
           <a:prstGeom prst="rect">
             <a:avLst/>
@@ -7696,7 +7696,7 @@
               <a:buNone/>
             </a:pPr>
             <a:r>
-              <a:rPr lang="en-US" sz="1220" dirty="0">
+              <a:rPr lang="en-US" sz="1140" dirty="0">
                 <a:solidFill>
                   <a:srgbClr val="17364A"/>
                 </a:solidFill>
@@ -7704,16 +7704,16 @@
                 <a:ea typeface="Aptos" pitchFamily="34" charset="-122"/>
                 <a:cs typeface="Aptos" pitchFamily="34" charset="-120"/>
               </a:rPr>
-              <a:t>Document assumptions, unresolved questions, and which agency roles.</a:t>
-            </a:r>
-            <a:endParaRPr lang="en-US" sz="1220" dirty="0"/>
-          </a:p>
-          <a:p>
-            <a:pPr indent="0" marL="0">
-              <a:buNone/>
-            </a:pPr>
-            <a:r>
-              <a:rPr lang="en-US" sz="1220" dirty="0">
+              <a:t>Document assumptions, unresolved questions, and.</a:t>
+            </a:r>
+            <a:endParaRPr lang="en-US" sz="1140" dirty="0"/>
+          </a:p>
+          <a:p>
+            <a:pPr indent="0" marL="0">
+              <a:buNone/>
+            </a:pPr>
+            <a:r>
+              <a:rPr lang="en-US" sz="1140" dirty="0">
                 <a:solidFill>
                   <a:srgbClr val="17364A"/>
                 </a:solidFill>
@@ -7721,9 +7721,9 @@
                 <a:ea typeface="Aptos" pitchFamily="34" charset="-122"/>
                 <a:cs typeface="Aptos" pitchFamily="34" charset="-120"/>
               </a:rPr>
-              <a:t>The exercise should produce a work product that could support.</a:t>
-            </a:r>
-            <a:endParaRPr lang="en-US" sz="1220" dirty="0"/>
+              <a:t>The exercise should produce a work product that.</a:t>
+            </a:r>
+            <a:endParaRPr lang="en-US" sz="1140" dirty="0"/>
           </a:p>
         </p:txBody>
       </p:sp>
@@ -7735,12 +7735,12 @@
         </p:nvSpPr>
         <p:spPr>
           <a:xfrm>
-            <a:off x="7635240" y="4184294"/>
-            <a:ext cx="3474720" cy="1466698"/>
+            <a:off x="7543800" y="4389120"/>
+            <a:ext cx="3611880" cy="1261872"/>
           </a:xfrm>
           <a:prstGeom prst="roundRect">
             <a:avLst>
-              <a:gd name="adj" fmla="val 7481"/>
+              <a:gd name="adj" fmla="val 8696"/>
             </a:avLst>
           </a:prstGeom>
           <a:solidFill>
@@ -7762,8 +7762,8 @@
         </p:nvSpPr>
         <p:spPr>
           <a:xfrm>
-            <a:off x="7799832" y="4330598"/>
-            <a:ext cx="3145536" cy="256032"/>
+            <a:off x="7708392" y="4517136"/>
+            <a:ext cx="3282696" cy="228600"/>
           </a:xfrm>
           <a:prstGeom prst="rect">
             <a:avLst/>
@@ -7779,7 +7779,7 @@
               <a:buNone/>
             </a:pPr>
             <a:r>
-              <a:rPr lang="en-US" sz="1300" b="1" dirty="0">
+              <a:rPr lang="en-US" sz="1220" b="1" dirty="0">
                 <a:solidFill>
                   <a:srgbClr val="0068B7"/>
                 </a:solidFill>
@@ -7789,7 +7789,7 @@
               </a:rPr>
               <a:t>What to document</a:t>
             </a:r>
-            <a:endParaRPr lang="en-US" sz="1300" dirty="0"/>
+            <a:endParaRPr lang="en-US" sz="1220" dirty="0"/>
           </a:p>
         </p:txBody>
       </p:sp>
@@ -7801,8 +7801,8 @@
         </p:nvSpPr>
         <p:spPr>
           <a:xfrm>
-            <a:off x="7799832" y="4659782"/>
-            <a:ext cx="3145536" cy="899770"/>
+            <a:off x="7708392" y="4828032"/>
+            <a:ext cx="3282696" cy="749808"/>
           </a:xfrm>
           <a:prstGeom prst="rect">
             <a:avLst/>
@@ -7820,7 +7820,7 @@
               <a:buNone/>
             </a:pPr>
             <a:r>
-              <a:rPr lang="en-US" sz="1320" dirty="0">
+              <a:rPr lang="en-US" sz="1220" dirty="0">
                 <a:solidFill>
                   <a:srgbClr val="17364A"/>
                 </a:solidFill>
@@ -7828,9 +7828,9 @@
                 <a:ea typeface="Aptos" pitchFamily="34" charset="-122"/>
                 <a:cs typeface="Aptos" pitchFamily="34" charset="-120"/>
               </a:rPr>
-              <a:t>Translate this concept into clear decision rights, review steps, documentation expectations, and escalation paths before an AI-supported workflow is approved.</a:t>
-            </a:r>
-            <a:endParaRPr lang="en-US" sz="1320" dirty="0"/>
+              <a:t>Translate this concept into clear decision rights, review steps, documentation.</a:t>
+            </a:r>
+            <a:endParaRPr lang="en-US" sz="1220" dirty="0"/>
           </a:p>
         </p:txBody>
       </p:sp>
@@ -8121,8 +8121,8 @@
         </p:nvSpPr>
         <p:spPr>
           <a:xfrm>
-            <a:off x="868680" y="1508760"/>
-            <a:ext cx="6309360" cy="4160520"/>
+            <a:off x="822960" y="1463040"/>
+            <a:ext cx="6565392" cy="4343400"/>
           </a:xfrm>
           <a:prstGeom prst="rect">
             <a:avLst/>
@@ -8140,7 +8140,7 @@
               <a:buNone/>
             </a:pPr>
             <a:r>
-              <a:rPr lang="en-US" sz="2100" dirty="0">
+              <a:rPr lang="en-US" sz="1920" dirty="0">
                 <a:solidFill>
                   <a:srgbClr val="003A63"/>
                 </a:solidFill>
@@ -8148,9 +8148,9 @@
                 <a:ea typeface="Aptos" pitchFamily="34" charset="-122"/>
                 <a:cs typeface="Aptos" pitchFamily="34" charset="-120"/>
               </a:rPr>
-              <a:t>• Draft AI governance charter; governance operating model; intake and decision-flow diagram;.</a:t>
-            </a:r>
-            <a:endParaRPr lang="en-US" sz="2100" dirty="0"/>
+              <a:t>• Draft AI governance charter; governance operating model; intake and.</a:t>
+            </a:r>
+            <a:endParaRPr lang="en-US" sz="1920" dirty="0"/>
           </a:p>
         </p:txBody>
       </p:sp>
@@ -8162,12 +8162,12 @@
         </p:nvSpPr>
         <p:spPr>
           <a:xfrm>
-            <a:off x="7635240" y="1325880"/>
-            <a:ext cx="3474720" cy="1255471"/>
+            <a:off x="7543800" y="1325880"/>
+            <a:ext cx="3611880" cy="1261872"/>
           </a:xfrm>
           <a:prstGeom prst="roundRect">
             <a:avLst>
-              <a:gd name="adj" fmla="val 8740"/>
+              <a:gd name="adj" fmla="val 8696"/>
             </a:avLst>
           </a:prstGeom>
           <a:solidFill>
@@ -8189,8 +8189,8 @@
         </p:nvSpPr>
         <p:spPr>
           <a:xfrm>
-            <a:off x="7799832" y="1472184"/>
-            <a:ext cx="3145536" cy="256032"/>
+            <a:off x="7708392" y="1453896"/>
+            <a:ext cx="3282696" cy="228600"/>
           </a:xfrm>
           <a:prstGeom prst="rect">
             <a:avLst/>
@@ -8206,7 +8206,7 @@
               <a:buNone/>
             </a:pPr>
             <a:r>
-              <a:rPr lang="en-US" sz="1300" b="1" dirty="0">
+              <a:rPr lang="en-US" sz="1220" b="1" dirty="0">
                 <a:solidFill>
                   <a:srgbClr val="0068B7"/>
                 </a:solidFill>
@@ -8216,7 +8216,7 @@
               </a:rPr>
               <a:t>Governance lens</a:t>
             </a:r>
-            <a:endParaRPr lang="en-US" sz="1300" dirty="0"/>
+            <a:endParaRPr lang="en-US" sz="1220" dirty="0"/>
           </a:p>
         </p:txBody>
       </p:sp>
@@ -8228,8 +8228,8 @@
         </p:nvSpPr>
         <p:spPr>
           <a:xfrm>
-            <a:off x="7799832" y="1801368"/>
-            <a:ext cx="3145536" cy="688543"/>
+            <a:off x="7708392" y="1764792"/>
+            <a:ext cx="3282696" cy="749808"/>
           </a:xfrm>
           <a:prstGeom prst="rect">
             <a:avLst/>
@@ -8247,7 +8247,7 @@
               <a:buNone/>
             </a:pPr>
             <a:r>
-              <a:rPr lang="en-US" sz="1320" dirty="0">
+              <a:rPr lang="en-US" sz="1220" dirty="0">
                 <a:solidFill>
                   <a:srgbClr val="17364A"/>
                 </a:solidFill>
@@ -8255,9 +8255,9 @@
                 <a:ea typeface="Aptos" pitchFamily="34" charset="-122"/>
                 <a:cs typeface="Aptos" pitchFamily="34" charset="-120"/>
               </a:rPr>
-              <a:t>Draft AI governance charter; governance operating model; intake and decision-flow diagram; list of.</a:t>
-            </a:r>
-            <a:endParaRPr lang="en-US" sz="1320" dirty="0"/>
+              <a:t>Draft AI governance charter; governance operating model; intake and.</a:t>
+            </a:r>
+            <a:endParaRPr lang="en-US" sz="1220" dirty="0"/>
           </a:p>
         </p:txBody>
       </p:sp>
@@ -8269,12 +8269,12 @@
         </p:nvSpPr>
         <p:spPr>
           <a:xfrm>
-            <a:off x="7635240" y="2718511"/>
-            <a:ext cx="3474720" cy="1328623"/>
+            <a:off x="7543800" y="2724912"/>
+            <a:ext cx="3611880" cy="1527048"/>
           </a:xfrm>
           <a:prstGeom prst="roundRect">
             <a:avLst>
-              <a:gd name="adj" fmla="val 8259"/>
+              <a:gd name="adj" fmla="val 7186"/>
             </a:avLst>
           </a:prstGeom>
           <a:solidFill>
@@ -8296,8 +8296,8 @@
         </p:nvSpPr>
         <p:spPr>
           <a:xfrm>
-            <a:off x="7799832" y="2864815"/>
-            <a:ext cx="3145536" cy="256032"/>
+            <a:off x="7708392" y="2852928"/>
+            <a:ext cx="3282696" cy="228600"/>
           </a:xfrm>
           <a:prstGeom prst="rect">
             <a:avLst/>
@@ -8313,7 +8313,7 @@
               <a:buNone/>
             </a:pPr>
             <a:r>
-              <a:rPr lang="en-US" sz="1300" b="1" dirty="0">
+              <a:rPr lang="en-US" sz="1220" b="1" dirty="0">
                 <a:solidFill>
                   <a:srgbClr val="0068B7"/>
                 </a:solidFill>
@@ -8323,7 +8323,7 @@
               </a:rPr>
               <a:t>Concept checkpoints</a:t>
             </a:r>
-            <a:endParaRPr lang="en-US" sz="1300" dirty="0"/>
+            <a:endParaRPr lang="en-US" sz="1220" dirty="0"/>
           </a:p>
         </p:txBody>
       </p:sp>
@@ -8335,8 +8335,8 @@
         </p:nvSpPr>
         <p:spPr>
           <a:xfrm>
-            <a:off x="7818120" y="3230575"/>
-            <a:ext cx="3090672" cy="670255"/>
+            <a:off x="7726680" y="3182112"/>
+            <a:ext cx="3227832" cy="960120"/>
           </a:xfrm>
           <a:prstGeom prst="rect">
             <a:avLst/>
@@ -8354,7 +8354,7 @@
               <a:buNone/>
             </a:pPr>
             <a:r>
-              <a:rPr lang="en-US" sz="1220" dirty="0">
+              <a:rPr lang="en-US" sz="1140" dirty="0">
                 <a:solidFill>
                   <a:srgbClr val="17364A"/>
                 </a:solidFill>
@@ -8362,9 +8362,9 @@
                 <a:ea typeface="Aptos" pitchFamily="34" charset="-122"/>
                 <a:cs typeface="Aptos" pitchFamily="34" charset="-120"/>
               </a:rPr>
-              <a:t>Draft AI governance charter; governance operating model; intake.</a:t>
-            </a:r>
-            <a:endParaRPr lang="en-US" sz="1220" dirty="0"/>
+              <a:t>Draft AI governance charter; governance operating.</a:t>
+            </a:r>
+            <a:endParaRPr lang="en-US" sz="1140" dirty="0"/>
           </a:p>
         </p:txBody>
       </p:sp>
@@ -8376,12 +8376,12 @@
         </p:nvSpPr>
         <p:spPr>
           <a:xfrm>
-            <a:off x="7635240" y="4184294"/>
-            <a:ext cx="3474720" cy="1466698"/>
+            <a:off x="7543800" y="4389120"/>
+            <a:ext cx="3611880" cy="1261872"/>
           </a:xfrm>
           <a:prstGeom prst="roundRect">
             <a:avLst>
-              <a:gd name="adj" fmla="val 7481"/>
+              <a:gd name="adj" fmla="val 8696"/>
             </a:avLst>
           </a:prstGeom>
           <a:solidFill>
@@ -8403,8 +8403,8 @@
         </p:nvSpPr>
         <p:spPr>
           <a:xfrm>
-            <a:off x="7799832" y="4330598"/>
-            <a:ext cx="3145536" cy="256032"/>
+            <a:off x="7708392" y="4517136"/>
+            <a:ext cx="3282696" cy="228600"/>
           </a:xfrm>
           <a:prstGeom prst="rect">
             <a:avLst/>
@@ -8420,7 +8420,7 @@
               <a:buNone/>
             </a:pPr>
             <a:r>
-              <a:rPr lang="en-US" sz="1300" b="1" dirty="0">
+              <a:rPr lang="en-US" sz="1220" b="1" dirty="0">
                 <a:solidFill>
                   <a:srgbClr val="0068B7"/>
                 </a:solidFill>
@@ -8430,7 +8430,7 @@
               </a:rPr>
               <a:t>What to document</a:t>
             </a:r>
-            <a:endParaRPr lang="en-US" sz="1300" dirty="0"/>
+            <a:endParaRPr lang="en-US" sz="1220" dirty="0"/>
           </a:p>
         </p:txBody>
       </p:sp>
@@ -8442,8 +8442,8 @@
         </p:nvSpPr>
         <p:spPr>
           <a:xfrm>
-            <a:off x="7799832" y="4659782"/>
-            <a:ext cx="3145536" cy="899770"/>
+            <a:off x="7708392" y="4828032"/>
+            <a:ext cx="3282696" cy="749808"/>
           </a:xfrm>
           <a:prstGeom prst="rect">
             <a:avLst/>
@@ -8461,7 +8461,7 @@
               <a:buNone/>
             </a:pPr>
             <a:r>
-              <a:rPr lang="en-US" sz="1320" dirty="0">
+              <a:rPr lang="en-US" sz="1220" dirty="0">
                 <a:solidFill>
                   <a:srgbClr val="17364A"/>
                 </a:solidFill>
@@ -8469,9 +8469,9 @@
                 <a:ea typeface="Aptos" pitchFamily="34" charset="-122"/>
                 <a:cs typeface="Aptos" pitchFamily="34" charset="-120"/>
               </a:rPr>
-              <a:t>Translate this concept into clear decision rights, review steps, documentation expectations, and escalation paths before an AI-supported workflow is approved.</a:t>
-            </a:r>
-            <a:endParaRPr lang="en-US" sz="1320" dirty="0"/>
+              <a:t>Translate this concept into clear decision rights, review steps, documentation.</a:t>
+            </a:r>
+            <a:endParaRPr lang="en-US" sz="1220" dirty="0"/>
           </a:p>
         </p:txBody>
       </p:sp>
@@ -8762,8 +8762,8 @@
         </p:nvSpPr>
         <p:spPr>
           <a:xfrm>
-            <a:off x="868680" y="1508760"/>
-            <a:ext cx="6309360" cy="4160520"/>
+            <a:off x="822960" y="1463040"/>
+            <a:ext cx="6565392" cy="4343400"/>
           </a:xfrm>
           <a:prstGeom prst="rect">
             <a:avLst/>
@@ -8781,7 +8781,7 @@
               <a:buNone/>
             </a:pPr>
             <a:r>
-              <a:rPr lang="en-US" sz="2100" dirty="0">
+              <a:rPr lang="en-US" sz="1920" dirty="0">
                 <a:solidFill>
                   <a:srgbClr val="003A63"/>
                 </a:solidFill>
@@ -8789,9 +8789,9 @@
                 <a:ea typeface="Aptos" pitchFamily="34" charset="-122"/>
                 <a:cs typeface="Aptos" pitchFamily="34" charset="-120"/>
               </a:rPr>
-              <a:t>• Draft AI governance charter; governance operating model; intake and decision-flow diagram;.</a:t>
-            </a:r>
-            <a:endParaRPr lang="en-US" sz="2100" dirty="0"/>
+              <a:t>• Draft AI governance charter; governance operating model; intake and.</a:t>
+            </a:r>
+            <a:endParaRPr lang="en-US" sz="1920" dirty="0"/>
           </a:p>
         </p:txBody>
       </p:sp>
@@ -8803,12 +8803,12 @@
         </p:nvSpPr>
         <p:spPr>
           <a:xfrm>
-            <a:off x="7635240" y="1325880"/>
-            <a:ext cx="3474720" cy="1255471"/>
+            <a:off x="7543800" y="1325880"/>
+            <a:ext cx="3611880" cy="1261872"/>
           </a:xfrm>
           <a:prstGeom prst="roundRect">
             <a:avLst>
-              <a:gd name="adj" fmla="val 8740"/>
+              <a:gd name="adj" fmla="val 8696"/>
             </a:avLst>
           </a:prstGeom>
           <a:solidFill>
@@ -8830,8 +8830,8 @@
         </p:nvSpPr>
         <p:spPr>
           <a:xfrm>
-            <a:off x="7799832" y="1472184"/>
-            <a:ext cx="3145536" cy="256032"/>
+            <a:off x="7708392" y="1453896"/>
+            <a:ext cx="3282696" cy="228600"/>
           </a:xfrm>
           <a:prstGeom prst="rect">
             <a:avLst/>
@@ -8847,7 +8847,7 @@
               <a:buNone/>
             </a:pPr>
             <a:r>
-              <a:rPr lang="en-US" sz="1300" b="1" dirty="0">
+              <a:rPr lang="en-US" sz="1220" b="1" dirty="0">
                 <a:solidFill>
                   <a:srgbClr val="0068B7"/>
                 </a:solidFill>
@@ -8857,7 +8857,7 @@
               </a:rPr>
               <a:t>Governance lens</a:t>
             </a:r>
-            <a:endParaRPr lang="en-US" sz="1300" dirty="0"/>
+            <a:endParaRPr lang="en-US" sz="1220" dirty="0"/>
           </a:p>
         </p:txBody>
       </p:sp>
@@ -8869,8 +8869,8 @@
         </p:nvSpPr>
         <p:spPr>
           <a:xfrm>
-            <a:off x="7799832" y="1801368"/>
-            <a:ext cx="3145536" cy="688543"/>
+            <a:off x="7708392" y="1764792"/>
+            <a:ext cx="3282696" cy="749808"/>
           </a:xfrm>
           <a:prstGeom prst="rect">
             <a:avLst/>
@@ -8888,7 +8888,7 @@
               <a:buNone/>
             </a:pPr>
             <a:r>
-              <a:rPr lang="en-US" sz="1320" dirty="0">
+              <a:rPr lang="en-US" sz="1220" dirty="0">
                 <a:solidFill>
                   <a:srgbClr val="17364A"/>
                 </a:solidFill>
@@ -8896,9 +8896,9 @@
                 <a:ea typeface="Aptos" pitchFamily="34" charset="-122"/>
                 <a:cs typeface="Aptos" pitchFamily="34" charset="-120"/>
               </a:rPr>
-              <a:t>Draft AI governance charter; governance operating model; intake and decision-flow diagram; list of.</a:t>
-            </a:r>
-            <a:endParaRPr lang="en-US" sz="1320" dirty="0"/>
+              <a:t>Draft AI governance charter; governance operating model; intake and.</a:t>
+            </a:r>
+            <a:endParaRPr lang="en-US" sz="1220" dirty="0"/>
           </a:p>
         </p:txBody>
       </p:sp>
@@ -8910,12 +8910,12 @@
         </p:nvSpPr>
         <p:spPr>
           <a:xfrm>
-            <a:off x="7635240" y="2718511"/>
-            <a:ext cx="3474720" cy="1328623"/>
+            <a:off x="7543800" y="2724912"/>
+            <a:ext cx="3611880" cy="1527048"/>
           </a:xfrm>
           <a:prstGeom prst="roundRect">
             <a:avLst>
-              <a:gd name="adj" fmla="val 8259"/>
+              <a:gd name="adj" fmla="val 7186"/>
             </a:avLst>
           </a:prstGeom>
           <a:solidFill>
@@ -8937,8 +8937,8 @@
         </p:nvSpPr>
         <p:spPr>
           <a:xfrm>
-            <a:off x="7799832" y="2864815"/>
-            <a:ext cx="3145536" cy="256032"/>
+            <a:off x="7708392" y="2852928"/>
+            <a:ext cx="3282696" cy="228600"/>
           </a:xfrm>
           <a:prstGeom prst="rect">
             <a:avLst/>
@@ -8954,7 +8954,7 @@
               <a:buNone/>
             </a:pPr>
             <a:r>
-              <a:rPr lang="en-US" sz="1300" b="1" dirty="0">
+              <a:rPr lang="en-US" sz="1220" b="1" dirty="0">
                 <a:solidFill>
                   <a:srgbClr val="0068B7"/>
                 </a:solidFill>
@@ -8964,7 +8964,7 @@
               </a:rPr>
               <a:t>Concept checkpoints</a:t>
             </a:r>
-            <a:endParaRPr lang="en-US" sz="1300" dirty="0"/>
+            <a:endParaRPr lang="en-US" sz="1220" dirty="0"/>
           </a:p>
         </p:txBody>
       </p:sp>
@@ -8976,8 +8976,8 @@
         </p:nvSpPr>
         <p:spPr>
           <a:xfrm>
-            <a:off x="7818120" y="3230575"/>
-            <a:ext cx="3090672" cy="670255"/>
+            <a:off x="7726680" y="3182112"/>
+            <a:ext cx="3227832" cy="960120"/>
           </a:xfrm>
           <a:prstGeom prst="rect">
             <a:avLst/>
@@ -8995,7 +8995,7 @@
               <a:buNone/>
             </a:pPr>
             <a:r>
-              <a:rPr lang="en-US" sz="1220" dirty="0">
+              <a:rPr lang="en-US" sz="1140" dirty="0">
                 <a:solidFill>
                   <a:srgbClr val="17364A"/>
                 </a:solidFill>
@@ -9003,9 +9003,9 @@
                 <a:ea typeface="Aptos" pitchFamily="34" charset="-122"/>
                 <a:cs typeface="Aptos" pitchFamily="34" charset="-120"/>
               </a:rPr>
-              <a:t>Draft AI governance charter; governance operating model; intake.</a:t>
-            </a:r>
-            <a:endParaRPr lang="en-US" sz="1220" dirty="0"/>
+              <a:t>Draft AI governance charter; governance operating.</a:t>
+            </a:r>
+            <a:endParaRPr lang="en-US" sz="1140" dirty="0"/>
           </a:p>
         </p:txBody>
       </p:sp>
@@ -9017,12 +9017,12 @@
         </p:nvSpPr>
         <p:spPr>
           <a:xfrm>
-            <a:off x="7635240" y="4184294"/>
-            <a:ext cx="3474720" cy="1466698"/>
+            <a:off x="7543800" y="4389120"/>
+            <a:ext cx="3611880" cy="1261872"/>
           </a:xfrm>
           <a:prstGeom prst="roundRect">
             <a:avLst>
-              <a:gd name="adj" fmla="val 7481"/>
+              <a:gd name="adj" fmla="val 8696"/>
             </a:avLst>
           </a:prstGeom>
           <a:solidFill>
@@ -9044,8 +9044,8 @@
         </p:nvSpPr>
         <p:spPr>
           <a:xfrm>
-            <a:off x="7799832" y="4330598"/>
-            <a:ext cx="3145536" cy="256032"/>
+            <a:off x="7708392" y="4517136"/>
+            <a:ext cx="3282696" cy="228600"/>
           </a:xfrm>
           <a:prstGeom prst="rect">
             <a:avLst/>
@@ -9061,7 +9061,7 @@
               <a:buNone/>
             </a:pPr>
             <a:r>
-              <a:rPr lang="en-US" sz="1300" b="1" dirty="0">
+              <a:rPr lang="en-US" sz="1220" b="1" dirty="0">
                 <a:solidFill>
                   <a:srgbClr val="0068B7"/>
                 </a:solidFill>
@@ -9071,7 +9071,7 @@
               </a:rPr>
               <a:t>What to document</a:t>
             </a:r>
-            <a:endParaRPr lang="en-US" sz="1300" dirty="0"/>
+            <a:endParaRPr lang="en-US" sz="1220" dirty="0"/>
           </a:p>
         </p:txBody>
       </p:sp>
@@ -9083,8 +9083,8 @@
         </p:nvSpPr>
         <p:spPr>
           <a:xfrm>
-            <a:off x="7799832" y="4659782"/>
-            <a:ext cx="3145536" cy="899770"/>
+            <a:off x="7708392" y="4828032"/>
+            <a:ext cx="3282696" cy="749808"/>
           </a:xfrm>
           <a:prstGeom prst="rect">
             <a:avLst/>
@@ -9102,7 +9102,7 @@
               <a:buNone/>
             </a:pPr>
             <a:r>
-              <a:rPr lang="en-US" sz="1320" dirty="0">
+              <a:rPr lang="en-US" sz="1220" dirty="0">
                 <a:solidFill>
                   <a:srgbClr val="17364A"/>
                 </a:solidFill>
@@ -9110,9 +9110,9 @@
                 <a:ea typeface="Aptos" pitchFamily="34" charset="-122"/>
                 <a:cs typeface="Aptos" pitchFamily="34" charset="-120"/>
               </a:rPr>
-              <a:t>Use the assignment to test whether you can explain the concept, apply it to a realistic public health situation, and identify what would need review before the work moves forward.</a:t>
-            </a:r>
-            <a:endParaRPr lang="en-US" sz="1320" dirty="0"/>
+              <a:t>Use the assignment to test whether you can explain the concept, apply it to a.</a:t>
+            </a:r>
+            <a:endParaRPr lang="en-US" sz="1220" dirty="0"/>
           </a:p>
         </p:txBody>
       </p:sp>
@@ -9403,8 +9403,8 @@
         </p:nvSpPr>
         <p:spPr>
           <a:xfrm>
-            <a:off x="868680" y="1508760"/>
-            <a:ext cx="6309360" cy="4160520"/>
+            <a:off x="822960" y="1463040"/>
+            <a:ext cx="6565392" cy="4343400"/>
           </a:xfrm>
           <a:prstGeom prst="rect">
             <a:avLst/>
@@ -9422,7 +9422,7 @@
               <a:buNone/>
             </a:pPr>
             <a:r>
-              <a:rPr lang="en-US" sz="2100" dirty="0">
+              <a:rPr lang="en-US" sz="1920" dirty="0">
                 <a:solidFill>
                   <a:srgbClr val="003A63"/>
                 </a:solidFill>
@@ -9430,16 +9430,16 @@
                 <a:ea typeface="Aptos" pitchFamily="34" charset="-122"/>
                 <a:cs typeface="Aptos" pitchFamily="34" charset="-120"/>
               </a:rPr>
-              <a:t>• 1. What is the strongest reason this module topic belongs in AI leadership and governance.</a:t>
-            </a:r>
-            <a:endParaRPr lang="en-US" sz="2100" dirty="0"/>
-          </a:p>
-          <a:p>
-            <a:pPr indent="0" marL="0">
-              <a:buNone/>
-            </a:pPr>
-            <a:r>
-              <a:rPr lang="en-US" sz="2100" dirty="0">
+              <a:t>• 1. What is the strongest reason this module topic belongs in AI leadership.</a:t>
+            </a:r>
+            <a:endParaRPr lang="en-US" sz="1920" dirty="0"/>
+          </a:p>
+          <a:p>
+            <a:pPr indent="0" marL="0">
+              <a:buNone/>
+            </a:pPr>
+            <a:r>
+              <a:rPr lang="en-US" sz="1920" dirty="0">
                 <a:solidFill>
                   <a:srgbClr val="003A63"/>
                 </a:solidFill>
@@ -9449,14 +9449,14 @@
               </a:rPr>
               <a:t>• 2. Which practice best supports accountable public health AI governance?</a:t>
             </a:r>
-            <a:endParaRPr lang="en-US" sz="2100" dirty="0"/>
-          </a:p>
-          <a:p>
-            <a:pPr indent="0" marL="0">
-              <a:buNone/>
-            </a:pPr>
-            <a:r>
-              <a:rPr lang="en-US" sz="2100" dirty="0">
+            <a:endParaRPr lang="en-US" sz="1920" dirty="0"/>
+          </a:p>
+          <a:p>
+            <a:pPr indent="0" marL="0">
+              <a:buNone/>
+            </a:pPr>
+            <a:r>
+              <a:rPr lang="en-US" sz="1920" dirty="0">
                 <a:solidFill>
                   <a:srgbClr val="003A63"/>
                 </a:solidFill>
@@ -9464,9 +9464,9 @@
                 <a:ea typeface="Aptos" pitchFamily="34" charset="-122"/>
                 <a:cs typeface="Aptos" pitchFamily="34" charset="-120"/>
               </a:rPr>
-              <a:t>• 3. When should an AI use case be escalated for leadership or governance review?</a:t>
-            </a:r>
-            <a:endParaRPr lang="en-US" sz="2100" dirty="0"/>
+              <a:t>• 3. When should an AI use case be escalated for leadership or governance.</a:t>
+            </a:r>
+            <a:endParaRPr lang="en-US" sz="1920" dirty="0"/>
           </a:p>
         </p:txBody>
       </p:sp>
@@ -9478,12 +9478,12 @@
         </p:nvSpPr>
         <p:spPr>
           <a:xfrm>
-            <a:off x="7635240" y="1325880"/>
-            <a:ext cx="3474720" cy="1255471"/>
+            <a:off x="7543800" y="1325880"/>
+            <a:ext cx="3611880" cy="1261872"/>
           </a:xfrm>
           <a:prstGeom prst="roundRect">
             <a:avLst>
-              <a:gd name="adj" fmla="val 8740"/>
+              <a:gd name="adj" fmla="val 8696"/>
             </a:avLst>
           </a:prstGeom>
           <a:solidFill>
@@ -9505,8 +9505,8 @@
         </p:nvSpPr>
         <p:spPr>
           <a:xfrm>
-            <a:off x="7799832" y="1472184"/>
-            <a:ext cx="3145536" cy="256032"/>
+            <a:off x="7708392" y="1453896"/>
+            <a:ext cx="3282696" cy="228600"/>
           </a:xfrm>
           <a:prstGeom prst="rect">
             <a:avLst/>
@@ -9522,7 +9522,7 @@
               <a:buNone/>
             </a:pPr>
             <a:r>
-              <a:rPr lang="en-US" sz="1300" b="1" dirty="0">
+              <a:rPr lang="en-US" sz="1220" b="1" dirty="0">
                 <a:solidFill>
                   <a:srgbClr val="0068B7"/>
                 </a:solidFill>
@@ -9532,7 +9532,7 @@
               </a:rPr>
               <a:t>Governance lens</a:t>
             </a:r>
-            <a:endParaRPr lang="en-US" sz="1300" dirty="0"/>
+            <a:endParaRPr lang="en-US" sz="1220" dirty="0"/>
           </a:p>
         </p:txBody>
       </p:sp>
@@ -9544,8 +9544,8 @@
         </p:nvSpPr>
         <p:spPr>
           <a:xfrm>
-            <a:off x="7799832" y="1801368"/>
-            <a:ext cx="3145536" cy="688543"/>
+            <a:off x="7708392" y="1764792"/>
+            <a:ext cx="3282696" cy="749808"/>
           </a:xfrm>
           <a:prstGeom prst="rect">
             <a:avLst/>
@@ -9563,7 +9563,7 @@
               <a:buNone/>
             </a:pPr>
             <a:r>
-              <a:rPr lang="en-US" sz="1320" dirty="0">
+              <a:rPr lang="en-US" sz="1220" dirty="0">
                 <a:solidFill>
                   <a:srgbClr val="17364A"/>
                 </a:solidFill>
@@ -9571,9 +9571,9 @@
                 <a:ea typeface="Aptos" pitchFamily="34" charset="-122"/>
                 <a:cs typeface="Aptos" pitchFamily="34" charset="-120"/>
               </a:rPr>
-              <a:t>1. What is the strongest reason this module topic belongs in AI leadership and governance training?</a:t>
-            </a:r>
-            <a:endParaRPr lang="en-US" sz="1320" dirty="0"/>
+              <a:t>1. What is the strongest reason this module topic belongs in AI leadership and.</a:t>
+            </a:r>
+            <a:endParaRPr lang="en-US" sz="1220" dirty="0"/>
           </a:p>
         </p:txBody>
       </p:sp>
@@ -9585,12 +9585,12 @@
         </p:nvSpPr>
         <p:spPr>
           <a:xfrm>
-            <a:off x="7635240" y="2718511"/>
-            <a:ext cx="3474720" cy="1328623"/>
+            <a:off x="7543800" y="2724912"/>
+            <a:ext cx="3611880" cy="1527048"/>
           </a:xfrm>
           <a:prstGeom prst="roundRect">
             <a:avLst>
-              <a:gd name="adj" fmla="val 8259"/>
+              <a:gd name="adj" fmla="val 7186"/>
             </a:avLst>
           </a:prstGeom>
           <a:solidFill>
@@ -9612,8 +9612,8 @@
         </p:nvSpPr>
         <p:spPr>
           <a:xfrm>
-            <a:off x="7799832" y="2864815"/>
-            <a:ext cx="3145536" cy="256032"/>
+            <a:off x="7708392" y="2852928"/>
+            <a:ext cx="3282696" cy="228600"/>
           </a:xfrm>
           <a:prstGeom prst="rect">
             <a:avLst/>
@@ -9629,7 +9629,7 @@
               <a:buNone/>
             </a:pPr>
             <a:r>
-              <a:rPr lang="en-US" sz="1300" b="1" dirty="0">
+              <a:rPr lang="en-US" sz="1220" b="1" dirty="0">
                 <a:solidFill>
                   <a:srgbClr val="0068B7"/>
                 </a:solidFill>
@@ -9639,7 +9639,7 @@
               </a:rPr>
               <a:t>Concept checkpoints</a:t>
             </a:r>
-            <a:endParaRPr lang="en-US" sz="1300" dirty="0"/>
+            <a:endParaRPr lang="en-US" sz="1220" dirty="0"/>
           </a:p>
         </p:txBody>
       </p:sp>
@@ -9651,8 +9651,8 @@
         </p:nvSpPr>
         <p:spPr>
           <a:xfrm>
-            <a:off x="7818120" y="3230575"/>
-            <a:ext cx="3090672" cy="670255"/>
+            <a:off x="7726680" y="3182112"/>
+            <a:ext cx="3227832" cy="960120"/>
           </a:xfrm>
           <a:prstGeom prst="rect">
             <a:avLst/>
@@ -9670,7 +9670,7 @@
               <a:buNone/>
             </a:pPr>
             <a:r>
-              <a:rPr lang="en-US" sz="1220" dirty="0">
+              <a:rPr lang="en-US" sz="1140" dirty="0">
                 <a:solidFill>
                   <a:srgbClr val="17364A"/>
                 </a:solidFill>
@@ -9680,14 +9680,14 @@
               </a:rPr>
               <a:t>1.</a:t>
             </a:r>
-            <a:endParaRPr lang="en-US" sz="1220" dirty="0"/>
-          </a:p>
-          <a:p>
-            <a:pPr indent="0" marL="0">
-              <a:buNone/>
-            </a:pPr>
-            <a:r>
-              <a:rPr lang="en-US" sz="1220" dirty="0">
+            <a:endParaRPr lang="en-US" sz="1140" dirty="0"/>
+          </a:p>
+          <a:p>
+            <a:pPr indent="0" marL="0">
+              <a:buNone/>
+            </a:pPr>
+            <a:r>
+              <a:rPr lang="en-US" sz="1140" dirty="0">
                 <a:solidFill>
                   <a:srgbClr val="17364A"/>
                 </a:solidFill>
@@ -9695,16 +9695,16 @@
                 <a:ea typeface="Aptos" pitchFamily="34" charset="-122"/>
                 <a:cs typeface="Aptos" pitchFamily="34" charset="-120"/>
               </a:rPr>
-              <a:t>What is the strongest reason this module topic belongs in AI.</a:t>
-            </a:r>
-            <a:endParaRPr lang="en-US" sz="1220" dirty="0"/>
-          </a:p>
-          <a:p>
-            <a:pPr indent="0" marL="0">
-              <a:buNone/>
-            </a:pPr>
-            <a:r>
-              <a:rPr lang="en-US" sz="1220" dirty="0">
+              <a:t>What is the strongest reason this module topic.</a:t>
+            </a:r>
+            <a:endParaRPr lang="en-US" sz="1140" dirty="0"/>
+          </a:p>
+          <a:p>
+            <a:pPr indent="0" marL="0">
+              <a:buNone/>
+            </a:pPr>
+            <a:r>
+              <a:rPr lang="en-US" sz="1140" dirty="0">
                 <a:solidFill>
                   <a:srgbClr val="17364A"/>
                 </a:solidFill>
@@ -9714,7 +9714,7 @@
               </a:rPr>
               <a:t>2.</a:t>
             </a:r>
-            <a:endParaRPr lang="en-US" sz="1220" dirty="0"/>
+            <a:endParaRPr lang="en-US" sz="1140" dirty="0"/>
           </a:p>
         </p:txBody>
       </p:sp>
@@ -9726,12 +9726,12 @@
         </p:nvSpPr>
         <p:spPr>
           <a:xfrm>
-            <a:off x="7635240" y="4184294"/>
-            <a:ext cx="3474720" cy="1466698"/>
+            <a:off x="7543800" y="4389120"/>
+            <a:ext cx="3611880" cy="1261872"/>
           </a:xfrm>
           <a:prstGeom prst="roundRect">
             <a:avLst>
-              <a:gd name="adj" fmla="val 7481"/>
+              <a:gd name="adj" fmla="val 8696"/>
             </a:avLst>
           </a:prstGeom>
           <a:solidFill>
@@ -9753,8 +9753,8 @@
         </p:nvSpPr>
         <p:spPr>
           <a:xfrm>
-            <a:off x="7799832" y="4330598"/>
-            <a:ext cx="3145536" cy="256032"/>
+            <a:off x="7708392" y="4517136"/>
+            <a:ext cx="3282696" cy="228600"/>
           </a:xfrm>
           <a:prstGeom prst="rect">
             <a:avLst/>
@@ -9770,7 +9770,7 @@
               <a:buNone/>
             </a:pPr>
             <a:r>
-              <a:rPr lang="en-US" sz="1300" b="1" dirty="0">
+              <a:rPr lang="en-US" sz="1220" b="1" dirty="0">
                 <a:solidFill>
                   <a:srgbClr val="0068B7"/>
                 </a:solidFill>
@@ -9780,7 +9780,7 @@
               </a:rPr>
               <a:t>What to document</a:t>
             </a:r>
-            <a:endParaRPr lang="en-US" sz="1300" dirty="0"/>
+            <a:endParaRPr lang="en-US" sz="1220" dirty="0"/>
           </a:p>
         </p:txBody>
       </p:sp>
@@ -9792,8 +9792,8 @@
         </p:nvSpPr>
         <p:spPr>
           <a:xfrm>
-            <a:off x="7799832" y="4659782"/>
-            <a:ext cx="3145536" cy="899770"/>
+            <a:off x="7708392" y="4828032"/>
+            <a:ext cx="3282696" cy="749808"/>
           </a:xfrm>
           <a:prstGeom prst="rect">
             <a:avLst/>
@@ -9811,7 +9811,7 @@
               <a:buNone/>
             </a:pPr>
             <a:r>
-              <a:rPr lang="en-US" sz="1320" dirty="0">
+              <a:rPr lang="en-US" sz="1220" dirty="0">
                 <a:solidFill>
                   <a:srgbClr val="17364A"/>
                 </a:solidFill>
@@ -9819,9 +9819,9 @@
                 <a:ea typeface="Aptos" pitchFamily="34" charset="-122"/>
                 <a:cs typeface="Aptos" pitchFamily="34" charset="-120"/>
               </a:rPr>
-              <a:t>Use the assignment to test whether you can explain the concept, apply it to a realistic public health situation, and identify what would need review before the work moves forward.</a:t>
-            </a:r>
-            <a:endParaRPr lang="en-US" sz="1320" dirty="0"/>
+              <a:t>Use the assignment to test whether you can explain the concept, apply it to a.</a:t>
+            </a:r>
+            <a:endParaRPr lang="en-US" sz="1220" dirty="0"/>
           </a:p>
         </p:txBody>
       </p:sp>
@@ -10139,7 +10139,7 @@
                 <a:ea typeface="Aptos" pitchFamily="34" charset="-122"/>
                 <a:cs typeface="Aptos" pitchFamily="34" charset="-120"/>
               </a:rPr>
-              <a:t>• AI governance needs a formal home before an agency begins approving tools, pilots, vendor.</a:t>
+              <a:t>• AI governance needs a formal home before an agency begins approving tools,.</a:t>
             </a:r>
             <a:endParaRPr lang="en-US" sz="2100" dirty="0"/>
           </a:p>
@@ -10156,7 +10156,7 @@
                 <a:ea typeface="Aptos" pitchFamily="34" charset="-122"/>
                 <a:cs typeface="Aptos" pitchFamily="34" charset="-120"/>
               </a:rPr>
-              <a:t>• A governance charter defines the purpose, scope, authority, membership, cadence, decision.</a:t>
+              <a:t>• A governance charter defines the purpose, scope, authority, membership,.</a:t>
             </a:r>
             <a:endParaRPr lang="en-US" sz="2100" dirty="0"/>
           </a:p>
@@ -10173,7 +10173,7 @@
                 <a:ea typeface="Aptos" pitchFamily="34" charset="-122"/>
                 <a:cs typeface="Aptos" pitchFamily="34" charset="-120"/>
               </a:rPr>
-              <a:t>• Without a charter, AI decisions often become scattered across IT, program areas, legal,.</a:t>
+              <a:t>• Without a charter, AI decisions often become scattered across IT, program.</a:t>
             </a:r>
             <a:endParaRPr lang="en-US" sz="2100" dirty="0"/>
           </a:p>
@@ -10214,8 +10214,8 @@
         </p:nvSpPr>
         <p:spPr>
           <a:xfrm>
-            <a:off x="8074152" y="1563624"/>
-            <a:ext cx="2825496" cy="256032"/>
+            <a:off x="8074152" y="1545336"/>
+            <a:ext cx="2825496" cy="228600"/>
           </a:xfrm>
           <a:prstGeom prst="rect">
             <a:avLst/>
@@ -10231,7 +10231,7 @@
               <a:buNone/>
             </a:pPr>
             <a:r>
-              <a:rPr lang="en-US" sz="1300" b="1" dirty="0">
+              <a:rPr lang="en-US" sz="1220" b="1" dirty="0">
                 <a:solidFill>
                   <a:srgbClr val="0068B7"/>
                 </a:solidFill>
@@ -10241,7 +10241,7 @@
               </a:rPr>
               <a:t>Module details</a:t>
             </a:r>
-            <a:endParaRPr lang="en-US" sz="1300" dirty="0"/>
+            <a:endParaRPr lang="en-US" sz="1220" dirty="0"/>
           </a:p>
         </p:txBody>
       </p:sp>
@@ -10253,8 +10253,8 @@
         </p:nvSpPr>
         <p:spPr>
           <a:xfrm>
-            <a:off x="8074152" y="1892808"/>
-            <a:ext cx="2825496" cy="1353312"/>
+            <a:off x="8074152" y="1856232"/>
+            <a:ext cx="2825496" cy="1408176"/>
           </a:xfrm>
           <a:prstGeom prst="rect">
             <a:avLst/>
@@ -10272,7 +10272,7 @@
               <a:buNone/>
             </a:pPr>
             <a:r>
-              <a:rPr lang="en-US" sz="1320" dirty="0">
+              <a:rPr lang="en-US" sz="1220" dirty="0">
                 <a:solidFill>
                   <a:srgbClr val="17364A"/>
                 </a:solidFill>
@@ -10280,9 +10280,9 @@
                 <a:ea typeface="Aptos" pitchFamily="34" charset="-122"/>
                 <a:cs typeface="Aptos" pitchFamily="34" charset="-120"/>
               </a:rPr>
-              <a:t>Level: advanced/leadership Primary track: Governance and Security Track Appears in tracks: governance-security</a:t>
-            </a:r>
-            <a:endParaRPr lang="en-US" sz="1320" dirty="0"/>
+              <a:t>Level: advanced/leadership Primary track: Governance and Security Track Appears.</a:t>
+            </a:r>
+            <a:endParaRPr lang="en-US" sz="1220" dirty="0"/>
           </a:p>
         </p:txBody>
       </p:sp>
@@ -10321,8 +10321,8 @@
         </p:nvSpPr>
         <p:spPr>
           <a:xfrm>
-            <a:off x="8074152" y="3822192"/>
-            <a:ext cx="2825496" cy="256032"/>
+            <a:off x="8074152" y="3803904"/>
+            <a:ext cx="2825496" cy="228600"/>
           </a:xfrm>
           <a:prstGeom prst="rect">
             <a:avLst/>
@@ -10338,7 +10338,7 @@
               <a:buNone/>
             </a:pPr>
             <a:r>
-              <a:rPr lang="en-US" sz="1300" b="1" dirty="0">
+              <a:rPr lang="en-US" sz="1220" b="1" dirty="0">
                 <a:solidFill>
                   <a:srgbClr val="0068B7"/>
                 </a:solidFill>
@@ -10348,7 +10348,7 @@
               </a:rPr>
               <a:t>Learning sequence</a:t>
             </a:r>
-            <a:endParaRPr lang="en-US" sz="1300" dirty="0"/>
+            <a:endParaRPr lang="en-US" sz="1220" dirty="0"/>
           </a:p>
         </p:txBody>
       </p:sp>
@@ -10360,8 +10360,8 @@
         </p:nvSpPr>
         <p:spPr>
           <a:xfrm>
-            <a:off x="8092440" y="4187952"/>
-            <a:ext cx="2770632" cy="1033272"/>
+            <a:off x="8092440" y="4133088"/>
+            <a:ext cx="2770632" cy="1124712"/>
           </a:xfrm>
           <a:prstGeom prst="rect">
             <a:avLst/>
@@ -10379,7 +10379,7 @@
               <a:buNone/>
             </a:pPr>
             <a:r>
-              <a:rPr lang="en-US" sz="1220" dirty="0">
+              <a:rPr lang="en-US" sz="1140" dirty="0">
                 <a:solidFill>
                   <a:srgbClr val="17364A"/>
                 </a:solidFill>
@@ -10389,14 +10389,14 @@
               </a:rPr>
               <a:t>Read the module for shared vocabulary and context.</a:t>
             </a:r>
-            <a:endParaRPr lang="en-US" sz="1220" dirty="0"/>
-          </a:p>
-          <a:p>
-            <a:pPr indent="0" marL="0">
-              <a:buNone/>
-            </a:pPr>
-            <a:r>
-              <a:rPr lang="en-US" sz="1220" dirty="0">
+            <a:endParaRPr lang="en-US" sz="1140" dirty="0"/>
+          </a:p>
+          <a:p>
+            <a:pPr indent="0" marL="0">
+              <a:buNone/>
+            </a:pPr>
+            <a:r>
+              <a:rPr lang="en-US" sz="1140" dirty="0">
                 <a:solidFill>
                   <a:srgbClr val="17364A"/>
                 </a:solidFill>
@@ -10404,16 +10404,16 @@
                 <a:ea typeface="Aptos" pitchFamily="34" charset="-122"/>
                 <a:cs typeface="Aptos" pitchFamily="34" charset="-120"/>
               </a:rPr>
-              <a:t>Complete the practical exercise to apply the concept.</a:t>
-            </a:r>
-            <a:endParaRPr lang="en-US" sz="1220" dirty="0"/>
-          </a:p>
-          <a:p>
-            <a:pPr indent="0" marL="0">
-              <a:buNone/>
-            </a:pPr>
-            <a:r>
-              <a:rPr lang="en-US" sz="1220" dirty="0">
+              <a:t>Complete the practical exercise to apply the.</a:t>
+            </a:r>
+            <a:endParaRPr lang="en-US" sz="1140" dirty="0"/>
+          </a:p>
+          <a:p>
+            <a:pPr indent="0" marL="0">
+              <a:buNone/>
+            </a:pPr>
+            <a:r>
+              <a:rPr lang="en-US" sz="1140" dirty="0">
                 <a:solidFill>
                   <a:srgbClr val="17364A"/>
                 </a:solidFill>
@@ -10423,7 +10423,7 @@
               </a:rPr>
               <a:t>Use the notes and references for deeper review.</a:t>
             </a:r>
-            <a:endParaRPr lang="en-US" sz="1220" dirty="0"/>
+            <a:endParaRPr lang="en-US" sz="1140" dirty="0"/>
           </a:p>
         </p:txBody>
       </p:sp>
@@ -10714,8 +10714,8 @@
         </p:nvSpPr>
         <p:spPr>
           <a:xfrm>
-            <a:off x="868680" y="1508760"/>
-            <a:ext cx="6309360" cy="4160520"/>
+            <a:off x="822960" y="1463040"/>
+            <a:ext cx="6565392" cy="4343400"/>
           </a:xfrm>
           <a:prstGeom prst="rect">
             <a:avLst/>
@@ -10733,7 +10733,7 @@
               <a:buNone/>
             </a:pPr>
             <a:r>
-              <a:rPr lang="en-US" sz="2100" dirty="0">
+              <a:rPr lang="en-US" sz="1920" dirty="0">
                 <a:solidFill>
                   <a:srgbClr val="003A63"/>
                 </a:solidFill>
@@ -10743,14 +10743,14 @@
               </a:rPr>
               <a:t>• NIST Artificial Intelligence Risk Management Framework (AI RMF 1.0):.</a:t>
             </a:r>
-            <a:endParaRPr lang="en-US" sz="2100" dirty="0"/>
-          </a:p>
-          <a:p>
-            <a:pPr indent="0" marL="0">
-              <a:buNone/>
-            </a:pPr>
-            <a:r>
-              <a:rPr lang="en-US" sz="2100" dirty="0">
+            <a:endParaRPr lang="en-US" sz="1920" dirty="0"/>
+          </a:p>
+          <a:p>
+            <a:pPr indent="0" marL="0">
+              <a:buNone/>
+            </a:pPr>
+            <a:r>
+              <a:rPr lang="en-US" sz="1920" dirty="0">
                 <a:solidFill>
                   <a:srgbClr val="003A63"/>
                 </a:solidFill>
@@ -10760,14 +10760,14 @@
               </a:rPr>
               <a:t>• NIST Generative AI Profile:.</a:t>
             </a:r>
-            <a:endParaRPr lang="en-US" sz="2100" dirty="0"/>
-          </a:p>
-          <a:p>
-            <a:pPr indent="0" marL="0">
-              <a:buNone/>
-            </a:pPr>
-            <a:r>
-              <a:rPr lang="en-US" sz="2100" dirty="0">
+            <a:endParaRPr lang="en-US" sz="1920" dirty="0"/>
+          </a:p>
+          <a:p>
+            <a:pPr indent="0" marL="0">
+              <a:buNone/>
+            </a:pPr>
+            <a:r>
+              <a:rPr lang="en-US" sz="1920" dirty="0">
                 <a:solidFill>
                   <a:srgbClr val="003A63"/>
                 </a:solidFill>
@@ -10777,7 +10777,7 @@
               </a:rPr>
               <a:t>• NIST Privacy Framework</a:t>
             </a:r>
-            <a:endParaRPr lang="en-US" sz="2100" dirty="0"/>
+            <a:endParaRPr lang="en-US" sz="1920" dirty="0"/>
           </a:p>
         </p:txBody>
       </p:sp>
@@ -10789,12 +10789,12 @@
         </p:nvSpPr>
         <p:spPr>
           <a:xfrm>
-            <a:off x="7635240" y="1325880"/>
-            <a:ext cx="3474720" cy="1207008"/>
+            <a:off x="7543800" y="1325880"/>
+            <a:ext cx="3611880" cy="1261872"/>
           </a:xfrm>
           <a:prstGeom prst="roundRect">
             <a:avLst>
-              <a:gd name="adj" fmla="val 9091"/>
+              <a:gd name="adj" fmla="val 8696"/>
             </a:avLst>
           </a:prstGeom>
           <a:solidFill>
@@ -10816,8 +10816,8 @@
         </p:nvSpPr>
         <p:spPr>
           <a:xfrm>
-            <a:off x="7799832" y="1472184"/>
-            <a:ext cx="3145536" cy="256032"/>
+            <a:off x="7708392" y="1453896"/>
+            <a:ext cx="3282696" cy="228600"/>
           </a:xfrm>
           <a:prstGeom prst="rect">
             <a:avLst/>
@@ -10833,7 +10833,7 @@
               <a:buNone/>
             </a:pPr>
             <a:r>
-              <a:rPr lang="en-US" sz="1300" b="1" dirty="0">
+              <a:rPr lang="en-US" sz="1220" b="1" dirty="0">
                 <a:solidFill>
                   <a:srgbClr val="0068B7"/>
                 </a:solidFill>
@@ -10843,7 +10843,7 @@
               </a:rPr>
               <a:t>Governance lens</a:t>
             </a:r>
-            <a:endParaRPr lang="en-US" sz="1300" dirty="0"/>
+            <a:endParaRPr lang="en-US" sz="1220" dirty="0"/>
           </a:p>
         </p:txBody>
       </p:sp>
@@ -10855,8 +10855,8 @@
         </p:nvSpPr>
         <p:spPr>
           <a:xfrm>
-            <a:off x="7799832" y="1801368"/>
-            <a:ext cx="3145536" cy="640080"/>
+            <a:off x="7708392" y="1764792"/>
+            <a:ext cx="3282696" cy="749808"/>
           </a:xfrm>
           <a:prstGeom prst="rect">
             <a:avLst/>
@@ -10874,7 +10874,7 @@
               <a:buNone/>
             </a:pPr>
             <a:r>
-              <a:rPr lang="en-US" sz="1320" dirty="0">
+              <a:rPr lang="en-US" sz="1220" dirty="0">
                 <a:solidFill>
                   <a:srgbClr val="17364A"/>
                 </a:solidFill>
@@ -10884,7 +10884,7 @@
               </a:rPr>
               <a:t>NIST Artificial Intelligence Risk Management Framework (AI RMF 1.0):.</a:t>
             </a:r>
-            <a:endParaRPr lang="en-US" sz="1320" dirty="0"/>
+            <a:endParaRPr lang="en-US" sz="1220" dirty="0"/>
           </a:p>
         </p:txBody>
       </p:sp>
@@ -10896,12 +10896,12 @@
         </p:nvSpPr>
         <p:spPr>
           <a:xfrm>
-            <a:off x="7635240" y="2670048"/>
-            <a:ext cx="3474720" cy="1377086"/>
+            <a:off x="7543800" y="2724912"/>
+            <a:ext cx="3611880" cy="1527048"/>
           </a:xfrm>
           <a:prstGeom prst="roundRect">
             <a:avLst>
-              <a:gd name="adj" fmla="val 7968"/>
+              <a:gd name="adj" fmla="val 7186"/>
             </a:avLst>
           </a:prstGeom>
           <a:solidFill>
@@ -10923,8 +10923,8 @@
         </p:nvSpPr>
         <p:spPr>
           <a:xfrm>
-            <a:off x="7799832" y="2816352"/>
-            <a:ext cx="3145536" cy="256032"/>
+            <a:off x="7708392" y="2852928"/>
+            <a:ext cx="3282696" cy="228600"/>
           </a:xfrm>
           <a:prstGeom prst="rect">
             <a:avLst/>
@@ -10940,7 +10940,7 @@
               <a:buNone/>
             </a:pPr>
             <a:r>
-              <a:rPr lang="en-US" sz="1300" b="1" dirty="0">
+              <a:rPr lang="en-US" sz="1220" b="1" dirty="0">
                 <a:solidFill>
                   <a:srgbClr val="0068B7"/>
                 </a:solidFill>
@@ -10950,7 +10950,7 @@
               </a:rPr>
               <a:t>Concept checkpoints</a:t>
             </a:r>
-            <a:endParaRPr lang="en-US" sz="1300" dirty="0"/>
+            <a:endParaRPr lang="en-US" sz="1220" dirty="0"/>
           </a:p>
         </p:txBody>
       </p:sp>
@@ -10962,8 +10962,8 @@
         </p:nvSpPr>
         <p:spPr>
           <a:xfrm>
-            <a:off x="7818120" y="3182112"/>
-            <a:ext cx="3090672" cy="718718"/>
+            <a:off x="7726680" y="3182112"/>
+            <a:ext cx="3227832" cy="960120"/>
           </a:xfrm>
           <a:prstGeom prst="rect">
             <a:avLst/>
@@ -10981,7 +10981,7 @@
               <a:buNone/>
             </a:pPr>
             <a:r>
-              <a:rPr lang="en-US" sz="1220" dirty="0">
+              <a:rPr lang="en-US" sz="1140" dirty="0">
                 <a:solidFill>
                   <a:srgbClr val="17364A"/>
                 </a:solidFill>
@@ -10989,16 +10989,16 @@
                 <a:ea typeface="Aptos" pitchFamily="34" charset="-122"/>
                 <a:cs typeface="Aptos" pitchFamily="34" charset="-120"/>
               </a:rPr>
-              <a:t>NIST Artificial Intelligence Risk Management Framework (AI RMF.</a:t>
-            </a:r>
-            <a:endParaRPr lang="en-US" sz="1220" dirty="0"/>
-          </a:p>
-          <a:p>
-            <a:pPr indent="0" marL="0">
-              <a:buNone/>
-            </a:pPr>
-            <a:r>
-              <a:rPr lang="en-US" sz="1220" dirty="0">
+              <a:t>NIST Artificial Intelligence Risk Management.</a:t>
+            </a:r>
+            <a:endParaRPr lang="en-US" sz="1140" dirty="0"/>
+          </a:p>
+          <a:p>
+            <a:pPr indent="0" marL="0">
+              <a:buNone/>
+            </a:pPr>
+            <a:r>
+              <a:rPr lang="en-US" sz="1140" dirty="0">
                 <a:solidFill>
                   <a:srgbClr val="17364A"/>
                 </a:solidFill>
@@ -11006,16 +11006,16 @@
                 <a:ea typeface="Aptos" pitchFamily="34" charset="-122"/>
                 <a:cs typeface="Aptos" pitchFamily="34" charset="-120"/>
               </a:rPr>
-              <a:t>CDC Public Health Data Strategy and Data Modernization resources:.</a:t>
-            </a:r>
-            <a:endParaRPr lang="en-US" sz="1220" dirty="0"/>
-          </a:p>
-          <a:p>
-            <a:pPr indent="0" marL="0">
-              <a:buNone/>
-            </a:pPr>
-            <a:r>
-              <a:rPr lang="en-US" sz="1220" dirty="0">
+              <a:t>CDC Public Health Data Strategy and Data.</a:t>
+            </a:r>
+            <a:endParaRPr lang="en-US" sz="1140" dirty="0"/>
+          </a:p>
+          <a:p>
+            <a:pPr indent="0" marL="0">
+              <a:buNone/>
+            </a:pPr>
+            <a:r>
+              <a:rPr lang="en-US" sz="1140" dirty="0">
                 <a:solidFill>
                   <a:srgbClr val="17364A"/>
                 </a:solidFill>
@@ -11023,9 +11023,9 @@
                 <a:ea typeface="Aptos" pitchFamily="34" charset="-122"/>
                 <a:cs typeface="Aptos" pitchFamily="34" charset="-120"/>
               </a:rPr>
-              <a:t>WHO Ethics and Governance of Artificial Intelligence for Health:.</a:t>
-            </a:r>
-            <a:endParaRPr lang="en-US" sz="1220" dirty="0"/>
+              <a:t>WHO Ethics and Governance of Artificial.</a:t>
+            </a:r>
+            <a:endParaRPr lang="en-US" sz="1140" dirty="0"/>
           </a:p>
         </p:txBody>
       </p:sp>
@@ -11037,12 +11037,12 @@
         </p:nvSpPr>
         <p:spPr>
           <a:xfrm>
-            <a:off x="7635240" y="4184294"/>
-            <a:ext cx="3474720" cy="1466698"/>
+            <a:off x="7543800" y="4389120"/>
+            <a:ext cx="3611880" cy="1261872"/>
           </a:xfrm>
           <a:prstGeom prst="roundRect">
             <a:avLst>
-              <a:gd name="adj" fmla="val 7481"/>
+              <a:gd name="adj" fmla="val 8696"/>
             </a:avLst>
           </a:prstGeom>
           <a:solidFill>
@@ -11064,8 +11064,8 @@
         </p:nvSpPr>
         <p:spPr>
           <a:xfrm>
-            <a:off x="7799832" y="4330598"/>
-            <a:ext cx="3145536" cy="256032"/>
+            <a:off x="7708392" y="4517136"/>
+            <a:ext cx="3282696" cy="228600"/>
           </a:xfrm>
           <a:prstGeom prst="rect">
             <a:avLst/>
@@ -11081,7 +11081,7 @@
               <a:buNone/>
             </a:pPr>
             <a:r>
-              <a:rPr lang="en-US" sz="1300" b="1" dirty="0">
+              <a:rPr lang="en-US" sz="1220" b="1" dirty="0">
                 <a:solidFill>
                   <a:srgbClr val="0068B7"/>
                 </a:solidFill>
@@ -11091,7 +11091,7 @@
               </a:rPr>
               <a:t>What to document</a:t>
             </a:r>
-            <a:endParaRPr lang="en-US" sz="1300" dirty="0"/>
+            <a:endParaRPr lang="en-US" sz="1220" dirty="0"/>
           </a:p>
         </p:txBody>
       </p:sp>
@@ -11103,8 +11103,8 @@
         </p:nvSpPr>
         <p:spPr>
           <a:xfrm>
-            <a:off x="7799832" y="4659782"/>
-            <a:ext cx="3145536" cy="899770"/>
+            <a:off x="7708392" y="4828032"/>
+            <a:ext cx="3282696" cy="749808"/>
           </a:xfrm>
           <a:prstGeom prst="rect">
             <a:avLst/>
@@ -11122,7 +11122,7 @@
               <a:buNone/>
             </a:pPr>
             <a:r>
-              <a:rPr lang="en-US" sz="1320" dirty="0">
+              <a:rPr lang="en-US" sz="1220" dirty="0">
                 <a:solidFill>
                   <a:srgbClr val="17364A"/>
                 </a:solidFill>
@@ -11130,9 +11130,9 @@
                 <a:ea typeface="Aptos" pitchFamily="34" charset="-122"/>
                 <a:cs typeface="Aptos" pitchFamily="34" charset="-120"/>
               </a:rPr>
-              <a:t>Translate this concept into clear decision rights, review steps, documentation expectations, and escalation paths before an AI-supported workflow is approved.</a:t>
-            </a:r>
-            <a:endParaRPr lang="en-US" sz="1320" dirty="0"/>
+              <a:t>Translate this concept into clear decision rights, review steps, documentation.</a:t>
+            </a:r>
+            <a:endParaRPr lang="en-US" sz="1220" dirty="0"/>
           </a:p>
         </p:txBody>
       </p:sp>
@@ -11423,8 +11423,8 @@
         </p:nvSpPr>
         <p:spPr>
           <a:xfrm>
-            <a:off x="868680" y="1508760"/>
-            <a:ext cx="6309360" cy="4160520"/>
+            <a:off x="822960" y="1463040"/>
+            <a:ext cx="6565392" cy="4343400"/>
           </a:xfrm>
           <a:prstGeom prst="rect">
             <a:avLst/>
@@ -11442,7 +11442,7 @@
               <a:buNone/>
             </a:pPr>
             <a:r>
-              <a:rPr lang="en-US" sz="2100" dirty="0">
+              <a:rPr lang="en-US" sz="1920" dirty="0">
                 <a:solidFill>
                   <a:srgbClr val="003A63"/>
                 </a:solidFill>
@@ -11450,16 +11450,16 @@
                 <a:ea typeface="Aptos" pitchFamily="34" charset="-122"/>
                 <a:cs typeface="Aptos" pitchFamily="34" charset="-120"/>
               </a:rPr>
-              <a:t>• OMB Memorandum M-24-10 on federal AI governance, risk management, and innovation, where.</a:t>
-            </a:r>
-            <a:endParaRPr lang="en-US" sz="2100" dirty="0"/>
-          </a:p>
-          <a:p>
-            <a:pPr indent="0" marL="0">
-              <a:buNone/>
-            </a:pPr>
-            <a:r>
-              <a:rPr lang="en-US" sz="2100" dirty="0">
+              <a:t>• OMB Memorandum M-24-10 on federal AI governance, risk management, and.</a:t>
+            </a:r>
+            <a:endParaRPr lang="en-US" sz="1920" dirty="0"/>
+          </a:p>
+          <a:p>
+            <a:pPr indent="0" marL="0">
+              <a:buNone/>
+            </a:pPr>
+            <a:r>
+              <a:rPr lang="en-US" sz="1920" dirty="0">
                 <a:solidFill>
                   <a:srgbClr val="003A63"/>
                 </a:solidFill>
@@ -11467,9 +11467,9 @@
                 <a:ea typeface="Aptos" pitchFamily="34" charset="-122"/>
                 <a:cs typeface="Aptos" pitchFamily="34" charset="-120"/>
               </a:rPr>
-              <a:t>• Agency strategic plans, procurement policies, privacy policies, cybersecurity policies, records.</a:t>
-            </a:r>
-            <a:endParaRPr lang="en-US" sz="2100" dirty="0"/>
+              <a:t>• Agency strategic plans, procurement policies, privacy policies,.</a:t>
+            </a:r>
+            <a:endParaRPr lang="en-US" sz="1920" dirty="0"/>
           </a:p>
         </p:txBody>
       </p:sp>
@@ -11481,12 +11481,12 @@
         </p:nvSpPr>
         <p:spPr>
           <a:xfrm>
-            <a:off x="7635240" y="1325880"/>
-            <a:ext cx="3474720" cy="1255471"/>
+            <a:off x="7543800" y="1325880"/>
+            <a:ext cx="3611880" cy="1261872"/>
           </a:xfrm>
           <a:prstGeom prst="roundRect">
             <a:avLst>
-              <a:gd name="adj" fmla="val 8740"/>
+              <a:gd name="adj" fmla="val 8696"/>
             </a:avLst>
           </a:prstGeom>
           <a:solidFill>
@@ -11508,8 +11508,8 @@
         </p:nvSpPr>
         <p:spPr>
           <a:xfrm>
-            <a:off x="7799832" y="1472184"/>
-            <a:ext cx="3145536" cy="256032"/>
+            <a:off x="7708392" y="1453896"/>
+            <a:ext cx="3282696" cy="228600"/>
           </a:xfrm>
           <a:prstGeom prst="rect">
             <a:avLst/>
@@ -11525,7 +11525,7 @@
               <a:buNone/>
             </a:pPr>
             <a:r>
-              <a:rPr lang="en-US" sz="1300" b="1" dirty="0">
+              <a:rPr lang="en-US" sz="1220" b="1" dirty="0">
                 <a:solidFill>
                   <a:srgbClr val="0068B7"/>
                 </a:solidFill>
@@ -11535,7 +11535,7 @@
               </a:rPr>
               <a:t>Governance lens</a:t>
             </a:r>
-            <a:endParaRPr lang="en-US" sz="1300" dirty="0"/>
+            <a:endParaRPr lang="en-US" sz="1220" dirty="0"/>
           </a:p>
         </p:txBody>
       </p:sp>
@@ -11547,8 +11547,8 @@
         </p:nvSpPr>
         <p:spPr>
           <a:xfrm>
-            <a:off x="7799832" y="1801368"/>
-            <a:ext cx="3145536" cy="688543"/>
+            <a:off x="7708392" y="1764792"/>
+            <a:ext cx="3282696" cy="749808"/>
           </a:xfrm>
           <a:prstGeom prst="rect">
             <a:avLst/>
@@ -11566,7 +11566,7 @@
               <a:buNone/>
             </a:pPr>
             <a:r>
-              <a:rPr lang="en-US" sz="1320" dirty="0">
+              <a:rPr lang="en-US" sz="1220" dirty="0">
                 <a:solidFill>
                   <a:srgbClr val="17364A"/>
                 </a:solidFill>
@@ -11574,9 +11574,9 @@
                 <a:ea typeface="Aptos" pitchFamily="34" charset="-122"/>
                 <a:cs typeface="Aptos" pitchFamily="34" charset="-120"/>
               </a:rPr>
-              <a:t>OMB Memorandum M-24-10 on federal AI governance, risk management, and innovation, where relevant to.</a:t>
-            </a:r>
-            <a:endParaRPr lang="en-US" sz="1320" dirty="0"/>
+              <a:t>OMB Memorandum M-24-10 on federal AI governance, risk management, and.</a:t>
+            </a:r>
+            <a:endParaRPr lang="en-US" sz="1220" dirty="0"/>
           </a:p>
         </p:txBody>
       </p:sp>
@@ -11588,12 +11588,12 @@
         </p:nvSpPr>
         <p:spPr>
           <a:xfrm>
-            <a:off x="7635240" y="2718511"/>
-            <a:ext cx="3474720" cy="1328623"/>
+            <a:off x="7543800" y="2724912"/>
+            <a:ext cx="3611880" cy="1527048"/>
           </a:xfrm>
           <a:prstGeom prst="roundRect">
             <a:avLst>
-              <a:gd name="adj" fmla="val 8259"/>
+              <a:gd name="adj" fmla="val 7186"/>
             </a:avLst>
           </a:prstGeom>
           <a:solidFill>
@@ -11615,8 +11615,8 @@
         </p:nvSpPr>
         <p:spPr>
           <a:xfrm>
-            <a:off x="7799832" y="2864815"/>
-            <a:ext cx="3145536" cy="256032"/>
+            <a:off x="7708392" y="2852928"/>
+            <a:ext cx="3282696" cy="228600"/>
           </a:xfrm>
           <a:prstGeom prst="rect">
             <a:avLst/>
@@ -11632,7 +11632,7 @@
               <a:buNone/>
             </a:pPr>
             <a:r>
-              <a:rPr lang="en-US" sz="1300" b="1" dirty="0">
+              <a:rPr lang="en-US" sz="1220" b="1" dirty="0">
                 <a:solidFill>
                   <a:srgbClr val="0068B7"/>
                 </a:solidFill>
@@ -11642,7 +11642,7 @@
               </a:rPr>
               <a:t>Concept checkpoints</a:t>
             </a:r>
-            <a:endParaRPr lang="en-US" sz="1300" dirty="0"/>
+            <a:endParaRPr lang="en-US" sz="1220" dirty="0"/>
           </a:p>
         </p:txBody>
       </p:sp>
@@ -11654,8 +11654,8 @@
         </p:nvSpPr>
         <p:spPr>
           <a:xfrm>
-            <a:off x="7818120" y="3230575"/>
-            <a:ext cx="3090672" cy="670255"/>
+            <a:off x="7726680" y="3182112"/>
+            <a:ext cx="3227832" cy="960120"/>
           </a:xfrm>
           <a:prstGeom prst="rect">
             <a:avLst/>
@@ -11673,7 +11673,7 @@
               <a:buNone/>
             </a:pPr>
             <a:r>
-              <a:rPr lang="en-US" sz="1220" dirty="0">
+              <a:rPr lang="en-US" sz="1140" dirty="0">
                 <a:solidFill>
                   <a:srgbClr val="17364A"/>
                 </a:solidFill>
@@ -11681,16 +11681,16 @@
                 <a:ea typeface="Aptos" pitchFamily="34" charset="-122"/>
                 <a:cs typeface="Aptos" pitchFamily="34" charset="-120"/>
               </a:rPr>
-              <a:t>OMB Memorandum M-24-10 on federal AI governance, risk management,.</a:t>
-            </a:r>
-            <a:endParaRPr lang="en-US" sz="1220" dirty="0"/>
-          </a:p>
-          <a:p>
-            <a:pPr indent="0" marL="0">
-              <a:buNone/>
-            </a:pPr>
-            <a:r>
-              <a:rPr lang="en-US" sz="1220" dirty="0">
+              <a:t>OMB Memorandum M-24-10 on federal AI governance,.</a:t>
+            </a:r>
+            <a:endParaRPr lang="en-US" sz="1140" dirty="0"/>
+          </a:p>
+          <a:p>
+            <a:pPr indent="0" marL="0">
+              <a:buNone/>
+            </a:pPr>
+            <a:r>
+              <a:rPr lang="en-US" sz="1140" dirty="0">
                 <a:solidFill>
                   <a:srgbClr val="17364A"/>
                 </a:solidFill>
@@ -11698,9 +11698,9 @@
                 <a:ea typeface="Aptos" pitchFamily="34" charset="-122"/>
                 <a:cs typeface="Aptos" pitchFamily="34" charset="-120"/>
               </a:rPr>
-              <a:t>Agency strategic plans, procurement policies, privacy policies,.</a:t>
-            </a:r>
-            <a:endParaRPr lang="en-US" sz="1220" dirty="0"/>
+              <a:t>Agency strategic plans, procurement policies,.</a:t>
+            </a:r>
+            <a:endParaRPr lang="en-US" sz="1140" dirty="0"/>
           </a:p>
         </p:txBody>
       </p:sp>
@@ -11712,12 +11712,12 @@
         </p:nvSpPr>
         <p:spPr>
           <a:xfrm>
-            <a:off x="7635240" y="4184294"/>
-            <a:ext cx="3474720" cy="1466698"/>
+            <a:off x="7543800" y="4389120"/>
+            <a:ext cx="3611880" cy="1261872"/>
           </a:xfrm>
           <a:prstGeom prst="roundRect">
             <a:avLst>
-              <a:gd name="adj" fmla="val 7481"/>
+              <a:gd name="adj" fmla="val 8696"/>
             </a:avLst>
           </a:prstGeom>
           <a:solidFill>
@@ -11739,8 +11739,8 @@
         </p:nvSpPr>
         <p:spPr>
           <a:xfrm>
-            <a:off x="7799832" y="4330598"/>
-            <a:ext cx="3145536" cy="256032"/>
+            <a:off x="7708392" y="4517136"/>
+            <a:ext cx="3282696" cy="228600"/>
           </a:xfrm>
           <a:prstGeom prst="rect">
             <a:avLst/>
@@ -11756,7 +11756,7 @@
               <a:buNone/>
             </a:pPr>
             <a:r>
-              <a:rPr lang="en-US" sz="1300" b="1" dirty="0">
+              <a:rPr lang="en-US" sz="1220" b="1" dirty="0">
                 <a:solidFill>
                   <a:srgbClr val="0068B7"/>
                 </a:solidFill>
@@ -11766,7 +11766,7 @@
               </a:rPr>
               <a:t>What to document</a:t>
             </a:r>
-            <a:endParaRPr lang="en-US" sz="1300" dirty="0"/>
+            <a:endParaRPr lang="en-US" sz="1220" dirty="0"/>
           </a:p>
         </p:txBody>
       </p:sp>
@@ -11778,8 +11778,8 @@
         </p:nvSpPr>
         <p:spPr>
           <a:xfrm>
-            <a:off x="7799832" y="4659782"/>
-            <a:ext cx="3145536" cy="899770"/>
+            <a:off x="7708392" y="4828032"/>
+            <a:ext cx="3282696" cy="749808"/>
           </a:xfrm>
           <a:prstGeom prst="rect">
             <a:avLst/>
@@ -11797,7 +11797,7 @@
               <a:buNone/>
             </a:pPr>
             <a:r>
-              <a:rPr lang="en-US" sz="1320" dirty="0">
+              <a:rPr lang="en-US" sz="1220" dirty="0">
                 <a:solidFill>
                   <a:srgbClr val="17364A"/>
                 </a:solidFill>
@@ -11805,9 +11805,9 @@
                 <a:ea typeface="Aptos" pitchFamily="34" charset="-122"/>
                 <a:cs typeface="Aptos" pitchFamily="34" charset="-120"/>
               </a:rPr>
-              <a:t>Translate this concept into clear decision rights, review steps, documentation expectations, and escalation paths before an AI-supported workflow is approved.</a:t>
-            </a:r>
-            <a:endParaRPr lang="en-US" sz="1320" dirty="0"/>
+              <a:t>Translate this concept into clear decision rights, review steps, documentation.</a:t>
+            </a:r>
+            <a:endParaRPr lang="en-US" sz="1220" dirty="0"/>
           </a:p>
         </p:txBody>
       </p:sp>
@@ -12125,7 +12125,7 @@
                 <a:ea typeface="Aptos" pitchFamily="34" charset="-122"/>
                 <a:cs typeface="Aptos" pitchFamily="34" charset="-120"/>
               </a:rPr>
-              <a:t>• Play 11: Build and Deploy AI Solutions - This lesson informs Play 11 by helping learners.</a:t>
+              <a:t>• Play 11: Build and Deploy AI Solutions - This lesson informs Play 11 by.</a:t>
             </a:r>
             <a:endParaRPr lang="en-US" sz="1900" dirty="0"/>
           </a:p>
@@ -12142,7 +12142,7 @@
                 <a:ea typeface="Aptos" pitchFamily="34" charset="-122"/>
                 <a:cs typeface="Aptos" pitchFamily="34" charset="-120"/>
               </a:rPr>
-              <a:t>• Play 2: Readiness Assessment - This lesson informs Play 2 by helping learners connect the.</a:t>
+              <a:t>• Play 2: Readiness Assessment - This lesson informs Play 2 by helping.</a:t>
             </a:r>
             <a:endParaRPr lang="en-US" sz="1900" dirty="0"/>
           </a:p>
@@ -12159,7 +12159,7 @@
                 <a:ea typeface="Aptos" pitchFamily="34" charset="-122"/>
                 <a:cs typeface="Aptos" pitchFamily="34" charset="-120"/>
               </a:rPr>
-              <a:t>• Play 3: Establish AI Governance - This lesson informs Play 3 by helping learners connect the.</a:t>
+              <a:t>• Play 3: Establish AI Governance - This lesson informs Play 3 by helping.</a:t>
             </a:r>
             <a:endParaRPr lang="en-US" sz="1900" dirty="0"/>
           </a:p>
@@ -12176,7 +12176,7 @@
                 <a:ea typeface="Aptos" pitchFamily="34" charset="-122"/>
                 <a:cs typeface="Aptos" pitchFamily="34" charset="-120"/>
               </a:rPr>
-              <a:t>• Play 7: Prioritize Use Cases - This lesson informs Play 7 by helping learners connect the.</a:t>
+              <a:t>• Play 7: Prioritize Use Cases - This lesson informs Play 7 by helping.</a:t>
             </a:r>
             <a:endParaRPr lang="en-US" sz="1900" dirty="0"/>
           </a:p>
@@ -12217,8 +12217,8 @@
         </p:nvSpPr>
         <p:spPr>
           <a:xfrm>
-            <a:off x="8211312" y="1563624"/>
-            <a:ext cx="2734056" cy="256032"/>
+            <a:off x="8211312" y="1545336"/>
+            <a:ext cx="2734056" cy="228600"/>
           </a:xfrm>
           <a:prstGeom prst="rect">
             <a:avLst/>
@@ -12234,7 +12234,7 @@
               <a:buNone/>
             </a:pPr>
             <a:r>
-              <a:rPr lang="en-US" sz="1300" b="1" dirty="0">
+              <a:rPr lang="en-US" sz="1220" b="1" dirty="0">
                 <a:solidFill>
                   <a:srgbClr val="0068B7"/>
                 </a:solidFill>
@@ -12244,7 +12244,7 @@
               </a:rPr>
               <a:t>Apply the lesson</a:t>
             </a:r>
-            <a:endParaRPr lang="en-US" sz="1300" dirty="0"/>
+            <a:endParaRPr lang="en-US" sz="1220" dirty="0"/>
           </a:p>
         </p:txBody>
       </p:sp>
@@ -12256,8 +12256,8 @@
         </p:nvSpPr>
         <p:spPr>
           <a:xfrm>
-            <a:off x="8211312" y="1892808"/>
-            <a:ext cx="2734056" cy="1536192"/>
+            <a:off x="8211312" y="1856232"/>
+            <a:ext cx="2734056" cy="1591056"/>
           </a:xfrm>
           <a:prstGeom prst="rect">
             <a:avLst/>
@@ -12275,7 +12275,7 @@
               <a:buNone/>
             </a:pPr>
             <a:r>
-              <a:rPr lang="en-US" sz="1320" dirty="0">
+              <a:rPr lang="en-US" sz="1220" dirty="0">
                 <a:solidFill>
                   <a:srgbClr val="17364A"/>
                 </a:solidFill>
@@ -12283,9 +12283,9 @@
                 <a:ea typeface="Aptos" pitchFamily="34" charset="-122"/>
                 <a:cs typeface="Aptos" pitchFamily="34" charset="-120"/>
               </a:rPr>
-              <a:t>Use the related plays to identify decisions, participants, timing, approvals, and documentation needed for responsible implementation.</a:t>
-            </a:r>
-            <a:endParaRPr lang="en-US" sz="1320" dirty="0"/>
+              <a:t>Use the related plays to identify decisions, participants, timing, approvals,.</a:t>
+            </a:r>
+            <a:endParaRPr lang="en-US" sz="1220" dirty="0"/>
           </a:p>
         </p:txBody>
       </p:sp>
@@ -12324,8 +12324,8 @@
         </p:nvSpPr>
         <p:spPr>
           <a:xfrm>
-            <a:off x="8211312" y="3941064"/>
-            <a:ext cx="2734056" cy="256032"/>
+            <a:off x="8211312" y="3922776"/>
+            <a:ext cx="2734056" cy="228600"/>
           </a:xfrm>
           <a:prstGeom prst="rect">
             <a:avLst/>
@@ -12341,7 +12341,7 @@
               <a:buNone/>
             </a:pPr>
             <a:r>
-              <a:rPr lang="en-US" sz="1300" b="1" dirty="0">
+              <a:rPr lang="en-US" sz="1220" b="1" dirty="0">
                 <a:solidFill>
                   <a:srgbClr val="0068B7"/>
                 </a:solidFill>
@@ -12351,7 +12351,7 @@
               </a:rPr>
               <a:t>Use the play links to</a:t>
             </a:r>
-            <a:endParaRPr lang="en-US" sz="1300" dirty="0"/>
+            <a:endParaRPr lang="en-US" sz="1220" dirty="0"/>
           </a:p>
         </p:txBody>
       </p:sp>
@@ -12363,8 +12363,8 @@
         </p:nvSpPr>
         <p:spPr>
           <a:xfrm>
-            <a:off x="8229600" y="4306824"/>
-            <a:ext cx="2679192" cy="941832"/>
+            <a:off x="8229600" y="4251960"/>
+            <a:ext cx="2679192" cy="1033272"/>
           </a:xfrm>
           <a:prstGeom prst="rect">
             <a:avLst/>
@@ -12382,7 +12382,7 @@
               <a:buNone/>
             </a:pPr>
             <a:r>
-              <a:rPr lang="en-US" sz="1220" dirty="0">
+              <a:rPr lang="en-US" sz="1140" dirty="0">
                 <a:solidFill>
                   <a:srgbClr val="17364A"/>
                 </a:solidFill>
@@ -12392,14 +12392,14 @@
               </a:rPr>
               <a:t>Locate the decision point in the playbook sequence.</a:t>
             </a:r>
-            <a:endParaRPr lang="en-US" sz="1220" dirty="0"/>
-          </a:p>
-          <a:p>
-            <a:pPr indent="0" marL="0">
-              <a:buNone/>
-            </a:pPr>
-            <a:r>
-              <a:rPr lang="en-US" sz="1220" dirty="0">
+            <a:endParaRPr lang="en-US" sz="1140" dirty="0"/>
+          </a:p>
+          <a:p>
+            <a:pPr indent="0" marL="0">
+              <a:buNone/>
+            </a:pPr>
+            <a:r>
+              <a:rPr lang="en-US" sz="1140" dirty="0">
                 <a:solidFill>
                   <a:srgbClr val="17364A"/>
                 </a:solidFill>
@@ -12409,14 +12409,14 @@
               </a:rPr>
               <a:t>Identify who should participate in the work.</a:t>
             </a:r>
-            <a:endParaRPr lang="en-US" sz="1220" dirty="0"/>
-          </a:p>
-          <a:p>
-            <a:pPr indent="0" marL="0">
-              <a:buNone/>
-            </a:pPr>
-            <a:r>
-              <a:rPr lang="en-US" sz="1220" dirty="0">
+            <a:endParaRPr lang="en-US" sz="1140" dirty="0"/>
+          </a:p>
+          <a:p>
+            <a:pPr indent="0" marL="0">
+              <a:buNone/>
+            </a:pPr>
+            <a:r>
+              <a:rPr lang="en-US" sz="1140" dirty="0">
                 <a:solidFill>
                   <a:srgbClr val="17364A"/>
                 </a:solidFill>
@@ -12424,9 +12424,9 @@
                 <a:ea typeface="Aptos" pitchFamily="34" charset="-122"/>
                 <a:cs typeface="Aptos" pitchFamily="34" charset="-120"/>
               </a:rPr>
-              <a:t>Document the review, approval, or implementation step.</a:t>
-            </a:r>
-            <a:endParaRPr lang="en-US" sz="1220" dirty="0"/>
+              <a:t>Document the review, approval, or implementation.</a:t>
+            </a:r>
+            <a:endParaRPr lang="en-US" sz="1140" dirty="0"/>
           </a:p>
         </p:txBody>
       </p:sp>
@@ -12744,7 +12744,7 @@
                 <a:ea typeface="Aptos" pitchFamily="34" charset="-122"/>
                 <a:cs typeface="Aptos" pitchFamily="34" charset="-120"/>
               </a:rPr>
-              <a:t>• Tool 4: AI Policy Landscape Scan (Worksheet) - Use AI Policy Landscape Scan to translate this.</a:t>
+              <a:t>• Tool 4: AI Policy Landscape Scan (Worksheet) - Use AI Policy Landscape Scan.</a:t>
             </a:r>
             <a:endParaRPr lang="en-US" sz="1850" dirty="0"/>
           </a:p>
@@ -12761,7 +12761,7 @@
                 <a:ea typeface="Aptos" pitchFamily="34" charset="-122"/>
                 <a:cs typeface="Aptos" pitchFamily="34" charset="-120"/>
               </a:rPr>
-              <a:t>• Tool 5: AI Environmental and Resource Impact Review (Checklist) - Use AI Environmental and.</a:t>
+              <a:t>• Tool 5: AI Environmental and Resource Impact Review (Checklist) - Use AI.</a:t>
             </a:r>
             <a:endParaRPr lang="en-US" sz="1850" dirty="0"/>
           </a:p>
@@ -12778,7 +12778,7 @@
                 <a:ea typeface="Aptos" pitchFamily="34" charset="-122"/>
                 <a:cs typeface="Aptos" pitchFamily="34" charset="-120"/>
               </a:rPr>
-              <a:t>• Tool 6: Human-Centered AI Decision Rule Checklist (Checklist) - Use Human-Centered AI Decision.</a:t>
+              <a:t>• Tool 6: Human-Centered AI Decision Rule Checklist (Checklist) - Use.</a:t>
             </a:r>
             <a:endParaRPr lang="en-US" sz="1850" dirty="0"/>
           </a:p>
@@ -12795,7 +12795,7 @@
                 <a:ea typeface="Aptos" pitchFamily="34" charset="-122"/>
                 <a:cs typeface="Aptos" pitchFamily="34" charset="-120"/>
               </a:rPr>
-              <a:t>• Tool 8: AI Project Charter (Planning) - Use AI Project Charter to translate this lesson into a.</a:t>
+              <a:t>• Tool 8: AI Project Charter (Planning) - Use AI Project Charter to translate.</a:t>
             </a:r>
             <a:endParaRPr lang="en-US" sz="1850" dirty="0"/>
           </a:p>
@@ -12836,8 +12836,8 @@
         </p:nvSpPr>
         <p:spPr>
           <a:xfrm>
-            <a:off x="8211312" y="1563624"/>
-            <a:ext cx="2734056" cy="256032"/>
+            <a:off x="8211312" y="1545336"/>
+            <a:ext cx="2734056" cy="228600"/>
           </a:xfrm>
           <a:prstGeom prst="rect">
             <a:avLst/>
@@ -12853,7 +12853,7 @@
               <a:buNone/>
             </a:pPr>
             <a:r>
-              <a:rPr lang="en-US" sz="1300" b="1" dirty="0">
+              <a:rPr lang="en-US" sz="1220" b="1" dirty="0">
                 <a:solidFill>
                   <a:srgbClr val="0068B7"/>
                 </a:solidFill>
@@ -12863,7 +12863,7 @@
               </a:rPr>
               <a:t>Use the tools</a:t>
             </a:r>
-            <a:endParaRPr lang="en-US" sz="1300" dirty="0"/>
+            <a:endParaRPr lang="en-US" sz="1220" dirty="0"/>
           </a:p>
         </p:txBody>
       </p:sp>
@@ -12875,8 +12875,8 @@
         </p:nvSpPr>
         <p:spPr>
           <a:xfrm>
-            <a:off x="8211312" y="1892808"/>
-            <a:ext cx="2734056" cy="1536192"/>
+            <a:off x="8211312" y="1856232"/>
+            <a:ext cx="2734056" cy="1591056"/>
           </a:xfrm>
           <a:prstGeom prst="rect">
             <a:avLst/>
@@ -12894,7 +12894,7 @@
               <a:buNone/>
             </a:pPr>
             <a:r>
-              <a:rPr lang="en-US" sz="1320" dirty="0">
+              <a:rPr lang="en-US" sz="1220" dirty="0">
                 <a:solidFill>
                   <a:srgbClr val="17364A"/>
                 </a:solidFill>
@@ -12902,9 +12902,9 @@
                 <a:ea typeface="Aptos" pitchFamily="34" charset="-122"/>
                 <a:cs typeface="Aptos" pitchFamily="34" charset="-120"/>
               </a:rPr>
-              <a:t>Use linked tools when your department needs a structured worksheet, template, checklist, review process, or documentation artifact.</a:t>
-            </a:r>
-            <a:endParaRPr lang="en-US" sz="1320" dirty="0"/>
+              <a:t>Use linked tools when your department needs a structured worksheet, template,.</a:t>
+            </a:r>
+            <a:endParaRPr lang="en-US" sz="1220" dirty="0"/>
           </a:p>
         </p:txBody>
       </p:sp>
@@ -12943,8 +12943,8 @@
         </p:nvSpPr>
         <p:spPr>
           <a:xfrm>
-            <a:off x="8211312" y="3941064"/>
-            <a:ext cx="2734056" cy="256032"/>
+            <a:off x="8211312" y="3922776"/>
+            <a:ext cx="2734056" cy="228600"/>
           </a:xfrm>
           <a:prstGeom prst="rect">
             <a:avLst/>
@@ -12960,7 +12960,7 @@
               <a:buNone/>
             </a:pPr>
             <a:r>
-              <a:rPr lang="en-US" sz="1300" b="1" dirty="0">
+              <a:rPr lang="en-US" sz="1220" b="1" dirty="0">
                 <a:solidFill>
                   <a:srgbClr val="0068B7"/>
                 </a:solidFill>
@@ -12970,7 +12970,7 @@
               </a:rPr>
               <a:t>Tool selection cues</a:t>
             </a:r>
-            <a:endParaRPr lang="en-US" sz="1300" dirty="0"/>
+            <a:endParaRPr lang="en-US" sz="1220" dirty="0"/>
           </a:p>
         </p:txBody>
       </p:sp>
@@ -12982,8 +12982,8 @@
         </p:nvSpPr>
         <p:spPr>
           <a:xfrm>
-            <a:off x="8229600" y="4306824"/>
-            <a:ext cx="2679192" cy="941832"/>
+            <a:off x="8229600" y="4251960"/>
+            <a:ext cx="2679192" cy="1033272"/>
           </a:xfrm>
           <a:prstGeom prst="rect">
             <a:avLst/>
@@ -13001,7 +13001,7 @@
               <a:buNone/>
             </a:pPr>
             <a:r>
-              <a:rPr lang="en-US" sz="1220" dirty="0">
+              <a:rPr lang="en-US" sz="1140" dirty="0">
                 <a:solidFill>
                   <a:srgbClr val="17364A"/>
                 </a:solidFill>
@@ -13011,14 +13011,14 @@
               </a:rPr>
               <a:t>Use a tool when no comparable local process exists.</a:t>
             </a:r>
-            <a:endParaRPr lang="en-US" sz="1220" dirty="0"/>
-          </a:p>
-          <a:p>
-            <a:pPr indent="0" marL="0">
-              <a:buNone/>
-            </a:pPr>
-            <a:r>
-              <a:rPr lang="en-US" sz="1220" dirty="0">
+            <a:endParaRPr lang="en-US" sz="1140" dirty="0"/>
+          </a:p>
+          <a:p>
+            <a:pPr indent="0" marL="0">
+              <a:buNone/>
+            </a:pPr>
+            <a:r>
+              <a:rPr lang="en-US" sz="1140" dirty="0">
                 <a:solidFill>
                   <a:srgbClr val="17364A"/>
                 </a:solidFill>
@@ -13026,16 +13026,16 @@
                 <a:ea typeface="Aptos" pitchFamily="34" charset="-122"/>
                 <a:cs typeface="Aptos" pitchFamily="34" charset="-120"/>
               </a:rPr>
-              <a:t>Adapt existing department templates when they already fit the.</a:t>
-            </a:r>
-            <a:endParaRPr lang="en-US" sz="1220" dirty="0"/>
-          </a:p>
-          <a:p>
-            <a:pPr indent="0" marL="0">
-              <a:buNone/>
-            </a:pPr>
-            <a:r>
-              <a:rPr lang="en-US" sz="1220" dirty="0">
+              <a:t>Adapt existing department templates when they.</a:t>
+            </a:r>
+            <a:endParaRPr lang="en-US" sz="1140" dirty="0"/>
+          </a:p>
+          <a:p>
+            <a:pPr indent="0" marL="0">
+              <a:buNone/>
+            </a:pPr>
+            <a:r>
+              <a:rPr lang="en-US" sz="1140" dirty="0">
                 <a:solidFill>
                   <a:srgbClr val="17364A"/>
                 </a:solidFill>
@@ -13043,9 +13043,9 @@
                 <a:ea typeface="Aptos" pitchFamily="34" charset="-122"/>
                 <a:cs typeface="Aptos" pitchFamily="34" charset="-120"/>
               </a:rPr>
-              <a:t>Save the completed artifact as evidence of the decision.</a:t>
-            </a:r>
-            <a:endParaRPr lang="en-US" sz="1220" dirty="0"/>
+              <a:t>Save the completed artifact as evidence of the.</a:t>
+            </a:r>
+            <a:endParaRPr lang="en-US" sz="1140" dirty="0"/>
           </a:p>
         </p:txBody>
       </p:sp>
@@ -13336,8 +13336,8 @@
         </p:nvSpPr>
         <p:spPr>
           <a:xfrm>
-            <a:off x="868680" y="1508760"/>
-            <a:ext cx="6309360" cy="4160520"/>
+            <a:off x="822960" y="1463040"/>
+            <a:ext cx="6565392" cy="4343400"/>
           </a:xfrm>
           <a:prstGeom prst="rect">
             <a:avLst/>
@@ -13355,7 +13355,7 @@
               <a:buNone/>
             </a:pPr>
             <a:r>
-              <a:rPr lang="en-US" sz="2100" dirty="0">
+              <a:rPr lang="en-US" sz="1920" dirty="0">
                 <a:solidFill>
                   <a:srgbClr val="003A63"/>
                 </a:solidFill>
@@ -13365,14 +13365,14 @@
               </a:rPr>
               <a:t>• Define the purpose and minimum contents of an AI governance charter.</a:t>
             </a:r>
-            <a:endParaRPr lang="en-US" sz="2100" dirty="0"/>
-          </a:p>
-          <a:p>
-            <a:pPr indent="0" marL="0">
-              <a:buNone/>
-            </a:pPr>
-            <a:r>
-              <a:rPr lang="en-US" sz="2100" dirty="0">
+            <a:endParaRPr lang="en-US" sz="1920" dirty="0"/>
+          </a:p>
+          <a:p>
+            <a:pPr indent="0" marL="0">
+              <a:buNone/>
+            </a:pPr>
+            <a:r>
+              <a:rPr lang="en-US" sz="1920" dirty="0">
                 <a:solidFill>
                   <a:srgbClr val="003A63"/>
                 </a:solidFill>
@@ -13380,16 +13380,16 @@
                 <a:ea typeface="Aptos" pitchFamily="34" charset="-122"/>
                 <a:cs typeface="Aptos" pitchFamily="34" charset="-120"/>
               </a:rPr>
-              <a:t>• Distinguish between a governance committee, technical review group, executive sponsor, and.</a:t>
-            </a:r>
-            <a:endParaRPr lang="en-US" sz="2100" dirty="0"/>
-          </a:p>
-          <a:p>
-            <a:pPr indent="0" marL="0">
-              <a:buNone/>
-            </a:pPr>
-            <a:r>
-              <a:rPr lang="en-US" sz="2100" dirty="0">
+              <a:t>• Distinguish between a governance committee, technical review group,.</a:t>
+            </a:r>
+            <a:endParaRPr lang="en-US" sz="1920" dirty="0"/>
+          </a:p>
+          <a:p>
+            <a:pPr indent="0" marL="0">
+              <a:buNone/>
+            </a:pPr>
+            <a:r>
+              <a:rPr lang="en-US" sz="1920" dirty="0">
                 <a:solidFill>
                   <a:srgbClr val="003A63"/>
                 </a:solidFill>
@@ -13397,9 +13397,9 @@
                 <a:ea typeface="Aptos" pitchFamily="34" charset="-122"/>
                 <a:cs typeface="Aptos" pitchFamily="34" charset="-120"/>
               </a:rPr>
-              <a:t>• Identify which agency functions should participate in AI governance and when their review is.</a:t>
-            </a:r>
-            <a:endParaRPr lang="en-US" sz="2100" dirty="0"/>
+              <a:t>• Identify which agency functions should participate in AI governance and when.</a:t>
+            </a:r>
+            <a:endParaRPr lang="en-US" sz="1920" dirty="0"/>
           </a:p>
         </p:txBody>
       </p:sp>
@@ -13411,12 +13411,12 @@
         </p:nvSpPr>
         <p:spPr>
           <a:xfrm>
-            <a:off x="7635240" y="1325880"/>
-            <a:ext cx="3474720" cy="1207008"/>
+            <a:off x="7543800" y="1325880"/>
+            <a:ext cx="3611880" cy="1261872"/>
           </a:xfrm>
           <a:prstGeom prst="roundRect">
             <a:avLst>
-              <a:gd name="adj" fmla="val 9091"/>
+              <a:gd name="adj" fmla="val 8696"/>
             </a:avLst>
           </a:prstGeom>
           <a:solidFill>
@@ -13438,8 +13438,8 @@
         </p:nvSpPr>
         <p:spPr>
           <a:xfrm>
-            <a:off x="7799832" y="1472184"/>
-            <a:ext cx="3145536" cy="256032"/>
+            <a:off x="7708392" y="1453896"/>
+            <a:ext cx="3282696" cy="228600"/>
           </a:xfrm>
           <a:prstGeom prst="rect">
             <a:avLst/>
@@ -13455,7 +13455,7 @@
               <a:buNone/>
             </a:pPr>
             <a:r>
-              <a:rPr lang="en-US" sz="1300" b="1" dirty="0">
+              <a:rPr lang="en-US" sz="1220" b="1" dirty="0">
                 <a:solidFill>
                   <a:srgbClr val="0068B7"/>
                 </a:solidFill>
@@ -13465,7 +13465,7 @@
               </a:rPr>
               <a:t>Governance lens</a:t>
             </a:r>
-            <a:endParaRPr lang="en-US" sz="1300" dirty="0"/>
+            <a:endParaRPr lang="en-US" sz="1220" dirty="0"/>
           </a:p>
         </p:txBody>
       </p:sp>
@@ -13477,8 +13477,8 @@
         </p:nvSpPr>
         <p:spPr>
           <a:xfrm>
-            <a:off x="7799832" y="1801368"/>
-            <a:ext cx="3145536" cy="640080"/>
+            <a:off x="7708392" y="1764792"/>
+            <a:ext cx="3282696" cy="749808"/>
           </a:xfrm>
           <a:prstGeom prst="rect">
             <a:avLst/>
@@ -13496,7 +13496,7 @@
               <a:buNone/>
             </a:pPr>
             <a:r>
-              <a:rPr lang="en-US" sz="1320" dirty="0">
+              <a:rPr lang="en-US" sz="1220" dirty="0">
                 <a:solidFill>
                   <a:srgbClr val="17364A"/>
                 </a:solidFill>
@@ -13506,7 +13506,7 @@
               </a:rPr>
               <a:t>Define the purpose and minimum contents of an AI governance charter.</a:t>
             </a:r>
-            <a:endParaRPr lang="en-US" sz="1320" dirty="0"/>
+            <a:endParaRPr lang="en-US" sz="1220" dirty="0"/>
           </a:p>
         </p:txBody>
       </p:sp>
@@ -13518,12 +13518,12 @@
         </p:nvSpPr>
         <p:spPr>
           <a:xfrm>
-            <a:off x="7635240" y="2670048"/>
-            <a:ext cx="3474720" cy="1377086"/>
+            <a:off x="7543800" y="2724912"/>
+            <a:ext cx="3611880" cy="1527048"/>
           </a:xfrm>
           <a:prstGeom prst="roundRect">
             <a:avLst>
-              <a:gd name="adj" fmla="val 7968"/>
+              <a:gd name="adj" fmla="val 7186"/>
             </a:avLst>
           </a:prstGeom>
           <a:solidFill>
@@ -13545,8 +13545,8 @@
         </p:nvSpPr>
         <p:spPr>
           <a:xfrm>
-            <a:off x="7799832" y="2816352"/>
-            <a:ext cx="3145536" cy="256032"/>
+            <a:off x="7708392" y="2852928"/>
+            <a:ext cx="3282696" cy="228600"/>
           </a:xfrm>
           <a:prstGeom prst="rect">
             <a:avLst/>
@@ -13562,7 +13562,7 @@
               <a:buNone/>
             </a:pPr>
             <a:r>
-              <a:rPr lang="en-US" sz="1300" b="1" dirty="0">
+              <a:rPr lang="en-US" sz="1220" b="1" dirty="0">
                 <a:solidFill>
                   <a:srgbClr val="0068B7"/>
                 </a:solidFill>
@@ -13572,7 +13572,7 @@
               </a:rPr>
               <a:t>Concept checkpoints</a:t>
             </a:r>
-            <a:endParaRPr lang="en-US" sz="1300" dirty="0"/>
+            <a:endParaRPr lang="en-US" sz="1220" dirty="0"/>
           </a:p>
         </p:txBody>
       </p:sp>
@@ -13584,8 +13584,8 @@
         </p:nvSpPr>
         <p:spPr>
           <a:xfrm>
-            <a:off x="7818120" y="3182112"/>
-            <a:ext cx="3090672" cy="718718"/>
+            <a:off x="7726680" y="3182112"/>
+            <a:ext cx="3227832" cy="960120"/>
           </a:xfrm>
           <a:prstGeom prst="rect">
             <a:avLst/>
@@ -13603,7 +13603,7 @@
               <a:buNone/>
             </a:pPr>
             <a:r>
-              <a:rPr lang="en-US" sz="1220" dirty="0">
+              <a:rPr lang="en-US" sz="1140" dirty="0">
                 <a:solidFill>
                   <a:srgbClr val="17364A"/>
                 </a:solidFill>
@@ -13611,16 +13611,16 @@
                 <a:ea typeface="Aptos" pitchFamily="34" charset="-122"/>
                 <a:cs typeface="Aptos" pitchFamily="34" charset="-120"/>
               </a:rPr>
-              <a:t>Distinguish between a governance committee, technical review.</a:t>
-            </a:r>
-            <a:endParaRPr lang="en-US" sz="1220" dirty="0"/>
-          </a:p>
-          <a:p>
-            <a:pPr indent="0" marL="0">
-              <a:buNone/>
-            </a:pPr>
-            <a:r>
-              <a:rPr lang="en-US" sz="1220" dirty="0">
+              <a:t>Distinguish between a governance committee,.</a:t>
+            </a:r>
+            <a:endParaRPr lang="en-US" sz="1140" dirty="0"/>
+          </a:p>
+          <a:p>
+            <a:pPr indent="0" marL="0">
+              <a:buNone/>
+            </a:pPr>
+            <a:r>
+              <a:rPr lang="en-US" sz="1140" dirty="0">
                 <a:solidFill>
                   <a:srgbClr val="17364A"/>
                 </a:solidFill>
@@ -13628,16 +13628,16 @@
                 <a:ea typeface="Aptos" pitchFamily="34" charset="-122"/>
                 <a:cs typeface="Aptos" pitchFamily="34" charset="-120"/>
               </a:rPr>
-              <a:t>Develop operating procedures for intake, review, approval,.</a:t>
-            </a:r>
-            <a:endParaRPr lang="en-US" sz="1220" dirty="0"/>
-          </a:p>
-          <a:p>
-            <a:pPr indent="0" marL="0">
-              <a:buNone/>
-            </a:pPr>
-            <a:r>
-              <a:rPr lang="en-US" sz="1220" dirty="0">
+              <a:t>Develop operating procedures for intake, review,.</a:t>
+            </a:r>
+            <a:endParaRPr lang="en-US" sz="1140" dirty="0"/>
+          </a:p>
+          <a:p>
+            <a:pPr indent="0" marL="0">
+              <a:buNone/>
+            </a:pPr>
+            <a:r>
+              <a:rPr lang="en-US" sz="1140" dirty="0">
                 <a:solidFill>
                   <a:srgbClr val="17364A"/>
                 </a:solidFill>
@@ -13645,9 +13645,9 @@
                 <a:ea typeface="Aptos" pitchFamily="34" charset="-122"/>
                 <a:cs typeface="Aptos" pitchFamily="34" charset="-120"/>
               </a:rPr>
-              <a:t>Produce a draft AI governance charter or operating model that can.</a:t>
-            </a:r>
-            <a:endParaRPr lang="en-US" sz="1220" dirty="0"/>
+              <a:t>Produce a draft AI governance charter or operating.</a:t>
+            </a:r>
+            <a:endParaRPr lang="en-US" sz="1140" dirty="0"/>
           </a:p>
         </p:txBody>
       </p:sp>
@@ -13659,12 +13659,12 @@
         </p:nvSpPr>
         <p:spPr>
           <a:xfrm>
-            <a:off x="7635240" y="4184294"/>
-            <a:ext cx="3474720" cy="1466698"/>
+            <a:off x="7543800" y="4389120"/>
+            <a:ext cx="3611880" cy="1261872"/>
           </a:xfrm>
           <a:prstGeom prst="roundRect">
             <a:avLst>
-              <a:gd name="adj" fmla="val 7481"/>
+              <a:gd name="adj" fmla="val 8696"/>
             </a:avLst>
           </a:prstGeom>
           <a:solidFill>
@@ -13686,8 +13686,8 @@
         </p:nvSpPr>
         <p:spPr>
           <a:xfrm>
-            <a:off x="7799832" y="4330598"/>
-            <a:ext cx="3145536" cy="256032"/>
+            <a:off x="7708392" y="4517136"/>
+            <a:ext cx="3282696" cy="228600"/>
           </a:xfrm>
           <a:prstGeom prst="rect">
             <a:avLst/>
@@ -13703,7 +13703,7 @@
               <a:buNone/>
             </a:pPr>
             <a:r>
-              <a:rPr lang="en-US" sz="1300" b="1" dirty="0">
+              <a:rPr lang="en-US" sz="1220" b="1" dirty="0">
                 <a:solidFill>
                   <a:srgbClr val="0068B7"/>
                 </a:solidFill>
@@ -13713,7 +13713,7 @@
               </a:rPr>
               <a:t>What to document</a:t>
             </a:r>
-            <a:endParaRPr lang="en-US" sz="1300" dirty="0"/>
+            <a:endParaRPr lang="en-US" sz="1220" dirty="0"/>
           </a:p>
         </p:txBody>
       </p:sp>
@@ -13725,8 +13725,8 @@
         </p:nvSpPr>
         <p:spPr>
           <a:xfrm>
-            <a:off x="7799832" y="4659782"/>
-            <a:ext cx="3145536" cy="899770"/>
+            <a:off x="7708392" y="4828032"/>
+            <a:ext cx="3282696" cy="749808"/>
           </a:xfrm>
           <a:prstGeom prst="rect">
             <a:avLst/>
@@ -13744,7 +13744,7 @@
               <a:buNone/>
             </a:pPr>
             <a:r>
-              <a:rPr lang="en-US" sz="1320" dirty="0">
+              <a:rPr lang="en-US" sz="1220" dirty="0">
                 <a:solidFill>
                   <a:srgbClr val="17364A"/>
                 </a:solidFill>
@@ -13752,9 +13752,9 @@
                 <a:ea typeface="Aptos" pitchFamily="34" charset="-122"/>
                 <a:cs typeface="Aptos" pitchFamily="34" charset="-120"/>
               </a:rPr>
-              <a:t>Use the assignment to test whether you can explain the concept, apply it to a realistic public health situation, and identify what would need review before the work moves forward.</a:t>
-            </a:r>
-            <a:endParaRPr lang="en-US" sz="1320" dirty="0"/>
+              <a:t>Use the assignment to test whether you can explain the concept, apply it to a.</a:t>
+            </a:r>
+            <a:endParaRPr lang="en-US" sz="1220" dirty="0"/>
           </a:p>
         </p:txBody>
       </p:sp>
@@ -14045,8 +14045,8 @@
         </p:nvSpPr>
         <p:spPr>
           <a:xfrm>
-            <a:off x="868680" y="1508760"/>
-            <a:ext cx="6309360" cy="4160520"/>
+            <a:off x="822960" y="1463040"/>
+            <a:ext cx="6565392" cy="4343400"/>
           </a:xfrm>
           <a:prstGeom prst="rect">
             <a:avLst/>
@@ -14064,7 +14064,7 @@
               <a:buNone/>
             </a:pPr>
             <a:r>
-              <a:rPr lang="en-US" sz="2100" dirty="0">
+              <a:rPr lang="en-US" sz="1920" dirty="0">
                 <a:solidFill>
                   <a:srgbClr val="003A63"/>
                 </a:solidFill>
@@ -14072,16 +14072,16 @@
                 <a:ea typeface="Aptos" pitchFamily="34" charset="-122"/>
                 <a:cs typeface="Aptos" pitchFamily="34" charset="-120"/>
               </a:rPr>
-              <a:t>• AI governance needs a formal home before an agency begins approving tools, pilots, vendor.</a:t>
-            </a:r>
-            <a:endParaRPr lang="en-US" sz="2100" dirty="0"/>
-          </a:p>
-          <a:p>
-            <a:pPr indent="0" marL="0">
-              <a:buNone/>
-            </a:pPr>
-            <a:r>
-              <a:rPr lang="en-US" sz="2100" dirty="0">
+              <a:t>• AI governance needs a formal home before an agency begins approving tools,.</a:t>
+            </a:r>
+            <a:endParaRPr lang="en-US" sz="1920" dirty="0"/>
+          </a:p>
+          <a:p>
+            <a:pPr indent="0" marL="0">
+              <a:buNone/>
+            </a:pPr>
+            <a:r>
+              <a:rPr lang="en-US" sz="1920" dirty="0">
                 <a:solidFill>
                   <a:srgbClr val="003A63"/>
                 </a:solidFill>
@@ -14089,16 +14089,16 @@
                 <a:ea typeface="Aptos" pitchFamily="34" charset="-122"/>
                 <a:cs typeface="Aptos" pitchFamily="34" charset="-120"/>
               </a:rPr>
-              <a:t>• A governance charter defines the purpose, scope, authority, membership, cadence, decision.</a:t>
-            </a:r>
-            <a:endParaRPr lang="en-US" sz="2100" dirty="0"/>
-          </a:p>
-          <a:p>
-            <a:pPr indent="0" marL="0">
-              <a:buNone/>
-            </a:pPr>
-            <a:r>
-              <a:rPr lang="en-US" sz="2100" dirty="0">
+              <a:t>• A governance charter defines the purpose, scope, authority, membership,.</a:t>
+            </a:r>
+            <a:endParaRPr lang="en-US" sz="1920" dirty="0"/>
+          </a:p>
+          <a:p>
+            <a:pPr indent="0" marL="0">
+              <a:buNone/>
+            </a:pPr>
+            <a:r>
+              <a:rPr lang="en-US" sz="1920" dirty="0">
                 <a:solidFill>
                   <a:srgbClr val="003A63"/>
                 </a:solidFill>
@@ -14106,9 +14106,9 @@
                 <a:ea typeface="Aptos" pitchFamily="34" charset="-122"/>
                 <a:cs typeface="Aptos" pitchFamily="34" charset="-120"/>
               </a:rPr>
-              <a:t>• Without a charter, AI decisions often become scattered across IT, program areas, legal,.</a:t>
-            </a:r>
-            <a:endParaRPr lang="en-US" sz="2100" dirty="0"/>
+              <a:t>• Without a charter, AI decisions often become scattered across IT, program.</a:t>
+            </a:r>
+            <a:endParaRPr lang="en-US" sz="1920" dirty="0"/>
           </a:p>
         </p:txBody>
       </p:sp>
@@ -14120,12 +14120,12 @@
         </p:nvSpPr>
         <p:spPr>
           <a:xfrm>
-            <a:off x="7635240" y="1325880"/>
-            <a:ext cx="3474720" cy="1255471"/>
+            <a:off x="7543800" y="1325880"/>
+            <a:ext cx="3611880" cy="1261872"/>
           </a:xfrm>
           <a:prstGeom prst="roundRect">
             <a:avLst>
-              <a:gd name="adj" fmla="val 8740"/>
+              <a:gd name="adj" fmla="val 8696"/>
             </a:avLst>
           </a:prstGeom>
           <a:solidFill>
@@ -14147,8 +14147,8 @@
         </p:nvSpPr>
         <p:spPr>
           <a:xfrm>
-            <a:off x="7799832" y="1472184"/>
-            <a:ext cx="3145536" cy="256032"/>
+            <a:off x="7708392" y="1453896"/>
+            <a:ext cx="3282696" cy="228600"/>
           </a:xfrm>
           <a:prstGeom prst="rect">
             <a:avLst/>
@@ -14164,7 +14164,7 @@
               <a:buNone/>
             </a:pPr>
             <a:r>
-              <a:rPr lang="en-US" sz="1300" b="1" dirty="0">
+              <a:rPr lang="en-US" sz="1220" b="1" dirty="0">
                 <a:solidFill>
                   <a:srgbClr val="0068B7"/>
                 </a:solidFill>
@@ -14174,7 +14174,7 @@
               </a:rPr>
               <a:t>Governance lens</a:t>
             </a:r>
-            <a:endParaRPr lang="en-US" sz="1300" dirty="0"/>
+            <a:endParaRPr lang="en-US" sz="1220" dirty="0"/>
           </a:p>
         </p:txBody>
       </p:sp>
@@ -14186,8 +14186,8 @@
         </p:nvSpPr>
         <p:spPr>
           <a:xfrm>
-            <a:off x="7799832" y="1801368"/>
-            <a:ext cx="3145536" cy="688543"/>
+            <a:off x="7708392" y="1764792"/>
+            <a:ext cx="3282696" cy="749808"/>
           </a:xfrm>
           <a:prstGeom prst="rect">
             <a:avLst/>
@@ -14205,7 +14205,7 @@
               <a:buNone/>
             </a:pPr>
             <a:r>
-              <a:rPr lang="en-US" sz="1320" dirty="0">
+              <a:rPr lang="en-US" sz="1220" dirty="0">
                 <a:solidFill>
                   <a:srgbClr val="17364A"/>
                 </a:solidFill>
@@ -14213,9 +14213,9 @@
                 <a:ea typeface="Aptos" pitchFamily="34" charset="-122"/>
                 <a:cs typeface="Aptos" pitchFamily="34" charset="-120"/>
               </a:rPr>
-              <a:t>AI governance needs a formal home before an agency begins approving tools, pilots, vendor products, or.</a:t>
-            </a:r>
-            <a:endParaRPr lang="en-US" sz="1320" dirty="0"/>
+              <a:t>AI governance needs a formal home before an agency begins approving tools,.</a:t>
+            </a:r>
+            <a:endParaRPr lang="en-US" sz="1220" dirty="0"/>
           </a:p>
         </p:txBody>
       </p:sp>
@@ -14227,12 +14227,12 @@
         </p:nvSpPr>
         <p:spPr>
           <a:xfrm>
-            <a:off x="7635240" y="2718511"/>
-            <a:ext cx="3474720" cy="1328623"/>
+            <a:off x="7543800" y="2724912"/>
+            <a:ext cx="3611880" cy="1527048"/>
           </a:xfrm>
           <a:prstGeom prst="roundRect">
             <a:avLst>
-              <a:gd name="adj" fmla="val 8259"/>
+              <a:gd name="adj" fmla="val 7186"/>
             </a:avLst>
           </a:prstGeom>
           <a:solidFill>
@@ -14254,24 +14254,26 @@
         </p:nvSpPr>
         <p:spPr>
           <a:xfrm>
-            <a:off x="7799832" y="2846527"/>
-            <a:ext cx="3145536" cy="237744"/>
-          </a:xfrm>
-          <a:prstGeom prst="rect">
-            <a:avLst/>
-          </a:prstGeom>
-          <a:noFill/>
-          <a:ln/>
-        </p:spPr>
-        <p:txBody>
-          <a:bodyPr wrap="square" lIns="0" tIns="0" rIns="0" bIns="0" rtlCol="0" anchor="ctr"/>
-          <a:lstStyle/>
-          <a:p>
-            <a:pPr indent="0" marL="0">
-              <a:buNone/>
-            </a:pPr>
-            <a:r>
-              <a:rPr lang="en-US" sz="1250" b="1" dirty="0">
+            <a:off x="7708392" y="2852928"/>
+            <a:ext cx="3282696" cy="219456"/>
+          </a:xfrm>
+          <a:prstGeom prst="rect">
+            <a:avLst/>
+          </a:prstGeom>
+          <a:noFill/>
+          <a:ln/>
+        </p:spPr>
+        <p:txBody>
+          <a:bodyPr wrap="square" lIns="0" tIns="0" rIns="0" bIns="0" rtlCol="0" anchor="ctr">
+            <a:normAutofit/>
+          </a:bodyPr>
+          <a:lstStyle/>
+          <a:p>
+            <a:pPr indent="0" marL="0">
+              <a:buNone/>
+            </a:pPr>
+            <a:r>
+              <a:rPr lang="en-US" sz="1160" b="1" dirty="0">
                 <a:solidFill>
                   <a:srgbClr val="0068B7"/>
                 </a:solidFill>
@@ -14281,7 +14283,7 @@
               </a:rPr>
               <a:t>Governance pathway</a:t>
             </a:r>
-            <a:endParaRPr lang="en-US" sz="1250" dirty="0"/>
+            <a:endParaRPr lang="en-US" sz="1160" dirty="0"/>
           </a:p>
         </p:txBody>
       </p:sp>
@@ -14293,7 +14295,7 @@
         </p:nvSpPr>
         <p:spPr>
           <a:xfrm>
-            <a:off x="8763000" y="3399739"/>
+            <a:off x="8717280" y="3406140"/>
             <a:ext cx="164592" cy="0"/>
           </a:xfrm>
           <a:prstGeom prst="line">
@@ -14316,8 +14318,8 @@
         </p:nvSpPr>
         <p:spPr>
           <a:xfrm>
-            <a:off x="7872984" y="3248863"/>
-            <a:ext cx="890016" cy="301752"/>
+            <a:off x="7781544" y="3255264"/>
+            <a:ext cx="935736" cy="301752"/>
           </a:xfrm>
           <a:prstGeom prst="roundRect">
             <a:avLst>
@@ -14343,8 +14345,8 @@
         </p:nvSpPr>
         <p:spPr>
           <a:xfrm>
-            <a:off x="7909560" y="3322015"/>
-            <a:ext cx="816864" cy="146304"/>
+            <a:off x="7818120" y="3328416"/>
+            <a:ext cx="862584" cy="146304"/>
           </a:xfrm>
           <a:prstGeom prst="rect">
             <a:avLst/>
@@ -14384,7 +14386,7 @@
         </p:nvSpPr>
         <p:spPr>
           <a:xfrm>
-            <a:off x="9817608" y="3399739"/>
+            <a:off x="9817608" y="3406140"/>
             <a:ext cx="164592" cy="0"/>
           </a:xfrm>
           <a:prstGeom prst="line">
@@ -14407,8 +14409,8 @@
         </p:nvSpPr>
         <p:spPr>
           <a:xfrm>
-            <a:off x="8927592" y="3248863"/>
-            <a:ext cx="890016" cy="301752"/>
+            <a:off x="8881872" y="3255264"/>
+            <a:ext cx="935736" cy="301752"/>
           </a:xfrm>
           <a:prstGeom prst="roundRect">
             <a:avLst>
@@ -14434,8 +14436,8 @@
         </p:nvSpPr>
         <p:spPr>
           <a:xfrm>
-            <a:off x="8964168" y="3322015"/>
-            <a:ext cx="816864" cy="146304"/>
+            <a:off x="8918448" y="3328416"/>
+            <a:ext cx="862584" cy="146304"/>
           </a:xfrm>
           <a:prstGeom prst="rect">
             <a:avLst/>
@@ -14475,8 +14477,8 @@
         </p:nvSpPr>
         <p:spPr>
           <a:xfrm>
-            <a:off x="9982200" y="3248863"/>
-            <a:ext cx="890016" cy="301752"/>
+            <a:off x="9982200" y="3255264"/>
+            <a:ext cx="935736" cy="301752"/>
           </a:xfrm>
           <a:prstGeom prst="roundRect">
             <a:avLst>
@@ -14502,8 +14504,8 @@
         </p:nvSpPr>
         <p:spPr>
           <a:xfrm>
-            <a:off x="10018776" y="3322015"/>
-            <a:ext cx="816864" cy="146304"/>
+            <a:off x="10018776" y="3328416"/>
+            <a:ext cx="862584" cy="146304"/>
           </a:xfrm>
           <a:prstGeom prst="rect">
             <a:avLst/>
@@ -14543,8 +14545,8 @@
         </p:nvSpPr>
         <p:spPr>
           <a:xfrm>
-            <a:off x="7854696" y="3742639"/>
-            <a:ext cx="3035808" cy="158191"/>
+            <a:off x="7763256" y="3749040"/>
+            <a:ext cx="3172968" cy="356616"/>
           </a:xfrm>
           <a:prstGeom prst="rect">
             <a:avLst/>
@@ -14562,7 +14564,7 @@
               <a:buNone/>
             </a:pPr>
             <a:r>
-              <a:rPr lang="en-US" sz="1120" dirty="0">
+              <a:rPr lang="en-US" sz="1040" dirty="0">
                 <a:solidFill>
                   <a:srgbClr val="17364A"/>
                 </a:solidFill>
@@ -14570,9 +14572,9 @@
                 <a:ea typeface="Aptos" pitchFamily="34" charset="-122"/>
                 <a:cs typeface="Aptos" pitchFamily="34" charset="-120"/>
               </a:rPr>
-              <a:t>A proposed AI use should move through documented review before it becomes an operational workflow.</a:t>
-            </a:r>
-            <a:endParaRPr lang="en-US" sz="1120" dirty="0"/>
+              <a:t>A proposed AI use should move through documented review before it.</a:t>
+            </a:r>
+            <a:endParaRPr lang="en-US" sz="1040" dirty="0"/>
           </a:p>
         </p:txBody>
       </p:sp>
@@ -14584,12 +14586,12 @@
         </p:nvSpPr>
         <p:spPr>
           <a:xfrm>
-            <a:off x="7635240" y="4184294"/>
-            <a:ext cx="3474720" cy="1466698"/>
+            <a:off x="7543800" y="4389120"/>
+            <a:ext cx="3611880" cy="1261872"/>
           </a:xfrm>
           <a:prstGeom prst="roundRect">
             <a:avLst>
-              <a:gd name="adj" fmla="val 7481"/>
+              <a:gd name="adj" fmla="val 8696"/>
             </a:avLst>
           </a:prstGeom>
           <a:solidFill>
@@ -14611,8 +14613,8 @@
         </p:nvSpPr>
         <p:spPr>
           <a:xfrm>
-            <a:off x="7799832" y="4330598"/>
-            <a:ext cx="3145536" cy="256032"/>
+            <a:off x="7708392" y="4517136"/>
+            <a:ext cx="3282696" cy="228600"/>
           </a:xfrm>
           <a:prstGeom prst="rect">
             <a:avLst/>
@@ -14628,7 +14630,7 @@
               <a:buNone/>
             </a:pPr>
             <a:r>
-              <a:rPr lang="en-US" sz="1300" b="1" dirty="0">
+              <a:rPr lang="en-US" sz="1220" b="1" dirty="0">
                 <a:solidFill>
                   <a:srgbClr val="0068B7"/>
                 </a:solidFill>
@@ -14638,7 +14640,7 @@
               </a:rPr>
               <a:t>What to document</a:t>
             </a:r>
-            <a:endParaRPr lang="en-US" sz="1300" dirty="0"/>
+            <a:endParaRPr lang="en-US" sz="1220" dirty="0"/>
           </a:p>
         </p:txBody>
       </p:sp>
@@ -14650,8 +14652,8 @@
         </p:nvSpPr>
         <p:spPr>
           <a:xfrm>
-            <a:off x="7799832" y="4659782"/>
-            <a:ext cx="3145536" cy="899770"/>
+            <a:off x="7708392" y="4828032"/>
+            <a:ext cx="3282696" cy="749808"/>
           </a:xfrm>
           <a:prstGeom prst="rect">
             <a:avLst/>
@@ -14669,7 +14671,7 @@
               <a:buNone/>
             </a:pPr>
             <a:r>
-              <a:rPr lang="en-US" sz="1320" dirty="0">
+              <a:rPr lang="en-US" sz="1220" dirty="0">
                 <a:solidFill>
                   <a:srgbClr val="17364A"/>
                 </a:solidFill>
@@ -14677,9 +14679,9 @@
                 <a:ea typeface="Aptos" pitchFamily="34" charset="-122"/>
                 <a:cs typeface="Aptos" pitchFamily="34" charset="-120"/>
               </a:rPr>
-              <a:t>Translate this concept into clear decision rights, review steps, documentation expectations, and escalation paths before an AI-supported workflow is approved.</a:t>
-            </a:r>
-            <a:endParaRPr lang="en-US" sz="1320" dirty="0"/>
+              <a:t>Translate this concept into clear decision rights, review steps, documentation.</a:t>
+            </a:r>
+            <a:endParaRPr lang="en-US" sz="1220" dirty="0"/>
           </a:p>
         </p:txBody>
       </p:sp>
@@ -14970,8 +14972,8 @@
         </p:nvSpPr>
         <p:spPr>
           <a:xfrm>
-            <a:off x="868680" y="1508760"/>
-            <a:ext cx="6309360" cy="4160520"/>
+            <a:off x="822960" y="1463040"/>
+            <a:ext cx="6565392" cy="4343400"/>
           </a:xfrm>
           <a:prstGeom prst="rect">
             <a:avLst/>
@@ -14989,7 +14991,7 @@
               <a:buNone/>
             </a:pPr>
             <a:r>
-              <a:rPr lang="en-US" sz="2100" dirty="0">
+              <a:rPr lang="en-US" sz="1920" dirty="0">
                 <a:solidFill>
                   <a:srgbClr val="003A63"/>
                 </a:solidFill>
@@ -14997,16 +14999,16 @@
                 <a:ea typeface="Aptos" pitchFamily="34" charset="-122"/>
                 <a:cs typeface="Aptos" pitchFamily="34" charset="-120"/>
               </a:rPr>
-              <a:t>• This module provides national-level training guidance for public health agencies and partners.</a:t>
-            </a:r>
-            <a:endParaRPr lang="en-US" sz="2100" dirty="0"/>
-          </a:p>
-          <a:p>
-            <a:pPr indent="0" marL="0">
-              <a:buNone/>
-            </a:pPr>
-            <a:r>
-              <a:rPr lang="en-US" sz="2100" dirty="0">
+              <a:t>• This module provides national-level training guidance for public health.</a:t>
+            </a:r>
+            <a:endParaRPr lang="en-US" sz="1920" dirty="0"/>
+          </a:p>
+          <a:p>
+            <a:pPr indent="0" marL="0">
+              <a:buNone/>
+            </a:pPr>
+            <a:r>
+              <a:rPr lang="en-US" sz="1920" dirty="0">
                 <a:solidFill>
                   <a:srgbClr val="003A63"/>
                 </a:solidFill>
@@ -15014,16 +15016,16 @@
                 <a:ea typeface="Aptos" pitchFamily="34" charset="-122"/>
                 <a:cs typeface="Aptos" pitchFamily="34" charset="-120"/>
               </a:rPr>
-              <a:t>• It is not legal advice and does not replace review by agency legal counsel, privacy officers,.</a:t>
-            </a:r>
-            <a:endParaRPr lang="en-US" sz="2100" dirty="0"/>
-          </a:p>
-          <a:p>
-            <a:pPr indent="0" marL="0">
-              <a:buNone/>
-            </a:pPr>
-            <a:r>
-              <a:rPr lang="en-US" sz="2100" dirty="0">
+              <a:t>• It is not legal advice and does not replace review by agency legal counsel,.</a:t>
+            </a:r>
+            <a:endParaRPr lang="en-US" sz="1920" dirty="0"/>
+          </a:p>
+          <a:p>
+            <a:pPr indent="0" marL="0">
+              <a:buNone/>
+            </a:pPr>
+            <a:r>
+              <a:rPr lang="en-US" sz="1920" dirty="0">
                 <a:solidFill>
                   <a:srgbClr val="003A63"/>
                 </a:solidFill>
@@ -15031,9 +15033,9 @@
                 <a:ea typeface="Aptos" pitchFamily="34" charset="-122"/>
                 <a:cs typeface="Aptos" pitchFamily="34" charset="-120"/>
               </a:rPr>
-              <a:t>• Requirements may vary by state, locality, territory, Tribe, agency, funding source,.</a:t>
-            </a:r>
-            <a:endParaRPr lang="en-US" sz="2100" dirty="0"/>
+              <a:t>• Requirements may vary by state, locality, territory, Tribe, agency, funding.</a:t>
+            </a:r>
+            <a:endParaRPr lang="en-US" sz="1920" dirty="0"/>
           </a:p>
         </p:txBody>
       </p:sp>
@@ -15045,12 +15047,12 @@
         </p:nvSpPr>
         <p:spPr>
           <a:xfrm>
-            <a:off x="7635240" y="1325880"/>
-            <a:ext cx="3474720" cy="1207008"/>
+            <a:off x="7543800" y="1325880"/>
+            <a:ext cx="3611880" cy="1261872"/>
           </a:xfrm>
           <a:prstGeom prst="roundRect">
             <a:avLst>
-              <a:gd name="adj" fmla="val 9091"/>
+              <a:gd name="adj" fmla="val 8696"/>
             </a:avLst>
           </a:prstGeom>
           <a:solidFill>
@@ -15072,8 +15074,8 @@
         </p:nvSpPr>
         <p:spPr>
           <a:xfrm>
-            <a:off x="7799832" y="1472184"/>
-            <a:ext cx="3145536" cy="256032"/>
+            <a:off x="7708392" y="1453896"/>
+            <a:ext cx="3282696" cy="228600"/>
           </a:xfrm>
           <a:prstGeom prst="rect">
             <a:avLst/>
@@ -15089,7 +15091,7 @@
               <a:buNone/>
             </a:pPr>
             <a:r>
-              <a:rPr lang="en-US" sz="1300" b="1" dirty="0">
+              <a:rPr lang="en-US" sz="1220" b="1" dirty="0">
                 <a:solidFill>
                   <a:srgbClr val="0068B7"/>
                 </a:solidFill>
@@ -15099,7 +15101,7 @@
               </a:rPr>
               <a:t>Governance lens</a:t>
             </a:r>
-            <a:endParaRPr lang="en-US" sz="1300" dirty="0"/>
+            <a:endParaRPr lang="en-US" sz="1220" dirty="0"/>
           </a:p>
         </p:txBody>
       </p:sp>
@@ -15111,8 +15113,8 @@
         </p:nvSpPr>
         <p:spPr>
           <a:xfrm>
-            <a:off x="7799832" y="1801368"/>
-            <a:ext cx="3145536" cy="640080"/>
+            <a:off x="7708392" y="1764792"/>
+            <a:ext cx="3282696" cy="749808"/>
           </a:xfrm>
           <a:prstGeom prst="rect">
             <a:avLst/>
@@ -15130,7 +15132,7 @@
               <a:buNone/>
             </a:pPr>
             <a:r>
-              <a:rPr lang="en-US" sz="1320" dirty="0">
+              <a:rPr lang="en-US" sz="1220" dirty="0">
                 <a:solidFill>
                   <a:srgbClr val="17364A"/>
                 </a:solidFill>
@@ -15138,9 +15140,9 @@
                 <a:ea typeface="Aptos" pitchFamily="34" charset="-122"/>
                 <a:cs typeface="Aptos" pitchFamily="34" charset="-120"/>
               </a:rPr>
-              <a:t>This module provides national-level training guidance for public health agencies and.</a:t>
-            </a:r>
-            <a:endParaRPr lang="en-US" sz="1320" dirty="0"/>
+              <a:t>This module provides national-level training guidance for public health agencies.</a:t>
+            </a:r>
+            <a:endParaRPr lang="en-US" sz="1220" dirty="0"/>
           </a:p>
         </p:txBody>
       </p:sp>
@@ -15152,12 +15154,12 @@
         </p:nvSpPr>
         <p:spPr>
           <a:xfrm>
-            <a:off x="7635240" y="2670048"/>
-            <a:ext cx="3474720" cy="1377086"/>
+            <a:off x="7543800" y="2724912"/>
+            <a:ext cx="3611880" cy="1527048"/>
           </a:xfrm>
           <a:prstGeom prst="roundRect">
             <a:avLst>
-              <a:gd name="adj" fmla="val 7968"/>
+              <a:gd name="adj" fmla="val 7186"/>
             </a:avLst>
           </a:prstGeom>
           <a:solidFill>
@@ -15179,24 +15181,26 @@
         </p:nvSpPr>
         <p:spPr>
           <a:xfrm>
-            <a:off x="7799832" y="2798064"/>
-            <a:ext cx="3145536" cy="237744"/>
-          </a:xfrm>
-          <a:prstGeom prst="rect">
-            <a:avLst/>
-          </a:prstGeom>
-          <a:noFill/>
-          <a:ln/>
-        </p:spPr>
-        <p:txBody>
-          <a:bodyPr wrap="square" lIns="0" tIns="0" rIns="0" bIns="0" rtlCol="0" anchor="ctr"/>
-          <a:lstStyle/>
-          <a:p>
-            <a:pPr indent="0" marL="0">
-              <a:buNone/>
-            </a:pPr>
-            <a:r>
-              <a:rPr lang="en-US" sz="1250" b="1" dirty="0">
+            <a:off x="7708392" y="2852928"/>
+            <a:ext cx="3282696" cy="219456"/>
+          </a:xfrm>
+          <a:prstGeom prst="rect">
+            <a:avLst/>
+          </a:prstGeom>
+          <a:noFill/>
+          <a:ln/>
+        </p:spPr>
+        <p:txBody>
+          <a:bodyPr wrap="square" lIns="0" tIns="0" rIns="0" bIns="0" rtlCol="0" anchor="ctr">
+            <a:normAutofit/>
+          </a:bodyPr>
+          <a:lstStyle/>
+          <a:p>
+            <a:pPr indent="0" marL="0">
+              <a:buNone/>
+            </a:pPr>
+            <a:r>
+              <a:rPr lang="en-US" sz="1160" b="1" dirty="0">
                 <a:solidFill>
                   <a:srgbClr val="0068B7"/>
                 </a:solidFill>
@@ -15206,7 +15210,7 @@
               </a:rPr>
               <a:t>Governance pathway</a:t>
             </a:r>
-            <a:endParaRPr lang="en-US" sz="1250" dirty="0"/>
+            <a:endParaRPr lang="en-US" sz="1160" dirty="0"/>
           </a:p>
         </p:txBody>
       </p:sp>
@@ -15218,7 +15222,7 @@
         </p:nvSpPr>
         <p:spPr>
           <a:xfrm>
-            <a:off x="8763000" y="3351276"/>
+            <a:off x="8717280" y="3406140"/>
             <a:ext cx="164592" cy="0"/>
           </a:xfrm>
           <a:prstGeom prst="line">
@@ -15241,8 +15245,8 @@
         </p:nvSpPr>
         <p:spPr>
           <a:xfrm>
-            <a:off x="7872984" y="3200400"/>
-            <a:ext cx="890016" cy="301752"/>
+            <a:off x="7781544" y="3255264"/>
+            <a:ext cx="935736" cy="301752"/>
           </a:xfrm>
           <a:prstGeom prst="roundRect">
             <a:avLst>
@@ -15268,8 +15272,8 @@
         </p:nvSpPr>
         <p:spPr>
           <a:xfrm>
-            <a:off x="7909560" y="3273552"/>
-            <a:ext cx="816864" cy="146304"/>
+            <a:off x="7818120" y="3328416"/>
+            <a:ext cx="862584" cy="146304"/>
           </a:xfrm>
           <a:prstGeom prst="rect">
             <a:avLst/>
@@ -15309,7 +15313,7 @@
         </p:nvSpPr>
         <p:spPr>
           <a:xfrm>
-            <a:off x="9817608" y="3351276"/>
+            <a:off x="9817608" y="3406140"/>
             <a:ext cx="164592" cy="0"/>
           </a:xfrm>
           <a:prstGeom prst="line">
@@ -15332,8 +15336,8 @@
         </p:nvSpPr>
         <p:spPr>
           <a:xfrm>
-            <a:off x="8927592" y="3200400"/>
-            <a:ext cx="890016" cy="301752"/>
+            <a:off x="8881872" y="3255264"/>
+            <a:ext cx="935736" cy="301752"/>
           </a:xfrm>
           <a:prstGeom prst="roundRect">
             <a:avLst>
@@ -15359,8 +15363,8 @@
         </p:nvSpPr>
         <p:spPr>
           <a:xfrm>
-            <a:off x="8964168" y="3273552"/>
-            <a:ext cx="816864" cy="146304"/>
+            <a:off x="8918448" y="3328416"/>
+            <a:ext cx="862584" cy="146304"/>
           </a:xfrm>
           <a:prstGeom prst="rect">
             <a:avLst/>
@@ -15400,8 +15404,8 @@
         </p:nvSpPr>
         <p:spPr>
           <a:xfrm>
-            <a:off x="9982200" y="3200400"/>
-            <a:ext cx="890016" cy="301752"/>
+            <a:off x="9982200" y="3255264"/>
+            <a:ext cx="935736" cy="301752"/>
           </a:xfrm>
           <a:prstGeom prst="roundRect">
             <a:avLst>
@@ -15427,8 +15431,8 @@
         </p:nvSpPr>
         <p:spPr>
           <a:xfrm>
-            <a:off x="10018776" y="3273552"/>
-            <a:ext cx="816864" cy="146304"/>
+            <a:off x="10018776" y="3328416"/>
+            <a:ext cx="862584" cy="146304"/>
           </a:xfrm>
           <a:prstGeom prst="rect">
             <a:avLst/>
@@ -15468,8 +15472,8 @@
         </p:nvSpPr>
         <p:spPr>
           <a:xfrm>
-            <a:off x="7854696" y="3694176"/>
-            <a:ext cx="3035808" cy="206654"/>
+            <a:off x="7763256" y="3749040"/>
+            <a:ext cx="3172968" cy="356616"/>
           </a:xfrm>
           <a:prstGeom prst="rect">
             <a:avLst/>
@@ -15487,7 +15491,7 @@
               <a:buNone/>
             </a:pPr>
             <a:r>
-              <a:rPr lang="en-US" sz="1120" dirty="0">
+              <a:rPr lang="en-US" sz="1040" dirty="0">
                 <a:solidFill>
                   <a:srgbClr val="17364A"/>
                 </a:solidFill>
@@ -15495,9 +15499,9 @@
                 <a:ea typeface="Aptos" pitchFamily="34" charset="-122"/>
                 <a:cs typeface="Aptos" pitchFamily="34" charset="-120"/>
               </a:rPr>
-              <a:t>A proposed AI use should move through documented review before it becomes an operational workflow.</a:t>
-            </a:r>
-            <a:endParaRPr lang="en-US" sz="1120" dirty="0"/>
+              <a:t>A proposed AI use should move through documented review before it.</a:t>
+            </a:r>
+            <a:endParaRPr lang="en-US" sz="1040" dirty="0"/>
           </a:p>
         </p:txBody>
       </p:sp>
@@ -15509,12 +15513,12 @@
         </p:nvSpPr>
         <p:spPr>
           <a:xfrm>
-            <a:off x="7635240" y="4184294"/>
-            <a:ext cx="3474720" cy="1466698"/>
+            <a:off x="7543800" y="4389120"/>
+            <a:ext cx="3611880" cy="1261872"/>
           </a:xfrm>
           <a:prstGeom prst="roundRect">
             <a:avLst>
-              <a:gd name="adj" fmla="val 7481"/>
+              <a:gd name="adj" fmla="val 8696"/>
             </a:avLst>
           </a:prstGeom>
           <a:solidFill>
@@ -15536,8 +15540,8 @@
         </p:nvSpPr>
         <p:spPr>
           <a:xfrm>
-            <a:off x="7799832" y="4330598"/>
-            <a:ext cx="3145536" cy="256032"/>
+            <a:off x="7708392" y="4517136"/>
+            <a:ext cx="3282696" cy="228600"/>
           </a:xfrm>
           <a:prstGeom prst="rect">
             <a:avLst/>
@@ -15553,7 +15557,7 @@
               <a:buNone/>
             </a:pPr>
             <a:r>
-              <a:rPr lang="en-US" sz="1300" b="1" dirty="0">
+              <a:rPr lang="en-US" sz="1220" b="1" dirty="0">
                 <a:solidFill>
                   <a:srgbClr val="0068B7"/>
                 </a:solidFill>
@@ -15563,7 +15567,7 @@
               </a:rPr>
               <a:t>What to document</a:t>
             </a:r>
-            <a:endParaRPr lang="en-US" sz="1300" dirty="0"/>
+            <a:endParaRPr lang="en-US" sz="1220" dirty="0"/>
           </a:p>
         </p:txBody>
       </p:sp>
@@ -15575,8 +15579,8 @@
         </p:nvSpPr>
         <p:spPr>
           <a:xfrm>
-            <a:off x="7799832" y="4659782"/>
-            <a:ext cx="3145536" cy="899770"/>
+            <a:off x="7708392" y="4828032"/>
+            <a:ext cx="3282696" cy="749808"/>
           </a:xfrm>
           <a:prstGeom prst="rect">
             <a:avLst/>
@@ -15594,7 +15598,7 @@
               <a:buNone/>
             </a:pPr>
             <a:r>
-              <a:rPr lang="en-US" sz="1320" dirty="0">
+              <a:rPr lang="en-US" sz="1220" dirty="0">
                 <a:solidFill>
                   <a:srgbClr val="17364A"/>
                 </a:solidFill>
@@ -15602,9 +15606,9 @@
                 <a:ea typeface="Aptos" pitchFamily="34" charset="-122"/>
                 <a:cs typeface="Aptos" pitchFamily="34" charset="-120"/>
               </a:rPr>
-              <a:t>Translate this concept into clear decision rights, review steps, documentation expectations, and escalation paths before an AI-supported workflow is approved.</a:t>
-            </a:r>
-            <a:endParaRPr lang="en-US" sz="1320" dirty="0"/>
+              <a:t>Translate this concept into clear decision rights, review steps, documentation.</a:t>
+            </a:r>
+            <a:endParaRPr lang="en-US" sz="1220" dirty="0"/>
           </a:p>
         </p:txBody>
       </p:sp>
@@ -15895,8 +15899,8 @@
         </p:nvSpPr>
         <p:spPr>
           <a:xfrm>
-            <a:off x="868680" y="1508760"/>
-            <a:ext cx="6309360" cy="4160520"/>
+            <a:off x="822960" y="1463040"/>
+            <a:ext cx="6565392" cy="4343400"/>
           </a:xfrm>
           <a:prstGeom prst="rect">
             <a:avLst/>
@@ -15914,7 +15918,7 @@
               <a:buNone/>
             </a:pPr>
             <a:r>
-              <a:rPr lang="en-US" sz="2100" dirty="0">
+              <a:rPr lang="en-US" sz="1920" dirty="0">
                 <a:solidFill>
                   <a:srgbClr val="003A63"/>
                 </a:solidFill>
@@ -15922,16 +15926,16 @@
                 <a:ea typeface="Aptos" pitchFamily="34" charset="-122"/>
                 <a:cs typeface="Aptos" pitchFamily="34" charset="-120"/>
               </a:rPr>
-              <a:t>• Public health agencies operate under legal authorities, public accountability obligations,.</a:t>
-            </a:r>
-            <a:endParaRPr lang="en-US" sz="2100" dirty="0"/>
-          </a:p>
-          <a:p>
-            <a:pPr indent="0" marL="0">
-              <a:buNone/>
-            </a:pPr>
-            <a:r>
-              <a:rPr lang="en-US" sz="2100" dirty="0">
+              <a:t>• Public health agencies operate under legal authorities, public.</a:t>
+            </a:r>
+            <a:endParaRPr lang="en-US" sz="1920" dirty="0"/>
+          </a:p>
+          <a:p>
+            <a:pPr indent="0" marL="0">
+              <a:buNone/>
+            </a:pPr>
+            <a:r>
+              <a:rPr lang="en-US" sz="1920" dirty="0">
                 <a:solidFill>
                   <a:srgbClr val="003A63"/>
                 </a:solidFill>
@@ -15941,14 +15945,14 @@
               </a:rPr>
               <a:t>• AI governance must therefore be more than a technology review process.</a:t>
             </a:r>
-            <a:endParaRPr lang="en-US" sz="2100" dirty="0"/>
-          </a:p>
-          <a:p>
-            <a:pPr indent="0" marL="0">
-              <a:buNone/>
-            </a:pPr>
-            <a:r>
-              <a:rPr lang="en-US" sz="2100" dirty="0">
+            <a:endParaRPr lang="en-US" sz="1920" dirty="0"/>
+          </a:p>
+          <a:p>
+            <a:pPr indent="0" marL="0">
+              <a:buNone/>
+            </a:pPr>
+            <a:r>
+              <a:rPr lang="en-US" sz="1920" dirty="0">
                 <a:solidFill>
                   <a:srgbClr val="003A63"/>
                 </a:solidFill>
@@ -15956,9 +15960,9 @@
                 <a:ea typeface="Aptos" pitchFamily="34" charset="-122"/>
                 <a:cs typeface="Aptos" pitchFamily="34" charset="-120"/>
               </a:rPr>
-              <a:t>• It must define how the agency decides which AI uses are acceptable, which safeguards are.</a:t>
-            </a:r>
-            <a:endParaRPr lang="en-US" sz="2100" dirty="0"/>
+              <a:t>• It must define how the agency decides which AI uses are acceptable, which.</a:t>
+            </a:r>
+            <a:endParaRPr lang="en-US" sz="1920" dirty="0"/>
           </a:p>
         </p:txBody>
       </p:sp>
@@ -15970,12 +15974,12 @@
         </p:nvSpPr>
         <p:spPr>
           <a:xfrm>
-            <a:off x="7635240" y="1325880"/>
-            <a:ext cx="3474720" cy="1255471"/>
+            <a:off x="7543800" y="1325880"/>
+            <a:ext cx="3611880" cy="1261872"/>
           </a:xfrm>
           <a:prstGeom prst="roundRect">
             <a:avLst>
-              <a:gd name="adj" fmla="val 8740"/>
+              <a:gd name="adj" fmla="val 8696"/>
             </a:avLst>
           </a:prstGeom>
           <a:solidFill>
@@ -15997,8 +16001,8 @@
         </p:nvSpPr>
         <p:spPr>
           <a:xfrm>
-            <a:off x="7799832" y="1472184"/>
-            <a:ext cx="3145536" cy="256032"/>
+            <a:off x="7708392" y="1453896"/>
+            <a:ext cx="3282696" cy="228600"/>
           </a:xfrm>
           <a:prstGeom prst="rect">
             <a:avLst/>
@@ -16014,7 +16018,7 @@
               <a:buNone/>
             </a:pPr>
             <a:r>
-              <a:rPr lang="en-US" sz="1300" b="1" dirty="0">
+              <a:rPr lang="en-US" sz="1220" b="1" dirty="0">
                 <a:solidFill>
                   <a:srgbClr val="0068B7"/>
                 </a:solidFill>
@@ -16024,7 +16028,7 @@
               </a:rPr>
               <a:t>Governance lens</a:t>
             </a:r>
-            <a:endParaRPr lang="en-US" sz="1300" dirty="0"/>
+            <a:endParaRPr lang="en-US" sz="1220" dirty="0"/>
           </a:p>
         </p:txBody>
       </p:sp>
@@ -16036,8 +16040,8 @@
         </p:nvSpPr>
         <p:spPr>
           <a:xfrm>
-            <a:off x="7799832" y="1801368"/>
-            <a:ext cx="3145536" cy="688543"/>
+            <a:off x="7708392" y="1764792"/>
+            <a:ext cx="3282696" cy="749808"/>
           </a:xfrm>
           <a:prstGeom prst="rect">
             <a:avLst/>
@@ -16055,7 +16059,7 @@
               <a:buNone/>
             </a:pPr>
             <a:r>
-              <a:rPr lang="en-US" sz="1320" dirty="0">
+              <a:rPr lang="en-US" sz="1220" dirty="0">
                 <a:solidFill>
                   <a:srgbClr val="17364A"/>
                 </a:solidFill>
@@ -16063,9 +16067,9 @@
                 <a:ea typeface="Aptos" pitchFamily="34" charset="-122"/>
                 <a:cs typeface="Aptos" pitchFamily="34" charset="-120"/>
               </a:rPr>
-              <a:t>Public health agencies operate under legal authorities, public accountability obligations, data-sharing.</a:t>
-            </a:r>
-            <a:endParaRPr lang="en-US" sz="1320" dirty="0"/>
+              <a:t>Public health agencies operate under legal authorities, public accountability.</a:t>
+            </a:r>
+            <a:endParaRPr lang="en-US" sz="1220" dirty="0"/>
           </a:p>
         </p:txBody>
       </p:sp>
@@ -16077,12 +16081,12 @@
         </p:nvSpPr>
         <p:spPr>
           <a:xfrm>
-            <a:off x="7635240" y="2718511"/>
-            <a:ext cx="3474720" cy="1328623"/>
+            <a:off x="7543800" y="2724912"/>
+            <a:ext cx="3611880" cy="1527048"/>
           </a:xfrm>
           <a:prstGeom prst="roundRect">
             <a:avLst>
-              <a:gd name="adj" fmla="val 8259"/>
+              <a:gd name="adj" fmla="val 7186"/>
             </a:avLst>
           </a:prstGeom>
           <a:solidFill>
@@ -16104,24 +16108,26 @@
         </p:nvSpPr>
         <p:spPr>
           <a:xfrm>
-            <a:off x="7799832" y="2846527"/>
-            <a:ext cx="3145536" cy="237744"/>
-          </a:xfrm>
-          <a:prstGeom prst="rect">
-            <a:avLst/>
-          </a:prstGeom>
-          <a:noFill/>
-          <a:ln/>
-        </p:spPr>
-        <p:txBody>
-          <a:bodyPr wrap="square" lIns="0" tIns="0" rIns="0" bIns="0" rtlCol="0" anchor="ctr"/>
-          <a:lstStyle/>
-          <a:p>
-            <a:pPr indent="0" marL="0">
-              <a:buNone/>
-            </a:pPr>
-            <a:r>
-              <a:rPr lang="en-US" sz="1250" b="1" dirty="0">
+            <a:off x="7708392" y="2852928"/>
+            <a:ext cx="3282696" cy="219456"/>
+          </a:xfrm>
+          <a:prstGeom prst="rect">
+            <a:avLst/>
+          </a:prstGeom>
+          <a:noFill/>
+          <a:ln/>
+        </p:spPr>
+        <p:txBody>
+          <a:bodyPr wrap="square" lIns="0" tIns="0" rIns="0" bIns="0" rtlCol="0" anchor="ctr">
+            <a:normAutofit/>
+          </a:bodyPr>
+          <a:lstStyle/>
+          <a:p>
+            <a:pPr indent="0" marL="0">
+              <a:buNone/>
+            </a:pPr>
+            <a:r>
+              <a:rPr lang="en-US" sz="1160" b="1" dirty="0">
                 <a:solidFill>
                   <a:srgbClr val="0068B7"/>
                 </a:solidFill>
@@ -16131,7 +16137,7 @@
               </a:rPr>
               <a:t>Governance pathway</a:t>
             </a:r>
-            <a:endParaRPr lang="en-US" sz="1250" dirty="0"/>
+            <a:endParaRPr lang="en-US" sz="1160" dirty="0"/>
           </a:p>
         </p:txBody>
       </p:sp>
@@ -16143,7 +16149,7 @@
         </p:nvSpPr>
         <p:spPr>
           <a:xfrm>
-            <a:off x="8763000" y="3399739"/>
+            <a:off x="8717280" y="3406140"/>
             <a:ext cx="164592" cy="0"/>
           </a:xfrm>
           <a:prstGeom prst="line">
@@ -16166,8 +16172,8 @@
         </p:nvSpPr>
         <p:spPr>
           <a:xfrm>
-            <a:off x="7872984" y="3248863"/>
-            <a:ext cx="890016" cy="301752"/>
+            <a:off x="7781544" y="3255264"/>
+            <a:ext cx="935736" cy="301752"/>
           </a:xfrm>
           <a:prstGeom prst="roundRect">
             <a:avLst>
@@ -16193,8 +16199,8 @@
         </p:nvSpPr>
         <p:spPr>
           <a:xfrm>
-            <a:off x="7909560" y="3322015"/>
-            <a:ext cx="816864" cy="146304"/>
+            <a:off x="7818120" y="3328416"/>
+            <a:ext cx="862584" cy="146304"/>
           </a:xfrm>
           <a:prstGeom prst="rect">
             <a:avLst/>
@@ -16234,7 +16240,7 @@
         </p:nvSpPr>
         <p:spPr>
           <a:xfrm>
-            <a:off x="9817608" y="3399739"/>
+            <a:off x="9817608" y="3406140"/>
             <a:ext cx="164592" cy="0"/>
           </a:xfrm>
           <a:prstGeom prst="line">
@@ -16257,8 +16263,8 @@
         </p:nvSpPr>
         <p:spPr>
           <a:xfrm>
-            <a:off x="8927592" y="3248863"/>
-            <a:ext cx="890016" cy="301752"/>
+            <a:off x="8881872" y="3255264"/>
+            <a:ext cx="935736" cy="301752"/>
           </a:xfrm>
           <a:prstGeom prst="roundRect">
             <a:avLst>
@@ -16284,8 +16290,8 @@
         </p:nvSpPr>
         <p:spPr>
           <a:xfrm>
-            <a:off x="8964168" y="3322015"/>
-            <a:ext cx="816864" cy="146304"/>
+            <a:off x="8918448" y="3328416"/>
+            <a:ext cx="862584" cy="146304"/>
           </a:xfrm>
           <a:prstGeom prst="rect">
             <a:avLst/>
@@ -16325,8 +16331,8 @@
         </p:nvSpPr>
         <p:spPr>
           <a:xfrm>
-            <a:off x="9982200" y="3248863"/>
-            <a:ext cx="890016" cy="301752"/>
+            <a:off x="9982200" y="3255264"/>
+            <a:ext cx="935736" cy="301752"/>
           </a:xfrm>
           <a:prstGeom prst="roundRect">
             <a:avLst>
@@ -16352,8 +16358,8 @@
         </p:nvSpPr>
         <p:spPr>
           <a:xfrm>
-            <a:off x="10018776" y="3322015"/>
-            <a:ext cx="816864" cy="146304"/>
+            <a:off x="10018776" y="3328416"/>
+            <a:ext cx="862584" cy="146304"/>
           </a:xfrm>
           <a:prstGeom prst="rect">
             <a:avLst/>
@@ -16393,8 +16399,8 @@
         </p:nvSpPr>
         <p:spPr>
           <a:xfrm>
-            <a:off x="7854696" y="3742639"/>
-            <a:ext cx="3035808" cy="158191"/>
+            <a:off x="7763256" y="3749040"/>
+            <a:ext cx="3172968" cy="356616"/>
           </a:xfrm>
           <a:prstGeom prst="rect">
             <a:avLst/>
@@ -16412,7 +16418,7 @@
               <a:buNone/>
             </a:pPr>
             <a:r>
-              <a:rPr lang="en-US" sz="1120" dirty="0">
+              <a:rPr lang="en-US" sz="1040" dirty="0">
                 <a:solidFill>
                   <a:srgbClr val="17364A"/>
                 </a:solidFill>
@@ -16420,9 +16426,9 @@
                 <a:ea typeface="Aptos" pitchFamily="34" charset="-122"/>
                 <a:cs typeface="Aptos" pitchFamily="34" charset="-120"/>
               </a:rPr>
-              <a:t>A proposed AI use should move through documented review before it becomes an operational workflow.</a:t>
-            </a:r>
-            <a:endParaRPr lang="en-US" sz="1120" dirty="0"/>
+              <a:t>A proposed AI use should move through documented review before it.</a:t>
+            </a:r>
+            <a:endParaRPr lang="en-US" sz="1040" dirty="0"/>
           </a:p>
         </p:txBody>
       </p:sp>
@@ -16434,12 +16440,12 @@
         </p:nvSpPr>
         <p:spPr>
           <a:xfrm>
-            <a:off x="7635240" y="4184294"/>
-            <a:ext cx="3474720" cy="1466698"/>
+            <a:off x="7543800" y="4389120"/>
+            <a:ext cx="3611880" cy="1261872"/>
           </a:xfrm>
           <a:prstGeom prst="roundRect">
             <a:avLst>
-              <a:gd name="adj" fmla="val 7481"/>
+              <a:gd name="adj" fmla="val 8696"/>
             </a:avLst>
           </a:prstGeom>
           <a:solidFill>
@@ -16461,8 +16467,8 @@
         </p:nvSpPr>
         <p:spPr>
           <a:xfrm>
-            <a:off x="7799832" y="4330598"/>
-            <a:ext cx="3145536" cy="256032"/>
+            <a:off x="7708392" y="4517136"/>
+            <a:ext cx="3282696" cy="228600"/>
           </a:xfrm>
           <a:prstGeom prst="rect">
             <a:avLst/>
@@ -16478,7 +16484,7 @@
               <a:buNone/>
             </a:pPr>
             <a:r>
-              <a:rPr lang="en-US" sz="1300" b="1" dirty="0">
+              <a:rPr lang="en-US" sz="1220" b="1" dirty="0">
                 <a:solidFill>
                   <a:srgbClr val="0068B7"/>
                 </a:solidFill>
@@ -16488,7 +16494,7 @@
               </a:rPr>
               <a:t>What to document</a:t>
             </a:r>
-            <a:endParaRPr lang="en-US" sz="1300" dirty="0"/>
+            <a:endParaRPr lang="en-US" sz="1220" dirty="0"/>
           </a:p>
         </p:txBody>
       </p:sp>
@@ -16500,8 +16506,8 @@
         </p:nvSpPr>
         <p:spPr>
           <a:xfrm>
-            <a:off x="7799832" y="4659782"/>
-            <a:ext cx="3145536" cy="899770"/>
+            <a:off x="7708392" y="4828032"/>
+            <a:ext cx="3282696" cy="749808"/>
           </a:xfrm>
           <a:prstGeom prst="rect">
             <a:avLst/>
@@ -16519,7 +16525,7 @@
               <a:buNone/>
             </a:pPr>
             <a:r>
-              <a:rPr lang="en-US" sz="1320" dirty="0">
+              <a:rPr lang="en-US" sz="1220" dirty="0">
                 <a:solidFill>
                   <a:srgbClr val="17364A"/>
                 </a:solidFill>
@@ -16527,9 +16533,9 @@
                 <a:ea typeface="Aptos" pitchFamily="34" charset="-122"/>
                 <a:cs typeface="Aptos" pitchFamily="34" charset="-120"/>
               </a:rPr>
-              <a:t>Translate this concept into clear decision rights, review steps, documentation expectations, and escalation paths before an AI-supported workflow is approved.</a:t>
-            </a:r>
-            <a:endParaRPr lang="en-US" sz="1320" dirty="0"/>
+              <a:t>Translate this concept into clear decision rights, review steps, documentation.</a:t>
+            </a:r>
+            <a:endParaRPr lang="en-US" sz="1220" dirty="0"/>
           </a:p>
         </p:txBody>
       </p:sp>
@@ -16820,8 +16826,8 @@
         </p:nvSpPr>
         <p:spPr>
           <a:xfrm>
-            <a:off x="868680" y="1508760"/>
-            <a:ext cx="6309360" cy="4160520"/>
+            <a:off x="822960" y="1463040"/>
+            <a:ext cx="6565392" cy="4343400"/>
           </a:xfrm>
           <a:prstGeom prst="rect">
             <a:avLst/>
@@ -16839,7 +16845,7 @@
               <a:buNone/>
             </a:pPr>
             <a:r>
-              <a:rPr lang="en-US" sz="2100" dirty="0">
+              <a:rPr lang="en-US" sz="1920" dirty="0">
                 <a:solidFill>
                   <a:srgbClr val="003A63"/>
                 </a:solidFill>
@@ -16847,16 +16853,16 @@
                 <a:ea typeface="Aptos" pitchFamily="34" charset="-122"/>
                 <a:cs typeface="Aptos" pitchFamily="34" charset="-120"/>
               </a:rPr>
-              <a:t>• A state health department wants to allow staff to use AI tools for program support, document.</a:t>
-            </a:r>
-            <a:endParaRPr lang="en-US" sz="2100" dirty="0"/>
-          </a:p>
-          <a:p>
-            <a:pPr indent="0" marL="0">
-              <a:buNone/>
-            </a:pPr>
-            <a:r>
-              <a:rPr lang="en-US" sz="2100" dirty="0">
+              <a:t>• A state health department wants to allow staff to use AI tools for program.</a:t>
+            </a:r>
+            <a:endParaRPr lang="en-US" sz="1920" dirty="0"/>
+          </a:p>
+          <a:p>
+            <a:pPr indent="0" marL="0">
+              <a:buNone/>
+            </a:pPr>
+            <a:r>
+              <a:rPr lang="en-US" sz="1920" dirty="0">
                 <a:solidFill>
                   <a:srgbClr val="003A63"/>
                 </a:solidFill>
@@ -16866,14 +16872,14 @@
               </a:rPr>
               <a:t>• Without a governance charter, each program may develop its own rules.</a:t>
             </a:r>
-            <a:endParaRPr lang="en-US" sz="2100" dirty="0"/>
-          </a:p>
-          <a:p>
-            <a:pPr indent="0" marL="0">
-              <a:buNone/>
-            </a:pPr>
-            <a:r>
-              <a:rPr lang="en-US" sz="2100" dirty="0">
+            <a:endParaRPr lang="en-US" sz="1920" dirty="0"/>
+          </a:p>
+          <a:p>
+            <a:pPr indent="0" marL="0">
+              <a:buNone/>
+            </a:pPr>
+            <a:r>
+              <a:rPr lang="en-US" sz="1920" dirty="0">
                 <a:solidFill>
                   <a:srgbClr val="003A63"/>
                 </a:solidFill>
@@ -16881,9 +16887,9 @@
                 <a:ea typeface="Aptos" pitchFamily="34" charset="-122"/>
                 <a:cs typeface="Aptos" pitchFamily="34" charset="-120"/>
               </a:rPr>
-              <a:t>• The communications office may require human review, the surveillance program may prohibit.</a:t>
-            </a:r>
-            <a:endParaRPr lang="en-US" sz="2100" dirty="0"/>
+              <a:t>• The communications office may require human review, the surveillance program.</a:t>
+            </a:r>
+            <a:endParaRPr lang="en-US" sz="1920" dirty="0"/>
           </a:p>
         </p:txBody>
       </p:sp>
@@ -16895,12 +16901,12 @@
         </p:nvSpPr>
         <p:spPr>
           <a:xfrm>
-            <a:off x="7635240" y="1325880"/>
-            <a:ext cx="3474720" cy="1255471"/>
+            <a:off x="7543800" y="1325880"/>
+            <a:ext cx="3611880" cy="1261872"/>
           </a:xfrm>
           <a:prstGeom prst="roundRect">
             <a:avLst>
-              <a:gd name="adj" fmla="val 8740"/>
+              <a:gd name="adj" fmla="val 8696"/>
             </a:avLst>
           </a:prstGeom>
           <a:solidFill>
@@ -16922,8 +16928,8 @@
         </p:nvSpPr>
         <p:spPr>
           <a:xfrm>
-            <a:off x="7799832" y="1472184"/>
-            <a:ext cx="3145536" cy="256032"/>
+            <a:off x="7708392" y="1453896"/>
+            <a:ext cx="3282696" cy="228600"/>
           </a:xfrm>
           <a:prstGeom prst="rect">
             <a:avLst/>
@@ -16939,7 +16945,7 @@
               <a:buNone/>
             </a:pPr>
             <a:r>
-              <a:rPr lang="en-US" sz="1300" b="1" dirty="0">
+              <a:rPr lang="en-US" sz="1220" b="1" dirty="0">
                 <a:solidFill>
                   <a:srgbClr val="0068B7"/>
                 </a:solidFill>
@@ -16949,7 +16955,7 @@
               </a:rPr>
               <a:t>Governance lens</a:t>
             </a:r>
-            <a:endParaRPr lang="en-US" sz="1300" dirty="0"/>
+            <a:endParaRPr lang="en-US" sz="1220" dirty="0"/>
           </a:p>
         </p:txBody>
       </p:sp>
@@ -16961,8 +16967,8 @@
         </p:nvSpPr>
         <p:spPr>
           <a:xfrm>
-            <a:off x="7799832" y="1801368"/>
-            <a:ext cx="3145536" cy="688543"/>
+            <a:off x="7708392" y="1764792"/>
+            <a:ext cx="3282696" cy="749808"/>
           </a:xfrm>
           <a:prstGeom prst="rect">
             <a:avLst/>
@@ -16980,7 +16986,7 @@
               <a:buNone/>
             </a:pPr>
             <a:r>
-              <a:rPr lang="en-US" sz="1320" dirty="0">
+              <a:rPr lang="en-US" sz="1220" dirty="0">
                 <a:solidFill>
                   <a:srgbClr val="17364A"/>
                 </a:solidFill>
@@ -16988,9 +16994,9 @@
                 <a:ea typeface="Aptos" pitchFamily="34" charset="-122"/>
                 <a:cs typeface="Aptos" pitchFamily="34" charset="-120"/>
               </a:rPr>
-              <a:t>A state health department wants to allow staff to use AI tools for program support, document review,.</a:t>
-            </a:r>
-            <a:endParaRPr lang="en-US" sz="1320" dirty="0"/>
+              <a:t>A state health department wants to allow staff to use AI tools for program.</a:t>
+            </a:r>
+            <a:endParaRPr lang="en-US" sz="1220" dirty="0"/>
           </a:p>
         </p:txBody>
       </p:sp>
@@ -17002,12 +17008,12 @@
         </p:nvSpPr>
         <p:spPr>
           <a:xfrm>
-            <a:off x="7635240" y="2718511"/>
-            <a:ext cx="3474720" cy="1328623"/>
+            <a:off x="7543800" y="2724912"/>
+            <a:ext cx="3611880" cy="1527048"/>
           </a:xfrm>
           <a:prstGeom prst="roundRect">
             <a:avLst>
-              <a:gd name="adj" fmla="val 8259"/>
+              <a:gd name="adj" fmla="val 7186"/>
             </a:avLst>
           </a:prstGeom>
           <a:solidFill>
@@ -17029,8 +17035,8 @@
         </p:nvSpPr>
         <p:spPr>
           <a:xfrm>
-            <a:off x="7799832" y="2864815"/>
-            <a:ext cx="3145536" cy="256032"/>
+            <a:off x="7708392" y="2852928"/>
+            <a:ext cx="3282696" cy="228600"/>
           </a:xfrm>
           <a:prstGeom prst="rect">
             <a:avLst/>
@@ -17046,7 +17052,7 @@
               <a:buNone/>
             </a:pPr>
             <a:r>
-              <a:rPr lang="en-US" sz="1300" b="1" dirty="0">
+              <a:rPr lang="en-US" sz="1220" b="1" dirty="0">
                 <a:solidFill>
                   <a:srgbClr val="0068B7"/>
                 </a:solidFill>
@@ -17056,7 +17062,7 @@
               </a:rPr>
               <a:t>Concept checkpoints</a:t>
             </a:r>
-            <a:endParaRPr lang="en-US" sz="1300" dirty="0"/>
+            <a:endParaRPr lang="en-US" sz="1220" dirty="0"/>
           </a:p>
         </p:txBody>
       </p:sp>
@@ -17068,8 +17074,8 @@
         </p:nvSpPr>
         <p:spPr>
           <a:xfrm>
-            <a:off x="7818120" y="3230575"/>
-            <a:ext cx="3090672" cy="670255"/>
+            <a:off x="7726680" y="3182112"/>
+            <a:ext cx="3227832" cy="960120"/>
           </a:xfrm>
           <a:prstGeom prst="rect">
             <a:avLst/>
@@ -17087,7 +17093,7 @@
               <a:buNone/>
             </a:pPr>
             <a:r>
-              <a:rPr lang="en-US" sz="1220" dirty="0">
+              <a:rPr lang="en-US" sz="1140" dirty="0">
                 <a:solidFill>
                   <a:srgbClr val="17364A"/>
                 </a:solidFill>
@@ -17095,16 +17101,16 @@
                 <a:ea typeface="Aptos" pitchFamily="34" charset="-122"/>
                 <a:cs typeface="Aptos" pitchFamily="34" charset="-120"/>
               </a:rPr>
-              <a:t>A state health department wants to allow staff to use AI tools for.</a:t>
-            </a:r>
-            <a:endParaRPr lang="en-US" sz="1220" dirty="0"/>
-          </a:p>
-          <a:p>
-            <a:pPr indent="0" marL="0">
-              <a:buNone/>
-            </a:pPr>
-            <a:r>
-              <a:rPr lang="en-US" sz="1220" dirty="0">
+              <a:t>A state health department wants to allow staff to.</a:t>
+            </a:r>
+            <a:endParaRPr lang="en-US" sz="1140" dirty="0"/>
+          </a:p>
+          <a:p>
+            <a:pPr indent="0" marL="0">
+              <a:buNone/>
+            </a:pPr>
+            <a:r>
+              <a:rPr lang="en-US" sz="1140" dirty="0">
                 <a:solidFill>
                   <a:srgbClr val="17364A"/>
                 </a:solidFill>
@@ -17112,16 +17118,16 @@
                 <a:ea typeface="Aptos" pitchFamily="34" charset="-122"/>
                 <a:cs typeface="Aptos" pitchFamily="34" charset="-120"/>
               </a:rPr>
-              <a:t>The communications office may require human review, the.</a:t>
-            </a:r>
-            <a:endParaRPr lang="en-US" sz="1220" dirty="0"/>
-          </a:p>
-          <a:p>
-            <a:pPr indent="0" marL="0">
-              <a:buNone/>
-            </a:pPr>
-            <a:r>
-              <a:rPr lang="en-US" sz="1220" dirty="0">
+              <a:t>The communications office may require human.</a:t>
+            </a:r>
+            <a:endParaRPr lang="en-US" sz="1140" dirty="0"/>
+          </a:p>
+          <a:p>
+            <a:pPr indent="0" marL="0">
+              <a:buNone/>
+            </a:pPr>
+            <a:r>
+              <a:rPr lang="en-US" sz="1140" dirty="0">
                 <a:solidFill>
                   <a:srgbClr val="17364A"/>
                 </a:solidFill>
@@ -17129,9 +17135,9 @@
                 <a:ea typeface="Aptos" pitchFamily="34" charset="-122"/>
                 <a:cs typeface="Aptos" pitchFamily="34" charset="-120"/>
               </a:rPr>
-              <a:t>A governance operating model brings these decisions into one.</a:t>
-            </a:r>
-            <a:endParaRPr lang="en-US" sz="1220" dirty="0"/>
+              <a:t>A governance operating model brings these.</a:t>
+            </a:r>
+            <a:endParaRPr lang="en-US" sz="1140" dirty="0"/>
           </a:p>
         </p:txBody>
       </p:sp>
@@ -17143,12 +17149,12 @@
         </p:nvSpPr>
         <p:spPr>
           <a:xfrm>
-            <a:off x="7635240" y="4184294"/>
-            <a:ext cx="3474720" cy="1466698"/>
+            <a:off x="7543800" y="4389120"/>
+            <a:ext cx="3611880" cy="1261872"/>
           </a:xfrm>
           <a:prstGeom prst="roundRect">
             <a:avLst>
-              <a:gd name="adj" fmla="val 7481"/>
+              <a:gd name="adj" fmla="val 8696"/>
             </a:avLst>
           </a:prstGeom>
           <a:solidFill>
@@ -17170,8 +17176,8 @@
         </p:nvSpPr>
         <p:spPr>
           <a:xfrm>
-            <a:off x="7799832" y="4330598"/>
-            <a:ext cx="3145536" cy="256032"/>
+            <a:off x="7708392" y="4517136"/>
+            <a:ext cx="3282696" cy="228600"/>
           </a:xfrm>
           <a:prstGeom prst="rect">
             <a:avLst/>
@@ -17187,7 +17193,7 @@
               <a:buNone/>
             </a:pPr>
             <a:r>
-              <a:rPr lang="en-US" sz="1300" b="1" dirty="0">
+              <a:rPr lang="en-US" sz="1220" b="1" dirty="0">
                 <a:solidFill>
                   <a:srgbClr val="0068B7"/>
                 </a:solidFill>
@@ -17197,7 +17203,7 @@
               </a:rPr>
               <a:t>What to document</a:t>
             </a:r>
-            <a:endParaRPr lang="en-US" sz="1300" dirty="0"/>
+            <a:endParaRPr lang="en-US" sz="1220" dirty="0"/>
           </a:p>
         </p:txBody>
       </p:sp>
@@ -17209,8 +17215,8 @@
         </p:nvSpPr>
         <p:spPr>
           <a:xfrm>
-            <a:off x="7799832" y="4659782"/>
-            <a:ext cx="3145536" cy="899770"/>
+            <a:off x="7708392" y="4828032"/>
+            <a:ext cx="3282696" cy="749808"/>
           </a:xfrm>
           <a:prstGeom prst="rect">
             <a:avLst/>
@@ -17228,7 +17234,7 @@
               <a:buNone/>
             </a:pPr>
             <a:r>
-              <a:rPr lang="en-US" sz="1320" dirty="0">
+              <a:rPr lang="en-US" sz="1220" dirty="0">
                 <a:solidFill>
                   <a:srgbClr val="17364A"/>
                 </a:solidFill>
@@ -17236,9 +17242,9 @@
                 <a:ea typeface="Aptos" pitchFamily="34" charset="-122"/>
                 <a:cs typeface="Aptos" pitchFamily="34" charset="-120"/>
               </a:rPr>
-              <a:t>Translate this concept into clear decision rights, review steps, documentation expectations, and escalation paths before an AI-supported workflow is approved.</a:t>
-            </a:r>
-            <a:endParaRPr lang="en-US" sz="1320" dirty="0"/>
+              <a:t>Translate this concept into clear decision rights, review steps, documentation.</a:t>
+            </a:r>
+            <a:endParaRPr lang="en-US" sz="1220" dirty="0"/>
           </a:p>
         </p:txBody>
       </p:sp>

--- a/downloads/presentations/modules/gov-400.pptx
+++ b/downloads/presentations/modules/gov-400.pptx
@@ -9430,7 +9430,7 @@
                 <a:ea typeface="Aptos" pitchFamily="34" charset="-122"/>
                 <a:cs typeface="Aptos" pitchFamily="34" charset="-120"/>
               </a:rPr>
-              <a:t>• 1. What is the strongest reason this module topic belongs in AI leadership.</a:t>
+              <a:t>1. What is the strongest reason this module topic belongs in AI leadership.</a:t>
             </a:r>
             <a:endParaRPr lang="en-US" sz="1920" dirty="0"/>
           </a:p>
@@ -9447,7 +9447,7 @@
                 <a:ea typeface="Aptos" pitchFamily="34" charset="-122"/>
                 <a:cs typeface="Aptos" pitchFamily="34" charset="-120"/>
               </a:rPr>
-              <a:t>• 2. Which practice best supports accountable public health AI governance?</a:t>
+              <a:t>2. Which practice best supports accountable public health AI governance?</a:t>
             </a:r>
             <a:endParaRPr lang="en-US" sz="1920" dirty="0"/>
           </a:p>
@@ -9464,7 +9464,7 @@
                 <a:ea typeface="Aptos" pitchFamily="34" charset="-122"/>
                 <a:cs typeface="Aptos" pitchFamily="34" charset="-120"/>
               </a:rPr>
-              <a:t>• 3. When should an AI use case be escalated for leadership or governance.</a:t>
+              <a:t>3. When should an AI use case be escalated for leadership or governance.</a:t>
             </a:r>
             <a:endParaRPr lang="en-US" sz="1920" dirty="0"/>
           </a:p>
@@ -9571,7 +9571,7 @@
                 <a:ea typeface="Aptos" pitchFamily="34" charset="-122"/>
                 <a:cs typeface="Aptos" pitchFamily="34" charset="-120"/>
               </a:rPr>
-              <a:t>1. What is the strongest reason this module topic belongs in AI leadership and.</a:t>
+              <a:t>What is the strongest reason this module topic belongs in AI leadership and.</a:t>
             </a:r>
             <a:endParaRPr lang="en-US" sz="1220" dirty="0"/>
           </a:p>
@@ -9678,41 +9678,7 @@
                 <a:ea typeface="Aptos" pitchFamily="34" charset="-122"/>
                 <a:cs typeface="Aptos" pitchFamily="34" charset="-120"/>
               </a:rPr>
-              <a:t>1.</a:t>
-            </a:r>
-            <a:endParaRPr lang="en-US" sz="1140" dirty="0"/>
-          </a:p>
-          <a:p>
-            <a:pPr indent="0" marL="0">
-              <a:buNone/>
-            </a:pPr>
-            <a:r>
-              <a:rPr lang="en-US" sz="1140" dirty="0">
-                <a:solidFill>
-                  <a:srgbClr val="17364A"/>
-                </a:solidFill>
-                <a:latin typeface="Aptos" pitchFamily="34" charset="0"/>
-                <a:ea typeface="Aptos" pitchFamily="34" charset="-122"/>
-                <a:cs typeface="Aptos" pitchFamily="34" charset="-120"/>
-              </a:rPr>
               <a:t>What is the strongest reason this module topic.</a:t>
-            </a:r>
-            <a:endParaRPr lang="en-US" sz="1140" dirty="0"/>
-          </a:p>
-          <a:p>
-            <a:pPr indent="0" marL="0">
-              <a:buNone/>
-            </a:pPr>
-            <a:r>
-              <a:rPr lang="en-US" sz="1140" dirty="0">
-                <a:solidFill>
-                  <a:srgbClr val="17364A"/>
-                </a:solidFill>
-                <a:latin typeface="Aptos" pitchFamily="34" charset="0"/>
-                <a:ea typeface="Aptos" pitchFamily="34" charset="-122"/>
-                <a:cs typeface="Aptos" pitchFamily="34" charset="-120"/>
-              </a:rPr>
-              <a:t>2.</a:t>
             </a:r>
             <a:endParaRPr lang="en-US" sz="1140" dirty="0"/>
           </a:p>
